--- a/docs/串連系統_簡報.pptx
+++ b/docs/串連系統_簡報.pptx
@@ -8012,7 +8012,7 @@
                 </a:solidFill>
                 <a:latin typeface="Microsoft JhengHei"/>
               </a:rPr>
-              <a:t>What-if 加員工會讓 Gini 上升</a:t>
+              <a:t>What-if 不能模擬「新聘」情境</a:t>
             </a:r>
           </a:p>
         </p:txBody>
@@ -8051,7 +8051,23 @@
                 </a:solidFill>
                 <a:latin typeface="Microsoft JhengHei"/>
               </a:rPr>
-              <a:t>因為新進員工負載 = 0 拉大分佈。v2.3 改成「重新指派」而非「新增」。</a:t>
+              <a:t>目前只支援「降低現有員工負載」（reassignment）。</a:t>
+            </a:r>
+          </a:p>
+          <a:p>
+            <a:pPr algn="l">
+              <a:lnSpc>
+                <a:spcPct val="120000"/>
+              </a:lnSpc>
+            </a:pPr>
+            <a:r>
+              <a:rPr sz="1200" b="0">
+                <a:solidFill>
+                  <a:srgbClr val="5A5F8A"/>
+                </a:solidFill>
+                <a:latin typeface="Microsoft JhengHei"/>
+              </a:rPr>
+              <a:t>如果想評估「招新人」要靠下版整合 hiring forecast。</a:t>
             </a:r>
           </a:p>
         </p:txBody>

--- a/docs/串連系統_簡報.pptx
+++ b/docs/串連系統_簡報.pptx
@@ -20,6 +20,7 @@
     <p:sldId id="268" r:id="rId19"/>
     <p:sldId id="269" r:id="rId20"/>
     <p:sldId id="270" r:id="rId21"/>
+    <p:sldId id="271" r:id="rId22"/>
   </p:sldIdLst>
   <p:sldSz cx="12191695" cy="6858000" type="screen4x3"/>
   <p:notesSz cx="6858000" cy="9144000"/>
@@ -4372,7 +4373,7 @@
                 </a:solidFill>
                 <a:latin typeface="Microsoft JhengHei"/>
               </a:rPr>
-              <a:t>10 / 15</a:t>
+              <a:t>10 / 16</a:t>
             </a:r>
           </a:p>
         </p:txBody>
@@ -5441,7 +5442,7 @@
                 </a:solidFill>
                 <a:latin typeface="Microsoft JhengHei"/>
               </a:rPr>
-              <a:t>11 / 15</a:t>
+              <a:t>11 / 16</a:t>
             </a:r>
           </a:p>
         </p:txBody>
@@ -5466,6 +5467,49 @@
       <p:grpSpPr/>
       <p:sp>
         <p:nvSpPr>
+          <p:cNvPr id="6" name="Rectangle 5"/>
+          <p:cNvSpPr/>
+          <p:nvPr/>
+        </p:nvSpPr>
+        <p:spPr>
+          <a:xfrm>
+            <a:off x="2560320" y="1920240"/>
+            <a:ext cx="1371600" cy="4069080"/>
+          </a:xfrm>
+          <a:prstGeom prst="rect">
+            <a:avLst/>
+          </a:prstGeom>
+          <a:solidFill>
+            <a:srgbClr val="0F172A"/>
+          </a:solidFill>
+          <a:ln>
+            <a:noFill/>
+          </a:ln>
+        </p:spPr>
+        <p:style>
+          <a:lnRef idx="1">
+            <a:schemeClr val="accent1"/>
+          </a:lnRef>
+          <a:fillRef idx="3">
+            <a:schemeClr val="accent1"/>
+          </a:fillRef>
+          <a:effectRef idx="2">
+            <a:schemeClr val="accent1"/>
+          </a:effectRef>
+          <a:fontRef idx="minor">
+            <a:schemeClr val="lt1"/>
+          </a:fontRef>
+        </p:style>
+        <p:txBody>
+          <a:bodyPr rtlCol="0" anchor="ctr"/>
+          <a:lstStyle/>
+          <a:p>
+            <a:pPr algn="ctr"/>
+          </a:p>
+        </p:txBody>
+      </p:sp>
+      <p:sp>
+        <p:nvSpPr>
           <p:cNvPr id="2" name="Rectangle 1"/>
           <p:cNvSpPr/>
           <p:nvPr/>
@@ -5559,32 +5603,32 @@
         <p:spPr>
           <a:xfrm>
             <a:off x="731520" y="548640"/>
-            <a:ext cx="7315200" cy="731520"/>
-          </a:xfrm>
-          <a:prstGeom prst="rect">
-            <a:avLst/>
-          </a:prstGeom>
-          <a:noFill/>
-        </p:spPr>
-        <p:txBody>
-          <a:bodyPr wrap="square" lIns="0" rIns="0" tIns="0" bIns="0" anchor="t">
-            <a:spAutoFit/>
-          </a:bodyPr>
-          <a:lstStyle/>
-          <a:p>
-            <a:pPr algn="l">
-              <a:lnSpc>
-                <a:spcPct val="120000"/>
-              </a:lnSpc>
-            </a:pPr>
-            <a:r>
-              <a:rPr sz="4400" b="1">
-                <a:solidFill>
-                  <a:srgbClr val="0F172A"/>
-                </a:solidFill>
-                <a:latin typeface="Microsoft JhengHei"/>
-              </a:rPr>
-              <a:t>Tech Stack</a:t>
+            <a:ext cx="9144000" cy="731520"/>
+          </a:xfrm>
+          <a:prstGeom prst="rect">
+            <a:avLst/>
+          </a:prstGeom>
+          <a:noFill/>
+        </p:spPr>
+        <p:txBody>
+          <a:bodyPr wrap="square" lIns="0" rIns="0" tIns="0" bIns="0" anchor="t">
+            <a:spAutoFit/>
+          </a:bodyPr>
+          <a:lstStyle/>
+          <a:p>
+            <a:pPr algn="l">
+              <a:lnSpc>
+                <a:spcPct val="120000"/>
+              </a:lnSpc>
+            </a:pPr>
+            <a:r>
+              <a:rPr sz="3600" b="1">
+                <a:solidFill>
+                  <a:srgbClr val="0F172A"/>
+                </a:solidFill>
+                <a:latin typeface="Microsoft JhengHei"/>
+              </a:rPr>
+              <a:t>為什麼不用 Asana / Notion / Viva？</a:t>
             </a:r>
           </a:p>
         </p:txBody>
@@ -5597,58 +5641,345 @@
         </p:nvSpPr>
         <p:spPr>
           <a:xfrm>
-            <a:off x="731520" y="1325880"/>
-            <a:ext cx="10058400" cy="548640"/>
-          </a:xfrm>
-          <a:prstGeom prst="rect">
-            <a:avLst/>
-          </a:prstGeom>
-          <a:noFill/>
-        </p:spPr>
-        <p:txBody>
-          <a:bodyPr wrap="square" lIns="0" rIns="0" tIns="0" bIns="0" anchor="t">
-            <a:spAutoFit/>
-          </a:bodyPr>
-          <a:lstStyle/>
-          <a:p>
-            <a:pPr algn="l">
-              <a:lnSpc>
-                <a:spcPct val="120000"/>
-              </a:lnSpc>
-            </a:pPr>
-            <a:r>
-              <a:rPr sz="1800" b="0">
+            <a:off x="731520" y="1234440"/>
+            <a:ext cx="10972800" cy="457200"/>
+          </a:xfrm>
+          <a:prstGeom prst="rect">
+            <a:avLst/>
+          </a:prstGeom>
+          <a:noFill/>
+        </p:spPr>
+        <p:txBody>
+          <a:bodyPr wrap="square" lIns="0" rIns="0" tIns="0" bIns="0" anchor="t">
+            <a:spAutoFit/>
+          </a:bodyPr>
+          <a:lstStyle/>
+          <a:p>
+            <a:pPr algn="l">
+              <a:lnSpc>
+                <a:spcPct val="120000"/>
+              </a:lnSpc>
+            </a:pPr>
+            <a:r>
+              <a:rPr sz="1500" b="0">
                 <a:solidFill>
                   <a:srgbClr val="64748B"/>
                 </a:solidFill>
                 <a:latin typeface="Microsoft JhengHei"/>
               </a:rPr>
-              <a:t>前端即時 · 後端輕量 · 雲端託管</a:t>
-            </a:r>
-          </a:p>
-        </p:txBody>
-      </p:sp>
-      <p:sp>
-        <p:nvSpPr>
-          <p:cNvPr id="6" name="Rounded Rectangle 5"/>
+              <a:t>現成工具解任務、卻不解「決策」。</a:t>
+            </a:r>
+          </a:p>
+        </p:txBody>
+      </p:sp>
+      <p:sp>
+        <p:nvSpPr>
+          <p:cNvPr id="7" name="TextBox 6"/>
+          <p:cNvSpPr txBox="1"/>
+          <p:nvPr/>
+        </p:nvSpPr>
+        <p:spPr>
+          <a:xfrm>
+            <a:off x="731520" y="1920240"/>
+            <a:ext cx="1828800" cy="502920"/>
+          </a:xfrm>
+          <a:prstGeom prst="rect">
+            <a:avLst/>
+          </a:prstGeom>
+          <a:noFill/>
+        </p:spPr>
+        <p:txBody>
+          <a:bodyPr wrap="square" lIns="0" rIns="0" tIns="0" bIns="0" anchor="ctr">
+            <a:spAutoFit/>
+          </a:bodyPr>
+          <a:lstStyle/>
+          <a:p>
+            <a:pPr algn="ctr">
+              <a:lnSpc>
+                <a:spcPct val="110000"/>
+              </a:lnSpc>
+            </a:pPr>
+            <a:r>
+              <a:rPr sz="1200" b="1">
+                <a:solidFill>
+                  <a:srgbClr val="0F172A"/>
+                </a:solidFill>
+                <a:latin typeface="Microsoft JhengHei"/>
+              </a:rPr>
+              <a:t/>
+            </a:r>
+          </a:p>
+        </p:txBody>
+      </p:sp>
+      <p:sp>
+        <p:nvSpPr>
+          <p:cNvPr id="8" name="TextBox 7"/>
+          <p:cNvSpPr txBox="1"/>
+          <p:nvPr/>
+        </p:nvSpPr>
+        <p:spPr>
+          <a:xfrm>
+            <a:off x="2560320" y="1920240"/>
+            <a:ext cx="1371600" cy="502920"/>
+          </a:xfrm>
+          <a:prstGeom prst="rect">
+            <a:avLst/>
+          </a:prstGeom>
+          <a:noFill/>
+        </p:spPr>
+        <p:txBody>
+          <a:bodyPr wrap="square" lIns="0" rIns="0" tIns="0" bIns="0" anchor="ctr">
+            <a:spAutoFit/>
+          </a:bodyPr>
+          <a:lstStyle/>
+          <a:p>
+            <a:pPr algn="ctr">
+              <a:lnSpc>
+                <a:spcPct val="110000"/>
+              </a:lnSpc>
+            </a:pPr>
+            <a:r>
+              <a:rPr sz="1200" b="1">
+                <a:solidFill>
+                  <a:srgbClr val="FFFFFF"/>
+                </a:solidFill>
+                <a:latin typeface="Microsoft JhengHei"/>
+              </a:rPr>
+              <a:t>串連系統</a:t>
+            </a:r>
+          </a:p>
+        </p:txBody>
+      </p:sp>
+      <p:sp>
+        <p:nvSpPr>
+          <p:cNvPr id="9" name="TextBox 8"/>
+          <p:cNvSpPr txBox="1"/>
+          <p:nvPr/>
+        </p:nvSpPr>
+        <p:spPr>
+          <a:xfrm>
+            <a:off x="3931920" y="1920240"/>
+            <a:ext cx="1280160" cy="502920"/>
+          </a:xfrm>
+          <a:prstGeom prst="rect">
+            <a:avLst/>
+          </a:prstGeom>
+          <a:noFill/>
+        </p:spPr>
+        <p:txBody>
+          <a:bodyPr wrap="square" lIns="0" rIns="0" tIns="0" bIns="0" anchor="ctr">
+            <a:spAutoFit/>
+          </a:bodyPr>
+          <a:lstStyle/>
+          <a:p>
+            <a:pPr algn="ctr">
+              <a:lnSpc>
+                <a:spcPct val="110000"/>
+              </a:lnSpc>
+            </a:pPr>
+            <a:r>
+              <a:rPr sz="1200" b="1">
+                <a:solidFill>
+                  <a:srgbClr val="0F172A"/>
+                </a:solidFill>
+                <a:latin typeface="Microsoft JhengHei"/>
+              </a:rPr>
+              <a:t>Notion</a:t>
+            </a:r>
+          </a:p>
+        </p:txBody>
+      </p:sp>
+      <p:sp>
+        <p:nvSpPr>
+          <p:cNvPr id="10" name="TextBox 9"/>
+          <p:cNvSpPr txBox="1"/>
+          <p:nvPr/>
+        </p:nvSpPr>
+        <p:spPr>
+          <a:xfrm>
+            <a:off x="5212080" y="1920240"/>
+            <a:ext cx="1280160" cy="502920"/>
+          </a:xfrm>
+          <a:prstGeom prst="rect">
+            <a:avLst/>
+          </a:prstGeom>
+          <a:noFill/>
+        </p:spPr>
+        <p:txBody>
+          <a:bodyPr wrap="square" lIns="0" rIns="0" tIns="0" bIns="0" anchor="ctr">
+            <a:spAutoFit/>
+          </a:bodyPr>
+          <a:lstStyle/>
+          <a:p>
+            <a:pPr algn="ctr">
+              <a:lnSpc>
+                <a:spcPct val="110000"/>
+              </a:lnSpc>
+            </a:pPr>
+            <a:r>
+              <a:rPr sz="1200" b="1">
+                <a:solidFill>
+                  <a:srgbClr val="0F172A"/>
+                </a:solidFill>
+                <a:latin typeface="Microsoft JhengHei"/>
+              </a:rPr>
+              <a:t>Asana</a:t>
+            </a:r>
+          </a:p>
+        </p:txBody>
+      </p:sp>
+      <p:sp>
+        <p:nvSpPr>
+          <p:cNvPr id="11" name="TextBox 10"/>
+          <p:cNvSpPr txBox="1"/>
+          <p:nvPr/>
+        </p:nvSpPr>
+        <p:spPr>
+          <a:xfrm>
+            <a:off x="6492240" y="1920240"/>
+            <a:ext cx="1280160" cy="502920"/>
+          </a:xfrm>
+          <a:prstGeom prst="rect">
+            <a:avLst/>
+          </a:prstGeom>
+          <a:noFill/>
+        </p:spPr>
+        <p:txBody>
+          <a:bodyPr wrap="square" lIns="0" rIns="0" tIns="0" bIns="0" anchor="ctr">
+            <a:spAutoFit/>
+          </a:bodyPr>
+          <a:lstStyle/>
+          <a:p>
+            <a:pPr algn="ctr">
+              <a:lnSpc>
+                <a:spcPct val="110000"/>
+              </a:lnSpc>
+            </a:pPr>
+            <a:r>
+              <a:rPr sz="1200" b="1">
+                <a:solidFill>
+                  <a:srgbClr val="0F172A"/>
+                </a:solidFill>
+                <a:latin typeface="Microsoft JhengHei"/>
+              </a:rPr>
+              <a:t>15Five</a:t>
+            </a:r>
+          </a:p>
+        </p:txBody>
+      </p:sp>
+      <p:sp>
+        <p:nvSpPr>
+          <p:cNvPr id="12" name="TextBox 11"/>
+          <p:cNvSpPr txBox="1"/>
+          <p:nvPr/>
+        </p:nvSpPr>
+        <p:spPr>
+          <a:xfrm>
+            <a:off x="7772400" y="1920240"/>
+            <a:ext cx="1280160" cy="502920"/>
+          </a:xfrm>
+          <a:prstGeom prst="rect">
+            <a:avLst/>
+          </a:prstGeom>
+          <a:noFill/>
+        </p:spPr>
+        <p:txBody>
+          <a:bodyPr wrap="square" lIns="0" rIns="0" tIns="0" bIns="0" anchor="ctr">
+            <a:spAutoFit/>
+          </a:bodyPr>
+          <a:lstStyle/>
+          <a:p>
+            <a:pPr algn="ctr">
+              <a:lnSpc>
+                <a:spcPct val="110000"/>
+              </a:lnSpc>
+            </a:pPr>
+            <a:r>
+              <a:rPr sz="1200" b="1">
+                <a:solidFill>
+                  <a:srgbClr val="0F172A"/>
+                </a:solidFill>
+                <a:latin typeface="Microsoft JhengHei"/>
+              </a:rPr>
+              <a:t>MS Viva</a:t>
+            </a:r>
+          </a:p>
+        </p:txBody>
+      </p:sp>
+      <p:sp>
+        <p:nvSpPr>
+          <p:cNvPr id="13" name="TextBox 12"/>
+          <p:cNvSpPr txBox="1"/>
+          <p:nvPr/>
+        </p:nvSpPr>
+        <p:spPr>
+          <a:xfrm>
+            <a:off x="9052560" y="1920240"/>
+            <a:ext cx="1463040" cy="502920"/>
+          </a:xfrm>
+          <a:prstGeom prst="rect">
+            <a:avLst/>
+          </a:prstGeom>
+          <a:noFill/>
+        </p:spPr>
+        <p:txBody>
+          <a:bodyPr wrap="square" lIns="0" rIns="0" tIns="0" bIns="0" anchor="ctr">
+            <a:spAutoFit/>
+          </a:bodyPr>
+          <a:lstStyle/>
+          <a:p>
+            <a:pPr algn="ctr">
+              <a:lnSpc>
+                <a:spcPct val="110000"/>
+              </a:lnSpc>
+            </a:pPr>
+            <a:r>
+              <a:rPr sz="1200" b="1">
+                <a:solidFill>
+                  <a:srgbClr val="0F172A"/>
+                </a:solidFill>
+                <a:latin typeface="Microsoft JhengHei"/>
+              </a:rPr>
+              <a:t>現狀</a:t>
+            </a:r>
+          </a:p>
+          <a:p>
+            <a:pPr algn="ctr">
+              <a:lnSpc>
+                <a:spcPct val="110000"/>
+              </a:lnSpc>
+            </a:pPr>
+            <a:r>
+              <a:rPr sz="1200" b="1">
+                <a:solidFill>
+                  <a:srgbClr val="0F172A"/>
+                </a:solidFill>
+                <a:latin typeface="Microsoft JhengHei"/>
+              </a:rPr>
+              <a:t>(Excel+Line)</a:t>
+            </a:r>
+          </a:p>
+        </p:txBody>
+      </p:sp>
+      <p:sp>
+        <p:nvSpPr>
+          <p:cNvPr id="14" name="Rectangle 13"/>
           <p:cNvSpPr/>
           <p:nvPr/>
         </p:nvSpPr>
         <p:spPr>
           <a:xfrm>
-            <a:off x="518007" y="2194560"/>
-            <a:ext cx="2651760" cy="3840480"/>
-          </a:xfrm>
-          <a:prstGeom prst="roundRect">
-            <a:avLst>
-              <a:gd name="adj" fmla="val 6000"/>
-            </a:avLst>
-          </a:prstGeom>
-          <a:noFill/>
-          <a:ln w="9525">
-            <a:solidFill>
-              <a:srgbClr val="E2E8F0"/>
-            </a:solidFill>
+            <a:off x="731520" y="2423160"/>
+            <a:ext cx="9784080" cy="12700"/>
+          </a:xfrm>
+          <a:prstGeom prst="rect">
+            <a:avLst/>
+          </a:prstGeom>
+          <a:solidFill>
+            <a:srgbClr val="0F172A"/>
+          </a:solidFill>
+          <a:ln>
+            <a:noFill/>
           </a:ln>
         </p:spPr>
         <p:style>
@@ -5675,193 +6006,296 @@
       </p:sp>
       <p:sp>
         <p:nvSpPr>
-          <p:cNvPr id="7" name="TextBox 6"/>
-          <p:cNvSpPr txBox="1"/>
-          <p:nvPr/>
-        </p:nvSpPr>
-        <p:spPr>
-          <a:xfrm>
-            <a:off x="792327" y="2468880"/>
-            <a:ext cx="2651760" cy="457200"/>
-          </a:xfrm>
-          <a:prstGeom prst="rect">
-            <a:avLst/>
-          </a:prstGeom>
-          <a:noFill/>
-        </p:spPr>
-        <p:txBody>
-          <a:bodyPr wrap="square" lIns="0" rIns="0" tIns="0" bIns="0" anchor="t">
-            <a:spAutoFit/>
-          </a:bodyPr>
-          <a:lstStyle/>
-          <a:p>
-            <a:pPr algn="l">
-              <a:lnSpc>
-                <a:spcPct val="120000"/>
-              </a:lnSpc>
-            </a:pPr>
-            <a:r>
-              <a:rPr sz="2200" b="1">
-                <a:solidFill>
-                  <a:srgbClr val="0F172A"/>
-                </a:solidFill>
-                <a:latin typeface="Microsoft JhengHei"/>
-              </a:rPr>
-              <a:t>01</a:t>
-            </a:r>
-          </a:p>
-        </p:txBody>
-      </p:sp>
-      <p:sp>
-        <p:nvSpPr>
-          <p:cNvPr id="8" name="TextBox 7"/>
-          <p:cNvSpPr txBox="1"/>
-          <p:nvPr/>
-        </p:nvSpPr>
-        <p:spPr>
-          <a:xfrm>
-            <a:off x="792327" y="2971800"/>
-            <a:ext cx="2103120" cy="548640"/>
-          </a:xfrm>
-          <a:prstGeom prst="rect">
-            <a:avLst/>
-          </a:prstGeom>
-          <a:noFill/>
-        </p:spPr>
-        <p:txBody>
-          <a:bodyPr wrap="square" lIns="0" rIns="0" tIns="0" bIns="0" anchor="t">
-            <a:spAutoFit/>
-          </a:bodyPr>
-          <a:lstStyle/>
-          <a:p>
-            <a:pPr algn="l">
-              <a:lnSpc>
-                <a:spcPct val="120000"/>
-              </a:lnSpc>
-            </a:pPr>
-            <a:r>
-              <a:rPr sz="2200" b="1">
-                <a:solidFill>
-                  <a:srgbClr val="0F172A"/>
-                </a:solidFill>
-                <a:latin typeface="Microsoft JhengHei"/>
-              </a:rPr>
-              <a:t>前端</a:t>
-            </a:r>
-          </a:p>
-        </p:txBody>
-      </p:sp>
-      <p:cxnSp>
-        <p:nvCxnSpPr>
-          <p:cNvPr id="9" name="Connector 8"/>
-          <p:cNvCxnSpPr/>
-          <p:nvPr/>
-        </p:nvCxnSpPr>
-        <p:spPr>
-          <a:xfrm>
-            <a:off x="792327" y="3611880"/>
-            <a:ext cx="822960" cy="0"/>
-          </a:xfrm>
-          <a:prstGeom prst="line">
-            <a:avLst/>
-          </a:prstGeom>
-          <a:ln w="25400">
-            <a:solidFill>
-              <a:srgbClr val="0F172A"/>
-            </a:solidFill>
-          </a:ln>
-        </p:spPr>
-        <p:style>
-          <a:lnRef idx="2">
-            <a:schemeClr val="accent1"/>
-          </a:lnRef>
-          <a:fillRef idx="0">
-            <a:schemeClr val="accent1"/>
-          </a:fillRef>
-          <a:effectRef idx="1">
-            <a:schemeClr val="accent1"/>
-          </a:effectRef>
-          <a:fontRef idx="minor">
-            <a:schemeClr val="tx1"/>
-          </a:fontRef>
-        </p:style>
-      </p:cxnSp>
-      <p:sp>
-        <p:nvSpPr>
-          <p:cNvPr id="10" name="TextBox 9"/>
-          <p:cNvSpPr txBox="1"/>
-          <p:nvPr/>
-        </p:nvSpPr>
-        <p:spPr>
-          <a:xfrm>
-            <a:off x="792327" y="3794760"/>
-            <a:ext cx="2103120" cy="2194560"/>
-          </a:xfrm>
-          <a:prstGeom prst="rect">
-            <a:avLst/>
-          </a:prstGeom>
-          <a:noFill/>
-        </p:spPr>
-        <p:txBody>
-          <a:bodyPr wrap="square" lIns="0" rIns="0" tIns="0" bIns="0" anchor="t">
-            <a:spAutoFit/>
-          </a:bodyPr>
-          <a:lstStyle/>
-          <a:p>
-            <a:pPr algn="l">
-              <a:lnSpc>
-                <a:spcPct val="150000"/>
-              </a:lnSpc>
-            </a:pPr>
-            <a:r>
-              <a:rPr sz="1200" b="0">
-                <a:solidFill>
-                  <a:srgbClr val="0F172A"/>
-                </a:solidFill>
-                <a:latin typeface="Microsoft JhengHei"/>
-              </a:rPr>
-              <a:t>React 19 · TypeScript · Vite 6</a:t>
-            </a:r>
-          </a:p>
-          <a:p>
-            <a:pPr algn="l">
-              <a:lnSpc>
-                <a:spcPct val="150000"/>
-              </a:lnSpc>
-            </a:pPr>
-            <a:r>
-              <a:rPr sz="1200" b="0">
-                <a:solidFill>
-                  <a:srgbClr val="0F172A"/>
-                </a:solidFill>
-                <a:latin typeface="Microsoft JhengHei"/>
-              </a:rPr>
-              <a:t>Tailwind v4 · Recharts · Framer Motion</a:t>
-            </a:r>
-          </a:p>
-        </p:txBody>
-      </p:sp>
-      <p:sp>
-        <p:nvSpPr>
-          <p:cNvPr id="11" name="Rounded Rectangle 10"/>
+          <p:cNvPr id="15" name="TextBox 14"/>
+          <p:cNvSpPr txBox="1"/>
+          <p:nvPr/>
+        </p:nvSpPr>
+        <p:spPr>
+          <a:xfrm>
+            <a:off x="731520" y="2468880"/>
+            <a:ext cx="1828800" cy="502920"/>
+          </a:xfrm>
+          <a:prstGeom prst="rect">
+            <a:avLst/>
+          </a:prstGeom>
+          <a:noFill/>
+        </p:spPr>
+        <p:txBody>
+          <a:bodyPr wrap="square" lIns="0" rIns="0" tIns="0" bIns="0" anchor="ctr">
+            <a:spAutoFit/>
+          </a:bodyPr>
+          <a:lstStyle/>
+          <a:p>
+            <a:pPr algn="l">
+              <a:lnSpc>
+                <a:spcPct val="120000"/>
+              </a:lnSpc>
+            </a:pPr>
+            <a:r>
+              <a:rPr sz="1200" b="1">
+                <a:solidFill>
+                  <a:srgbClr val="0F172A"/>
+                </a:solidFill>
+                <a:latin typeface="Microsoft JhengHei"/>
+              </a:rPr>
+              <a:t>員工負載量化</a:t>
+            </a:r>
+          </a:p>
+        </p:txBody>
+      </p:sp>
+      <p:sp>
+        <p:nvSpPr>
+          <p:cNvPr id="16" name="TextBox 15"/>
+          <p:cNvSpPr txBox="1"/>
+          <p:nvPr/>
+        </p:nvSpPr>
+        <p:spPr>
+          <a:xfrm>
+            <a:off x="2560320" y="2468880"/>
+            <a:ext cx="1371600" cy="502920"/>
+          </a:xfrm>
+          <a:prstGeom prst="rect">
+            <a:avLst/>
+          </a:prstGeom>
+          <a:noFill/>
+        </p:spPr>
+        <p:txBody>
+          <a:bodyPr wrap="square" lIns="0" rIns="0" tIns="0" bIns="0" anchor="ctr">
+            <a:spAutoFit/>
+          </a:bodyPr>
+          <a:lstStyle/>
+          <a:p>
+            <a:pPr algn="ctr">
+              <a:lnSpc>
+                <a:spcPct val="120000"/>
+              </a:lnSpc>
+            </a:pPr>
+            <a:r>
+              <a:rPr sz="1800" b="1">
+                <a:solidFill>
+                  <a:srgbClr val="FFFFFF"/>
+                </a:solidFill>
+                <a:latin typeface="Microsoft JhengHei"/>
+              </a:rPr>
+              <a:t>✓</a:t>
+            </a:r>
+          </a:p>
+        </p:txBody>
+      </p:sp>
+      <p:sp>
+        <p:nvSpPr>
+          <p:cNvPr id="17" name="TextBox 16"/>
+          <p:cNvSpPr txBox="1"/>
+          <p:nvPr/>
+        </p:nvSpPr>
+        <p:spPr>
+          <a:xfrm>
+            <a:off x="3931920" y="2468880"/>
+            <a:ext cx="1280160" cy="502920"/>
+          </a:xfrm>
+          <a:prstGeom prst="rect">
+            <a:avLst/>
+          </a:prstGeom>
+          <a:noFill/>
+        </p:spPr>
+        <p:txBody>
+          <a:bodyPr wrap="square" lIns="0" rIns="0" tIns="0" bIns="0" anchor="ctr">
+            <a:spAutoFit/>
+          </a:bodyPr>
+          <a:lstStyle/>
+          <a:p>
+            <a:pPr algn="ctr">
+              <a:lnSpc>
+                <a:spcPct val="120000"/>
+              </a:lnSpc>
+            </a:pPr>
+            <a:r>
+              <a:rPr sz="1600" b="0">
+                <a:solidFill>
+                  <a:srgbClr val="64748B"/>
+                </a:solidFill>
+                <a:latin typeface="Microsoft JhengHei"/>
+              </a:rPr>
+              <a:t>✗</a:t>
+            </a:r>
+          </a:p>
+        </p:txBody>
+      </p:sp>
+      <p:sp>
+        <p:nvSpPr>
+          <p:cNvPr id="18" name="TextBox 17"/>
+          <p:cNvSpPr txBox="1"/>
+          <p:nvPr/>
+        </p:nvSpPr>
+        <p:spPr>
+          <a:xfrm>
+            <a:off x="5212080" y="2468880"/>
+            <a:ext cx="1280160" cy="502920"/>
+          </a:xfrm>
+          <a:prstGeom prst="rect">
+            <a:avLst/>
+          </a:prstGeom>
+          <a:noFill/>
+        </p:spPr>
+        <p:txBody>
+          <a:bodyPr wrap="square" lIns="0" rIns="0" tIns="0" bIns="0" anchor="ctr">
+            <a:spAutoFit/>
+          </a:bodyPr>
+          <a:lstStyle/>
+          <a:p>
+            <a:pPr algn="ctr">
+              <a:lnSpc>
+                <a:spcPct val="120000"/>
+              </a:lnSpc>
+            </a:pPr>
+            <a:r>
+              <a:rPr sz="1600" b="0">
+                <a:solidFill>
+                  <a:srgbClr val="64748B"/>
+                </a:solidFill>
+                <a:latin typeface="Microsoft JhengHei"/>
+              </a:rPr>
+              <a:t>△</a:t>
+            </a:r>
+          </a:p>
+        </p:txBody>
+      </p:sp>
+      <p:sp>
+        <p:nvSpPr>
+          <p:cNvPr id="19" name="TextBox 18"/>
+          <p:cNvSpPr txBox="1"/>
+          <p:nvPr/>
+        </p:nvSpPr>
+        <p:spPr>
+          <a:xfrm>
+            <a:off x="6492240" y="2468880"/>
+            <a:ext cx="1280160" cy="502920"/>
+          </a:xfrm>
+          <a:prstGeom prst="rect">
+            <a:avLst/>
+          </a:prstGeom>
+          <a:noFill/>
+        </p:spPr>
+        <p:txBody>
+          <a:bodyPr wrap="square" lIns="0" rIns="0" tIns="0" bIns="0" anchor="ctr">
+            <a:spAutoFit/>
+          </a:bodyPr>
+          <a:lstStyle/>
+          <a:p>
+            <a:pPr algn="ctr">
+              <a:lnSpc>
+                <a:spcPct val="120000"/>
+              </a:lnSpc>
+            </a:pPr>
+            <a:r>
+              <a:rPr sz="1600" b="0">
+                <a:solidFill>
+                  <a:srgbClr val="64748B"/>
+                </a:solidFill>
+                <a:latin typeface="Microsoft JhengHei"/>
+              </a:rPr>
+              <a:t>△</a:t>
+            </a:r>
+          </a:p>
+        </p:txBody>
+      </p:sp>
+      <p:sp>
+        <p:nvSpPr>
+          <p:cNvPr id="20" name="TextBox 19"/>
+          <p:cNvSpPr txBox="1"/>
+          <p:nvPr/>
+        </p:nvSpPr>
+        <p:spPr>
+          <a:xfrm>
+            <a:off x="7772400" y="2468880"/>
+            <a:ext cx="1280160" cy="502920"/>
+          </a:xfrm>
+          <a:prstGeom prst="rect">
+            <a:avLst/>
+          </a:prstGeom>
+          <a:noFill/>
+        </p:spPr>
+        <p:txBody>
+          <a:bodyPr wrap="square" lIns="0" rIns="0" tIns="0" bIns="0" anchor="ctr">
+            <a:spAutoFit/>
+          </a:bodyPr>
+          <a:lstStyle/>
+          <a:p>
+            <a:pPr algn="ctr">
+              <a:lnSpc>
+                <a:spcPct val="120000"/>
+              </a:lnSpc>
+            </a:pPr>
+            <a:r>
+              <a:rPr sz="1800" b="1">
+                <a:solidFill>
+                  <a:srgbClr val="059669"/>
+                </a:solidFill>
+                <a:latin typeface="Microsoft JhengHei"/>
+              </a:rPr>
+              <a:t>✓</a:t>
+            </a:r>
+          </a:p>
+        </p:txBody>
+      </p:sp>
+      <p:sp>
+        <p:nvSpPr>
+          <p:cNvPr id="21" name="TextBox 20"/>
+          <p:cNvSpPr txBox="1"/>
+          <p:nvPr/>
+        </p:nvSpPr>
+        <p:spPr>
+          <a:xfrm>
+            <a:off x="9052560" y="2468880"/>
+            <a:ext cx="1463040" cy="502920"/>
+          </a:xfrm>
+          <a:prstGeom prst="rect">
+            <a:avLst/>
+          </a:prstGeom>
+          <a:noFill/>
+        </p:spPr>
+        <p:txBody>
+          <a:bodyPr wrap="square" lIns="0" rIns="0" tIns="0" bIns="0" anchor="ctr">
+            <a:spAutoFit/>
+          </a:bodyPr>
+          <a:lstStyle/>
+          <a:p>
+            <a:pPr algn="ctr">
+              <a:lnSpc>
+                <a:spcPct val="120000"/>
+              </a:lnSpc>
+            </a:pPr>
+            <a:r>
+              <a:rPr sz="1600" b="0">
+                <a:solidFill>
+                  <a:srgbClr val="64748B"/>
+                </a:solidFill>
+                <a:latin typeface="Microsoft JhengHei"/>
+              </a:rPr>
+              <a:t>✗</a:t>
+            </a:r>
+          </a:p>
+        </p:txBody>
+      </p:sp>
+      <p:sp>
+        <p:nvSpPr>
+          <p:cNvPr id="22" name="Rectangle 21"/>
           <p:cNvSpPr/>
           <p:nvPr/>
         </p:nvSpPr>
         <p:spPr>
           <a:xfrm>
-            <a:off x="3352647" y="2194560"/>
-            <a:ext cx="2651760" cy="3840480"/>
-          </a:xfrm>
-          <a:prstGeom prst="roundRect">
-            <a:avLst>
-              <a:gd name="adj" fmla="val 6000"/>
-            </a:avLst>
-          </a:prstGeom>
-          <a:noFill/>
-          <a:ln w="9525">
-            <a:solidFill>
-              <a:srgbClr val="E2E8F0"/>
-            </a:solidFill>
+            <a:off x="731520" y="2971800"/>
+            <a:ext cx="9784080" cy="6350"/>
+          </a:xfrm>
+          <a:prstGeom prst="rect">
+            <a:avLst/>
+          </a:prstGeom>
+          <a:solidFill>
+            <a:srgbClr val="E2E8F0"/>
+          </a:solidFill>
+          <a:ln>
+            <a:noFill/>
           </a:ln>
         </p:spPr>
         <p:style>
@@ -5888,193 +6322,296 @@
       </p:sp>
       <p:sp>
         <p:nvSpPr>
-          <p:cNvPr id="12" name="TextBox 11"/>
-          <p:cNvSpPr txBox="1"/>
-          <p:nvPr/>
-        </p:nvSpPr>
-        <p:spPr>
-          <a:xfrm>
-            <a:off x="3626967" y="2468880"/>
-            <a:ext cx="2651760" cy="457200"/>
-          </a:xfrm>
-          <a:prstGeom prst="rect">
-            <a:avLst/>
-          </a:prstGeom>
-          <a:noFill/>
-        </p:spPr>
-        <p:txBody>
-          <a:bodyPr wrap="square" lIns="0" rIns="0" tIns="0" bIns="0" anchor="t">
-            <a:spAutoFit/>
-          </a:bodyPr>
-          <a:lstStyle/>
-          <a:p>
-            <a:pPr algn="l">
-              <a:lnSpc>
-                <a:spcPct val="120000"/>
-              </a:lnSpc>
-            </a:pPr>
-            <a:r>
-              <a:rPr sz="2200" b="1">
-                <a:solidFill>
-                  <a:srgbClr val="0F172A"/>
-                </a:solidFill>
-                <a:latin typeface="Microsoft JhengHei"/>
-              </a:rPr>
-              <a:t>02</a:t>
-            </a:r>
-          </a:p>
-        </p:txBody>
-      </p:sp>
-      <p:sp>
-        <p:nvSpPr>
-          <p:cNvPr id="13" name="TextBox 12"/>
-          <p:cNvSpPr txBox="1"/>
-          <p:nvPr/>
-        </p:nvSpPr>
-        <p:spPr>
-          <a:xfrm>
-            <a:off x="3626967" y="2971800"/>
-            <a:ext cx="2103120" cy="548640"/>
-          </a:xfrm>
-          <a:prstGeom prst="rect">
-            <a:avLst/>
-          </a:prstGeom>
-          <a:noFill/>
-        </p:spPr>
-        <p:txBody>
-          <a:bodyPr wrap="square" lIns="0" rIns="0" tIns="0" bIns="0" anchor="t">
-            <a:spAutoFit/>
-          </a:bodyPr>
-          <a:lstStyle/>
-          <a:p>
-            <a:pPr algn="l">
-              <a:lnSpc>
-                <a:spcPct val="120000"/>
-              </a:lnSpc>
-            </a:pPr>
-            <a:r>
-              <a:rPr sz="2200" b="1">
-                <a:solidFill>
-                  <a:srgbClr val="0F172A"/>
-                </a:solidFill>
-                <a:latin typeface="Microsoft JhengHei"/>
-              </a:rPr>
-              <a:t>資料層</a:t>
-            </a:r>
-          </a:p>
-        </p:txBody>
-      </p:sp>
-      <p:cxnSp>
-        <p:nvCxnSpPr>
-          <p:cNvPr id="14" name="Connector 13"/>
-          <p:cNvCxnSpPr/>
-          <p:nvPr/>
-        </p:nvCxnSpPr>
-        <p:spPr>
-          <a:xfrm>
-            <a:off x="3626967" y="3611880"/>
-            <a:ext cx="822960" cy="0"/>
-          </a:xfrm>
-          <a:prstGeom prst="line">
-            <a:avLst/>
-          </a:prstGeom>
-          <a:ln w="25400">
-            <a:solidFill>
-              <a:srgbClr val="0F172A"/>
-            </a:solidFill>
-          </a:ln>
-        </p:spPr>
-        <p:style>
-          <a:lnRef idx="2">
-            <a:schemeClr val="accent1"/>
-          </a:lnRef>
-          <a:fillRef idx="0">
-            <a:schemeClr val="accent1"/>
-          </a:fillRef>
-          <a:effectRef idx="1">
-            <a:schemeClr val="accent1"/>
-          </a:effectRef>
-          <a:fontRef idx="minor">
-            <a:schemeClr val="tx1"/>
-          </a:fontRef>
-        </p:style>
-      </p:cxnSp>
-      <p:sp>
-        <p:nvSpPr>
-          <p:cNvPr id="15" name="TextBox 14"/>
-          <p:cNvSpPr txBox="1"/>
-          <p:nvPr/>
-        </p:nvSpPr>
-        <p:spPr>
-          <a:xfrm>
-            <a:off x="3626967" y="3794760"/>
-            <a:ext cx="2103120" cy="2194560"/>
-          </a:xfrm>
-          <a:prstGeom prst="rect">
-            <a:avLst/>
-          </a:prstGeom>
-          <a:noFill/>
-        </p:spPr>
-        <p:txBody>
-          <a:bodyPr wrap="square" lIns="0" rIns="0" tIns="0" bIns="0" anchor="t">
-            <a:spAutoFit/>
-          </a:bodyPr>
-          <a:lstStyle/>
-          <a:p>
-            <a:pPr algn="l">
-              <a:lnSpc>
-                <a:spcPct val="150000"/>
-              </a:lnSpc>
-            </a:pPr>
-            <a:r>
-              <a:rPr sz="1200" b="0">
-                <a:solidFill>
-                  <a:srgbClr val="0F172A"/>
-                </a:solidFill>
-                <a:latin typeface="Microsoft JhengHei"/>
-              </a:rPr>
-              <a:t>Firebase Auth · Cloud Firestore</a:t>
-            </a:r>
-          </a:p>
-          <a:p>
-            <a:pPr algn="l">
-              <a:lnSpc>
-                <a:spcPct val="150000"/>
-              </a:lnSpc>
-            </a:pPr>
-            <a:r>
-              <a:rPr sz="1200" b="0">
-                <a:solidFill>
-                  <a:srgbClr val="0F172A"/>
-                </a:solidFill>
-                <a:latin typeface="Microsoft JhengHei"/>
-              </a:rPr>
-              <a:t>即時訂閱 / 離線同步</a:t>
-            </a:r>
-          </a:p>
-        </p:txBody>
-      </p:sp>
-      <p:sp>
-        <p:nvSpPr>
-          <p:cNvPr id="16" name="Rounded Rectangle 15"/>
+          <p:cNvPr id="23" name="TextBox 22"/>
+          <p:cNvSpPr txBox="1"/>
+          <p:nvPr/>
+        </p:nvSpPr>
+        <p:spPr>
+          <a:xfrm>
+            <a:off x="731520" y="2971800"/>
+            <a:ext cx="1828800" cy="502920"/>
+          </a:xfrm>
+          <a:prstGeom prst="rect">
+            <a:avLst/>
+          </a:prstGeom>
+          <a:noFill/>
+        </p:spPr>
+        <p:txBody>
+          <a:bodyPr wrap="square" lIns="0" rIns="0" tIns="0" bIns="0" anchor="ctr">
+            <a:spAutoFit/>
+          </a:bodyPr>
+          <a:lstStyle/>
+          <a:p>
+            <a:pPr algn="l">
+              <a:lnSpc>
+                <a:spcPct val="120000"/>
+              </a:lnSpc>
+            </a:pPr>
+            <a:r>
+              <a:rPr sz="1200" b="1">
+                <a:solidFill>
+                  <a:srgbClr val="0F172A"/>
+                </a:solidFill>
+                <a:latin typeface="Microsoft JhengHei"/>
+              </a:rPr>
+              <a:t>跨部門卡點偵測</a:t>
+            </a:r>
+          </a:p>
+        </p:txBody>
+      </p:sp>
+      <p:sp>
+        <p:nvSpPr>
+          <p:cNvPr id="24" name="TextBox 23"/>
+          <p:cNvSpPr txBox="1"/>
+          <p:nvPr/>
+        </p:nvSpPr>
+        <p:spPr>
+          <a:xfrm>
+            <a:off x="2560320" y="2971800"/>
+            <a:ext cx="1371600" cy="502920"/>
+          </a:xfrm>
+          <a:prstGeom prst="rect">
+            <a:avLst/>
+          </a:prstGeom>
+          <a:noFill/>
+        </p:spPr>
+        <p:txBody>
+          <a:bodyPr wrap="square" lIns="0" rIns="0" tIns="0" bIns="0" anchor="ctr">
+            <a:spAutoFit/>
+          </a:bodyPr>
+          <a:lstStyle/>
+          <a:p>
+            <a:pPr algn="ctr">
+              <a:lnSpc>
+                <a:spcPct val="120000"/>
+              </a:lnSpc>
+            </a:pPr>
+            <a:r>
+              <a:rPr sz="1800" b="1">
+                <a:solidFill>
+                  <a:srgbClr val="FFFFFF"/>
+                </a:solidFill>
+                <a:latin typeface="Microsoft JhengHei"/>
+              </a:rPr>
+              <a:t>✓</a:t>
+            </a:r>
+          </a:p>
+        </p:txBody>
+      </p:sp>
+      <p:sp>
+        <p:nvSpPr>
+          <p:cNvPr id="25" name="TextBox 24"/>
+          <p:cNvSpPr txBox="1"/>
+          <p:nvPr/>
+        </p:nvSpPr>
+        <p:spPr>
+          <a:xfrm>
+            <a:off x="3931920" y="2971800"/>
+            <a:ext cx="1280160" cy="502920"/>
+          </a:xfrm>
+          <a:prstGeom prst="rect">
+            <a:avLst/>
+          </a:prstGeom>
+          <a:noFill/>
+        </p:spPr>
+        <p:txBody>
+          <a:bodyPr wrap="square" lIns="0" rIns="0" tIns="0" bIns="0" anchor="ctr">
+            <a:spAutoFit/>
+          </a:bodyPr>
+          <a:lstStyle/>
+          <a:p>
+            <a:pPr algn="ctr">
+              <a:lnSpc>
+                <a:spcPct val="120000"/>
+              </a:lnSpc>
+            </a:pPr>
+            <a:r>
+              <a:rPr sz="1600" b="0">
+                <a:solidFill>
+                  <a:srgbClr val="64748B"/>
+                </a:solidFill>
+                <a:latin typeface="Microsoft JhengHei"/>
+              </a:rPr>
+              <a:t>✗</a:t>
+            </a:r>
+          </a:p>
+        </p:txBody>
+      </p:sp>
+      <p:sp>
+        <p:nvSpPr>
+          <p:cNvPr id="26" name="TextBox 25"/>
+          <p:cNvSpPr txBox="1"/>
+          <p:nvPr/>
+        </p:nvSpPr>
+        <p:spPr>
+          <a:xfrm>
+            <a:off x="5212080" y="2971800"/>
+            <a:ext cx="1280160" cy="502920"/>
+          </a:xfrm>
+          <a:prstGeom prst="rect">
+            <a:avLst/>
+          </a:prstGeom>
+          <a:noFill/>
+        </p:spPr>
+        <p:txBody>
+          <a:bodyPr wrap="square" lIns="0" rIns="0" tIns="0" bIns="0" anchor="ctr">
+            <a:spAutoFit/>
+          </a:bodyPr>
+          <a:lstStyle/>
+          <a:p>
+            <a:pPr algn="ctr">
+              <a:lnSpc>
+                <a:spcPct val="120000"/>
+              </a:lnSpc>
+            </a:pPr>
+            <a:r>
+              <a:rPr sz="1600" b="0">
+                <a:solidFill>
+                  <a:srgbClr val="64748B"/>
+                </a:solidFill>
+                <a:latin typeface="Microsoft JhengHei"/>
+              </a:rPr>
+              <a:t>△</a:t>
+            </a:r>
+          </a:p>
+        </p:txBody>
+      </p:sp>
+      <p:sp>
+        <p:nvSpPr>
+          <p:cNvPr id="27" name="TextBox 26"/>
+          <p:cNvSpPr txBox="1"/>
+          <p:nvPr/>
+        </p:nvSpPr>
+        <p:spPr>
+          <a:xfrm>
+            <a:off x="6492240" y="2971800"/>
+            <a:ext cx="1280160" cy="502920"/>
+          </a:xfrm>
+          <a:prstGeom prst="rect">
+            <a:avLst/>
+          </a:prstGeom>
+          <a:noFill/>
+        </p:spPr>
+        <p:txBody>
+          <a:bodyPr wrap="square" lIns="0" rIns="0" tIns="0" bIns="0" anchor="ctr">
+            <a:spAutoFit/>
+          </a:bodyPr>
+          <a:lstStyle/>
+          <a:p>
+            <a:pPr algn="ctr">
+              <a:lnSpc>
+                <a:spcPct val="120000"/>
+              </a:lnSpc>
+            </a:pPr>
+            <a:r>
+              <a:rPr sz="1600" b="0">
+                <a:solidFill>
+                  <a:srgbClr val="64748B"/>
+                </a:solidFill>
+                <a:latin typeface="Microsoft JhengHei"/>
+              </a:rPr>
+              <a:t>✗</a:t>
+            </a:r>
+          </a:p>
+        </p:txBody>
+      </p:sp>
+      <p:sp>
+        <p:nvSpPr>
+          <p:cNvPr id="28" name="TextBox 27"/>
+          <p:cNvSpPr txBox="1"/>
+          <p:nvPr/>
+        </p:nvSpPr>
+        <p:spPr>
+          <a:xfrm>
+            <a:off x="7772400" y="2971800"/>
+            <a:ext cx="1280160" cy="502920"/>
+          </a:xfrm>
+          <a:prstGeom prst="rect">
+            <a:avLst/>
+          </a:prstGeom>
+          <a:noFill/>
+        </p:spPr>
+        <p:txBody>
+          <a:bodyPr wrap="square" lIns="0" rIns="0" tIns="0" bIns="0" anchor="ctr">
+            <a:spAutoFit/>
+          </a:bodyPr>
+          <a:lstStyle/>
+          <a:p>
+            <a:pPr algn="ctr">
+              <a:lnSpc>
+                <a:spcPct val="120000"/>
+              </a:lnSpc>
+            </a:pPr>
+            <a:r>
+              <a:rPr sz="1600" b="0">
+                <a:solidFill>
+                  <a:srgbClr val="64748B"/>
+                </a:solidFill>
+                <a:latin typeface="Microsoft JhengHei"/>
+              </a:rPr>
+              <a:t>△</a:t>
+            </a:r>
+          </a:p>
+        </p:txBody>
+      </p:sp>
+      <p:sp>
+        <p:nvSpPr>
+          <p:cNvPr id="29" name="TextBox 28"/>
+          <p:cNvSpPr txBox="1"/>
+          <p:nvPr/>
+        </p:nvSpPr>
+        <p:spPr>
+          <a:xfrm>
+            <a:off x="9052560" y="2971800"/>
+            <a:ext cx="1463040" cy="502920"/>
+          </a:xfrm>
+          <a:prstGeom prst="rect">
+            <a:avLst/>
+          </a:prstGeom>
+          <a:noFill/>
+        </p:spPr>
+        <p:txBody>
+          <a:bodyPr wrap="square" lIns="0" rIns="0" tIns="0" bIns="0" anchor="ctr">
+            <a:spAutoFit/>
+          </a:bodyPr>
+          <a:lstStyle/>
+          <a:p>
+            <a:pPr algn="ctr">
+              <a:lnSpc>
+                <a:spcPct val="120000"/>
+              </a:lnSpc>
+            </a:pPr>
+            <a:r>
+              <a:rPr sz="1600" b="0">
+                <a:solidFill>
+                  <a:srgbClr val="64748B"/>
+                </a:solidFill>
+                <a:latin typeface="Microsoft JhengHei"/>
+              </a:rPr>
+              <a:t>✗</a:t>
+            </a:r>
+          </a:p>
+        </p:txBody>
+      </p:sp>
+      <p:sp>
+        <p:nvSpPr>
+          <p:cNvPr id="30" name="Rectangle 29"/>
           <p:cNvSpPr/>
           <p:nvPr/>
         </p:nvSpPr>
         <p:spPr>
           <a:xfrm>
-            <a:off x="6187287" y="2194560"/>
-            <a:ext cx="2651760" cy="3840480"/>
-          </a:xfrm>
-          <a:prstGeom prst="roundRect">
-            <a:avLst>
-              <a:gd name="adj" fmla="val 6000"/>
-            </a:avLst>
-          </a:prstGeom>
-          <a:noFill/>
-          <a:ln w="9525">
-            <a:solidFill>
-              <a:srgbClr val="E2E8F0"/>
-            </a:solidFill>
+            <a:off x="731520" y="3474720"/>
+            <a:ext cx="9784080" cy="6350"/>
+          </a:xfrm>
+          <a:prstGeom prst="rect">
+            <a:avLst/>
+          </a:prstGeom>
+          <a:solidFill>
+            <a:srgbClr val="E2E8F0"/>
+          </a:solidFill>
+          <a:ln>
+            <a:noFill/>
           </a:ln>
         </p:spPr>
         <p:style>
@@ -6101,193 +6638,296 @@
       </p:sp>
       <p:sp>
         <p:nvSpPr>
-          <p:cNvPr id="17" name="TextBox 16"/>
-          <p:cNvSpPr txBox="1"/>
-          <p:nvPr/>
-        </p:nvSpPr>
-        <p:spPr>
-          <a:xfrm>
-            <a:off x="6461607" y="2468880"/>
-            <a:ext cx="2651760" cy="457200"/>
-          </a:xfrm>
-          <a:prstGeom prst="rect">
-            <a:avLst/>
-          </a:prstGeom>
-          <a:noFill/>
-        </p:spPr>
-        <p:txBody>
-          <a:bodyPr wrap="square" lIns="0" rIns="0" tIns="0" bIns="0" anchor="t">
-            <a:spAutoFit/>
-          </a:bodyPr>
-          <a:lstStyle/>
-          <a:p>
-            <a:pPr algn="l">
-              <a:lnSpc>
-                <a:spcPct val="120000"/>
-              </a:lnSpc>
-            </a:pPr>
-            <a:r>
-              <a:rPr sz="2200" b="1">
-                <a:solidFill>
-                  <a:srgbClr val="0F172A"/>
-                </a:solidFill>
-                <a:latin typeface="Microsoft JhengHei"/>
-              </a:rPr>
-              <a:t>03</a:t>
-            </a:r>
-          </a:p>
-        </p:txBody>
-      </p:sp>
-      <p:sp>
-        <p:nvSpPr>
-          <p:cNvPr id="18" name="TextBox 17"/>
-          <p:cNvSpPr txBox="1"/>
-          <p:nvPr/>
-        </p:nvSpPr>
-        <p:spPr>
-          <a:xfrm>
-            <a:off x="6461607" y="2971800"/>
-            <a:ext cx="2103120" cy="548640"/>
-          </a:xfrm>
-          <a:prstGeom prst="rect">
-            <a:avLst/>
-          </a:prstGeom>
-          <a:noFill/>
-        </p:spPr>
-        <p:txBody>
-          <a:bodyPr wrap="square" lIns="0" rIns="0" tIns="0" bIns="0" anchor="t">
-            <a:spAutoFit/>
-          </a:bodyPr>
-          <a:lstStyle/>
-          <a:p>
-            <a:pPr algn="l">
-              <a:lnSpc>
-                <a:spcPct val="120000"/>
-              </a:lnSpc>
-            </a:pPr>
-            <a:r>
-              <a:rPr sz="2200" b="1">
-                <a:solidFill>
-                  <a:srgbClr val="0F172A"/>
-                </a:solidFill>
-                <a:latin typeface="Microsoft JhengHei"/>
-              </a:rPr>
-              <a:t>演算法</a:t>
-            </a:r>
-          </a:p>
-        </p:txBody>
-      </p:sp>
-      <p:cxnSp>
-        <p:nvCxnSpPr>
-          <p:cNvPr id="19" name="Connector 18"/>
-          <p:cNvCxnSpPr/>
-          <p:nvPr/>
-        </p:nvCxnSpPr>
-        <p:spPr>
-          <a:xfrm>
-            <a:off x="6461607" y="3611880"/>
-            <a:ext cx="822960" cy="0"/>
-          </a:xfrm>
-          <a:prstGeom prst="line">
-            <a:avLst/>
-          </a:prstGeom>
-          <a:ln w="25400">
-            <a:solidFill>
-              <a:srgbClr val="0F172A"/>
-            </a:solidFill>
-          </a:ln>
-        </p:spPr>
-        <p:style>
-          <a:lnRef idx="2">
-            <a:schemeClr val="accent1"/>
-          </a:lnRef>
-          <a:fillRef idx="0">
-            <a:schemeClr val="accent1"/>
-          </a:fillRef>
-          <a:effectRef idx="1">
-            <a:schemeClr val="accent1"/>
-          </a:effectRef>
-          <a:fontRef idx="minor">
-            <a:schemeClr val="tx1"/>
-          </a:fontRef>
-        </p:style>
-      </p:cxnSp>
-      <p:sp>
-        <p:nvSpPr>
-          <p:cNvPr id="20" name="TextBox 19"/>
-          <p:cNvSpPr txBox="1"/>
-          <p:nvPr/>
-        </p:nvSpPr>
-        <p:spPr>
-          <a:xfrm>
-            <a:off x="6461607" y="3794760"/>
-            <a:ext cx="2103120" cy="2194560"/>
-          </a:xfrm>
-          <a:prstGeom prst="rect">
-            <a:avLst/>
-          </a:prstGeom>
-          <a:noFill/>
-        </p:spPr>
-        <p:txBody>
-          <a:bodyPr wrap="square" lIns="0" rIns="0" tIns="0" bIns="0" anchor="t">
-            <a:spAutoFit/>
-          </a:bodyPr>
-          <a:lstStyle/>
-          <a:p>
-            <a:pPr algn="l">
-              <a:lnSpc>
-                <a:spcPct val="150000"/>
-              </a:lnSpc>
-            </a:pPr>
-            <a:r>
-              <a:rPr sz="1200" b="0">
-                <a:solidFill>
-                  <a:srgbClr val="0F172A"/>
-                </a:solidFill>
-                <a:latin typeface="Microsoft JhengHei"/>
-              </a:rPr>
-              <a:t>25+ 算法 · 純前端計算</a:t>
-            </a:r>
-          </a:p>
-          <a:p>
-            <a:pPr algn="l">
-              <a:lnSpc>
-                <a:spcPct val="150000"/>
-              </a:lnSpc>
-            </a:pPr>
-            <a:r>
-              <a:rPr sz="1200" b="0">
-                <a:solidFill>
-                  <a:srgbClr val="0F172A"/>
-                </a:solidFill>
-                <a:latin typeface="Microsoft JhengHei"/>
-              </a:rPr>
-              <a:t>BM25F / Gini / Cohort Regression</a:t>
-            </a:r>
-          </a:p>
-        </p:txBody>
-      </p:sp>
-      <p:sp>
-        <p:nvSpPr>
-          <p:cNvPr id="21" name="Rounded Rectangle 20"/>
+          <p:cNvPr id="31" name="TextBox 30"/>
+          <p:cNvSpPr txBox="1"/>
+          <p:nvPr/>
+        </p:nvSpPr>
+        <p:spPr>
+          <a:xfrm>
+            <a:off x="731520" y="3474720"/>
+            <a:ext cx="1828800" cy="502920"/>
+          </a:xfrm>
+          <a:prstGeom prst="rect">
+            <a:avLst/>
+          </a:prstGeom>
+          <a:noFill/>
+        </p:spPr>
+        <p:txBody>
+          <a:bodyPr wrap="square" lIns="0" rIns="0" tIns="0" bIns="0" anchor="ctr">
+            <a:spAutoFit/>
+          </a:bodyPr>
+          <a:lstStyle/>
+          <a:p>
+            <a:pPr algn="l">
+              <a:lnSpc>
+                <a:spcPct val="120000"/>
+              </a:lnSpc>
+            </a:pPr>
+            <a:r>
+              <a:rPr sz="1200" b="1">
+                <a:solidFill>
+                  <a:srgbClr val="0F172A"/>
+                </a:solidFill>
+                <a:latin typeface="Microsoft JhengHei"/>
+              </a:rPr>
+              <a:t>決策事後追蹤</a:t>
+            </a:r>
+          </a:p>
+        </p:txBody>
+      </p:sp>
+      <p:sp>
+        <p:nvSpPr>
+          <p:cNvPr id="32" name="TextBox 31"/>
+          <p:cNvSpPr txBox="1"/>
+          <p:nvPr/>
+        </p:nvSpPr>
+        <p:spPr>
+          <a:xfrm>
+            <a:off x="2560320" y="3474720"/>
+            <a:ext cx="1371600" cy="502920"/>
+          </a:xfrm>
+          <a:prstGeom prst="rect">
+            <a:avLst/>
+          </a:prstGeom>
+          <a:noFill/>
+        </p:spPr>
+        <p:txBody>
+          <a:bodyPr wrap="square" lIns="0" rIns="0" tIns="0" bIns="0" anchor="ctr">
+            <a:spAutoFit/>
+          </a:bodyPr>
+          <a:lstStyle/>
+          <a:p>
+            <a:pPr algn="ctr">
+              <a:lnSpc>
+                <a:spcPct val="120000"/>
+              </a:lnSpc>
+            </a:pPr>
+            <a:r>
+              <a:rPr sz="1800" b="1">
+                <a:solidFill>
+                  <a:srgbClr val="FFFFFF"/>
+                </a:solidFill>
+                <a:latin typeface="Microsoft JhengHei"/>
+              </a:rPr>
+              <a:t>✓</a:t>
+            </a:r>
+          </a:p>
+        </p:txBody>
+      </p:sp>
+      <p:sp>
+        <p:nvSpPr>
+          <p:cNvPr id="33" name="TextBox 32"/>
+          <p:cNvSpPr txBox="1"/>
+          <p:nvPr/>
+        </p:nvSpPr>
+        <p:spPr>
+          <a:xfrm>
+            <a:off x="3931920" y="3474720"/>
+            <a:ext cx="1280160" cy="502920"/>
+          </a:xfrm>
+          <a:prstGeom prst="rect">
+            <a:avLst/>
+          </a:prstGeom>
+          <a:noFill/>
+        </p:spPr>
+        <p:txBody>
+          <a:bodyPr wrap="square" lIns="0" rIns="0" tIns="0" bIns="0" anchor="ctr">
+            <a:spAutoFit/>
+          </a:bodyPr>
+          <a:lstStyle/>
+          <a:p>
+            <a:pPr algn="ctr">
+              <a:lnSpc>
+                <a:spcPct val="120000"/>
+              </a:lnSpc>
+            </a:pPr>
+            <a:r>
+              <a:rPr sz="1600" b="0">
+                <a:solidFill>
+                  <a:srgbClr val="64748B"/>
+                </a:solidFill>
+                <a:latin typeface="Microsoft JhengHei"/>
+              </a:rPr>
+              <a:t>✗</a:t>
+            </a:r>
+          </a:p>
+        </p:txBody>
+      </p:sp>
+      <p:sp>
+        <p:nvSpPr>
+          <p:cNvPr id="34" name="TextBox 33"/>
+          <p:cNvSpPr txBox="1"/>
+          <p:nvPr/>
+        </p:nvSpPr>
+        <p:spPr>
+          <a:xfrm>
+            <a:off x="5212080" y="3474720"/>
+            <a:ext cx="1280160" cy="502920"/>
+          </a:xfrm>
+          <a:prstGeom prst="rect">
+            <a:avLst/>
+          </a:prstGeom>
+          <a:noFill/>
+        </p:spPr>
+        <p:txBody>
+          <a:bodyPr wrap="square" lIns="0" rIns="0" tIns="0" bIns="0" anchor="ctr">
+            <a:spAutoFit/>
+          </a:bodyPr>
+          <a:lstStyle/>
+          <a:p>
+            <a:pPr algn="ctr">
+              <a:lnSpc>
+                <a:spcPct val="120000"/>
+              </a:lnSpc>
+            </a:pPr>
+            <a:r>
+              <a:rPr sz="1600" b="0">
+                <a:solidFill>
+                  <a:srgbClr val="64748B"/>
+                </a:solidFill>
+                <a:latin typeface="Microsoft JhengHei"/>
+              </a:rPr>
+              <a:t>✗</a:t>
+            </a:r>
+          </a:p>
+        </p:txBody>
+      </p:sp>
+      <p:sp>
+        <p:nvSpPr>
+          <p:cNvPr id="35" name="TextBox 34"/>
+          <p:cNvSpPr txBox="1"/>
+          <p:nvPr/>
+        </p:nvSpPr>
+        <p:spPr>
+          <a:xfrm>
+            <a:off x="6492240" y="3474720"/>
+            <a:ext cx="1280160" cy="502920"/>
+          </a:xfrm>
+          <a:prstGeom prst="rect">
+            <a:avLst/>
+          </a:prstGeom>
+          <a:noFill/>
+        </p:spPr>
+        <p:txBody>
+          <a:bodyPr wrap="square" lIns="0" rIns="0" tIns="0" bIns="0" anchor="ctr">
+            <a:spAutoFit/>
+          </a:bodyPr>
+          <a:lstStyle/>
+          <a:p>
+            <a:pPr algn="ctr">
+              <a:lnSpc>
+                <a:spcPct val="120000"/>
+              </a:lnSpc>
+            </a:pPr>
+            <a:r>
+              <a:rPr sz="1600" b="0">
+                <a:solidFill>
+                  <a:srgbClr val="64748B"/>
+                </a:solidFill>
+                <a:latin typeface="Microsoft JhengHei"/>
+              </a:rPr>
+              <a:t>✗</a:t>
+            </a:r>
+          </a:p>
+        </p:txBody>
+      </p:sp>
+      <p:sp>
+        <p:nvSpPr>
+          <p:cNvPr id="36" name="TextBox 35"/>
+          <p:cNvSpPr txBox="1"/>
+          <p:nvPr/>
+        </p:nvSpPr>
+        <p:spPr>
+          <a:xfrm>
+            <a:off x="7772400" y="3474720"/>
+            <a:ext cx="1280160" cy="502920"/>
+          </a:xfrm>
+          <a:prstGeom prst="rect">
+            <a:avLst/>
+          </a:prstGeom>
+          <a:noFill/>
+        </p:spPr>
+        <p:txBody>
+          <a:bodyPr wrap="square" lIns="0" rIns="0" tIns="0" bIns="0" anchor="ctr">
+            <a:spAutoFit/>
+          </a:bodyPr>
+          <a:lstStyle/>
+          <a:p>
+            <a:pPr algn="ctr">
+              <a:lnSpc>
+                <a:spcPct val="120000"/>
+              </a:lnSpc>
+            </a:pPr>
+            <a:r>
+              <a:rPr sz="1600" b="0">
+                <a:solidFill>
+                  <a:srgbClr val="64748B"/>
+                </a:solidFill>
+                <a:latin typeface="Microsoft JhengHei"/>
+              </a:rPr>
+              <a:t>△</a:t>
+            </a:r>
+          </a:p>
+        </p:txBody>
+      </p:sp>
+      <p:sp>
+        <p:nvSpPr>
+          <p:cNvPr id="37" name="TextBox 36"/>
+          <p:cNvSpPr txBox="1"/>
+          <p:nvPr/>
+        </p:nvSpPr>
+        <p:spPr>
+          <a:xfrm>
+            <a:off x="9052560" y="3474720"/>
+            <a:ext cx="1463040" cy="502920"/>
+          </a:xfrm>
+          <a:prstGeom prst="rect">
+            <a:avLst/>
+          </a:prstGeom>
+          <a:noFill/>
+        </p:spPr>
+        <p:txBody>
+          <a:bodyPr wrap="square" lIns="0" rIns="0" tIns="0" bIns="0" anchor="ctr">
+            <a:spAutoFit/>
+          </a:bodyPr>
+          <a:lstStyle/>
+          <a:p>
+            <a:pPr algn="ctr">
+              <a:lnSpc>
+                <a:spcPct val="120000"/>
+              </a:lnSpc>
+            </a:pPr>
+            <a:r>
+              <a:rPr sz="1600" b="0">
+                <a:solidFill>
+                  <a:srgbClr val="64748B"/>
+                </a:solidFill>
+                <a:latin typeface="Microsoft JhengHei"/>
+              </a:rPr>
+              <a:t>✗</a:t>
+            </a:r>
+          </a:p>
+        </p:txBody>
+      </p:sp>
+      <p:sp>
+        <p:nvSpPr>
+          <p:cNvPr id="38" name="Rectangle 37"/>
           <p:cNvSpPr/>
           <p:nvPr/>
         </p:nvSpPr>
         <p:spPr>
           <a:xfrm>
-            <a:off x="9021927" y="2194560"/>
-            <a:ext cx="2651760" cy="3840480"/>
-          </a:xfrm>
-          <a:prstGeom prst="roundRect">
-            <a:avLst>
-              <a:gd name="adj" fmla="val 6000"/>
-            </a:avLst>
-          </a:prstGeom>
-          <a:noFill/>
-          <a:ln w="9525">
-            <a:solidFill>
-              <a:srgbClr val="E2E8F0"/>
-            </a:solidFill>
+            <a:off x="731520" y="3977640"/>
+            <a:ext cx="9784080" cy="6350"/>
+          </a:xfrm>
+          <a:prstGeom prst="rect">
+            <a:avLst/>
+          </a:prstGeom>
+          <a:solidFill>
+            <a:srgbClr val="E2E8F0"/>
+          </a:solidFill>
+          <a:ln>
+            <a:noFill/>
           </a:ln>
         </p:spPr>
         <p:style>
@@ -6314,175 +6954,1306 @@
       </p:sp>
       <p:sp>
         <p:nvSpPr>
-          <p:cNvPr id="22" name="TextBox 21"/>
-          <p:cNvSpPr txBox="1"/>
-          <p:nvPr/>
-        </p:nvSpPr>
-        <p:spPr>
-          <a:xfrm>
-            <a:off x="9296247" y="2468880"/>
-            <a:ext cx="2651760" cy="457200"/>
-          </a:xfrm>
-          <a:prstGeom prst="rect">
-            <a:avLst/>
-          </a:prstGeom>
-          <a:noFill/>
-        </p:spPr>
-        <p:txBody>
-          <a:bodyPr wrap="square" lIns="0" rIns="0" tIns="0" bIns="0" anchor="t">
-            <a:spAutoFit/>
-          </a:bodyPr>
-          <a:lstStyle/>
-          <a:p>
-            <a:pPr algn="l">
-              <a:lnSpc>
-                <a:spcPct val="120000"/>
-              </a:lnSpc>
-            </a:pPr>
-            <a:r>
-              <a:rPr sz="2200" b="1">
-                <a:solidFill>
-                  <a:srgbClr val="0F172A"/>
-                </a:solidFill>
-                <a:latin typeface="Microsoft JhengHei"/>
-              </a:rPr>
-              <a:t>04</a:t>
-            </a:r>
-          </a:p>
-        </p:txBody>
-      </p:sp>
-      <p:sp>
-        <p:nvSpPr>
-          <p:cNvPr id="23" name="TextBox 22"/>
-          <p:cNvSpPr txBox="1"/>
-          <p:nvPr/>
-        </p:nvSpPr>
-        <p:spPr>
-          <a:xfrm>
-            <a:off x="9296247" y="2971800"/>
-            <a:ext cx="2103120" cy="548640"/>
-          </a:xfrm>
-          <a:prstGeom prst="rect">
-            <a:avLst/>
-          </a:prstGeom>
-          <a:noFill/>
-        </p:spPr>
-        <p:txBody>
-          <a:bodyPr wrap="square" lIns="0" rIns="0" tIns="0" bIns="0" anchor="t">
-            <a:spAutoFit/>
-          </a:bodyPr>
-          <a:lstStyle/>
-          <a:p>
-            <a:pPr algn="l">
-              <a:lnSpc>
-                <a:spcPct val="120000"/>
-              </a:lnSpc>
-            </a:pPr>
-            <a:r>
-              <a:rPr sz="2200" b="1">
-                <a:solidFill>
-                  <a:srgbClr val="0F172A"/>
-                </a:solidFill>
-                <a:latin typeface="Microsoft JhengHei"/>
-              </a:rPr>
-              <a:t>部署</a:t>
-            </a:r>
-          </a:p>
-        </p:txBody>
-      </p:sp>
-      <p:cxnSp>
-        <p:nvCxnSpPr>
-          <p:cNvPr id="24" name="Connector 23"/>
-          <p:cNvCxnSpPr/>
-          <p:nvPr/>
-        </p:nvCxnSpPr>
-        <p:spPr>
-          <a:xfrm>
-            <a:off x="9296247" y="3611880"/>
-            <a:ext cx="822960" cy="0"/>
-          </a:xfrm>
-          <a:prstGeom prst="line">
-            <a:avLst/>
-          </a:prstGeom>
-          <a:ln w="25400">
-            <a:solidFill>
-              <a:srgbClr val="0F172A"/>
-            </a:solidFill>
+          <p:cNvPr id="39" name="TextBox 38"/>
+          <p:cNvSpPr txBox="1"/>
+          <p:nvPr/>
+        </p:nvSpPr>
+        <p:spPr>
+          <a:xfrm>
+            <a:off x="731520" y="3977640"/>
+            <a:ext cx="1828800" cy="502920"/>
+          </a:xfrm>
+          <a:prstGeom prst="rect">
+            <a:avLst/>
+          </a:prstGeom>
+          <a:noFill/>
+        </p:spPr>
+        <p:txBody>
+          <a:bodyPr wrap="square" lIns="0" rIns="0" tIns="0" bIns="0" anchor="ctr">
+            <a:spAutoFit/>
+          </a:bodyPr>
+          <a:lstStyle/>
+          <a:p>
+            <a:pPr algn="l">
+              <a:lnSpc>
+                <a:spcPct val="120000"/>
+              </a:lnSpc>
+            </a:pPr>
+            <a:r>
+              <a:rPr sz="1200" b="1">
+                <a:solidFill>
+                  <a:srgbClr val="0F172A"/>
+                </a:solidFill>
+                <a:latin typeface="Microsoft JhengHei"/>
+              </a:rPr>
+              <a:t>組織健康度雷達</a:t>
+            </a:r>
+          </a:p>
+        </p:txBody>
+      </p:sp>
+      <p:sp>
+        <p:nvSpPr>
+          <p:cNvPr id="40" name="TextBox 39"/>
+          <p:cNvSpPr txBox="1"/>
+          <p:nvPr/>
+        </p:nvSpPr>
+        <p:spPr>
+          <a:xfrm>
+            <a:off x="2560320" y="3977640"/>
+            <a:ext cx="1371600" cy="502920"/>
+          </a:xfrm>
+          <a:prstGeom prst="rect">
+            <a:avLst/>
+          </a:prstGeom>
+          <a:noFill/>
+        </p:spPr>
+        <p:txBody>
+          <a:bodyPr wrap="square" lIns="0" rIns="0" tIns="0" bIns="0" anchor="ctr">
+            <a:spAutoFit/>
+          </a:bodyPr>
+          <a:lstStyle/>
+          <a:p>
+            <a:pPr algn="ctr">
+              <a:lnSpc>
+                <a:spcPct val="120000"/>
+              </a:lnSpc>
+            </a:pPr>
+            <a:r>
+              <a:rPr sz="1800" b="1">
+                <a:solidFill>
+                  <a:srgbClr val="FFFFFF"/>
+                </a:solidFill>
+                <a:latin typeface="Microsoft JhengHei"/>
+              </a:rPr>
+              <a:t>✓</a:t>
+            </a:r>
+          </a:p>
+        </p:txBody>
+      </p:sp>
+      <p:sp>
+        <p:nvSpPr>
+          <p:cNvPr id="41" name="TextBox 40"/>
+          <p:cNvSpPr txBox="1"/>
+          <p:nvPr/>
+        </p:nvSpPr>
+        <p:spPr>
+          <a:xfrm>
+            <a:off x="3931920" y="3977640"/>
+            <a:ext cx="1280160" cy="502920"/>
+          </a:xfrm>
+          <a:prstGeom prst="rect">
+            <a:avLst/>
+          </a:prstGeom>
+          <a:noFill/>
+        </p:spPr>
+        <p:txBody>
+          <a:bodyPr wrap="square" lIns="0" rIns="0" tIns="0" bIns="0" anchor="ctr">
+            <a:spAutoFit/>
+          </a:bodyPr>
+          <a:lstStyle/>
+          <a:p>
+            <a:pPr algn="ctr">
+              <a:lnSpc>
+                <a:spcPct val="120000"/>
+              </a:lnSpc>
+            </a:pPr>
+            <a:r>
+              <a:rPr sz="1600" b="0">
+                <a:solidFill>
+                  <a:srgbClr val="64748B"/>
+                </a:solidFill>
+                <a:latin typeface="Microsoft JhengHei"/>
+              </a:rPr>
+              <a:t>✗</a:t>
+            </a:r>
+          </a:p>
+        </p:txBody>
+      </p:sp>
+      <p:sp>
+        <p:nvSpPr>
+          <p:cNvPr id="42" name="TextBox 41"/>
+          <p:cNvSpPr txBox="1"/>
+          <p:nvPr/>
+        </p:nvSpPr>
+        <p:spPr>
+          <a:xfrm>
+            <a:off x="5212080" y="3977640"/>
+            <a:ext cx="1280160" cy="502920"/>
+          </a:xfrm>
+          <a:prstGeom prst="rect">
+            <a:avLst/>
+          </a:prstGeom>
+          <a:noFill/>
+        </p:spPr>
+        <p:txBody>
+          <a:bodyPr wrap="square" lIns="0" rIns="0" tIns="0" bIns="0" anchor="ctr">
+            <a:spAutoFit/>
+          </a:bodyPr>
+          <a:lstStyle/>
+          <a:p>
+            <a:pPr algn="ctr">
+              <a:lnSpc>
+                <a:spcPct val="120000"/>
+              </a:lnSpc>
+            </a:pPr>
+            <a:r>
+              <a:rPr sz="1600" b="0">
+                <a:solidFill>
+                  <a:srgbClr val="64748B"/>
+                </a:solidFill>
+                <a:latin typeface="Microsoft JhengHei"/>
+              </a:rPr>
+              <a:t>✗</a:t>
+            </a:r>
+          </a:p>
+        </p:txBody>
+      </p:sp>
+      <p:sp>
+        <p:nvSpPr>
+          <p:cNvPr id="43" name="TextBox 42"/>
+          <p:cNvSpPr txBox="1"/>
+          <p:nvPr/>
+        </p:nvSpPr>
+        <p:spPr>
+          <a:xfrm>
+            <a:off x="6492240" y="3977640"/>
+            <a:ext cx="1280160" cy="502920"/>
+          </a:xfrm>
+          <a:prstGeom prst="rect">
+            <a:avLst/>
+          </a:prstGeom>
+          <a:noFill/>
+        </p:spPr>
+        <p:txBody>
+          <a:bodyPr wrap="square" lIns="0" rIns="0" tIns="0" bIns="0" anchor="ctr">
+            <a:spAutoFit/>
+          </a:bodyPr>
+          <a:lstStyle/>
+          <a:p>
+            <a:pPr algn="ctr">
+              <a:lnSpc>
+                <a:spcPct val="120000"/>
+              </a:lnSpc>
+            </a:pPr>
+            <a:r>
+              <a:rPr sz="1600" b="0">
+                <a:solidFill>
+                  <a:srgbClr val="64748B"/>
+                </a:solidFill>
+                <a:latin typeface="Microsoft JhengHei"/>
+              </a:rPr>
+              <a:t>△</a:t>
+            </a:r>
+          </a:p>
+        </p:txBody>
+      </p:sp>
+      <p:sp>
+        <p:nvSpPr>
+          <p:cNvPr id="44" name="TextBox 43"/>
+          <p:cNvSpPr txBox="1"/>
+          <p:nvPr/>
+        </p:nvSpPr>
+        <p:spPr>
+          <a:xfrm>
+            <a:off x="7772400" y="3977640"/>
+            <a:ext cx="1280160" cy="502920"/>
+          </a:xfrm>
+          <a:prstGeom prst="rect">
+            <a:avLst/>
+          </a:prstGeom>
+          <a:noFill/>
+        </p:spPr>
+        <p:txBody>
+          <a:bodyPr wrap="square" lIns="0" rIns="0" tIns="0" bIns="0" anchor="ctr">
+            <a:spAutoFit/>
+          </a:bodyPr>
+          <a:lstStyle/>
+          <a:p>
+            <a:pPr algn="ctr">
+              <a:lnSpc>
+                <a:spcPct val="120000"/>
+              </a:lnSpc>
+            </a:pPr>
+            <a:r>
+              <a:rPr sz="1800" b="1">
+                <a:solidFill>
+                  <a:srgbClr val="059669"/>
+                </a:solidFill>
+                <a:latin typeface="Microsoft JhengHei"/>
+              </a:rPr>
+              <a:t>✓</a:t>
+            </a:r>
+          </a:p>
+        </p:txBody>
+      </p:sp>
+      <p:sp>
+        <p:nvSpPr>
+          <p:cNvPr id="45" name="TextBox 44"/>
+          <p:cNvSpPr txBox="1"/>
+          <p:nvPr/>
+        </p:nvSpPr>
+        <p:spPr>
+          <a:xfrm>
+            <a:off x="9052560" y="3977640"/>
+            <a:ext cx="1463040" cy="502920"/>
+          </a:xfrm>
+          <a:prstGeom prst="rect">
+            <a:avLst/>
+          </a:prstGeom>
+          <a:noFill/>
+        </p:spPr>
+        <p:txBody>
+          <a:bodyPr wrap="square" lIns="0" rIns="0" tIns="0" bIns="0" anchor="ctr">
+            <a:spAutoFit/>
+          </a:bodyPr>
+          <a:lstStyle/>
+          <a:p>
+            <a:pPr algn="ctr">
+              <a:lnSpc>
+                <a:spcPct val="120000"/>
+              </a:lnSpc>
+            </a:pPr>
+            <a:r>
+              <a:rPr sz="1600" b="0">
+                <a:solidFill>
+                  <a:srgbClr val="64748B"/>
+                </a:solidFill>
+                <a:latin typeface="Microsoft JhengHei"/>
+              </a:rPr>
+              <a:t>✗</a:t>
+            </a:r>
+          </a:p>
+        </p:txBody>
+      </p:sp>
+      <p:sp>
+        <p:nvSpPr>
+          <p:cNvPr id="46" name="Rectangle 45"/>
+          <p:cNvSpPr/>
+          <p:nvPr/>
+        </p:nvSpPr>
+        <p:spPr>
+          <a:xfrm>
+            <a:off x="731520" y="4480560"/>
+            <a:ext cx="9784080" cy="6350"/>
+          </a:xfrm>
+          <a:prstGeom prst="rect">
+            <a:avLst/>
+          </a:prstGeom>
+          <a:solidFill>
+            <a:srgbClr val="E2E8F0"/>
+          </a:solidFill>
+          <a:ln>
+            <a:noFill/>
           </a:ln>
         </p:spPr>
         <p:style>
-          <a:lnRef idx="2">
+          <a:lnRef idx="1">
             <a:schemeClr val="accent1"/>
           </a:lnRef>
-          <a:fillRef idx="0">
+          <a:fillRef idx="3">
             <a:schemeClr val="accent1"/>
           </a:fillRef>
-          <a:effectRef idx="1">
+          <a:effectRef idx="2">
             <a:schemeClr val="accent1"/>
           </a:effectRef>
           <a:fontRef idx="minor">
-            <a:schemeClr val="tx1"/>
+            <a:schemeClr val="lt1"/>
           </a:fontRef>
         </p:style>
-      </p:cxnSp>
-      <p:sp>
-        <p:nvSpPr>
-          <p:cNvPr id="25" name="TextBox 24"/>
-          <p:cNvSpPr txBox="1"/>
-          <p:nvPr/>
-        </p:nvSpPr>
-        <p:spPr>
-          <a:xfrm>
-            <a:off x="9296247" y="3794760"/>
-            <a:ext cx="2103120" cy="2194560"/>
-          </a:xfrm>
-          <a:prstGeom prst="rect">
-            <a:avLst/>
-          </a:prstGeom>
-          <a:noFill/>
-        </p:spPr>
-        <p:txBody>
-          <a:bodyPr wrap="square" lIns="0" rIns="0" tIns="0" bIns="0" anchor="t">
-            <a:spAutoFit/>
-          </a:bodyPr>
-          <a:lstStyle/>
-          <a:p>
-            <a:pPr algn="l">
-              <a:lnSpc>
-                <a:spcPct val="150000"/>
-              </a:lnSpc>
-            </a:pPr>
-            <a:r>
-              <a:rPr sz="1200" b="0">
-                <a:solidFill>
-                  <a:srgbClr val="0F172A"/>
-                </a:solidFill>
-                <a:latin typeface="Microsoft JhengHei"/>
-              </a:rPr>
-              <a:t>Vercel · GitHub Actions</a:t>
-            </a:r>
-          </a:p>
-          <a:p>
-            <a:pPr algn="l">
-              <a:lnSpc>
-                <a:spcPct val="150000"/>
-              </a:lnSpc>
-            </a:pPr>
-            <a:r>
-              <a:rPr sz="1200" b="0">
-                <a:solidFill>
-                  <a:srgbClr val="0F172A"/>
-                </a:solidFill>
-                <a:latin typeface="Microsoft JhengHei"/>
-              </a:rPr>
-              <a:t>CI/CD 自動發佈</a:t>
-            </a:r>
-          </a:p>
-        </p:txBody>
-      </p:sp>
-      <p:sp>
-        <p:nvSpPr>
-          <p:cNvPr id="26" name="TextBox 25"/>
+        <p:txBody>
+          <a:bodyPr rtlCol="0" anchor="ctr"/>
+          <a:lstStyle/>
+          <a:p>
+            <a:pPr algn="ctr"/>
+          </a:p>
+        </p:txBody>
+      </p:sp>
+      <p:sp>
+        <p:nvSpPr>
+          <p:cNvPr id="47" name="TextBox 46"/>
+          <p:cNvSpPr txBox="1"/>
+          <p:nvPr/>
+        </p:nvSpPr>
+        <p:spPr>
+          <a:xfrm>
+            <a:off x="731520" y="4480560"/>
+            <a:ext cx="1828800" cy="502920"/>
+          </a:xfrm>
+          <a:prstGeom prst="rect">
+            <a:avLst/>
+          </a:prstGeom>
+          <a:noFill/>
+        </p:spPr>
+        <p:txBody>
+          <a:bodyPr wrap="square" lIns="0" rIns="0" tIns="0" bIns="0" anchor="ctr">
+            <a:spAutoFit/>
+          </a:bodyPr>
+          <a:lstStyle/>
+          <a:p>
+            <a:pPr algn="l">
+              <a:lnSpc>
+                <a:spcPct val="120000"/>
+              </a:lnSpc>
+            </a:pPr>
+            <a:r>
+              <a:rPr sz="1200" b="1">
+                <a:solidFill>
+                  <a:srgbClr val="0F172A"/>
+                </a:solidFill>
+                <a:latin typeface="Microsoft JhengHei"/>
+              </a:rPr>
+              <a:t>不對稱互動偵測</a:t>
+            </a:r>
+          </a:p>
+        </p:txBody>
+      </p:sp>
+      <p:sp>
+        <p:nvSpPr>
+          <p:cNvPr id="48" name="TextBox 47"/>
+          <p:cNvSpPr txBox="1"/>
+          <p:nvPr/>
+        </p:nvSpPr>
+        <p:spPr>
+          <a:xfrm>
+            <a:off x="2560320" y="4480560"/>
+            <a:ext cx="1371600" cy="502920"/>
+          </a:xfrm>
+          <a:prstGeom prst="rect">
+            <a:avLst/>
+          </a:prstGeom>
+          <a:noFill/>
+        </p:spPr>
+        <p:txBody>
+          <a:bodyPr wrap="square" lIns="0" rIns="0" tIns="0" bIns="0" anchor="ctr">
+            <a:spAutoFit/>
+          </a:bodyPr>
+          <a:lstStyle/>
+          <a:p>
+            <a:pPr algn="ctr">
+              <a:lnSpc>
+                <a:spcPct val="120000"/>
+              </a:lnSpc>
+            </a:pPr>
+            <a:r>
+              <a:rPr sz="1800" b="1">
+                <a:solidFill>
+                  <a:srgbClr val="FFFFFF"/>
+                </a:solidFill>
+                <a:latin typeface="Microsoft JhengHei"/>
+              </a:rPr>
+              <a:t>✓</a:t>
+            </a:r>
+          </a:p>
+        </p:txBody>
+      </p:sp>
+      <p:sp>
+        <p:nvSpPr>
+          <p:cNvPr id="49" name="TextBox 48"/>
+          <p:cNvSpPr txBox="1"/>
+          <p:nvPr/>
+        </p:nvSpPr>
+        <p:spPr>
+          <a:xfrm>
+            <a:off x="3931920" y="4480560"/>
+            <a:ext cx="1280160" cy="502920"/>
+          </a:xfrm>
+          <a:prstGeom prst="rect">
+            <a:avLst/>
+          </a:prstGeom>
+          <a:noFill/>
+        </p:spPr>
+        <p:txBody>
+          <a:bodyPr wrap="square" lIns="0" rIns="0" tIns="0" bIns="0" anchor="ctr">
+            <a:spAutoFit/>
+          </a:bodyPr>
+          <a:lstStyle/>
+          <a:p>
+            <a:pPr algn="ctr">
+              <a:lnSpc>
+                <a:spcPct val="120000"/>
+              </a:lnSpc>
+            </a:pPr>
+            <a:r>
+              <a:rPr sz="1600" b="0">
+                <a:solidFill>
+                  <a:srgbClr val="64748B"/>
+                </a:solidFill>
+                <a:latin typeface="Microsoft JhengHei"/>
+              </a:rPr>
+              <a:t>✗</a:t>
+            </a:r>
+          </a:p>
+        </p:txBody>
+      </p:sp>
+      <p:sp>
+        <p:nvSpPr>
+          <p:cNvPr id="50" name="TextBox 49"/>
+          <p:cNvSpPr txBox="1"/>
+          <p:nvPr/>
+        </p:nvSpPr>
+        <p:spPr>
+          <a:xfrm>
+            <a:off x="5212080" y="4480560"/>
+            <a:ext cx="1280160" cy="502920"/>
+          </a:xfrm>
+          <a:prstGeom prst="rect">
+            <a:avLst/>
+          </a:prstGeom>
+          <a:noFill/>
+        </p:spPr>
+        <p:txBody>
+          <a:bodyPr wrap="square" lIns="0" rIns="0" tIns="0" bIns="0" anchor="ctr">
+            <a:spAutoFit/>
+          </a:bodyPr>
+          <a:lstStyle/>
+          <a:p>
+            <a:pPr algn="ctr">
+              <a:lnSpc>
+                <a:spcPct val="120000"/>
+              </a:lnSpc>
+            </a:pPr>
+            <a:r>
+              <a:rPr sz="1600" b="0">
+                <a:solidFill>
+                  <a:srgbClr val="64748B"/>
+                </a:solidFill>
+                <a:latin typeface="Microsoft JhengHei"/>
+              </a:rPr>
+              <a:t>✗</a:t>
+            </a:r>
+          </a:p>
+        </p:txBody>
+      </p:sp>
+      <p:sp>
+        <p:nvSpPr>
+          <p:cNvPr id="51" name="TextBox 50"/>
+          <p:cNvSpPr txBox="1"/>
+          <p:nvPr/>
+        </p:nvSpPr>
+        <p:spPr>
+          <a:xfrm>
+            <a:off x="6492240" y="4480560"/>
+            <a:ext cx="1280160" cy="502920"/>
+          </a:xfrm>
+          <a:prstGeom prst="rect">
+            <a:avLst/>
+          </a:prstGeom>
+          <a:noFill/>
+        </p:spPr>
+        <p:txBody>
+          <a:bodyPr wrap="square" lIns="0" rIns="0" tIns="0" bIns="0" anchor="ctr">
+            <a:spAutoFit/>
+          </a:bodyPr>
+          <a:lstStyle/>
+          <a:p>
+            <a:pPr algn="ctr">
+              <a:lnSpc>
+                <a:spcPct val="120000"/>
+              </a:lnSpc>
+            </a:pPr>
+            <a:r>
+              <a:rPr sz="1600" b="0">
+                <a:solidFill>
+                  <a:srgbClr val="64748B"/>
+                </a:solidFill>
+                <a:latin typeface="Microsoft JhengHei"/>
+              </a:rPr>
+              <a:t>✗</a:t>
+            </a:r>
+          </a:p>
+        </p:txBody>
+      </p:sp>
+      <p:sp>
+        <p:nvSpPr>
+          <p:cNvPr id="52" name="TextBox 51"/>
+          <p:cNvSpPr txBox="1"/>
+          <p:nvPr/>
+        </p:nvSpPr>
+        <p:spPr>
+          <a:xfrm>
+            <a:off x="7772400" y="4480560"/>
+            <a:ext cx="1280160" cy="502920"/>
+          </a:xfrm>
+          <a:prstGeom prst="rect">
+            <a:avLst/>
+          </a:prstGeom>
+          <a:noFill/>
+        </p:spPr>
+        <p:txBody>
+          <a:bodyPr wrap="square" lIns="0" rIns="0" tIns="0" bIns="0" anchor="ctr">
+            <a:spAutoFit/>
+          </a:bodyPr>
+          <a:lstStyle/>
+          <a:p>
+            <a:pPr algn="ctr">
+              <a:lnSpc>
+                <a:spcPct val="120000"/>
+              </a:lnSpc>
+            </a:pPr>
+            <a:r>
+              <a:rPr sz="1600" b="0">
+                <a:solidFill>
+                  <a:srgbClr val="64748B"/>
+                </a:solidFill>
+                <a:latin typeface="Microsoft JhengHei"/>
+              </a:rPr>
+              <a:t>✗</a:t>
+            </a:r>
+          </a:p>
+        </p:txBody>
+      </p:sp>
+      <p:sp>
+        <p:nvSpPr>
+          <p:cNvPr id="53" name="TextBox 52"/>
+          <p:cNvSpPr txBox="1"/>
+          <p:nvPr/>
+        </p:nvSpPr>
+        <p:spPr>
+          <a:xfrm>
+            <a:off x="9052560" y="4480560"/>
+            <a:ext cx="1463040" cy="502920"/>
+          </a:xfrm>
+          <a:prstGeom prst="rect">
+            <a:avLst/>
+          </a:prstGeom>
+          <a:noFill/>
+        </p:spPr>
+        <p:txBody>
+          <a:bodyPr wrap="square" lIns="0" rIns="0" tIns="0" bIns="0" anchor="ctr">
+            <a:spAutoFit/>
+          </a:bodyPr>
+          <a:lstStyle/>
+          <a:p>
+            <a:pPr algn="ctr">
+              <a:lnSpc>
+                <a:spcPct val="120000"/>
+              </a:lnSpc>
+            </a:pPr>
+            <a:r>
+              <a:rPr sz="1600" b="0">
+                <a:solidFill>
+                  <a:srgbClr val="64748B"/>
+                </a:solidFill>
+                <a:latin typeface="Microsoft JhengHei"/>
+              </a:rPr>
+              <a:t>✗</a:t>
+            </a:r>
+          </a:p>
+        </p:txBody>
+      </p:sp>
+      <p:sp>
+        <p:nvSpPr>
+          <p:cNvPr id="54" name="Rectangle 53"/>
+          <p:cNvSpPr/>
+          <p:nvPr/>
+        </p:nvSpPr>
+        <p:spPr>
+          <a:xfrm>
+            <a:off x="731520" y="4983480"/>
+            <a:ext cx="9784080" cy="6350"/>
+          </a:xfrm>
+          <a:prstGeom prst="rect">
+            <a:avLst/>
+          </a:prstGeom>
+          <a:solidFill>
+            <a:srgbClr val="E2E8F0"/>
+          </a:solidFill>
+          <a:ln>
+            <a:noFill/>
+          </a:ln>
+        </p:spPr>
+        <p:style>
+          <a:lnRef idx="1">
+            <a:schemeClr val="accent1"/>
+          </a:lnRef>
+          <a:fillRef idx="3">
+            <a:schemeClr val="accent1"/>
+          </a:fillRef>
+          <a:effectRef idx="2">
+            <a:schemeClr val="accent1"/>
+          </a:effectRef>
+          <a:fontRef idx="minor">
+            <a:schemeClr val="lt1"/>
+          </a:fontRef>
+        </p:style>
+        <p:txBody>
+          <a:bodyPr rtlCol="0" anchor="ctr"/>
+          <a:lstStyle/>
+          <a:p>
+            <a:pPr algn="ctr"/>
+          </a:p>
+        </p:txBody>
+      </p:sp>
+      <p:sp>
+        <p:nvSpPr>
+          <p:cNvPr id="55" name="TextBox 54"/>
+          <p:cNvSpPr txBox="1"/>
+          <p:nvPr/>
+        </p:nvSpPr>
+        <p:spPr>
+          <a:xfrm>
+            <a:off x="731520" y="4983480"/>
+            <a:ext cx="1828800" cy="502920"/>
+          </a:xfrm>
+          <a:prstGeom prst="rect">
+            <a:avLst/>
+          </a:prstGeom>
+          <a:noFill/>
+        </p:spPr>
+        <p:txBody>
+          <a:bodyPr wrap="square" lIns="0" rIns="0" tIns="0" bIns="0" anchor="ctr">
+            <a:spAutoFit/>
+          </a:bodyPr>
+          <a:lstStyle/>
+          <a:p>
+            <a:pPr algn="l">
+              <a:lnSpc>
+                <a:spcPct val="120000"/>
+              </a:lnSpc>
+            </a:pPr>
+            <a:r>
+              <a:rPr sz="1200" b="1">
+                <a:solidFill>
+                  <a:srgbClr val="0F172A"/>
+                </a:solidFill>
+                <a:latin typeface="Microsoft JhengHei"/>
+              </a:rPr>
+              <a:t>導入成本</a:t>
+            </a:r>
+          </a:p>
+        </p:txBody>
+      </p:sp>
+      <p:sp>
+        <p:nvSpPr>
+          <p:cNvPr id="56" name="TextBox 55"/>
+          <p:cNvSpPr txBox="1"/>
+          <p:nvPr/>
+        </p:nvSpPr>
+        <p:spPr>
+          <a:xfrm>
+            <a:off x="2560320" y="4983480"/>
+            <a:ext cx="1371600" cy="502920"/>
+          </a:xfrm>
+          <a:prstGeom prst="rect">
+            <a:avLst/>
+          </a:prstGeom>
+          <a:noFill/>
+        </p:spPr>
+        <p:txBody>
+          <a:bodyPr wrap="square" lIns="0" rIns="0" tIns="0" bIns="0" anchor="ctr">
+            <a:spAutoFit/>
+          </a:bodyPr>
+          <a:lstStyle/>
+          <a:p>
+            <a:pPr algn="ctr">
+              <a:lnSpc>
+                <a:spcPct val="120000"/>
+              </a:lnSpc>
+            </a:pPr>
+            <a:r>
+              <a:rPr sz="1100" b="1">
+                <a:solidFill>
+                  <a:srgbClr val="FFFFFF"/>
+                </a:solidFill>
+                <a:latin typeface="Microsoft JhengHei"/>
+              </a:rPr>
+              <a:t>免費</a:t>
+            </a:r>
+          </a:p>
+        </p:txBody>
+      </p:sp>
+      <p:sp>
+        <p:nvSpPr>
+          <p:cNvPr id="57" name="TextBox 56"/>
+          <p:cNvSpPr txBox="1"/>
+          <p:nvPr/>
+        </p:nvSpPr>
+        <p:spPr>
+          <a:xfrm>
+            <a:off x="3931920" y="4983480"/>
+            <a:ext cx="1280160" cy="502920"/>
+          </a:xfrm>
+          <a:prstGeom prst="rect">
+            <a:avLst/>
+          </a:prstGeom>
+          <a:noFill/>
+        </p:spPr>
+        <p:txBody>
+          <a:bodyPr wrap="square" lIns="0" rIns="0" tIns="0" bIns="0" anchor="ctr">
+            <a:spAutoFit/>
+          </a:bodyPr>
+          <a:lstStyle/>
+          <a:p>
+            <a:pPr algn="ctr">
+              <a:lnSpc>
+                <a:spcPct val="120000"/>
+              </a:lnSpc>
+            </a:pPr>
+            <a:r>
+              <a:rPr sz="1100" b="0">
+                <a:solidFill>
+                  <a:srgbClr val="0F172A"/>
+                </a:solidFill>
+                <a:latin typeface="Microsoft JhengHei"/>
+              </a:rPr>
+              <a:t>$</a:t>
+            </a:r>
+          </a:p>
+        </p:txBody>
+      </p:sp>
+      <p:sp>
+        <p:nvSpPr>
+          <p:cNvPr id="58" name="TextBox 57"/>
+          <p:cNvSpPr txBox="1"/>
+          <p:nvPr/>
+        </p:nvSpPr>
+        <p:spPr>
+          <a:xfrm>
+            <a:off x="5212080" y="4983480"/>
+            <a:ext cx="1280160" cy="502920"/>
+          </a:xfrm>
+          <a:prstGeom prst="rect">
+            <a:avLst/>
+          </a:prstGeom>
+          <a:noFill/>
+        </p:spPr>
+        <p:txBody>
+          <a:bodyPr wrap="square" lIns="0" rIns="0" tIns="0" bIns="0" anchor="ctr">
+            <a:spAutoFit/>
+          </a:bodyPr>
+          <a:lstStyle/>
+          <a:p>
+            <a:pPr algn="ctr">
+              <a:lnSpc>
+                <a:spcPct val="120000"/>
+              </a:lnSpc>
+            </a:pPr>
+            <a:r>
+              <a:rPr sz="1100" b="0">
+                <a:solidFill>
+                  <a:srgbClr val="0F172A"/>
+                </a:solidFill>
+                <a:latin typeface="Microsoft JhengHei"/>
+              </a:rPr>
+              <a:t>$$</a:t>
+            </a:r>
+          </a:p>
+        </p:txBody>
+      </p:sp>
+      <p:sp>
+        <p:nvSpPr>
+          <p:cNvPr id="59" name="TextBox 58"/>
+          <p:cNvSpPr txBox="1"/>
+          <p:nvPr/>
+        </p:nvSpPr>
+        <p:spPr>
+          <a:xfrm>
+            <a:off x="6492240" y="4983480"/>
+            <a:ext cx="1280160" cy="502920"/>
+          </a:xfrm>
+          <a:prstGeom prst="rect">
+            <a:avLst/>
+          </a:prstGeom>
+          <a:noFill/>
+        </p:spPr>
+        <p:txBody>
+          <a:bodyPr wrap="square" lIns="0" rIns="0" tIns="0" bIns="0" anchor="ctr">
+            <a:spAutoFit/>
+          </a:bodyPr>
+          <a:lstStyle/>
+          <a:p>
+            <a:pPr algn="ctr">
+              <a:lnSpc>
+                <a:spcPct val="120000"/>
+              </a:lnSpc>
+            </a:pPr>
+            <a:r>
+              <a:rPr sz="1100" b="0">
+                <a:solidFill>
+                  <a:srgbClr val="0F172A"/>
+                </a:solidFill>
+                <a:latin typeface="Microsoft JhengHei"/>
+              </a:rPr>
+              <a:t>$$$</a:t>
+            </a:r>
+          </a:p>
+        </p:txBody>
+      </p:sp>
+      <p:sp>
+        <p:nvSpPr>
+          <p:cNvPr id="60" name="TextBox 59"/>
+          <p:cNvSpPr txBox="1"/>
+          <p:nvPr/>
+        </p:nvSpPr>
+        <p:spPr>
+          <a:xfrm>
+            <a:off x="7772400" y="4983480"/>
+            <a:ext cx="1280160" cy="502920"/>
+          </a:xfrm>
+          <a:prstGeom prst="rect">
+            <a:avLst/>
+          </a:prstGeom>
+          <a:noFill/>
+        </p:spPr>
+        <p:txBody>
+          <a:bodyPr wrap="square" lIns="0" rIns="0" tIns="0" bIns="0" anchor="ctr">
+            <a:spAutoFit/>
+          </a:bodyPr>
+          <a:lstStyle/>
+          <a:p>
+            <a:pPr algn="ctr">
+              <a:lnSpc>
+                <a:spcPct val="120000"/>
+              </a:lnSpc>
+            </a:pPr>
+            <a:r>
+              <a:rPr sz="1100" b="0">
+                <a:solidFill>
+                  <a:srgbClr val="0F172A"/>
+                </a:solidFill>
+                <a:latin typeface="Microsoft JhengHei"/>
+              </a:rPr>
+              <a:t>$$$</a:t>
+            </a:r>
+          </a:p>
+        </p:txBody>
+      </p:sp>
+      <p:sp>
+        <p:nvSpPr>
+          <p:cNvPr id="61" name="TextBox 60"/>
+          <p:cNvSpPr txBox="1"/>
+          <p:nvPr/>
+        </p:nvSpPr>
+        <p:spPr>
+          <a:xfrm>
+            <a:off x="9052560" y="4983480"/>
+            <a:ext cx="1463040" cy="502920"/>
+          </a:xfrm>
+          <a:prstGeom prst="rect">
+            <a:avLst/>
+          </a:prstGeom>
+          <a:noFill/>
+        </p:spPr>
+        <p:txBody>
+          <a:bodyPr wrap="square" lIns="0" rIns="0" tIns="0" bIns="0" anchor="ctr">
+            <a:spAutoFit/>
+          </a:bodyPr>
+          <a:lstStyle/>
+          <a:p>
+            <a:pPr algn="ctr">
+              <a:lnSpc>
+                <a:spcPct val="120000"/>
+              </a:lnSpc>
+            </a:pPr>
+            <a:r>
+              <a:rPr sz="1100" b="1">
+                <a:solidFill>
+                  <a:srgbClr val="0F172A"/>
+                </a:solidFill>
+                <a:latin typeface="Microsoft JhengHei"/>
+              </a:rPr>
+              <a:t>免費</a:t>
+            </a:r>
+          </a:p>
+        </p:txBody>
+      </p:sp>
+      <p:sp>
+        <p:nvSpPr>
+          <p:cNvPr id="62" name="Rectangle 61"/>
+          <p:cNvSpPr/>
+          <p:nvPr/>
+        </p:nvSpPr>
+        <p:spPr>
+          <a:xfrm>
+            <a:off x="731520" y="5486400"/>
+            <a:ext cx="9784080" cy="6350"/>
+          </a:xfrm>
+          <a:prstGeom prst="rect">
+            <a:avLst/>
+          </a:prstGeom>
+          <a:solidFill>
+            <a:srgbClr val="E2E8F0"/>
+          </a:solidFill>
+          <a:ln>
+            <a:noFill/>
+          </a:ln>
+        </p:spPr>
+        <p:style>
+          <a:lnRef idx="1">
+            <a:schemeClr val="accent1"/>
+          </a:lnRef>
+          <a:fillRef idx="3">
+            <a:schemeClr val="accent1"/>
+          </a:fillRef>
+          <a:effectRef idx="2">
+            <a:schemeClr val="accent1"/>
+          </a:effectRef>
+          <a:fontRef idx="minor">
+            <a:schemeClr val="lt1"/>
+          </a:fontRef>
+        </p:style>
+        <p:txBody>
+          <a:bodyPr rtlCol="0" anchor="ctr"/>
+          <a:lstStyle/>
+          <a:p>
+            <a:pPr algn="ctr"/>
+          </a:p>
+        </p:txBody>
+      </p:sp>
+      <p:sp>
+        <p:nvSpPr>
+          <p:cNvPr id="63" name="TextBox 62"/>
+          <p:cNvSpPr txBox="1"/>
+          <p:nvPr/>
+        </p:nvSpPr>
+        <p:spPr>
+          <a:xfrm>
+            <a:off x="731520" y="5486400"/>
+            <a:ext cx="1828800" cy="502920"/>
+          </a:xfrm>
+          <a:prstGeom prst="rect">
+            <a:avLst/>
+          </a:prstGeom>
+          <a:noFill/>
+        </p:spPr>
+        <p:txBody>
+          <a:bodyPr wrap="square" lIns="0" rIns="0" tIns="0" bIns="0" anchor="ctr">
+            <a:spAutoFit/>
+          </a:bodyPr>
+          <a:lstStyle/>
+          <a:p>
+            <a:pPr algn="l">
+              <a:lnSpc>
+                <a:spcPct val="120000"/>
+              </a:lnSpc>
+            </a:pPr>
+            <a:r>
+              <a:rPr sz="1200" b="1">
+                <a:solidFill>
+                  <a:srgbClr val="0F172A"/>
+                </a:solidFill>
+                <a:latin typeface="Microsoft JhengHei"/>
+              </a:rPr>
+              <a:t>學習曲線</a:t>
+            </a:r>
+          </a:p>
+        </p:txBody>
+      </p:sp>
+      <p:sp>
+        <p:nvSpPr>
+          <p:cNvPr id="64" name="TextBox 63"/>
+          <p:cNvSpPr txBox="1"/>
+          <p:nvPr/>
+        </p:nvSpPr>
+        <p:spPr>
+          <a:xfrm>
+            <a:off x="2560320" y="5486400"/>
+            <a:ext cx="1371600" cy="502920"/>
+          </a:xfrm>
+          <a:prstGeom prst="rect">
+            <a:avLst/>
+          </a:prstGeom>
+          <a:noFill/>
+        </p:spPr>
+        <p:txBody>
+          <a:bodyPr wrap="square" lIns="0" rIns="0" tIns="0" bIns="0" anchor="ctr">
+            <a:spAutoFit/>
+          </a:bodyPr>
+          <a:lstStyle/>
+          <a:p>
+            <a:pPr algn="ctr">
+              <a:lnSpc>
+                <a:spcPct val="120000"/>
+              </a:lnSpc>
+            </a:pPr>
+            <a:r>
+              <a:rPr sz="1100" b="1">
+                <a:solidFill>
+                  <a:srgbClr val="FFFFFF"/>
+                </a:solidFill>
+                <a:latin typeface="Microsoft JhengHei"/>
+              </a:rPr>
+              <a:t>低</a:t>
+            </a:r>
+          </a:p>
+        </p:txBody>
+      </p:sp>
+      <p:sp>
+        <p:nvSpPr>
+          <p:cNvPr id="65" name="TextBox 64"/>
+          <p:cNvSpPr txBox="1"/>
+          <p:nvPr/>
+        </p:nvSpPr>
+        <p:spPr>
+          <a:xfrm>
+            <a:off x="3931920" y="5486400"/>
+            <a:ext cx="1280160" cy="502920"/>
+          </a:xfrm>
+          <a:prstGeom prst="rect">
+            <a:avLst/>
+          </a:prstGeom>
+          <a:noFill/>
+        </p:spPr>
+        <p:txBody>
+          <a:bodyPr wrap="square" lIns="0" rIns="0" tIns="0" bIns="0" anchor="ctr">
+            <a:spAutoFit/>
+          </a:bodyPr>
+          <a:lstStyle/>
+          <a:p>
+            <a:pPr algn="ctr">
+              <a:lnSpc>
+                <a:spcPct val="120000"/>
+              </a:lnSpc>
+            </a:pPr>
+            <a:r>
+              <a:rPr sz="1100" b="0">
+                <a:solidFill>
+                  <a:srgbClr val="0F172A"/>
+                </a:solidFill>
+                <a:latin typeface="Microsoft JhengHei"/>
+              </a:rPr>
+              <a:t>高</a:t>
+            </a:r>
+          </a:p>
+        </p:txBody>
+      </p:sp>
+      <p:sp>
+        <p:nvSpPr>
+          <p:cNvPr id="66" name="TextBox 65"/>
+          <p:cNvSpPr txBox="1"/>
+          <p:nvPr/>
+        </p:nvSpPr>
+        <p:spPr>
+          <a:xfrm>
+            <a:off x="5212080" y="5486400"/>
+            <a:ext cx="1280160" cy="502920"/>
+          </a:xfrm>
+          <a:prstGeom prst="rect">
+            <a:avLst/>
+          </a:prstGeom>
+          <a:noFill/>
+        </p:spPr>
+        <p:txBody>
+          <a:bodyPr wrap="square" lIns="0" rIns="0" tIns="0" bIns="0" anchor="ctr">
+            <a:spAutoFit/>
+          </a:bodyPr>
+          <a:lstStyle/>
+          <a:p>
+            <a:pPr algn="ctr">
+              <a:lnSpc>
+                <a:spcPct val="120000"/>
+              </a:lnSpc>
+            </a:pPr>
+            <a:r>
+              <a:rPr sz="1100" b="0">
+                <a:solidFill>
+                  <a:srgbClr val="0F172A"/>
+                </a:solidFill>
+                <a:latin typeface="Microsoft JhengHei"/>
+              </a:rPr>
+              <a:t>中</a:t>
+            </a:r>
+          </a:p>
+        </p:txBody>
+      </p:sp>
+      <p:sp>
+        <p:nvSpPr>
+          <p:cNvPr id="67" name="TextBox 66"/>
+          <p:cNvSpPr txBox="1"/>
+          <p:nvPr/>
+        </p:nvSpPr>
+        <p:spPr>
+          <a:xfrm>
+            <a:off x="6492240" y="5486400"/>
+            <a:ext cx="1280160" cy="502920"/>
+          </a:xfrm>
+          <a:prstGeom prst="rect">
+            <a:avLst/>
+          </a:prstGeom>
+          <a:noFill/>
+        </p:spPr>
+        <p:txBody>
+          <a:bodyPr wrap="square" lIns="0" rIns="0" tIns="0" bIns="0" anchor="ctr">
+            <a:spAutoFit/>
+          </a:bodyPr>
+          <a:lstStyle/>
+          <a:p>
+            <a:pPr algn="ctr">
+              <a:lnSpc>
+                <a:spcPct val="120000"/>
+              </a:lnSpc>
+            </a:pPr>
+            <a:r>
+              <a:rPr sz="1100" b="1">
+                <a:solidFill>
+                  <a:srgbClr val="0F172A"/>
+                </a:solidFill>
+                <a:latin typeface="Microsoft JhengHei"/>
+              </a:rPr>
+              <a:t>低</a:t>
+            </a:r>
+          </a:p>
+        </p:txBody>
+      </p:sp>
+      <p:sp>
+        <p:nvSpPr>
+          <p:cNvPr id="68" name="TextBox 67"/>
+          <p:cNvSpPr txBox="1"/>
+          <p:nvPr/>
+        </p:nvSpPr>
+        <p:spPr>
+          <a:xfrm>
+            <a:off x="7772400" y="5486400"/>
+            <a:ext cx="1280160" cy="502920"/>
+          </a:xfrm>
+          <a:prstGeom prst="rect">
+            <a:avLst/>
+          </a:prstGeom>
+          <a:noFill/>
+        </p:spPr>
+        <p:txBody>
+          <a:bodyPr wrap="square" lIns="0" rIns="0" tIns="0" bIns="0" anchor="ctr">
+            <a:spAutoFit/>
+          </a:bodyPr>
+          <a:lstStyle/>
+          <a:p>
+            <a:pPr algn="ctr">
+              <a:lnSpc>
+                <a:spcPct val="120000"/>
+              </a:lnSpc>
+            </a:pPr>
+            <a:r>
+              <a:rPr sz="1100" b="0">
+                <a:solidFill>
+                  <a:srgbClr val="0F172A"/>
+                </a:solidFill>
+                <a:latin typeface="Microsoft JhengHei"/>
+              </a:rPr>
+              <a:t>高</a:t>
+            </a:r>
+          </a:p>
+        </p:txBody>
+      </p:sp>
+      <p:sp>
+        <p:nvSpPr>
+          <p:cNvPr id="69" name="TextBox 68"/>
+          <p:cNvSpPr txBox="1"/>
+          <p:nvPr/>
+        </p:nvSpPr>
+        <p:spPr>
+          <a:xfrm>
+            <a:off x="9052560" y="5486400"/>
+            <a:ext cx="1463040" cy="502920"/>
+          </a:xfrm>
+          <a:prstGeom prst="rect">
+            <a:avLst/>
+          </a:prstGeom>
+          <a:noFill/>
+        </p:spPr>
+        <p:txBody>
+          <a:bodyPr wrap="square" lIns="0" rIns="0" tIns="0" bIns="0" anchor="ctr">
+            <a:spAutoFit/>
+          </a:bodyPr>
+          <a:lstStyle/>
+          <a:p>
+            <a:pPr algn="ctr">
+              <a:lnSpc>
+                <a:spcPct val="120000"/>
+              </a:lnSpc>
+            </a:pPr>
+            <a:r>
+              <a:rPr sz="1100" b="1">
+                <a:solidFill>
+                  <a:srgbClr val="0F172A"/>
+                </a:solidFill>
+                <a:latin typeface="Microsoft JhengHei"/>
+              </a:rPr>
+              <a:t>低</a:t>
+            </a:r>
+          </a:p>
+        </p:txBody>
+      </p:sp>
+      <p:sp>
+        <p:nvSpPr>
+          <p:cNvPr id="70" name="TextBox 69"/>
+          <p:cNvSpPr txBox="1"/>
+          <p:nvPr/>
+        </p:nvSpPr>
+        <p:spPr>
+          <a:xfrm>
+            <a:off x="731520" y="5852160"/>
+            <a:ext cx="2743200" cy="274320"/>
+          </a:xfrm>
+          <a:prstGeom prst="rect">
+            <a:avLst/>
+          </a:prstGeom>
+          <a:noFill/>
+        </p:spPr>
+        <p:txBody>
+          <a:bodyPr wrap="square" lIns="0" rIns="0" tIns="0" bIns="0" anchor="t">
+            <a:spAutoFit/>
+          </a:bodyPr>
+          <a:lstStyle/>
+          <a:p>
+            <a:pPr algn="l">
+              <a:lnSpc>
+                <a:spcPct val="120000"/>
+              </a:lnSpc>
+            </a:pPr>
+            <a:r>
+              <a:rPr sz="1000" b="0">
+                <a:solidFill>
+                  <a:srgbClr val="64748B"/>
+                </a:solidFill>
+                <a:latin typeface="Microsoft JhengHei"/>
+              </a:rPr>
+              <a:t>✓ 完整支援　△ 部分支援　✗ 不支援</a:t>
+            </a:r>
+          </a:p>
+        </p:txBody>
+      </p:sp>
+      <p:sp>
+        <p:nvSpPr>
+          <p:cNvPr id="71" name="TextBox 70"/>
+          <p:cNvSpPr txBox="1"/>
+          <p:nvPr/>
+        </p:nvSpPr>
+        <p:spPr>
+          <a:xfrm>
+            <a:off x="5029200" y="5852160"/>
+            <a:ext cx="6400800" cy="274320"/>
+          </a:xfrm>
+          <a:prstGeom prst="rect">
+            <a:avLst/>
+          </a:prstGeom>
+          <a:noFill/>
+        </p:spPr>
+        <p:txBody>
+          <a:bodyPr wrap="square" lIns="0" rIns="0" tIns="0" bIns="0" anchor="t">
+            <a:spAutoFit/>
+          </a:bodyPr>
+          <a:lstStyle/>
+          <a:p>
+            <a:pPr algn="r">
+              <a:lnSpc>
+                <a:spcPct val="120000"/>
+              </a:lnSpc>
+            </a:pPr>
+            <a:r>
+              <a:rPr sz="1100" b="1">
+                <a:solidFill>
+                  <a:srgbClr val="0F172A"/>
+                </a:solidFill>
+                <a:latin typeface="Microsoft JhengHei"/>
+              </a:rPr>
+              <a:t>差異化：決策閉環 + 跨部門卡點 + 反推校準三項，市面無同類產品。</a:t>
+            </a:r>
+          </a:p>
+        </p:txBody>
+      </p:sp>
+      <p:sp>
+        <p:nvSpPr>
+          <p:cNvPr id="72" name="TextBox 71"/>
           <p:cNvSpPr txBox="1"/>
           <p:nvPr/>
         </p:nvSpPr>
@@ -6521,7 +8292,7 @@
       </p:sp>
       <p:sp>
         <p:nvSpPr>
-          <p:cNvPr id="27" name="TextBox 26"/>
+          <p:cNvPr id="73" name="TextBox 72"/>
           <p:cNvSpPr txBox="1"/>
           <p:nvPr/>
         </p:nvSpPr>
@@ -6553,7 +8324,7 @@
                 </a:solidFill>
                 <a:latin typeface="Microsoft JhengHei"/>
               </a:rPr>
-              <a:t>12 / 15</a:t>
+              <a:t>12 / 16</a:t>
             </a:r>
           </a:p>
         </p:txBody>
@@ -6696,7 +8467,7 @@
                 </a:solidFill>
                 <a:latin typeface="Microsoft JhengHei"/>
               </a:rPr>
-              <a:t>預期效益</a:t>
+              <a:t>Tech Stack</a:t>
             </a:r>
           </a:p>
         </p:txBody>
@@ -6735,7 +8506,7 @@
                 </a:solidFill>
                 <a:latin typeface="Microsoft JhengHei"/>
               </a:rPr>
-              <a:t>從「主管直覺」到「數據共識」</a:t>
+              <a:t>前端即時 · 後端輕量 · 雲端託管</a:t>
             </a:r>
           </a:p>
         </p:txBody>
@@ -6748,12 +8519,12 @@
         </p:nvSpPr>
         <p:spPr>
           <a:xfrm>
-            <a:off x="609447" y="2194560"/>
-            <a:ext cx="2606040" cy="3840480"/>
+            <a:off x="518007" y="2194560"/>
+            <a:ext cx="2651760" cy="3840480"/>
           </a:xfrm>
           <a:prstGeom prst="roundRect">
             <a:avLst>
-              <a:gd name="adj" fmla="val 8000"/>
+              <a:gd name="adj" fmla="val 6000"/>
             </a:avLst>
           </a:prstGeom>
           <a:noFill/>
@@ -6793,33 +8564,33 @@
         </p:nvSpPr>
         <p:spPr>
           <a:xfrm>
-            <a:off x="609447" y="2651760"/>
-            <a:ext cx="2606040" cy="1280160"/>
-          </a:xfrm>
-          <a:prstGeom prst="rect">
-            <a:avLst/>
-          </a:prstGeom>
-          <a:noFill/>
-        </p:spPr>
-        <p:txBody>
-          <a:bodyPr wrap="square" lIns="0" rIns="0" tIns="0" bIns="0" anchor="t">
-            <a:spAutoFit/>
-          </a:bodyPr>
-          <a:lstStyle/>
-          <a:p>
-            <a:pPr algn="ctr">
-              <a:lnSpc>
-                <a:spcPct val="120000"/>
-              </a:lnSpc>
-            </a:pPr>
-            <a:r>
-              <a:rPr sz="5600" b="1">
-                <a:solidFill>
-                  <a:srgbClr val="0F172A"/>
-                </a:solidFill>
-                <a:latin typeface="Microsoft JhengHei"/>
-              </a:rPr>
-              <a:t>90s</a:t>
+            <a:off x="792327" y="2468880"/>
+            <a:ext cx="2651760" cy="457200"/>
+          </a:xfrm>
+          <a:prstGeom prst="rect">
+            <a:avLst/>
+          </a:prstGeom>
+          <a:noFill/>
+        </p:spPr>
+        <p:txBody>
+          <a:bodyPr wrap="square" lIns="0" rIns="0" tIns="0" bIns="0" anchor="t">
+            <a:spAutoFit/>
+          </a:bodyPr>
+          <a:lstStyle/>
+          <a:p>
+            <a:pPr algn="l">
+              <a:lnSpc>
+                <a:spcPct val="120000"/>
+              </a:lnSpc>
+            </a:pPr>
+            <a:r>
+              <a:rPr sz="2200" b="1">
+                <a:solidFill>
+                  <a:srgbClr val="0F172A"/>
+                </a:solidFill>
+                <a:latin typeface="Microsoft JhengHei"/>
+              </a:rPr>
+              <a:t>01</a:t>
             </a:r>
           </a:p>
         </p:txBody>
@@ -6832,90 +8603,141 @@
         </p:nvSpPr>
         <p:spPr>
           <a:xfrm>
-            <a:off x="883767" y="4206240"/>
-            <a:ext cx="2057400" cy="548640"/>
-          </a:xfrm>
-          <a:prstGeom prst="rect">
-            <a:avLst/>
-          </a:prstGeom>
-          <a:noFill/>
-        </p:spPr>
-        <p:txBody>
-          <a:bodyPr wrap="square" lIns="0" rIns="0" tIns="0" bIns="0" anchor="t">
-            <a:spAutoFit/>
-          </a:bodyPr>
-          <a:lstStyle/>
-          <a:p>
-            <a:pPr algn="ctr">
-              <a:lnSpc>
-                <a:spcPct val="120000"/>
-              </a:lnSpc>
-            </a:pPr>
-            <a:r>
-              <a:rPr sz="1800" b="1">
-                <a:solidFill>
-                  <a:srgbClr val="0F172A"/>
-                </a:solidFill>
-                <a:latin typeface="Microsoft JhengHei"/>
-              </a:rPr>
-              <a:t>員工負載狀態</a:t>
-            </a:r>
-          </a:p>
-        </p:txBody>
-      </p:sp>
-      <p:sp>
-        <p:nvSpPr>
-          <p:cNvPr id="9" name="TextBox 8"/>
-          <p:cNvSpPr txBox="1"/>
-          <p:nvPr/>
-        </p:nvSpPr>
-        <p:spPr>
-          <a:xfrm>
-            <a:off x="883767" y="4846320"/>
-            <a:ext cx="2057400" cy="1097280"/>
-          </a:xfrm>
-          <a:prstGeom prst="rect">
-            <a:avLst/>
-          </a:prstGeom>
-          <a:noFill/>
-        </p:spPr>
-        <p:txBody>
-          <a:bodyPr wrap="square" lIns="0" rIns="0" tIns="0" bIns="0" anchor="t">
-            <a:spAutoFit/>
-          </a:bodyPr>
-          <a:lstStyle/>
-          <a:p>
-            <a:pPr algn="ctr">
-              <a:lnSpc>
-                <a:spcPct val="140000"/>
+            <a:off x="792327" y="2971800"/>
+            <a:ext cx="2103120" cy="548640"/>
+          </a:xfrm>
+          <a:prstGeom prst="rect">
+            <a:avLst/>
+          </a:prstGeom>
+          <a:noFill/>
+        </p:spPr>
+        <p:txBody>
+          <a:bodyPr wrap="square" lIns="0" rIns="0" tIns="0" bIns="0" anchor="t">
+            <a:spAutoFit/>
+          </a:bodyPr>
+          <a:lstStyle/>
+          <a:p>
+            <a:pPr algn="l">
+              <a:lnSpc>
+                <a:spcPct val="120000"/>
+              </a:lnSpc>
+            </a:pPr>
+            <a:r>
+              <a:rPr sz="2200" b="1">
+                <a:solidFill>
+                  <a:srgbClr val="0F172A"/>
+                </a:solidFill>
+                <a:latin typeface="Microsoft JhengHei"/>
+              </a:rPr>
+              <a:t>前端</a:t>
+            </a:r>
+          </a:p>
+        </p:txBody>
+      </p:sp>
+      <p:cxnSp>
+        <p:nvCxnSpPr>
+          <p:cNvPr id="9" name="Connector 8"/>
+          <p:cNvCxnSpPr/>
+          <p:nvPr/>
+        </p:nvCxnSpPr>
+        <p:spPr>
+          <a:xfrm>
+            <a:off x="792327" y="3611880"/>
+            <a:ext cx="822960" cy="0"/>
+          </a:xfrm>
+          <a:prstGeom prst="line">
+            <a:avLst/>
+          </a:prstGeom>
+          <a:ln w="25400">
+            <a:solidFill>
+              <a:srgbClr val="0F172A"/>
+            </a:solidFill>
+          </a:ln>
+        </p:spPr>
+        <p:style>
+          <a:lnRef idx="2">
+            <a:schemeClr val="accent1"/>
+          </a:lnRef>
+          <a:fillRef idx="0">
+            <a:schemeClr val="accent1"/>
+          </a:fillRef>
+          <a:effectRef idx="1">
+            <a:schemeClr val="accent1"/>
+          </a:effectRef>
+          <a:fontRef idx="minor">
+            <a:schemeClr val="tx1"/>
+          </a:fontRef>
+        </p:style>
+      </p:cxnSp>
+      <p:sp>
+        <p:nvSpPr>
+          <p:cNvPr id="10" name="TextBox 9"/>
+          <p:cNvSpPr txBox="1"/>
+          <p:nvPr/>
+        </p:nvSpPr>
+        <p:spPr>
+          <a:xfrm>
+            <a:off x="792327" y="3794760"/>
+            <a:ext cx="2103120" cy="2194560"/>
+          </a:xfrm>
+          <a:prstGeom prst="rect">
+            <a:avLst/>
+          </a:prstGeom>
+          <a:noFill/>
+        </p:spPr>
+        <p:txBody>
+          <a:bodyPr wrap="square" lIns="0" rIns="0" tIns="0" bIns="0" anchor="t">
+            <a:spAutoFit/>
+          </a:bodyPr>
+          <a:lstStyle/>
+          <a:p>
+            <a:pPr algn="l">
+              <a:lnSpc>
+                <a:spcPct val="150000"/>
               </a:lnSpc>
             </a:pPr>
             <a:r>
               <a:rPr sz="1200" b="0">
                 <a:solidFill>
-                  <a:srgbClr val="64748B"/>
-                </a:solidFill>
-                <a:latin typeface="Microsoft JhengHei"/>
-              </a:rPr>
-              <a:t>從 30 分鐘訪談 → 90 秒掃一眼雷達圖</a:t>
-            </a:r>
-          </a:p>
-        </p:txBody>
-      </p:sp>
-      <p:sp>
-        <p:nvSpPr>
-          <p:cNvPr id="10" name="Rounded Rectangle 9"/>
+                  <a:srgbClr val="0F172A"/>
+                </a:solidFill>
+                <a:latin typeface="Microsoft JhengHei"/>
+              </a:rPr>
+              <a:t>React 19 · TypeScript · Vite 6</a:t>
+            </a:r>
+          </a:p>
+          <a:p>
+            <a:pPr algn="l">
+              <a:lnSpc>
+                <a:spcPct val="150000"/>
+              </a:lnSpc>
+            </a:pPr>
+            <a:r>
+              <a:rPr sz="1200" b="0">
+                <a:solidFill>
+                  <a:srgbClr val="0F172A"/>
+                </a:solidFill>
+                <a:latin typeface="Microsoft JhengHei"/>
+              </a:rPr>
+              <a:t>Tailwind v4 · Recharts · Framer Motion</a:t>
+            </a:r>
+          </a:p>
+        </p:txBody>
+      </p:sp>
+      <p:sp>
+        <p:nvSpPr>
+          <p:cNvPr id="11" name="Rounded Rectangle 10"/>
           <p:cNvSpPr/>
           <p:nvPr/>
         </p:nvSpPr>
         <p:spPr>
           <a:xfrm>
-            <a:off x="3398367" y="2194560"/>
-            <a:ext cx="2606040" cy="3840480"/>
+            <a:off x="3352647" y="2194560"/>
+            <a:ext cx="2651760" cy="3840480"/>
           </a:xfrm>
           <a:prstGeom prst="roundRect">
             <a:avLst>
-              <a:gd name="adj" fmla="val 8000"/>
+              <a:gd name="adj" fmla="val 6000"/>
             </a:avLst>
           </a:prstGeom>
           <a:noFill/>
@@ -6949,78 +8771,39 @@
       </p:sp>
       <p:sp>
         <p:nvSpPr>
-          <p:cNvPr id="11" name="TextBox 10"/>
-          <p:cNvSpPr txBox="1"/>
-          <p:nvPr/>
-        </p:nvSpPr>
-        <p:spPr>
-          <a:xfrm>
-            <a:off x="3398367" y="2651760"/>
-            <a:ext cx="2606040" cy="1280160"/>
-          </a:xfrm>
-          <a:prstGeom prst="rect">
-            <a:avLst/>
-          </a:prstGeom>
-          <a:noFill/>
-        </p:spPr>
-        <p:txBody>
-          <a:bodyPr wrap="square" lIns="0" rIns="0" tIns="0" bIns="0" anchor="t">
-            <a:spAutoFit/>
-          </a:bodyPr>
-          <a:lstStyle/>
-          <a:p>
-            <a:pPr algn="ctr">
-              <a:lnSpc>
-                <a:spcPct val="120000"/>
-              </a:lnSpc>
-            </a:pPr>
-            <a:r>
-              <a:rPr sz="5600" b="1">
-                <a:solidFill>
-                  <a:srgbClr val="0F172A"/>
-                </a:solidFill>
-                <a:latin typeface="Microsoft JhengHei"/>
-              </a:rPr>
-              <a:t>67%</a:t>
-            </a:r>
-          </a:p>
-        </p:txBody>
-      </p:sp>
-      <p:sp>
-        <p:nvSpPr>
           <p:cNvPr id="12" name="TextBox 11"/>
           <p:cNvSpPr txBox="1"/>
           <p:nvPr/>
         </p:nvSpPr>
         <p:spPr>
           <a:xfrm>
-            <a:off x="3672687" y="4206240"/>
-            <a:ext cx="2057400" cy="548640"/>
-          </a:xfrm>
-          <a:prstGeom prst="rect">
-            <a:avLst/>
-          </a:prstGeom>
-          <a:noFill/>
-        </p:spPr>
-        <p:txBody>
-          <a:bodyPr wrap="square" lIns="0" rIns="0" tIns="0" bIns="0" anchor="t">
-            <a:spAutoFit/>
-          </a:bodyPr>
-          <a:lstStyle/>
-          <a:p>
-            <a:pPr algn="ctr">
-              <a:lnSpc>
-                <a:spcPct val="120000"/>
-              </a:lnSpc>
-            </a:pPr>
-            <a:r>
-              <a:rPr sz="1800" b="1">
-                <a:solidFill>
-                  <a:srgbClr val="0F172A"/>
-                </a:solidFill>
-                <a:latin typeface="Microsoft JhengHei"/>
-              </a:rPr>
-              <a:t>卡點 Recall</a:t>
+            <a:off x="3626967" y="2468880"/>
+            <a:ext cx="2651760" cy="457200"/>
+          </a:xfrm>
+          <a:prstGeom prst="rect">
+            <a:avLst/>
+          </a:prstGeom>
+          <a:noFill/>
+        </p:spPr>
+        <p:txBody>
+          <a:bodyPr wrap="square" lIns="0" rIns="0" tIns="0" bIns="0" anchor="t">
+            <a:spAutoFit/>
+          </a:bodyPr>
+          <a:lstStyle/>
+          <a:p>
+            <a:pPr algn="l">
+              <a:lnSpc>
+                <a:spcPct val="120000"/>
+              </a:lnSpc>
+            </a:pPr>
+            <a:r>
+              <a:rPr sz="2200" b="1">
+                <a:solidFill>
+                  <a:srgbClr val="0F172A"/>
+                </a:solidFill>
+                <a:latin typeface="Microsoft JhengHei"/>
+              </a:rPr>
+              <a:t>02</a:t>
             </a:r>
           </a:p>
         </p:txBody>
@@ -7033,51 +8816,141 @@
         </p:nvSpPr>
         <p:spPr>
           <a:xfrm>
-            <a:off x="3672687" y="4846320"/>
-            <a:ext cx="2057400" cy="1097280"/>
-          </a:xfrm>
-          <a:prstGeom prst="rect">
-            <a:avLst/>
-          </a:prstGeom>
-          <a:noFill/>
-        </p:spPr>
-        <p:txBody>
-          <a:bodyPr wrap="square" lIns="0" rIns="0" tIns="0" bIns="0" anchor="t">
-            <a:spAutoFit/>
-          </a:bodyPr>
-          <a:lstStyle/>
-          <a:p>
-            <a:pPr algn="ctr">
-              <a:lnSpc>
-                <a:spcPct val="140000"/>
+            <a:off x="3626967" y="2971800"/>
+            <a:ext cx="2103120" cy="548640"/>
+          </a:xfrm>
+          <a:prstGeom prst="rect">
+            <a:avLst/>
+          </a:prstGeom>
+          <a:noFill/>
+        </p:spPr>
+        <p:txBody>
+          <a:bodyPr wrap="square" lIns="0" rIns="0" tIns="0" bIns="0" anchor="t">
+            <a:spAutoFit/>
+          </a:bodyPr>
+          <a:lstStyle/>
+          <a:p>
+            <a:pPr algn="l">
+              <a:lnSpc>
+                <a:spcPct val="120000"/>
+              </a:lnSpc>
+            </a:pPr>
+            <a:r>
+              <a:rPr sz="2200" b="1">
+                <a:solidFill>
+                  <a:srgbClr val="0F172A"/>
+                </a:solidFill>
+                <a:latin typeface="Microsoft JhengHei"/>
+              </a:rPr>
+              <a:t>資料層</a:t>
+            </a:r>
+          </a:p>
+        </p:txBody>
+      </p:sp>
+      <p:cxnSp>
+        <p:nvCxnSpPr>
+          <p:cNvPr id="14" name="Connector 13"/>
+          <p:cNvCxnSpPr/>
+          <p:nvPr/>
+        </p:nvCxnSpPr>
+        <p:spPr>
+          <a:xfrm>
+            <a:off x="3626967" y="3611880"/>
+            <a:ext cx="822960" cy="0"/>
+          </a:xfrm>
+          <a:prstGeom prst="line">
+            <a:avLst/>
+          </a:prstGeom>
+          <a:ln w="25400">
+            <a:solidFill>
+              <a:srgbClr val="0F172A"/>
+            </a:solidFill>
+          </a:ln>
+        </p:spPr>
+        <p:style>
+          <a:lnRef idx="2">
+            <a:schemeClr val="accent1"/>
+          </a:lnRef>
+          <a:fillRef idx="0">
+            <a:schemeClr val="accent1"/>
+          </a:fillRef>
+          <a:effectRef idx="1">
+            <a:schemeClr val="accent1"/>
+          </a:effectRef>
+          <a:fontRef idx="minor">
+            <a:schemeClr val="tx1"/>
+          </a:fontRef>
+        </p:style>
+      </p:cxnSp>
+      <p:sp>
+        <p:nvSpPr>
+          <p:cNvPr id="15" name="TextBox 14"/>
+          <p:cNvSpPr txBox="1"/>
+          <p:nvPr/>
+        </p:nvSpPr>
+        <p:spPr>
+          <a:xfrm>
+            <a:off x="3626967" y="3794760"/>
+            <a:ext cx="2103120" cy="2194560"/>
+          </a:xfrm>
+          <a:prstGeom prst="rect">
+            <a:avLst/>
+          </a:prstGeom>
+          <a:noFill/>
+        </p:spPr>
+        <p:txBody>
+          <a:bodyPr wrap="square" lIns="0" rIns="0" tIns="0" bIns="0" anchor="t">
+            <a:spAutoFit/>
+          </a:bodyPr>
+          <a:lstStyle/>
+          <a:p>
+            <a:pPr algn="l">
+              <a:lnSpc>
+                <a:spcPct val="150000"/>
               </a:lnSpc>
             </a:pPr>
             <a:r>
               <a:rPr sz="1200" b="0">
                 <a:solidFill>
-                  <a:srgbClr val="64748B"/>
-                </a:solidFill>
-                <a:latin typeface="Microsoft JhengHei"/>
-              </a:rPr>
-              <a:t>Asymmetric Detection 自動抓出主管直覺中的「卡」</a:t>
-            </a:r>
-          </a:p>
-        </p:txBody>
-      </p:sp>
-      <p:sp>
-        <p:nvSpPr>
-          <p:cNvPr id="14" name="Rounded Rectangle 13"/>
+                  <a:srgbClr val="0F172A"/>
+                </a:solidFill>
+                <a:latin typeface="Microsoft JhengHei"/>
+              </a:rPr>
+              <a:t>Firebase Auth · Cloud Firestore</a:t>
+            </a:r>
+          </a:p>
+          <a:p>
+            <a:pPr algn="l">
+              <a:lnSpc>
+                <a:spcPct val="150000"/>
+              </a:lnSpc>
+            </a:pPr>
+            <a:r>
+              <a:rPr sz="1200" b="0">
+                <a:solidFill>
+                  <a:srgbClr val="0F172A"/>
+                </a:solidFill>
+                <a:latin typeface="Microsoft JhengHei"/>
+              </a:rPr>
+              <a:t>即時訂閱 / 離線同步</a:t>
+            </a:r>
+          </a:p>
+        </p:txBody>
+      </p:sp>
+      <p:sp>
+        <p:nvSpPr>
+          <p:cNvPr id="16" name="Rounded Rectangle 15"/>
           <p:cNvSpPr/>
           <p:nvPr/>
         </p:nvSpPr>
         <p:spPr>
           <a:xfrm>
             <a:off x="6187287" y="2194560"/>
-            <a:ext cx="2606040" cy="3840480"/>
+            <a:ext cx="2651760" cy="3840480"/>
           </a:xfrm>
           <a:prstGeom prst="roundRect">
             <a:avLst>
-              <a:gd name="adj" fmla="val 8000"/>
+              <a:gd name="adj" fmla="val 6000"/>
             </a:avLst>
           </a:prstGeom>
           <a:noFill/>
@@ -7111,135 +8984,186 @@
       </p:sp>
       <p:sp>
         <p:nvSpPr>
-          <p:cNvPr id="15" name="TextBox 14"/>
-          <p:cNvSpPr txBox="1"/>
-          <p:nvPr/>
-        </p:nvSpPr>
-        <p:spPr>
-          <a:xfrm>
-            <a:off x="6187287" y="2651760"/>
-            <a:ext cx="2606040" cy="1280160"/>
-          </a:xfrm>
-          <a:prstGeom prst="rect">
-            <a:avLst/>
-          </a:prstGeom>
-          <a:noFill/>
-        </p:spPr>
-        <p:txBody>
-          <a:bodyPr wrap="square" lIns="0" rIns="0" tIns="0" bIns="0" anchor="t">
-            <a:spAutoFit/>
-          </a:bodyPr>
-          <a:lstStyle/>
-          <a:p>
-            <a:pPr algn="ctr">
-              <a:lnSpc>
-                <a:spcPct val="120000"/>
-              </a:lnSpc>
-            </a:pPr>
-            <a:r>
-              <a:rPr sz="5600" b="1">
-                <a:solidFill>
-                  <a:srgbClr val="0F172A"/>
-                </a:solidFill>
-                <a:latin typeface="Microsoft JhengHei"/>
-              </a:rPr>
-              <a:t>100%</a:t>
-            </a:r>
-          </a:p>
-        </p:txBody>
-      </p:sp>
-      <p:sp>
-        <p:nvSpPr>
-          <p:cNvPr id="16" name="TextBox 15"/>
-          <p:cNvSpPr txBox="1"/>
-          <p:nvPr/>
-        </p:nvSpPr>
-        <p:spPr>
-          <a:xfrm>
-            <a:off x="6461607" y="4206240"/>
-            <a:ext cx="2057400" cy="548640"/>
-          </a:xfrm>
-          <a:prstGeom prst="rect">
-            <a:avLst/>
-          </a:prstGeom>
-          <a:noFill/>
-        </p:spPr>
-        <p:txBody>
-          <a:bodyPr wrap="square" lIns="0" rIns="0" tIns="0" bIns="0" anchor="t">
-            <a:spAutoFit/>
-          </a:bodyPr>
-          <a:lstStyle/>
-          <a:p>
-            <a:pPr algn="ctr">
-              <a:lnSpc>
-                <a:spcPct val="120000"/>
-              </a:lnSpc>
-            </a:pPr>
-            <a:r>
-              <a:rPr sz="1800" b="1">
-                <a:solidFill>
-                  <a:srgbClr val="0F172A"/>
-                </a:solidFill>
-                <a:latin typeface="Microsoft JhengHei"/>
-              </a:rPr>
-              <a:t>決策回看率</a:t>
-            </a:r>
-          </a:p>
-        </p:txBody>
-      </p:sp>
-      <p:sp>
-        <p:nvSpPr>
           <p:cNvPr id="17" name="TextBox 16"/>
           <p:cNvSpPr txBox="1"/>
           <p:nvPr/>
         </p:nvSpPr>
         <p:spPr>
           <a:xfrm>
-            <a:off x="6461607" y="4846320"/>
-            <a:ext cx="2057400" cy="1097280"/>
-          </a:xfrm>
-          <a:prstGeom prst="rect">
-            <a:avLst/>
-          </a:prstGeom>
-          <a:noFill/>
-        </p:spPr>
-        <p:txBody>
-          <a:bodyPr wrap="square" lIns="0" rIns="0" tIns="0" bIns="0" anchor="t">
-            <a:spAutoFit/>
-          </a:bodyPr>
-          <a:lstStyle/>
-          <a:p>
-            <a:pPr algn="ctr">
-              <a:lnSpc>
-                <a:spcPct val="140000"/>
+            <a:off x="6461607" y="2468880"/>
+            <a:ext cx="2651760" cy="457200"/>
+          </a:xfrm>
+          <a:prstGeom prst="rect">
+            <a:avLst/>
+          </a:prstGeom>
+          <a:noFill/>
+        </p:spPr>
+        <p:txBody>
+          <a:bodyPr wrap="square" lIns="0" rIns="0" tIns="0" bIns="0" anchor="t">
+            <a:spAutoFit/>
+          </a:bodyPr>
+          <a:lstStyle/>
+          <a:p>
+            <a:pPr algn="l">
+              <a:lnSpc>
+                <a:spcPct val="120000"/>
+              </a:lnSpc>
+            </a:pPr>
+            <a:r>
+              <a:rPr sz="2200" b="1">
+                <a:solidFill>
+                  <a:srgbClr val="0F172A"/>
+                </a:solidFill>
+                <a:latin typeface="Microsoft JhengHei"/>
+              </a:rPr>
+              <a:t>03</a:t>
+            </a:r>
+          </a:p>
+        </p:txBody>
+      </p:sp>
+      <p:sp>
+        <p:nvSpPr>
+          <p:cNvPr id="18" name="TextBox 17"/>
+          <p:cNvSpPr txBox="1"/>
+          <p:nvPr/>
+        </p:nvSpPr>
+        <p:spPr>
+          <a:xfrm>
+            <a:off x="6461607" y="2971800"/>
+            <a:ext cx="2103120" cy="548640"/>
+          </a:xfrm>
+          <a:prstGeom prst="rect">
+            <a:avLst/>
+          </a:prstGeom>
+          <a:noFill/>
+        </p:spPr>
+        <p:txBody>
+          <a:bodyPr wrap="square" lIns="0" rIns="0" tIns="0" bIns="0" anchor="t">
+            <a:spAutoFit/>
+          </a:bodyPr>
+          <a:lstStyle/>
+          <a:p>
+            <a:pPr algn="l">
+              <a:lnSpc>
+                <a:spcPct val="120000"/>
+              </a:lnSpc>
+            </a:pPr>
+            <a:r>
+              <a:rPr sz="2200" b="1">
+                <a:solidFill>
+                  <a:srgbClr val="0F172A"/>
+                </a:solidFill>
+                <a:latin typeface="Microsoft JhengHei"/>
+              </a:rPr>
+              <a:t>演算法</a:t>
+            </a:r>
+          </a:p>
+        </p:txBody>
+      </p:sp>
+      <p:cxnSp>
+        <p:nvCxnSpPr>
+          <p:cNvPr id="19" name="Connector 18"/>
+          <p:cNvCxnSpPr/>
+          <p:nvPr/>
+        </p:nvCxnSpPr>
+        <p:spPr>
+          <a:xfrm>
+            <a:off x="6461607" y="3611880"/>
+            <a:ext cx="822960" cy="0"/>
+          </a:xfrm>
+          <a:prstGeom prst="line">
+            <a:avLst/>
+          </a:prstGeom>
+          <a:ln w="25400">
+            <a:solidFill>
+              <a:srgbClr val="0F172A"/>
+            </a:solidFill>
+          </a:ln>
+        </p:spPr>
+        <p:style>
+          <a:lnRef idx="2">
+            <a:schemeClr val="accent1"/>
+          </a:lnRef>
+          <a:fillRef idx="0">
+            <a:schemeClr val="accent1"/>
+          </a:fillRef>
+          <a:effectRef idx="1">
+            <a:schemeClr val="accent1"/>
+          </a:effectRef>
+          <a:fontRef idx="minor">
+            <a:schemeClr val="tx1"/>
+          </a:fontRef>
+        </p:style>
+      </p:cxnSp>
+      <p:sp>
+        <p:nvSpPr>
+          <p:cNvPr id="20" name="TextBox 19"/>
+          <p:cNvSpPr txBox="1"/>
+          <p:nvPr/>
+        </p:nvSpPr>
+        <p:spPr>
+          <a:xfrm>
+            <a:off x="6461607" y="3794760"/>
+            <a:ext cx="2103120" cy="2194560"/>
+          </a:xfrm>
+          <a:prstGeom prst="rect">
+            <a:avLst/>
+          </a:prstGeom>
+          <a:noFill/>
+        </p:spPr>
+        <p:txBody>
+          <a:bodyPr wrap="square" lIns="0" rIns="0" tIns="0" bIns="0" anchor="t">
+            <a:spAutoFit/>
+          </a:bodyPr>
+          <a:lstStyle/>
+          <a:p>
+            <a:pPr algn="l">
+              <a:lnSpc>
+                <a:spcPct val="150000"/>
               </a:lnSpc>
             </a:pPr>
             <a:r>
               <a:rPr sz="1200" b="0">
                 <a:solidFill>
-                  <a:srgbClr val="64748B"/>
-                </a:solidFill>
-                <a:latin typeface="Microsoft JhengHei"/>
-              </a:rPr>
-              <a:t>v2.1 = 0%（沒人事後看）→ v2.2 = 強制回顧</a:t>
-            </a:r>
-          </a:p>
-        </p:txBody>
-      </p:sp>
-      <p:sp>
-        <p:nvSpPr>
-          <p:cNvPr id="18" name="Rounded Rectangle 17"/>
+                  <a:srgbClr val="0F172A"/>
+                </a:solidFill>
+                <a:latin typeface="Microsoft JhengHei"/>
+              </a:rPr>
+              <a:t>25+ 算法 · 純前端計算</a:t>
+            </a:r>
+          </a:p>
+          <a:p>
+            <a:pPr algn="l">
+              <a:lnSpc>
+                <a:spcPct val="150000"/>
+              </a:lnSpc>
+            </a:pPr>
+            <a:r>
+              <a:rPr sz="1200" b="0">
+                <a:solidFill>
+                  <a:srgbClr val="0F172A"/>
+                </a:solidFill>
+                <a:latin typeface="Microsoft JhengHei"/>
+              </a:rPr>
+              <a:t>BM25F / Gini / Cohort Regression</a:t>
+            </a:r>
+          </a:p>
+        </p:txBody>
+      </p:sp>
+      <p:sp>
+        <p:nvSpPr>
+          <p:cNvPr id="21" name="Rounded Rectangle 20"/>
           <p:cNvSpPr/>
           <p:nvPr/>
         </p:nvSpPr>
         <p:spPr>
           <a:xfrm>
-            <a:off x="8976207" y="2194560"/>
-            <a:ext cx="2606040" cy="3840480"/>
+            <a:off x="9021927" y="2194560"/>
+            <a:ext cx="2651760" cy="3840480"/>
           </a:xfrm>
           <a:prstGeom prst="roundRect">
             <a:avLst>
-              <a:gd name="adj" fmla="val 8000"/>
+              <a:gd name="adj" fmla="val 6000"/>
             </a:avLst>
           </a:prstGeom>
           <a:noFill/>
@@ -7273,124 +9197,175 @@
       </p:sp>
       <p:sp>
         <p:nvSpPr>
-          <p:cNvPr id="19" name="TextBox 18"/>
-          <p:cNvSpPr txBox="1"/>
-          <p:nvPr/>
-        </p:nvSpPr>
-        <p:spPr>
-          <a:xfrm>
-            <a:off x="8976207" y="2651760"/>
-            <a:ext cx="2606040" cy="1280160"/>
-          </a:xfrm>
-          <a:prstGeom prst="rect">
-            <a:avLst/>
-          </a:prstGeom>
-          <a:noFill/>
-        </p:spPr>
-        <p:txBody>
-          <a:bodyPr wrap="square" lIns="0" rIns="0" tIns="0" bIns="0" anchor="t">
-            <a:spAutoFit/>
-          </a:bodyPr>
-          <a:lstStyle/>
-          <a:p>
-            <a:pPr algn="ctr">
-              <a:lnSpc>
-                <a:spcPct val="120000"/>
-              </a:lnSpc>
-            </a:pPr>
-            <a:r>
-              <a:rPr sz="5600" b="1">
-                <a:solidFill>
-                  <a:srgbClr val="0F172A"/>
-                </a:solidFill>
-                <a:latin typeface="Microsoft JhengHei"/>
-              </a:rPr>
-              <a:t>0元</a:t>
-            </a:r>
-          </a:p>
-        </p:txBody>
-      </p:sp>
-      <p:sp>
-        <p:nvSpPr>
-          <p:cNvPr id="20" name="TextBox 19"/>
-          <p:cNvSpPr txBox="1"/>
-          <p:nvPr/>
-        </p:nvSpPr>
-        <p:spPr>
-          <a:xfrm>
-            <a:off x="9250527" y="4206240"/>
-            <a:ext cx="2057400" cy="548640"/>
-          </a:xfrm>
-          <a:prstGeom prst="rect">
-            <a:avLst/>
-          </a:prstGeom>
-          <a:noFill/>
-        </p:spPr>
-        <p:txBody>
-          <a:bodyPr wrap="square" lIns="0" rIns="0" tIns="0" bIns="0" anchor="t">
-            <a:spAutoFit/>
-          </a:bodyPr>
-          <a:lstStyle/>
-          <a:p>
-            <a:pPr algn="ctr">
-              <a:lnSpc>
-                <a:spcPct val="120000"/>
-              </a:lnSpc>
-            </a:pPr>
-            <a:r>
-              <a:rPr sz="1800" b="1">
-                <a:solidFill>
-                  <a:srgbClr val="0F172A"/>
-                </a:solidFill>
-                <a:latin typeface="Microsoft JhengHei"/>
-              </a:rPr>
-              <a:t>授權成本</a:t>
-            </a:r>
-          </a:p>
-        </p:txBody>
-      </p:sp>
-      <p:sp>
-        <p:nvSpPr>
-          <p:cNvPr id="21" name="TextBox 20"/>
-          <p:cNvSpPr txBox="1"/>
-          <p:nvPr/>
-        </p:nvSpPr>
-        <p:spPr>
-          <a:xfrm>
-            <a:off x="9250527" y="4846320"/>
-            <a:ext cx="2057400" cy="1097280"/>
-          </a:xfrm>
-          <a:prstGeom prst="rect">
-            <a:avLst/>
-          </a:prstGeom>
-          <a:noFill/>
-        </p:spPr>
-        <p:txBody>
-          <a:bodyPr wrap="square" lIns="0" rIns="0" tIns="0" bIns="0" anchor="t">
-            <a:spAutoFit/>
-          </a:bodyPr>
-          <a:lstStyle/>
-          <a:p>
-            <a:pPr algn="ctr">
-              <a:lnSpc>
-                <a:spcPct val="140000"/>
+          <p:cNvPr id="22" name="TextBox 21"/>
+          <p:cNvSpPr txBox="1"/>
+          <p:nvPr/>
+        </p:nvSpPr>
+        <p:spPr>
+          <a:xfrm>
+            <a:off x="9296247" y="2468880"/>
+            <a:ext cx="2651760" cy="457200"/>
+          </a:xfrm>
+          <a:prstGeom prst="rect">
+            <a:avLst/>
+          </a:prstGeom>
+          <a:noFill/>
+        </p:spPr>
+        <p:txBody>
+          <a:bodyPr wrap="square" lIns="0" rIns="0" tIns="0" bIns="0" anchor="t">
+            <a:spAutoFit/>
+          </a:bodyPr>
+          <a:lstStyle/>
+          <a:p>
+            <a:pPr algn="l">
+              <a:lnSpc>
+                <a:spcPct val="120000"/>
+              </a:lnSpc>
+            </a:pPr>
+            <a:r>
+              <a:rPr sz="2200" b="1">
+                <a:solidFill>
+                  <a:srgbClr val="0F172A"/>
+                </a:solidFill>
+                <a:latin typeface="Microsoft JhengHei"/>
+              </a:rPr>
+              <a:t>04</a:t>
+            </a:r>
+          </a:p>
+        </p:txBody>
+      </p:sp>
+      <p:sp>
+        <p:nvSpPr>
+          <p:cNvPr id="23" name="TextBox 22"/>
+          <p:cNvSpPr txBox="1"/>
+          <p:nvPr/>
+        </p:nvSpPr>
+        <p:spPr>
+          <a:xfrm>
+            <a:off x="9296247" y="2971800"/>
+            <a:ext cx="2103120" cy="548640"/>
+          </a:xfrm>
+          <a:prstGeom prst="rect">
+            <a:avLst/>
+          </a:prstGeom>
+          <a:noFill/>
+        </p:spPr>
+        <p:txBody>
+          <a:bodyPr wrap="square" lIns="0" rIns="0" tIns="0" bIns="0" anchor="t">
+            <a:spAutoFit/>
+          </a:bodyPr>
+          <a:lstStyle/>
+          <a:p>
+            <a:pPr algn="l">
+              <a:lnSpc>
+                <a:spcPct val="120000"/>
+              </a:lnSpc>
+            </a:pPr>
+            <a:r>
+              <a:rPr sz="2200" b="1">
+                <a:solidFill>
+                  <a:srgbClr val="0F172A"/>
+                </a:solidFill>
+                <a:latin typeface="Microsoft JhengHei"/>
+              </a:rPr>
+              <a:t>部署</a:t>
+            </a:r>
+          </a:p>
+        </p:txBody>
+      </p:sp>
+      <p:cxnSp>
+        <p:nvCxnSpPr>
+          <p:cNvPr id="24" name="Connector 23"/>
+          <p:cNvCxnSpPr/>
+          <p:nvPr/>
+        </p:nvCxnSpPr>
+        <p:spPr>
+          <a:xfrm>
+            <a:off x="9296247" y="3611880"/>
+            <a:ext cx="822960" cy="0"/>
+          </a:xfrm>
+          <a:prstGeom prst="line">
+            <a:avLst/>
+          </a:prstGeom>
+          <a:ln w="25400">
+            <a:solidFill>
+              <a:srgbClr val="0F172A"/>
+            </a:solidFill>
+          </a:ln>
+        </p:spPr>
+        <p:style>
+          <a:lnRef idx="2">
+            <a:schemeClr val="accent1"/>
+          </a:lnRef>
+          <a:fillRef idx="0">
+            <a:schemeClr val="accent1"/>
+          </a:fillRef>
+          <a:effectRef idx="1">
+            <a:schemeClr val="accent1"/>
+          </a:effectRef>
+          <a:fontRef idx="minor">
+            <a:schemeClr val="tx1"/>
+          </a:fontRef>
+        </p:style>
+      </p:cxnSp>
+      <p:sp>
+        <p:nvSpPr>
+          <p:cNvPr id="25" name="TextBox 24"/>
+          <p:cNvSpPr txBox="1"/>
+          <p:nvPr/>
+        </p:nvSpPr>
+        <p:spPr>
+          <a:xfrm>
+            <a:off x="9296247" y="3794760"/>
+            <a:ext cx="2103120" cy="2194560"/>
+          </a:xfrm>
+          <a:prstGeom prst="rect">
+            <a:avLst/>
+          </a:prstGeom>
+          <a:noFill/>
+        </p:spPr>
+        <p:txBody>
+          <a:bodyPr wrap="square" lIns="0" rIns="0" tIns="0" bIns="0" anchor="t">
+            <a:spAutoFit/>
+          </a:bodyPr>
+          <a:lstStyle/>
+          <a:p>
+            <a:pPr algn="l">
+              <a:lnSpc>
+                <a:spcPct val="150000"/>
               </a:lnSpc>
             </a:pPr>
             <a:r>
               <a:rPr sz="1200" b="0">
                 <a:solidFill>
-                  <a:srgbClr val="64748B"/>
-                </a:solidFill>
-                <a:latin typeface="Microsoft JhengHei"/>
-              </a:rPr>
-              <a:t>全用開源 + Firebase 免費額度</a:t>
-            </a:r>
-          </a:p>
-        </p:txBody>
-      </p:sp>
-      <p:sp>
-        <p:nvSpPr>
-          <p:cNvPr id="22" name="TextBox 21"/>
+                  <a:srgbClr val="0F172A"/>
+                </a:solidFill>
+                <a:latin typeface="Microsoft JhengHei"/>
+              </a:rPr>
+              <a:t>Vercel · GitHub Actions</a:t>
+            </a:r>
+          </a:p>
+          <a:p>
+            <a:pPr algn="l">
+              <a:lnSpc>
+                <a:spcPct val="150000"/>
+              </a:lnSpc>
+            </a:pPr>
+            <a:r>
+              <a:rPr sz="1200" b="0">
+                <a:solidFill>
+                  <a:srgbClr val="0F172A"/>
+                </a:solidFill>
+                <a:latin typeface="Microsoft JhengHei"/>
+              </a:rPr>
+              <a:t>CI/CD 自動發佈</a:t>
+            </a:r>
+          </a:p>
+        </p:txBody>
+      </p:sp>
+      <p:sp>
+        <p:nvSpPr>
+          <p:cNvPr id="26" name="TextBox 25"/>
           <p:cNvSpPr txBox="1"/>
           <p:nvPr/>
         </p:nvSpPr>
@@ -7429,7 +9404,7 @@
       </p:sp>
       <p:sp>
         <p:nvSpPr>
-          <p:cNvPr id="23" name="TextBox 22"/>
+          <p:cNvPr id="27" name="TextBox 26"/>
           <p:cNvSpPr txBox="1"/>
           <p:nvPr/>
         </p:nvSpPr>
@@ -7461,7 +9436,7 @@
                 </a:solidFill>
                 <a:latin typeface="Microsoft JhengHei"/>
               </a:rPr>
-              <a:t>13 / 15</a:t>
+              <a:t>13 / 16</a:t>
             </a:r>
           </a:p>
         </p:txBody>
@@ -7604,7 +9579,7 @@
                 </a:solidFill>
                 <a:latin typeface="Microsoft JhengHei"/>
               </a:rPr>
-              <a:t>已知限制</a:t>
+              <a:t>預期效益</a:t>
             </a:r>
           </a:p>
         </p:txBody>
@@ -7643,7 +9618,7 @@
                 </a:solidFill>
                 <a:latin typeface="Microsoft JhengHei"/>
               </a:rPr>
-              <a:t>我們知道哪裡還不夠好 — 答辯誠實版</a:t>
+              <a:t>從「主管直覺」到「數據共識」</a:t>
             </a:r>
           </a:p>
         </p:txBody>
@@ -7656,12 +9631,12 @@
         </p:nvSpPr>
         <p:spPr>
           <a:xfrm>
-            <a:off x="731520" y="2103120"/>
-            <a:ext cx="10698480" cy="822960"/>
+            <a:off x="609447" y="2194560"/>
+            <a:ext cx="2606040" cy="3840480"/>
           </a:xfrm>
           <a:prstGeom prst="roundRect">
             <a:avLst>
-              <a:gd name="adj" fmla="val 25000"/>
+              <a:gd name="adj" fmla="val 8000"/>
             </a:avLst>
           </a:prstGeom>
           <a:noFill/>
@@ -7701,8 +9676,8 @@
         </p:nvSpPr>
         <p:spPr>
           <a:xfrm>
-            <a:off x="1005840" y="2148840"/>
-            <a:ext cx="548640" cy="640080"/>
+            <a:off x="609447" y="2651760"/>
+            <a:ext cx="2606040" cy="1280160"/>
           </a:xfrm>
           <a:prstGeom prst="rect">
             <a:avLst/>
@@ -7721,13 +9696,13 @@
               </a:lnSpc>
             </a:pPr>
             <a:r>
-              <a:rPr sz="3200" b="1">
-                <a:solidFill>
-                  <a:srgbClr val="E11448"/>
-                </a:solidFill>
-                <a:latin typeface="Microsoft JhengHei"/>
-              </a:rPr>
-              <a:t>!</a:t>
+              <a:rPr sz="5600" b="1">
+                <a:solidFill>
+                  <a:srgbClr val="0F172A"/>
+                </a:solidFill>
+                <a:latin typeface="Microsoft JhengHei"/>
+              </a:rPr>
+              <a:t>90s</a:t>
             </a:r>
           </a:p>
         </p:txBody>
@@ -7740,33 +9715,33 @@
         </p:nvSpPr>
         <p:spPr>
           <a:xfrm>
-            <a:off x="1645920" y="2194560"/>
-            <a:ext cx="9144000" cy="365760"/>
-          </a:xfrm>
-          <a:prstGeom prst="rect">
-            <a:avLst/>
-          </a:prstGeom>
-          <a:noFill/>
-        </p:spPr>
-        <p:txBody>
-          <a:bodyPr wrap="square" lIns="0" rIns="0" tIns="0" bIns="0" anchor="t">
-            <a:spAutoFit/>
-          </a:bodyPr>
-          <a:lstStyle/>
-          <a:p>
-            <a:pPr algn="l">
-              <a:lnSpc>
-                <a:spcPct val="120000"/>
-              </a:lnSpc>
-            </a:pPr>
-            <a:r>
-              <a:rPr sz="1600" b="1">
-                <a:solidFill>
-                  <a:srgbClr val="0F172A"/>
-                </a:solidFill>
-                <a:latin typeface="Microsoft JhengHei"/>
-              </a:rPr>
-              <a:t>SEED 不是真實資料</a:t>
+            <a:off x="883767" y="4206240"/>
+            <a:ext cx="2057400" cy="548640"/>
+          </a:xfrm>
+          <a:prstGeom prst="rect">
+            <a:avLst/>
+          </a:prstGeom>
+          <a:noFill/>
+        </p:spPr>
+        <p:txBody>
+          <a:bodyPr wrap="square" lIns="0" rIns="0" tIns="0" bIns="0" anchor="t">
+            <a:spAutoFit/>
+          </a:bodyPr>
+          <a:lstStyle/>
+          <a:p>
+            <a:pPr algn="ctr">
+              <a:lnSpc>
+                <a:spcPct val="120000"/>
+              </a:lnSpc>
+            </a:pPr>
+            <a:r>
+              <a:rPr sz="1800" b="1">
+                <a:solidFill>
+                  <a:srgbClr val="0F172A"/>
+                </a:solidFill>
+                <a:latin typeface="Microsoft JhengHei"/>
+              </a:rPr>
+              <a:t>員工負載狀態</a:t>
             </a:r>
           </a:p>
         </p:txBody>
@@ -7779,23 +9754,23 @@
         </p:nvSpPr>
         <p:spPr>
           <a:xfrm>
-            <a:off x="1645920" y="2560320"/>
-            <a:ext cx="9144000" cy="365760"/>
-          </a:xfrm>
-          <a:prstGeom prst="rect">
-            <a:avLst/>
-          </a:prstGeom>
-          <a:noFill/>
-        </p:spPr>
-        <p:txBody>
-          <a:bodyPr wrap="square" lIns="0" rIns="0" tIns="0" bIns="0" anchor="t">
-            <a:spAutoFit/>
-          </a:bodyPr>
-          <a:lstStyle/>
-          <a:p>
-            <a:pPr algn="l">
-              <a:lnSpc>
-                <a:spcPct val="120000"/>
+            <a:off x="883767" y="4846320"/>
+            <a:ext cx="2057400" cy="1097280"/>
+          </a:xfrm>
+          <a:prstGeom prst="rect">
+            <a:avLst/>
+          </a:prstGeom>
+          <a:noFill/>
+        </p:spPr>
+        <p:txBody>
+          <a:bodyPr wrap="square" lIns="0" rIns="0" tIns="0" bIns="0" anchor="t">
+            <a:spAutoFit/>
+          </a:bodyPr>
+          <a:lstStyle/>
+          <a:p>
+            <a:pPr algn="ctr">
+              <a:lnSpc>
+                <a:spcPct val="140000"/>
               </a:lnSpc>
             </a:pPr>
             <a:r>
@@ -7805,7 +9780,7 @@
                 </a:solidFill>
                 <a:latin typeface="Microsoft JhengHei"/>
               </a:rPr>
-              <a:t>所有參數都在 SEED 上校準。下個階段需要拿真實資料重跑反推。</a:t>
+              <a:t>從 30 分鐘訪談 → 90 秒掃一眼雷達圖</a:t>
             </a:r>
           </a:p>
         </p:txBody>
@@ -7818,12 +9793,12 @@
         </p:nvSpPr>
         <p:spPr>
           <a:xfrm>
-            <a:off x="731520" y="3063240"/>
-            <a:ext cx="10698480" cy="822960"/>
+            <a:off x="3398367" y="2194560"/>
+            <a:ext cx="2606040" cy="3840480"/>
           </a:xfrm>
           <a:prstGeom prst="roundRect">
             <a:avLst>
-              <a:gd name="adj" fmla="val 25000"/>
+              <a:gd name="adj" fmla="val 8000"/>
             </a:avLst>
           </a:prstGeom>
           <a:noFill/>
@@ -7863,8 +9838,8 @@
         </p:nvSpPr>
         <p:spPr>
           <a:xfrm>
-            <a:off x="1005840" y="3108960"/>
-            <a:ext cx="548640" cy="640080"/>
+            <a:off x="3398367" y="2651760"/>
+            <a:ext cx="2606040" cy="1280160"/>
           </a:xfrm>
           <a:prstGeom prst="rect">
             <a:avLst/>
@@ -7883,13 +9858,13 @@
               </a:lnSpc>
             </a:pPr>
             <a:r>
-              <a:rPr sz="3200" b="1">
-                <a:solidFill>
-                  <a:srgbClr val="E11448"/>
-                </a:solidFill>
-                <a:latin typeface="Microsoft JhengHei"/>
-              </a:rPr>
-              <a:t>!</a:t>
+              <a:rPr sz="5600" b="1">
+                <a:solidFill>
+                  <a:srgbClr val="0F172A"/>
+                </a:solidFill>
+                <a:latin typeface="Microsoft JhengHei"/>
+              </a:rPr>
+              <a:t>67%</a:t>
             </a:r>
           </a:p>
         </p:txBody>
@@ -7902,33 +9877,33 @@
         </p:nvSpPr>
         <p:spPr>
           <a:xfrm>
-            <a:off x="1645920" y="3154680"/>
-            <a:ext cx="9144000" cy="365760"/>
-          </a:xfrm>
-          <a:prstGeom prst="rect">
-            <a:avLst/>
-          </a:prstGeom>
-          <a:noFill/>
-        </p:spPr>
-        <p:txBody>
-          <a:bodyPr wrap="square" lIns="0" rIns="0" tIns="0" bIns="0" anchor="t">
-            <a:spAutoFit/>
-          </a:bodyPr>
-          <a:lstStyle/>
-          <a:p>
-            <a:pPr algn="l">
-              <a:lnSpc>
-                <a:spcPct val="120000"/>
-              </a:lnSpc>
-            </a:pPr>
-            <a:r>
-              <a:rPr sz="1600" b="1">
-                <a:solidFill>
-                  <a:srgbClr val="0F172A"/>
-                </a:solidFill>
-                <a:latin typeface="Microsoft JhengHei"/>
-              </a:rPr>
-              <a:t>What-if 不能模擬「新聘」情境</a:t>
+            <a:off x="3672687" y="4206240"/>
+            <a:ext cx="2057400" cy="548640"/>
+          </a:xfrm>
+          <a:prstGeom prst="rect">
+            <a:avLst/>
+          </a:prstGeom>
+          <a:noFill/>
+        </p:spPr>
+        <p:txBody>
+          <a:bodyPr wrap="square" lIns="0" rIns="0" tIns="0" bIns="0" anchor="t">
+            <a:spAutoFit/>
+          </a:bodyPr>
+          <a:lstStyle/>
+          <a:p>
+            <a:pPr algn="ctr">
+              <a:lnSpc>
+                <a:spcPct val="120000"/>
+              </a:lnSpc>
+            </a:pPr>
+            <a:r>
+              <a:rPr sz="1800" b="1">
+                <a:solidFill>
+                  <a:srgbClr val="0F172A"/>
+                </a:solidFill>
+                <a:latin typeface="Microsoft JhengHei"/>
+              </a:rPr>
+              <a:t>卡點 Recall</a:t>
             </a:r>
           </a:p>
         </p:txBody>
@@ -7941,23 +9916,23 @@
         </p:nvSpPr>
         <p:spPr>
           <a:xfrm>
-            <a:off x="1645920" y="3520440"/>
-            <a:ext cx="9144000" cy="365760"/>
-          </a:xfrm>
-          <a:prstGeom prst="rect">
-            <a:avLst/>
-          </a:prstGeom>
-          <a:noFill/>
-        </p:spPr>
-        <p:txBody>
-          <a:bodyPr wrap="square" lIns="0" rIns="0" tIns="0" bIns="0" anchor="t">
-            <a:spAutoFit/>
-          </a:bodyPr>
-          <a:lstStyle/>
-          <a:p>
-            <a:pPr algn="l">
-              <a:lnSpc>
-                <a:spcPct val="120000"/>
+            <a:off x="3672687" y="4846320"/>
+            <a:ext cx="2057400" cy="1097280"/>
+          </a:xfrm>
+          <a:prstGeom prst="rect">
+            <a:avLst/>
+          </a:prstGeom>
+          <a:noFill/>
+        </p:spPr>
+        <p:txBody>
+          <a:bodyPr wrap="square" lIns="0" rIns="0" tIns="0" bIns="0" anchor="t">
+            <a:spAutoFit/>
+          </a:bodyPr>
+          <a:lstStyle/>
+          <a:p>
+            <a:pPr algn="ctr">
+              <a:lnSpc>
+                <a:spcPct val="140000"/>
               </a:lnSpc>
             </a:pPr>
             <a:r>
@@ -7967,23 +9942,7 @@
                 </a:solidFill>
                 <a:latin typeface="Microsoft JhengHei"/>
               </a:rPr>
-              <a:t>目前只支援「降低現有員工負載」（reassignment）。</a:t>
-            </a:r>
-          </a:p>
-          <a:p>
-            <a:pPr algn="l">
-              <a:lnSpc>
-                <a:spcPct val="120000"/>
-              </a:lnSpc>
-            </a:pPr>
-            <a:r>
-              <a:rPr sz="1200" b="0">
-                <a:solidFill>
-                  <a:srgbClr val="64748B"/>
-                </a:solidFill>
-                <a:latin typeface="Microsoft JhengHei"/>
-              </a:rPr>
-              <a:t>如果想評估「招新人」要靠下版整合 hiring forecast。</a:t>
+              <a:t>Asymmetric Detection 自動抓出主管直覺中的「卡」</a:t>
             </a:r>
           </a:p>
         </p:txBody>
@@ -7996,12 +9955,12 @@
         </p:nvSpPr>
         <p:spPr>
           <a:xfrm>
-            <a:off x="731520" y="4023360"/>
-            <a:ext cx="10698480" cy="822960"/>
+            <a:off x="6187287" y="2194560"/>
+            <a:ext cx="2606040" cy="3840480"/>
           </a:xfrm>
           <a:prstGeom prst="roundRect">
             <a:avLst>
-              <a:gd name="adj" fmla="val 25000"/>
+              <a:gd name="adj" fmla="val 8000"/>
             </a:avLst>
           </a:prstGeom>
           <a:noFill/>
@@ -8041,8 +10000,8 @@
         </p:nvSpPr>
         <p:spPr>
           <a:xfrm>
-            <a:off x="1005840" y="4069080"/>
-            <a:ext cx="548640" cy="640080"/>
+            <a:off x="6187287" y="2651760"/>
+            <a:ext cx="2606040" cy="1280160"/>
           </a:xfrm>
           <a:prstGeom prst="rect">
             <a:avLst/>
@@ -8061,13 +10020,13 @@
               </a:lnSpc>
             </a:pPr>
             <a:r>
-              <a:rPr sz="3200" b="1">
-                <a:solidFill>
-                  <a:srgbClr val="E11448"/>
-                </a:solidFill>
-                <a:latin typeface="Microsoft JhengHei"/>
-              </a:rPr>
-              <a:t>!</a:t>
+              <a:rPr sz="5600" b="1">
+                <a:solidFill>
+                  <a:srgbClr val="0F172A"/>
+                </a:solidFill>
+                <a:latin typeface="Microsoft JhengHei"/>
+              </a:rPr>
+              <a:t>100%</a:t>
             </a:r>
           </a:p>
         </p:txBody>
@@ -8080,33 +10039,33 @@
         </p:nvSpPr>
         <p:spPr>
           <a:xfrm>
-            <a:off x="1645920" y="4114800"/>
-            <a:ext cx="9144000" cy="365760"/>
-          </a:xfrm>
-          <a:prstGeom prst="rect">
-            <a:avLst/>
-          </a:prstGeom>
-          <a:noFill/>
-        </p:spPr>
-        <p:txBody>
-          <a:bodyPr wrap="square" lIns="0" rIns="0" tIns="0" bIns="0" anchor="t">
-            <a:spAutoFit/>
-          </a:bodyPr>
-          <a:lstStyle/>
-          <a:p>
-            <a:pPr algn="l">
-              <a:lnSpc>
-                <a:spcPct val="120000"/>
-              </a:lnSpc>
-            </a:pPr>
-            <a:r>
-              <a:rPr sz="1600" b="1">
-                <a:solidFill>
-                  <a:srgbClr val="0F172A"/>
-                </a:solidFill>
-                <a:latin typeface="Microsoft JhengHei"/>
-              </a:rPr>
-              <a:t>Cohort 樣本不足會失準</a:t>
+            <a:off x="6461607" y="4206240"/>
+            <a:ext cx="2057400" cy="548640"/>
+          </a:xfrm>
+          <a:prstGeom prst="rect">
+            <a:avLst/>
+          </a:prstGeom>
+          <a:noFill/>
+        </p:spPr>
+        <p:txBody>
+          <a:bodyPr wrap="square" lIns="0" rIns="0" tIns="0" bIns="0" anchor="t">
+            <a:spAutoFit/>
+          </a:bodyPr>
+          <a:lstStyle/>
+          <a:p>
+            <a:pPr algn="ctr">
+              <a:lnSpc>
+                <a:spcPct val="120000"/>
+              </a:lnSpc>
+            </a:pPr>
+            <a:r>
+              <a:rPr sz="1800" b="1">
+                <a:solidFill>
+                  <a:srgbClr val="0F172A"/>
+                </a:solidFill>
+                <a:latin typeface="Microsoft JhengHei"/>
+              </a:rPr>
+              <a:t>決策回看率</a:t>
             </a:r>
           </a:p>
         </p:txBody>
@@ -8119,23 +10078,23 @@
         </p:nvSpPr>
         <p:spPr>
           <a:xfrm>
-            <a:off x="1645920" y="4480560"/>
-            <a:ext cx="9144000" cy="365760"/>
-          </a:xfrm>
-          <a:prstGeom prst="rect">
-            <a:avLst/>
-          </a:prstGeom>
-          <a:noFill/>
-        </p:spPr>
-        <p:txBody>
-          <a:bodyPr wrap="square" lIns="0" rIns="0" tIns="0" bIns="0" anchor="t">
-            <a:spAutoFit/>
-          </a:bodyPr>
-          <a:lstStyle/>
-          <a:p>
-            <a:pPr algn="l">
-              <a:lnSpc>
-                <a:spcPct val="120000"/>
+            <a:off x="6461607" y="4846320"/>
+            <a:ext cx="2057400" cy="1097280"/>
+          </a:xfrm>
+          <a:prstGeom prst="rect">
+            <a:avLst/>
+          </a:prstGeom>
+          <a:noFill/>
+        </p:spPr>
+        <p:txBody>
+          <a:bodyPr wrap="square" lIns="0" rIns="0" tIns="0" bIns="0" anchor="t">
+            <a:spAutoFit/>
+          </a:bodyPr>
+          <a:lstStyle/>
+          <a:p>
+            <a:pPr algn="ctr">
+              <a:lnSpc>
+                <a:spcPct val="140000"/>
               </a:lnSpc>
             </a:pPr>
             <a:r>
@@ -8145,7 +10104,7 @@
                 </a:solidFill>
                 <a:latin typeface="Microsoft JhengHei"/>
               </a:rPr>
-              <a:t>n &lt; 5 時線性回歸不穩定，介面會標註「樣本過少」。</a:t>
+              <a:t>v2.1 = 0%（沒人事後看）→ v2.2 = 強制回顧</a:t>
             </a:r>
           </a:p>
         </p:txBody>
@@ -8158,12 +10117,12 @@
         </p:nvSpPr>
         <p:spPr>
           <a:xfrm>
-            <a:off x="731520" y="4983480"/>
-            <a:ext cx="10698480" cy="822960"/>
+            <a:off x="8976207" y="2194560"/>
+            <a:ext cx="2606040" cy="3840480"/>
           </a:xfrm>
           <a:prstGeom prst="roundRect">
             <a:avLst>
-              <a:gd name="adj" fmla="val 25000"/>
+              <a:gd name="adj" fmla="val 8000"/>
             </a:avLst>
           </a:prstGeom>
           <a:noFill/>
@@ -8203,8 +10162,8 @@
         </p:nvSpPr>
         <p:spPr>
           <a:xfrm>
-            <a:off x="1005840" y="5029200"/>
-            <a:ext cx="548640" cy="640080"/>
+            <a:off x="8976207" y="2651760"/>
+            <a:ext cx="2606040" cy="1280160"/>
           </a:xfrm>
           <a:prstGeom prst="rect">
             <a:avLst/>
@@ -8223,13 +10182,13 @@
               </a:lnSpc>
             </a:pPr>
             <a:r>
-              <a:rPr sz="3200" b="1">
-                <a:solidFill>
-                  <a:srgbClr val="E11448"/>
-                </a:solidFill>
-                <a:latin typeface="Microsoft JhengHei"/>
-              </a:rPr>
-              <a:t>!</a:t>
+              <a:rPr sz="5600" b="1">
+                <a:solidFill>
+                  <a:srgbClr val="0F172A"/>
+                </a:solidFill>
+                <a:latin typeface="Microsoft JhengHei"/>
+              </a:rPr>
+              <a:t>0元</a:t>
             </a:r>
           </a:p>
         </p:txBody>
@@ -8242,33 +10201,33 @@
         </p:nvSpPr>
         <p:spPr>
           <a:xfrm>
-            <a:off x="1645920" y="5074920"/>
-            <a:ext cx="9144000" cy="365760"/>
-          </a:xfrm>
-          <a:prstGeom prst="rect">
-            <a:avLst/>
-          </a:prstGeom>
-          <a:noFill/>
-        </p:spPr>
-        <p:txBody>
-          <a:bodyPr wrap="square" lIns="0" rIns="0" tIns="0" bIns="0" anchor="t">
-            <a:spAutoFit/>
-          </a:bodyPr>
-          <a:lstStyle/>
-          <a:p>
-            <a:pPr algn="l">
-              <a:lnSpc>
-                <a:spcPct val="120000"/>
-              </a:lnSpc>
-            </a:pPr>
-            <a:r>
-              <a:rPr sz="1600" b="1">
-                <a:solidFill>
-                  <a:srgbClr val="0F172A"/>
-                </a:solidFill>
-                <a:latin typeface="Microsoft JhengHei"/>
-              </a:rPr>
-              <a:t>BM25F 對中文短文本 IDF 失真</a:t>
+            <a:off x="9250527" y="4206240"/>
+            <a:ext cx="2057400" cy="548640"/>
+          </a:xfrm>
+          <a:prstGeom prst="rect">
+            <a:avLst/>
+          </a:prstGeom>
+          <a:noFill/>
+        </p:spPr>
+        <p:txBody>
+          <a:bodyPr wrap="square" lIns="0" rIns="0" tIns="0" bIns="0" anchor="t">
+            <a:spAutoFit/>
+          </a:bodyPr>
+          <a:lstStyle/>
+          <a:p>
+            <a:pPr algn="ctr">
+              <a:lnSpc>
+                <a:spcPct val="120000"/>
+              </a:lnSpc>
+            </a:pPr>
+            <a:r>
+              <a:rPr sz="1800" b="1">
+                <a:solidFill>
+                  <a:srgbClr val="0F172A"/>
+                </a:solidFill>
+                <a:latin typeface="Microsoft JhengHei"/>
+              </a:rPr>
+              <a:t>授權成本</a:t>
             </a:r>
           </a:p>
         </p:txBody>
@@ -8281,23 +10240,23 @@
         </p:nvSpPr>
         <p:spPr>
           <a:xfrm>
-            <a:off x="1645920" y="5440680"/>
-            <a:ext cx="9144000" cy="365760"/>
-          </a:xfrm>
-          <a:prstGeom prst="rect">
-            <a:avLst/>
-          </a:prstGeom>
-          <a:noFill/>
-        </p:spPr>
-        <p:txBody>
-          <a:bodyPr wrap="square" lIns="0" rIns="0" tIns="0" bIns="0" anchor="t">
-            <a:spAutoFit/>
-          </a:bodyPr>
-          <a:lstStyle/>
-          <a:p>
-            <a:pPr algn="l">
-              <a:lnSpc>
-                <a:spcPct val="120000"/>
+            <a:off x="9250527" y="4846320"/>
+            <a:ext cx="2057400" cy="1097280"/>
+          </a:xfrm>
+          <a:prstGeom prst="rect">
+            <a:avLst/>
+          </a:prstGeom>
+          <a:noFill/>
+        </p:spPr>
+        <p:txBody>
+          <a:bodyPr wrap="square" lIns="0" rIns="0" tIns="0" bIns="0" anchor="t">
+            <a:spAutoFit/>
+          </a:bodyPr>
+          <a:lstStyle/>
+          <a:p>
+            <a:pPr algn="ctr">
+              <a:lnSpc>
+                <a:spcPct val="140000"/>
               </a:lnSpc>
             </a:pPr>
             <a:r>
@@ -8307,7 +10266,7 @@
                 </a:solidFill>
                 <a:latin typeface="Microsoft JhengHei"/>
               </a:rPr>
-              <a:t>已加 Substring Boost 補救，但仍可能漏抓「林聿」這種前綴。</a:t>
+              <a:t>全用開源 + Firebase 免費額度</a:t>
             </a:r>
           </a:p>
         </p:txBody>
@@ -8385,7 +10344,7 @@
                 </a:solidFill>
                 <a:latin typeface="Microsoft JhengHei"/>
               </a:rPr>
-              <a:t>14 / 15</a:t>
+              <a:t>14 / 16</a:t>
             </a:r>
           </a:p>
         </p:txBody>
@@ -8502,6 +10461,930 @@
         </p:nvSpPr>
         <p:spPr>
           <a:xfrm>
+            <a:off x="731520" y="548640"/>
+            <a:ext cx="7315200" cy="731520"/>
+          </a:xfrm>
+          <a:prstGeom prst="rect">
+            <a:avLst/>
+          </a:prstGeom>
+          <a:noFill/>
+        </p:spPr>
+        <p:txBody>
+          <a:bodyPr wrap="square" lIns="0" rIns="0" tIns="0" bIns="0" anchor="t">
+            <a:spAutoFit/>
+          </a:bodyPr>
+          <a:lstStyle/>
+          <a:p>
+            <a:pPr algn="l">
+              <a:lnSpc>
+                <a:spcPct val="120000"/>
+              </a:lnSpc>
+            </a:pPr>
+            <a:r>
+              <a:rPr sz="4400" b="1">
+                <a:solidFill>
+                  <a:srgbClr val="0F172A"/>
+                </a:solidFill>
+                <a:latin typeface="Microsoft JhengHei"/>
+              </a:rPr>
+              <a:t>已知限制</a:t>
+            </a:r>
+          </a:p>
+        </p:txBody>
+      </p:sp>
+      <p:sp>
+        <p:nvSpPr>
+          <p:cNvPr id="5" name="TextBox 4"/>
+          <p:cNvSpPr txBox="1"/>
+          <p:nvPr/>
+        </p:nvSpPr>
+        <p:spPr>
+          <a:xfrm>
+            <a:off x="731520" y="1325880"/>
+            <a:ext cx="10058400" cy="548640"/>
+          </a:xfrm>
+          <a:prstGeom prst="rect">
+            <a:avLst/>
+          </a:prstGeom>
+          <a:noFill/>
+        </p:spPr>
+        <p:txBody>
+          <a:bodyPr wrap="square" lIns="0" rIns="0" tIns="0" bIns="0" anchor="t">
+            <a:spAutoFit/>
+          </a:bodyPr>
+          <a:lstStyle/>
+          <a:p>
+            <a:pPr algn="l">
+              <a:lnSpc>
+                <a:spcPct val="120000"/>
+              </a:lnSpc>
+            </a:pPr>
+            <a:r>
+              <a:rPr sz="1800" b="0">
+                <a:solidFill>
+                  <a:srgbClr val="64748B"/>
+                </a:solidFill>
+                <a:latin typeface="Microsoft JhengHei"/>
+              </a:rPr>
+              <a:t>我們知道哪裡還不夠好 — 答辯誠實版</a:t>
+            </a:r>
+          </a:p>
+        </p:txBody>
+      </p:sp>
+      <p:sp>
+        <p:nvSpPr>
+          <p:cNvPr id="6" name="Rounded Rectangle 5"/>
+          <p:cNvSpPr/>
+          <p:nvPr/>
+        </p:nvSpPr>
+        <p:spPr>
+          <a:xfrm>
+            <a:off x="731520" y="2103120"/>
+            <a:ext cx="10698480" cy="822960"/>
+          </a:xfrm>
+          <a:prstGeom prst="roundRect">
+            <a:avLst>
+              <a:gd name="adj" fmla="val 25000"/>
+            </a:avLst>
+          </a:prstGeom>
+          <a:noFill/>
+          <a:ln w="9525">
+            <a:solidFill>
+              <a:srgbClr val="E2E8F0"/>
+            </a:solidFill>
+          </a:ln>
+        </p:spPr>
+        <p:style>
+          <a:lnRef idx="1">
+            <a:schemeClr val="accent1"/>
+          </a:lnRef>
+          <a:fillRef idx="3">
+            <a:schemeClr val="accent1"/>
+          </a:fillRef>
+          <a:effectRef idx="2">
+            <a:schemeClr val="accent1"/>
+          </a:effectRef>
+          <a:fontRef idx="minor">
+            <a:schemeClr val="lt1"/>
+          </a:fontRef>
+        </p:style>
+        <p:txBody>
+          <a:bodyPr rtlCol="0" anchor="ctr"/>
+          <a:lstStyle/>
+          <a:p>
+            <a:pPr algn="ctr"/>
+          </a:p>
+        </p:txBody>
+      </p:sp>
+      <p:sp>
+        <p:nvSpPr>
+          <p:cNvPr id="7" name="TextBox 6"/>
+          <p:cNvSpPr txBox="1"/>
+          <p:nvPr/>
+        </p:nvSpPr>
+        <p:spPr>
+          <a:xfrm>
+            <a:off x="1005840" y="2148840"/>
+            <a:ext cx="548640" cy="640080"/>
+          </a:xfrm>
+          <a:prstGeom prst="rect">
+            <a:avLst/>
+          </a:prstGeom>
+          <a:noFill/>
+        </p:spPr>
+        <p:txBody>
+          <a:bodyPr wrap="square" lIns="0" rIns="0" tIns="0" bIns="0" anchor="t">
+            <a:spAutoFit/>
+          </a:bodyPr>
+          <a:lstStyle/>
+          <a:p>
+            <a:pPr algn="ctr">
+              <a:lnSpc>
+                <a:spcPct val="120000"/>
+              </a:lnSpc>
+            </a:pPr>
+            <a:r>
+              <a:rPr sz="3200" b="1">
+                <a:solidFill>
+                  <a:srgbClr val="E11448"/>
+                </a:solidFill>
+                <a:latin typeface="Microsoft JhengHei"/>
+              </a:rPr>
+              <a:t>!</a:t>
+            </a:r>
+          </a:p>
+        </p:txBody>
+      </p:sp>
+      <p:sp>
+        <p:nvSpPr>
+          <p:cNvPr id="8" name="TextBox 7"/>
+          <p:cNvSpPr txBox="1"/>
+          <p:nvPr/>
+        </p:nvSpPr>
+        <p:spPr>
+          <a:xfrm>
+            <a:off x="1645920" y="2194560"/>
+            <a:ext cx="9144000" cy="365760"/>
+          </a:xfrm>
+          <a:prstGeom prst="rect">
+            <a:avLst/>
+          </a:prstGeom>
+          <a:noFill/>
+        </p:spPr>
+        <p:txBody>
+          <a:bodyPr wrap="square" lIns="0" rIns="0" tIns="0" bIns="0" anchor="t">
+            <a:spAutoFit/>
+          </a:bodyPr>
+          <a:lstStyle/>
+          <a:p>
+            <a:pPr algn="l">
+              <a:lnSpc>
+                <a:spcPct val="120000"/>
+              </a:lnSpc>
+            </a:pPr>
+            <a:r>
+              <a:rPr sz="1600" b="1">
+                <a:solidFill>
+                  <a:srgbClr val="0F172A"/>
+                </a:solidFill>
+                <a:latin typeface="Microsoft JhengHei"/>
+              </a:rPr>
+              <a:t>SEED 不是真實資料</a:t>
+            </a:r>
+          </a:p>
+        </p:txBody>
+      </p:sp>
+      <p:sp>
+        <p:nvSpPr>
+          <p:cNvPr id="9" name="TextBox 8"/>
+          <p:cNvSpPr txBox="1"/>
+          <p:nvPr/>
+        </p:nvSpPr>
+        <p:spPr>
+          <a:xfrm>
+            <a:off x="1645920" y="2560320"/>
+            <a:ext cx="9144000" cy="365760"/>
+          </a:xfrm>
+          <a:prstGeom prst="rect">
+            <a:avLst/>
+          </a:prstGeom>
+          <a:noFill/>
+        </p:spPr>
+        <p:txBody>
+          <a:bodyPr wrap="square" lIns="0" rIns="0" tIns="0" bIns="0" anchor="t">
+            <a:spAutoFit/>
+          </a:bodyPr>
+          <a:lstStyle/>
+          <a:p>
+            <a:pPr algn="l">
+              <a:lnSpc>
+                <a:spcPct val="120000"/>
+              </a:lnSpc>
+            </a:pPr>
+            <a:r>
+              <a:rPr sz="1200" b="0">
+                <a:solidFill>
+                  <a:srgbClr val="64748B"/>
+                </a:solidFill>
+                <a:latin typeface="Microsoft JhengHei"/>
+              </a:rPr>
+              <a:t>所有參數都在 SEED 上校準。下個階段需要拿真實資料重跑反推。</a:t>
+            </a:r>
+          </a:p>
+        </p:txBody>
+      </p:sp>
+      <p:sp>
+        <p:nvSpPr>
+          <p:cNvPr id="10" name="Rounded Rectangle 9"/>
+          <p:cNvSpPr/>
+          <p:nvPr/>
+        </p:nvSpPr>
+        <p:spPr>
+          <a:xfrm>
+            <a:off x="731520" y="3063240"/>
+            <a:ext cx="10698480" cy="822960"/>
+          </a:xfrm>
+          <a:prstGeom prst="roundRect">
+            <a:avLst>
+              <a:gd name="adj" fmla="val 25000"/>
+            </a:avLst>
+          </a:prstGeom>
+          <a:noFill/>
+          <a:ln w="9525">
+            <a:solidFill>
+              <a:srgbClr val="E2E8F0"/>
+            </a:solidFill>
+          </a:ln>
+        </p:spPr>
+        <p:style>
+          <a:lnRef idx="1">
+            <a:schemeClr val="accent1"/>
+          </a:lnRef>
+          <a:fillRef idx="3">
+            <a:schemeClr val="accent1"/>
+          </a:fillRef>
+          <a:effectRef idx="2">
+            <a:schemeClr val="accent1"/>
+          </a:effectRef>
+          <a:fontRef idx="minor">
+            <a:schemeClr val="lt1"/>
+          </a:fontRef>
+        </p:style>
+        <p:txBody>
+          <a:bodyPr rtlCol="0" anchor="ctr"/>
+          <a:lstStyle/>
+          <a:p>
+            <a:pPr algn="ctr"/>
+          </a:p>
+        </p:txBody>
+      </p:sp>
+      <p:sp>
+        <p:nvSpPr>
+          <p:cNvPr id="11" name="TextBox 10"/>
+          <p:cNvSpPr txBox="1"/>
+          <p:nvPr/>
+        </p:nvSpPr>
+        <p:spPr>
+          <a:xfrm>
+            <a:off x="1005840" y="3108960"/>
+            <a:ext cx="548640" cy="640080"/>
+          </a:xfrm>
+          <a:prstGeom prst="rect">
+            <a:avLst/>
+          </a:prstGeom>
+          <a:noFill/>
+        </p:spPr>
+        <p:txBody>
+          <a:bodyPr wrap="square" lIns="0" rIns="0" tIns="0" bIns="0" anchor="t">
+            <a:spAutoFit/>
+          </a:bodyPr>
+          <a:lstStyle/>
+          <a:p>
+            <a:pPr algn="ctr">
+              <a:lnSpc>
+                <a:spcPct val="120000"/>
+              </a:lnSpc>
+            </a:pPr>
+            <a:r>
+              <a:rPr sz="3200" b="1">
+                <a:solidFill>
+                  <a:srgbClr val="E11448"/>
+                </a:solidFill>
+                <a:latin typeface="Microsoft JhengHei"/>
+              </a:rPr>
+              <a:t>!</a:t>
+            </a:r>
+          </a:p>
+        </p:txBody>
+      </p:sp>
+      <p:sp>
+        <p:nvSpPr>
+          <p:cNvPr id="12" name="TextBox 11"/>
+          <p:cNvSpPr txBox="1"/>
+          <p:nvPr/>
+        </p:nvSpPr>
+        <p:spPr>
+          <a:xfrm>
+            <a:off x="1645920" y="3154680"/>
+            <a:ext cx="9144000" cy="365760"/>
+          </a:xfrm>
+          <a:prstGeom prst="rect">
+            <a:avLst/>
+          </a:prstGeom>
+          <a:noFill/>
+        </p:spPr>
+        <p:txBody>
+          <a:bodyPr wrap="square" lIns="0" rIns="0" tIns="0" bIns="0" anchor="t">
+            <a:spAutoFit/>
+          </a:bodyPr>
+          <a:lstStyle/>
+          <a:p>
+            <a:pPr algn="l">
+              <a:lnSpc>
+                <a:spcPct val="120000"/>
+              </a:lnSpc>
+            </a:pPr>
+            <a:r>
+              <a:rPr sz="1600" b="1">
+                <a:solidFill>
+                  <a:srgbClr val="0F172A"/>
+                </a:solidFill>
+                <a:latin typeface="Microsoft JhengHei"/>
+              </a:rPr>
+              <a:t>What-if 不能模擬「新聘」情境</a:t>
+            </a:r>
+          </a:p>
+        </p:txBody>
+      </p:sp>
+      <p:sp>
+        <p:nvSpPr>
+          <p:cNvPr id="13" name="TextBox 12"/>
+          <p:cNvSpPr txBox="1"/>
+          <p:nvPr/>
+        </p:nvSpPr>
+        <p:spPr>
+          <a:xfrm>
+            <a:off x="1645920" y="3520440"/>
+            <a:ext cx="9144000" cy="365760"/>
+          </a:xfrm>
+          <a:prstGeom prst="rect">
+            <a:avLst/>
+          </a:prstGeom>
+          <a:noFill/>
+        </p:spPr>
+        <p:txBody>
+          <a:bodyPr wrap="square" lIns="0" rIns="0" tIns="0" bIns="0" anchor="t">
+            <a:spAutoFit/>
+          </a:bodyPr>
+          <a:lstStyle/>
+          <a:p>
+            <a:pPr algn="l">
+              <a:lnSpc>
+                <a:spcPct val="120000"/>
+              </a:lnSpc>
+            </a:pPr>
+            <a:r>
+              <a:rPr sz="1200" b="0">
+                <a:solidFill>
+                  <a:srgbClr val="64748B"/>
+                </a:solidFill>
+                <a:latin typeface="Microsoft JhengHei"/>
+              </a:rPr>
+              <a:t>目前只支援「降低現有員工負載」（reassignment）。</a:t>
+            </a:r>
+          </a:p>
+          <a:p>
+            <a:pPr algn="l">
+              <a:lnSpc>
+                <a:spcPct val="120000"/>
+              </a:lnSpc>
+            </a:pPr>
+            <a:r>
+              <a:rPr sz="1200" b="0">
+                <a:solidFill>
+                  <a:srgbClr val="64748B"/>
+                </a:solidFill>
+                <a:latin typeface="Microsoft JhengHei"/>
+              </a:rPr>
+              <a:t>如果想評估「招新人」要靠下版整合 hiring forecast。</a:t>
+            </a:r>
+          </a:p>
+        </p:txBody>
+      </p:sp>
+      <p:sp>
+        <p:nvSpPr>
+          <p:cNvPr id="14" name="Rounded Rectangle 13"/>
+          <p:cNvSpPr/>
+          <p:nvPr/>
+        </p:nvSpPr>
+        <p:spPr>
+          <a:xfrm>
+            <a:off x="731520" y="4023360"/>
+            <a:ext cx="10698480" cy="822960"/>
+          </a:xfrm>
+          <a:prstGeom prst="roundRect">
+            <a:avLst>
+              <a:gd name="adj" fmla="val 25000"/>
+            </a:avLst>
+          </a:prstGeom>
+          <a:noFill/>
+          <a:ln w="9525">
+            <a:solidFill>
+              <a:srgbClr val="E2E8F0"/>
+            </a:solidFill>
+          </a:ln>
+        </p:spPr>
+        <p:style>
+          <a:lnRef idx="1">
+            <a:schemeClr val="accent1"/>
+          </a:lnRef>
+          <a:fillRef idx="3">
+            <a:schemeClr val="accent1"/>
+          </a:fillRef>
+          <a:effectRef idx="2">
+            <a:schemeClr val="accent1"/>
+          </a:effectRef>
+          <a:fontRef idx="minor">
+            <a:schemeClr val="lt1"/>
+          </a:fontRef>
+        </p:style>
+        <p:txBody>
+          <a:bodyPr rtlCol="0" anchor="ctr"/>
+          <a:lstStyle/>
+          <a:p>
+            <a:pPr algn="ctr"/>
+          </a:p>
+        </p:txBody>
+      </p:sp>
+      <p:sp>
+        <p:nvSpPr>
+          <p:cNvPr id="15" name="TextBox 14"/>
+          <p:cNvSpPr txBox="1"/>
+          <p:nvPr/>
+        </p:nvSpPr>
+        <p:spPr>
+          <a:xfrm>
+            <a:off x="1005840" y="4069080"/>
+            <a:ext cx="548640" cy="640080"/>
+          </a:xfrm>
+          <a:prstGeom prst="rect">
+            <a:avLst/>
+          </a:prstGeom>
+          <a:noFill/>
+        </p:spPr>
+        <p:txBody>
+          <a:bodyPr wrap="square" lIns="0" rIns="0" tIns="0" bIns="0" anchor="t">
+            <a:spAutoFit/>
+          </a:bodyPr>
+          <a:lstStyle/>
+          <a:p>
+            <a:pPr algn="ctr">
+              <a:lnSpc>
+                <a:spcPct val="120000"/>
+              </a:lnSpc>
+            </a:pPr>
+            <a:r>
+              <a:rPr sz="3200" b="1">
+                <a:solidFill>
+                  <a:srgbClr val="E11448"/>
+                </a:solidFill>
+                <a:latin typeface="Microsoft JhengHei"/>
+              </a:rPr>
+              <a:t>!</a:t>
+            </a:r>
+          </a:p>
+        </p:txBody>
+      </p:sp>
+      <p:sp>
+        <p:nvSpPr>
+          <p:cNvPr id="16" name="TextBox 15"/>
+          <p:cNvSpPr txBox="1"/>
+          <p:nvPr/>
+        </p:nvSpPr>
+        <p:spPr>
+          <a:xfrm>
+            <a:off x="1645920" y="4114800"/>
+            <a:ext cx="9144000" cy="365760"/>
+          </a:xfrm>
+          <a:prstGeom prst="rect">
+            <a:avLst/>
+          </a:prstGeom>
+          <a:noFill/>
+        </p:spPr>
+        <p:txBody>
+          <a:bodyPr wrap="square" lIns="0" rIns="0" tIns="0" bIns="0" anchor="t">
+            <a:spAutoFit/>
+          </a:bodyPr>
+          <a:lstStyle/>
+          <a:p>
+            <a:pPr algn="l">
+              <a:lnSpc>
+                <a:spcPct val="120000"/>
+              </a:lnSpc>
+            </a:pPr>
+            <a:r>
+              <a:rPr sz="1600" b="1">
+                <a:solidFill>
+                  <a:srgbClr val="0F172A"/>
+                </a:solidFill>
+                <a:latin typeface="Microsoft JhengHei"/>
+              </a:rPr>
+              <a:t>Cohort 樣本不足會失準</a:t>
+            </a:r>
+          </a:p>
+        </p:txBody>
+      </p:sp>
+      <p:sp>
+        <p:nvSpPr>
+          <p:cNvPr id="17" name="TextBox 16"/>
+          <p:cNvSpPr txBox="1"/>
+          <p:nvPr/>
+        </p:nvSpPr>
+        <p:spPr>
+          <a:xfrm>
+            <a:off x="1645920" y="4480560"/>
+            <a:ext cx="9144000" cy="365760"/>
+          </a:xfrm>
+          <a:prstGeom prst="rect">
+            <a:avLst/>
+          </a:prstGeom>
+          <a:noFill/>
+        </p:spPr>
+        <p:txBody>
+          <a:bodyPr wrap="square" lIns="0" rIns="0" tIns="0" bIns="0" anchor="t">
+            <a:spAutoFit/>
+          </a:bodyPr>
+          <a:lstStyle/>
+          <a:p>
+            <a:pPr algn="l">
+              <a:lnSpc>
+                <a:spcPct val="120000"/>
+              </a:lnSpc>
+            </a:pPr>
+            <a:r>
+              <a:rPr sz="1200" b="0">
+                <a:solidFill>
+                  <a:srgbClr val="64748B"/>
+                </a:solidFill>
+                <a:latin typeface="Microsoft JhengHei"/>
+              </a:rPr>
+              <a:t>n &lt; 5 時線性回歸不穩定，介面會標註「樣本過少」。</a:t>
+            </a:r>
+          </a:p>
+        </p:txBody>
+      </p:sp>
+      <p:sp>
+        <p:nvSpPr>
+          <p:cNvPr id="18" name="Rounded Rectangle 17"/>
+          <p:cNvSpPr/>
+          <p:nvPr/>
+        </p:nvSpPr>
+        <p:spPr>
+          <a:xfrm>
+            <a:off x="731520" y="4983480"/>
+            <a:ext cx="10698480" cy="822960"/>
+          </a:xfrm>
+          <a:prstGeom prst="roundRect">
+            <a:avLst>
+              <a:gd name="adj" fmla="val 25000"/>
+            </a:avLst>
+          </a:prstGeom>
+          <a:noFill/>
+          <a:ln w="9525">
+            <a:solidFill>
+              <a:srgbClr val="E2E8F0"/>
+            </a:solidFill>
+          </a:ln>
+        </p:spPr>
+        <p:style>
+          <a:lnRef idx="1">
+            <a:schemeClr val="accent1"/>
+          </a:lnRef>
+          <a:fillRef idx="3">
+            <a:schemeClr val="accent1"/>
+          </a:fillRef>
+          <a:effectRef idx="2">
+            <a:schemeClr val="accent1"/>
+          </a:effectRef>
+          <a:fontRef idx="minor">
+            <a:schemeClr val="lt1"/>
+          </a:fontRef>
+        </p:style>
+        <p:txBody>
+          <a:bodyPr rtlCol="0" anchor="ctr"/>
+          <a:lstStyle/>
+          <a:p>
+            <a:pPr algn="ctr"/>
+          </a:p>
+        </p:txBody>
+      </p:sp>
+      <p:sp>
+        <p:nvSpPr>
+          <p:cNvPr id="19" name="TextBox 18"/>
+          <p:cNvSpPr txBox="1"/>
+          <p:nvPr/>
+        </p:nvSpPr>
+        <p:spPr>
+          <a:xfrm>
+            <a:off x="1005840" y="5029200"/>
+            <a:ext cx="548640" cy="640080"/>
+          </a:xfrm>
+          <a:prstGeom prst="rect">
+            <a:avLst/>
+          </a:prstGeom>
+          <a:noFill/>
+        </p:spPr>
+        <p:txBody>
+          <a:bodyPr wrap="square" lIns="0" rIns="0" tIns="0" bIns="0" anchor="t">
+            <a:spAutoFit/>
+          </a:bodyPr>
+          <a:lstStyle/>
+          <a:p>
+            <a:pPr algn="ctr">
+              <a:lnSpc>
+                <a:spcPct val="120000"/>
+              </a:lnSpc>
+            </a:pPr>
+            <a:r>
+              <a:rPr sz="3200" b="1">
+                <a:solidFill>
+                  <a:srgbClr val="E11448"/>
+                </a:solidFill>
+                <a:latin typeface="Microsoft JhengHei"/>
+              </a:rPr>
+              <a:t>!</a:t>
+            </a:r>
+          </a:p>
+        </p:txBody>
+      </p:sp>
+      <p:sp>
+        <p:nvSpPr>
+          <p:cNvPr id="20" name="TextBox 19"/>
+          <p:cNvSpPr txBox="1"/>
+          <p:nvPr/>
+        </p:nvSpPr>
+        <p:spPr>
+          <a:xfrm>
+            <a:off x="1645920" y="5074920"/>
+            <a:ext cx="9144000" cy="365760"/>
+          </a:xfrm>
+          <a:prstGeom prst="rect">
+            <a:avLst/>
+          </a:prstGeom>
+          <a:noFill/>
+        </p:spPr>
+        <p:txBody>
+          <a:bodyPr wrap="square" lIns="0" rIns="0" tIns="0" bIns="0" anchor="t">
+            <a:spAutoFit/>
+          </a:bodyPr>
+          <a:lstStyle/>
+          <a:p>
+            <a:pPr algn="l">
+              <a:lnSpc>
+                <a:spcPct val="120000"/>
+              </a:lnSpc>
+            </a:pPr>
+            <a:r>
+              <a:rPr sz="1600" b="1">
+                <a:solidFill>
+                  <a:srgbClr val="0F172A"/>
+                </a:solidFill>
+                <a:latin typeface="Microsoft JhengHei"/>
+              </a:rPr>
+              <a:t>BM25F 對中文短文本 IDF 失真</a:t>
+            </a:r>
+          </a:p>
+        </p:txBody>
+      </p:sp>
+      <p:sp>
+        <p:nvSpPr>
+          <p:cNvPr id="21" name="TextBox 20"/>
+          <p:cNvSpPr txBox="1"/>
+          <p:nvPr/>
+        </p:nvSpPr>
+        <p:spPr>
+          <a:xfrm>
+            <a:off x="1645920" y="5440680"/>
+            <a:ext cx="9144000" cy="365760"/>
+          </a:xfrm>
+          <a:prstGeom prst="rect">
+            <a:avLst/>
+          </a:prstGeom>
+          <a:noFill/>
+        </p:spPr>
+        <p:txBody>
+          <a:bodyPr wrap="square" lIns="0" rIns="0" tIns="0" bIns="0" anchor="t">
+            <a:spAutoFit/>
+          </a:bodyPr>
+          <a:lstStyle/>
+          <a:p>
+            <a:pPr algn="l">
+              <a:lnSpc>
+                <a:spcPct val="120000"/>
+              </a:lnSpc>
+            </a:pPr>
+            <a:r>
+              <a:rPr sz="1200" b="0">
+                <a:solidFill>
+                  <a:srgbClr val="64748B"/>
+                </a:solidFill>
+                <a:latin typeface="Microsoft JhengHei"/>
+              </a:rPr>
+              <a:t>已加 Substring Boost 補救，但仍可能漏抓「林聿」這種前綴。</a:t>
+            </a:r>
+          </a:p>
+        </p:txBody>
+      </p:sp>
+      <p:sp>
+        <p:nvSpPr>
+          <p:cNvPr id="22" name="TextBox 21"/>
+          <p:cNvSpPr txBox="1"/>
+          <p:nvPr/>
+        </p:nvSpPr>
+        <p:spPr>
+          <a:xfrm>
+            <a:off x="731520" y="6537960"/>
+            <a:ext cx="5486400" cy="274320"/>
+          </a:xfrm>
+          <a:prstGeom prst="rect">
+            <a:avLst/>
+          </a:prstGeom>
+          <a:noFill/>
+        </p:spPr>
+        <p:txBody>
+          <a:bodyPr wrap="square" lIns="0" rIns="0" tIns="0" bIns="0" anchor="t">
+            <a:spAutoFit/>
+          </a:bodyPr>
+          <a:lstStyle/>
+          <a:p>
+            <a:pPr algn="l">
+              <a:lnSpc>
+                <a:spcPct val="120000"/>
+              </a:lnSpc>
+            </a:pPr>
+            <a:r>
+              <a:rPr sz="900" b="0">
+                <a:solidFill>
+                  <a:srgbClr val="64748B"/>
+                </a:solidFill>
+                <a:latin typeface="Microsoft JhengHei"/>
+              </a:rPr>
+              <a:t>串連系統 v2.2 · 資管導論 第 13 組</a:t>
+            </a:r>
+          </a:p>
+        </p:txBody>
+      </p:sp>
+      <p:sp>
+        <p:nvSpPr>
+          <p:cNvPr id="23" name="TextBox 22"/>
+          <p:cNvSpPr txBox="1"/>
+          <p:nvPr/>
+        </p:nvSpPr>
+        <p:spPr>
+          <a:xfrm>
+            <a:off x="10058400" y="6537960"/>
+            <a:ext cx="1371600" cy="274320"/>
+          </a:xfrm>
+          <a:prstGeom prst="rect">
+            <a:avLst/>
+          </a:prstGeom>
+          <a:noFill/>
+        </p:spPr>
+        <p:txBody>
+          <a:bodyPr wrap="square" lIns="0" rIns="0" tIns="0" bIns="0" anchor="t">
+            <a:spAutoFit/>
+          </a:bodyPr>
+          <a:lstStyle/>
+          <a:p>
+            <a:pPr algn="r">
+              <a:lnSpc>
+                <a:spcPct val="120000"/>
+              </a:lnSpc>
+            </a:pPr>
+            <a:r>
+              <a:rPr sz="900" b="0">
+                <a:solidFill>
+                  <a:srgbClr val="64748B"/>
+                </a:solidFill>
+                <a:latin typeface="Microsoft JhengHei"/>
+              </a:rPr>
+              <a:t>15 / 16</a:t>
+            </a:r>
+          </a:p>
+        </p:txBody>
+      </p:sp>
+    </p:spTree>
+  </p:cSld>
+  <p:clrMapOvr>
+    <a:masterClrMapping/>
+  </p:clrMapOvr>
+</p:sld>
+</file>
+
+<file path=ppt/slides/slide16.xml><?xml version="1.0" encoding="utf-8"?>
+<p:sld xmlns:a="http://schemas.openxmlformats.org/drawingml/2006/main" xmlns:p="http://schemas.openxmlformats.org/presentationml/2006/main" xmlns:r="http://schemas.openxmlformats.org/officeDocument/2006/relationships">
+  <p:cSld>
+    <p:spTree>
+      <p:nvGrpSpPr>
+        <p:cNvPr id="1" name=""/>
+        <p:cNvGrpSpPr/>
+        <p:nvPr/>
+      </p:nvGrpSpPr>
+      <p:grpSpPr/>
+      <p:sp>
+        <p:nvSpPr>
+          <p:cNvPr id="2" name="Rectangle 1"/>
+          <p:cNvSpPr/>
+          <p:nvPr/>
+        </p:nvSpPr>
+        <p:spPr>
+          <a:xfrm>
+            <a:off x="0" y="0"/>
+            <a:ext cx="12191695" cy="6858000"/>
+          </a:xfrm>
+          <a:prstGeom prst="rect">
+            <a:avLst/>
+          </a:prstGeom>
+          <a:solidFill>
+            <a:srgbClr val="FFFFFF"/>
+          </a:solidFill>
+          <a:ln>
+            <a:noFill/>
+          </a:ln>
+        </p:spPr>
+        <p:style>
+          <a:lnRef idx="1">
+            <a:schemeClr val="accent1"/>
+          </a:lnRef>
+          <a:fillRef idx="3">
+            <a:schemeClr val="accent1"/>
+          </a:fillRef>
+          <a:effectRef idx="2">
+            <a:schemeClr val="accent1"/>
+          </a:effectRef>
+          <a:fontRef idx="minor">
+            <a:schemeClr val="lt1"/>
+          </a:fontRef>
+        </p:style>
+        <p:txBody>
+          <a:bodyPr rtlCol="0" anchor="ctr"/>
+          <a:lstStyle/>
+          <a:p>
+            <a:pPr algn="ctr"/>
+          </a:p>
+        </p:txBody>
+      </p:sp>
+      <p:sp>
+        <p:nvSpPr>
+          <p:cNvPr id="3" name="Rectangle 2"/>
+          <p:cNvSpPr/>
+          <p:nvPr/>
+        </p:nvSpPr>
+        <p:spPr>
+          <a:xfrm>
+            <a:off x="731520" y="6446520"/>
+            <a:ext cx="10698480" cy="9525"/>
+          </a:xfrm>
+          <a:prstGeom prst="rect">
+            <a:avLst/>
+          </a:prstGeom>
+          <a:solidFill>
+            <a:srgbClr val="E2E8F0"/>
+          </a:solidFill>
+          <a:ln>
+            <a:noFill/>
+          </a:ln>
+        </p:spPr>
+        <p:style>
+          <a:lnRef idx="1">
+            <a:schemeClr val="accent1"/>
+          </a:lnRef>
+          <a:fillRef idx="3">
+            <a:schemeClr val="accent1"/>
+          </a:fillRef>
+          <a:effectRef idx="2">
+            <a:schemeClr val="accent1"/>
+          </a:effectRef>
+          <a:fontRef idx="minor">
+            <a:schemeClr val="lt1"/>
+          </a:fontRef>
+        </p:style>
+        <p:txBody>
+          <a:bodyPr rtlCol="0" anchor="ctr"/>
+          <a:lstStyle/>
+          <a:p>
+            <a:pPr algn="ctr"/>
+          </a:p>
+        </p:txBody>
+      </p:sp>
+      <p:sp>
+        <p:nvSpPr>
+          <p:cNvPr id="4" name="TextBox 3"/>
+          <p:cNvSpPr txBox="1"/>
+          <p:nvPr/>
+        </p:nvSpPr>
+        <p:spPr>
+          <a:xfrm>
             <a:off x="914400" y="2011680"/>
             <a:ext cx="10058400" cy="914400"/>
           </a:xfrm>
@@ -9637,7 +12520,7 @@
                 </a:solidFill>
                 <a:latin typeface="Microsoft JhengHei"/>
               </a:rPr>
-              <a:t>02 / 15</a:t>
+              <a:t>02 / 16</a:t>
             </a:r>
           </a:p>
         </p:txBody>
@@ -10383,7 +13266,7 @@
                 </a:solidFill>
                 <a:latin typeface="Microsoft JhengHei"/>
               </a:rPr>
-              <a:t>03 / 15</a:t>
+              <a:t>03 / 16</a:t>
             </a:r>
           </a:p>
         </p:txBody>
@@ -11585,7 +14468,7 @@
                 </a:solidFill>
                 <a:latin typeface="Microsoft JhengHei"/>
               </a:rPr>
-              <a:t>04 / 15</a:t>
+              <a:t>04 / 16</a:t>
             </a:r>
           </a:p>
         </p:txBody>
@@ -13413,7 +16296,7 @@
                 </a:solidFill>
                 <a:latin typeface="Microsoft JhengHei"/>
               </a:rPr>
-              <a:t>05 / 15</a:t>
+              <a:t>05 / 16</a:t>
             </a:r>
           </a:p>
         </p:txBody>
@@ -15257,7 +18140,7 @@
                 </a:solidFill>
                 <a:latin typeface="Microsoft JhengHei"/>
               </a:rPr>
-              <a:t>06 / 15</a:t>
+              <a:t>06 / 16</a:t>
             </a:r>
           </a:p>
         </p:txBody>
@@ -17069,7 +19952,7 @@
                 </a:solidFill>
                 <a:latin typeface="Microsoft JhengHei"/>
               </a:rPr>
-              <a:t>07 / 15</a:t>
+              <a:t>07 / 16</a:t>
             </a:r>
           </a:p>
         </p:txBody>
@@ -18484,7 +21367,7 @@
                 </a:solidFill>
                 <a:latin typeface="Microsoft JhengHei"/>
               </a:rPr>
-              <a:t>08 / 15</a:t>
+              <a:t>08 / 16</a:t>
             </a:r>
           </a:p>
         </p:txBody>
@@ -19968,7 +22851,7 @@
                 </a:solidFill>
                 <a:latin typeface="Microsoft JhengHei"/>
               </a:rPr>
-              <a:t>09 / 15</a:t>
+              <a:t>09 / 16</a:t>
             </a:r>
           </a:p>
         </p:txBody>

--- a/docs/串連系統_簡報.pptx
+++ b/docs/串連系統_簡報.pptx
@@ -3654,7 +3654,7 @@
                 </a:solidFill>
                 <a:latin typeface="Microsoft JhengHei"/>
               </a:rPr>
-              <a:t>不用真的改人事，先模擬看看</a:t>
+              <a:t>「如果我這樣調整，組織健康度會變怎樣？」 — 不用真的執行就能試</a:t>
             </a:r>
           </a:p>
         </p:txBody>
@@ -3667,8 +3667,8 @@
         </p:nvSpPr>
         <p:spPr>
           <a:xfrm>
-            <a:off x="731520" y="2286000"/>
-            <a:ext cx="3566160" cy="2194560"/>
+            <a:off x="518007" y="2194560"/>
+            <a:ext cx="2651760" cy="2194560"/>
           </a:xfrm>
           <a:prstGeom prst="roundRect">
             <a:avLst>
@@ -3712,8 +3712,8 @@
         </p:nvSpPr>
         <p:spPr>
           <a:xfrm>
-            <a:off x="1005840" y="2560320"/>
-            <a:ext cx="3017520" cy="548640"/>
+            <a:off x="792327" y="2468880"/>
+            <a:ext cx="2103120" cy="457200"/>
           </a:xfrm>
           <a:prstGeom prst="rect">
             <a:avLst/>
@@ -3738,7 +3738,7 @@
                 </a:solidFill>
                 <a:latin typeface="Microsoft JhengHei"/>
               </a:rPr>
-              <a:t>Step 1</a:t>
+              <a:t>01</a:t>
             </a:r>
           </a:p>
         </p:txBody>
@@ -3751,8 +3751,8 @@
         </p:nvSpPr>
         <p:spPr>
           <a:xfrm>
-            <a:off x="1005840" y="3063240"/>
-            <a:ext cx="3017520" cy="640080"/>
+            <a:off x="792327" y="2880360"/>
+            <a:ext cx="2103120" cy="548640"/>
           </a:xfrm>
           <a:prstGeom prst="rect">
             <a:avLst/>
@@ -3771,13 +3771,13 @@
               </a:lnSpc>
             </a:pPr>
             <a:r>
-              <a:rPr sz="1800" b="1">
-                <a:solidFill>
-                  <a:srgbClr val="0F172A"/>
-                </a:solidFill>
-                <a:latin typeface="Microsoft JhengHei"/>
-              </a:rPr>
-              <a:t>拖員工到別組</a:t>
+              <a:rPr sz="2200" b="1">
+                <a:solidFill>
+                  <a:srgbClr val="0F172A"/>
+                </a:solidFill>
+                <a:latin typeface="Microsoft JhengHei"/>
+              </a:rPr>
+              <a:t>解卡點</a:t>
             </a:r>
           </a:p>
         </p:txBody>
@@ -3790,33 +3790,49 @@
         </p:nvSpPr>
         <p:spPr>
           <a:xfrm>
-            <a:off x="1005840" y="3840480"/>
-            <a:ext cx="3017520" cy="548640"/>
-          </a:xfrm>
-          <a:prstGeom prst="rect">
-            <a:avLst/>
-          </a:prstGeom>
-          <a:noFill/>
-        </p:spPr>
-        <p:txBody>
-          <a:bodyPr wrap="square" lIns="0" rIns="0" tIns="0" bIns="0" anchor="t">
-            <a:spAutoFit/>
-          </a:bodyPr>
-          <a:lstStyle/>
-          <a:p>
-            <a:pPr algn="l">
-              <a:lnSpc>
-                <a:spcPct val="120000"/>
-              </a:lnSpc>
-            </a:pPr>
-            <a:r>
-              <a:rPr sz="1200" b="0">
+            <a:off x="792327" y="3474720"/>
+            <a:ext cx="2103120" cy="822960"/>
+          </a:xfrm>
+          <a:prstGeom prst="rect">
+            <a:avLst/>
+          </a:prstGeom>
+          <a:noFill/>
+        </p:spPr>
+        <p:txBody>
+          <a:bodyPr wrap="square" lIns="0" rIns="0" tIns="0" bIns="0" anchor="t">
+            <a:spAutoFit/>
+          </a:bodyPr>
+          <a:lstStyle/>
+          <a:p>
+            <a:pPr algn="l">
+              <a:lnSpc>
+                <a:spcPct val="145000"/>
+              </a:lnSpc>
+            </a:pPr>
+            <a:r>
+              <a:rPr sz="1150" b="0">
                 <a:solidFill>
                   <a:srgbClr val="64748B"/>
                 </a:solidFill>
                 <a:latin typeface="Microsoft JhengHei"/>
               </a:rPr>
-              <a:t>用滑鼠拖一拖就好</a:t>
+              <a:t>勾選哪些卡點</a:t>
+            </a:r>
+          </a:p>
+          <a:p>
+            <a:pPr algn="l">
+              <a:lnSpc>
+                <a:spcPct val="145000"/>
+              </a:lnSpc>
+            </a:pPr>
+            <a:r>
+              <a:rPr sz="1150" b="0">
+                <a:solidFill>
+                  <a:srgbClr val="64748B"/>
+                </a:solidFill>
+                <a:latin typeface="Microsoft JhengHei"/>
+              </a:rPr>
+              <a:t>「假設已解決」</a:t>
             </a:r>
           </a:p>
         </p:txBody>
@@ -3829,8 +3845,8 @@
         </p:nvSpPr>
         <p:spPr>
           <a:xfrm>
-            <a:off x="4526280" y="2286000"/>
-            <a:ext cx="3566160" cy="2194560"/>
+            <a:off x="3352647" y="2194560"/>
+            <a:ext cx="2651760" cy="2194560"/>
           </a:xfrm>
           <a:prstGeom prst="roundRect">
             <a:avLst>
@@ -3874,8 +3890,8 @@
         </p:nvSpPr>
         <p:spPr>
           <a:xfrm>
-            <a:off x="4800600" y="2560320"/>
-            <a:ext cx="3017520" cy="548640"/>
+            <a:off x="3626967" y="2468880"/>
+            <a:ext cx="2103120" cy="457200"/>
           </a:xfrm>
           <a:prstGeom prst="rect">
             <a:avLst/>
@@ -3900,7 +3916,7 @@
                 </a:solidFill>
                 <a:latin typeface="Microsoft JhengHei"/>
               </a:rPr>
-              <a:t>Step 2</a:t>
+              <a:t>02</a:t>
             </a:r>
           </a:p>
         </p:txBody>
@@ -3913,8 +3929,8 @@
         </p:nvSpPr>
         <p:spPr>
           <a:xfrm>
-            <a:off x="4800600" y="3063240"/>
-            <a:ext cx="3017520" cy="640080"/>
+            <a:off x="3626967" y="2880360"/>
+            <a:ext cx="2103120" cy="548640"/>
           </a:xfrm>
           <a:prstGeom prst="rect">
             <a:avLst/>
@@ -3933,13 +3949,13 @@
               </a:lnSpc>
             </a:pPr>
             <a:r>
-              <a:rPr sz="1800" b="1">
-                <a:solidFill>
-                  <a:srgbClr val="0F172A"/>
-                </a:solidFill>
-                <a:latin typeface="Microsoft JhengHei"/>
-              </a:rPr>
-              <a:t>即時看分佈</a:t>
+              <a:rPr sz="2200" b="1">
+                <a:solidFill>
+                  <a:srgbClr val="0F172A"/>
+                </a:solidFill>
+                <a:latin typeface="Microsoft JhengHei"/>
+              </a:rPr>
+              <a:t>加速決策</a:t>
             </a:r>
           </a:p>
         </p:txBody>
@@ -3952,33 +3968,49 @@
         </p:nvSpPr>
         <p:spPr>
           <a:xfrm>
-            <a:off x="4800600" y="3840480"/>
-            <a:ext cx="3017520" cy="548640"/>
-          </a:xfrm>
-          <a:prstGeom prst="rect">
-            <a:avLst/>
-          </a:prstGeom>
-          <a:noFill/>
-        </p:spPr>
-        <p:txBody>
-          <a:bodyPr wrap="square" lIns="0" rIns="0" tIns="0" bIns="0" anchor="t">
-            <a:spAutoFit/>
-          </a:bodyPr>
-          <a:lstStyle/>
-          <a:p>
-            <a:pPr algn="l">
-              <a:lnSpc>
-                <a:spcPct val="120000"/>
-              </a:lnSpc>
-            </a:pPr>
-            <a:r>
-              <a:rPr sz="1200" b="0">
+            <a:off x="3626967" y="3474720"/>
+            <a:ext cx="2103120" cy="822960"/>
+          </a:xfrm>
+          <a:prstGeom prst="rect">
+            <a:avLst/>
+          </a:prstGeom>
+          <a:noFill/>
+        </p:spPr>
+        <p:txBody>
+          <a:bodyPr wrap="square" lIns="0" rIns="0" tIns="0" bIns="0" anchor="t">
+            <a:spAutoFit/>
+          </a:bodyPr>
+          <a:lstStyle/>
+          <a:p>
+            <a:pPr algn="l">
+              <a:lnSpc>
+                <a:spcPct val="145000"/>
+              </a:lnSpc>
+            </a:pPr>
+            <a:r>
+              <a:rPr sz="1150" b="0">
                 <a:solidFill>
                   <a:srgbClr val="64748B"/>
                 </a:solidFill>
                 <a:latin typeface="Microsoft JhengHei"/>
               </a:rPr>
-              <a:t>Gini 變了？誰過載？</a:t>
+              <a:t>勾選哪些逾期決策</a:t>
+            </a:r>
+          </a:p>
+          <a:p>
+            <a:pPr algn="l">
+              <a:lnSpc>
+                <a:spcPct val="145000"/>
+              </a:lnSpc>
+            </a:pPr>
+            <a:r>
+              <a:rPr sz="1150" b="0">
+                <a:solidFill>
+                  <a:srgbClr val="64748B"/>
+                </a:solidFill>
+                <a:latin typeface="Microsoft JhengHei"/>
+              </a:rPr>
+              <a:t>「假設立刻完成」</a:t>
             </a:r>
           </a:p>
         </p:txBody>
@@ -3991,8 +4023,8 @@
         </p:nvSpPr>
         <p:spPr>
           <a:xfrm>
-            <a:off x="8321040" y="2286000"/>
-            <a:ext cx="3566160" cy="2194560"/>
+            <a:off x="6187287" y="2194560"/>
+            <a:ext cx="2651760" cy="2194560"/>
           </a:xfrm>
           <a:prstGeom prst="roundRect">
             <a:avLst>
@@ -4036,8 +4068,8 @@
         </p:nvSpPr>
         <p:spPr>
           <a:xfrm>
-            <a:off x="8595360" y="2560320"/>
-            <a:ext cx="3017520" cy="548640"/>
+            <a:off x="6461607" y="2468880"/>
+            <a:ext cx="2103120" cy="457200"/>
           </a:xfrm>
           <a:prstGeom prst="rect">
             <a:avLst/>
@@ -4062,7 +4094,7 @@
                 </a:solidFill>
                 <a:latin typeface="Microsoft JhengHei"/>
               </a:rPr>
-              <a:t>Step 3</a:t>
+              <a:t>03</a:t>
             </a:r>
           </a:p>
         </p:txBody>
@@ -4075,8 +4107,8 @@
         </p:nvSpPr>
         <p:spPr>
           <a:xfrm>
-            <a:off x="8595360" y="3063240"/>
-            <a:ext cx="3017520" cy="640080"/>
+            <a:off x="6461607" y="2880360"/>
+            <a:ext cx="2103120" cy="548640"/>
           </a:xfrm>
           <a:prstGeom prst="rect">
             <a:avLst/>
@@ -4095,13 +4127,13 @@
               </a:lnSpc>
             </a:pPr>
             <a:r>
-              <a:rPr sz="1800" b="1">
-                <a:solidFill>
-                  <a:srgbClr val="0F172A"/>
-                </a:solidFill>
-                <a:latin typeface="Microsoft JhengHei"/>
-              </a:rPr>
-              <a:t>系統給建議</a:t>
+              <a:rPr sz="2200" b="1">
+                <a:solidFill>
+                  <a:srgbClr val="0F172A"/>
+                </a:solidFill>
+                <a:latin typeface="Microsoft JhengHei"/>
+              </a:rPr>
+              <a:t>簽收交接</a:t>
             </a:r>
           </a:p>
         </p:txBody>
@@ -4114,33 +4146,49 @@
         </p:nvSpPr>
         <p:spPr>
           <a:xfrm>
-            <a:off x="8595360" y="3840480"/>
-            <a:ext cx="3017520" cy="548640"/>
-          </a:xfrm>
-          <a:prstGeom prst="rect">
-            <a:avLst/>
-          </a:prstGeom>
-          <a:noFill/>
-        </p:spPr>
-        <p:txBody>
-          <a:bodyPr wrap="square" lIns="0" rIns="0" tIns="0" bIns="0" anchor="t">
-            <a:spAutoFit/>
-          </a:bodyPr>
-          <a:lstStyle/>
-          <a:p>
-            <a:pPr algn="l">
-              <a:lnSpc>
-                <a:spcPct val="120000"/>
-              </a:lnSpc>
-            </a:pPr>
-            <a:r>
-              <a:rPr sz="1200" b="0">
+            <a:off x="6461607" y="3474720"/>
+            <a:ext cx="2103120" cy="822960"/>
+          </a:xfrm>
+          <a:prstGeom prst="rect">
+            <a:avLst/>
+          </a:prstGeom>
+          <a:noFill/>
+        </p:spPr>
+        <p:txBody>
+          <a:bodyPr wrap="square" lIns="0" rIns="0" tIns="0" bIns="0" anchor="t">
+            <a:spAutoFit/>
+          </a:bodyPr>
+          <a:lstStyle/>
+          <a:p>
+            <a:pPr algn="l">
+              <a:lnSpc>
+                <a:spcPct val="145000"/>
+              </a:lnSpc>
+            </a:pPr>
+            <a:r>
+              <a:rPr sz="1150" b="0">
                 <a:solidFill>
                   <a:srgbClr val="64748B"/>
                 </a:solidFill>
                 <a:latin typeface="Microsoft JhengHei"/>
               </a:rPr>
-              <a:t>「把 X 移到 Y 組會更平均」</a:t>
+              <a:t>勾選哪些交接</a:t>
+            </a:r>
+          </a:p>
+          <a:p>
+            <a:pPr algn="l">
+              <a:lnSpc>
+                <a:spcPct val="145000"/>
+              </a:lnSpc>
+            </a:pPr>
+            <a:r>
+              <a:rPr sz="1150" b="0">
+                <a:solidFill>
+                  <a:srgbClr val="64748B"/>
+                </a:solidFill>
+                <a:latin typeface="Microsoft JhengHei"/>
+              </a:rPr>
+              <a:t>「假設立刻簽收」</a:t>
             </a:r>
           </a:p>
         </p:txBody>
@@ -4153,12 +4201,12 @@
         </p:nvSpPr>
         <p:spPr>
           <a:xfrm>
-            <a:off x="731520" y="4846320"/>
-            <a:ext cx="10698480" cy="1371600"/>
+            <a:off x="9021927" y="2194560"/>
+            <a:ext cx="2651760" cy="2194560"/>
           </a:xfrm>
           <a:prstGeom prst="roundRect">
             <a:avLst>
-              <a:gd name="adj" fmla="val 10000"/>
+              <a:gd name="adj" fmla="val 6000"/>
             </a:avLst>
           </a:prstGeom>
           <a:noFill/>
@@ -4198,7 +4246,185 @@
         </p:nvSpPr>
         <p:spPr>
           <a:xfrm>
-            <a:off x="914400" y="5029200"/>
+            <a:off x="9296247" y="2468880"/>
+            <a:ext cx="2103120" cy="457200"/>
+          </a:xfrm>
+          <a:prstGeom prst="rect">
+            <a:avLst/>
+          </a:prstGeom>
+          <a:noFill/>
+        </p:spPr>
+        <p:txBody>
+          <a:bodyPr wrap="square" lIns="0" rIns="0" tIns="0" bIns="0" anchor="t">
+            <a:spAutoFit/>
+          </a:bodyPr>
+          <a:lstStyle/>
+          <a:p>
+            <a:pPr algn="l">
+              <a:lnSpc>
+                <a:spcPct val="120000"/>
+              </a:lnSpc>
+            </a:pPr>
+            <a:r>
+              <a:rPr sz="1400" b="1">
+                <a:solidFill>
+                  <a:srgbClr val="0F172A"/>
+                </a:solidFill>
+                <a:latin typeface="Microsoft JhengHei"/>
+              </a:rPr>
+              <a:t>04</a:t>
+            </a:r>
+          </a:p>
+        </p:txBody>
+      </p:sp>
+      <p:sp>
+        <p:nvSpPr>
+          <p:cNvPr id="21" name="TextBox 20"/>
+          <p:cNvSpPr txBox="1"/>
+          <p:nvPr/>
+        </p:nvSpPr>
+        <p:spPr>
+          <a:xfrm>
+            <a:off x="9296247" y="2880360"/>
+            <a:ext cx="2103120" cy="548640"/>
+          </a:xfrm>
+          <a:prstGeom prst="rect">
+            <a:avLst/>
+          </a:prstGeom>
+          <a:noFill/>
+        </p:spPr>
+        <p:txBody>
+          <a:bodyPr wrap="square" lIns="0" rIns="0" tIns="0" bIns="0" anchor="t">
+            <a:spAutoFit/>
+          </a:bodyPr>
+          <a:lstStyle/>
+          <a:p>
+            <a:pPr algn="l">
+              <a:lnSpc>
+                <a:spcPct val="130000"/>
+              </a:lnSpc>
+            </a:pPr>
+            <a:r>
+              <a:rPr sz="2200" b="1">
+                <a:solidFill>
+                  <a:srgbClr val="0F172A"/>
+                </a:solidFill>
+                <a:latin typeface="Microsoft JhengHei"/>
+              </a:rPr>
+              <a:t>降低負載</a:t>
+            </a:r>
+          </a:p>
+        </p:txBody>
+      </p:sp>
+      <p:sp>
+        <p:nvSpPr>
+          <p:cNvPr id="22" name="TextBox 21"/>
+          <p:cNvSpPr txBox="1"/>
+          <p:nvPr/>
+        </p:nvSpPr>
+        <p:spPr>
+          <a:xfrm>
+            <a:off x="9296247" y="3474720"/>
+            <a:ext cx="2103120" cy="822960"/>
+          </a:xfrm>
+          <a:prstGeom prst="rect">
+            <a:avLst/>
+          </a:prstGeom>
+          <a:noFill/>
+        </p:spPr>
+        <p:txBody>
+          <a:bodyPr wrap="square" lIns="0" rIns="0" tIns="0" bIns="0" anchor="t">
+            <a:spAutoFit/>
+          </a:bodyPr>
+          <a:lstStyle/>
+          <a:p>
+            <a:pPr algn="l">
+              <a:lnSpc>
+                <a:spcPct val="145000"/>
+              </a:lnSpc>
+            </a:pPr>
+            <a:r>
+              <a:rPr sz="1150" b="0">
+                <a:solidFill>
+                  <a:srgbClr val="64748B"/>
+                </a:solidFill>
+                <a:latin typeface="Microsoft JhengHei"/>
+              </a:rPr>
+              <a:t>對特定員工</a:t>
+            </a:r>
+          </a:p>
+          <a:p>
+            <a:pPr algn="l">
+              <a:lnSpc>
+                <a:spcPct val="145000"/>
+              </a:lnSpc>
+            </a:pPr>
+            <a:r>
+              <a:rPr sz="1150" b="0">
+                <a:solidFill>
+                  <a:srgbClr val="64748B"/>
+                </a:solidFill>
+                <a:latin typeface="Microsoft JhengHei"/>
+              </a:rPr>
+              <a:t>拉滑桿減 0-80%</a:t>
+            </a:r>
+          </a:p>
+        </p:txBody>
+      </p:sp>
+      <p:sp>
+        <p:nvSpPr>
+          <p:cNvPr id="23" name="Rounded Rectangle 22"/>
+          <p:cNvSpPr/>
+          <p:nvPr/>
+        </p:nvSpPr>
+        <p:spPr>
+          <a:xfrm>
+            <a:off x="731520" y="4754880"/>
+            <a:ext cx="10698480" cy="1463040"/>
+          </a:xfrm>
+          <a:prstGeom prst="roundRect">
+            <a:avLst>
+              <a:gd name="adj" fmla="val 10000"/>
+            </a:avLst>
+          </a:prstGeom>
+          <a:noFill/>
+          <a:ln w="9525">
+            <a:solidFill>
+              <a:srgbClr val="E2E8F0"/>
+            </a:solidFill>
+          </a:ln>
+        </p:spPr>
+        <p:style>
+          <a:lnRef idx="1">
+            <a:schemeClr val="accent1"/>
+          </a:lnRef>
+          <a:fillRef idx="3">
+            <a:schemeClr val="accent1"/>
+          </a:fillRef>
+          <a:effectRef idx="2">
+            <a:schemeClr val="accent1"/>
+          </a:effectRef>
+          <a:fontRef idx="minor">
+            <a:schemeClr val="lt1"/>
+          </a:fontRef>
+        </p:style>
+        <p:txBody>
+          <a:bodyPr rtlCol="0" anchor="ctr"/>
+          <a:lstStyle/>
+          <a:p>
+            <a:pPr algn="ctr"/>
+          </a:p>
+        </p:txBody>
+      </p:sp>
+      <p:sp>
+        <p:nvSpPr>
+          <p:cNvPr id="24" name="TextBox 23"/>
+          <p:cNvSpPr txBox="1"/>
+          <p:nvPr/>
+        </p:nvSpPr>
+        <p:spPr>
+          <a:xfrm>
+            <a:off x="914400" y="4937760"/>
             <a:ext cx="10515600" cy="457200"/>
           </a:xfrm>
           <a:prstGeom prst="rect">
@@ -4224,20 +4450,20 @@
                 </a:solidFill>
                 <a:latin typeface="Microsoft JhengHei"/>
               </a:rPr>
-              <a:t>為什麼這樣設計？</a:t>
-            </a:r>
-          </a:p>
-        </p:txBody>
-      </p:sp>
-      <p:sp>
-        <p:nvSpPr>
-          <p:cNvPr id="21" name="TextBox 20"/>
-          <p:cNvSpPr txBox="1"/>
-          <p:nvPr/>
-        </p:nvSpPr>
-        <p:spPr>
-          <a:xfrm>
-            <a:off x="914400" y="5440680"/>
+              <a:t>系統怎麼回答你「這樣改值不值得」</a:t>
+            </a:r>
+          </a:p>
+        </p:txBody>
+      </p:sp>
+      <p:sp>
+        <p:nvSpPr>
+          <p:cNvPr id="25" name="TextBox 24"/>
+          <p:cNvSpPr txBox="1"/>
+          <p:nvPr/>
+        </p:nvSpPr>
+        <p:spPr>
+          <a:xfrm>
+            <a:off x="914400" y="5349240"/>
             <a:ext cx="10515600" cy="914400"/>
           </a:xfrm>
           <a:prstGeom prst="rect">
@@ -4253,56 +4479,56 @@
           <a:p>
             <a:pPr algn="l">
               <a:lnSpc>
-                <a:spcPct val="150000"/>
-              </a:lnSpc>
-            </a:pPr>
-            <a:r>
-              <a:rPr sz="1300" b="0">
-                <a:solidFill>
-                  <a:srgbClr val="0F172A"/>
-                </a:solidFill>
-                <a:latin typeface="Microsoft JhengHei"/>
-              </a:rPr>
-              <a:t>• 不用真的改人事 — 在「另一條時間線」試試看，反悔不要錢</a:t>
-            </a:r>
-          </a:p>
-          <a:p>
-            <a:pPr algn="l">
-              <a:lnSpc>
-                <a:spcPct val="150000"/>
-              </a:lnSpc>
-            </a:pPr>
-            <a:r>
-              <a:rPr sz="1300" b="0">
-                <a:solidFill>
-                  <a:srgbClr val="0F172A"/>
-                </a:solidFill>
-                <a:latin typeface="Microsoft JhengHei"/>
-              </a:rPr>
-              <a:t>• 拖到哪算到哪 — 拖曳當下就重算，不用等</a:t>
-            </a:r>
-          </a:p>
-          <a:p>
-            <a:pPr algn="l">
-              <a:lnSpc>
-                <a:spcPct val="150000"/>
-              </a:lnSpc>
-            </a:pPr>
-            <a:r>
-              <a:rPr sz="1300" b="0">
-                <a:solidFill>
-                  <a:srgbClr val="0F172A"/>
-                </a:solidFill>
-                <a:latin typeface="Microsoft JhengHei"/>
-              </a:rPr>
-              <a:t>• 系統會主動建議 — 「把蔡明遠移到投研，整體會更平均」</a:t>
-            </a:r>
-          </a:p>
-        </p:txBody>
-      </p:sp>
-      <p:sp>
-        <p:nvSpPr>
-          <p:cNvPr id="22" name="TextBox 21"/>
+                <a:spcPct val="155000"/>
+              </a:lnSpc>
+            </a:pPr>
+            <a:r>
+              <a:rPr sz="1250" b="0">
+                <a:solidFill>
+                  <a:srgbClr val="0F172A"/>
+                </a:solidFill>
+                <a:latin typeface="Microsoft JhengHei"/>
+              </a:rPr>
+              <a:t>• 即時雙雷達圖對比 — 現況 vs 模擬後（同一張圖兩種顏色疊圖）</a:t>
+            </a:r>
+          </a:p>
+          <a:p>
+            <a:pPr algn="l">
+              <a:lnSpc>
+                <a:spcPct val="155000"/>
+              </a:lnSpc>
+            </a:pPr>
+            <a:r>
+              <a:rPr sz="1250" b="0">
+                <a:solidFill>
+                  <a:srgbClr val="0F172A"/>
+                </a:solidFill>
+                <a:latin typeface="Microsoft JhengHei"/>
+              </a:rPr>
+              <a:t>• 健康度 Δ 一個數字 — Δ &gt; 5「強烈建議」、0~5「微改善」、&lt; -5「不建議」</a:t>
+            </a:r>
+          </a:p>
+          <a:p>
+            <a:pPr algn="l">
+              <a:lnSpc>
+                <a:spcPct val="155000"/>
+              </a:lnSpc>
+            </a:pPr>
+            <a:r>
+              <a:rPr sz="1250" b="0">
+                <a:solidFill>
+                  <a:srgbClr val="0F172A"/>
+                </a:solidFill>
+                <a:latin typeface="Microsoft JhengHei"/>
+              </a:rPr>
+              <a:t>• useDeferredValue 確保拖滑桿時不卡 UI（背景重算、前景流暢）</a:t>
+            </a:r>
+          </a:p>
+        </p:txBody>
+      </p:sp>
+      <p:sp>
+        <p:nvSpPr>
+          <p:cNvPr id="26" name="TextBox 25"/>
           <p:cNvSpPr txBox="1"/>
           <p:nvPr/>
         </p:nvSpPr>
@@ -4341,7 +4567,7 @@
       </p:sp>
       <p:sp>
         <p:nvSpPr>
-          <p:cNvPr id="23" name="TextBox 22"/>
+          <p:cNvPr id="27" name="TextBox 26"/>
           <p:cNvSpPr txBox="1"/>
           <p:nvPr/>
         </p:nvSpPr>

--- a/docs/串連系統_簡報.pptx
+++ b/docs/串連系統_簡報.pptx
@@ -20360,7 +20360,7 @@
                 </a:solidFill>
                 <a:latin typeface="Microsoft JhengHei"/>
               </a:rPr>
-              <a:t>反推校準（Reverse Calibration）</a:t>
+              <a:t>人工權重的四層方法論</a:t>
             </a:r>
           </a:p>
         </p:txBody>
@@ -20399,7 +20399,7 @@
                 </a:solidFill>
                 <a:latin typeface="Microsoft JhengHei"/>
               </a:rPr>
-              <a:t>為什麼我們的人工參數不是憑空捏的</a:t>
+              <a:t>16 個人工參數，每一層都有可審查的依據</a:t>
             </a:r>
           </a:p>
         </p:txBody>
@@ -20412,12 +20412,12 @@
         </p:nvSpPr>
         <p:spPr>
           <a:xfrm>
-            <a:off x="449427" y="2286000"/>
-            <a:ext cx="2148840" cy="3657600"/>
+            <a:off x="495147" y="2240280"/>
+            <a:ext cx="2697480" cy="3657600"/>
           </a:xfrm>
           <a:prstGeom prst="roundRect">
             <a:avLst>
-              <a:gd name="adj" fmla="val 8000"/>
+              <a:gd name="adj" fmla="val 6000"/>
             </a:avLst>
           </a:prstGeom>
           <a:noFill/>
@@ -20457,33 +20457,33 @@
         </p:nvSpPr>
         <p:spPr>
           <a:xfrm>
-            <a:off x="449427" y="2651760"/>
-            <a:ext cx="2148840" cy="914400"/>
-          </a:xfrm>
-          <a:prstGeom prst="rect">
-            <a:avLst/>
-          </a:prstGeom>
-          <a:noFill/>
-        </p:spPr>
-        <p:txBody>
-          <a:bodyPr wrap="square" lIns="0" rIns="0" tIns="0" bIns="0" anchor="t">
-            <a:spAutoFit/>
-          </a:bodyPr>
-          <a:lstStyle/>
-          <a:p>
-            <a:pPr algn="ctr">
-              <a:lnSpc>
-                <a:spcPct val="120000"/>
-              </a:lnSpc>
-            </a:pPr>
-            <a:r>
-              <a:rPr sz="6000" b="1">
-                <a:solidFill>
-                  <a:srgbClr val="0F172A"/>
-                </a:solidFill>
-                <a:latin typeface="Microsoft JhengHei"/>
-              </a:rPr>
-              <a:t>1</a:t>
+            <a:off x="769467" y="2514600"/>
+            <a:ext cx="731520" cy="640080"/>
+          </a:xfrm>
+          <a:prstGeom prst="rect">
+            <a:avLst/>
+          </a:prstGeom>
+          <a:noFill/>
+        </p:spPr>
+        <p:txBody>
+          <a:bodyPr wrap="square" lIns="0" rIns="0" tIns="0" bIns="0" anchor="t">
+            <a:spAutoFit/>
+          </a:bodyPr>
+          <a:lstStyle/>
+          <a:p>
+            <a:pPr algn="l">
+              <a:lnSpc>
+                <a:spcPct val="120000"/>
+              </a:lnSpc>
+            </a:pPr>
+            <a:r>
+              <a:rPr sz="3600" b="1">
+                <a:solidFill>
+                  <a:srgbClr val="0F172A"/>
+                </a:solidFill>
+                <a:latin typeface="Microsoft JhengHei"/>
+              </a:rPr>
+              <a:t>①</a:t>
             </a:r>
           </a:p>
         </p:txBody>
@@ -20496,21 +20496,21 @@
         </p:nvSpPr>
         <p:spPr>
           <a:xfrm>
-            <a:off x="449427" y="3840480"/>
-            <a:ext cx="2148840" cy="548640"/>
-          </a:xfrm>
-          <a:prstGeom prst="rect">
-            <a:avLst/>
-          </a:prstGeom>
-          <a:noFill/>
-        </p:spPr>
-        <p:txBody>
-          <a:bodyPr wrap="square" lIns="0" rIns="0" tIns="0" bIns="0" anchor="t">
-            <a:spAutoFit/>
-          </a:bodyPr>
-          <a:lstStyle/>
-          <a:p>
-            <a:pPr algn="ctr">
+            <a:off x="769467" y="3154680"/>
+            <a:ext cx="2148840" cy="457200"/>
+          </a:xfrm>
+          <a:prstGeom prst="rect">
+            <a:avLst/>
+          </a:prstGeom>
+          <a:noFill/>
+        </p:spPr>
+        <p:txBody>
+          <a:bodyPr wrap="square" lIns="0" rIns="0" tIns="0" bIns="0" anchor="t">
+            <a:spAutoFit/>
+          </a:bodyPr>
+          <a:lstStyle/>
+          <a:p>
+            <a:pPr algn="l">
               <a:lnSpc>
                 <a:spcPct val="120000"/>
               </a:lnSpc>
@@ -20522,7 +20522,7 @@
                 </a:solidFill>
                 <a:latin typeface="Microsoft JhengHei"/>
               </a:rPr>
-              <a:t>先猜一個</a:t>
+              <a:t>排序方向</a:t>
             </a:r>
           </a:p>
         </p:txBody>
@@ -20535,72 +20535,187 @@
         </p:nvSpPr>
         <p:spPr>
           <a:xfrm>
-            <a:off x="632307" y="4572000"/>
-            <a:ext cx="1783080" cy="1371600"/>
-          </a:xfrm>
-          <a:prstGeom prst="rect">
-            <a:avLst/>
-          </a:prstGeom>
-          <a:noFill/>
-        </p:spPr>
-        <p:txBody>
-          <a:bodyPr wrap="square" lIns="0" rIns="0" tIns="0" bIns="0" anchor="t">
-            <a:spAutoFit/>
-          </a:bodyPr>
-          <a:lstStyle/>
-          <a:p>
-            <a:pPr algn="ctr">
+            <a:off x="769467" y="3657600"/>
+            <a:ext cx="2148840" cy="365760"/>
+          </a:xfrm>
+          <a:prstGeom prst="rect">
+            <a:avLst/>
+          </a:prstGeom>
+          <a:noFill/>
+        </p:spPr>
+        <p:txBody>
+          <a:bodyPr wrap="square" lIns="0" rIns="0" tIns="0" bIns="0" anchor="t">
+            <a:spAutoFit/>
+          </a:bodyPr>
+          <a:lstStyle/>
+          <a:p>
+            <a:pPr algn="l">
+              <a:lnSpc>
+                <a:spcPct val="120000"/>
+              </a:lnSpc>
+            </a:pPr>
+            <a:r>
+              <a:rPr sz="1100" b="0">
+                <a:solidFill>
+                  <a:srgbClr val="64748B"/>
+                </a:solidFill>
+                <a:latin typeface="Microsoft JhengHei"/>
+              </a:rPr>
+              <a:t>哪個權重該大</a:t>
+            </a:r>
+          </a:p>
+        </p:txBody>
+      </p:sp>
+      <p:cxnSp>
+        <p:nvCxnSpPr>
+          <p:cNvPr id="11" name="Connector 10"/>
+          <p:cNvCxnSpPr/>
+          <p:nvPr/>
+        </p:nvCxnSpPr>
+        <p:spPr>
+          <a:xfrm>
+            <a:off x="769467" y="4160520"/>
+            <a:ext cx="2148840" cy="0"/>
+          </a:xfrm>
+          <a:prstGeom prst="line">
+            <a:avLst/>
+          </a:prstGeom>
+          <a:ln w="9525">
+            <a:solidFill>
+              <a:srgbClr val="E2E8F0"/>
+            </a:solidFill>
+          </a:ln>
+        </p:spPr>
+        <p:style>
+          <a:lnRef idx="2">
+            <a:schemeClr val="accent1"/>
+          </a:lnRef>
+          <a:fillRef idx="0">
+            <a:schemeClr val="accent1"/>
+          </a:fillRef>
+          <a:effectRef idx="1">
+            <a:schemeClr val="accent1"/>
+          </a:effectRef>
+          <a:fontRef idx="minor">
+            <a:schemeClr val="tx1"/>
+          </a:fontRef>
+        </p:style>
+      </p:cxnSp>
+      <p:sp>
+        <p:nvSpPr>
+          <p:cNvPr id="12" name="TextBox 11"/>
+          <p:cNvSpPr txBox="1"/>
+          <p:nvPr/>
+        </p:nvSpPr>
+        <p:spPr>
+          <a:xfrm>
+            <a:off x="769467" y="4297680"/>
+            <a:ext cx="2148840" cy="1005840"/>
+          </a:xfrm>
+          <a:prstGeom prst="rect">
+            <a:avLst/>
+          </a:prstGeom>
+          <a:noFill/>
+        </p:spPr>
+        <p:txBody>
+          <a:bodyPr wrap="square" lIns="0" rIns="0" tIns="0" bIns="0" anchor="t">
+            <a:spAutoFit/>
+          </a:bodyPr>
+          <a:lstStyle/>
+          <a:p>
+            <a:pPr algn="l">
               <a:lnSpc>
                 <a:spcPct val="140000"/>
               </a:lnSpc>
             </a:pPr>
             <a:r>
-              <a:rPr sz="1200" b="0">
+              <a:rPr sz="1200" b="1">
+                <a:solidFill>
+                  <a:srgbClr val="0F172A"/>
+                </a:solidFill>
+                <a:latin typeface="Microsoft JhengHei"/>
+              </a:rPr>
+              <a:t>業界文獻</a:t>
+            </a:r>
+          </a:p>
+          <a:p>
+            <a:pPr algn="l">
+              <a:lnSpc>
+                <a:spcPct val="140000"/>
+              </a:lnSpc>
+            </a:pPr>
+            <a:r>
+              <a:rPr sz="1200" b="1">
+                <a:solidFill>
+                  <a:srgbClr val="0F172A"/>
+                </a:solidFill>
+                <a:latin typeface="Microsoft JhengHei"/>
+              </a:rPr>
+              <a:t>(Grove / Edmondson / OHI)</a:t>
+            </a:r>
+          </a:p>
+        </p:txBody>
+      </p:sp>
+      <p:sp>
+        <p:nvSpPr>
+          <p:cNvPr id="13" name="TextBox 12"/>
+          <p:cNvSpPr txBox="1"/>
+          <p:nvPr/>
+        </p:nvSpPr>
+        <p:spPr>
+          <a:xfrm>
+            <a:off x="769467" y="5303520"/>
+            <a:ext cx="2148840" cy="502920"/>
+          </a:xfrm>
+          <a:prstGeom prst="rect">
+            <a:avLst/>
+          </a:prstGeom>
+          <a:noFill/>
+        </p:spPr>
+        <p:txBody>
+          <a:bodyPr wrap="square" lIns="0" rIns="0" tIns="0" bIns="0" anchor="t">
+            <a:spAutoFit/>
+          </a:bodyPr>
+          <a:lstStyle/>
+          <a:p>
+            <a:pPr algn="l">
+              <a:lnSpc>
+                <a:spcPct val="130000"/>
+              </a:lnSpc>
+            </a:pPr>
+            <a:r>
+              <a:rPr sz="1000" b="0">
                 <a:solidFill>
                   <a:srgbClr val="64748B"/>
                 </a:solidFill>
                 <a:latin typeface="Microsoft JhengHei"/>
               </a:rPr>
-              <a:t>看書、抄業界，</a:t>
-            </a:r>
-          </a:p>
-          <a:p>
-            <a:pPr algn="ctr">
-              <a:lnSpc>
-                <a:spcPct val="140000"/>
-              </a:lnSpc>
-            </a:pPr>
-            <a:r>
-              <a:rPr sz="1200" b="0">
-                <a:solidFill>
-                  <a:srgbClr val="64748B"/>
-                </a:solidFill>
-                <a:latin typeface="Microsoft JhengHei"/>
-              </a:rPr>
-              <a:t>憑直覺給數字</a:t>
-            </a:r>
-          </a:p>
-        </p:txBody>
-      </p:sp>
-      <p:sp>
-        <p:nvSpPr>
-          <p:cNvPr id="11" name="Right Arrow 10"/>
+              <a:t>回答：為什麼 A 比 B 大</a:t>
+            </a:r>
+          </a:p>
+        </p:txBody>
+      </p:sp>
+      <p:sp>
+        <p:nvSpPr>
+          <p:cNvPr id="14" name="Rounded Rectangle 13"/>
           <p:cNvSpPr/>
           <p:nvPr/>
         </p:nvSpPr>
         <p:spPr>
           <a:xfrm>
-            <a:off x="2598267" y="3977640"/>
-            <a:ext cx="137160" cy="274320"/>
-          </a:xfrm>
-          <a:prstGeom prst="rightArrow">
-            <a:avLst/>
-          </a:prstGeom>
-          <a:solidFill>
-            <a:srgbClr val="0F172A"/>
-          </a:solidFill>
-          <a:ln>
-            <a:noFill/>
+            <a:off x="3329787" y="2240280"/>
+            <a:ext cx="2697480" cy="3657600"/>
+          </a:xfrm>
+          <a:prstGeom prst="roundRect">
+            <a:avLst>
+              <a:gd name="adj" fmla="val 6000"/>
+            </a:avLst>
+          </a:prstGeom>
+          <a:noFill/>
+          <a:ln w="9525">
+            <a:solidFill>
+              <a:srgbClr val="E2E8F0"/>
+            </a:solidFill>
           </a:ln>
         </p:spPr>
         <p:style>
@@ -20627,21 +20742,135 @@
       </p:sp>
       <p:sp>
         <p:nvSpPr>
-          <p:cNvPr id="12" name="Rounded Rectangle 11"/>
-          <p:cNvSpPr/>
-          <p:nvPr/>
-        </p:nvSpPr>
-        <p:spPr>
-          <a:xfrm>
-            <a:off x="2735427" y="2286000"/>
-            <a:ext cx="2148840" cy="3657600"/>
-          </a:xfrm>
-          <a:prstGeom prst="roundRect">
-            <a:avLst>
-              <a:gd name="adj" fmla="val 8000"/>
-            </a:avLst>
-          </a:prstGeom>
-          <a:noFill/>
+          <p:cNvPr id="15" name="TextBox 14"/>
+          <p:cNvSpPr txBox="1"/>
+          <p:nvPr/>
+        </p:nvSpPr>
+        <p:spPr>
+          <a:xfrm>
+            <a:off x="3604107" y="2514600"/>
+            <a:ext cx="731520" cy="640080"/>
+          </a:xfrm>
+          <a:prstGeom prst="rect">
+            <a:avLst/>
+          </a:prstGeom>
+          <a:noFill/>
+        </p:spPr>
+        <p:txBody>
+          <a:bodyPr wrap="square" lIns="0" rIns="0" tIns="0" bIns="0" anchor="t">
+            <a:spAutoFit/>
+          </a:bodyPr>
+          <a:lstStyle/>
+          <a:p>
+            <a:pPr algn="l">
+              <a:lnSpc>
+                <a:spcPct val="120000"/>
+              </a:lnSpc>
+            </a:pPr>
+            <a:r>
+              <a:rPr sz="3600" b="1">
+                <a:solidFill>
+                  <a:srgbClr val="0F172A"/>
+                </a:solidFill>
+                <a:latin typeface="Microsoft JhengHei"/>
+              </a:rPr>
+              <a:t>②</a:t>
+            </a:r>
+          </a:p>
+        </p:txBody>
+      </p:sp>
+      <p:sp>
+        <p:nvSpPr>
+          <p:cNvPr id="16" name="TextBox 15"/>
+          <p:cNvSpPr txBox="1"/>
+          <p:nvPr/>
+        </p:nvSpPr>
+        <p:spPr>
+          <a:xfrm>
+            <a:off x="3604107" y="3154680"/>
+            <a:ext cx="2148840" cy="457200"/>
+          </a:xfrm>
+          <a:prstGeom prst="rect">
+            <a:avLst/>
+          </a:prstGeom>
+          <a:noFill/>
+        </p:spPr>
+        <p:txBody>
+          <a:bodyPr wrap="square" lIns="0" rIns="0" tIns="0" bIns="0" anchor="t">
+            <a:spAutoFit/>
+          </a:bodyPr>
+          <a:lstStyle/>
+          <a:p>
+            <a:pPr algn="l">
+              <a:lnSpc>
+                <a:spcPct val="120000"/>
+              </a:lnSpc>
+            </a:pPr>
+            <a:r>
+              <a:rPr sz="2000" b="1">
+                <a:solidFill>
+                  <a:srgbClr val="0F172A"/>
+                </a:solidFill>
+                <a:latin typeface="Microsoft JhengHei"/>
+              </a:rPr>
+              <a:t>等價尺度</a:t>
+            </a:r>
+          </a:p>
+        </p:txBody>
+      </p:sp>
+      <p:sp>
+        <p:nvSpPr>
+          <p:cNvPr id="17" name="TextBox 16"/>
+          <p:cNvSpPr txBox="1"/>
+          <p:nvPr/>
+        </p:nvSpPr>
+        <p:spPr>
+          <a:xfrm>
+            <a:off x="3604107" y="3657600"/>
+            <a:ext cx="2148840" cy="365760"/>
+          </a:xfrm>
+          <a:prstGeom prst="rect">
+            <a:avLst/>
+          </a:prstGeom>
+          <a:noFill/>
+        </p:spPr>
+        <p:txBody>
+          <a:bodyPr wrap="square" lIns="0" rIns="0" tIns="0" bIns="0" anchor="t">
+            <a:spAutoFit/>
+          </a:bodyPr>
+          <a:lstStyle/>
+          <a:p>
+            <a:pPr algn="l">
+              <a:lnSpc>
+                <a:spcPct val="120000"/>
+              </a:lnSpc>
+            </a:pPr>
+            <a:r>
+              <a:rPr sz="1100" b="0">
+                <a:solidFill>
+                  <a:srgbClr val="64748B"/>
+                </a:solidFill>
+                <a:latin typeface="Microsoft JhengHei"/>
+              </a:rPr>
+              <a:t>比例該多懸殊</a:t>
+            </a:r>
+          </a:p>
+        </p:txBody>
+      </p:sp>
+      <p:cxnSp>
+        <p:nvCxnSpPr>
+          <p:cNvPr id="18" name="Connector 17"/>
+          <p:cNvCxnSpPr/>
+          <p:nvPr/>
+        </p:nvCxnSpPr>
+        <p:spPr>
+          <a:xfrm>
+            <a:off x="3604107" y="4160520"/>
+            <a:ext cx="2148840" cy="0"/>
+          </a:xfrm>
+          <a:prstGeom prst="line">
+            <a:avLst/>
+          </a:prstGeom>
           <a:ln w="9525">
             <a:solidFill>
               <a:srgbClr val="E2E8F0"/>
@@ -20649,6 +20878,138 @@
           </a:ln>
         </p:spPr>
         <p:style>
+          <a:lnRef idx="2">
+            <a:schemeClr val="accent1"/>
+          </a:lnRef>
+          <a:fillRef idx="0">
+            <a:schemeClr val="accent1"/>
+          </a:fillRef>
+          <a:effectRef idx="1">
+            <a:schemeClr val="accent1"/>
+          </a:effectRef>
+          <a:fontRef idx="minor">
+            <a:schemeClr val="tx1"/>
+          </a:fontRef>
+        </p:style>
+      </p:cxnSp>
+      <p:sp>
+        <p:nvSpPr>
+          <p:cNvPr id="19" name="TextBox 18"/>
+          <p:cNvSpPr txBox="1"/>
+          <p:nvPr/>
+        </p:nvSpPr>
+        <p:spPr>
+          <a:xfrm>
+            <a:off x="3604107" y="4297680"/>
+            <a:ext cx="2148840" cy="1005840"/>
+          </a:xfrm>
+          <a:prstGeom prst="rect">
+            <a:avLst/>
+          </a:prstGeom>
+          <a:noFill/>
+        </p:spPr>
+        <p:txBody>
+          <a:bodyPr wrap="square" lIns="0" rIns="0" tIns="0" bIns="0" anchor="t">
+            <a:spAutoFit/>
+          </a:bodyPr>
+          <a:lstStyle/>
+          <a:p>
+            <a:pPr algn="l">
+              <a:lnSpc>
+                <a:spcPct val="140000"/>
+              </a:lnSpc>
+            </a:pPr>
+            <a:r>
+              <a:rPr sz="1200" b="1">
+                <a:solidFill>
+                  <a:srgbClr val="0F172A"/>
+                </a:solidFill>
+                <a:latin typeface="Microsoft JhengHei"/>
+              </a:rPr>
+              <a:t>等價關係</a:t>
+            </a:r>
+          </a:p>
+          <a:p>
+            <a:pPr algn="l">
+              <a:lnSpc>
+                <a:spcPct val="140000"/>
+              </a:lnSpc>
+            </a:pPr>
+            <a:r>
+              <a:rPr sz="1200" b="1">
+                <a:solidFill>
+                  <a:srgbClr val="0F172A"/>
+                </a:solidFill>
+                <a:latin typeface="Microsoft JhengHei"/>
+              </a:rPr>
+              <a:t>(2 個交接 ≈ 1 個卡點)</a:t>
+            </a:r>
+          </a:p>
+        </p:txBody>
+      </p:sp>
+      <p:sp>
+        <p:nvSpPr>
+          <p:cNvPr id="20" name="TextBox 19"/>
+          <p:cNvSpPr txBox="1"/>
+          <p:nvPr/>
+        </p:nvSpPr>
+        <p:spPr>
+          <a:xfrm>
+            <a:off x="3604107" y="5303520"/>
+            <a:ext cx="2148840" cy="502920"/>
+          </a:xfrm>
+          <a:prstGeom prst="rect">
+            <a:avLst/>
+          </a:prstGeom>
+          <a:noFill/>
+        </p:spPr>
+        <p:txBody>
+          <a:bodyPr wrap="square" lIns="0" rIns="0" tIns="0" bIns="0" anchor="t">
+            <a:spAutoFit/>
+          </a:bodyPr>
+          <a:lstStyle/>
+          <a:p>
+            <a:pPr algn="l">
+              <a:lnSpc>
+                <a:spcPct val="130000"/>
+              </a:lnSpc>
+            </a:pPr>
+            <a:r>
+              <a:rPr sz="1000" b="0">
+                <a:solidFill>
+                  <a:srgbClr val="64748B"/>
+                </a:solidFill>
+                <a:latin typeface="Microsoft JhengHei"/>
+              </a:rPr>
+              <a:t>回答：為什麼是 1.5 不是 1.3</a:t>
+            </a:r>
+          </a:p>
+        </p:txBody>
+      </p:sp>
+      <p:sp>
+        <p:nvSpPr>
+          <p:cNvPr id="21" name="Rounded Rectangle 20"/>
+          <p:cNvSpPr/>
+          <p:nvPr/>
+        </p:nvSpPr>
+        <p:spPr>
+          <a:xfrm>
+            <a:off x="6164427" y="2240280"/>
+            <a:ext cx="2697480" cy="3657600"/>
+          </a:xfrm>
+          <a:prstGeom prst="roundRect">
+            <a:avLst>
+              <a:gd name="adj" fmla="val 6000"/>
+            </a:avLst>
+          </a:prstGeom>
+          <a:noFill/>
+          <a:ln w="9525">
+            <a:solidFill>
+              <a:srgbClr val="E2E8F0"/>
+            </a:solidFill>
+          </a:ln>
+        </p:spPr>
+        <p:style>
           <a:lnRef idx="1">
             <a:schemeClr val="accent1"/>
           </a:lnRef>
@@ -20672,66 +21033,66 @@
       </p:sp>
       <p:sp>
         <p:nvSpPr>
-          <p:cNvPr id="13" name="TextBox 12"/>
-          <p:cNvSpPr txBox="1"/>
-          <p:nvPr/>
-        </p:nvSpPr>
-        <p:spPr>
-          <a:xfrm>
-            <a:off x="2735427" y="2651760"/>
-            <a:ext cx="2148840" cy="914400"/>
-          </a:xfrm>
-          <a:prstGeom prst="rect">
-            <a:avLst/>
-          </a:prstGeom>
-          <a:noFill/>
-        </p:spPr>
-        <p:txBody>
-          <a:bodyPr wrap="square" lIns="0" rIns="0" tIns="0" bIns="0" anchor="t">
-            <a:spAutoFit/>
-          </a:bodyPr>
-          <a:lstStyle/>
-          <a:p>
-            <a:pPr algn="ctr">
-              <a:lnSpc>
-                <a:spcPct val="120000"/>
-              </a:lnSpc>
-            </a:pPr>
-            <a:r>
-              <a:rPr sz="6000" b="1">
-                <a:solidFill>
-                  <a:srgbClr val="0F172A"/>
-                </a:solidFill>
-                <a:latin typeface="Microsoft JhengHei"/>
-              </a:rPr>
-              <a:t>2</a:t>
-            </a:r>
-          </a:p>
-        </p:txBody>
-      </p:sp>
-      <p:sp>
-        <p:nvSpPr>
-          <p:cNvPr id="14" name="TextBox 13"/>
-          <p:cNvSpPr txBox="1"/>
-          <p:nvPr/>
-        </p:nvSpPr>
-        <p:spPr>
-          <a:xfrm>
-            <a:off x="2735427" y="3840480"/>
-            <a:ext cx="2148840" cy="548640"/>
-          </a:xfrm>
-          <a:prstGeom prst="rect">
-            <a:avLst/>
-          </a:prstGeom>
-          <a:noFill/>
-        </p:spPr>
-        <p:txBody>
-          <a:bodyPr wrap="square" lIns="0" rIns="0" tIns="0" bIns="0" anchor="t">
-            <a:spAutoFit/>
-          </a:bodyPr>
-          <a:lstStyle/>
-          <a:p>
-            <a:pPr algn="ctr">
+          <p:cNvPr id="22" name="TextBox 21"/>
+          <p:cNvSpPr txBox="1"/>
+          <p:nvPr/>
+        </p:nvSpPr>
+        <p:spPr>
+          <a:xfrm>
+            <a:off x="6438747" y="2514600"/>
+            <a:ext cx="731520" cy="640080"/>
+          </a:xfrm>
+          <a:prstGeom prst="rect">
+            <a:avLst/>
+          </a:prstGeom>
+          <a:noFill/>
+        </p:spPr>
+        <p:txBody>
+          <a:bodyPr wrap="square" lIns="0" rIns="0" tIns="0" bIns="0" anchor="t">
+            <a:spAutoFit/>
+          </a:bodyPr>
+          <a:lstStyle/>
+          <a:p>
+            <a:pPr algn="l">
+              <a:lnSpc>
+                <a:spcPct val="120000"/>
+              </a:lnSpc>
+            </a:pPr>
+            <a:r>
+              <a:rPr sz="3600" b="1">
+                <a:solidFill>
+                  <a:srgbClr val="0F172A"/>
+                </a:solidFill>
+                <a:latin typeface="Microsoft JhengHei"/>
+              </a:rPr>
+              <a:t>③</a:t>
+            </a:r>
+          </a:p>
+        </p:txBody>
+      </p:sp>
+      <p:sp>
+        <p:nvSpPr>
+          <p:cNvPr id="23" name="TextBox 22"/>
+          <p:cNvSpPr txBox="1"/>
+          <p:nvPr/>
+        </p:nvSpPr>
+        <p:spPr>
+          <a:xfrm>
+            <a:off x="6438747" y="3154680"/>
+            <a:ext cx="2148840" cy="457200"/>
+          </a:xfrm>
+          <a:prstGeom prst="rect">
+            <a:avLst/>
+          </a:prstGeom>
+          <a:noFill/>
+        </p:spPr>
+        <p:txBody>
+          <a:bodyPr wrap="square" lIns="0" rIns="0" tIns="0" bIns="0" anchor="t">
+            <a:spAutoFit/>
+          </a:bodyPr>
+          <a:lstStyle/>
+          <a:p>
+            <a:pPr algn="l">
               <a:lnSpc>
                 <a:spcPct val="120000"/>
               </a:lnSpc>
@@ -20743,85 +21104,200 @@
                 </a:solidFill>
                 <a:latin typeface="Microsoft JhengHei"/>
               </a:rPr>
-              <a:t>拿資料跑</a:t>
-            </a:r>
-          </a:p>
-        </p:txBody>
-      </p:sp>
-      <p:sp>
-        <p:nvSpPr>
-          <p:cNvPr id="15" name="TextBox 14"/>
-          <p:cNvSpPr txBox="1"/>
-          <p:nvPr/>
-        </p:nvSpPr>
-        <p:spPr>
-          <a:xfrm>
-            <a:off x="2918307" y="4572000"/>
-            <a:ext cx="1783080" cy="1371600"/>
-          </a:xfrm>
-          <a:prstGeom prst="rect">
-            <a:avLst/>
-          </a:prstGeom>
-          <a:noFill/>
-        </p:spPr>
-        <p:txBody>
-          <a:bodyPr wrap="square" lIns="0" rIns="0" tIns="0" bIns="0" anchor="t">
-            <a:spAutoFit/>
-          </a:bodyPr>
-          <a:lstStyle/>
-          <a:p>
-            <a:pPr algn="ctr">
+              <a:t>測資校準</a:t>
+            </a:r>
+          </a:p>
+        </p:txBody>
+      </p:sp>
+      <p:sp>
+        <p:nvSpPr>
+          <p:cNvPr id="24" name="TextBox 23"/>
+          <p:cNvSpPr txBox="1"/>
+          <p:nvPr/>
+        </p:nvSpPr>
+        <p:spPr>
+          <a:xfrm>
+            <a:off x="6438747" y="3657600"/>
+            <a:ext cx="2148840" cy="365760"/>
+          </a:xfrm>
+          <a:prstGeom prst="rect">
+            <a:avLst/>
+          </a:prstGeom>
+          <a:noFill/>
+        </p:spPr>
+        <p:txBody>
+          <a:bodyPr wrap="square" lIns="0" rIns="0" tIns="0" bIns="0" anchor="t">
+            <a:spAutoFit/>
+          </a:bodyPr>
+          <a:lstStyle/>
+          <a:p>
+            <a:pPr algn="l">
+              <a:lnSpc>
+                <a:spcPct val="120000"/>
+              </a:lnSpc>
+            </a:pPr>
+            <a:r>
+              <a:rPr sz="1100" b="0">
+                <a:solidFill>
+                  <a:srgbClr val="64748B"/>
+                </a:solidFill>
+                <a:latin typeface="Microsoft JhengHei"/>
+              </a:rPr>
+              <a:t>整體幅度多大</a:t>
+            </a:r>
+          </a:p>
+        </p:txBody>
+      </p:sp>
+      <p:cxnSp>
+        <p:nvCxnSpPr>
+          <p:cNvPr id="25" name="Connector 24"/>
+          <p:cNvCxnSpPr/>
+          <p:nvPr/>
+        </p:nvCxnSpPr>
+        <p:spPr>
+          <a:xfrm>
+            <a:off x="6438747" y="4160520"/>
+            <a:ext cx="2148840" cy="0"/>
+          </a:xfrm>
+          <a:prstGeom prst="line">
+            <a:avLst/>
+          </a:prstGeom>
+          <a:ln w="9525">
+            <a:solidFill>
+              <a:srgbClr val="E2E8F0"/>
+            </a:solidFill>
+          </a:ln>
+        </p:spPr>
+        <p:style>
+          <a:lnRef idx="2">
+            <a:schemeClr val="accent1"/>
+          </a:lnRef>
+          <a:fillRef idx="0">
+            <a:schemeClr val="accent1"/>
+          </a:fillRef>
+          <a:effectRef idx="1">
+            <a:schemeClr val="accent1"/>
+          </a:effectRef>
+          <a:fontRef idx="minor">
+            <a:schemeClr val="tx1"/>
+          </a:fontRef>
+        </p:style>
+      </p:cxnSp>
+      <p:sp>
+        <p:nvSpPr>
+          <p:cNvPr id="26" name="TextBox 25"/>
+          <p:cNvSpPr txBox="1"/>
+          <p:nvPr/>
+        </p:nvSpPr>
+        <p:spPr>
+          <a:xfrm>
+            <a:off x="6438747" y="4297680"/>
+            <a:ext cx="2148840" cy="1005840"/>
+          </a:xfrm>
+          <a:prstGeom prst="rect">
+            <a:avLst/>
+          </a:prstGeom>
+          <a:noFill/>
+        </p:spPr>
+        <p:txBody>
+          <a:bodyPr wrap="square" lIns="0" rIns="0" tIns="0" bIns="0" anchor="t">
+            <a:spAutoFit/>
+          </a:bodyPr>
+          <a:lstStyle/>
+          <a:p>
+            <a:pPr algn="l">
               <a:lnSpc>
                 <a:spcPct val="140000"/>
               </a:lnSpc>
             </a:pPr>
             <a:r>
-              <a:rPr sz="1200" b="0">
+              <a:rPr sz="1200" b="1">
+                <a:solidFill>
+                  <a:srgbClr val="0F172A"/>
+                </a:solidFill>
+                <a:latin typeface="Microsoft JhengHei"/>
+              </a:rPr>
+              <a:t>SEED 錨點測試</a:t>
+            </a:r>
+          </a:p>
+          <a:p>
+            <a:pPr algn="l">
+              <a:lnSpc>
+                <a:spcPct val="140000"/>
+              </a:lnSpc>
+            </a:pPr>
+            <a:r>
+              <a:rPr sz="1200" b="1">
+                <a:solidFill>
+                  <a:srgbClr val="0F172A"/>
+                </a:solidFill>
+                <a:latin typeface="Microsoft JhengHei"/>
+              </a:rPr>
+              <a:t>(典型過載 ≥ 12 分)</a:t>
+            </a:r>
+          </a:p>
+        </p:txBody>
+      </p:sp>
+      <p:sp>
+        <p:nvSpPr>
+          <p:cNvPr id="27" name="TextBox 26"/>
+          <p:cNvSpPr txBox="1"/>
+          <p:nvPr/>
+        </p:nvSpPr>
+        <p:spPr>
+          <a:xfrm>
+            <a:off x="6438747" y="5303520"/>
+            <a:ext cx="2148840" cy="502920"/>
+          </a:xfrm>
+          <a:prstGeom prst="rect">
+            <a:avLst/>
+          </a:prstGeom>
+          <a:noFill/>
+        </p:spPr>
+        <p:txBody>
+          <a:bodyPr wrap="square" lIns="0" rIns="0" tIns="0" bIns="0" anchor="t">
+            <a:spAutoFit/>
+          </a:bodyPr>
+          <a:lstStyle/>
+          <a:p>
+            <a:pPr algn="l">
+              <a:lnSpc>
+                <a:spcPct val="130000"/>
+              </a:lnSpc>
+            </a:pPr>
+            <a:r>
+              <a:rPr sz="1000" b="0">
                 <a:solidFill>
                   <a:srgbClr val="64748B"/>
                 </a:solidFill>
                 <a:latin typeface="Microsoft JhengHei"/>
               </a:rPr>
-              <a:t>用 17 員工模擬資料</a:t>
-            </a:r>
-          </a:p>
-          <a:p>
-            <a:pPr algn="ctr">
-              <a:lnSpc>
-                <a:spcPct val="140000"/>
-              </a:lnSpc>
-            </a:pPr>
-            <a:r>
-              <a:rPr sz="1200" b="0">
-                <a:solidFill>
-                  <a:srgbClr val="64748B"/>
-                </a:solidFill>
-                <a:latin typeface="Microsoft JhengHei"/>
-              </a:rPr>
-              <a:t>跑出結果</a:t>
-            </a:r>
-          </a:p>
-        </p:txBody>
-      </p:sp>
-      <p:sp>
-        <p:nvSpPr>
-          <p:cNvPr id="16" name="Right Arrow 15"/>
+              <a:t>回答：為什麼過載門檻是 12</a:t>
+            </a:r>
+          </a:p>
+        </p:txBody>
+      </p:sp>
+      <p:sp>
+        <p:nvSpPr>
+          <p:cNvPr id="28" name="Rounded Rectangle 27"/>
           <p:cNvSpPr/>
           <p:nvPr/>
         </p:nvSpPr>
         <p:spPr>
           <a:xfrm>
-            <a:off x="4884267" y="3977640"/>
-            <a:ext cx="137160" cy="274320"/>
-          </a:xfrm>
-          <a:prstGeom prst="rightArrow">
-            <a:avLst/>
-          </a:prstGeom>
-          <a:solidFill>
-            <a:srgbClr val="0F172A"/>
-          </a:solidFill>
-          <a:ln>
-            <a:noFill/>
+            <a:off x="8999067" y="2240280"/>
+            <a:ext cx="2697480" cy="3657600"/>
+          </a:xfrm>
+          <a:prstGeom prst="roundRect">
+            <a:avLst>
+              <a:gd name="adj" fmla="val 6000"/>
+            </a:avLst>
+          </a:prstGeom>
+          <a:noFill/>
+          <a:ln w="9525">
+            <a:solidFill>
+              <a:srgbClr val="E2E8F0"/>
+            </a:solidFill>
           </a:ln>
         </p:spPr>
         <p:style>
@@ -20848,21 +21324,135 @@
       </p:sp>
       <p:sp>
         <p:nvSpPr>
-          <p:cNvPr id="17" name="Rounded Rectangle 16"/>
-          <p:cNvSpPr/>
-          <p:nvPr/>
-        </p:nvSpPr>
-        <p:spPr>
-          <a:xfrm>
-            <a:off x="5021427" y="2286000"/>
-            <a:ext cx="2148840" cy="3657600"/>
-          </a:xfrm>
-          <a:prstGeom prst="roundRect">
-            <a:avLst>
-              <a:gd name="adj" fmla="val 8000"/>
-            </a:avLst>
-          </a:prstGeom>
-          <a:noFill/>
+          <p:cNvPr id="29" name="TextBox 28"/>
+          <p:cNvSpPr txBox="1"/>
+          <p:nvPr/>
+        </p:nvSpPr>
+        <p:spPr>
+          <a:xfrm>
+            <a:off x="9273387" y="2514600"/>
+            <a:ext cx="731520" cy="640080"/>
+          </a:xfrm>
+          <a:prstGeom prst="rect">
+            <a:avLst/>
+          </a:prstGeom>
+          <a:noFill/>
+        </p:spPr>
+        <p:txBody>
+          <a:bodyPr wrap="square" lIns="0" rIns="0" tIns="0" bIns="0" anchor="t">
+            <a:spAutoFit/>
+          </a:bodyPr>
+          <a:lstStyle/>
+          <a:p>
+            <a:pPr algn="l">
+              <a:lnSpc>
+                <a:spcPct val="120000"/>
+              </a:lnSpc>
+            </a:pPr>
+            <a:r>
+              <a:rPr sz="3600" b="1">
+                <a:solidFill>
+                  <a:srgbClr val="0F172A"/>
+                </a:solidFill>
+                <a:latin typeface="Microsoft JhengHei"/>
+              </a:rPr>
+              <a:t>④</a:t>
+            </a:r>
+          </a:p>
+        </p:txBody>
+      </p:sp>
+      <p:sp>
+        <p:nvSpPr>
+          <p:cNvPr id="30" name="TextBox 29"/>
+          <p:cNvSpPr txBox="1"/>
+          <p:nvPr/>
+        </p:nvSpPr>
+        <p:spPr>
+          <a:xfrm>
+            <a:off x="9273387" y="3154680"/>
+            <a:ext cx="2148840" cy="457200"/>
+          </a:xfrm>
+          <a:prstGeom prst="rect">
+            <a:avLst/>
+          </a:prstGeom>
+          <a:noFill/>
+        </p:spPr>
+        <p:txBody>
+          <a:bodyPr wrap="square" lIns="0" rIns="0" tIns="0" bIns="0" anchor="t">
+            <a:spAutoFit/>
+          </a:bodyPr>
+          <a:lstStyle/>
+          <a:p>
+            <a:pPr algn="l">
+              <a:lnSpc>
+                <a:spcPct val="120000"/>
+              </a:lnSpc>
+            </a:pPr>
+            <a:r>
+              <a:rPr sz="2000" b="1">
+                <a:solidFill>
+                  <a:srgbClr val="0F172A"/>
+                </a:solidFill>
+                <a:latin typeface="Microsoft JhengHei"/>
+              </a:rPr>
+              <a:t>敏感度驗證</a:t>
+            </a:r>
+          </a:p>
+        </p:txBody>
+      </p:sp>
+      <p:sp>
+        <p:nvSpPr>
+          <p:cNvPr id="31" name="TextBox 30"/>
+          <p:cNvSpPr txBox="1"/>
+          <p:nvPr/>
+        </p:nvSpPr>
+        <p:spPr>
+          <a:xfrm>
+            <a:off x="9273387" y="3657600"/>
+            <a:ext cx="2148840" cy="365760"/>
+          </a:xfrm>
+          <a:prstGeom prst="rect">
+            <a:avLst/>
+          </a:prstGeom>
+          <a:noFill/>
+        </p:spPr>
+        <p:txBody>
+          <a:bodyPr wrap="square" lIns="0" rIns="0" tIns="0" bIns="0" anchor="t">
+            <a:spAutoFit/>
+          </a:bodyPr>
+          <a:lstStyle/>
+          <a:p>
+            <a:pPr algn="l">
+              <a:lnSpc>
+                <a:spcPct val="120000"/>
+              </a:lnSpc>
+            </a:pPr>
+            <a:r>
+              <a:rPr sz="1100" b="0">
+                <a:solidFill>
+                  <a:srgbClr val="64748B"/>
+                </a:solidFill>
+                <a:latin typeface="Microsoft JhengHei"/>
+              </a:rPr>
+              <a:t>權重錯了會怎樣</a:t>
+            </a:r>
+          </a:p>
+        </p:txBody>
+      </p:sp>
+      <p:cxnSp>
+        <p:nvCxnSpPr>
+          <p:cNvPr id="32" name="Connector 31"/>
+          <p:cNvCxnSpPr/>
+          <p:nvPr/>
+        </p:nvCxnSpPr>
+        <p:spPr>
+          <a:xfrm>
+            <a:off x="9273387" y="4160520"/>
+            <a:ext cx="2148840" cy="0"/>
+          </a:xfrm>
+          <a:prstGeom prst="line">
+            <a:avLst/>
+          </a:prstGeom>
           <a:ln w="9525">
             <a:solidFill>
               <a:srgbClr val="E2E8F0"/>
@@ -20870,659 +21460,546 @@
           </a:ln>
         </p:spPr>
         <p:style>
-          <a:lnRef idx="1">
+          <a:lnRef idx="2">
             <a:schemeClr val="accent1"/>
           </a:lnRef>
-          <a:fillRef idx="3">
+          <a:fillRef idx="0">
             <a:schemeClr val="accent1"/>
           </a:fillRef>
-          <a:effectRef idx="2">
+          <a:effectRef idx="1">
             <a:schemeClr val="accent1"/>
           </a:effectRef>
           <a:fontRef idx="minor">
-            <a:schemeClr val="lt1"/>
+            <a:schemeClr val="tx1"/>
           </a:fontRef>
         </p:style>
-        <p:txBody>
-          <a:bodyPr rtlCol="0" anchor="ctr"/>
-          <a:lstStyle/>
-          <a:p>
-            <a:pPr algn="ctr"/>
-          </a:p>
-        </p:txBody>
-      </p:sp>
-      <p:sp>
-        <p:nvSpPr>
-          <p:cNvPr id="18" name="TextBox 17"/>
-          <p:cNvSpPr txBox="1"/>
-          <p:nvPr/>
-        </p:nvSpPr>
-        <p:spPr>
-          <a:xfrm>
-            <a:off x="5021427" y="2651760"/>
-            <a:ext cx="2148840" cy="914400"/>
-          </a:xfrm>
-          <a:prstGeom prst="rect">
-            <a:avLst/>
-          </a:prstGeom>
-          <a:noFill/>
-        </p:spPr>
-        <p:txBody>
-          <a:bodyPr wrap="square" lIns="0" rIns="0" tIns="0" bIns="0" anchor="t">
-            <a:spAutoFit/>
-          </a:bodyPr>
-          <a:lstStyle/>
-          <a:p>
-            <a:pPr algn="ctr">
-              <a:lnSpc>
-                <a:spcPct val="120000"/>
-              </a:lnSpc>
-            </a:pPr>
-            <a:r>
-              <a:rPr sz="6000" b="1">
-                <a:solidFill>
-                  <a:srgbClr val="0F172A"/>
-                </a:solidFill>
-                <a:latin typeface="Microsoft JhengHei"/>
-              </a:rPr>
-              <a:t>3</a:t>
-            </a:r>
-          </a:p>
-        </p:txBody>
-      </p:sp>
-      <p:sp>
-        <p:nvSpPr>
-          <p:cNvPr id="19" name="TextBox 18"/>
-          <p:cNvSpPr txBox="1"/>
-          <p:nvPr/>
-        </p:nvSpPr>
-        <p:spPr>
-          <a:xfrm>
-            <a:off x="5021427" y="3840480"/>
-            <a:ext cx="2148840" cy="548640"/>
-          </a:xfrm>
-          <a:prstGeom prst="rect">
-            <a:avLst/>
-          </a:prstGeom>
-          <a:noFill/>
-        </p:spPr>
-        <p:txBody>
-          <a:bodyPr wrap="square" lIns="0" rIns="0" tIns="0" bIns="0" anchor="t">
-            <a:spAutoFit/>
-          </a:bodyPr>
-          <a:lstStyle/>
-          <a:p>
-            <a:pPr algn="ctr">
-              <a:lnSpc>
-                <a:spcPct val="120000"/>
-              </a:lnSpc>
-            </a:pPr>
-            <a:r>
-              <a:rPr sz="2000" b="1">
-                <a:solidFill>
-                  <a:srgbClr val="0F172A"/>
-                </a:solidFill>
-                <a:latin typeface="Microsoft JhengHei"/>
-              </a:rPr>
-              <a:t>對答案</a:t>
-            </a:r>
-          </a:p>
-        </p:txBody>
-      </p:sp>
-      <p:sp>
-        <p:nvSpPr>
-          <p:cNvPr id="20" name="TextBox 19"/>
-          <p:cNvSpPr txBox="1"/>
-          <p:nvPr/>
-        </p:nvSpPr>
-        <p:spPr>
-          <a:xfrm>
-            <a:off x="5204307" y="4572000"/>
-            <a:ext cx="1783080" cy="1371600"/>
-          </a:xfrm>
-          <a:prstGeom prst="rect">
-            <a:avLst/>
-          </a:prstGeom>
-          <a:noFill/>
-        </p:spPr>
-        <p:txBody>
-          <a:bodyPr wrap="square" lIns="0" rIns="0" tIns="0" bIns="0" anchor="t">
-            <a:spAutoFit/>
-          </a:bodyPr>
-          <a:lstStyle/>
-          <a:p>
-            <a:pPr algn="ctr">
+      </p:cxnSp>
+      <p:sp>
+        <p:nvSpPr>
+          <p:cNvPr id="33" name="TextBox 32"/>
+          <p:cNvSpPr txBox="1"/>
+          <p:nvPr/>
+        </p:nvSpPr>
+        <p:spPr>
+          <a:xfrm>
+            <a:off x="9273387" y="4297680"/>
+            <a:ext cx="2148840" cy="1005840"/>
+          </a:xfrm>
+          <a:prstGeom prst="rect">
+            <a:avLst/>
+          </a:prstGeom>
+          <a:noFill/>
+        </p:spPr>
+        <p:txBody>
+          <a:bodyPr wrap="square" lIns="0" rIns="0" tIns="0" bIns="0" anchor="t">
+            <a:spAutoFit/>
+          </a:bodyPr>
+          <a:lstStyle/>
+          <a:p>
+            <a:pPr algn="l">
               <a:lnSpc>
                 <a:spcPct val="140000"/>
               </a:lnSpc>
             </a:pPr>
             <a:r>
-              <a:rPr sz="1200" b="0">
+              <a:rPr sz="1200" b="1">
+                <a:solidFill>
+                  <a:srgbClr val="0F172A"/>
+                </a:solidFill>
+                <a:latin typeface="Microsoft JhengHei"/>
+              </a:rPr>
+              <a:t>±20% 擾動 × 500 次</a:t>
+            </a:r>
+          </a:p>
+          <a:p>
+            <a:pPr algn="l">
+              <a:lnSpc>
+                <a:spcPct val="140000"/>
+              </a:lnSpc>
+            </a:pPr>
+            <a:r>
+              <a:rPr sz="1200" b="1">
+                <a:solidFill>
+                  <a:srgbClr val="0F172A"/>
+                </a:solidFill>
+                <a:latin typeface="Microsoft JhengHei"/>
+              </a:rPr>
+              <a:t>Top-3 穩定 93.4%</a:t>
+            </a:r>
+          </a:p>
+        </p:txBody>
+      </p:sp>
+      <p:sp>
+        <p:nvSpPr>
+          <p:cNvPr id="34" name="TextBox 33"/>
+          <p:cNvSpPr txBox="1"/>
+          <p:nvPr/>
+        </p:nvSpPr>
+        <p:spPr>
+          <a:xfrm>
+            <a:off x="9273387" y="5303520"/>
+            <a:ext cx="2148840" cy="502920"/>
+          </a:xfrm>
+          <a:prstGeom prst="rect">
+            <a:avLst/>
+          </a:prstGeom>
+          <a:noFill/>
+        </p:spPr>
+        <p:txBody>
+          <a:bodyPr wrap="square" lIns="0" rIns="0" tIns="0" bIns="0" anchor="t">
+            <a:spAutoFit/>
+          </a:bodyPr>
+          <a:lstStyle/>
+          <a:p>
+            <a:pPr algn="l">
+              <a:lnSpc>
+                <a:spcPct val="130000"/>
+              </a:lnSpc>
+            </a:pPr>
+            <a:r>
+              <a:rPr sz="1000" b="0">
                 <a:solidFill>
                   <a:srgbClr val="64748B"/>
                 </a:solidFill>
                 <a:latin typeface="Microsoft JhengHei"/>
               </a:rPr>
-              <a:t>問主管：「這個結果</a:t>
-            </a:r>
-          </a:p>
-          <a:p>
-            <a:pPr algn="ctr">
-              <a:lnSpc>
-                <a:spcPct val="140000"/>
-              </a:lnSpc>
-            </a:pPr>
-            <a:r>
-              <a:rPr sz="1200" b="0">
+              <a:t>回答：萬一數字錯系統會崩嗎</a:t>
+            </a:r>
+          </a:p>
+        </p:txBody>
+      </p:sp>
+      <p:sp>
+        <p:nvSpPr>
+          <p:cNvPr id="35" name="TextBox 34"/>
+          <p:cNvSpPr txBox="1"/>
+          <p:nvPr/>
+        </p:nvSpPr>
+        <p:spPr>
+          <a:xfrm>
+            <a:off x="731520" y="5989320"/>
+            <a:ext cx="10972800" cy="365760"/>
+          </a:xfrm>
+          <a:prstGeom prst="rect">
+            <a:avLst/>
+          </a:prstGeom>
+          <a:noFill/>
+        </p:spPr>
+        <p:txBody>
+          <a:bodyPr wrap="square" lIns="0" rIns="0" tIns="0" bIns="0" anchor="t">
+            <a:spAutoFit/>
+          </a:bodyPr>
+          <a:lstStyle/>
+          <a:p>
+            <a:pPr algn="l">
+              <a:lnSpc>
+                <a:spcPct val="120000"/>
+              </a:lnSpc>
+            </a:pPr>
+            <a:r>
+              <a:rPr sz="1100" b="1">
+                <a:solidFill>
+                  <a:srgbClr val="0F172A"/>
+                </a:solidFill>
+                <a:latin typeface="Microsoft JhengHei"/>
+              </a:rPr>
+              <a:t>量化證據總表</a:t>
+            </a:r>
+          </a:p>
+        </p:txBody>
+      </p:sp>
+      <p:sp>
+        <p:nvSpPr>
+          <p:cNvPr id="36" name="TextBox 35"/>
+          <p:cNvSpPr txBox="1"/>
+          <p:nvPr/>
+        </p:nvSpPr>
+        <p:spPr>
+          <a:xfrm>
+            <a:off x="731520" y="6309360"/>
+            <a:ext cx="2194560" cy="320040"/>
+          </a:xfrm>
+          <a:prstGeom prst="rect">
+            <a:avLst/>
+          </a:prstGeom>
+          <a:noFill/>
+        </p:spPr>
+        <p:txBody>
+          <a:bodyPr wrap="square" lIns="0" rIns="0" tIns="0" bIns="0" anchor="t">
+            <a:spAutoFit/>
+          </a:bodyPr>
+          <a:lstStyle/>
+          <a:p>
+            <a:pPr algn="l">
+              <a:lnSpc>
+                <a:spcPct val="120000"/>
+              </a:lnSpc>
+            </a:pPr>
+            <a:r>
+              <a:rPr sz="1800" b="1">
+                <a:solidFill>
+                  <a:srgbClr val="0F172A"/>
+                </a:solidFill>
+                <a:latin typeface="Microsoft JhengHei"/>
+              </a:rPr>
+              <a:t>16 個</a:t>
+            </a:r>
+          </a:p>
+        </p:txBody>
+      </p:sp>
+      <p:sp>
+        <p:nvSpPr>
+          <p:cNvPr id="37" name="TextBox 36"/>
+          <p:cNvSpPr txBox="1"/>
+          <p:nvPr/>
+        </p:nvSpPr>
+        <p:spPr>
+          <a:xfrm>
+            <a:off x="731520" y="6629400"/>
+            <a:ext cx="2194560" cy="228600"/>
+          </a:xfrm>
+          <a:prstGeom prst="rect">
+            <a:avLst/>
+          </a:prstGeom>
+          <a:noFill/>
+        </p:spPr>
+        <p:txBody>
+          <a:bodyPr wrap="square" lIns="0" rIns="0" tIns="0" bIns="0" anchor="t">
+            <a:spAutoFit/>
+          </a:bodyPr>
+          <a:lstStyle/>
+          <a:p>
+            <a:pPr algn="l">
+              <a:lnSpc>
+                <a:spcPct val="120000"/>
+              </a:lnSpc>
+            </a:pPr>
+            <a:r>
+              <a:rPr sz="900" b="0">
                 <a:solidFill>
                   <a:srgbClr val="64748B"/>
                 </a:solidFill>
                 <a:latin typeface="Microsoft JhengHei"/>
               </a:rPr>
-              <a:t>跟你直覺一不一樣？」</a:t>
-            </a:r>
-          </a:p>
-        </p:txBody>
-      </p:sp>
-      <p:sp>
-        <p:nvSpPr>
-          <p:cNvPr id="21" name="Right Arrow 20"/>
-          <p:cNvSpPr/>
-          <p:nvPr/>
-        </p:nvSpPr>
-        <p:spPr>
-          <a:xfrm>
-            <a:off x="7170267" y="3977640"/>
-            <a:ext cx="137160" cy="274320"/>
-          </a:xfrm>
-          <a:prstGeom prst="rightArrow">
-            <a:avLst/>
-          </a:prstGeom>
-          <a:solidFill>
-            <a:srgbClr val="0F172A"/>
-          </a:solidFill>
-          <a:ln>
-            <a:noFill/>
-          </a:ln>
-        </p:spPr>
-        <p:style>
-          <a:lnRef idx="1">
-            <a:schemeClr val="accent1"/>
-          </a:lnRef>
-          <a:fillRef idx="3">
-            <a:schemeClr val="accent1"/>
-          </a:fillRef>
-          <a:effectRef idx="2">
-            <a:schemeClr val="accent1"/>
-          </a:effectRef>
-          <a:fontRef idx="minor">
-            <a:schemeClr val="lt1"/>
-          </a:fontRef>
-        </p:style>
-        <p:txBody>
-          <a:bodyPr rtlCol="0" anchor="ctr"/>
-          <a:lstStyle/>
-          <a:p>
-            <a:pPr algn="ctr"/>
-          </a:p>
-        </p:txBody>
-      </p:sp>
-      <p:sp>
-        <p:nvSpPr>
-          <p:cNvPr id="22" name="Rounded Rectangle 21"/>
-          <p:cNvSpPr/>
-          <p:nvPr/>
-        </p:nvSpPr>
-        <p:spPr>
-          <a:xfrm>
-            <a:off x="7307427" y="2286000"/>
-            <a:ext cx="2148840" cy="3657600"/>
-          </a:xfrm>
-          <a:prstGeom prst="roundRect">
-            <a:avLst>
-              <a:gd name="adj" fmla="val 8000"/>
-            </a:avLst>
-          </a:prstGeom>
-          <a:noFill/>
-          <a:ln w="9525">
-            <a:solidFill>
-              <a:srgbClr val="E2E8F0"/>
-            </a:solidFill>
-          </a:ln>
-        </p:spPr>
-        <p:style>
-          <a:lnRef idx="1">
-            <a:schemeClr val="accent1"/>
-          </a:lnRef>
-          <a:fillRef idx="3">
-            <a:schemeClr val="accent1"/>
-          </a:fillRef>
-          <a:effectRef idx="2">
-            <a:schemeClr val="accent1"/>
-          </a:effectRef>
-          <a:fontRef idx="minor">
-            <a:schemeClr val="lt1"/>
-          </a:fontRef>
-        </p:style>
-        <p:txBody>
-          <a:bodyPr rtlCol="0" anchor="ctr"/>
-          <a:lstStyle/>
-          <a:p>
-            <a:pPr algn="ctr"/>
-          </a:p>
-        </p:txBody>
-      </p:sp>
-      <p:sp>
-        <p:nvSpPr>
-          <p:cNvPr id="23" name="TextBox 22"/>
-          <p:cNvSpPr txBox="1"/>
-          <p:nvPr/>
-        </p:nvSpPr>
-        <p:spPr>
-          <a:xfrm>
-            <a:off x="7307427" y="2651760"/>
-            <a:ext cx="2148840" cy="914400"/>
-          </a:xfrm>
-          <a:prstGeom prst="rect">
-            <a:avLst/>
-          </a:prstGeom>
-          <a:noFill/>
-        </p:spPr>
-        <p:txBody>
-          <a:bodyPr wrap="square" lIns="0" rIns="0" tIns="0" bIns="0" anchor="t">
-            <a:spAutoFit/>
-          </a:bodyPr>
-          <a:lstStyle/>
-          <a:p>
-            <a:pPr algn="ctr">
-              <a:lnSpc>
-                <a:spcPct val="120000"/>
-              </a:lnSpc>
-            </a:pPr>
-            <a:r>
-              <a:rPr sz="6000" b="1">
-                <a:solidFill>
-                  <a:srgbClr val="0F172A"/>
-                </a:solidFill>
-                <a:latin typeface="Microsoft JhengHei"/>
-              </a:rPr>
-              <a:t>4</a:t>
-            </a:r>
-          </a:p>
-        </p:txBody>
-      </p:sp>
-      <p:sp>
-        <p:nvSpPr>
-          <p:cNvPr id="24" name="TextBox 23"/>
-          <p:cNvSpPr txBox="1"/>
-          <p:nvPr/>
-        </p:nvSpPr>
-        <p:spPr>
-          <a:xfrm>
-            <a:off x="7307427" y="3840480"/>
-            <a:ext cx="2148840" cy="548640"/>
-          </a:xfrm>
-          <a:prstGeom prst="rect">
-            <a:avLst/>
-          </a:prstGeom>
-          <a:noFill/>
-        </p:spPr>
-        <p:txBody>
-          <a:bodyPr wrap="square" lIns="0" rIns="0" tIns="0" bIns="0" anchor="t">
-            <a:spAutoFit/>
-          </a:bodyPr>
-          <a:lstStyle/>
-          <a:p>
-            <a:pPr algn="ctr">
-              <a:lnSpc>
-                <a:spcPct val="120000"/>
-              </a:lnSpc>
-            </a:pPr>
-            <a:r>
-              <a:rPr sz="2000" b="1">
-                <a:solidFill>
-                  <a:srgbClr val="0F172A"/>
-                </a:solidFill>
-                <a:latin typeface="Microsoft JhengHei"/>
-              </a:rPr>
-              <a:t>改數字</a:t>
-            </a:r>
-          </a:p>
-        </p:txBody>
-      </p:sp>
-      <p:sp>
-        <p:nvSpPr>
-          <p:cNvPr id="25" name="TextBox 24"/>
-          <p:cNvSpPr txBox="1"/>
-          <p:nvPr/>
-        </p:nvSpPr>
-        <p:spPr>
-          <a:xfrm>
-            <a:off x="7490307" y="4572000"/>
-            <a:ext cx="1783080" cy="1371600"/>
-          </a:xfrm>
-          <a:prstGeom prst="rect">
-            <a:avLst/>
-          </a:prstGeom>
-          <a:noFill/>
-        </p:spPr>
-        <p:txBody>
-          <a:bodyPr wrap="square" lIns="0" rIns="0" tIns="0" bIns="0" anchor="t">
-            <a:spAutoFit/>
-          </a:bodyPr>
-          <a:lstStyle/>
-          <a:p>
-            <a:pPr algn="ctr">
-              <a:lnSpc>
-                <a:spcPct val="140000"/>
-              </a:lnSpc>
-            </a:pPr>
-            <a:r>
-              <a:rPr sz="1200" b="0">
+              <a:t>人工權重</a:t>
+            </a:r>
+          </a:p>
+        </p:txBody>
+      </p:sp>
+      <p:sp>
+        <p:nvSpPr>
+          <p:cNvPr id="38" name="TextBox 37"/>
+          <p:cNvSpPr txBox="1"/>
+          <p:nvPr/>
+        </p:nvSpPr>
+        <p:spPr>
+          <a:xfrm>
+            <a:off x="2926080" y="6309360"/>
+            <a:ext cx="2194560" cy="320040"/>
+          </a:xfrm>
+          <a:prstGeom prst="rect">
+            <a:avLst/>
+          </a:prstGeom>
+          <a:noFill/>
+        </p:spPr>
+        <p:txBody>
+          <a:bodyPr wrap="square" lIns="0" rIns="0" tIns="0" bIns="0" anchor="t">
+            <a:spAutoFit/>
+          </a:bodyPr>
+          <a:lstStyle/>
+          <a:p>
+            <a:pPr algn="l">
+              <a:lnSpc>
+                <a:spcPct val="120000"/>
+              </a:lnSpc>
+            </a:pPr>
+            <a:r>
+              <a:rPr sz="1800" b="1">
+                <a:solidFill>
+                  <a:srgbClr val="0F172A"/>
+                </a:solidFill>
+                <a:latin typeface="Microsoft JhengHei"/>
+              </a:rPr>
+              <a:t>4 層</a:t>
+            </a:r>
+          </a:p>
+        </p:txBody>
+      </p:sp>
+      <p:sp>
+        <p:nvSpPr>
+          <p:cNvPr id="39" name="TextBox 38"/>
+          <p:cNvSpPr txBox="1"/>
+          <p:nvPr/>
+        </p:nvSpPr>
+        <p:spPr>
+          <a:xfrm>
+            <a:off x="2926080" y="6629400"/>
+            <a:ext cx="2194560" cy="228600"/>
+          </a:xfrm>
+          <a:prstGeom prst="rect">
+            <a:avLst/>
+          </a:prstGeom>
+          <a:noFill/>
+        </p:spPr>
+        <p:txBody>
+          <a:bodyPr wrap="square" lIns="0" rIns="0" tIns="0" bIns="0" anchor="t">
+            <a:spAutoFit/>
+          </a:bodyPr>
+          <a:lstStyle/>
+          <a:p>
+            <a:pPr algn="l">
+              <a:lnSpc>
+                <a:spcPct val="120000"/>
+              </a:lnSpc>
+            </a:pPr>
+            <a:r>
+              <a:rPr sz="900" b="0">
                 <a:solidFill>
                   <a:srgbClr val="64748B"/>
                 </a:solidFill>
                 <a:latin typeface="Microsoft JhengHei"/>
               </a:rPr>
-              <a:t>不一樣就回去調，</a:t>
-            </a:r>
-          </a:p>
-          <a:p>
-            <a:pPr algn="ctr">
-              <a:lnSpc>
-                <a:spcPct val="140000"/>
-              </a:lnSpc>
-            </a:pPr>
-            <a:r>
-              <a:rPr sz="1200" b="0">
+              <a:t>可審查依據</a:t>
+            </a:r>
+          </a:p>
+        </p:txBody>
+      </p:sp>
+      <p:sp>
+        <p:nvSpPr>
+          <p:cNvPr id="40" name="TextBox 39"/>
+          <p:cNvSpPr txBox="1"/>
+          <p:nvPr/>
+        </p:nvSpPr>
+        <p:spPr>
+          <a:xfrm>
+            <a:off x="5120640" y="6309360"/>
+            <a:ext cx="2194560" cy="320040"/>
+          </a:xfrm>
+          <a:prstGeom prst="rect">
+            <a:avLst/>
+          </a:prstGeom>
+          <a:noFill/>
+        </p:spPr>
+        <p:txBody>
+          <a:bodyPr wrap="square" lIns="0" rIns="0" tIns="0" bIns="0" anchor="t">
+            <a:spAutoFit/>
+          </a:bodyPr>
+          <a:lstStyle/>
+          <a:p>
+            <a:pPr algn="l">
+              <a:lnSpc>
+                <a:spcPct val="120000"/>
+              </a:lnSpc>
+            </a:pPr>
+            <a:r>
+              <a:rPr sz="1800" b="1">
+                <a:solidFill>
+                  <a:srgbClr val="0F172A"/>
+                </a:solidFill>
+                <a:latin typeface="Microsoft JhengHei"/>
+              </a:rPr>
+              <a:t>500 次</a:t>
+            </a:r>
+          </a:p>
+        </p:txBody>
+      </p:sp>
+      <p:sp>
+        <p:nvSpPr>
+          <p:cNvPr id="41" name="TextBox 40"/>
+          <p:cNvSpPr txBox="1"/>
+          <p:nvPr/>
+        </p:nvSpPr>
+        <p:spPr>
+          <a:xfrm>
+            <a:off x="5120640" y="6629400"/>
+            <a:ext cx="2194560" cy="228600"/>
+          </a:xfrm>
+          <a:prstGeom prst="rect">
+            <a:avLst/>
+          </a:prstGeom>
+          <a:noFill/>
+        </p:spPr>
+        <p:txBody>
+          <a:bodyPr wrap="square" lIns="0" rIns="0" tIns="0" bIns="0" anchor="t">
+            <a:spAutoFit/>
+          </a:bodyPr>
+          <a:lstStyle/>
+          <a:p>
+            <a:pPr algn="l">
+              <a:lnSpc>
+                <a:spcPct val="120000"/>
+              </a:lnSpc>
+            </a:pPr>
+            <a:r>
+              <a:rPr sz="900" b="0">
                 <a:solidFill>
                   <a:srgbClr val="64748B"/>
                 </a:solidFill>
                 <a:latin typeface="Microsoft JhengHei"/>
               </a:rPr>
-              <a:t>直到對得上</a:t>
-            </a:r>
-          </a:p>
-        </p:txBody>
-      </p:sp>
-      <p:sp>
-        <p:nvSpPr>
-          <p:cNvPr id="26" name="Right Arrow 25"/>
-          <p:cNvSpPr/>
-          <p:nvPr/>
-        </p:nvSpPr>
-        <p:spPr>
-          <a:xfrm>
-            <a:off x="9456267" y="3977640"/>
-            <a:ext cx="137160" cy="274320"/>
-          </a:xfrm>
-          <a:prstGeom prst="rightArrow">
-            <a:avLst/>
-          </a:prstGeom>
-          <a:solidFill>
-            <a:srgbClr val="0F172A"/>
-          </a:solidFill>
-          <a:ln>
-            <a:noFill/>
-          </a:ln>
-        </p:spPr>
-        <p:style>
-          <a:lnRef idx="1">
-            <a:schemeClr val="accent1"/>
-          </a:lnRef>
-          <a:fillRef idx="3">
-            <a:schemeClr val="accent1"/>
-          </a:fillRef>
-          <a:effectRef idx="2">
-            <a:schemeClr val="accent1"/>
-          </a:effectRef>
-          <a:fontRef idx="minor">
-            <a:schemeClr val="lt1"/>
-          </a:fontRef>
-        </p:style>
-        <p:txBody>
-          <a:bodyPr rtlCol="0" anchor="ctr"/>
-          <a:lstStyle/>
-          <a:p>
-            <a:pPr algn="ctr"/>
-          </a:p>
-        </p:txBody>
-      </p:sp>
-      <p:sp>
-        <p:nvSpPr>
-          <p:cNvPr id="27" name="Rounded Rectangle 26"/>
-          <p:cNvSpPr/>
-          <p:nvPr/>
-        </p:nvSpPr>
-        <p:spPr>
-          <a:xfrm>
-            <a:off x="9593427" y="2286000"/>
-            <a:ext cx="2148840" cy="3657600"/>
-          </a:xfrm>
-          <a:prstGeom prst="roundRect">
-            <a:avLst>
-              <a:gd name="adj" fmla="val 8000"/>
-            </a:avLst>
-          </a:prstGeom>
-          <a:noFill/>
-          <a:ln w="9525">
-            <a:solidFill>
-              <a:srgbClr val="E2E8F0"/>
-            </a:solidFill>
-          </a:ln>
-        </p:spPr>
-        <p:style>
-          <a:lnRef idx="1">
-            <a:schemeClr val="accent1"/>
-          </a:lnRef>
-          <a:fillRef idx="3">
-            <a:schemeClr val="accent1"/>
-          </a:fillRef>
-          <a:effectRef idx="2">
-            <a:schemeClr val="accent1"/>
-          </a:effectRef>
-          <a:fontRef idx="minor">
-            <a:schemeClr val="lt1"/>
-          </a:fontRef>
-        </p:style>
-        <p:txBody>
-          <a:bodyPr rtlCol="0" anchor="ctr"/>
-          <a:lstStyle/>
-          <a:p>
-            <a:pPr algn="ctr"/>
-          </a:p>
-        </p:txBody>
-      </p:sp>
-      <p:sp>
-        <p:nvSpPr>
-          <p:cNvPr id="28" name="TextBox 27"/>
-          <p:cNvSpPr txBox="1"/>
-          <p:nvPr/>
-        </p:nvSpPr>
-        <p:spPr>
-          <a:xfrm>
-            <a:off x="9593427" y="2651760"/>
-            <a:ext cx="2148840" cy="914400"/>
-          </a:xfrm>
-          <a:prstGeom prst="rect">
-            <a:avLst/>
-          </a:prstGeom>
-          <a:noFill/>
-        </p:spPr>
-        <p:txBody>
-          <a:bodyPr wrap="square" lIns="0" rIns="0" tIns="0" bIns="0" anchor="t">
-            <a:spAutoFit/>
-          </a:bodyPr>
-          <a:lstStyle/>
-          <a:p>
-            <a:pPr algn="ctr">
-              <a:lnSpc>
-                <a:spcPct val="120000"/>
-              </a:lnSpc>
-            </a:pPr>
-            <a:r>
-              <a:rPr sz="6000" b="1">
-                <a:solidFill>
-                  <a:srgbClr val="0F172A"/>
-                </a:solidFill>
-                <a:latin typeface="Microsoft JhengHei"/>
-              </a:rPr>
-              <a:t>5</a:t>
-            </a:r>
-          </a:p>
-        </p:txBody>
-      </p:sp>
-      <p:sp>
-        <p:nvSpPr>
-          <p:cNvPr id="29" name="TextBox 28"/>
-          <p:cNvSpPr txBox="1"/>
-          <p:nvPr/>
-        </p:nvSpPr>
-        <p:spPr>
-          <a:xfrm>
-            <a:off x="9593427" y="3840480"/>
-            <a:ext cx="2148840" cy="548640"/>
-          </a:xfrm>
-          <a:prstGeom prst="rect">
-            <a:avLst/>
-          </a:prstGeom>
-          <a:noFill/>
-        </p:spPr>
-        <p:txBody>
-          <a:bodyPr wrap="square" lIns="0" rIns="0" tIns="0" bIns="0" anchor="t">
-            <a:spAutoFit/>
-          </a:bodyPr>
-          <a:lstStyle/>
-          <a:p>
-            <a:pPr algn="ctr">
-              <a:lnSpc>
-                <a:spcPct val="120000"/>
-              </a:lnSpc>
-            </a:pPr>
-            <a:r>
-              <a:rPr sz="2000" b="1">
-                <a:solidFill>
-                  <a:srgbClr val="0F172A"/>
-                </a:solidFill>
-                <a:latin typeface="Microsoft JhengHei"/>
-              </a:rPr>
-              <a:t>穩了</a:t>
-            </a:r>
-          </a:p>
-        </p:txBody>
-      </p:sp>
-      <p:sp>
-        <p:nvSpPr>
-          <p:cNvPr id="30" name="TextBox 29"/>
-          <p:cNvSpPr txBox="1"/>
-          <p:nvPr/>
-        </p:nvSpPr>
-        <p:spPr>
-          <a:xfrm>
-            <a:off x="9776307" y="4572000"/>
-            <a:ext cx="1783080" cy="1371600"/>
-          </a:xfrm>
-          <a:prstGeom prst="rect">
-            <a:avLst/>
-          </a:prstGeom>
-          <a:noFill/>
-        </p:spPr>
-        <p:txBody>
-          <a:bodyPr wrap="square" lIns="0" rIns="0" tIns="0" bIns="0" anchor="t">
-            <a:spAutoFit/>
-          </a:bodyPr>
-          <a:lstStyle/>
-          <a:p>
-            <a:pPr algn="ctr">
-              <a:lnSpc>
-                <a:spcPct val="140000"/>
-              </a:lnSpc>
-            </a:pPr>
-            <a:r>
-              <a:rPr sz="1200" b="0">
+              <a:t>敏感度擾動</a:t>
+            </a:r>
+          </a:p>
+        </p:txBody>
+      </p:sp>
+      <p:sp>
+        <p:nvSpPr>
+          <p:cNvPr id="42" name="TextBox 41"/>
+          <p:cNvSpPr txBox="1"/>
+          <p:nvPr/>
+        </p:nvSpPr>
+        <p:spPr>
+          <a:xfrm>
+            <a:off x="7315200" y="6309360"/>
+            <a:ext cx="2194560" cy="320040"/>
+          </a:xfrm>
+          <a:prstGeom prst="rect">
+            <a:avLst/>
+          </a:prstGeom>
+          <a:noFill/>
+        </p:spPr>
+        <p:txBody>
+          <a:bodyPr wrap="square" lIns="0" rIns="0" tIns="0" bIns="0" anchor="t">
+            <a:spAutoFit/>
+          </a:bodyPr>
+          <a:lstStyle/>
+          <a:p>
+            <a:pPr algn="l">
+              <a:lnSpc>
+                <a:spcPct val="120000"/>
+              </a:lnSpc>
+            </a:pPr>
+            <a:r>
+              <a:rPr sz="1800" b="1">
+                <a:solidFill>
+                  <a:srgbClr val="0F172A"/>
+                </a:solidFill>
+                <a:latin typeface="Microsoft JhengHei"/>
+              </a:rPr>
+              <a:t>93.4%</a:t>
+            </a:r>
+          </a:p>
+        </p:txBody>
+      </p:sp>
+      <p:sp>
+        <p:nvSpPr>
+          <p:cNvPr id="43" name="TextBox 42"/>
+          <p:cNvSpPr txBox="1"/>
+          <p:nvPr/>
+        </p:nvSpPr>
+        <p:spPr>
+          <a:xfrm>
+            <a:off x="7315200" y="6629400"/>
+            <a:ext cx="2194560" cy="228600"/>
+          </a:xfrm>
+          <a:prstGeom prst="rect">
+            <a:avLst/>
+          </a:prstGeom>
+          <a:noFill/>
+        </p:spPr>
+        <p:txBody>
+          <a:bodyPr wrap="square" lIns="0" rIns="0" tIns="0" bIns="0" anchor="t">
+            <a:spAutoFit/>
+          </a:bodyPr>
+          <a:lstStyle/>
+          <a:p>
+            <a:pPr algn="l">
+              <a:lnSpc>
+                <a:spcPct val="120000"/>
+              </a:lnSpc>
+            </a:pPr>
+            <a:r>
+              <a:rPr sz="900" b="0">
                 <a:solidFill>
                   <a:srgbClr val="64748B"/>
                 </a:solidFill>
                 <a:latin typeface="Microsoft JhengHei"/>
               </a:rPr>
-              <a:t>改到主管說</a:t>
-            </a:r>
-          </a:p>
-          <a:p>
-            <a:pPr algn="ctr">
-              <a:lnSpc>
-                <a:spcPct val="140000"/>
-              </a:lnSpc>
-            </a:pPr>
-            <a:r>
-              <a:rPr sz="1200" b="0">
+              <a:t>Top-3 排名穩定</a:t>
+            </a:r>
+          </a:p>
+        </p:txBody>
+      </p:sp>
+      <p:sp>
+        <p:nvSpPr>
+          <p:cNvPr id="44" name="TextBox 43"/>
+          <p:cNvSpPr txBox="1"/>
+          <p:nvPr/>
+        </p:nvSpPr>
+        <p:spPr>
+          <a:xfrm>
+            <a:off x="9509760" y="6309360"/>
+            <a:ext cx="2194560" cy="320040"/>
+          </a:xfrm>
+          <a:prstGeom prst="rect">
+            <a:avLst/>
+          </a:prstGeom>
+          <a:noFill/>
+        </p:spPr>
+        <p:txBody>
+          <a:bodyPr wrap="square" lIns="0" rIns="0" tIns="0" bIns="0" anchor="t">
+            <a:spAutoFit/>
+          </a:bodyPr>
+          <a:lstStyle/>
+          <a:p>
+            <a:pPr algn="l">
+              <a:lnSpc>
+                <a:spcPct val="120000"/>
+              </a:lnSpc>
+            </a:pPr>
+            <a:r>
+              <a:rPr sz="1800" b="1">
+                <a:solidFill>
+                  <a:srgbClr val="0F172A"/>
+                </a:solidFill>
+                <a:latin typeface="Microsoft JhengHei"/>
+              </a:rPr>
+              <a:t>0.995</a:t>
+            </a:r>
+          </a:p>
+        </p:txBody>
+      </p:sp>
+      <p:sp>
+        <p:nvSpPr>
+          <p:cNvPr id="45" name="TextBox 44"/>
+          <p:cNvSpPr txBox="1"/>
+          <p:nvPr/>
+        </p:nvSpPr>
+        <p:spPr>
+          <a:xfrm>
+            <a:off x="9509760" y="6629400"/>
+            <a:ext cx="2194560" cy="228600"/>
+          </a:xfrm>
+          <a:prstGeom prst="rect">
+            <a:avLst/>
+          </a:prstGeom>
+          <a:noFill/>
+        </p:spPr>
+        <p:txBody>
+          <a:bodyPr wrap="square" lIns="0" rIns="0" tIns="0" bIns="0" anchor="t">
+            <a:spAutoFit/>
+          </a:bodyPr>
+          <a:lstStyle/>
+          <a:p>
+            <a:pPr algn="l">
+              <a:lnSpc>
+                <a:spcPct val="120000"/>
+              </a:lnSpc>
+            </a:pPr>
+            <a:r>
+              <a:rPr sz="900" b="0">
                 <a:solidFill>
                   <a:srgbClr val="64748B"/>
                 </a:solidFill>
                 <a:latin typeface="Microsoft JhengHei"/>
               </a:rPr>
-              <a:t>「對，就是這樣」</a:t>
-            </a:r>
-          </a:p>
-        </p:txBody>
-      </p:sp>
-      <p:sp>
-        <p:nvSpPr>
-          <p:cNvPr id="31" name="Rounded Rectangle 30"/>
-          <p:cNvSpPr/>
-          <p:nvPr/>
-        </p:nvSpPr>
-        <p:spPr>
-          <a:xfrm>
-            <a:off x="2286000" y="6035040"/>
-            <a:ext cx="7589520" cy="411480"/>
-          </a:xfrm>
-          <a:prstGeom prst="roundRect">
-            <a:avLst>
-              <a:gd name="adj" fmla="val 40000"/>
-            </a:avLst>
-          </a:prstGeom>
-          <a:solidFill>
-            <a:srgbClr val="F8FAFC"/>
-          </a:solidFill>
-          <a:ln>
-            <a:noFill/>
-          </a:ln>
-        </p:spPr>
-        <p:style>
-          <a:lnRef idx="1">
-            <a:schemeClr val="accent1"/>
-          </a:lnRef>
-          <a:fillRef idx="3">
-            <a:schemeClr val="accent1"/>
-          </a:fillRef>
-          <a:effectRef idx="2">
-            <a:schemeClr val="accent1"/>
-          </a:effectRef>
-          <a:fontRef idx="minor">
-            <a:schemeClr val="lt1"/>
-          </a:fontRef>
-        </p:style>
-        <p:txBody>
-          <a:bodyPr rtlCol="0" anchor="ctr" lIns="182880" rIns="182880" tIns="0" bIns="0" wrap="square"/>
-          <a:lstStyle/>
-          <a:p>
-            <a:pPr algn="ctr"/>
-            <a:r>
-              <a:rPr sz="1400" b="1">
-                <a:solidFill>
-                  <a:srgbClr val="0F172A"/>
-                </a:solidFill>
-                <a:latin typeface="Microsoft JhengHei"/>
-              </a:rPr>
-              <a:t>「9 個係數不是 9 個獨立決定，是 1 個學理依據的離散採樣」</a:t>
-            </a:r>
-          </a:p>
-        </p:txBody>
-      </p:sp>
-      <p:sp>
-        <p:nvSpPr>
-          <p:cNvPr id="32" name="TextBox 31"/>
+              <a:t>Spearman ρ</a:t>
+            </a:r>
+          </a:p>
+        </p:txBody>
+      </p:sp>
+      <p:sp>
+        <p:nvSpPr>
+          <p:cNvPr id="46" name="TextBox 45"/>
           <p:cNvSpPr txBox="1"/>
           <p:nvPr/>
         </p:nvSpPr>
@@ -21561,7 +22038,7 @@
       </p:sp>
       <p:sp>
         <p:nvSpPr>
-          <p:cNvPr id="33" name="TextBox 32"/>
+          <p:cNvPr id="47" name="TextBox 46"/>
           <p:cNvSpPr txBox="1"/>
           <p:nvPr/>
         </p:nvSpPr>

--- a/docs/串連系統_簡報.pptx
+++ b/docs/串連系統_簡報.pptx
@@ -20354,13 +20354,13 @@
               </a:lnSpc>
             </a:pPr>
             <a:r>
-              <a:rPr sz="3600" b="1">
-                <a:solidFill>
-                  <a:srgbClr val="0F172A"/>
-                </a:solidFill>
-                <a:latin typeface="Microsoft JhengHei"/>
-              </a:rPr>
-              <a:t>人工權重的四層方法論</a:t>
+              <a:rPr sz="3400" b="1">
+                <a:solidFill>
+                  <a:srgbClr val="0F172A"/>
+                </a:solidFill>
+                <a:latin typeface="Microsoft JhengHei"/>
+              </a:rPr>
+              <a:t>人工權重的五階段方法論</a:t>
             </a:r>
           </a:p>
         </p:txBody>
@@ -20393,13 +20393,13 @@
               </a:lnSpc>
             </a:pPr>
             <a:r>
-              <a:rPr sz="1600" b="0">
+              <a:rPr sz="1400" b="0">
                 <a:solidFill>
                   <a:srgbClr val="64748B"/>
                 </a:solidFill>
                 <a:latin typeface="Microsoft JhengHei"/>
               </a:rPr>
-              <a:t>16 個人工參數，每一層都有可審查的依據</a:t>
+              <a:t>主管訪談 → 等價關係 → 弱先驗 → 測資校準 → 敏感度確認</a:t>
             </a:r>
           </a:p>
         </p:txBody>
@@ -20412,8 +20412,8 @@
         </p:nvSpPr>
         <p:spPr>
           <a:xfrm>
-            <a:off x="495147" y="2240280"/>
-            <a:ext cx="2697480" cy="3657600"/>
+            <a:off x="504291" y="2194560"/>
+            <a:ext cx="2148840" cy="3703320"/>
           </a:xfrm>
           <a:prstGeom prst="roundRect">
             <a:avLst>
@@ -20457,27 +20457,27 @@
         </p:nvSpPr>
         <p:spPr>
           <a:xfrm>
-            <a:off x="769467" y="2514600"/>
-            <a:ext cx="731520" cy="640080"/>
-          </a:xfrm>
-          <a:prstGeom prst="rect">
-            <a:avLst/>
-          </a:prstGeom>
-          <a:noFill/>
-        </p:spPr>
-        <p:txBody>
-          <a:bodyPr wrap="square" lIns="0" rIns="0" tIns="0" bIns="0" anchor="t">
-            <a:spAutoFit/>
-          </a:bodyPr>
-          <a:lstStyle/>
-          <a:p>
-            <a:pPr algn="l">
-              <a:lnSpc>
-                <a:spcPct val="120000"/>
-              </a:lnSpc>
-            </a:pPr>
-            <a:r>
-              <a:rPr sz="3600" b="1">
+            <a:off x="732891" y="2423160"/>
+            <a:ext cx="640080" cy="548640"/>
+          </a:xfrm>
+          <a:prstGeom prst="rect">
+            <a:avLst/>
+          </a:prstGeom>
+          <a:noFill/>
+        </p:spPr>
+        <p:txBody>
+          <a:bodyPr wrap="square" lIns="0" rIns="0" tIns="0" bIns="0" anchor="t">
+            <a:spAutoFit/>
+          </a:bodyPr>
+          <a:lstStyle/>
+          <a:p>
+            <a:pPr algn="l">
+              <a:lnSpc>
+                <a:spcPct val="120000"/>
+              </a:lnSpc>
+            </a:pPr>
+            <a:r>
+              <a:rPr sz="3000" b="1">
                 <a:solidFill>
                   <a:srgbClr val="0F172A"/>
                 </a:solidFill>
@@ -20496,33 +20496,33 @@
         </p:nvSpPr>
         <p:spPr>
           <a:xfrm>
-            <a:off x="769467" y="3154680"/>
-            <a:ext cx="2148840" cy="457200"/>
-          </a:xfrm>
-          <a:prstGeom prst="rect">
-            <a:avLst/>
-          </a:prstGeom>
-          <a:noFill/>
-        </p:spPr>
-        <p:txBody>
-          <a:bodyPr wrap="square" lIns="0" rIns="0" tIns="0" bIns="0" anchor="t">
-            <a:spAutoFit/>
-          </a:bodyPr>
-          <a:lstStyle/>
-          <a:p>
-            <a:pPr algn="l">
-              <a:lnSpc>
-                <a:spcPct val="120000"/>
-              </a:lnSpc>
-            </a:pPr>
-            <a:r>
-              <a:rPr sz="2000" b="1">
-                <a:solidFill>
-                  <a:srgbClr val="0F172A"/>
-                </a:solidFill>
-                <a:latin typeface="Microsoft JhengHei"/>
-              </a:rPr>
-              <a:t>排序方向</a:t>
+            <a:off x="732891" y="3017520"/>
+            <a:ext cx="1691640" cy="457200"/>
+          </a:xfrm>
+          <a:prstGeom prst="rect">
+            <a:avLst/>
+          </a:prstGeom>
+          <a:noFill/>
+        </p:spPr>
+        <p:txBody>
+          <a:bodyPr wrap="square" lIns="0" rIns="0" tIns="0" bIns="0" anchor="t">
+            <a:spAutoFit/>
+          </a:bodyPr>
+          <a:lstStyle/>
+          <a:p>
+            <a:pPr algn="l">
+              <a:lnSpc>
+                <a:spcPct val="120000"/>
+              </a:lnSpc>
+            </a:pPr>
+            <a:r>
+              <a:rPr sz="1800" b="1">
+                <a:solidFill>
+                  <a:srgbClr val="0F172A"/>
+                </a:solidFill>
+                <a:latin typeface="Microsoft JhengHei"/>
+              </a:rPr>
+              <a:t>主管訪談</a:t>
             </a:r>
           </a:p>
         </p:txBody>
@@ -20535,33 +20535,33 @@
         </p:nvSpPr>
         <p:spPr>
           <a:xfrm>
-            <a:off x="769467" y="3657600"/>
-            <a:ext cx="2148840" cy="365760"/>
-          </a:xfrm>
-          <a:prstGeom prst="rect">
-            <a:avLst/>
-          </a:prstGeom>
-          <a:noFill/>
-        </p:spPr>
-        <p:txBody>
-          <a:bodyPr wrap="square" lIns="0" rIns="0" tIns="0" bIns="0" anchor="t">
-            <a:spAutoFit/>
-          </a:bodyPr>
-          <a:lstStyle/>
-          <a:p>
-            <a:pPr algn="l">
-              <a:lnSpc>
-                <a:spcPct val="120000"/>
-              </a:lnSpc>
-            </a:pPr>
-            <a:r>
-              <a:rPr sz="1100" b="0">
+            <a:off x="732891" y="3474720"/>
+            <a:ext cx="1691640" cy="320040"/>
+          </a:xfrm>
+          <a:prstGeom prst="rect">
+            <a:avLst/>
+          </a:prstGeom>
+          <a:noFill/>
+        </p:spPr>
+        <p:txBody>
+          <a:bodyPr wrap="square" lIns="0" rIns="0" tIns="0" bIns="0" anchor="t">
+            <a:spAutoFit/>
+          </a:bodyPr>
+          <a:lstStyle/>
+          <a:p>
+            <a:pPr algn="l">
+              <a:lnSpc>
+                <a:spcPct val="120000"/>
+              </a:lnSpc>
+            </a:pPr>
+            <a:r>
+              <a:rPr sz="1000" b="0">
                 <a:solidFill>
                   <a:srgbClr val="64748B"/>
                 </a:solidFill>
                 <a:latin typeface="Microsoft JhengHei"/>
               </a:rPr>
-              <a:t>哪個權重該大</a:t>
+              <a:t>決定方向</a:t>
             </a:r>
           </a:p>
         </p:txBody>
@@ -20574,8 +20574,8 @@
         </p:nvCxnSpPr>
         <p:spPr>
           <a:xfrm>
-            <a:off x="769467" y="4160520"/>
-            <a:ext cx="2148840" cy="0"/>
+            <a:off x="732891" y="3886200"/>
+            <a:ext cx="1691640" cy="0"/>
           </a:xfrm>
           <a:prstGeom prst="line">
             <a:avLst/>
@@ -20609,8 +20609,8 @@
         </p:nvSpPr>
         <p:spPr>
           <a:xfrm>
-            <a:off x="769467" y="4297680"/>
-            <a:ext cx="2148840" cy="1005840"/>
+            <a:off x="732891" y="4023360"/>
+            <a:ext cx="1691640" cy="914400"/>
           </a:xfrm>
           <a:prstGeom prst="rect">
             <a:avLst/>
@@ -20629,13 +20629,13 @@
               </a:lnSpc>
             </a:pPr>
             <a:r>
-              <a:rPr sz="1200" b="1">
-                <a:solidFill>
-                  <a:srgbClr val="0F172A"/>
-                </a:solidFill>
-                <a:latin typeface="Microsoft JhengHei"/>
-              </a:rPr>
-              <a:t>業界文獻</a:t>
+              <a:rPr sz="1100" b="1">
+                <a:solidFill>
+                  <a:srgbClr val="0F172A"/>
+                </a:solidFill>
+                <a:latin typeface="Microsoft JhengHei"/>
+              </a:rPr>
+              <a:t>問主管:</a:t>
             </a:r>
           </a:p>
           <a:p>
@@ -20645,13 +20645,13 @@
               </a:lnSpc>
             </a:pPr>
             <a:r>
-              <a:rPr sz="1200" b="1">
-                <a:solidFill>
-                  <a:srgbClr val="0F172A"/>
-                </a:solidFill>
-                <a:latin typeface="Microsoft JhengHei"/>
-              </a:rPr>
-              <a:t>(Grove / Edmondson / OHI)</a:t>
+              <a:rPr sz="1100" b="1">
+                <a:solidFill>
+                  <a:srgbClr val="0F172A"/>
+                </a:solidFill>
+                <a:latin typeface="Microsoft JhengHei"/>
+              </a:rPr>
+              <a:t>誰比誰重要?</a:t>
             </a:r>
           </a:p>
         </p:txBody>
@@ -20664,47 +20664,106 @@
         </p:nvSpPr>
         <p:spPr>
           <a:xfrm>
-            <a:off x="769467" y="5303520"/>
-            <a:ext cx="2148840" cy="502920"/>
-          </a:xfrm>
-          <a:prstGeom prst="rect">
-            <a:avLst/>
-          </a:prstGeom>
-          <a:noFill/>
-        </p:spPr>
-        <p:txBody>
-          <a:bodyPr wrap="square" lIns="0" rIns="0" tIns="0" bIns="0" anchor="t">
-            <a:spAutoFit/>
-          </a:bodyPr>
-          <a:lstStyle/>
-          <a:p>
-            <a:pPr algn="l">
-              <a:lnSpc>
-                <a:spcPct val="130000"/>
+            <a:off x="732891" y="4983480"/>
+            <a:ext cx="1691640" cy="777240"/>
+          </a:xfrm>
+          <a:prstGeom prst="rect">
+            <a:avLst/>
+          </a:prstGeom>
+          <a:noFill/>
+        </p:spPr>
+        <p:txBody>
+          <a:bodyPr wrap="square" lIns="0" rIns="0" tIns="0" bIns="0" anchor="t">
+            <a:spAutoFit/>
+          </a:bodyPr>
+          <a:lstStyle/>
+          <a:p>
+            <a:pPr algn="l">
+              <a:lnSpc>
+                <a:spcPct val="140000"/>
               </a:lnSpc>
             </a:pPr>
             <a:r>
               <a:rPr sz="1000" b="0">
                 <a:solidFill>
-                  <a:srgbClr val="64748B"/>
-                </a:solidFill>
-                <a:latin typeface="Microsoft JhengHei"/>
-              </a:rPr>
-              <a:t>回答：為什麼 A 比 B 大</a:t>
-            </a:r>
-          </a:p>
-        </p:txBody>
-      </p:sp>
-      <p:sp>
-        <p:nvSpPr>
-          <p:cNvPr id="14" name="Rounded Rectangle 13"/>
+                  <a:srgbClr val="0F172A"/>
+                </a:solidFill>
+                <a:latin typeface="Microsoft JhengHei"/>
+              </a:rPr>
+              <a:t>卡點 &gt; 案件</a:t>
+            </a:r>
+          </a:p>
+          <a:p>
+            <a:pPr algn="l">
+              <a:lnSpc>
+                <a:spcPct val="140000"/>
+              </a:lnSpc>
+            </a:pPr>
+            <a:r>
+              <a:rPr sz="1000" b="0">
+                <a:solidFill>
+                  <a:srgbClr val="0F172A"/>
+                </a:solidFill>
+                <a:latin typeface="Microsoft JhengHei"/>
+              </a:rPr>
+              <a:t>&gt; 交接 &gt; 被提及</a:t>
+            </a:r>
+          </a:p>
+        </p:txBody>
+      </p:sp>
+      <p:sp>
+        <p:nvSpPr>
+          <p:cNvPr id="14" name="Right Arrow 13"/>
           <p:cNvSpPr/>
           <p:nvPr/>
         </p:nvSpPr>
         <p:spPr>
           <a:xfrm>
-            <a:off x="3329787" y="2240280"/>
-            <a:ext cx="2697480" cy="3657600"/>
+            <a:off x="2653131" y="3886200"/>
+            <a:ext cx="109728" cy="228600"/>
+          </a:xfrm>
+          <a:prstGeom prst="rightArrow">
+            <a:avLst/>
+          </a:prstGeom>
+          <a:solidFill>
+            <a:srgbClr val="E2E8F0"/>
+          </a:solidFill>
+          <a:ln>
+            <a:noFill/>
+          </a:ln>
+        </p:spPr>
+        <p:style>
+          <a:lnRef idx="1">
+            <a:schemeClr val="accent1"/>
+          </a:lnRef>
+          <a:fillRef idx="3">
+            <a:schemeClr val="accent1"/>
+          </a:fillRef>
+          <a:effectRef idx="2">
+            <a:schemeClr val="accent1"/>
+          </a:effectRef>
+          <a:fontRef idx="minor">
+            <a:schemeClr val="lt1"/>
+          </a:fontRef>
+        </p:style>
+        <p:txBody>
+          <a:bodyPr rtlCol="0" anchor="ctr"/>
+          <a:lstStyle/>
+          <a:p>
+            <a:pPr algn="ctr"/>
+          </a:p>
+        </p:txBody>
+      </p:sp>
+      <p:sp>
+        <p:nvSpPr>
+          <p:cNvPr id="15" name="Rounded Rectangle 14"/>
+          <p:cNvSpPr/>
+          <p:nvPr/>
+        </p:nvSpPr>
+        <p:spPr>
+          <a:xfrm>
+            <a:off x="2762859" y="2194560"/>
+            <a:ext cx="2148840" cy="3703320"/>
           </a:xfrm>
           <a:prstGeom prst="roundRect">
             <a:avLst>
@@ -20742,33 +20801,33 @@
       </p:sp>
       <p:sp>
         <p:nvSpPr>
-          <p:cNvPr id="15" name="TextBox 14"/>
-          <p:cNvSpPr txBox="1"/>
-          <p:nvPr/>
-        </p:nvSpPr>
-        <p:spPr>
-          <a:xfrm>
-            <a:off x="3604107" y="2514600"/>
-            <a:ext cx="731520" cy="640080"/>
-          </a:xfrm>
-          <a:prstGeom prst="rect">
-            <a:avLst/>
-          </a:prstGeom>
-          <a:noFill/>
-        </p:spPr>
-        <p:txBody>
-          <a:bodyPr wrap="square" lIns="0" rIns="0" tIns="0" bIns="0" anchor="t">
-            <a:spAutoFit/>
-          </a:bodyPr>
-          <a:lstStyle/>
-          <a:p>
-            <a:pPr algn="l">
-              <a:lnSpc>
-                <a:spcPct val="120000"/>
-              </a:lnSpc>
-            </a:pPr>
-            <a:r>
-              <a:rPr sz="3600" b="1">
+          <p:cNvPr id="16" name="TextBox 15"/>
+          <p:cNvSpPr txBox="1"/>
+          <p:nvPr/>
+        </p:nvSpPr>
+        <p:spPr>
+          <a:xfrm>
+            <a:off x="2991459" y="2423160"/>
+            <a:ext cx="640080" cy="548640"/>
+          </a:xfrm>
+          <a:prstGeom prst="rect">
+            <a:avLst/>
+          </a:prstGeom>
+          <a:noFill/>
+        </p:spPr>
+        <p:txBody>
+          <a:bodyPr wrap="square" lIns="0" rIns="0" tIns="0" bIns="0" anchor="t">
+            <a:spAutoFit/>
+          </a:bodyPr>
+          <a:lstStyle/>
+          <a:p>
+            <a:pPr algn="l">
+              <a:lnSpc>
+                <a:spcPct val="120000"/>
+              </a:lnSpc>
+            </a:pPr>
+            <a:r>
+              <a:rPr sz="3000" b="1">
                 <a:solidFill>
                   <a:srgbClr val="0F172A"/>
                 </a:solidFill>
@@ -20781,92 +20840,92 @@
       </p:sp>
       <p:sp>
         <p:nvSpPr>
-          <p:cNvPr id="16" name="TextBox 15"/>
-          <p:cNvSpPr txBox="1"/>
-          <p:nvPr/>
-        </p:nvSpPr>
-        <p:spPr>
-          <a:xfrm>
-            <a:off x="3604107" y="3154680"/>
-            <a:ext cx="2148840" cy="457200"/>
-          </a:xfrm>
-          <a:prstGeom prst="rect">
-            <a:avLst/>
-          </a:prstGeom>
-          <a:noFill/>
-        </p:spPr>
-        <p:txBody>
-          <a:bodyPr wrap="square" lIns="0" rIns="0" tIns="0" bIns="0" anchor="t">
-            <a:spAutoFit/>
-          </a:bodyPr>
-          <a:lstStyle/>
-          <a:p>
-            <a:pPr algn="l">
-              <a:lnSpc>
-                <a:spcPct val="120000"/>
-              </a:lnSpc>
-            </a:pPr>
-            <a:r>
-              <a:rPr sz="2000" b="1">
-                <a:solidFill>
-                  <a:srgbClr val="0F172A"/>
-                </a:solidFill>
-                <a:latin typeface="Microsoft JhengHei"/>
-              </a:rPr>
-              <a:t>等價尺度</a:t>
-            </a:r>
-          </a:p>
-        </p:txBody>
-      </p:sp>
-      <p:sp>
-        <p:nvSpPr>
           <p:cNvPr id="17" name="TextBox 16"/>
           <p:cNvSpPr txBox="1"/>
           <p:nvPr/>
         </p:nvSpPr>
         <p:spPr>
           <a:xfrm>
-            <a:off x="3604107" y="3657600"/>
-            <a:ext cx="2148840" cy="365760"/>
-          </a:xfrm>
-          <a:prstGeom prst="rect">
-            <a:avLst/>
-          </a:prstGeom>
-          <a:noFill/>
-        </p:spPr>
-        <p:txBody>
-          <a:bodyPr wrap="square" lIns="0" rIns="0" tIns="0" bIns="0" anchor="t">
-            <a:spAutoFit/>
-          </a:bodyPr>
-          <a:lstStyle/>
-          <a:p>
-            <a:pPr algn="l">
-              <a:lnSpc>
-                <a:spcPct val="120000"/>
-              </a:lnSpc>
-            </a:pPr>
-            <a:r>
-              <a:rPr sz="1100" b="0">
+            <a:off x="2991459" y="3017520"/>
+            <a:ext cx="1691640" cy="457200"/>
+          </a:xfrm>
+          <a:prstGeom prst="rect">
+            <a:avLst/>
+          </a:prstGeom>
+          <a:noFill/>
+        </p:spPr>
+        <p:txBody>
+          <a:bodyPr wrap="square" lIns="0" rIns="0" tIns="0" bIns="0" anchor="t">
+            <a:spAutoFit/>
+          </a:bodyPr>
+          <a:lstStyle/>
+          <a:p>
+            <a:pPr algn="l">
+              <a:lnSpc>
+                <a:spcPct val="120000"/>
+              </a:lnSpc>
+            </a:pPr>
+            <a:r>
+              <a:rPr sz="1800" b="1">
+                <a:solidFill>
+                  <a:srgbClr val="0F172A"/>
+                </a:solidFill>
+                <a:latin typeface="Microsoft JhengHei"/>
+              </a:rPr>
+              <a:t>等價關係</a:t>
+            </a:r>
+          </a:p>
+        </p:txBody>
+      </p:sp>
+      <p:sp>
+        <p:nvSpPr>
+          <p:cNvPr id="18" name="TextBox 17"/>
+          <p:cNvSpPr txBox="1"/>
+          <p:nvPr/>
+        </p:nvSpPr>
+        <p:spPr>
+          <a:xfrm>
+            <a:off x="2991459" y="3474720"/>
+            <a:ext cx="1691640" cy="320040"/>
+          </a:xfrm>
+          <a:prstGeom prst="rect">
+            <a:avLst/>
+          </a:prstGeom>
+          <a:noFill/>
+        </p:spPr>
+        <p:txBody>
+          <a:bodyPr wrap="square" lIns="0" rIns="0" tIns="0" bIns="0" anchor="t">
+            <a:spAutoFit/>
+          </a:bodyPr>
+          <a:lstStyle/>
+          <a:p>
+            <a:pPr algn="l">
+              <a:lnSpc>
+                <a:spcPct val="120000"/>
+              </a:lnSpc>
+            </a:pPr>
+            <a:r>
+              <a:rPr sz="1000" b="0">
                 <a:solidFill>
                   <a:srgbClr val="64748B"/>
                 </a:solidFill>
                 <a:latin typeface="Microsoft JhengHei"/>
               </a:rPr>
-              <a:t>比例該多懸殊</a:t>
+              <a:t>決定初始尺度</a:t>
             </a:r>
           </a:p>
         </p:txBody>
       </p:sp>
       <p:cxnSp>
         <p:nvCxnSpPr>
-          <p:cNvPr id="18" name="Connector 17"/>
+          <p:cNvPr id="19" name="Connector 18"/>
           <p:cNvCxnSpPr/>
           <p:nvPr/>
         </p:nvCxnSpPr>
         <p:spPr>
           <a:xfrm>
-            <a:off x="3604107" y="4160520"/>
-            <a:ext cx="2148840" cy="0"/>
+            <a:off x="2991459" y="3886200"/>
+            <a:ext cx="1691640" cy="0"/>
           </a:xfrm>
           <a:prstGeom prst="line">
             <a:avLst/>
@@ -20894,14 +20953,14 @@
       </p:cxnSp>
       <p:sp>
         <p:nvSpPr>
-          <p:cNvPr id="19" name="TextBox 18"/>
-          <p:cNvSpPr txBox="1"/>
-          <p:nvPr/>
-        </p:nvSpPr>
-        <p:spPr>
-          <a:xfrm>
-            <a:off x="3604107" y="4297680"/>
-            <a:ext cx="2148840" cy="1005840"/>
+          <p:cNvPr id="20" name="TextBox 19"/>
+          <p:cNvSpPr txBox="1"/>
+          <p:nvPr/>
+        </p:nvSpPr>
+        <p:spPr>
+          <a:xfrm>
+            <a:off x="2991459" y="4023360"/>
+            <a:ext cx="1691640" cy="914400"/>
           </a:xfrm>
           <a:prstGeom prst="rect">
             <a:avLst/>
@@ -20920,13 +20979,13 @@
               </a:lnSpc>
             </a:pPr>
             <a:r>
-              <a:rPr sz="1200" b="1">
-                <a:solidFill>
-                  <a:srgbClr val="0F172A"/>
-                </a:solidFill>
-                <a:latin typeface="Microsoft JhengHei"/>
-              </a:rPr>
-              <a:t>等價關係</a:t>
+              <a:rPr sz="1100" b="1">
+                <a:solidFill>
+                  <a:srgbClr val="0F172A"/>
+                </a:solidFill>
+                <a:latin typeface="Microsoft JhengHei"/>
+              </a:rPr>
+              <a:t>問主管:</a:t>
             </a:r>
           </a:p>
           <a:p>
@@ -20936,66 +20995,125 @@
               </a:lnSpc>
             </a:pPr>
             <a:r>
-              <a:rPr sz="1200" b="1">
-                <a:solidFill>
-                  <a:srgbClr val="0F172A"/>
-                </a:solidFill>
-                <a:latin typeface="Microsoft JhengHei"/>
-              </a:rPr>
-              <a:t>(2 個交接 ≈ 1 個卡點)</a:t>
-            </a:r>
-          </a:p>
-        </p:txBody>
-      </p:sp>
-      <p:sp>
-        <p:nvSpPr>
-          <p:cNvPr id="20" name="TextBox 19"/>
-          <p:cNvSpPr txBox="1"/>
-          <p:nvPr/>
-        </p:nvSpPr>
-        <p:spPr>
-          <a:xfrm>
-            <a:off x="3604107" y="5303520"/>
-            <a:ext cx="2148840" cy="502920"/>
-          </a:xfrm>
-          <a:prstGeom prst="rect">
-            <a:avLst/>
-          </a:prstGeom>
-          <a:noFill/>
-        </p:spPr>
-        <p:txBody>
-          <a:bodyPr wrap="square" lIns="0" rIns="0" tIns="0" bIns="0" anchor="t">
-            <a:spAutoFit/>
-          </a:bodyPr>
-          <a:lstStyle/>
-          <a:p>
-            <a:pPr algn="l">
-              <a:lnSpc>
-                <a:spcPct val="130000"/>
+              <a:rPr sz="1100" b="1">
+                <a:solidFill>
+                  <a:srgbClr val="0F172A"/>
+                </a:solidFill>
+                <a:latin typeface="Microsoft JhengHei"/>
+              </a:rPr>
+              <a:t>1 件 A ≈ 幾件 B?</a:t>
+            </a:r>
+          </a:p>
+        </p:txBody>
+      </p:sp>
+      <p:sp>
+        <p:nvSpPr>
+          <p:cNvPr id="21" name="TextBox 20"/>
+          <p:cNvSpPr txBox="1"/>
+          <p:nvPr/>
+        </p:nvSpPr>
+        <p:spPr>
+          <a:xfrm>
+            <a:off x="2991459" y="4983480"/>
+            <a:ext cx="1691640" cy="777240"/>
+          </a:xfrm>
+          <a:prstGeom prst="rect">
+            <a:avLst/>
+          </a:prstGeom>
+          <a:noFill/>
+        </p:spPr>
+        <p:txBody>
+          <a:bodyPr wrap="square" lIns="0" rIns="0" tIns="0" bIns="0" anchor="t">
+            <a:spAutoFit/>
+          </a:bodyPr>
+          <a:lstStyle/>
+          <a:p>
+            <a:pPr algn="l">
+              <a:lnSpc>
+                <a:spcPct val="140000"/>
               </a:lnSpc>
             </a:pPr>
             <a:r>
               <a:rPr sz="1000" b="0">
                 <a:solidFill>
-                  <a:srgbClr val="64748B"/>
-                </a:solidFill>
-                <a:latin typeface="Microsoft JhengHei"/>
-              </a:rPr>
-              <a:t>回答：為什麼是 1.5 不是 1.3</a:t>
-            </a:r>
-          </a:p>
-        </p:txBody>
-      </p:sp>
-      <p:sp>
-        <p:nvSpPr>
-          <p:cNvPr id="21" name="Rounded Rectangle 20"/>
+                  <a:srgbClr val="0F172A"/>
+                </a:solidFill>
+                <a:latin typeface="Microsoft JhengHei"/>
+              </a:rPr>
+              <a:t>1 卡點</a:t>
+            </a:r>
+          </a:p>
+          <a:p>
+            <a:pPr algn="l">
+              <a:lnSpc>
+                <a:spcPct val="140000"/>
+              </a:lnSpc>
+            </a:pPr>
+            <a:r>
+              <a:rPr sz="1000" b="0">
+                <a:solidFill>
+                  <a:srgbClr val="0F172A"/>
+                </a:solidFill>
+                <a:latin typeface="Microsoft JhengHei"/>
+              </a:rPr>
+              <a:t>≈ 2.5 案件</a:t>
+            </a:r>
+          </a:p>
+        </p:txBody>
+      </p:sp>
+      <p:sp>
+        <p:nvSpPr>
+          <p:cNvPr id="22" name="Right Arrow 21"/>
           <p:cNvSpPr/>
           <p:nvPr/>
         </p:nvSpPr>
         <p:spPr>
           <a:xfrm>
-            <a:off x="6164427" y="2240280"/>
-            <a:ext cx="2697480" cy="3657600"/>
+            <a:off x="4911699" y="3886200"/>
+            <a:ext cx="109728" cy="228600"/>
+          </a:xfrm>
+          <a:prstGeom prst="rightArrow">
+            <a:avLst/>
+          </a:prstGeom>
+          <a:solidFill>
+            <a:srgbClr val="E2E8F0"/>
+          </a:solidFill>
+          <a:ln>
+            <a:noFill/>
+          </a:ln>
+        </p:spPr>
+        <p:style>
+          <a:lnRef idx="1">
+            <a:schemeClr val="accent1"/>
+          </a:lnRef>
+          <a:fillRef idx="3">
+            <a:schemeClr val="accent1"/>
+          </a:fillRef>
+          <a:effectRef idx="2">
+            <a:schemeClr val="accent1"/>
+          </a:effectRef>
+          <a:fontRef idx="minor">
+            <a:schemeClr val="lt1"/>
+          </a:fontRef>
+        </p:style>
+        <p:txBody>
+          <a:bodyPr rtlCol="0" anchor="ctr"/>
+          <a:lstStyle/>
+          <a:p>
+            <a:pPr algn="ctr"/>
+          </a:p>
+        </p:txBody>
+      </p:sp>
+      <p:sp>
+        <p:nvSpPr>
+          <p:cNvPr id="23" name="Rounded Rectangle 22"/>
+          <p:cNvSpPr/>
+          <p:nvPr/>
+        </p:nvSpPr>
+        <p:spPr>
+          <a:xfrm>
+            <a:off x="5021427" y="2194560"/>
+            <a:ext cx="2148840" cy="3703320"/>
           </a:xfrm>
           <a:prstGeom prst="roundRect">
             <a:avLst>
@@ -21033,33 +21151,33 @@
       </p:sp>
       <p:sp>
         <p:nvSpPr>
-          <p:cNvPr id="22" name="TextBox 21"/>
-          <p:cNvSpPr txBox="1"/>
-          <p:nvPr/>
-        </p:nvSpPr>
-        <p:spPr>
-          <a:xfrm>
-            <a:off x="6438747" y="2514600"/>
-            <a:ext cx="731520" cy="640080"/>
-          </a:xfrm>
-          <a:prstGeom prst="rect">
-            <a:avLst/>
-          </a:prstGeom>
-          <a:noFill/>
-        </p:spPr>
-        <p:txBody>
-          <a:bodyPr wrap="square" lIns="0" rIns="0" tIns="0" bIns="0" anchor="t">
-            <a:spAutoFit/>
-          </a:bodyPr>
-          <a:lstStyle/>
-          <a:p>
-            <a:pPr algn="l">
-              <a:lnSpc>
-                <a:spcPct val="120000"/>
-              </a:lnSpc>
-            </a:pPr>
-            <a:r>
-              <a:rPr sz="3600" b="1">
+          <p:cNvPr id="24" name="TextBox 23"/>
+          <p:cNvSpPr txBox="1"/>
+          <p:nvPr/>
+        </p:nvSpPr>
+        <p:spPr>
+          <a:xfrm>
+            <a:off x="5250027" y="2423160"/>
+            <a:ext cx="640080" cy="548640"/>
+          </a:xfrm>
+          <a:prstGeom prst="rect">
+            <a:avLst/>
+          </a:prstGeom>
+          <a:noFill/>
+        </p:spPr>
+        <p:txBody>
+          <a:bodyPr wrap="square" lIns="0" rIns="0" tIns="0" bIns="0" anchor="t">
+            <a:spAutoFit/>
+          </a:bodyPr>
+          <a:lstStyle/>
+          <a:p>
+            <a:pPr algn="l">
+              <a:lnSpc>
+                <a:spcPct val="120000"/>
+              </a:lnSpc>
+            </a:pPr>
+            <a:r>
+              <a:rPr sz="3000" b="1">
                 <a:solidFill>
                   <a:srgbClr val="0F172A"/>
                 </a:solidFill>
@@ -21072,92 +21190,92 @@
       </p:sp>
       <p:sp>
         <p:nvSpPr>
-          <p:cNvPr id="23" name="TextBox 22"/>
-          <p:cNvSpPr txBox="1"/>
-          <p:nvPr/>
-        </p:nvSpPr>
-        <p:spPr>
-          <a:xfrm>
-            <a:off x="6438747" y="3154680"/>
-            <a:ext cx="2148840" cy="457200"/>
-          </a:xfrm>
-          <a:prstGeom prst="rect">
-            <a:avLst/>
-          </a:prstGeom>
-          <a:noFill/>
-        </p:spPr>
-        <p:txBody>
-          <a:bodyPr wrap="square" lIns="0" rIns="0" tIns="0" bIns="0" anchor="t">
-            <a:spAutoFit/>
-          </a:bodyPr>
-          <a:lstStyle/>
-          <a:p>
-            <a:pPr algn="l">
-              <a:lnSpc>
-                <a:spcPct val="120000"/>
-              </a:lnSpc>
-            </a:pPr>
-            <a:r>
-              <a:rPr sz="2000" b="1">
-                <a:solidFill>
-                  <a:srgbClr val="0F172A"/>
-                </a:solidFill>
-                <a:latin typeface="Microsoft JhengHei"/>
-              </a:rPr>
-              <a:t>測資校準</a:t>
-            </a:r>
-          </a:p>
-        </p:txBody>
-      </p:sp>
-      <p:sp>
-        <p:nvSpPr>
-          <p:cNvPr id="24" name="TextBox 23"/>
-          <p:cNvSpPr txBox="1"/>
-          <p:nvPr/>
-        </p:nvSpPr>
-        <p:spPr>
-          <a:xfrm>
-            <a:off x="6438747" y="3657600"/>
-            <a:ext cx="2148840" cy="365760"/>
-          </a:xfrm>
-          <a:prstGeom prst="rect">
-            <a:avLst/>
-          </a:prstGeom>
-          <a:noFill/>
-        </p:spPr>
-        <p:txBody>
-          <a:bodyPr wrap="square" lIns="0" rIns="0" tIns="0" bIns="0" anchor="t">
-            <a:spAutoFit/>
-          </a:bodyPr>
-          <a:lstStyle/>
-          <a:p>
-            <a:pPr algn="l">
-              <a:lnSpc>
-                <a:spcPct val="120000"/>
-              </a:lnSpc>
-            </a:pPr>
-            <a:r>
-              <a:rPr sz="1100" b="0">
+          <p:cNvPr id="25" name="TextBox 24"/>
+          <p:cNvSpPr txBox="1"/>
+          <p:nvPr/>
+        </p:nvSpPr>
+        <p:spPr>
+          <a:xfrm>
+            <a:off x="5250027" y="3017520"/>
+            <a:ext cx="1691640" cy="457200"/>
+          </a:xfrm>
+          <a:prstGeom prst="rect">
+            <a:avLst/>
+          </a:prstGeom>
+          <a:noFill/>
+        </p:spPr>
+        <p:txBody>
+          <a:bodyPr wrap="square" lIns="0" rIns="0" tIns="0" bIns="0" anchor="t">
+            <a:spAutoFit/>
+          </a:bodyPr>
+          <a:lstStyle/>
+          <a:p>
+            <a:pPr algn="l">
+              <a:lnSpc>
+                <a:spcPct val="120000"/>
+              </a:lnSpc>
+            </a:pPr>
+            <a:r>
+              <a:rPr sz="1800" b="1">
+                <a:solidFill>
+                  <a:srgbClr val="0F172A"/>
+                </a:solidFill>
+                <a:latin typeface="Microsoft JhengHei"/>
+              </a:rPr>
+              <a:t>弱先驗</a:t>
+            </a:r>
+          </a:p>
+        </p:txBody>
+      </p:sp>
+      <p:sp>
+        <p:nvSpPr>
+          <p:cNvPr id="26" name="TextBox 25"/>
+          <p:cNvSpPr txBox="1"/>
+          <p:nvPr/>
+        </p:nvSpPr>
+        <p:spPr>
+          <a:xfrm>
+            <a:off x="5250027" y="3474720"/>
+            <a:ext cx="1691640" cy="320040"/>
+          </a:xfrm>
+          <a:prstGeom prst="rect">
+            <a:avLst/>
+          </a:prstGeom>
+          <a:noFill/>
+        </p:spPr>
+        <p:txBody>
+          <a:bodyPr wrap="square" lIns="0" rIns="0" tIns="0" bIns="0" anchor="t">
+            <a:spAutoFit/>
+          </a:bodyPr>
+          <a:lstStyle/>
+          <a:p>
+            <a:pPr algn="l">
+              <a:lnSpc>
+                <a:spcPct val="120000"/>
+              </a:lnSpc>
+            </a:pPr>
+            <a:r>
+              <a:rPr sz="1000" b="0">
                 <a:solidFill>
                   <a:srgbClr val="64748B"/>
                 </a:solidFill>
                 <a:latin typeface="Microsoft JhengHei"/>
               </a:rPr>
-              <a:t>整體幅度多大</a:t>
+              <a:t>不要一開始放大膽</a:t>
             </a:r>
           </a:p>
         </p:txBody>
       </p:sp>
       <p:cxnSp>
         <p:nvCxnSpPr>
-          <p:cNvPr id="25" name="Connector 24"/>
+          <p:cNvPr id="27" name="Connector 26"/>
           <p:cNvCxnSpPr/>
           <p:nvPr/>
         </p:nvCxnSpPr>
         <p:spPr>
           <a:xfrm>
-            <a:off x="6438747" y="4160520"/>
-            <a:ext cx="2148840" cy="0"/>
+            <a:off x="5250027" y="3886200"/>
+            <a:ext cx="1691640" cy="0"/>
           </a:xfrm>
           <a:prstGeom prst="line">
             <a:avLst/>
@@ -21185,14 +21303,14 @@
       </p:cxnSp>
       <p:sp>
         <p:nvSpPr>
-          <p:cNvPr id="26" name="TextBox 25"/>
-          <p:cNvSpPr txBox="1"/>
-          <p:nvPr/>
-        </p:nvSpPr>
-        <p:spPr>
-          <a:xfrm>
-            <a:off x="6438747" y="4297680"/>
-            <a:ext cx="2148840" cy="1005840"/>
+          <p:cNvPr id="28" name="TextBox 27"/>
+          <p:cNvSpPr txBox="1"/>
+          <p:nvPr/>
+        </p:nvSpPr>
+        <p:spPr>
+          <a:xfrm>
+            <a:off x="5250027" y="4023360"/>
+            <a:ext cx="1691640" cy="914400"/>
           </a:xfrm>
           <a:prstGeom prst="rect">
             <a:avLst/>
@@ -21211,13 +21329,13 @@
               </a:lnSpc>
             </a:pPr>
             <a:r>
-              <a:rPr sz="1200" b="1">
-                <a:solidFill>
-                  <a:srgbClr val="0F172A"/>
-                </a:solidFill>
-                <a:latin typeface="Microsoft JhengHei"/>
-              </a:rPr>
-              <a:t>SEED 錨點測試</a:t>
+              <a:rPr sz="1100" b="1">
+                <a:solidFill>
+                  <a:srgbClr val="0F172A"/>
+                </a:solidFill>
+                <a:latin typeface="Microsoft JhengHei"/>
+              </a:rPr>
+              <a:t>依排序給小差距</a:t>
             </a:r>
           </a:p>
           <a:p>
@@ -21227,66 +21345,125 @@
               </a:lnSpc>
             </a:pPr>
             <a:r>
-              <a:rPr sz="1200" b="1">
-                <a:solidFill>
-                  <a:srgbClr val="0F172A"/>
-                </a:solidFill>
-                <a:latin typeface="Microsoft JhengHei"/>
-              </a:rPr>
-              <a:t>(典型過載 ≥ 12 分)</a:t>
-            </a:r>
-          </a:p>
-        </p:txBody>
-      </p:sp>
-      <p:sp>
-        <p:nvSpPr>
-          <p:cNvPr id="27" name="TextBox 26"/>
-          <p:cNvSpPr txBox="1"/>
-          <p:nvPr/>
-        </p:nvSpPr>
-        <p:spPr>
-          <a:xfrm>
-            <a:off x="6438747" y="5303520"/>
-            <a:ext cx="2148840" cy="502920"/>
-          </a:xfrm>
-          <a:prstGeom prst="rect">
-            <a:avLst/>
-          </a:prstGeom>
-          <a:noFill/>
-        </p:spPr>
-        <p:txBody>
-          <a:bodyPr wrap="square" lIns="0" rIns="0" tIns="0" bIns="0" anchor="t">
-            <a:spAutoFit/>
-          </a:bodyPr>
-          <a:lstStyle/>
-          <a:p>
-            <a:pPr algn="l">
-              <a:lnSpc>
-                <a:spcPct val="130000"/>
+              <a:rPr sz="1100" b="1">
+                <a:solidFill>
+                  <a:srgbClr val="0F172A"/>
+                </a:solidFill>
+                <a:latin typeface="Microsoft JhengHei"/>
+              </a:rPr>
+              <a:t>(Bayesian 標準)</a:t>
+            </a:r>
+          </a:p>
+        </p:txBody>
+      </p:sp>
+      <p:sp>
+        <p:nvSpPr>
+          <p:cNvPr id="29" name="TextBox 28"/>
+          <p:cNvSpPr txBox="1"/>
+          <p:nvPr/>
+        </p:nvSpPr>
+        <p:spPr>
+          <a:xfrm>
+            <a:off x="5250027" y="4983480"/>
+            <a:ext cx="1691640" cy="777240"/>
+          </a:xfrm>
+          <a:prstGeom prst="rect">
+            <a:avLst/>
+          </a:prstGeom>
+          <a:noFill/>
+        </p:spPr>
+        <p:txBody>
+          <a:bodyPr wrap="square" lIns="0" rIns="0" tIns="0" bIns="0" anchor="t">
+            <a:spAutoFit/>
+          </a:bodyPr>
+          <a:lstStyle/>
+          <a:p>
+            <a:pPr algn="l">
+              <a:lnSpc>
+                <a:spcPct val="140000"/>
               </a:lnSpc>
             </a:pPr>
             <a:r>
               <a:rPr sz="1000" b="0">
                 <a:solidFill>
-                  <a:srgbClr val="64748B"/>
-                </a:solidFill>
-                <a:latin typeface="Microsoft JhengHei"/>
-              </a:rPr>
-              <a:t>回答：為什麼過載門檻是 12</a:t>
-            </a:r>
-          </a:p>
-        </p:txBody>
-      </p:sp>
-      <p:sp>
-        <p:nvSpPr>
-          <p:cNvPr id="28" name="Rounded Rectangle 27"/>
+                  <a:srgbClr val="0F172A"/>
+                </a:solidFill>
+                <a:latin typeface="Microsoft JhengHei"/>
+              </a:rPr>
+              <a:t>v0: 1.3 / 1.2</a:t>
+            </a:r>
+          </a:p>
+          <a:p>
+            <a:pPr algn="l">
+              <a:lnSpc>
+                <a:spcPct val="140000"/>
+              </a:lnSpc>
+            </a:pPr>
+            <a:r>
+              <a:rPr sz="1000" b="0">
+                <a:solidFill>
+                  <a:srgbClr val="0F172A"/>
+                </a:solidFill>
+                <a:latin typeface="Microsoft JhengHei"/>
+              </a:rPr>
+              <a:t>/ 1.1 / 1.0</a:t>
+            </a:r>
+          </a:p>
+        </p:txBody>
+      </p:sp>
+      <p:sp>
+        <p:nvSpPr>
+          <p:cNvPr id="30" name="Right Arrow 29"/>
           <p:cNvSpPr/>
           <p:nvPr/>
         </p:nvSpPr>
         <p:spPr>
           <a:xfrm>
-            <a:off x="8999067" y="2240280"/>
-            <a:ext cx="2697480" cy="3657600"/>
+            <a:off x="7170267" y="3886200"/>
+            <a:ext cx="109728" cy="228600"/>
+          </a:xfrm>
+          <a:prstGeom prst="rightArrow">
+            <a:avLst/>
+          </a:prstGeom>
+          <a:solidFill>
+            <a:srgbClr val="E2E8F0"/>
+          </a:solidFill>
+          <a:ln>
+            <a:noFill/>
+          </a:ln>
+        </p:spPr>
+        <p:style>
+          <a:lnRef idx="1">
+            <a:schemeClr val="accent1"/>
+          </a:lnRef>
+          <a:fillRef idx="3">
+            <a:schemeClr val="accent1"/>
+          </a:fillRef>
+          <a:effectRef idx="2">
+            <a:schemeClr val="accent1"/>
+          </a:effectRef>
+          <a:fontRef idx="minor">
+            <a:schemeClr val="lt1"/>
+          </a:fontRef>
+        </p:style>
+        <p:txBody>
+          <a:bodyPr rtlCol="0" anchor="ctr"/>
+          <a:lstStyle/>
+          <a:p>
+            <a:pPr algn="ctr"/>
+          </a:p>
+        </p:txBody>
+      </p:sp>
+      <p:sp>
+        <p:nvSpPr>
+          <p:cNvPr id="31" name="Rounded Rectangle 30"/>
+          <p:cNvSpPr/>
+          <p:nvPr/>
+        </p:nvSpPr>
+        <p:spPr>
+          <a:xfrm>
+            <a:off x="7279995" y="2194560"/>
+            <a:ext cx="2148840" cy="3703320"/>
           </a:xfrm>
           <a:prstGeom prst="roundRect">
             <a:avLst>
@@ -21324,33 +21501,33 @@
       </p:sp>
       <p:sp>
         <p:nvSpPr>
-          <p:cNvPr id="29" name="TextBox 28"/>
-          <p:cNvSpPr txBox="1"/>
-          <p:nvPr/>
-        </p:nvSpPr>
-        <p:spPr>
-          <a:xfrm>
-            <a:off x="9273387" y="2514600"/>
-            <a:ext cx="731520" cy="640080"/>
-          </a:xfrm>
-          <a:prstGeom prst="rect">
-            <a:avLst/>
-          </a:prstGeom>
-          <a:noFill/>
-        </p:spPr>
-        <p:txBody>
-          <a:bodyPr wrap="square" lIns="0" rIns="0" tIns="0" bIns="0" anchor="t">
-            <a:spAutoFit/>
-          </a:bodyPr>
-          <a:lstStyle/>
-          <a:p>
-            <a:pPr algn="l">
-              <a:lnSpc>
-                <a:spcPct val="120000"/>
-              </a:lnSpc>
-            </a:pPr>
-            <a:r>
-              <a:rPr sz="3600" b="1">
+          <p:cNvPr id="32" name="TextBox 31"/>
+          <p:cNvSpPr txBox="1"/>
+          <p:nvPr/>
+        </p:nvSpPr>
+        <p:spPr>
+          <a:xfrm>
+            <a:off x="7508595" y="2423160"/>
+            <a:ext cx="640080" cy="548640"/>
+          </a:xfrm>
+          <a:prstGeom prst="rect">
+            <a:avLst/>
+          </a:prstGeom>
+          <a:noFill/>
+        </p:spPr>
+        <p:txBody>
+          <a:bodyPr wrap="square" lIns="0" rIns="0" tIns="0" bIns="0" anchor="t">
+            <a:spAutoFit/>
+          </a:bodyPr>
+          <a:lstStyle/>
+          <a:p>
+            <a:pPr algn="l">
+              <a:lnSpc>
+                <a:spcPct val="120000"/>
+              </a:lnSpc>
+            </a:pPr>
+            <a:r>
+              <a:rPr sz="3000" b="1">
                 <a:solidFill>
                   <a:srgbClr val="0F172A"/>
                 </a:solidFill>
@@ -21363,92 +21540,92 @@
       </p:sp>
       <p:sp>
         <p:nvSpPr>
-          <p:cNvPr id="30" name="TextBox 29"/>
-          <p:cNvSpPr txBox="1"/>
-          <p:nvPr/>
-        </p:nvSpPr>
-        <p:spPr>
-          <a:xfrm>
-            <a:off x="9273387" y="3154680"/>
-            <a:ext cx="2148840" cy="457200"/>
-          </a:xfrm>
-          <a:prstGeom prst="rect">
-            <a:avLst/>
-          </a:prstGeom>
-          <a:noFill/>
-        </p:spPr>
-        <p:txBody>
-          <a:bodyPr wrap="square" lIns="0" rIns="0" tIns="0" bIns="0" anchor="t">
-            <a:spAutoFit/>
-          </a:bodyPr>
-          <a:lstStyle/>
-          <a:p>
-            <a:pPr algn="l">
-              <a:lnSpc>
-                <a:spcPct val="120000"/>
-              </a:lnSpc>
-            </a:pPr>
-            <a:r>
-              <a:rPr sz="2000" b="1">
-                <a:solidFill>
-                  <a:srgbClr val="0F172A"/>
-                </a:solidFill>
-                <a:latin typeface="Microsoft JhengHei"/>
-              </a:rPr>
-              <a:t>敏感度驗證</a:t>
-            </a:r>
-          </a:p>
-        </p:txBody>
-      </p:sp>
-      <p:sp>
-        <p:nvSpPr>
-          <p:cNvPr id="31" name="TextBox 30"/>
-          <p:cNvSpPr txBox="1"/>
-          <p:nvPr/>
-        </p:nvSpPr>
-        <p:spPr>
-          <a:xfrm>
-            <a:off x="9273387" y="3657600"/>
-            <a:ext cx="2148840" cy="365760"/>
-          </a:xfrm>
-          <a:prstGeom prst="rect">
-            <a:avLst/>
-          </a:prstGeom>
-          <a:noFill/>
-        </p:spPr>
-        <p:txBody>
-          <a:bodyPr wrap="square" lIns="0" rIns="0" tIns="0" bIns="0" anchor="t">
-            <a:spAutoFit/>
-          </a:bodyPr>
-          <a:lstStyle/>
-          <a:p>
-            <a:pPr algn="l">
-              <a:lnSpc>
-                <a:spcPct val="120000"/>
-              </a:lnSpc>
-            </a:pPr>
-            <a:r>
-              <a:rPr sz="1100" b="0">
+          <p:cNvPr id="33" name="TextBox 32"/>
+          <p:cNvSpPr txBox="1"/>
+          <p:nvPr/>
+        </p:nvSpPr>
+        <p:spPr>
+          <a:xfrm>
+            <a:off x="7508595" y="3017520"/>
+            <a:ext cx="1691640" cy="457200"/>
+          </a:xfrm>
+          <a:prstGeom prst="rect">
+            <a:avLst/>
+          </a:prstGeom>
+          <a:noFill/>
+        </p:spPr>
+        <p:txBody>
+          <a:bodyPr wrap="square" lIns="0" rIns="0" tIns="0" bIns="0" anchor="t">
+            <a:spAutoFit/>
+          </a:bodyPr>
+          <a:lstStyle/>
+          <a:p>
+            <a:pPr algn="l">
+              <a:lnSpc>
+                <a:spcPct val="120000"/>
+              </a:lnSpc>
+            </a:pPr>
+            <a:r>
+              <a:rPr sz="1800" b="1">
+                <a:solidFill>
+                  <a:srgbClr val="0F172A"/>
+                </a:solidFill>
+                <a:latin typeface="Microsoft JhengHei"/>
+              </a:rPr>
+              <a:t>測資校準</a:t>
+            </a:r>
+          </a:p>
+        </p:txBody>
+      </p:sp>
+      <p:sp>
+        <p:nvSpPr>
+          <p:cNvPr id="34" name="TextBox 33"/>
+          <p:cNvSpPr txBox="1"/>
+          <p:nvPr/>
+        </p:nvSpPr>
+        <p:spPr>
+          <a:xfrm>
+            <a:off x="7508595" y="3474720"/>
+            <a:ext cx="1691640" cy="320040"/>
+          </a:xfrm>
+          <a:prstGeom prst="rect">
+            <a:avLst/>
+          </a:prstGeom>
+          <a:noFill/>
+        </p:spPr>
+        <p:txBody>
+          <a:bodyPr wrap="square" lIns="0" rIns="0" tIns="0" bIns="0" anchor="t">
+            <a:spAutoFit/>
+          </a:bodyPr>
+          <a:lstStyle/>
+          <a:p>
+            <a:pPr algn="l">
+              <a:lnSpc>
+                <a:spcPct val="120000"/>
+              </a:lnSpc>
+            </a:pPr>
+            <a:r>
+              <a:rPr sz="1000" b="0">
                 <a:solidFill>
                   <a:srgbClr val="64748B"/>
                 </a:solidFill>
                 <a:latin typeface="Microsoft JhengHei"/>
               </a:rPr>
-              <a:t>權重錯了會怎樣</a:t>
+              <a:t>決定調整幅度</a:t>
             </a:r>
           </a:p>
         </p:txBody>
       </p:sp>
       <p:cxnSp>
         <p:nvCxnSpPr>
-          <p:cNvPr id="32" name="Connector 31"/>
+          <p:cNvPr id="35" name="Connector 34"/>
           <p:cNvCxnSpPr/>
           <p:nvPr/>
         </p:nvCxnSpPr>
         <p:spPr>
           <a:xfrm>
-            <a:off x="9273387" y="4160520"/>
-            <a:ext cx="2148840" cy="0"/>
+            <a:off x="7508595" y="3886200"/>
+            <a:ext cx="1691640" cy="0"/>
           </a:xfrm>
           <a:prstGeom prst="line">
             <a:avLst/>
@@ -21476,14 +21653,14 @@
       </p:cxnSp>
       <p:sp>
         <p:nvSpPr>
-          <p:cNvPr id="33" name="TextBox 32"/>
-          <p:cNvSpPr txBox="1"/>
-          <p:nvPr/>
-        </p:nvSpPr>
-        <p:spPr>
-          <a:xfrm>
-            <a:off x="9273387" y="4297680"/>
-            <a:ext cx="2148840" cy="1005840"/>
+          <p:cNvPr id="36" name="TextBox 35"/>
+          <p:cNvSpPr txBox="1"/>
+          <p:nvPr/>
+        </p:nvSpPr>
+        <p:spPr>
+          <a:xfrm>
+            <a:off x="7508595" y="4023360"/>
+            <a:ext cx="1691640" cy="914400"/>
           </a:xfrm>
           <a:prstGeom prst="rect">
             <a:avLst/>
@@ -21502,7 +21679,357 @@
               </a:lnSpc>
             </a:pPr>
             <a:r>
-              <a:rPr sz="1200" b="1">
+              <a:rPr sz="1100" b="1">
+                <a:solidFill>
+                  <a:srgbClr val="0F172A"/>
+                </a:solidFill>
+                <a:latin typeface="Microsoft JhengHei"/>
+              </a:rPr>
+              <a:t>用 SEED + 極端測資</a:t>
+            </a:r>
+          </a:p>
+          <a:p>
+            <a:pPr algn="l">
+              <a:lnSpc>
+                <a:spcPct val="140000"/>
+              </a:lnSpc>
+            </a:pPr>
+            <a:r>
+              <a:rPr sz="1100" b="1">
+                <a:solidFill>
+                  <a:srgbClr val="0F172A"/>
+                </a:solidFill>
+                <a:latin typeface="Microsoft JhengHei"/>
+              </a:rPr>
+              <a:t>看誰被低/高估</a:t>
+            </a:r>
+          </a:p>
+        </p:txBody>
+      </p:sp>
+      <p:sp>
+        <p:nvSpPr>
+          <p:cNvPr id="37" name="TextBox 36"/>
+          <p:cNvSpPr txBox="1"/>
+          <p:nvPr/>
+        </p:nvSpPr>
+        <p:spPr>
+          <a:xfrm>
+            <a:off x="7508595" y="4983480"/>
+            <a:ext cx="1691640" cy="777240"/>
+          </a:xfrm>
+          <a:prstGeom prst="rect">
+            <a:avLst/>
+          </a:prstGeom>
+          <a:noFill/>
+        </p:spPr>
+        <p:txBody>
+          <a:bodyPr wrap="square" lIns="0" rIns="0" tIns="0" bIns="0" anchor="t">
+            <a:spAutoFit/>
+          </a:bodyPr>
+          <a:lstStyle/>
+          <a:p>
+            <a:pPr algn="l">
+              <a:lnSpc>
+                <a:spcPct val="140000"/>
+              </a:lnSpc>
+            </a:pPr>
+            <a:r>
+              <a:rPr sz="1000" b="0">
+                <a:solidFill>
+                  <a:srgbClr val="0F172A"/>
+                </a:solidFill>
+                <a:latin typeface="Microsoft JhengHei"/>
+              </a:rPr>
+              <a:t>v3 收斂: 2.5×1.5</a:t>
+            </a:r>
+          </a:p>
+          <a:p>
+            <a:pPr algn="l">
+              <a:lnSpc>
+                <a:spcPct val="140000"/>
+              </a:lnSpc>
+            </a:pPr>
+            <a:r>
+              <a:rPr sz="1000" b="0">
+                <a:solidFill>
+                  <a:srgbClr val="0F172A"/>
+                </a:solidFill>
+                <a:latin typeface="Microsoft JhengHei"/>
+              </a:rPr>
+              <a:t>/ 2.0 / 0.8 / 1.0</a:t>
+            </a:r>
+          </a:p>
+        </p:txBody>
+      </p:sp>
+      <p:sp>
+        <p:nvSpPr>
+          <p:cNvPr id="38" name="Right Arrow 37"/>
+          <p:cNvSpPr/>
+          <p:nvPr/>
+        </p:nvSpPr>
+        <p:spPr>
+          <a:xfrm>
+            <a:off x="9428835" y="3886200"/>
+            <a:ext cx="109728" cy="228600"/>
+          </a:xfrm>
+          <a:prstGeom prst="rightArrow">
+            <a:avLst/>
+          </a:prstGeom>
+          <a:solidFill>
+            <a:srgbClr val="E2E8F0"/>
+          </a:solidFill>
+          <a:ln>
+            <a:noFill/>
+          </a:ln>
+        </p:spPr>
+        <p:style>
+          <a:lnRef idx="1">
+            <a:schemeClr val="accent1"/>
+          </a:lnRef>
+          <a:fillRef idx="3">
+            <a:schemeClr val="accent1"/>
+          </a:fillRef>
+          <a:effectRef idx="2">
+            <a:schemeClr val="accent1"/>
+          </a:effectRef>
+          <a:fontRef idx="minor">
+            <a:schemeClr val="lt1"/>
+          </a:fontRef>
+        </p:style>
+        <p:txBody>
+          <a:bodyPr rtlCol="0" anchor="ctr"/>
+          <a:lstStyle/>
+          <a:p>
+            <a:pPr algn="ctr"/>
+          </a:p>
+        </p:txBody>
+      </p:sp>
+      <p:sp>
+        <p:nvSpPr>
+          <p:cNvPr id="39" name="Rounded Rectangle 38"/>
+          <p:cNvSpPr/>
+          <p:nvPr/>
+        </p:nvSpPr>
+        <p:spPr>
+          <a:xfrm>
+            <a:off x="9538563" y="2194560"/>
+            <a:ext cx="2148840" cy="3703320"/>
+          </a:xfrm>
+          <a:prstGeom prst="roundRect">
+            <a:avLst>
+              <a:gd name="adj" fmla="val 6000"/>
+            </a:avLst>
+          </a:prstGeom>
+          <a:noFill/>
+          <a:ln w="9525">
+            <a:solidFill>
+              <a:srgbClr val="E2E8F0"/>
+            </a:solidFill>
+          </a:ln>
+        </p:spPr>
+        <p:style>
+          <a:lnRef idx="1">
+            <a:schemeClr val="accent1"/>
+          </a:lnRef>
+          <a:fillRef idx="3">
+            <a:schemeClr val="accent1"/>
+          </a:fillRef>
+          <a:effectRef idx="2">
+            <a:schemeClr val="accent1"/>
+          </a:effectRef>
+          <a:fontRef idx="minor">
+            <a:schemeClr val="lt1"/>
+          </a:fontRef>
+        </p:style>
+        <p:txBody>
+          <a:bodyPr rtlCol="0" anchor="ctr"/>
+          <a:lstStyle/>
+          <a:p>
+            <a:pPr algn="ctr"/>
+          </a:p>
+        </p:txBody>
+      </p:sp>
+      <p:sp>
+        <p:nvSpPr>
+          <p:cNvPr id="40" name="TextBox 39"/>
+          <p:cNvSpPr txBox="1"/>
+          <p:nvPr/>
+        </p:nvSpPr>
+        <p:spPr>
+          <a:xfrm>
+            <a:off x="9767163" y="2423160"/>
+            <a:ext cx="640080" cy="548640"/>
+          </a:xfrm>
+          <a:prstGeom prst="rect">
+            <a:avLst/>
+          </a:prstGeom>
+          <a:noFill/>
+        </p:spPr>
+        <p:txBody>
+          <a:bodyPr wrap="square" lIns="0" rIns="0" tIns="0" bIns="0" anchor="t">
+            <a:spAutoFit/>
+          </a:bodyPr>
+          <a:lstStyle/>
+          <a:p>
+            <a:pPr algn="l">
+              <a:lnSpc>
+                <a:spcPct val="120000"/>
+              </a:lnSpc>
+            </a:pPr>
+            <a:r>
+              <a:rPr sz="3000" b="1">
+                <a:solidFill>
+                  <a:srgbClr val="0F172A"/>
+                </a:solidFill>
+                <a:latin typeface="Microsoft JhengHei"/>
+              </a:rPr>
+              <a:t>⑤</a:t>
+            </a:r>
+          </a:p>
+        </p:txBody>
+      </p:sp>
+      <p:sp>
+        <p:nvSpPr>
+          <p:cNvPr id="41" name="TextBox 40"/>
+          <p:cNvSpPr txBox="1"/>
+          <p:nvPr/>
+        </p:nvSpPr>
+        <p:spPr>
+          <a:xfrm>
+            <a:off x="9767163" y="3017520"/>
+            <a:ext cx="1691640" cy="457200"/>
+          </a:xfrm>
+          <a:prstGeom prst="rect">
+            <a:avLst/>
+          </a:prstGeom>
+          <a:noFill/>
+        </p:spPr>
+        <p:txBody>
+          <a:bodyPr wrap="square" lIns="0" rIns="0" tIns="0" bIns="0" anchor="t">
+            <a:spAutoFit/>
+          </a:bodyPr>
+          <a:lstStyle/>
+          <a:p>
+            <a:pPr algn="l">
+              <a:lnSpc>
+                <a:spcPct val="120000"/>
+              </a:lnSpc>
+            </a:pPr>
+            <a:r>
+              <a:rPr sz="1800" b="1">
+                <a:solidFill>
+                  <a:srgbClr val="0F172A"/>
+                </a:solidFill>
+                <a:latin typeface="Microsoft JhengHei"/>
+              </a:rPr>
+              <a:t>敏感度確認</a:t>
+            </a:r>
+          </a:p>
+        </p:txBody>
+      </p:sp>
+      <p:sp>
+        <p:nvSpPr>
+          <p:cNvPr id="42" name="TextBox 41"/>
+          <p:cNvSpPr txBox="1"/>
+          <p:nvPr/>
+        </p:nvSpPr>
+        <p:spPr>
+          <a:xfrm>
+            <a:off x="9767163" y="3474720"/>
+            <a:ext cx="1691640" cy="320040"/>
+          </a:xfrm>
+          <a:prstGeom prst="rect">
+            <a:avLst/>
+          </a:prstGeom>
+          <a:noFill/>
+        </p:spPr>
+        <p:txBody>
+          <a:bodyPr wrap="square" lIns="0" rIns="0" tIns="0" bIns="0" anchor="t">
+            <a:spAutoFit/>
+          </a:bodyPr>
+          <a:lstStyle/>
+          <a:p>
+            <a:pPr algn="l">
+              <a:lnSpc>
+                <a:spcPct val="120000"/>
+              </a:lnSpc>
+            </a:pPr>
+            <a:r>
+              <a:rPr sz="1000" b="0">
+                <a:solidFill>
+                  <a:srgbClr val="64748B"/>
+                </a:solidFill>
+                <a:latin typeface="Microsoft JhengHei"/>
+              </a:rPr>
+              <a:t>確認穩定性</a:t>
+            </a:r>
+          </a:p>
+        </p:txBody>
+      </p:sp>
+      <p:cxnSp>
+        <p:nvCxnSpPr>
+          <p:cNvPr id="43" name="Connector 42"/>
+          <p:cNvCxnSpPr/>
+          <p:nvPr/>
+        </p:nvCxnSpPr>
+        <p:spPr>
+          <a:xfrm>
+            <a:off x="9767163" y="3886200"/>
+            <a:ext cx="1691640" cy="0"/>
+          </a:xfrm>
+          <a:prstGeom prst="line">
+            <a:avLst/>
+          </a:prstGeom>
+          <a:ln w="9525">
+            <a:solidFill>
+              <a:srgbClr val="E2E8F0"/>
+            </a:solidFill>
+          </a:ln>
+        </p:spPr>
+        <p:style>
+          <a:lnRef idx="2">
+            <a:schemeClr val="accent1"/>
+          </a:lnRef>
+          <a:fillRef idx="0">
+            <a:schemeClr val="accent1"/>
+          </a:fillRef>
+          <a:effectRef idx="1">
+            <a:schemeClr val="accent1"/>
+          </a:effectRef>
+          <a:fontRef idx="minor">
+            <a:schemeClr val="tx1"/>
+          </a:fontRef>
+        </p:style>
+      </p:cxnSp>
+      <p:sp>
+        <p:nvSpPr>
+          <p:cNvPr id="44" name="TextBox 43"/>
+          <p:cNvSpPr txBox="1"/>
+          <p:nvPr/>
+        </p:nvSpPr>
+        <p:spPr>
+          <a:xfrm>
+            <a:off x="9767163" y="4023360"/>
+            <a:ext cx="1691640" cy="914400"/>
+          </a:xfrm>
+          <a:prstGeom prst="rect">
+            <a:avLst/>
+          </a:prstGeom>
+          <a:noFill/>
+        </p:spPr>
+        <p:txBody>
+          <a:bodyPr wrap="square" lIns="0" rIns="0" tIns="0" bIns="0" anchor="t">
+            <a:spAutoFit/>
+          </a:bodyPr>
+          <a:lstStyle/>
+          <a:p>
+            <a:pPr algn="l">
+              <a:lnSpc>
+                <a:spcPct val="140000"/>
+              </a:lnSpc>
+            </a:pPr>
+            <a:r>
+              <a:rPr sz="1100" b="1">
                 <a:solidFill>
                   <a:srgbClr val="0F172A"/>
                 </a:solidFill>
@@ -21518,7 +22045,46 @@
               </a:lnSpc>
             </a:pPr>
             <a:r>
-              <a:rPr sz="1200" b="1">
+              <a:rPr sz="1100" b="1">
+                <a:solidFill>
+                  <a:srgbClr val="0F172A"/>
+                </a:solidFill>
+                <a:latin typeface="Microsoft JhengHei"/>
+              </a:rPr>
+              <a:t>看 Top-N 變不變</a:t>
+            </a:r>
+          </a:p>
+        </p:txBody>
+      </p:sp>
+      <p:sp>
+        <p:nvSpPr>
+          <p:cNvPr id="45" name="TextBox 44"/>
+          <p:cNvSpPr txBox="1"/>
+          <p:nvPr/>
+        </p:nvSpPr>
+        <p:spPr>
+          <a:xfrm>
+            <a:off x="9767163" y="4983480"/>
+            <a:ext cx="1691640" cy="777240"/>
+          </a:xfrm>
+          <a:prstGeom prst="rect">
+            <a:avLst/>
+          </a:prstGeom>
+          <a:noFill/>
+        </p:spPr>
+        <p:txBody>
+          <a:bodyPr wrap="square" lIns="0" rIns="0" tIns="0" bIns="0" anchor="t">
+            <a:spAutoFit/>
+          </a:bodyPr>
+          <a:lstStyle/>
+          <a:p>
+            <a:pPr algn="l">
+              <a:lnSpc>
+                <a:spcPct val="140000"/>
+              </a:lnSpc>
+            </a:pPr>
+            <a:r>
+              <a:rPr sz="1000" b="0">
                 <a:solidFill>
                   <a:srgbClr val="0F172A"/>
                 </a:solidFill>
@@ -21527,134 +22093,189 @@
               <a:t>Top-3 穩定 93.4%</a:t>
             </a:r>
           </a:p>
-        </p:txBody>
-      </p:sp>
-      <p:sp>
-        <p:nvSpPr>
-          <p:cNvPr id="34" name="TextBox 33"/>
-          <p:cNvSpPr txBox="1"/>
-          <p:nvPr/>
-        </p:nvSpPr>
-        <p:spPr>
-          <a:xfrm>
-            <a:off x="9273387" y="5303520"/>
-            <a:ext cx="2148840" cy="502920"/>
-          </a:xfrm>
-          <a:prstGeom prst="rect">
-            <a:avLst/>
-          </a:prstGeom>
-          <a:noFill/>
-        </p:spPr>
-        <p:txBody>
-          <a:bodyPr wrap="square" lIns="0" rIns="0" tIns="0" bIns="0" anchor="t">
-            <a:spAutoFit/>
-          </a:bodyPr>
-          <a:lstStyle/>
-          <a:p>
-            <a:pPr algn="l">
-              <a:lnSpc>
-                <a:spcPct val="130000"/>
+          <a:p>
+            <a:pPr algn="l">
+              <a:lnSpc>
+                <a:spcPct val="140000"/>
               </a:lnSpc>
             </a:pPr>
             <a:r>
               <a:rPr sz="1000" b="0">
                 <a:solidFill>
+                  <a:srgbClr val="0F172A"/>
+                </a:solidFill>
+                <a:latin typeface="Microsoft JhengHei"/>
+              </a:rPr>
+              <a:t>Spearman 0.995</a:t>
+            </a:r>
+          </a:p>
+        </p:txBody>
+      </p:sp>
+      <p:sp>
+        <p:nvSpPr>
+          <p:cNvPr id="46" name="TextBox 45"/>
+          <p:cNvSpPr txBox="1"/>
+          <p:nvPr/>
+        </p:nvSpPr>
+        <p:spPr>
+          <a:xfrm>
+            <a:off x="731520" y="6035040"/>
+            <a:ext cx="10972800" cy="365760"/>
+          </a:xfrm>
+          <a:prstGeom prst="rect">
+            <a:avLst/>
+          </a:prstGeom>
+          <a:noFill/>
+        </p:spPr>
+        <p:txBody>
+          <a:bodyPr wrap="square" lIns="0" rIns="0" tIns="0" bIns="0" anchor="t">
+            <a:spAutoFit/>
+          </a:bodyPr>
+          <a:lstStyle/>
+          <a:p>
+            <a:pPr algn="l">
+              <a:lnSpc>
+                <a:spcPct val="120000"/>
+              </a:lnSpc>
+            </a:pPr>
+            <a:r>
+              <a:rPr sz="1000" b="1">
+                <a:solidFill>
+                  <a:srgbClr val="0F172A"/>
+                </a:solidFill>
+                <a:latin typeface="Microsoft JhengHei"/>
+              </a:rPr>
+              <a:t>量化證據</a:t>
+            </a:r>
+          </a:p>
+        </p:txBody>
+      </p:sp>
+      <p:sp>
+        <p:nvSpPr>
+          <p:cNvPr id="47" name="TextBox 46"/>
+          <p:cNvSpPr txBox="1"/>
+          <p:nvPr/>
+        </p:nvSpPr>
+        <p:spPr>
+          <a:xfrm>
+            <a:off x="731520" y="6309360"/>
+            <a:ext cx="2194560" cy="274320"/>
+          </a:xfrm>
+          <a:prstGeom prst="rect">
+            <a:avLst/>
+          </a:prstGeom>
+          <a:noFill/>
+        </p:spPr>
+        <p:txBody>
+          <a:bodyPr wrap="square" lIns="0" rIns="0" tIns="0" bIns="0" anchor="t">
+            <a:spAutoFit/>
+          </a:bodyPr>
+          <a:lstStyle/>
+          <a:p>
+            <a:pPr algn="l">
+              <a:lnSpc>
+                <a:spcPct val="120000"/>
+              </a:lnSpc>
+            </a:pPr>
+            <a:r>
+              <a:rPr sz="1600" b="1">
+                <a:solidFill>
+                  <a:srgbClr val="0F172A"/>
+                </a:solidFill>
+                <a:latin typeface="Microsoft JhengHei"/>
+              </a:rPr>
+              <a:t>16 個</a:t>
+            </a:r>
+          </a:p>
+        </p:txBody>
+      </p:sp>
+      <p:sp>
+        <p:nvSpPr>
+          <p:cNvPr id="48" name="TextBox 47"/>
+          <p:cNvSpPr txBox="1"/>
+          <p:nvPr/>
+        </p:nvSpPr>
+        <p:spPr>
+          <a:xfrm>
+            <a:off x="731520" y="6583680"/>
+            <a:ext cx="2194560" cy="228600"/>
+          </a:xfrm>
+          <a:prstGeom prst="rect">
+            <a:avLst/>
+          </a:prstGeom>
+          <a:noFill/>
+        </p:spPr>
+        <p:txBody>
+          <a:bodyPr wrap="square" lIns="0" rIns="0" tIns="0" bIns="0" anchor="t">
+            <a:spAutoFit/>
+          </a:bodyPr>
+          <a:lstStyle/>
+          <a:p>
+            <a:pPr algn="l">
+              <a:lnSpc>
+                <a:spcPct val="120000"/>
+              </a:lnSpc>
+            </a:pPr>
+            <a:r>
+              <a:rPr sz="900" b="0">
+                <a:solidFill>
                   <a:srgbClr val="64748B"/>
                 </a:solidFill>
                 <a:latin typeface="Microsoft JhengHei"/>
               </a:rPr>
-              <a:t>回答：萬一數字錯系統會崩嗎</a:t>
-            </a:r>
-          </a:p>
-        </p:txBody>
-      </p:sp>
-      <p:sp>
-        <p:nvSpPr>
-          <p:cNvPr id="35" name="TextBox 34"/>
-          <p:cNvSpPr txBox="1"/>
-          <p:nvPr/>
-        </p:nvSpPr>
-        <p:spPr>
-          <a:xfrm>
-            <a:off x="731520" y="5989320"/>
-            <a:ext cx="10972800" cy="365760"/>
-          </a:xfrm>
-          <a:prstGeom prst="rect">
-            <a:avLst/>
-          </a:prstGeom>
-          <a:noFill/>
-        </p:spPr>
-        <p:txBody>
-          <a:bodyPr wrap="square" lIns="0" rIns="0" tIns="0" bIns="0" anchor="t">
-            <a:spAutoFit/>
-          </a:bodyPr>
-          <a:lstStyle/>
-          <a:p>
-            <a:pPr algn="l">
-              <a:lnSpc>
-                <a:spcPct val="120000"/>
-              </a:lnSpc>
-            </a:pPr>
-            <a:r>
-              <a:rPr sz="1100" b="1">
-                <a:solidFill>
-                  <a:srgbClr val="0F172A"/>
-                </a:solidFill>
-                <a:latin typeface="Microsoft JhengHei"/>
-              </a:rPr>
-              <a:t>量化證據總表</a:t>
-            </a:r>
-          </a:p>
-        </p:txBody>
-      </p:sp>
-      <p:sp>
-        <p:nvSpPr>
-          <p:cNvPr id="36" name="TextBox 35"/>
-          <p:cNvSpPr txBox="1"/>
-          <p:nvPr/>
-        </p:nvSpPr>
-        <p:spPr>
-          <a:xfrm>
-            <a:off x="731520" y="6309360"/>
-            <a:ext cx="2194560" cy="320040"/>
-          </a:xfrm>
-          <a:prstGeom prst="rect">
-            <a:avLst/>
-          </a:prstGeom>
-          <a:noFill/>
-        </p:spPr>
-        <p:txBody>
-          <a:bodyPr wrap="square" lIns="0" rIns="0" tIns="0" bIns="0" anchor="t">
-            <a:spAutoFit/>
-          </a:bodyPr>
-          <a:lstStyle/>
-          <a:p>
-            <a:pPr algn="l">
-              <a:lnSpc>
-                <a:spcPct val="120000"/>
-              </a:lnSpc>
-            </a:pPr>
-            <a:r>
-              <a:rPr sz="1800" b="1">
-                <a:solidFill>
-                  <a:srgbClr val="0F172A"/>
-                </a:solidFill>
-                <a:latin typeface="Microsoft JhengHei"/>
-              </a:rPr>
-              <a:t>16 個</a:t>
-            </a:r>
-          </a:p>
-        </p:txBody>
-      </p:sp>
-      <p:sp>
-        <p:nvSpPr>
-          <p:cNvPr id="37" name="TextBox 36"/>
-          <p:cNvSpPr txBox="1"/>
-          <p:nvPr/>
-        </p:nvSpPr>
-        <p:spPr>
-          <a:xfrm>
-            <a:off x="731520" y="6629400"/>
+              <a:t>人工權重</a:t>
+            </a:r>
+          </a:p>
+        </p:txBody>
+      </p:sp>
+      <p:sp>
+        <p:nvSpPr>
+          <p:cNvPr id="49" name="TextBox 48"/>
+          <p:cNvSpPr txBox="1"/>
+          <p:nvPr/>
+        </p:nvSpPr>
+        <p:spPr>
+          <a:xfrm>
+            <a:off x="2926080" y="6309360"/>
+            <a:ext cx="2194560" cy="274320"/>
+          </a:xfrm>
+          <a:prstGeom prst="rect">
+            <a:avLst/>
+          </a:prstGeom>
+          <a:noFill/>
+        </p:spPr>
+        <p:txBody>
+          <a:bodyPr wrap="square" lIns="0" rIns="0" tIns="0" bIns="0" anchor="t">
+            <a:spAutoFit/>
+          </a:bodyPr>
+          <a:lstStyle/>
+          <a:p>
+            <a:pPr algn="l">
+              <a:lnSpc>
+                <a:spcPct val="120000"/>
+              </a:lnSpc>
+            </a:pPr>
+            <a:r>
+              <a:rPr sz="1600" b="1">
+                <a:solidFill>
+                  <a:srgbClr val="0F172A"/>
+                </a:solidFill>
+                <a:latin typeface="Microsoft JhengHei"/>
+              </a:rPr>
+              <a:t>5 階段</a:t>
+            </a:r>
+          </a:p>
+        </p:txBody>
+      </p:sp>
+      <p:sp>
+        <p:nvSpPr>
+          <p:cNvPr id="50" name="TextBox 49"/>
+          <p:cNvSpPr txBox="1"/>
+          <p:nvPr/>
+        </p:nvSpPr>
+        <p:spPr>
+          <a:xfrm>
+            <a:off x="2926080" y="6583680"/>
             <a:ext cx="2194560" cy="228600"/>
           </a:xfrm>
           <a:prstGeom prst="rect">
@@ -21680,59 +22301,59 @@
                 </a:solidFill>
                 <a:latin typeface="Microsoft JhengHei"/>
               </a:rPr>
-              <a:t>人工權重</a:t>
-            </a:r>
-          </a:p>
-        </p:txBody>
-      </p:sp>
-      <p:sp>
-        <p:nvSpPr>
-          <p:cNvPr id="38" name="TextBox 37"/>
-          <p:cNvSpPr txBox="1"/>
-          <p:nvPr/>
-        </p:nvSpPr>
-        <p:spPr>
-          <a:xfrm>
-            <a:off x="2926080" y="6309360"/>
-            <a:ext cx="2194560" cy="320040"/>
-          </a:xfrm>
-          <a:prstGeom prst="rect">
-            <a:avLst/>
-          </a:prstGeom>
-          <a:noFill/>
-        </p:spPr>
-        <p:txBody>
-          <a:bodyPr wrap="square" lIns="0" rIns="0" tIns="0" bIns="0" anchor="t">
-            <a:spAutoFit/>
-          </a:bodyPr>
-          <a:lstStyle/>
-          <a:p>
-            <a:pPr algn="l">
-              <a:lnSpc>
-                <a:spcPct val="120000"/>
-              </a:lnSpc>
-            </a:pPr>
-            <a:r>
-              <a:rPr sz="1800" b="1">
-                <a:solidFill>
-                  <a:srgbClr val="0F172A"/>
-                </a:solidFill>
-                <a:latin typeface="Microsoft JhengHei"/>
-              </a:rPr>
-              <a:t>4 層</a:t>
-            </a:r>
-          </a:p>
-        </p:txBody>
-      </p:sp>
-      <p:sp>
-        <p:nvSpPr>
-          <p:cNvPr id="39" name="TextBox 38"/>
-          <p:cNvSpPr txBox="1"/>
-          <p:nvPr/>
-        </p:nvSpPr>
-        <p:spPr>
-          <a:xfrm>
-            <a:off x="2926080" y="6629400"/>
+              <a:t>可審查依據</a:t>
+            </a:r>
+          </a:p>
+        </p:txBody>
+      </p:sp>
+      <p:sp>
+        <p:nvSpPr>
+          <p:cNvPr id="51" name="TextBox 50"/>
+          <p:cNvSpPr txBox="1"/>
+          <p:nvPr/>
+        </p:nvSpPr>
+        <p:spPr>
+          <a:xfrm>
+            <a:off x="5120640" y="6309360"/>
+            <a:ext cx="2194560" cy="274320"/>
+          </a:xfrm>
+          <a:prstGeom prst="rect">
+            <a:avLst/>
+          </a:prstGeom>
+          <a:noFill/>
+        </p:spPr>
+        <p:txBody>
+          <a:bodyPr wrap="square" lIns="0" rIns="0" tIns="0" bIns="0" anchor="t">
+            <a:spAutoFit/>
+          </a:bodyPr>
+          <a:lstStyle/>
+          <a:p>
+            <a:pPr algn="l">
+              <a:lnSpc>
+                <a:spcPct val="120000"/>
+              </a:lnSpc>
+            </a:pPr>
+            <a:r>
+              <a:rPr sz="1600" b="1">
+                <a:solidFill>
+                  <a:srgbClr val="0F172A"/>
+                </a:solidFill>
+                <a:latin typeface="Microsoft JhengHei"/>
+              </a:rPr>
+              <a:t>500 次</a:t>
+            </a:r>
+          </a:p>
+        </p:txBody>
+      </p:sp>
+      <p:sp>
+        <p:nvSpPr>
+          <p:cNvPr id="52" name="TextBox 51"/>
+          <p:cNvSpPr txBox="1"/>
+          <p:nvPr/>
+        </p:nvSpPr>
+        <p:spPr>
+          <a:xfrm>
+            <a:off x="5120640" y="6583680"/>
             <a:ext cx="2194560" cy="228600"/>
           </a:xfrm>
           <a:prstGeom prst="rect">
@@ -21758,59 +22379,59 @@
                 </a:solidFill>
                 <a:latin typeface="Microsoft JhengHei"/>
               </a:rPr>
-              <a:t>可審查依據</a:t>
-            </a:r>
-          </a:p>
-        </p:txBody>
-      </p:sp>
-      <p:sp>
-        <p:nvSpPr>
-          <p:cNvPr id="40" name="TextBox 39"/>
-          <p:cNvSpPr txBox="1"/>
-          <p:nvPr/>
-        </p:nvSpPr>
-        <p:spPr>
-          <a:xfrm>
-            <a:off x="5120640" y="6309360"/>
-            <a:ext cx="2194560" cy="320040"/>
-          </a:xfrm>
-          <a:prstGeom prst="rect">
-            <a:avLst/>
-          </a:prstGeom>
-          <a:noFill/>
-        </p:spPr>
-        <p:txBody>
-          <a:bodyPr wrap="square" lIns="0" rIns="0" tIns="0" bIns="0" anchor="t">
-            <a:spAutoFit/>
-          </a:bodyPr>
-          <a:lstStyle/>
-          <a:p>
-            <a:pPr algn="l">
-              <a:lnSpc>
-                <a:spcPct val="120000"/>
-              </a:lnSpc>
-            </a:pPr>
-            <a:r>
-              <a:rPr sz="1800" b="1">
-                <a:solidFill>
-                  <a:srgbClr val="0F172A"/>
-                </a:solidFill>
-                <a:latin typeface="Microsoft JhengHei"/>
-              </a:rPr>
-              <a:t>500 次</a:t>
-            </a:r>
-          </a:p>
-        </p:txBody>
-      </p:sp>
-      <p:sp>
-        <p:nvSpPr>
-          <p:cNvPr id="41" name="TextBox 40"/>
-          <p:cNvSpPr txBox="1"/>
-          <p:nvPr/>
-        </p:nvSpPr>
-        <p:spPr>
-          <a:xfrm>
-            <a:off x="5120640" y="6629400"/>
+              <a:t>敏感度擾動</a:t>
+            </a:r>
+          </a:p>
+        </p:txBody>
+      </p:sp>
+      <p:sp>
+        <p:nvSpPr>
+          <p:cNvPr id="53" name="TextBox 52"/>
+          <p:cNvSpPr txBox="1"/>
+          <p:nvPr/>
+        </p:nvSpPr>
+        <p:spPr>
+          <a:xfrm>
+            <a:off x="7315200" y="6309360"/>
+            <a:ext cx="2194560" cy="274320"/>
+          </a:xfrm>
+          <a:prstGeom prst="rect">
+            <a:avLst/>
+          </a:prstGeom>
+          <a:noFill/>
+        </p:spPr>
+        <p:txBody>
+          <a:bodyPr wrap="square" lIns="0" rIns="0" tIns="0" bIns="0" anchor="t">
+            <a:spAutoFit/>
+          </a:bodyPr>
+          <a:lstStyle/>
+          <a:p>
+            <a:pPr algn="l">
+              <a:lnSpc>
+                <a:spcPct val="120000"/>
+              </a:lnSpc>
+            </a:pPr>
+            <a:r>
+              <a:rPr sz="1600" b="1">
+                <a:solidFill>
+                  <a:srgbClr val="0F172A"/>
+                </a:solidFill>
+                <a:latin typeface="Microsoft JhengHei"/>
+              </a:rPr>
+              <a:t>93.4%</a:t>
+            </a:r>
+          </a:p>
+        </p:txBody>
+      </p:sp>
+      <p:sp>
+        <p:nvSpPr>
+          <p:cNvPr id="54" name="TextBox 53"/>
+          <p:cNvSpPr txBox="1"/>
+          <p:nvPr/>
+        </p:nvSpPr>
+        <p:spPr>
+          <a:xfrm>
+            <a:off x="7315200" y="6583680"/>
             <a:ext cx="2194560" cy="228600"/>
           </a:xfrm>
           <a:prstGeom prst="rect">
@@ -21836,59 +22457,59 @@
                 </a:solidFill>
                 <a:latin typeface="Microsoft JhengHei"/>
               </a:rPr>
-              <a:t>敏感度擾動</a:t>
-            </a:r>
-          </a:p>
-        </p:txBody>
-      </p:sp>
-      <p:sp>
-        <p:nvSpPr>
-          <p:cNvPr id="42" name="TextBox 41"/>
-          <p:cNvSpPr txBox="1"/>
-          <p:nvPr/>
-        </p:nvSpPr>
-        <p:spPr>
-          <a:xfrm>
-            <a:off x="7315200" y="6309360"/>
-            <a:ext cx="2194560" cy="320040"/>
-          </a:xfrm>
-          <a:prstGeom prst="rect">
-            <a:avLst/>
-          </a:prstGeom>
-          <a:noFill/>
-        </p:spPr>
-        <p:txBody>
-          <a:bodyPr wrap="square" lIns="0" rIns="0" tIns="0" bIns="0" anchor="t">
-            <a:spAutoFit/>
-          </a:bodyPr>
-          <a:lstStyle/>
-          <a:p>
-            <a:pPr algn="l">
-              <a:lnSpc>
-                <a:spcPct val="120000"/>
-              </a:lnSpc>
-            </a:pPr>
-            <a:r>
-              <a:rPr sz="1800" b="1">
-                <a:solidFill>
-                  <a:srgbClr val="0F172A"/>
-                </a:solidFill>
-                <a:latin typeface="Microsoft JhengHei"/>
-              </a:rPr>
-              <a:t>93.4%</a:t>
-            </a:r>
-          </a:p>
-        </p:txBody>
-      </p:sp>
-      <p:sp>
-        <p:nvSpPr>
-          <p:cNvPr id="43" name="TextBox 42"/>
-          <p:cNvSpPr txBox="1"/>
-          <p:nvPr/>
-        </p:nvSpPr>
-        <p:spPr>
-          <a:xfrm>
-            <a:off x="7315200" y="6629400"/>
+              <a:t>Top-3 穩定</a:t>
+            </a:r>
+          </a:p>
+        </p:txBody>
+      </p:sp>
+      <p:sp>
+        <p:nvSpPr>
+          <p:cNvPr id="55" name="TextBox 54"/>
+          <p:cNvSpPr txBox="1"/>
+          <p:nvPr/>
+        </p:nvSpPr>
+        <p:spPr>
+          <a:xfrm>
+            <a:off x="9509760" y="6309360"/>
+            <a:ext cx="2194560" cy="274320"/>
+          </a:xfrm>
+          <a:prstGeom prst="rect">
+            <a:avLst/>
+          </a:prstGeom>
+          <a:noFill/>
+        </p:spPr>
+        <p:txBody>
+          <a:bodyPr wrap="square" lIns="0" rIns="0" tIns="0" bIns="0" anchor="t">
+            <a:spAutoFit/>
+          </a:bodyPr>
+          <a:lstStyle/>
+          <a:p>
+            <a:pPr algn="l">
+              <a:lnSpc>
+                <a:spcPct val="120000"/>
+              </a:lnSpc>
+            </a:pPr>
+            <a:r>
+              <a:rPr sz="1600" b="1">
+                <a:solidFill>
+                  <a:srgbClr val="0F172A"/>
+                </a:solidFill>
+                <a:latin typeface="Microsoft JhengHei"/>
+              </a:rPr>
+              <a:t>0.995</a:t>
+            </a:r>
+          </a:p>
+        </p:txBody>
+      </p:sp>
+      <p:sp>
+        <p:nvSpPr>
+          <p:cNvPr id="56" name="TextBox 55"/>
+          <p:cNvSpPr txBox="1"/>
+          <p:nvPr/>
+        </p:nvSpPr>
+        <p:spPr>
+          <a:xfrm>
+            <a:off x="9509760" y="6583680"/>
             <a:ext cx="2194560" cy="228600"/>
           </a:xfrm>
           <a:prstGeom prst="rect">
@@ -21914,84 +22535,6 @@
                 </a:solidFill>
                 <a:latin typeface="Microsoft JhengHei"/>
               </a:rPr>
-              <a:t>Top-3 排名穩定</a:t>
-            </a:r>
-          </a:p>
-        </p:txBody>
-      </p:sp>
-      <p:sp>
-        <p:nvSpPr>
-          <p:cNvPr id="44" name="TextBox 43"/>
-          <p:cNvSpPr txBox="1"/>
-          <p:nvPr/>
-        </p:nvSpPr>
-        <p:spPr>
-          <a:xfrm>
-            <a:off x="9509760" y="6309360"/>
-            <a:ext cx="2194560" cy="320040"/>
-          </a:xfrm>
-          <a:prstGeom prst="rect">
-            <a:avLst/>
-          </a:prstGeom>
-          <a:noFill/>
-        </p:spPr>
-        <p:txBody>
-          <a:bodyPr wrap="square" lIns="0" rIns="0" tIns="0" bIns="0" anchor="t">
-            <a:spAutoFit/>
-          </a:bodyPr>
-          <a:lstStyle/>
-          <a:p>
-            <a:pPr algn="l">
-              <a:lnSpc>
-                <a:spcPct val="120000"/>
-              </a:lnSpc>
-            </a:pPr>
-            <a:r>
-              <a:rPr sz="1800" b="1">
-                <a:solidFill>
-                  <a:srgbClr val="0F172A"/>
-                </a:solidFill>
-                <a:latin typeface="Microsoft JhengHei"/>
-              </a:rPr>
-              <a:t>0.995</a:t>
-            </a:r>
-          </a:p>
-        </p:txBody>
-      </p:sp>
-      <p:sp>
-        <p:nvSpPr>
-          <p:cNvPr id="45" name="TextBox 44"/>
-          <p:cNvSpPr txBox="1"/>
-          <p:nvPr/>
-        </p:nvSpPr>
-        <p:spPr>
-          <a:xfrm>
-            <a:off x="9509760" y="6629400"/>
-            <a:ext cx="2194560" cy="228600"/>
-          </a:xfrm>
-          <a:prstGeom prst="rect">
-            <a:avLst/>
-          </a:prstGeom>
-          <a:noFill/>
-        </p:spPr>
-        <p:txBody>
-          <a:bodyPr wrap="square" lIns="0" rIns="0" tIns="0" bIns="0" anchor="t">
-            <a:spAutoFit/>
-          </a:bodyPr>
-          <a:lstStyle/>
-          <a:p>
-            <a:pPr algn="l">
-              <a:lnSpc>
-                <a:spcPct val="120000"/>
-              </a:lnSpc>
-            </a:pPr>
-            <a:r>
-              <a:rPr sz="900" b="0">
-                <a:solidFill>
-                  <a:srgbClr val="64748B"/>
-                </a:solidFill>
-                <a:latin typeface="Microsoft JhengHei"/>
-              </a:rPr>
               <a:t>Spearman ρ</a:t>
             </a:r>
           </a:p>
@@ -21999,7 +22542,7 @@
       </p:sp>
       <p:sp>
         <p:nvSpPr>
-          <p:cNvPr id="46" name="TextBox 45"/>
+          <p:cNvPr id="57" name="TextBox 56"/>
           <p:cNvSpPr txBox="1"/>
           <p:nvPr/>
         </p:nvSpPr>
@@ -22038,7 +22581,7 @@
       </p:sp>
       <p:sp>
         <p:nvSpPr>
-          <p:cNvPr id="47" name="TextBox 46"/>
+          <p:cNvPr id="58" name="TextBox 57"/>
           <p:cNvSpPr txBox="1"/>
           <p:nvPr/>
         </p:nvSpPr>

--- a/docs/串連系統_簡報.pptx
+++ b/docs/串連系統_簡報.pptx
@@ -20399,7 +20399,7 @@
                 </a:solidFill>
                 <a:latin typeface="Microsoft JhengHei"/>
               </a:rPr>
-              <a:t>主管訪談 → 等價關係 → 弱先驗 → 測資校準 → 敏感度確認</a:t>
+              <a:t>整合管理層意見 → 等價關係 → 弱先驗 → 測資校準 → 敏感度確認</a:t>
             </a:r>
           </a:p>
         </p:txBody>
@@ -20522,7 +20522,7 @@
                 </a:solidFill>
                 <a:latin typeface="Microsoft JhengHei"/>
               </a:rPr>
-              <a:t>主管訪談</a:t>
+              <a:t>整合管理層意見</a:t>
             </a:r>
           </a:p>
         </p:txBody>

--- a/docs/串連系統_簡報.pptx
+++ b/docs/串連系統_簡報.pptx
@@ -20635,7 +20635,7 @@
                 </a:solidFill>
                 <a:latin typeface="Microsoft JhengHei"/>
               </a:rPr>
-              <a:t>問主管:</a:t>
+              <a:t>訪談 + 業界文獻</a:t>
             </a:r>
           </a:p>
           <a:p>
@@ -20651,7 +20651,7 @@
                 </a:solidFill>
                 <a:latin typeface="Microsoft JhengHei"/>
               </a:rPr>
-              <a:t>誰比誰重要?</a:t>
+              <a:t>交叉驗證排序</a:t>
             </a:r>
           </a:p>
         </p:txBody>
@@ -20985,7 +20985,7 @@
                 </a:solidFill>
                 <a:latin typeface="Microsoft JhengHei"/>
               </a:rPr>
-              <a:t>問主管:</a:t>
+              <a:t>把抽象重要性</a:t>
             </a:r>
           </a:p>
           <a:p>
@@ -21001,7 +21001,7 @@
                 </a:solidFill>
                 <a:latin typeface="Microsoft JhengHei"/>
               </a:rPr>
-              <a:t>1 件 A ≈ 幾件 B?</a:t>
+              <a:t>轉成具體比例</a:t>
             </a:r>
           </a:p>
         </p:txBody>

--- a/docs/串連系統_簡報.pptx
+++ b/docs/串連系統_簡報.pptx
@@ -3118,7 +3118,7 @@
             <a:avLst/>
           </a:prstGeom>
           <a:solidFill>
-            <a:srgbClr val="FFFFFF"/>
+            <a:srgbClr val="FAFAF7"/>
           </a:solidFill>
           <a:ln>
             <a:noFill/>
@@ -3161,7 +3161,7 @@
             <a:avLst/>
           </a:prstGeom>
           <a:solidFill>
-            <a:srgbClr val="E2E8F0"/>
+            <a:srgbClr val="E7E5E0"/>
           </a:solidFill>
           <a:ln>
             <a:noFill/>
@@ -3208,7 +3208,7 @@
           <a:noFill/>
           <a:ln w="12700">
             <a:solidFill>
-              <a:srgbClr val="0F172A"/>
+              <a:srgbClr val="1C1917"/>
             </a:solidFill>
           </a:ln>
         </p:spPr>
@@ -3234,7 +3234,7 @@
             <a:r>
               <a:rPr sz="1200" b="0">
                 <a:solidFill>
-                  <a:srgbClr val="0F172A"/>
+                  <a:srgbClr val="1C1917"/>
                 </a:solidFill>
                 <a:latin typeface="Microsoft JhengHei"/>
               </a:rPr>
@@ -3273,7 +3273,7 @@
             <a:r>
               <a:rPr sz="6400" b="1">
                 <a:solidFill>
-                  <a:srgbClr val="0F172A"/>
+                  <a:srgbClr val="1C1917"/>
                 </a:solidFill>
                 <a:latin typeface="Microsoft JhengHei"/>
               </a:rPr>
@@ -3312,7 +3312,7 @@
             <a:r>
               <a:rPr sz="2400" b="0">
                 <a:solidFill>
-                  <a:srgbClr val="0F172A"/>
+                  <a:srgbClr val="1C1917"/>
                 </a:solidFill>
                 <a:latin typeface="Microsoft JhengHei"/>
               </a:rPr>
@@ -3351,7 +3351,7 @@
             <a:r>
               <a:rPr sz="1800" b="0">
                 <a:solidFill>
-                  <a:srgbClr val="64748B"/>
+                  <a:srgbClr val="78716C"/>
                 </a:solidFill>
                 <a:latin typeface="Microsoft JhengHei"/>
               </a:rPr>
@@ -3390,7 +3390,7 @@
             <a:r>
               <a:rPr sz="1200" b="1">
                 <a:solidFill>
-                  <a:srgbClr val="0F172A"/>
+                  <a:srgbClr val="1C1917"/>
                 </a:solidFill>
                 <a:latin typeface="Microsoft JhengHei"/>
               </a:rPr>
@@ -3429,7 +3429,7 @@
             <a:r>
               <a:rPr sz="1400" b="1">
                 <a:solidFill>
-                  <a:srgbClr val="0F172A"/>
+                  <a:srgbClr val="1C1917"/>
                 </a:solidFill>
                 <a:latin typeface="Microsoft JhengHei"/>
               </a:rPr>
@@ -3471,7 +3471,7 @@
             <a:avLst/>
           </a:prstGeom>
           <a:solidFill>
-            <a:srgbClr val="FFFFFF"/>
+            <a:srgbClr val="FAFAF7"/>
           </a:solidFill>
           <a:ln>
             <a:noFill/>
@@ -3514,7 +3514,7 @@
             <a:avLst/>
           </a:prstGeom>
           <a:solidFill>
-            <a:srgbClr val="E2E8F0"/>
+            <a:srgbClr val="E7E5E0"/>
           </a:solidFill>
           <a:ln>
             <a:noFill/>
@@ -3572,7 +3572,7 @@
             <a:r>
               <a:rPr sz="1400" b="1">
                 <a:solidFill>
-                  <a:srgbClr val="64748B"/>
+                  <a:srgbClr val="78716C"/>
                 </a:solidFill>
                 <a:latin typeface="Microsoft JhengHei"/>
               </a:rPr>
@@ -3611,7 +3611,7 @@
             <a:r>
               <a:rPr sz="4000" b="1">
                 <a:solidFill>
-                  <a:srgbClr val="0F172A"/>
+                  <a:srgbClr val="1C1917"/>
                 </a:solidFill>
                 <a:latin typeface="Microsoft JhengHei"/>
               </a:rPr>
@@ -3650,7 +3650,7 @@
             <a:r>
               <a:rPr sz="1600" b="0">
                 <a:solidFill>
-                  <a:srgbClr val="64748B"/>
+                  <a:srgbClr val="78716C"/>
                 </a:solidFill>
                 <a:latin typeface="Microsoft JhengHei"/>
               </a:rPr>
@@ -3678,7 +3678,7 @@
           <a:noFill/>
           <a:ln w="9525">
             <a:solidFill>
-              <a:srgbClr val="E2E8F0"/>
+              <a:srgbClr val="E7E5E0"/>
             </a:solidFill>
           </a:ln>
         </p:spPr>
@@ -3734,7 +3734,7 @@
             <a:r>
               <a:rPr sz="1400" b="1">
                 <a:solidFill>
-                  <a:srgbClr val="0F172A"/>
+                  <a:srgbClr val="D97706"/>
                 </a:solidFill>
                 <a:latin typeface="Microsoft JhengHei"/>
               </a:rPr>
@@ -3773,7 +3773,7 @@
             <a:r>
               <a:rPr sz="2200" b="1">
                 <a:solidFill>
-                  <a:srgbClr val="0F172A"/>
+                  <a:srgbClr val="1C1917"/>
                 </a:solidFill>
                 <a:latin typeface="Microsoft JhengHei"/>
               </a:rPr>
@@ -3812,7 +3812,7 @@
             <a:r>
               <a:rPr sz="1150" b="0">
                 <a:solidFill>
-                  <a:srgbClr val="64748B"/>
+                  <a:srgbClr val="78716C"/>
                 </a:solidFill>
                 <a:latin typeface="Microsoft JhengHei"/>
               </a:rPr>
@@ -3828,7 +3828,7 @@
             <a:r>
               <a:rPr sz="1150" b="0">
                 <a:solidFill>
-                  <a:srgbClr val="64748B"/>
+                  <a:srgbClr val="78716C"/>
                 </a:solidFill>
                 <a:latin typeface="Microsoft JhengHei"/>
               </a:rPr>
@@ -3856,7 +3856,7 @@
           <a:noFill/>
           <a:ln w="9525">
             <a:solidFill>
-              <a:srgbClr val="E2E8F0"/>
+              <a:srgbClr val="E7E5E0"/>
             </a:solidFill>
           </a:ln>
         </p:spPr>
@@ -3912,7 +3912,7 @@
             <a:r>
               <a:rPr sz="1400" b="1">
                 <a:solidFill>
-                  <a:srgbClr val="0F172A"/>
+                  <a:srgbClr val="D97706"/>
                 </a:solidFill>
                 <a:latin typeface="Microsoft JhengHei"/>
               </a:rPr>
@@ -3951,7 +3951,7 @@
             <a:r>
               <a:rPr sz="2200" b="1">
                 <a:solidFill>
-                  <a:srgbClr val="0F172A"/>
+                  <a:srgbClr val="1C1917"/>
                 </a:solidFill>
                 <a:latin typeface="Microsoft JhengHei"/>
               </a:rPr>
@@ -3990,7 +3990,7 @@
             <a:r>
               <a:rPr sz="1150" b="0">
                 <a:solidFill>
-                  <a:srgbClr val="64748B"/>
+                  <a:srgbClr val="78716C"/>
                 </a:solidFill>
                 <a:latin typeface="Microsoft JhengHei"/>
               </a:rPr>
@@ -4006,7 +4006,7 @@
             <a:r>
               <a:rPr sz="1150" b="0">
                 <a:solidFill>
-                  <a:srgbClr val="64748B"/>
+                  <a:srgbClr val="78716C"/>
                 </a:solidFill>
                 <a:latin typeface="Microsoft JhengHei"/>
               </a:rPr>
@@ -4034,7 +4034,7 @@
           <a:noFill/>
           <a:ln w="9525">
             <a:solidFill>
-              <a:srgbClr val="E2E8F0"/>
+              <a:srgbClr val="E7E5E0"/>
             </a:solidFill>
           </a:ln>
         </p:spPr>
@@ -4090,7 +4090,7 @@
             <a:r>
               <a:rPr sz="1400" b="1">
                 <a:solidFill>
-                  <a:srgbClr val="0F172A"/>
+                  <a:srgbClr val="D97706"/>
                 </a:solidFill>
                 <a:latin typeface="Microsoft JhengHei"/>
               </a:rPr>
@@ -4129,7 +4129,7 @@
             <a:r>
               <a:rPr sz="2200" b="1">
                 <a:solidFill>
-                  <a:srgbClr val="0F172A"/>
+                  <a:srgbClr val="1C1917"/>
                 </a:solidFill>
                 <a:latin typeface="Microsoft JhengHei"/>
               </a:rPr>
@@ -4168,7 +4168,7 @@
             <a:r>
               <a:rPr sz="1150" b="0">
                 <a:solidFill>
-                  <a:srgbClr val="64748B"/>
+                  <a:srgbClr val="78716C"/>
                 </a:solidFill>
                 <a:latin typeface="Microsoft JhengHei"/>
               </a:rPr>
@@ -4184,7 +4184,7 @@
             <a:r>
               <a:rPr sz="1150" b="0">
                 <a:solidFill>
-                  <a:srgbClr val="64748B"/>
+                  <a:srgbClr val="78716C"/>
                 </a:solidFill>
                 <a:latin typeface="Microsoft JhengHei"/>
               </a:rPr>
@@ -4212,7 +4212,7 @@
           <a:noFill/>
           <a:ln w="9525">
             <a:solidFill>
-              <a:srgbClr val="E2E8F0"/>
+              <a:srgbClr val="E7E5E0"/>
             </a:solidFill>
           </a:ln>
         </p:spPr>
@@ -4268,7 +4268,7 @@
             <a:r>
               <a:rPr sz="1400" b="1">
                 <a:solidFill>
-                  <a:srgbClr val="0F172A"/>
+                  <a:srgbClr val="D97706"/>
                 </a:solidFill>
                 <a:latin typeface="Microsoft JhengHei"/>
               </a:rPr>
@@ -4307,7 +4307,7 @@
             <a:r>
               <a:rPr sz="2200" b="1">
                 <a:solidFill>
-                  <a:srgbClr val="0F172A"/>
+                  <a:srgbClr val="1C1917"/>
                 </a:solidFill>
                 <a:latin typeface="Microsoft JhengHei"/>
               </a:rPr>
@@ -4346,7 +4346,7 @@
             <a:r>
               <a:rPr sz="1150" b="0">
                 <a:solidFill>
-                  <a:srgbClr val="64748B"/>
+                  <a:srgbClr val="78716C"/>
                 </a:solidFill>
                 <a:latin typeface="Microsoft JhengHei"/>
               </a:rPr>
@@ -4362,7 +4362,7 @@
             <a:r>
               <a:rPr sz="1150" b="0">
                 <a:solidFill>
-                  <a:srgbClr val="64748B"/>
+                  <a:srgbClr val="78716C"/>
                 </a:solidFill>
                 <a:latin typeface="Microsoft JhengHei"/>
               </a:rPr>
@@ -4390,7 +4390,7 @@
           <a:noFill/>
           <a:ln w="9525">
             <a:solidFill>
-              <a:srgbClr val="E2E8F0"/>
+              <a:srgbClr val="E7E5E0"/>
             </a:solidFill>
           </a:ln>
         </p:spPr>
@@ -4446,7 +4446,7 @@
             <a:r>
               <a:rPr sz="1400" b="1">
                 <a:solidFill>
-                  <a:srgbClr val="0F172A"/>
+                  <a:srgbClr val="D97706"/>
                 </a:solidFill>
                 <a:latin typeface="Microsoft JhengHei"/>
               </a:rPr>
@@ -4485,7 +4485,7 @@
             <a:r>
               <a:rPr sz="1250" b="0">
                 <a:solidFill>
-                  <a:srgbClr val="0F172A"/>
+                  <a:srgbClr val="1C1917"/>
                 </a:solidFill>
                 <a:latin typeface="Microsoft JhengHei"/>
               </a:rPr>
@@ -4501,7 +4501,7 @@
             <a:r>
               <a:rPr sz="1250" b="0">
                 <a:solidFill>
-                  <a:srgbClr val="0F172A"/>
+                  <a:srgbClr val="1C1917"/>
                 </a:solidFill>
                 <a:latin typeface="Microsoft JhengHei"/>
               </a:rPr>
@@ -4517,7 +4517,7 @@
             <a:r>
               <a:rPr sz="1250" b="0">
                 <a:solidFill>
-                  <a:srgbClr val="0F172A"/>
+                  <a:srgbClr val="1C1917"/>
                 </a:solidFill>
                 <a:latin typeface="Microsoft JhengHei"/>
               </a:rPr>
@@ -4556,7 +4556,7 @@
             <a:r>
               <a:rPr sz="900" b="0">
                 <a:solidFill>
-                  <a:srgbClr val="64748B"/>
+                  <a:srgbClr val="78716C"/>
                 </a:solidFill>
                 <a:latin typeface="Microsoft JhengHei"/>
               </a:rPr>
@@ -4595,7 +4595,7 @@
             <a:r>
               <a:rPr sz="900" b="0">
                 <a:solidFill>
-                  <a:srgbClr val="64748B"/>
+                  <a:srgbClr val="78716C"/>
                 </a:solidFill>
                 <a:latin typeface="Microsoft JhengHei"/>
               </a:rPr>
@@ -4637,7 +4637,7 @@
             <a:avLst/>
           </a:prstGeom>
           <a:solidFill>
-            <a:srgbClr val="FFFFFF"/>
+            <a:srgbClr val="FAFAF7"/>
           </a:solidFill>
           <a:ln>
             <a:noFill/>
@@ -4680,7 +4680,7 @@
             <a:avLst/>
           </a:prstGeom>
           <a:solidFill>
-            <a:srgbClr val="E2E8F0"/>
+            <a:srgbClr val="E7E5E0"/>
           </a:solidFill>
           <a:ln>
             <a:noFill/>
@@ -4738,7 +4738,7 @@
             <a:r>
               <a:rPr sz="1400" b="1">
                 <a:solidFill>
-                  <a:srgbClr val="64748B"/>
+                  <a:srgbClr val="78716C"/>
                 </a:solidFill>
                 <a:latin typeface="Microsoft JhengHei"/>
               </a:rPr>
@@ -4777,7 +4777,7 @@
             <a:r>
               <a:rPr sz="4000" b="1">
                 <a:solidFill>
-                  <a:srgbClr val="0F172A"/>
+                  <a:srgbClr val="1C1917"/>
                 </a:solidFill>
                 <a:latin typeface="Microsoft JhengHei"/>
               </a:rPr>
@@ -4816,7 +4816,7 @@
             <a:r>
               <a:rPr sz="1600" b="0">
                 <a:solidFill>
-                  <a:srgbClr val="64748B"/>
+                  <a:srgbClr val="78716C"/>
                 </a:solidFill>
                 <a:latin typeface="Microsoft JhengHei"/>
               </a:rPr>
@@ -4844,7 +4844,7 @@
           <a:noFill/>
           <a:ln w="9525">
             <a:solidFill>
-              <a:srgbClr val="E2E8F0"/>
+              <a:srgbClr val="E7E5E0"/>
             </a:solidFill>
           </a:ln>
         </p:spPr>
@@ -4900,7 +4900,7 @@
             <a:r>
               <a:rPr sz="1400" b="1">
                 <a:solidFill>
-                  <a:srgbClr val="0F172A"/>
+                  <a:srgbClr val="D97706"/>
                 </a:solidFill>
                 <a:latin typeface="Microsoft JhengHei"/>
               </a:rPr>
@@ -4924,7 +4924,7 @@
             <a:avLst/>
           </a:prstGeom>
           <a:solidFill>
-            <a:srgbClr val="0F172A"/>
+            <a:srgbClr val="D97706"/>
           </a:solidFill>
           <a:ln>
             <a:noFill/>
@@ -4982,7 +4982,7 @@
             <a:r>
               <a:rPr sz="1400" b="1">
                 <a:solidFill>
-                  <a:srgbClr val="0F172A"/>
+                  <a:srgbClr val="1C1917"/>
                 </a:solidFill>
                 <a:latin typeface="Microsoft JhengHei"/>
               </a:rPr>
@@ -5006,7 +5006,7 @@
             <a:avLst/>
           </a:prstGeom>
           <a:solidFill>
-            <a:srgbClr val="0F172A"/>
+            <a:srgbClr val="D97706"/>
           </a:solidFill>
           <a:ln>
             <a:noFill/>
@@ -5064,7 +5064,7 @@
             <a:r>
               <a:rPr sz="1400" b="1">
                 <a:solidFill>
-                  <a:srgbClr val="0F172A"/>
+                  <a:srgbClr val="1C1917"/>
                 </a:solidFill>
                 <a:latin typeface="Microsoft JhengHei"/>
               </a:rPr>
@@ -5088,7 +5088,7 @@
             <a:avLst/>
           </a:prstGeom>
           <a:solidFill>
-            <a:srgbClr val="0F172A"/>
+            <a:srgbClr val="D97706"/>
           </a:solidFill>
           <a:ln>
             <a:noFill/>
@@ -5146,7 +5146,7 @@
             <a:r>
               <a:rPr sz="1400" b="1">
                 <a:solidFill>
-                  <a:srgbClr val="0F172A"/>
+                  <a:srgbClr val="1C1917"/>
                 </a:solidFill>
                 <a:latin typeface="Microsoft JhengHei"/>
               </a:rPr>
@@ -5171,7 +5171,7 @@
           </a:prstGeom>
           <a:ln w="76200">
             <a:solidFill>
-              <a:srgbClr val="E11448"/>
+              <a:srgbClr val="DC2626"/>
             </a:solidFill>
           </a:ln>
         </p:spPr>
@@ -5206,7 +5206,7 @@
           </a:prstGeom>
           <a:ln w="12700">
             <a:solidFill>
-              <a:srgbClr val="64748B"/>
+              <a:srgbClr val="78716C"/>
             </a:solidFill>
           </a:ln>
         </p:spPr>
@@ -5255,7 +5255,7 @@
             <a:r>
               <a:rPr sz="1200" b="1">
                 <a:solidFill>
-                  <a:srgbClr val="0F172A"/>
+                  <a:srgbClr val="1C1917"/>
                 </a:solidFill>
                 <a:latin typeface="Microsoft JhengHei"/>
               </a:rPr>
@@ -5283,7 +5283,7 @@
           <a:noFill/>
           <a:ln w="9525">
             <a:solidFill>
-              <a:srgbClr val="E2E8F0"/>
+              <a:srgbClr val="E7E5E0"/>
             </a:solidFill>
           </a:ln>
         </p:spPr>
@@ -5339,7 +5339,7 @@
             <a:r>
               <a:rPr sz="1400" b="1">
                 <a:solidFill>
-                  <a:srgbClr val="0F172A"/>
+                  <a:srgbClr val="D97706"/>
                 </a:solidFill>
                 <a:latin typeface="Microsoft JhengHei"/>
               </a:rPr>
@@ -5378,7 +5378,7 @@
             <a:r>
               <a:rPr sz="1200" b="0">
                 <a:solidFill>
-                  <a:srgbClr val="0F172A"/>
+                  <a:srgbClr val="1C1917"/>
                 </a:solidFill>
                 <a:latin typeface="Microsoft JhengHei"/>
               </a:rPr>
@@ -5394,7 +5394,7 @@
             <a:r>
               <a:rPr sz="1200" b="0">
                 <a:solidFill>
-                  <a:srgbClr val="0F172A"/>
+                  <a:srgbClr val="1C1917"/>
                 </a:solidFill>
                 <a:latin typeface="Microsoft JhengHei"/>
               </a:rPr>
@@ -5410,7 +5410,7 @@
             <a:r>
               <a:rPr sz="1200" b="0">
                 <a:solidFill>
-                  <a:srgbClr val="0F172A"/>
+                  <a:srgbClr val="1C1917"/>
                 </a:solidFill>
                 <a:latin typeface="Microsoft JhengHei"/>
               </a:rPr>
@@ -5426,7 +5426,7 @@
             <a:r>
               <a:rPr sz="1200" b="0">
                 <a:solidFill>
-                  <a:srgbClr val="0F172A"/>
+                  <a:srgbClr val="1C1917"/>
                 </a:solidFill>
                 <a:latin typeface="Microsoft JhengHei"/>
               </a:rPr>
@@ -5442,7 +5442,7 @@
             <a:r>
               <a:rPr sz="1200" b="0">
                 <a:solidFill>
-                  <a:srgbClr val="0F172A"/>
+                  <a:srgbClr val="1C1917"/>
                 </a:solidFill>
                 <a:latin typeface="Microsoft JhengHei"/>
               </a:rPr>
@@ -5458,7 +5458,7 @@
             <a:r>
               <a:rPr sz="1200" b="0">
                 <a:solidFill>
-                  <a:srgbClr val="0F172A"/>
+                  <a:srgbClr val="1C1917"/>
                 </a:solidFill>
                 <a:latin typeface="Microsoft JhengHei"/>
               </a:rPr>
@@ -5474,7 +5474,7 @@
             <a:r>
               <a:rPr sz="1200" b="0">
                 <a:solidFill>
-                  <a:srgbClr val="0F172A"/>
+                  <a:srgbClr val="1C1917"/>
                 </a:solidFill>
                 <a:latin typeface="Microsoft JhengHei"/>
               </a:rPr>
@@ -5490,7 +5490,7 @@
             <a:r>
               <a:rPr sz="1200" b="0">
                 <a:solidFill>
-                  <a:srgbClr val="0F172A"/>
+                  <a:srgbClr val="1C1917"/>
                 </a:solidFill>
                 <a:latin typeface="Microsoft JhengHei"/>
               </a:rPr>
@@ -5506,7 +5506,7 @@
             <a:r>
               <a:rPr sz="1200" b="0">
                 <a:solidFill>
-                  <a:srgbClr val="0F172A"/>
+                  <a:srgbClr val="1C1917"/>
                 </a:solidFill>
                 <a:latin typeface="Microsoft JhengHei"/>
               </a:rPr>
@@ -5522,7 +5522,7 @@
             <a:r>
               <a:rPr sz="1200" b="0">
                 <a:solidFill>
-                  <a:srgbClr val="0F172A"/>
+                  <a:srgbClr val="1C1917"/>
                 </a:solidFill>
                 <a:latin typeface="Microsoft JhengHei"/>
               </a:rPr>
@@ -5538,7 +5538,7 @@
             <a:r>
               <a:rPr sz="1200" b="0">
                 <a:solidFill>
-                  <a:srgbClr val="0F172A"/>
+                  <a:srgbClr val="1C1917"/>
                 </a:solidFill>
                 <a:latin typeface="Microsoft JhengHei"/>
               </a:rPr>
@@ -5554,7 +5554,7 @@
             <a:r>
               <a:rPr sz="1200" b="0">
                 <a:solidFill>
-                  <a:srgbClr val="0F172A"/>
+                  <a:srgbClr val="1C1917"/>
                 </a:solidFill>
                 <a:latin typeface="Microsoft JhengHei"/>
               </a:rPr>
@@ -5570,7 +5570,7 @@
             <a:r>
               <a:rPr sz="1200" b="0">
                 <a:solidFill>
-                  <a:srgbClr val="0F172A"/>
+                  <a:srgbClr val="1C1917"/>
                 </a:solidFill>
                 <a:latin typeface="Microsoft JhengHei"/>
               </a:rPr>
@@ -5586,7 +5586,7 @@
             <a:r>
               <a:rPr sz="1200" b="0">
                 <a:solidFill>
-                  <a:srgbClr val="0F172A"/>
+                  <a:srgbClr val="1C1917"/>
                 </a:solidFill>
                 <a:latin typeface="Microsoft JhengHei"/>
               </a:rPr>
@@ -5625,7 +5625,7 @@
             <a:r>
               <a:rPr sz="900" b="0">
                 <a:solidFill>
-                  <a:srgbClr val="64748B"/>
+                  <a:srgbClr val="78716C"/>
                 </a:solidFill>
                 <a:latin typeface="Microsoft JhengHei"/>
               </a:rPr>
@@ -5664,7 +5664,7 @@
             <a:r>
               <a:rPr sz="900" b="0">
                 <a:solidFill>
-                  <a:srgbClr val="64748B"/>
+                  <a:srgbClr val="78716C"/>
                 </a:solidFill>
                 <a:latin typeface="Microsoft JhengHei"/>
               </a:rPr>
@@ -5706,7 +5706,7 @@
             <a:avLst/>
           </a:prstGeom>
           <a:solidFill>
-            <a:srgbClr val="0F172A"/>
+            <a:srgbClr val="1C1917"/>
           </a:solidFill>
           <a:ln>
             <a:noFill/>
@@ -5749,7 +5749,7 @@
             <a:avLst/>
           </a:prstGeom>
           <a:solidFill>
-            <a:srgbClr val="FFFFFF"/>
+            <a:srgbClr val="FAFAF7"/>
           </a:solidFill>
           <a:ln>
             <a:noFill/>
@@ -5792,7 +5792,7 @@
             <a:avLst/>
           </a:prstGeom>
           <a:solidFill>
-            <a:srgbClr val="E2E8F0"/>
+            <a:srgbClr val="E7E5E0"/>
           </a:solidFill>
           <a:ln>
             <a:noFill/>
@@ -5850,7 +5850,7 @@
             <a:r>
               <a:rPr sz="3600" b="1">
                 <a:solidFill>
-                  <a:srgbClr val="0F172A"/>
+                  <a:srgbClr val="1C1917"/>
                 </a:solidFill>
                 <a:latin typeface="Microsoft JhengHei"/>
               </a:rPr>
@@ -5889,7 +5889,7 @@
             <a:r>
               <a:rPr sz="1500" b="0">
                 <a:solidFill>
-                  <a:srgbClr val="64748B"/>
+                  <a:srgbClr val="78716C"/>
                 </a:solidFill>
                 <a:latin typeface="Microsoft JhengHei"/>
               </a:rPr>
@@ -5928,7 +5928,7 @@
             <a:r>
               <a:rPr sz="1200" b="1">
                 <a:solidFill>
-                  <a:srgbClr val="0F172A"/>
+                  <a:srgbClr val="1C1917"/>
                 </a:solidFill>
                 <a:latin typeface="Microsoft JhengHei"/>
               </a:rPr>
@@ -5967,7 +5967,7 @@
             <a:r>
               <a:rPr sz="1200" b="1">
                 <a:solidFill>
-                  <a:srgbClr val="FFFFFF"/>
+                  <a:srgbClr val="FAFAF7"/>
                 </a:solidFill>
                 <a:latin typeface="Microsoft JhengHei"/>
               </a:rPr>
@@ -6006,7 +6006,7 @@
             <a:r>
               <a:rPr sz="1200" b="1">
                 <a:solidFill>
-                  <a:srgbClr val="0F172A"/>
+                  <a:srgbClr val="1C1917"/>
                 </a:solidFill>
                 <a:latin typeface="Microsoft JhengHei"/>
               </a:rPr>
@@ -6045,7 +6045,7 @@
             <a:r>
               <a:rPr sz="1200" b="1">
                 <a:solidFill>
-                  <a:srgbClr val="0F172A"/>
+                  <a:srgbClr val="1C1917"/>
                 </a:solidFill>
                 <a:latin typeface="Microsoft JhengHei"/>
               </a:rPr>
@@ -6084,7 +6084,7 @@
             <a:r>
               <a:rPr sz="1200" b="1">
                 <a:solidFill>
-                  <a:srgbClr val="0F172A"/>
+                  <a:srgbClr val="1C1917"/>
                 </a:solidFill>
                 <a:latin typeface="Microsoft JhengHei"/>
               </a:rPr>
@@ -6123,7 +6123,7 @@
             <a:r>
               <a:rPr sz="1200" b="1">
                 <a:solidFill>
-                  <a:srgbClr val="0F172A"/>
+                  <a:srgbClr val="1C1917"/>
                 </a:solidFill>
                 <a:latin typeface="Microsoft JhengHei"/>
               </a:rPr>
@@ -6162,7 +6162,7 @@
             <a:r>
               <a:rPr sz="1200" b="1">
                 <a:solidFill>
-                  <a:srgbClr val="0F172A"/>
+                  <a:srgbClr val="1C1917"/>
                 </a:solidFill>
                 <a:latin typeface="Microsoft JhengHei"/>
               </a:rPr>
@@ -6178,7 +6178,7 @@
             <a:r>
               <a:rPr sz="1200" b="1">
                 <a:solidFill>
-                  <a:srgbClr val="0F172A"/>
+                  <a:srgbClr val="1C1917"/>
                 </a:solidFill>
                 <a:latin typeface="Microsoft JhengHei"/>
               </a:rPr>
@@ -6202,7 +6202,7 @@
             <a:avLst/>
           </a:prstGeom>
           <a:solidFill>
-            <a:srgbClr val="0F172A"/>
+            <a:srgbClr val="1C1917"/>
           </a:solidFill>
           <a:ln>
             <a:noFill/>
@@ -6260,7 +6260,7 @@
             <a:r>
               <a:rPr sz="1200" b="1">
                 <a:solidFill>
-                  <a:srgbClr val="0F172A"/>
+                  <a:srgbClr val="1C1917"/>
                 </a:solidFill>
                 <a:latin typeface="Microsoft JhengHei"/>
               </a:rPr>
@@ -6299,7 +6299,7 @@
             <a:r>
               <a:rPr sz="1800" b="1">
                 <a:solidFill>
-                  <a:srgbClr val="FFFFFF"/>
+                  <a:srgbClr val="FAFAF7"/>
                 </a:solidFill>
                 <a:latin typeface="Microsoft JhengHei"/>
               </a:rPr>
@@ -6338,7 +6338,7 @@
             <a:r>
               <a:rPr sz="1600" b="0">
                 <a:solidFill>
-                  <a:srgbClr val="64748B"/>
+                  <a:srgbClr val="78716C"/>
                 </a:solidFill>
                 <a:latin typeface="Microsoft JhengHei"/>
               </a:rPr>
@@ -6377,7 +6377,7 @@
             <a:r>
               <a:rPr sz="1600" b="0">
                 <a:solidFill>
-                  <a:srgbClr val="64748B"/>
+                  <a:srgbClr val="78716C"/>
                 </a:solidFill>
                 <a:latin typeface="Microsoft JhengHei"/>
               </a:rPr>
@@ -6416,7 +6416,7 @@
             <a:r>
               <a:rPr sz="1600" b="0">
                 <a:solidFill>
-                  <a:srgbClr val="64748B"/>
+                  <a:srgbClr val="78716C"/>
                 </a:solidFill>
                 <a:latin typeface="Microsoft JhengHei"/>
               </a:rPr>
@@ -6455,7 +6455,7 @@
             <a:r>
               <a:rPr sz="1800" b="1">
                 <a:solidFill>
-                  <a:srgbClr val="059669"/>
+                  <a:srgbClr val="16A34A"/>
                 </a:solidFill>
                 <a:latin typeface="Microsoft JhengHei"/>
               </a:rPr>
@@ -6494,7 +6494,7 @@
             <a:r>
               <a:rPr sz="1600" b="0">
                 <a:solidFill>
-                  <a:srgbClr val="64748B"/>
+                  <a:srgbClr val="78716C"/>
                 </a:solidFill>
                 <a:latin typeface="Microsoft JhengHei"/>
               </a:rPr>
@@ -6518,7 +6518,7 @@
             <a:avLst/>
           </a:prstGeom>
           <a:solidFill>
-            <a:srgbClr val="E2E8F0"/>
+            <a:srgbClr val="E7E5E0"/>
           </a:solidFill>
           <a:ln>
             <a:noFill/>
@@ -6576,7 +6576,7 @@
             <a:r>
               <a:rPr sz="1200" b="1">
                 <a:solidFill>
-                  <a:srgbClr val="0F172A"/>
+                  <a:srgbClr val="1C1917"/>
                 </a:solidFill>
                 <a:latin typeface="Microsoft JhengHei"/>
               </a:rPr>
@@ -6615,7 +6615,7 @@
             <a:r>
               <a:rPr sz="1800" b="1">
                 <a:solidFill>
-                  <a:srgbClr val="FFFFFF"/>
+                  <a:srgbClr val="FAFAF7"/>
                 </a:solidFill>
                 <a:latin typeface="Microsoft JhengHei"/>
               </a:rPr>
@@ -6654,7 +6654,7 @@
             <a:r>
               <a:rPr sz="1600" b="0">
                 <a:solidFill>
-                  <a:srgbClr val="64748B"/>
+                  <a:srgbClr val="78716C"/>
                 </a:solidFill>
                 <a:latin typeface="Microsoft JhengHei"/>
               </a:rPr>
@@ -6693,7 +6693,7 @@
             <a:r>
               <a:rPr sz="1600" b="0">
                 <a:solidFill>
-                  <a:srgbClr val="64748B"/>
+                  <a:srgbClr val="78716C"/>
                 </a:solidFill>
                 <a:latin typeface="Microsoft JhengHei"/>
               </a:rPr>
@@ -6732,7 +6732,7 @@
             <a:r>
               <a:rPr sz="1600" b="0">
                 <a:solidFill>
-                  <a:srgbClr val="64748B"/>
+                  <a:srgbClr val="78716C"/>
                 </a:solidFill>
                 <a:latin typeface="Microsoft JhengHei"/>
               </a:rPr>
@@ -6771,7 +6771,7 @@
             <a:r>
               <a:rPr sz="1600" b="0">
                 <a:solidFill>
-                  <a:srgbClr val="64748B"/>
+                  <a:srgbClr val="78716C"/>
                 </a:solidFill>
                 <a:latin typeface="Microsoft JhengHei"/>
               </a:rPr>
@@ -6810,7 +6810,7 @@
             <a:r>
               <a:rPr sz="1600" b="0">
                 <a:solidFill>
-                  <a:srgbClr val="64748B"/>
+                  <a:srgbClr val="78716C"/>
                 </a:solidFill>
                 <a:latin typeface="Microsoft JhengHei"/>
               </a:rPr>
@@ -6834,7 +6834,7 @@
             <a:avLst/>
           </a:prstGeom>
           <a:solidFill>
-            <a:srgbClr val="E2E8F0"/>
+            <a:srgbClr val="E7E5E0"/>
           </a:solidFill>
           <a:ln>
             <a:noFill/>
@@ -6892,7 +6892,7 @@
             <a:r>
               <a:rPr sz="1200" b="1">
                 <a:solidFill>
-                  <a:srgbClr val="0F172A"/>
+                  <a:srgbClr val="1C1917"/>
                 </a:solidFill>
                 <a:latin typeface="Microsoft JhengHei"/>
               </a:rPr>
@@ -6931,7 +6931,7 @@
             <a:r>
               <a:rPr sz="1800" b="1">
                 <a:solidFill>
-                  <a:srgbClr val="FFFFFF"/>
+                  <a:srgbClr val="FAFAF7"/>
                 </a:solidFill>
                 <a:latin typeface="Microsoft JhengHei"/>
               </a:rPr>
@@ -6970,7 +6970,7 @@
             <a:r>
               <a:rPr sz="1600" b="0">
                 <a:solidFill>
-                  <a:srgbClr val="64748B"/>
+                  <a:srgbClr val="78716C"/>
                 </a:solidFill>
                 <a:latin typeface="Microsoft JhengHei"/>
               </a:rPr>
@@ -7009,7 +7009,7 @@
             <a:r>
               <a:rPr sz="1600" b="0">
                 <a:solidFill>
-                  <a:srgbClr val="64748B"/>
+                  <a:srgbClr val="78716C"/>
                 </a:solidFill>
                 <a:latin typeface="Microsoft JhengHei"/>
               </a:rPr>
@@ -7048,7 +7048,7 @@
             <a:r>
               <a:rPr sz="1600" b="0">
                 <a:solidFill>
-                  <a:srgbClr val="64748B"/>
+                  <a:srgbClr val="78716C"/>
                 </a:solidFill>
                 <a:latin typeface="Microsoft JhengHei"/>
               </a:rPr>
@@ -7087,7 +7087,7 @@
             <a:r>
               <a:rPr sz="1600" b="0">
                 <a:solidFill>
-                  <a:srgbClr val="64748B"/>
+                  <a:srgbClr val="78716C"/>
                 </a:solidFill>
                 <a:latin typeface="Microsoft JhengHei"/>
               </a:rPr>
@@ -7126,7 +7126,7 @@
             <a:r>
               <a:rPr sz="1600" b="0">
                 <a:solidFill>
-                  <a:srgbClr val="64748B"/>
+                  <a:srgbClr val="78716C"/>
                 </a:solidFill>
                 <a:latin typeface="Microsoft JhengHei"/>
               </a:rPr>
@@ -7150,7 +7150,7 @@
             <a:avLst/>
           </a:prstGeom>
           <a:solidFill>
-            <a:srgbClr val="E2E8F0"/>
+            <a:srgbClr val="E7E5E0"/>
           </a:solidFill>
           <a:ln>
             <a:noFill/>
@@ -7208,7 +7208,7 @@
             <a:r>
               <a:rPr sz="1200" b="1">
                 <a:solidFill>
-                  <a:srgbClr val="0F172A"/>
+                  <a:srgbClr val="1C1917"/>
                 </a:solidFill>
                 <a:latin typeface="Microsoft JhengHei"/>
               </a:rPr>
@@ -7247,7 +7247,7 @@
             <a:r>
               <a:rPr sz="1800" b="1">
                 <a:solidFill>
-                  <a:srgbClr val="FFFFFF"/>
+                  <a:srgbClr val="FAFAF7"/>
                 </a:solidFill>
                 <a:latin typeface="Microsoft JhengHei"/>
               </a:rPr>
@@ -7286,7 +7286,7 @@
             <a:r>
               <a:rPr sz="1600" b="0">
                 <a:solidFill>
-                  <a:srgbClr val="64748B"/>
+                  <a:srgbClr val="78716C"/>
                 </a:solidFill>
                 <a:latin typeface="Microsoft JhengHei"/>
               </a:rPr>
@@ -7325,7 +7325,7 @@
             <a:r>
               <a:rPr sz="1600" b="0">
                 <a:solidFill>
-                  <a:srgbClr val="64748B"/>
+                  <a:srgbClr val="78716C"/>
                 </a:solidFill>
                 <a:latin typeface="Microsoft JhengHei"/>
               </a:rPr>
@@ -7364,7 +7364,7 @@
             <a:r>
               <a:rPr sz="1600" b="0">
                 <a:solidFill>
-                  <a:srgbClr val="64748B"/>
+                  <a:srgbClr val="78716C"/>
                 </a:solidFill>
                 <a:latin typeface="Microsoft JhengHei"/>
               </a:rPr>
@@ -7403,7 +7403,7 @@
             <a:r>
               <a:rPr sz="1800" b="1">
                 <a:solidFill>
-                  <a:srgbClr val="059669"/>
+                  <a:srgbClr val="16A34A"/>
                 </a:solidFill>
                 <a:latin typeface="Microsoft JhengHei"/>
               </a:rPr>
@@ -7442,7 +7442,7 @@
             <a:r>
               <a:rPr sz="1600" b="0">
                 <a:solidFill>
-                  <a:srgbClr val="64748B"/>
+                  <a:srgbClr val="78716C"/>
                 </a:solidFill>
                 <a:latin typeface="Microsoft JhengHei"/>
               </a:rPr>
@@ -7466,7 +7466,7 @@
             <a:avLst/>
           </a:prstGeom>
           <a:solidFill>
-            <a:srgbClr val="E2E8F0"/>
+            <a:srgbClr val="E7E5E0"/>
           </a:solidFill>
           <a:ln>
             <a:noFill/>
@@ -7524,7 +7524,7 @@
             <a:r>
               <a:rPr sz="1200" b="1">
                 <a:solidFill>
-                  <a:srgbClr val="0F172A"/>
+                  <a:srgbClr val="1C1917"/>
                 </a:solidFill>
                 <a:latin typeface="Microsoft JhengHei"/>
               </a:rPr>
@@ -7563,7 +7563,7 @@
             <a:r>
               <a:rPr sz="1800" b="1">
                 <a:solidFill>
-                  <a:srgbClr val="FFFFFF"/>
+                  <a:srgbClr val="FAFAF7"/>
                 </a:solidFill>
                 <a:latin typeface="Microsoft JhengHei"/>
               </a:rPr>
@@ -7602,7 +7602,7 @@
             <a:r>
               <a:rPr sz="1600" b="0">
                 <a:solidFill>
-                  <a:srgbClr val="64748B"/>
+                  <a:srgbClr val="78716C"/>
                 </a:solidFill>
                 <a:latin typeface="Microsoft JhengHei"/>
               </a:rPr>
@@ -7641,7 +7641,7 @@
             <a:r>
               <a:rPr sz="1600" b="0">
                 <a:solidFill>
-                  <a:srgbClr val="64748B"/>
+                  <a:srgbClr val="78716C"/>
                 </a:solidFill>
                 <a:latin typeface="Microsoft JhengHei"/>
               </a:rPr>
@@ -7680,7 +7680,7 @@
             <a:r>
               <a:rPr sz="1600" b="0">
                 <a:solidFill>
-                  <a:srgbClr val="64748B"/>
+                  <a:srgbClr val="78716C"/>
                 </a:solidFill>
                 <a:latin typeface="Microsoft JhengHei"/>
               </a:rPr>
@@ -7719,7 +7719,7 @@
             <a:r>
               <a:rPr sz="1600" b="0">
                 <a:solidFill>
-                  <a:srgbClr val="64748B"/>
+                  <a:srgbClr val="78716C"/>
                 </a:solidFill>
                 <a:latin typeface="Microsoft JhengHei"/>
               </a:rPr>
@@ -7758,7 +7758,7 @@
             <a:r>
               <a:rPr sz="1600" b="0">
                 <a:solidFill>
-                  <a:srgbClr val="64748B"/>
+                  <a:srgbClr val="78716C"/>
                 </a:solidFill>
                 <a:latin typeface="Microsoft JhengHei"/>
               </a:rPr>
@@ -7782,7 +7782,7 @@
             <a:avLst/>
           </a:prstGeom>
           <a:solidFill>
-            <a:srgbClr val="E2E8F0"/>
+            <a:srgbClr val="E7E5E0"/>
           </a:solidFill>
           <a:ln>
             <a:noFill/>
@@ -7840,7 +7840,7 @@
             <a:r>
               <a:rPr sz="1200" b="1">
                 <a:solidFill>
-                  <a:srgbClr val="0F172A"/>
+                  <a:srgbClr val="1C1917"/>
                 </a:solidFill>
                 <a:latin typeface="Microsoft JhengHei"/>
               </a:rPr>
@@ -7879,7 +7879,7 @@
             <a:r>
               <a:rPr sz="1100" b="1">
                 <a:solidFill>
-                  <a:srgbClr val="FFFFFF"/>
+                  <a:srgbClr val="FAFAF7"/>
                 </a:solidFill>
                 <a:latin typeface="Microsoft JhengHei"/>
               </a:rPr>
@@ -7918,7 +7918,7 @@
             <a:r>
               <a:rPr sz="1100" b="0">
                 <a:solidFill>
-                  <a:srgbClr val="0F172A"/>
+                  <a:srgbClr val="1C1917"/>
                 </a:solidFill>
                 <a:latin typeface="Microsoft JhengHei"/>
               </a:rPr>
@@ -7957,7 +7957,7 @@
             <a:r>
               <a:rPr sz="1100" b="0">
                 <a:solidFill>
-                  <a:srgbClr val="0F172A"/>
+                  <a:srgbClr val="1C1917"/>
                 </a:solidFill>
                 <a:latin typeface="Microsoft JhengHei"/>
               </a:rPr>
@@ -7996,7 +7996,7 @@
             <a:r>
               <a:rPr sz="1100" b="0">
                 <a:solidFill>
-                  <a:srgbClr val="0F172A"/>
+                  <a:srgbClr val="1C1917"/>
                 </a:solidFill>
                 <a:latin typeface="Microsoft JhengHei"/>
               </a:rPr>
@@ -8035,7 +8035,7 @@
             <a:r>
               <a:rPr sz="1100" b="0">
                 <a:solidFill>
-                  <a:srgbClr val="0F172A"/>
+                  <a:srgbClr val="1C1917"/>
                 </a:solidFill>
                 <a:latin typeface="Microsoft JhengHei"/>
               </a:rPr>
@@ -8074,7 +8074,7 @@
             <a:r>
               <a:rPr sz="1100" b="1">
                 <a:solidFill>
-                  <a:srgbClr val="0F172A"/>
+                  <a:srgbClr val="1C1917"/>
                 </a:solidFill>
                 <a:latin typeface="Microsoft JhengHei"/>
               </a:rPr>
@@ -8098,7 +8098,7 @@
             <a:avLst/>
           </a:prstGeom>
           <a:solidFill>
-            <a:srgbClr val="E2E8F0"/>
+            <a:srgbClr val="E7E5E0"/>
           </a:solidFill>
           <a:ln>
             <a:noFill/>
@@ -8156,7 +8156,7 @@
             <a:r>
               <a:rPr sz="1200" b="1">
                 <a:solidFill>
-                  <a:srgbClr val="0F172A"/>
+                  <a:srgbClr val="1C1917"/>
                 </a:solidFill>
                 <a:latin typeface="Microsoft JhengHei"/>
               </a:rPr>
@@ -8195,7 +8195,7 @@
             <a:r>
               <a:rPr sz="1100" b="1">
                 <a:solidFill>
-                  <a:srgbClr val="FFFFFF"/>
+                  <a:srgbClr val="FAFAF7"/>
                 </a:solidFill>
                 <a:latin typeface="Microsoft JhengHei"/>
               </a:rPr>
@@ -8234,7 +8234,7 @@
             <a:r>
               <a:rPr sz="1100" b="0">
                 <a:solidFill>
-                  <a:srgbClr val="0F172A"/>
+                  <a:srgbClr val="1C1917"/>
                 </a:solidFill>
                 <a:latin typeface="Microsoft JhengHei"/>
               </a:rPr>
@@ -8273,7 +8273,7 @@
             <a:r>
               <a:rPr sz="1100" b="0">
                 <a:solidFill>
-                  <a:srgbClr val="0F172A"/>
+                  <a:srgbClr val="1C1917"/>
                 </a:solidFill>
                 <a:latin typeface="Microsoft JhengHei"/>
               </a:rPr>
@@ -8312,7 +8312,7 @@
             <a:r>
               <a:rPr sz="1100" b="1">
                 <a:solidFill>
-                  <a:srgbClr val="0F172A"/>
+                  <a:srgbClr val="1C1917"/>
                 </a:solidFill>
                 <a:latin typeface="Microsoft JhengHei"/>
               </a:rPr>
@@ -8351,7 +8351,7 @@
             <a:r>
               <a:rPr sz="1100" b="0">
                 <a:solidFill>
-                  <a:srgbClr val="0F172A"/>
+                  <a:srgbClr val="1C1917"/>
                 </a:solidFill>
                 <a:latin typeface="Microsoft JhengHei"/>
               </a:rPr>
@@ -8390,7 +8390,7 @@
             <a:r>
               <a:rPr sz="1100" b="1">
                 <a:solidFill>
-                  <a:srgbClr val="0F172A"/>
+                  <a:srgbClr val="1C1917"/>
                 </a:solidFill>
                 <a:latin typeface="Microsoft JhengHei"/>
               </a:rPr>
@@ -8429,7 +8429,7 @@
             <a:r>
               <a:rPr sz="1000" b="0">
                 <a:solidFill>
-                  <a:srgbClr val="64748B"/>
+                  <a:srgbClr val="78716C"/>
                 </a:solidFill>
                 <a:latin typeface="Microsoft JhengHei"/>
               </a:rPr>
@@ -8468,7 +8468,7 @@
             <a:r>
               <a:rPr sz="1100" b="1">
                 <a:solidFill>
-                  <a:srgbClr val="0F172A"/>
+                  <a:srgbClr val="1C1917"/>
                 </a:solidFill>
                 <a:latin typeface="Microsoft JhengHei"/>
               </a:rPr>
@@ -8507,7 +8507,7 @@
             <a:r>
               <a:rPr sz="900" b="0">
                 <a:solidFill>
-                  <a:srgbClr val="64748B"/>
+                  <a:srgbClr val="78716C"/>
                 </a:solidFill>
                 <a:latin typeface="Microsoft JhengHei"/>
               </a:rPr>
@@ -8546,7 +8546,7 @@
             <a:r>
               <a:rPr sz="900" b="0">
                 <a:solidFill>
-                  <a:srgbClr val="64748B"/>
+                  <a:srgbClr val="78716C"/>
                 </a:solidFill>
                 <a:latin typeface="Microsoft JhengHei"/>
               </a:rPr>
@@ -8588,7 +8588,7 @@
             <a:avLst/>
           </a:prstGeom>
           <a:solidFill>
-            <a:srgbClr val="FFFFFF"/>
+            <a:srgbClr val="FAFAF7"/>
           </a:solidFill>
           <a:ln>
             <a:noFill/>
@@ -8631,7 +8631,7 @@
             <a:avLst/>
           </a:prstGeom>
           <a:solidFill>
-            <a:srgbClr val="E2E8F0"/>
+            <a:srgbClr val="E7E5E0"/>
           </a:solidFill>
           <a:ln>
             <a:noFill/>
@@ -8689,7 +8689,7 @@
             <a:r>
               <a:rPr sz="4400" b="1">
                 <a:solidFill>
-                  <a:srgbClr val="0F172A"/>
+                  <a:srgbClr val="1C1917"/>
                 </a:solidFill>
                 <a:latin typeface="Microsoft JhengHei"/>
               </a:rPr>
@@ -8728,7 +8728,7 @@
             <a:r>
               <a:rPr sz="1800" b="0">
                 <a:solidFill>
-                  <a:srgbClr val="64748B"/>
+                  <a:srgbClr val="78716C"/>
                 </a:solidFill>
                 <a:latin typeface="Microsoft JhengHei"/>
               </a:rPr>
@@ -8756,7 +8756,7 @@
           <a:noFill/>
           <a:ln w="9525">
             <a:solidFill>
-              <a:srgbClr val="E2E8F0"/>
+              <a:srgbClr val="E7E5E0"/>
             </a:solidFill>
           </a:ln>
         </p:spPr>
@@ -8812,7 +8812,7 @@
             <a:r>
               <a:rPr sz="2200" b="1">
                 <a:solidFill>
-                  <a:srgbClr val="0F172A"/>
+                  <a:srgbClr val="D97706"/>
                 </a:solidFill>
                 <a:latin typeface="Microsoft JhengHei"/>
               </a:rPr>
@@ -8851,7 +8851,7 @@
             <a:r>
               <a:rPr sz="2200" b="1">
                 <a:solidFill>
-                  <a:srgbClr val="0F172A"/>
+                  <a:srgbClr val="1C1917"/>
                 </a:solidFill>
                 <a:latin typeface="Microsoft JhengHei"/>
               </a:rPr>
@@ -8876,7 +8876,7 @@
           </a:prstGeom>
           <a:ln w="25400">
             <a:solidFill>
-              <a:srgbClr val="0F172A"/>
+              <a:srgbClr val="D97706"/>
             </a:solidFill>
           </a:ln>
         </p:spPr>
@@ -8925,7 +8925,7 @@
             <a:r>
               <a:rPr sz="1200" b="0">
                 <a:solidFill>
-                  <a:srgbClr val="0F172A"/>
+                  <a:srgbClr val="1C1917"/>
                 </a:solidFill>
                 <a:latin typeface="Microsoft JhengHei"/>
               </a:rPr>
@@ -8941,7 +8941,7 @@
             <a:r>
               <a:rPr sz="1200" b="0">
                 <a:solidFill>
-                  <a:srgbClr val="0F172A"/>
+                  <a:srgbClr val="1C1917"/>
                 </a:solidFill>
                 <a:latin typeface="Microsoft JhengHei"/>
               </a:rPr>
@@ -8969,7 +8969,7 @@
           <a:noFill/>
           <a:ln w="9525">
             <a:solidFill>
-              <a:srgbClr val="E2E8F0"/>
+              <a:srgbClr val="E7E5E0"/>
             </a:solidFill>
           </a:ln>
         </p:spPr>
@@ -9025,7 +9025,7 @@
             <a:r>
               <a:rPr sz="2200" b="1">
                 <a:solidFill>
-                  <a:srgbClr val="0F172A"/>
+                  <a:srgbClr val="D97706"/>
                 </a:solidFill>
                 <a:latin typeface="Microsoft JhengHei"/>
               </a:rPr>
@@ -9064,7 +9064,7 @@
             <a:r>
               <a:rPr sz="2200" b="1">
                 <a:solidFill>
-                  <a:srgbClr val="0F172A"/>
+                  <a:srgbClr val="1C1917"/>
                 </a:solidFill>
                 <a:latin typeface="Microsoft JhengHei"/>
               </a:rPr>
@@ -9089,7 +9089,7 @@
           </a:prstGeom>
           <a:ln w="25400">
             <a:solidFill>
-              <a:srgbClr val="0F172A"/>
+              <a:srgbClr val="D97706"/>
             </a:solidFill>
           </a:ln>
         </p:spPr>
@@ -9138,7 +9138,7 @@
             <a:r>
               <a:rPr sz="1200" b="0">
                 <a:solidFill>
-                  <a:srgbClr val="0F172A"/>
+                  <a:srgbClr val="1C1917"/>
                 </a:solidFill>
                 <a:latin typeface="Microsoft JhengHei"/>
               </a:rPr>
@@ -9154,7 +9154,7 @@
             <a:r>
               <a:rPr sz="1200" b="0">
                 <a:solidFill>
-                  <a:srgbClr val="0F172A"/>
+                  <a:srgbClr val="1C1917"/>
                 </a:solidFill>
                 <a:latin typeface="Microsoft JhengHei"/>
               </a:rPr>
@@ -9182,7 +9182,7 @@
           <a:noFill/>
           <a:ln w="9525">
             <a:solidFill>
-              <a:srgbClr val="E2E8F0"/>
+              <a:srgbClr val="E7E5E0"/>
             </a:solidFill>
           </a:ln>
         </p:spPr>
@@ -9238,7 +9238,7 @@
             <a:r>
               <a:rPr sz="2200" b="1">
                 <a:solidFill>
-                  <a:srgbClr val="0F172A"/>
+                  <a:srgbClr val="D97706"/>
                 </a:solidFill>
                 <a:latin typeface="Microsoft JhengHei"/>
               </a:rPr>
@@ -9277,7 +9277,7 @@
             <a:r>
               <a:rPr sz="2200" b="1">
                 <a:solidFill>
-                  <a:srgbClr val="0F172A"/>
+                  <a:srgbClr val="1C1917"/>
                 </a:solidFill>
                 <a:latin typeface="Microsoft JhengHei"/>
               </a:rPr>
@@ -9302,7 +9302,7 @@
           </a:prstGeom>
           <a:ln w="25400">
             <a:solidFill>
-              <a:srgbClr val="0F172A"/>
+              <a:srgbClr val="D97706"/>
             </a:solidFill>
           </a:ln>
         </p:spPr>
@@ -9351,7 +9351,7 @@
             <a:r>
               <a:rPr sz="1200" b="0">
                 <a:solidFill>
-                  <a:srgbClr val="0F172A"/>
+                  <a:srgbClr val="1C1917"/>
                 </a:solidFill>
                 <a:latin typeface="Microsoft JhengHei"/>
               </a:rPr>
@@ -9367,7 +9367,7 @@
             <a:r>
               <a:rPr sz="1200" b="0">
                 <a:solidFill>
-                  <a:srgbClr val="0F172A"/>
+                  <a:srgbClr val="1C1917"/>
                 </a:solidFill>
                 <a:latin typeface="Microsoft JhengHei"/>
               </a:rPr>
@@ -9395,7 +9395,7 @@
           <a:noFill/>
           <a:ln w="9525">
             <a:solidFill>
-              <a:srgbClr val="E2E8F0"/>
+              <a:srgbClr val="E7E5E0"/>
             </a:solidFill>
           </a:ln>
         </p:spPr>
@@ -9451,7 +9451,7 @@
             <a:r>
               <a:rPr sz="2200" b="1">
                 <a:solidFill>
-                  <a:srgbClr val="0F172A"/>
+                  <a:srgbClr val="D97706"/>
                 </a:solidFill>
                 <a:latin typeface="Microsoft JhengHei"/>
               </a:rPr>
@@ -9490,7 +9490,7 @@
             <a:r>
               <a:rPr sz="2200" b="1">
                 <a:solidFill>
-                  <a:srgbClr val="0F172A"/>
+                  <a:srgbClr val="1C1917"/>
                 </a:solidFill>
                 <a:latin typeface="Microsoft JhengHei"/>
               </a:rPr>
@@ -9515,7 +9515,7 @@
           </a:prstGeom>
           <a:ln w="25400">
             <a:solidFill>
-              <a:srgbClr val="0F172A"/>
+              <a:srgbClr val="D97706"/>
             </a:solidFill>
           </a:ln>
         </p:spPr>
@@ -9564,7 +9564,7 @@
             <a:r>
               <a:rPr sz="1200" b="0">
                 <a:solidFill>
-                  <a:srgbClr val="0F172A"/>
+                  <a:srgbClr val="1C1917"/>
                 </a:solidFill>
                 <a:latin typeface="Microsoft JhengHei"/>
               </a:rPr>
@@ -9580,7 +9580,7 @@
             <a:r>
               <a:rPr sz="1200" b="0">
                 <a:solidFill>
-                  <a:srgbClr val="0F172A"/>
+                  <a:srgbClr val="1C1917"/>
                 </a:solidFill>
                 <a:latin typeface="Microsoft JhengHei"/>
               </a:rPr>
@@ -9619,7 +9619,7 @@
             <a:r>
               <a:rPr sz="900" b="0">
                 <a:solidFill>
-                  <a:srgbClr val="64748B"/>
+                  <a:srgbClr val="78716C"/>
                 </a:solidFill>
                 <a:latin typeface="Microsoft JhengHei"/>
               </a:rPr>
@@ -9658,7 +9658,7 @@
             <a:r>
               <a:rPr sz="900" b="0">
                 <a:solidFill>
-                  <a:srgbClr val="64748B"/>
+                  <a:srgbClr val="78716C"/>
                 </a:solidFill>
                 <a:latin typeface="Microsoft JhengHei"/>
               </a:rPr>
@@ -9700,7 +9700,7 @@
             <a:avLst/>
           </a:prstGeom>
           <a:solidFill>
-            <a:srgbClr val="FFFFFF"/>
+            <a:srgbClr val="FAFAF7"/>
           </a:solidFill>
           <a:ln>
             <a:noFill/>
@@ -9743,7 +9743,7 @@
             <a:avLst/>
           </a:prstGeom>
           <a:solidFill>
-            <a:srgbClr val="E2E8F0"/>
+            <a:srgbClr val="E7E5E0"/>
           </a:solidFill>
           <a:ln>
             <a:noFill/>
@@ -9801,7 +9801,7 @@
             <a:r>
               <a:rPr sz="4400" b="1">
                 <a:solidFill>
-                  <a:srgbClr val="0F172A"/>
+                  <a:srgbClr val="1C1917"/>
                 </a:solidFill>
                 <a:latin typeface="Microsoft JhengHei"/>
               </a:rPr>
@@ -9840,7 +9840,7 @@
             <a:r>
               <a:rPr sz="1800" b="0">
                 <a:solidFill>
-                  <a:srgbClr val="64748B"/>
+                  <a:srgbClr val="78716C"/>
                 </a:solidFill>
                 <a:latin typeface="Microsoft JhengHei"/>
               </a:rPr>
@@ -9868,7 +9868,7 @@
           <a:noFill/>
           <a:ln w="9525">
             <a:solidFill>
-              <a:srgbClr val="E2E8F0"/>
+              <a:srgbClr val="E7E5E0"/>
             </a:solidFill>
           </a:ln>
         </p:spPr>
@@ -9924,7 +9924,7 @@
             <a:r>
               <a:rPr sz="5600" b="1">
                 <a:solidFill>
-                  <a:srgbClr val="0F172A"/>
+                  <a:srgbClr val="D97706"/>
                 </a:solidFill>
                 <a:latin typeface="Microsoft JhengHei"/>
               </a:rPr>
@@ -9963,7 +9963,7 @@
             <a:r>
               <a:rPr sz="1800" b="1">
                 <a:solidFill>
-                  <a:srgbClr val="0F172A"/>
+                  <a:srgbClr val="1C1917"/>
                 </a:solidFill>
                 <a:latin typeface="Microsoft JhengHei"/>
               </a:rPr>
@@ -10002,7 +10002,7 @@
             <a:r>
               <a:rPr sz="1200" b="0">
                 <a:solidFill>
-                  <a:srgbClr val="64748B"/>
+                  <a:srgbClr val="78716C"/>
                 </a:solidFill>
                 <a:latin typeface="Microsoft JhengHei"/>
               </a:rPr>
@@ -10030,7 +10030,7 @@
           <a:noFill/>
           <a:ln w="9525">
             <a:solidFill>
-              <a:srgbClr val="E2E8F0"/>
+              <a:srgbClr val="E7E5E0"/>
             </a:solidFill>
           </a:ln>
         </p:spPr>
@@ -10086,7 +10086,7 @@
             <a:r>
               <a:rPr sz="5600" b="1">
                 <a:solidFill>
-                  <a:srgbClr val="0F172A"/>
+                  <a:srgbClr val="D97706"/>
                 </a:solidFill>
                 <a:latin typeface="Microsoft JhengHei"/>
               </a:rPr>
@@ -10125,7 +10125,7 @@
             <a:r>
               <a:rPr sz="1800" b="1">
                 <a:solidFill>
-                  <a:srgbClr val="0F172A"/>
+                  <a:srgbClr val="1C1917"/>
                 </a:solidFill>
                 <a:latin typeface="Microsoft JhengHei"/>
               </a:rPr>
@@ -10164,7 +10164,7 @@
             <a:r>
               <a:rPr sz="1200" b="0">
                 <a:solidFill>
-                  <a:srgbClr val="64748B"/>
+                  <a:srgbClr val="78716C"/>
                 </a:solidFill>
                 <a:latin typeface="Microsoft JhengHei"/>
               </a:rPr>
@@ -10192,7 +10192,7 @@
           <a:noFill/>
           <a:ln w="9525">
             <a:solidFill>
-              <a:srgbClr val="E2E8F0"/>
+              <a:srgbClr val="E7E5E0"/>
             </a:solidFill>
           </a:ln>
         </p:spPr>
@@ -10248,7 +10248,7 @@
             <a:r>
               <a:rPr sz="5600" b="1">
                 <a:solidFill>
-                  <a:srgbClr val="0F172A"/>
+                  <a:srgbClr val="D97706"/>
                 </a:solidFill>
                 <a:latin typeface="Microsoft JhengHei"/>
               </a:rPr>
@@ -10287,7 +10287,7 @@
             <a:r>
               <a:rPr sz="1800" b="1">
                 <a:solidFill>
-                  <a:srgbClr val="0F172A"/>
+                  <a:srgbClr val="1C1917"/>
                 </a:solidFill>
                 <a:latin typeface="Microsoft JhengHei"/>
               </a:rPr>
@@ -10326,7 +10326,7 @@
             <a:r>
               <a:rPr sz="1200" b="0">
                 <a:solidFill>
-                  <a:srgbClr val="64748B"/>
+                  <a:srgbClr val="78716C"/>
                 </a:solidFill>
                 <a:latin typeface="Microsoft JhengHei"/>
               </a:rPr>
@@ -10354,7 +10354,7 @@
           <a:noFill/>
           <a:ln w="9525">
             <a:solidFill>
-              <a:srgbClr val="E2E8F0"/>
+              <a:srgbClr val="E7E5E0"/>
             </a:solidFill>
           </a:ln>
         </p:spPr>
@@ -10410,7 +10410,7 @@
             <a:r>
               <a:rPr sz="5600" b="1">
                 <a:solidFill>
-                  <a:srgbClr val="0F172A"/>
+                  <a:srgbClr val="D97706"/>
                 </a:solidFill>
                 <a:latin typeface="Microsoft JhengHei"/>
               </a:rPr>
@@ -10449,7 +10449,7 @@
             <a:r>
               <a:rPr sz="1800" b="1">
                 <a:solidFill>
-                  <a:srgbClr val="0F172A"/>
+                  <a:srgbClr val="1C1917"/>
                 </a:solidFill>
                 <a:latin typeface="Microsoft JhengHei"/>
               </a:rPr>
@@ -10488,7 +10488,7 @@
             <a:r>
               <a:rPr sz="1200" b="0">
                 <a:solidFill>
-                  <a:srgbClr val="64748B"/>
+                  <a:srgbClr val="78716C"/>
                 </a:solidFill>
                 <a:latin typeface="Microsoft JhengHei"/>
               </a:rPr>
@@ -10527,7 +10527,7 @@
             <a:r>
               <a:rPr sz="900" b="0">
                 <a:solidFill>
-                  <a:srgbClr val="64748B"/>
+                  <a:srgbClr val="78716C"/>
                 </a:solidFill>
                 <a:latin typeface="Microsoft JhengHei"/>
               </a:rPr>
@@ -10566,7 +10566,7 @@
             <a:r>
               <a:rPr sz="900" b="0">
                 <a:solidFill>
-                  <a:srgbClr val="64748B"/>
+                  <a:srgbClr val="78716C"/>
                 </a:solidFill>
                 <a:latin typeface="Microsoft JhengHei"/>
               </a:rPr>
@@ -10608,7 +10608,7 @@
             <a:avLst/>
           </a:prstGeom>
           <a:solidFill>
-            <a:srgbClr val="FFFFFF"/>
+            <a:srgbClr val="FAFAF7"/>
           </a:solidFill>
           <a:ln>
             <a:noFill/>
@@ -10651,7 +10651,7 @@
             <a:avLst/>
           </a:prstGeom>
           <a:solidFill>
-            <a:srgbClr val="E2E8F0"/>
+            <a:srgbClr val="E7E5E0"/>
           </a:solidFill>
           <a:ln>
             <a:noFill/>
@@ -10709,7 +10709,7 @@
             <a:r>
               <a:rPr sz="4400" b="1">
                 <a:solidFill>
-                  <a:srgbClr val="0F172A"/>
+                  <a:srgbClr val="1C1917"/>
                 </a:solidFill>
                 <a:latin typeface="Microsoft JhengHei"/>
               </a:rPr>
@@ -10748,7 +10748,7 @@
             <a:r>
               <a:rPr sz="1800" b="0">
                 <a:solidFill>
-                  <a:srgbClr val="64748B"/>
+                  <a:srgbClr val="78716C"/>
                 </a:solidFill>
                 <a:latin typeface="Microsoft JhengHei"/>
               </a:rPr>
@@ -10776,7 +10776,7 @@
           <a:noFill/>
           <a:ln w="9525">
             <a:solidFill>
-              <a:srgbClr val="E2E8F0"/>
+              <a:srgbClr val="E7E5E0"/>
             </a:solidFill>
           </a:ln>
         </p:spPr>
@@ -10832,7 +10832,7 @@
             <a:r>
               <a:rPr sz="3200" b="1">
                 <a:solidFill>
-                  <a:srgbClr val="E11448"/>
+                  <a:srgbClr val="DC2626"/>
                 </a:solidFill>
                 <a:latin typeface="Microsoft JhengHei"/>
               </a:rPr>
@@ -10871,7 +10871,7 @@
             <a:r>
               <a:rPr sz="1600" b="1">
                 <a:solidFill>
-                  <a:srgbClr val="0F172A"/>
+                  <a:srgbClr val="1C1917"/>
                 </a:solidFill>
                 <a:latin typeface="Microsoft JhengHei"/>
               </a:rPr>
@@ -10910,7 +10910,7 @@
             <a:r>
               <a:rPr sz="1200" b="0">
                 <a:solidFill>
-                  <a:srgbClr val="64748B"/>
+                  <a:srgbClr val="78716C"/>
                 </a:solidFill>
                 <a:latin typeface="Microsoft JhengHei"/>
               </a:rPr>
@@ -10938,7 +10938,7 @@
           <a:noFill/>
           <a:ln w="9525">
             <a:solidFill>
-              <a:srgbClr val="E2E8F0"/>
+              <a:srgbClr val="E7E5E0"/>
             </a:solidFill>
           </a:ln>
         </p:spPr>
@@ -10994,7 +10994,7 @@
             <a:r>
               <a:rPr sz="3200" b="1">
                 <a:solidFill>
-                  <a:srgbClr val="E11448"/>
+                  <a:srgbClr val="DC2626"/>
                 </a:solidFill>
                 <a:latin typeface="Microsoft JhengHei"/>
               </a:rPr>
@@ -11033,7 +11033,7 @@
             <a:r>
               <a:rPr sz="1600" b="1">
                 <a:solidFill>
-                  <a:srgbClr val="0F172A"/>
+                  <a:srgbClr val="1C1917"/>
                 </a:solidFill>
                 <a:latin typeface="Microsoft JhengHei"/>
               </a:rPr>
@@ -11072,7 +11072,7 @@
             <a:r>
               <a:rPr sz="1200" b="0">
                 <a:solidFill>
-                  <a:srgbClr val="64748B"/>
+                  <a:srgbClr val="78716C"/>
                 </a:solidFill>
                 <a:latin typeface="Microsoft JhengHei"/>
               </a:rPr>
@@ -11088,7 +11088,7 @@
             <a:r>
               <a:rPr sz="1200" b="0">
                 <a:solidFill>
-                  <a:srgbClr val="64748B"/>
+                  <a:srgbClr val="78716C"/>
                 </a:solidFill>
                 <a:latin typeface="Microsoft JhengHei"/>
               </a:rPr>
@@ -11116,7 +11116,7 @@
           <a:noFill/>
           <a:ln w="9525">
             <a:solidFill>
-              <a:srgbClr val="E2E8F0"/>
+              <a:srgbClr val="E7E5E0"/>
             </a:solidFill>
           </a:ln>
         </p:spPr>
@@ -11172,7 +11172,7 @@
             <a:r>
               <a:rPr sz="3200" b="1">
                 <a:solidFill>
-                  <a:srgbClr val="E11448"/>
+                  <a:srgbClr val="DC2626"/>
                 </a:solidFill>
                 <a:latin typeface="Microsoft JhengHei"/>
               </a:rPr>
@@ -11211,7 +11211,7 @@
             <a:r>
               <a:rPr sz="1600" b="1">
                 <a:solidFill>
-                  <a:srgbClr val="0F172A"/>
+                  <a:srgbClr val="1C1917"/>
                 </a:solidFill>
                 <a:latin typeface="Microsoft JhengHei"/>
               </a:rPr>
@@ -11250,7 +11250,7 @@
             <a:r>
               <a:rPr sz="1200" b="0">
                 <a:solidFill>
-                  <a:srgbClr val="64748B"/>
+                  <a:srgbClr val="78716C"/>
                 </a:solidFill>
                 <a:latin typeface="Microsoft JhengHei"/>
               </a:rPr>
@@ -11278,7 +11278,7 @@
           <a:noFill/>
           <a:ln w="9525">
             <a:solidFill>
-              <a:srgbClr val="E2E8F0"/>
+              <a:srgbClr val="E7E5E0"/>
             </a:solidFill>
           </a:ln>
         </p:spPr>
@@ -11334,7 +11334,7 @@
             <a:r>
               <a:rPr sz="3200" b="1">
                 <a:solidFill>
-                  <a:srgbClr val="E11448"/>
+                  <a:srgbClr val="DC2626"/>
                 </a:solidFill>
                 <a:latin typeface="Microsoft JhengHei"/>
               </a:rPr>
@@ -11373,7 +11373,7 @@
             <a:r>
               <a:rPr sz="1600" b="1">
                 <a:solidFill>
-                  <a:srgbClr val="0F172A"/>
+                  <a:srgbClr val="1C1917"/>
                 </a:solidFill>
                 <a:latin typeface="Microsoft JhengHei"/>
               </a:rPr>
@@ -11412,7 +11412,7 @@
             <a:r>
               <a:rPr sz="1200" b="0">
                 <a:solidFill>
-                  <a:srgbClr val="64748B"/>
+                  <a:srgbClr val="78716C"/>
                 </a:solidFill>
                 <a:latin typeface="Microsoft JhengHei"/>
               </a:rPr>
@@ -11451,7 +11451,7 @@
             <a:r>
               <a:rPr sz="900" b="0">
                 <a:solidFill>
-                  <a:srgbClr val="64748B"/>
+                  <a:srgbClr val="78716C"/>
                 </a:solidFill>
                 <a:latin typeface="Microsoft JhengHei"/>
               </a:rPr>
@@ -11490,7 +11490,7 @@
             <a:r>
               <a:rPr sz="900" b="0">
                 <a:solidFill>
-                  <a:srgbClr val="64748B"/>
+                  <a:srgbClr val="78716C"/>
                 </a:solidFill>
                 <a:latin typeface="Microsoft JhengHei"/>
               </a:rPr>
@@ -11532,7 +11532,7 @@
             <a:avLst/>
           </a:prstGeom>
           <a:solidFill>
-            <a:srgbClr val="FFFFFF"/>
+            <a:srgbClr val="FAFAF7"/>
           </a:solidFill>
           <a:ln>
             <a:noFill/>
@@ -11575,7 +11575,7 @@
             <a:avLst/>
           </a:prstGeom>
           <a:solidFill>
-            <a:srgbClr val="E2E8F0"/>
+            <a:srgbClr val="E7E5E0"/>
           </a:solidFill>
           <a:ln>
             <a:noFill/>
@@ -11633,7 +11633,7 @@
             <a:r>
               <a:rPr sz="4800" b="1">
                 <a:solidFill>
-                  <a:srgbClr val="0F172A"/>
+                  <a:srgbClr val="1C1917"/>
                 </a:solidFill>
                 <a:latin typeface="Microsoft JhengHei"/>
               </a:rPr>
@@ -11672,7 +11672,7 @@
             <a:r>
               <a:rPr sz="2200" b="0">
                 <a:solidFill>
-                  <a:srgbClr val="64748B"/>
+                  <a:srgbClr val="78716C"/>
                 </a:solidFill>
                 <a:latin typeface="Microsoft JhengHei"/>
               </a:rPr>
@@ -11688,7 +11688,7 @@
             <a:r>
               <a:rPr sz="2200" b="0">
                 <a:solidFill>
-                  <a:srgbClr val="64748B"/>
+                  <a:srgbClr val="78716C"/>
                 </a:solidFill>
                 <a:latin typeface="Microsoft JhengHei"/>
               </a:rPr>
@@ -11704,7 +11704,7 @@
             <a:r>
               <a:rPr sz="2200" b="0">
                 <a:solidFill>
-                  <a:srgbClr val="64748B"/>
+                  <a:srgbClr val="78716C"/>
                 </a:solidFill>
                 <a:latin typeface="Microsoft JhengHei"/>
               </a:rPr>
@@ -11720,7 +11720,7 @@
             <a:r>
               <a:rPr sz="2200" b="0">
                 <a:solidFill>
-                  <a:srgbClr val="64748B"/>
+                  <a:srgbClr val="78716C"/>
                 </a:solidFill>
                 <a:latin typeface="Microsoft JhengHei"/>
               </a:rPr>
@@ -11746,7 +11746,7 @@
             </a:avLst>
           </a:prstGeom>
           <a:solidFill>
-            <a:srgbClr val="0F172A"/>
+            <a:srgbClr val="1C1917"/>
           </a:solidFill>
           <a:ln>
             <a:noFill/>
@@ -11774,7 +11774,7 @@
             <a:r>
               <a:rPr sz="2200" b="1">
                 <a:solidFill>
-                  <a:srgbClr val="0F172A"/>
+                  <a:srgbClr val="1C1917"/>
                 </a:solidFill>
                 <a:latin typeface="Microsoft JhengHei"/>
               </a:rPr>
@@ -11816,7 +11816,7 @@
             <a:avLst/>
           </a:prstGeom>
           <a:solidFill>
-            <a:srgbClr val="FFFFFF"/>
+            <a:srgbClr val="FAFAF7"/>
           </a:solidFill>
           <a:ln>
             <a:noFill/>
@@ -11859,7 +11859,7 @@
             <a:avLst/>
           </a:prstGeom>
           <a:solidFill>
-            <a:srgbClr val="E2E8F0"/>
+            <a:srgbClr val="E7E5E0"/>
           </a:solidFill>
           <a:ln>
             <a:noFill/>
@@ -11917,7 +11917,7 @@
             <a:r>
               <a:rPr sz="4400" b="1">
                 <a:solidFill>
-                  <a:srgbClr val="0F172A"/>
+                  <a:srgbClr val="1C1917"/>
                 </a:solidFill>
                 <a:latin typeface="Microsoft JhengHei"/>
               </a:rPr>
@@ -11945,7 +11945,7 @@
           <a:noFill/>
           <a:ln w="9525">
             <a:solidFill>
-              <a:srgbClr val="E2E8F0"/>
+              <a:srgbClr val="E7E5E0"/>
             </a:solidFill>
           </a:ln>
         </p:spPr>
@@ -12001,7 +12001,7 @@
             <a:r>
               <a:rPr sz="3600" b="1">
                 <a:solidFill>
-                  <a:srgbClr val="0F172A"/>
+                  <a:srgbClr val="D97706"/>
                 </a:solidFill>
                 <a:latin typeface="Microsoft JhengHei"/>
               </a:rPr>
@@ -12040,7 +12040,7 @@
             <a:r>
               <a:rPr sz="2800" b="1">
                 <a:solidFill>
-                  <a:srgbClr val="0F172A"/>
+                  <a:srgbClr val="1C1917"/>
                 </a:solidFill>
                 <a:latin typeface="Microsoft JhengHei"/>
               </a:rPr>
@@ -12065,7 +12065,7 @@
           </a:prstGeom>
           <a:ln w="25400">
             <a:solidFill>
-              <a:srgbClr val="0F172A"/>
+              <a:srgbClr val="D97706"/>
             </a:solidFill>
           </a:ln>
         </p:spPr>
@@ -12114,7 +12114,7 @@
             <a:r>
               <a:rPr sz="1500" b="0">
                 <a:solidFill>
-                  <a:srgbClr val="64748B"/>
+                  <a:srgbClr val="78716C"/>
                 </a:solidFill>
                 <a:latin typeface="Microsoft JhengHei"/>
               </a:rPr>
@@ -12153,7 +12153,7 @@
             <a:r>
               <a:rPr sz="1500" b="0">
                 <a:solidFill>
-                  <a:srgbClr val="64748B"/>
+                  <a:srgbClr val="78716C"/>
                 </a:solidFill>
                 <a:latin typeface="Microsoft JhengHei"/>
               </a:rPr>
@@ -12181,7 +12181,7 @@
           <a:noFill/>
           <a:ln w="9525">
             <a:solidFill>
-              <a:srgbClr val="E2E8F0"/>
+              <a:srgbClr val="E7E5E0"/>
             </a:solidFill>
           </a:ln>
         </p:spPr>
@@ -12237,7 +12237,7 @@
             <a:r>
               <a:rPr sz="3600" b="1">
                 <a:solidFill>
-                  <a:srgbClr val="0F172A"/>
+                  <a:srgbClr val="D97706"/>
                 </a:solidFill>
                 <a:latin typeface="Microsoft JhengHei"/>
               </a:rPr>
@@ -12276,7 +12276,7 @@
             <a:r>
               <a:rPr sz="2800" b="1">
                 <a:solidFill>
-                  <a:srgbClr val="0F172A"/>
+                  <a:srgbClr val="1C1917"/>
                 </a:solidFill>
                 <a:latin typeface="Microsoft JhengHei"/>
               </a:rPr>
@@ -12301,7 +12301,7 @@
           </a:prstGeom>
           <a:ln w="25400">
             <a:solidFill>
-              <a:srgbClr val="0F172A"/>
+              <a:srgbClr val="D97706"/>
             </a:solidFill>
           </a:ln>
         </p:spPr>
@@ -12350,7 +12350,7 @@
             <a:r>
               <a:rPr sz="1500" b="0">
                 <a:solidFill>
-                  <a:srgbClr val="64748B"/>
+                  <a:srgbClr val="78716C"/>
                 </a:solidFill>
                 <a:latin typeface="Microsoft JhengHei"/>
               </a:rPr>
@@ -12389,7 +12389,7 @@
             <a:r>
               <a:rPr sz="1500" b="0">
                 <a:solidFill>
-                  <a:srgbClr val="64748B"/>
+                  <a:srgbClr val="78716C"/>
                 </a:solidFill>
                 <a:latin typeface="Microsoft JhengHei"/>
               </a:rPr>
@@ -12417,7 +12417,7 @@
           <a:noFill/>
           <a:ln w="9525">
             <a:solidFill>
-              <a:srgbClr val="E2E8F0"/>
+              <a:srgbClr val="E7E5E0"/>
             </a:solidFill>
           </a:ln>
         </p:spPr>
@@ -12473,7 +12473,7 @@
             <a:r>
               <a:rPr sz="3600" b="1">
                 <a:solidFill>
-                  <a:srgbClr val="0F172A"/>
+                  <a:srgbClr val="D97706"/>
                 </a:solidFill>
                 <a:latin typeface="Microsoft JhengHei"/>
               </a:rPr>
@@ -12512,7 +12512,7 @@
             <a:r>
               <a:rPr sz="2800" b="1">
                 <a:solidFill>
-                  <a:srgbClr val="0F172A"/>
+                  <a:srgbClr val="1C1917"/>
                 </a:solidFill>
                 <a:latin typeface="Microsoft JhengHei"/>
               </a:rPr>
@@ -12537,7 +12537,7 @@
           </a:prstGeom>
           <a:ln w="25400">
             <a:solidFill>
-              <a:srgbClr val="0F172A"/>
+              <a:srgbClr val="D97706"/>
             </a:solidFill>
           </a:ln>
         </p:spPr>
@@ -12586,7 +12586,7 @@
             <a:r>
               <a:rPr sz="1500" b="0">
                 <a:solidFill>
-                  <a:srgbClr val="64748B"/>
+                  <a:srgbClr val="78716C"/>
                 </a:solidFill>
                 <a:latin typeface="Microsoft JhengHei"/>
               </a:rPr>
@@ -12625,7 +12625,7 @@
             <a:r>
               <a:rPr sz="1500" b="0">
                 <a:solidFill>
-                  <a:srgbClr val="64748B"/>
+                  <a:srgbClr val="78716C"/>
                 </a:solidFill>
                 <a:latin typeface="Microsoft JhengHei"/>
               </a:rPr>
@@ -12664,7 +12664,7 @@
             <a:r>
               <a:rPr sz="1500" b="0">
                 <a:solidFill>
-                  <a:srgbClr val="64748B"/>
+                  <a:srgbClr val="78716C"/>
                 </a:solidFill>
                 <a:latin typeface="Microsoft JhengHei"/>
               </a:rPr>
@@ -12703,7 +12703,7 @@
             <a:r>
               <a:rPr sz="900" b="0">
                 <a:solidFill>
-                  <a:srgbClr val="64748B"/>
+                  <a:srgbClr val="78716C"/>
                 </a:solidFill>
                 <a:latin typeface="Microsoft JhengHei"/>
               </a:rPr>
@@ -12742,7 +12742,7 @@
             <a:r>
               <a:rPr sz="900" b="0">
                 <a:solidFill>
-                  <a:srgbClr val="64748B"/>
+                  <a:srgbClr val="78716C"/>
                 </a:solidFill>
                 <a:latin typeface="Microsoft JhengHei"/>
               </a:rPr>
@@ -12784,7 +12784,7 @@
             <a:avLst/>
           </a:prstGeom>
           <a:solidFill>
-            <a:srgbClr val="FFFFFF"/>
+            <a:srgbClr val="FAFAF7"/>
           </a:solidFill>
           <a:ln>
             <a:noFill/>
@@ -12827,7 +12827,7 @@
             <a:avLst/>
           </a:prstGeom>
           <a:solidFill>
-            <a:srgbClr val="E2E8F0"/>
+            <a:srgbClr val="E7E5E0"/>
           </a:solidFill>
           <a:ln>
             <a:noFill/>
@@ -12885,7 +12885,7 @@
             <a:r>
               <a:rPr sz="4400" b="1">
                 <a:solidFill>
-                  <a:srgbClr val="0F172A"/>
+                  <a:srgbClr val="1C1917"/>
                 </a:solidFill>
                 <a:latin typeface="Microsoft JhengHei"/>
               </a:rPr>
@@ -12924,7 +12924,7 @@
             <a:r>
               <a:rPr sz="1800" b="0">
                 <a:solidFill>
-                  <a:srgbClr val="64748B"/>
+                  <a:srgbClr val="78716C"/>
                 </a:solidFill>
                 <a:latin typeface="Microsoft JhengHei"/>
               </a:rPr>
@@ -12952,7 +12952,7 @@
           <a:noFill/>
           <a:ln w="9525">
             <a:solidFill>
-              <a:srgbClr val="E2E8F0"/>
+              <a:srgbClr val="E7E5E0"/>
             </a:solidFill>
           </a:ln>
         </p:spPr>
@@ -13008,7 +13008,7 @@
             <a:r>
               <a:rPr sz="3600" b="1">
                 <a:solidFill>
-                  <a:srgbClr val="0F172A"/>
+                  <a:srgbClr val="D97706"/>
                 </a:solidFill>
                 <a:latin typeface="Microsoft JhengHei"/>
               </a:rPr>
@@ -13047,7 +13047,7 @@
             <a:r>
               <a:rPr sz="2400" b="1">
                 <a:solidFill>
-                  <a:srgbClr val="0F172A"/>
+                  <a:srgbClr val="1C1917"/>
                 </a:solidFill>
                 <a:latin typeface="Microsoft JhengHei"/>
               </a:rPr>
@@ -13086,7 +13086,7 @@
             <a:r>
               <a:rPr sz="1400" b="0">
                 <a:solidFill>
-                  <a:srgbClr val="64748B"/>
+                  <a:srgbClr val="78716C"/>
                 </a:solidFill>
                 <a:latin typeface="Microsoft JhengHei"/>
               </a:rPr>
@@ -13114,7 +13114,7 @@
           <a:noFill/>
           <a:ln w="9525">
             <a:solidFill>
-              <a:srgbClr val="E2E8F0"/>
+              <a:srgbClr val="E7E5E0"/>
             </a:solidFill>
           </a:ln>
         </p:spPr>
@@ -13170,7 +13170,7 @@
             <a:r>
               <a:rPr sz="3600" b="1">
                 <a:solidFill>
-                  <a:srgbClr val="0F172A"/>
+                  <a:srgbClr val="D97706"/>
                 </a:solidFill>
                 <a:latin typeface="Microsoft JhengHei"/>
               </a:rPr>
@@ -13209,7 +13209,7 @@
             <a:r>
               <a:rPr sz="2400" b="1">
                 <a:solidFill>
-                  <a:srgbClr val="0F172A"/>
+                  <a:srgbClr val="1C1917"/>
                 </a:solidFill>
                 <a:latin typeface="Microsoft JhengHei"/>
               </a:rPr>
@@ -13248,7 +13248,7 @@
             <a:r>
               <a:rPr sz="1400" b="0">
                 <a:solidFill>
-                  <a:srgbClr val="64748B"/>
+                  <a:srgbClr val="78716C"/>
                 </a:solidFill>
                 <a:latin typeface="Microsoft JhengHei"/>
               </a:rPr>
@@ -13276,7 +13276,7 @@
           <a:noFill/>
           <a:ln w="9525">
             <a:solidFill>
-              <a:srgbClr val="E2E8F0"/>
+              <a:srgbClr val="E7E5E0"/>
             </a:solidFill>
           </a:ln>
         </p:spPr>
@@ -13332,7 +13332,7 @@
             <a:r>
               <a:rPr sz="3600" b="1">
                 <a:solidFill>
-                  <a:srgbClr val="0F172A"/>
+                  <a:srgbClr val="D97706"/>
                 </a:solidFill>
                 <a:latin typeface="Microsoft JhengHei"/>
               </a:rPr>
@@ -13371,7 +13371,7 @@
             <a:r>
               <a:rPr sz="2400" b="1">
                 <a:solidFill>
-                  <a:srgbClr val="0F172A"/>
+                  <a:srgbClr val="1C1917"/>
                 </a:solidFill>
                 <a:latin typeface="Microsoft JhengHei"/>
               </a:rPr>
@@ -13410,7 +13410,7 @@
             <a:r>
               <a:rPr sz="1400" b="0">
                 <a:solidFill>
-                  <a:srgbClr val="64748B"/>
+                  <a:srgbClr val="78716C"/>
                 </a:solidFill>
                 <a:latin typeface="Microsoft JhengHei"/>
               </a:rPr>
@@ -13449,7 +13449,7 @@
             <a:r>
               <a:rPr sz="900" b="0">
                 <a:solidFill>
-                  <a:srgbClr val="64748B"/>
+                  <a:srgbClr val="78716C"/>
                 </a:solidFill>
                 <a:latin typeface="Microsoft JhengHei"/>
               </a:rPr>
@@ -13488,7 +13488,7 @@
             <a:r>
               <a:rPr sz="900" b="0">
                 <a:solidFill>
-                  <a:srgbClr val="64748B"/>
+                  <a:srgbClr val="78716C"/>
                 </a:solidFill>
                 <a:latin typeface="Microsoft JhengHei"/>
               </a:rPr>
@@ -13530,7 +13530,7 @@
             <a:avLst/>
           </a:prstGeom>
           <a:solidFill>
-            <a:srgbClr val="FFFFFF"/>
+            <a:srgbClr val="FAFAF7"/>
           </a:solidFill>
           <a:ln>
             <a:noFill/>
@@ -13573,7 +13573,7 @@
             <a:avLst/>
           </a:prstGeom>
           <a:solidFill>
-            <a:srgbClr val="E2E8F0"/>
+            <a:srgbClr val="E7E5E0"/>
           </a:solidFill>
           <a:ln>
             <a:noFill/>
@@ -13631,7 +13631,7 @@
             <a:r>
               <a:rPr sz="4400" b="1">
                 <a:solidFill>
-                  <a:srgbClr val="0F172A"/>
+                  <a:srgbClr val="1C1917"/>
                 </a:solidFill>
                 <a:latin typeface="Microsoft JhengHei"/>
               </a:rPr>
@@ -13670,7 +13670,7 @@
             <a:r>
               <a:rPr sz="1800" b="0">
                 <a:solidFill>
-                  <a:srgbClr val="64748B"/>
+                  <a:srgbClr val="78716C"/>
                 </a:solidFill>
                 <a:latin typeface="Microsoft JhengHei"/>
               </a:rPr>
@@ -13698,7 +13698,7 @@
           <a:noFill/>
           <a:ln w="9525">
             <a:solidFill>
-              <a:srgbClr val="E2E8F0"/>
+              <a:srgbClr val="E7E5E0"/>
             </a:solidFill>
           </a:ln>
         </p:spPr>
@@ -13739,7 +13739,7 @@
             <a:avLst/>
           </a:prstGeom>
           <a:solidFill>
-            <a:srgbClr val="0F172A"/>
+            <a:srgbClr val="D97706"/>
           </a:solidFill>
           <a:ln>
             <a:noFill/>
@@ -13797,7 +13797,7 @@
             <a:r>
               <a:rPr sz="2600" b="1">
                 <a:solidFill>
-                  <a:srgbClr val="0F172A"/>
+                  <a:srgbClr val="1C1917"/>
                 </a:solidFill>
                 <a:latin typeface="Microsoft JhengHei"/>
               </a:rPr>
@@ -13836,7 +13836,7 @@
             <a:r>
               <a:rPr sz="1400" b="0">
                 <a:solidFill>
-                  <a:srgbClr val="E11448"/>
+                  <a:srgbClr val="DC2626"/>
                 </a:solidFill>
                 <a:latin typeface="Microsoft JhengHei"/>
               </a:rPr>
@@ -13875,7 +13875,7 @@
             <a:r>
               <a:rPr sz="1200" b="1">
                 <a:solidFill>
-                  <a:srgbClr val="64748B"/>
+                  <a:srgbClr val="78716C"/>
                 </a:solidFill>
                 <a:latin typeface="Microsoft JhengHei"/>
               </a:rPr>
@@ -13914,7 +13914,7 @@
             <a:r>
               <a:rPr sz="1300" b="0">
                 <a:solidFill>
-                  <a:srgbClr val="0F172A"/>
+                  <a:srgbClr val="1C1917"/>
                 </a:solidFill>
                 <a:latin typeface="Microsoft JhengHei"/>
               </a:rPr>
@@ -13930,7 +13930,7 @@
             <a:r>
               <a:rPr sz="1300" b="0">
                 <a:solidFill>
-                  <a:srgbClr val="0F172A"/>
+                  <a:srgbClr val="1C1917"/>
                 </a:solidFill>
                 <a:latin typeface="Microsoft JhengHei"/>
               </a:rPr>
@@ -13956,7 +13956,7 @@
             </a:avLst>
           </a:prstGeom>
           <a:solidFill>
-            <a:srgbClr val="F8FAFC"/>
+            <a:srgbClr val="F5F4EE"/>
           </a:solidFill>
           <a:ln>
             <a:noFill/>
@@ -13984,7 +13984,7 @@
             <a:r>
               <a:rPr sz="1200" b="1">
                 <a:solidFill>
-                  <a:srgbClr val="0F172A"/>
+                  <a:srgbClr val="1C1917"/>
                 </a:solidFill>
                 <a:latin typeface="Microsoft JhengHei"/>
               </a:rPr>
@@ -14012,7 +14012,7 @@
           <a:noFill/>
           <a:ln w="9525">
             <a:solidFill>
-              <a:srgbClr val="E2E8F0"/>
+              <a:srgbClr val="E7E5E0"/>
             </a:solidFill>
           </a:ln>
         </p:spPr>
@@ -14053,7 +14053,7 @@
             <a:avLst/>
           </a:prstGeom>
           <a:solidFill>
-            <a:srgbClr val="0F172A"/>
+            <a:srgbClr val="D97706"/>
           </a:solidFill>
           <a:ln>
             <a:noFill/>
@@ -14111,7 +14111,7 @@
             <a:r>
               <a:rPr sz="2600" b="1">
                 <a:solidFill>
-                  <a:srgbClr val="0F172A"/>
+                  <a:srgbClr val="1C1917"/>
                 </a:solidFill>
                 <a:latin typeface="Microsoft JhengHei"/>
               </a:rPr>
@@ -14150,7 +14150,7 @@
             <a:r>
               <a:rPr sz="1400" b="0">
                 <a:solidFill>
-                  <a:srgbClr val="E11448"/>
+                  <a:srgbClr val="DC2626"/>
                 </a:solidFill>
                 <a:latin typeface="Microsoft JhengHei"/>
               </a:rPr>
@@ -14189,7 +14189,7 @@
             <a:r>
               <a:rPr sz="1200" b="1">
                 <a:solidFill>
-                  <a:srgbClr val="64748B"/>
+                  <a:srgbClr val="78716C"/>
                 </a:solidFill>
                 <a:latin typeface="Microsoft JhengHei"/>
               </a:rPr>
@@ -14228,7 +14228,7 @@
             <a:r>
               <a:rPr sz="1300" b="0">
                 <a:solidFill>
-                  <a:srgbClr val="0F172A"/>
+                  <a:srgbClr val="1C1917"/>
                 </a:solidFill>
                 <a:latin typeface="Microsoft JhengHei"/>
               </a:rPr>
@@ -14244,7 +14244,7 @@
             <a:r>
               <a:rPr sz="1300" b="0">
                 <a:solidFill>
-                  <a:srgbClr val="0F172A"/>
+                  <a:srgbClr val="1C1917"/>
                 </a:solidFill>
                 <a:latin typeface="Microsoft JhengHei"/>
               </a:rPr>
@@ -14270,7 +14270,7 @@
             </a:avLst>
           </a:prstGeom>
           <a:solidFill>
-            <a:srgbClr val="F8FAFC"/>
+            <a:srgbClr val="F5F4EE"/>
           </a:solidFill>
           <a:ln>
             <a:noFill/>
@@ -14298,7 +14298,7 @@
             <a:r>
               <a:rPr sz="1200" b="1">
                 <a:solidFill>
-                  <a:srgbClr val="0F172A"/>
+                  <a:srgbClr val="1C1917"/>
                 </a:solidFill>
                 <a:latin typeface="Microsoft JhengHei"/>
               </a:rPr>
@@ -14326,7 +14326,7 @@
           <a:noFill/>
           <a:ln w="9525">
             <a:solidFill>
-              <a:srgbClr val="E2E8F0"/>
+              <a:srgbClr val="E7E5E0"/>
             </a:solidFill>
           </a:ln>
         </p:spPr>
@@ -14367,7 +14367,7 @@
             <a:avLst/>
           </a:prstGeom>
           <a:solidFill>
-            <a:srgbClr val="0F172A"/>
+            <a:srgbClr val="D97706"/>
           </a:solidFill>
           <a:ln>
             <a:noFill/>
@@ -14425,7 +14425,7 @@
             <a:r>
               <a:rPr sz="2600" b="1">
                 <a:solidFill>
-                  <a:srgbClr val="0F172A"/>
+                  <a:srgbClr val="1C1917"/>
                 </a:solidFill>
                 <a:latin typeface="Microsoft JhengHei"/>
               </a:rPr>
@@ -14464,7 +14464,7 @@
             <a:r>
               <a:rPr sz="1400" b="0">
                 <a:solidFill>
-                  <a:srgbClr val="E11448"/>
+                  <a:srgbClr val="DC2626"/>
                 </a:solidFill>
                 <a:latin typeface="Microsoft JhengHei"/>
               </a:rPr>
@@ -14503,7 +14503,7 @@
             <a:r>
               <a:rPr sz="1200" b="1">
                 <a:solidFill>
-                  <a:srgbClr val="64748B"/>
+                  <a:srgbClr val="78716C"/>
                 </a:solidFill>
                 <a:latin typeface="Microsoft JhengHei"/>
               </a:rPr>
@@ -14542,7 +14542,7 @@
             <a:r>
               <a:rPr sz="1300" b="0">
                 <a:solidFill>
-                  <a:srgbClr val="0F172A"/>
+                  <a:srgbClr val="1C1917"/>
                 </a:solidFill>
                 <a:latin typeface="Microsoft JhengHei"/>
               </a:rPr>
@@ -14558,7 +14558,7 @@
             <a:r>
               <a:rPr sz="1300" b="0">
                 <a:solidFill>
-                  <a:srgbClr val="0F172A"/>
+                  <a:srgbClr val="1C1917"/>
                 </a:solidFill>
                 <a:latin typeface="Microsoft JhengHei"/>
               </a:rPr>
@@ -14584,7 +14584,7 @@
             </a:avLst>
           </a:prstGeom>
           <a:solidFill>
-            <a:srgbClr val="F8FAFC"/>
+            <a:srgbClr val="F5F4EE"/>
           </a:solidFill>
           <a:ln>
             <a:noFill/>
@@ -14612,7 +14612,7 @@
             <a:r>
               <a:rPr sz="1200" b="1">
                 <a:solidFill>
-                  <a:srgbClr val="0F172A"/>
+                  <a:srgbClr val="1C1917"/>
                 </a:solidFill>
                 <a:latin typeface="Microsoft JhengHei"/>
               </a:rPr>
@@ -14651,7 +14651,7 @@
             <a:r>
               <a:rPr sz="900" b="0">
                 <a:solidFill>
-                  <a:srgbClr val="64748B"/>
+                  <a:srgbClr val="78716C"/>
                 </a:solidFill>
                 <a:latin typeface="Microsoft JhengHei"/>
               </a:rPr>
@@ -14690,7 +14690,7 @@
             <a:r>
               <a:rPr sz="900" b="0">
                 <a:solidFill>
-                  <a:srgbClr val="64748B"/>
+                  <a:srgbClr val="78716C"/>
                 </a:solidFill>
                 <a:latin typeface="Microsoft JhengHei"/>
               </a:rPr>
@@ -14732,7 +14732,7 @@
             <a:avLst/>
           </a:prstGeom>
           <a:solidFill>
-            <a:srgbClr val="FFFFFF"/>
+            <a:srgbClr val="FAFAF7"/>
           </a:solidFill>
           <a:ln>
             <a:noFill/>
@@ -14775,7 +14775,7 @@
             <a:avLst/>
           </a:prstGeom>
           <a:solidFill>
-            <a:srgbClr val="E2E8F0"/>
+            <a:srgbClr val="E7E5E0"/>
           </a:solidFill>
           <a:ln>
             <a:noFill/>
@@ -14833,7 +14833,7 @@
             <a:r>
               <a:rPr sz="1200" b="1">
                 <a:solidFill>
-                  <a:srgbClr val="64748B"/>
+                  <a:srgbClr val="78716C"/>
                 </a:solidFill>
                 <a:latin typeface="Microsoft JhengHei"/>
               </a:rPr>
@@ -14872,7 +14872,7 @@
             <a:r>
               <a:rPr sz="3200" b="1">
                 <a:solidFill>
-                  <a:srgbClr val="0F172A"/>
+                  <a:srgbClr val="1C1917"/>
                 </a:solidFill>
                 <a:latin typeface="Microsoft JhengHei"/>
               </a:rPr>
@@ -14911,7 +14911,7 @@
             <a:r>
               <a:rPr sz="1400" b="0">
                 <a:solidFill>
-                  <a:srgbClr val="64748B"/>
+                  <a:srgbClr val="78716C"/>
                 </a:solidFill>
                 <a:latin typeface="Microsoft JhengHei"/>
               </a:rPr>
@@ -14939,7 +14939,7 @@
           <a:noFill/>
           <a:ln w="9525">
             <a:solidFill>
-              <a:srgbClr val="E2E8F0"/>
+              <a:srgbClr val="E7E5E0"/>
             </a:solidFill>
           </a:ln>
         </p:spPr>
@@ -14995,7 +14995,7 @@
             <a:r>
               <a:rPr sz="1300" b="1">
                 <a:solidFill>
-                  <a:srgbClr val="0F172A"/>
+                  <a:srgbClr val="D97706"/>
                 </a:solidFill>
                 <a:latin typeface="Microsoft JhengHei"/>
               </a:rPr>
@@ -15034,7 +15034,7 @@
             <a:r>
               <a:rPr sz="1400" b="0">
                 <a:solidFill>
-                  <a:srgbClr val="0F172A"/>
+                  <a:srgbClr val="1C1917"/>
                 </a:solidFill>
                 <a:latin typeface="Microsoft JhengHei"/>
               </a:rPr>
@@ -15050,7 +15050,7 @@
             <a:r>
               <a:rPr sz="1400" b="0">
                 <a:solidFill>
-                  <a:srgbClr val="0F172A"/>
+                  <a:srgbClr val="1C1917"/>
                 </a:solidFill>
                 <a:latin typeface="Microsoft JhengHei"/>
               </a:rPr>
@@ -15066,7 +15066,7 @@
             <a:r>
               <a:rPr sz="1400" b="0">
                 <a:solidFill>
-                  <a:srgbClr val="0F172A"/>
+                  <a:srgbClr val="1C1917"/>
                 </a:solidFill>
                 <a:latin typeface="Microsoft JhengHei"/>
               </a:rPr>
@@ -15082,7 +15082,7 @@
             <a:r>
               <a:rPr sz="1400" b="0">
                 <a:solidFill>
-                  <a:srgbClr val="0F172A"/>
+                  <a:srgbClr val="1C1917"/>
                 </a:solidFill>
                 <a:latin typeface="Microsoft JhengHei"/>
               </a:rPr>
@@ -15108,11 +15108,11 @@
             </a:avLst>
           </a:prstGeom>
           <a:solidFill>
-            <a:srgbClr val="FFE8E8"/>
+            <a:srgbClr val="FBEEEE"/>
           </a:solidFill>
           <a:ln w="9525">
             <a:solidFill>
-              <a:srgbClr val="E2E8F0"/>
+              <a:srgbClr val="E7E5E0"/>
             </a:solidFill>
           </a:ln>
         </p:spPr>
@@ -15153,7 +15153,7 @@
             <a:avLst/>
           </a:prstGeom>
           <a:solidFill>
-            <a:srgbClr val="E11448"/>
+            <a:srgbClr val="DC2626"/>
           </a:solidFill>
           <a:ln>
             <a:noFill/>
@@ -15211,7 +15211,7 @@
             <a:r>
               <a:rPr sz="1200" b="1">
                 <a:solidFill>
-                  <a:srgbClr val="0F172A"/>
+                  <a:srgbClr val="1C1917"/>
                 </a:solidFill>
                 <a:latin typeface="Microsoft JhengHei"/>
               </a:rPr>
@@ -15250,7 +15250,7 @@
             <a:r>
               <a:rPr sz="1200" b="0">
                 <a:solidFill>
-                  <a:srgbClr val="0F172A"/>
+                  <a:srgbClr val="1C1917"/>
                 </a:solidFill>
                 <a:latin typeface="Microsoft JhengHei"/>
               </a:rPr>
@@ -15266,7 +15266,7 @@
             <a:r>
               <a:rPr sz="1200" b="0">
                 <a:solidFill>
-                  <a:srgbClr val="0F172A"/>
+                  <a:srgbClr val="1C1917"/>
                 </a:solidFill>
                 <a:latin typeface="Microsoft JhengHei"/>
               </a:rPr>
@@ -15282,7 +15282,7 @@
             <a:r>
               <a:rPr sz="1200" b="0">
                 <a:solidFill>
-                  <a:srgbClr val="0F172A"/>
+                  <a:srgbClr val="1C1917"/>
                 </a:solidFill>
                 <a:latin typeface="Microsoft JhengHei"/>
               </a:rPr>
@@ -15298,7 +15298,7 @@
             <a:r>
               <a:rPr sz="1200" b="0">
                 <a:solidFill>
-                  <a:srgbClr val="0F172A"/>
+                  <a:srgbClr val="1C1917"/>
                 </a:solidFill>
                 <a:latin typeface="Microsoft JhengHei"/>
               </a:rPr>
@@ -15314,7 +15314,7 @@
             <a:r>
               <a:rPr sz="1200" b="0">
                 <a:solidFill>
-                  <a:srgbClr val="0F172A"/>
+                  <a:srgbClr val="1C1917"/>
                 </a:solidFill>
                 <a:latin typeface="Microsoft JhengHei"/>
               </a:rPr>
@@ -15330,7 +15330,7 @@
             <a:r>
               <a:rPr sz="1200" b="0">
                 <a:solidFill>
-                  <a:srgbClr val="0F172A"/>
+                  <a:srgbClr val="1C1917"/>
                 </a:solidFill>
                 <a:latin typeface="Microsoft JhengHei"/>
               </a:rPr>
@@ -15346,7 +15346,7 @@
             <a:r>
               <a:rPr sz="1200" b="0">
                 <a:solidFill>
-                  <a:srgbClr val="0F172A"/>
+                  <a:srgbClr val="1C1917"/>
                 </a:solidFill>
                 <a:latin typeface="Microsoft JhengHei"/>
               </a:rPr>
@@ -15362,7 +15362,7 @@
             <a:r>
               <a:rPr sz="1200" b="0">
                 <a:solidFill>
-                  <a:srgbClr val="0F172A"/>
+                  <a:srgbClr val="1C1917"/>
                 </a:solidFill>
                 <a:latin typeface="Microsoft JhengHei"/>
               </a:rPr>
@@ -15378,7 +15378,7 @@
             <a:r>
               <a:rPr sz="1200" b="0">
                 <a:solidFill>
-                  <a:srgbClr val="0F172A"/>
+                  <a:srgbClr val="1C1917"/>
                 </a:solidFill>
                 <a:latin typeface="Microsoft JhengHei"/>
               </a:rPr>
@@ -15404,11 +15404,11 @@
             </a:avLst>
           </a:prstGeom>
           <a:solidFill>
-            <a:srgbClr val="E6F9EF"/>
+            <a:srgbClr val="EEF6E8"/>
           </a:solidFill>
           <a:ln w="9525">
             <a:solidFill>
-              <a:srgbClr val="E2E8F0"/>
+              <a:srgbClr val="E7E5E0"/>
             </a:solidFill>
           </a:ln>
         </p:spPr>
@@ -15507,7 +15507,7 @@
             <a:r>
               <a:rPr sz="1200" b="1">
                 <a:solidFill>
-                  <a:srgbClr val="0F172A"/>
+                  <a:srgbClr val="1C1917"/>
                 </a:solidFill>
                 <a:latin typeface="Microsoft JhengHei"/>
               </a:rPr>
@@ -15546,7 +15546,7 @@
             <a:r>
               <a:rPr sz="1200" b="0">
                 <a:solidFill>
-                  <a:srgbClr val="0F172A"/>
+                  <a:srgbClr val="1C1917"/>
                 </a:solidFill>
                 <a:latin typeface="Microsoft JhengHei"/>
               </a:rPr>
@@ -15562,7 +15562,7 @@
             <a:r>
               <a:rPr sz="1200" b="0">
                 <a:solidFill>
-                  <a:srgbClr val="0F172A"/>
+                  <a:srgbClr val="1C1917"/>
                 </a:solidFill>
                 <a:latin typeface="Microsoft JhengHei"/>
               </a:rPr>
@@ -15578,7 +15578,7 @@
             <a:r>
               <a:rPr sz="1200" b="0">
                 <a:solidFill>
-                  <a:srgbClr val="0F172A"/>
+                  <a:srgbClr val="1C1917"/>
                 </a:solidFill>
                 <a:latin typeface="Microsoft JhengHei"/>
               </a:rPr>
@@ -15594,7 +15594,7 @@
             <a:r>
               <a:rPr sz="1200" b="0">
                 <a:solidFill>
-                  <a:srgbClr val="0F172A"/>
+                  <a:srgbClr val="1C1917"/>
                 </a:solidFill>
                 <a:latin typeface="Microsoft JhengHei"/>
               </a:rPr>
@@ -15610,7 +15610,7 @@
             <a:r>
               <a:rPr sz="1200" b="0">
                 <a:solidFill>
-                  <a:srgbClr val="0F172A"/>
+                  <a:srgbClr val="1C1917"/>
                 </a:solidFill>
                 <a:latin typeface="Microsoft JhengHei"/>
               </a:rPr>
@@ -15626,7 +15626,7 @@
             <a:r>
               <a:rPr sz="1200" b="0">
                 <a:solidFill>
-                  <a:srgbClr val="0F172A"/>
+                  <a:srgbClr val="1C1917"/>
                 </a:solidFill>
                 <a:latin typeface="Microsoft JhengHei"/>
               </a:rPr>
@@ -15642,7 +15642,7 @@
             <a:r>
               <a:rPr sz="1200" b="0">
                 <a:solidFill>
-                  <a:srgbClr val="0F172A"/>
+                  <a:srgbClr val="1C1917"/>
                 </a:solidFill>
                 <a:latin typeface="Microsoft JhengHei"/>
               </a:rPr>
@@ -15658,7 +15658,7 @@
             <a:r>
               <a:rPr sz="1200" b="0">
                 <a:solidFill>
-                  <a:srgbClr val="0F172A"/>
+                  <a:srgbClr val="1C1917"/>
                 </a:solidFill>
                 <a:latin typeface="Microsoft JhengHei"/>
               </a:rPr>
@@ -15674,7 +15674,7 @@
             <a:r>
               <a:rPr sz="1200" b="0">
                 <a:solidFill>
-                  <a:srgbClr val="0F172A"/>
+                  <a:srgbClr val="1C1917"/>
                 </a:solidFill>
                 <a:latin typeface="Microsoft JhengHei"/>
               </a:rPr>
@@ -15690,7 +15690,7 @@
             <a:r>
               <a:rPr sz="1200" b="0">
                 <a:solidFill>
-                  <a:srgbClr val="0F172A"/>
+                  <a:srgbClr val="1C1917"/>
                 </a:solidFill>
                 <a:latin typeface="Microsoft JhengHei"/>
               </a:rPr>
@@ -15729,7 +15729,7 @@
             <a:r>
               <a:rPr sz="1300" b="1">
                 <a:solidFill>
-                  <a:srgbClr val="0F172A"/>
+                  <a:srgbClr val="1C1917"/>
                 </a:solidFill>
                 <a:latin typeface="Microsoft JhengHei"/>
               </a:rPr>
@@ -15757,7 +15757,7 @@
           <a:noFill/>
           <a:ln w="9525">
             <a:solidFill>
-              <a:srgbClr val="E2E8F0"/>
+              <a:srgbClr val="E7E5E0"/>
             </a:solidFill>
           </a:ln>
         </p:spPr>
@@ -15798,7 +15798,7 @@
             <a:avLst/>
           </a:prstGeom>
           <a:solidFill>
-            <a:srgbClr val="0F172A"/>
+            <a:srgbClr val="1C1917"/>
           </a:solidFill>
           <a:ln>
             <a:noFill/>
@@ -15856,7 +15856,7 @@
             <a:r>
               <a:rPr sz="1100" b="1">
                 <a:solidFill>
-                  <a:srgbClr val="0F172A"/>
+                  <a:srgbClr val="1C1917"/>
                 </a:solidFill>
                 <a:latin typeface="Microsoft JhengHei"/>
               </a:rPr>
@@ -15895,7 +15895,7 @@
             <a:r>
               <a:rPr sz="1100" b="1">
                 <a:solidFill>
-                  <a:srgbClr val="0F172A"/>
+                  <a:srgbClr val="1C1917"/>
                 </a:solidFill>
                 <a:latin typeface="Microsoft JhengHei"/>
               </a:rPr>
@@ -15934,7 +15934,7 @@
             <a:r>
               <a:rPr sz="1000" b="0">
                 <a:solidFill>
-                  <a:srgbClr val="64748B"/>
+                  <a:srgbClr val="78716C"/>
                 </a:solidFill>
                 <a:latin typeface="Microsoft JhengHei"/>
               </a:rPr>
@@ -15950,7 +15950,7 @@
             <a:r>
               <a:rPr sz="1000" b="0">
                 <a:solidFill>
-                  <a:srgbClr val="64748B"/>
+                  <a:srgbClr val="78716C"/>
                 </a:solidFill>
                 <a:latin typeface="Microsoft JhengHei"/>
               </a:rPr>
@@ -15966,7 +15966,7 @@
             <a:r>
               <a:rPr sz="1000" b="0">
                 <a:solidFill>
-                  <a:srgbClr val="64748B"/>
+                  <a:srgbClr val="78716C"/>
                 </a:solidFill>
                 <a:latin typeface="Microsoft JhengHei"/>
               </a:rPr>
@@ -15994,7 +15994,7 @@
           <a:noFill/>
           <a:ln w="9525">
             <a:solidFill>
-              <a:srgbClr val="E2E8F0"/>
+              <a:srgbClr val="E7E5E0"/>
             </a:solidFill>
           </a:ln>
         </p:spPr>
@@ -16035,7 +16035,7 @@
             <a:avLst/>
           </a:prstGeom>
           <a:solidFill>
-            <a:srgbClr val="0F172A"/>
+            <a:srgbClr val="1C1917"/>
           </a:solidFill>
           <a:ln>
             <a:noFill/>
@@ -16093,7 +16093,7 @@
             <a:r>
               <a:rPr sz="1100" b="1">
                 <a:solidFill>
-                  <a:srgbClr val="0F172A"/>
+                  <a:srgbClr val="1C1917"/>
                 </a:solidFill>
                 <a:latin typeface="Microsoft JhengHei"/>
               </a:rPr>
@@ -16132,7 +16132,7 @@
             <a:r>
               <a:rPr sz="1100" b="1">
                 <a:solidFill>
-                  <a:srgbClr val="0F172A"/>
+                  <a:srgbClr val="1C1917"/>
                 </a:solidFill>
                 <a:latin typeface="Microsoft JhengHei"/>
               </a:rPr>
@@ -16171,7 +16171,7 @@
             <a:r>
               <a:rPr sz="1000" b="0">
                 <a:solidFill>
-                  <a:srgbClr val="64748B"/>
+                  <a:srgbClr val="78716C"/>
                 </a:solidFill>
                 <a:latin typeface="Microsoft JhengHei"/>
               </a:rPr>
@@ -16187,7 +16187,7 @@
             <a:r>
               <a:rPr sz="1000" b="0">
                 <a:solidFill>
-                  <a:srgbClr val="64748B"/>
+                  <a:srgbClr val="78716C"/>
                 </a:solidFill>
                 <a:latin typeface="Microsoft JhengHei"/>
               </a:rPr>
@@ -16203,7 +16203,7 @@
             <a:r>
               <a:rPr sz="1000" b="0">
                 <a:solidFill>
-                  <a:srgbClr val="64748B"/>
+                  <a:srgbClr val="78716C"/>
                 </a:solidFill>
                 <a:latin typeface="Microsoft JhengHei"/>
               </a:rPr>
@@ -16231,7 +16231,7 @@
           <a:noFill/>
           <a:ln w="9525">
             <a:solidFill>
-              <a:srgbClr val="E2E8F0"/>
+              <a:srgbClr val="E7E5E0"/>
             </a:solidFill>
           </a:ln>
         </p:spPr>
@@ -16272,7 +16272,7 @@
             <a:avLst/>
           </a:prstGeom>
           <a:solidFill>
-            <a:srgbClr val="0F172A"/>
+            <a:srgbClr val="1C1917"/>
           </a:solidFill>
           <a:ln>
             <a:noFill/>
@@ -16330,7 +16330,7 @@
             <a:r>
               <a:rPr sz="1100" b="1">
                 <a:solidFill>
-                  <a:srgbClr val="0F172A"/>
+                  <a:srgbClr val="1C1917"/>
                 </a:solidFill>
                 <a:latin typeface="Microsoft JhengHei"/>
               </a:rPr>
@@ -16369,7 +16369,7 @@
             <a:r>
               <a:rPr sz="1100" b="1">
                 <a:solidFill>
-                  <a:srgbClr val="0F172A"/>
+                  <a:srgbClr val="1C1917"/>
                 </a:solidFill>
                 <a:latin typeface="Microsoft JhengHei"/>
               </a:rPr>
@@ -16408,7 +16408,7 @@
             <a:r>
               <a:rPr sz="1000" b="0">
                 <a:solidFill>
-                  <a:srgbClr val="64748B"/>
+                  <a:srgbClr val="78716C"/>
                 </a:solidFill>
                 <a:latin typeface="Microsoft JhengHei"/>
               </a:rPr>
@@ -16424,7 +16424,7 @@
             <a:r>
               <a:rPr sz="1000" b="0">
                 <a:solidFill>
-                  <a:srgbClr val="64748B"/>
+                  <a:srgbClr val="78716C"/>
                 </a:solidFill>
                 <a:latin typeface="Microsoft JhengHei"/>
               </a:rPr>
@@ -16440,7 +16440,7 @@
             <a:r>
               <a:rPr sz="1000" b="0">
                 <a:solidFill>
-                  <a:srgbClr val="64748B"/>
+                  <a:srgbClr val="78716C"/>
                 </a:solidFill>
                 <a:latin typeface="Microsoft JhengHei"/>
               </a:rPr>
@@ -16479,7 +16479,7 @@
             <a:r>
               <a:rPr sz="900" b="0">
                 <a:solidFill>
-                  <a:srgbClr val="64748B"/>
+                  <a:srgbClr val="78716C"/>
                 </a:solidFill>
                 <a:latin typeface="Microsoft JhengHei"/>
               </a:rPr>
@@ -16518,7 +16518,7 @@
             <a:r>
               <a:rPr sz="900" b="0">
                 <a:solidFill>
-                  <a:srgbClr val="64748B"/>
+                  <a:srgbClr val="78716C"/>
                 </a:solidFill>
                 <a:latin typeface="Microsoft JhengHei"/>
               </a:rPr>
@@ -16560,7 +16560,7 @@
             <a:avLst/>
           </a:prstGeom>
           <a:solidFill>
-            <a:srgbClr val="FFFFFF"/>
+            <a:srgbClr val="FAFAF7"/>
           </a:solidFill>
           <a:ln>
             <a:noFill/>
@@ -16603,7 +16603,7 @@
             <a:avLst/>
           </a:prstGeom>
           <a:solidFill>
-            <a:srgbClr val="E2E8F0"/>
+            <a:srgbClr val="E7E5E0"/>
           </a:solidFill>
           <a:ln>
             <a:noFill/>
@@ -16661,7 +16661,7 @@
             <a:r>
               <a:rPr sz="1200" b="1">
                 <a:solidFill>
-                  <a:srgbClr val="64748B"/>
+                  <a:srgbClr val="78716C"/>
                 </a:solidFill>
                 <a:latin typeface="Microsoft JhengHei"/>
               </a:rPr>
@@ -16700,7 +16700,7 @@
             <a:r>
               <a:rPr sz="3200" b="1">
                 <a:solidFill>
-                  <a:srgbClr val="0F172A"/>
+                  <a:srgbClr val="1C1917"/>
                 </a:solidFill>
                 <a:latin typeface="Microsoft JhengHei"/>
               </a:rPr>
@@ -16739,7 +16739,7 @@
             <a:r>
               <a:rPr sz="1400" b="0">
                 <a:solidFill>
-                  <a:srgbClr val="64748B"/>
+                  <a:srgbClr val="78716C"/>
                 </a:solidFill>
                 <a:latin typeface="Microsoft JhengHei"/>
               </a:rPr>
@@ -16767,7 +16767,7 @@
           <a:noFill/>
           <a:ln w="9525">
             <a:solidFill>
-              <a:srgbClr val="E2E8F0"/>
+              <a:srgbClr val="E7E5E0"/>
             </a:solidFill>
           </a:ln>
         </p:spPr>
@@ -16823,7 +16823,7 @@
             <a:r>
               <a:rPr sz="1300" b="1">
                 <a:solidFill>
-                  <a:srgbClr val="0F172A"/>
+                  <a:srgbClr val="D97706"/>
                 </a:solidFill>
                 <a:latin typeface="Microsoft JhengHei"/>
               </a:rPr>
@@ -16862,7 +16862,7 @@
             <a:r>
               <a:rPr sz="1400" b="0">
                 <a:solidFill>
-                  <a:srgbClr val="0F172A"/>
+                  <a:srgbClr val="1C1917"/>
                 </a:solidFill>
                 <a:latin typeface="Microsoft JhengHei"/>
               </a:rPr>
@@ -16878,7 +16878,7 @@
             <a:r>
               <a:rPr sz="1400" b="0">
                 <a:solidFill>
-                  <a:srgbClr val="0F172A"/>
+                  <a:srgbClr val="1C1917"/>
                 </a:solidFill>
                 <a:latin typeface="Microsoft JhengHei"/>
               </a:rPr>
@@ -16894,7 +16894,7 @@
             <a:r>
               <a:rPr sz="1400" b="0">
                 <a:solidFill>
-                  <a:srgbClr val="0F172A"/>
+                  <a:srgbClr val="1C1917"/>
                 </a:solidFill>
                 <a:latin typeface="Microsoft JhengHei"/>
               </a:rPr>
@@ -16910,7 +16910,7 @@
             <a:r>
               <a:rPr sz="1400" b="0">
                 <a:solidFill>
-                  <a:srgbClr val="0F172A"/>
+                  <a:srgbClr val="1C1917"/>
                 </a:solidFill>
                 <a:latin typeface="Microsoft JhengHei"/>
               </a:rPr>
@@ -16936,11 +16936,11 @@
             </a:avLst>
           </a:prstGeom>
           <a:solidFill>
-            <a:srgbClr val="FFE8E8"/>
+            <a:srgbClr val="FBEEEE"/>
           </a:solidFill>
           <a:ln w="9525">
             <a:solidFill>
-              <a:srgbClr val="E2E8F0"/>
+              <a:srgbClr val="E7E5E0"/>
             </a:solidFill>
           </a:ln>
         </p:spPr>
@@ -16981,7 +16981,7 @@
             <a:avLst/>
           </a:prstGeom>
           <a:solidFill>
-            <a:srgbClr val="E11448"/>
+            <a:srgbClr val="DC2626"/>
           </a:solidFill>
           <a:ln>
             <a:noFill/>
@@ -17039,7 +17039,7 @@
             <a:r>
               <a:rPr sz="1200" b="1">
                 <a:solidFill>
-                  <a:srgbClr val="0F172A"/>
+                  <a:srgbClr val="1C1917"/>
                 </a:solidFill>
                 <a:latin typeface="Microsoft JhengHei"/>
               </a:rPr>
@@ -17078,7 +17078,7 @@
             <a:r>
               <a:rPr sz="1200" b="0">
                 <a:solidFill>
-                  <a:srgbClr val="0F172A"/>
+                  <a:srgbClr val="1C1917"/>
                 </a:solidFill>
                 <a:latin typeface="Microsoft JhengHei"/>
               </a:rPr>
@@ -17094,7 +17094,7 @@
             <a:r>
               <a:rPr sz="1200" b="0">
                 <a:solidFill>
-                  <a:srgbClr val="0F172A"/>
+                  <a:srgbClr val="1C1917"/>
                 </a:solidFill>
                 <a:latin typeface="Microsoft JhengHei"/>
               </a:rPr>
@@ -17110,7 +17110,7 @@
             <a:r>
               <a:rPr sz="1200" b="0">
                 <a:solidFill>
-                  <a:srgbClr val="0F172A"/>
+                  <a:srgbClr val="1C1917"/>
                 </a:solidFill>
                 <a:latin typeface="Microsoft JhengHei"/>
               </a:rPr>
@@ -17126,7 +17126,7 @@
             <a:r>
               <a:rPr sz="1200" b="0">
                 <a:solidFill>
-                  <a:srgbClr val="0F172A"/>
+                  <a:srgbClr val="1C1917"/>
                 </a:solidFill>
                 <a:latin typeface="Microsoft JhengHei"/>
               </a:rPr>
@@ -17142,7 +17142,7 @@
             <a:r>
               <a:rPr sz="1200" b="0">
                 <a:solidFill>
-                  <a:srgbClr val="0F172A"/>
+                  <a:srgbClr val="1C1917"/>
                 </a:solidFill>
                 <a:latin typeface="Microsoft JhengHei"/>
               </a:rPr>
@@ -17158,7 +17158,7 @@
             <a:r>
               <a:rPr sz="1200" b="0">
                 <a:solidFill>
-                  <a:srgbClr val="0F172A"/>
+                  <a:srgbClr val="1C1917"/>
                 </a:solidFill>
                 <a:latin typeface="Microsoft JhengHei"/>
               </a:rPr>
@@ -17174,7 +17174,7 @@
             <a:r>
               <a:rPr sz="1200" b="0">
                 <a:solidFill>
-                  <a:srgbClr val="0F172A"/>
+                  <a:srgbClr val="1C1917"/>
                 </a:solidFill>
                 <a:latin typeface="Microsoft JhengHei"/>
               </a:rPr>
@@ -17190,7 +17190,7 @@
             <a:r>
               <a:rPr sz="1200" b="0">
                 <a:solidFill>
-                  <a:srgbClr val="0F172A"/>
+                  <a:srgbClr val="1C1917"/>
                 </a:solidFill>
                 <a:latin typeface="Microsoft JhengHei"/>
               </a:rPr>
@@ -17206,7 +17206,7 @@
             <a:r>
               <a:rPr sz="1200" b="0">
                 <a:solidFill>
-                  <a:srgbClr val="0F172A"/>
+                  <a:srgbClr val="1C1917"/>
                 </a:solidFill>
                 <a:latin typeface="Microsoft JhengHei"/>
               </a:rPr>
@@ -17232,11 +17232,11 @@
             </a:avLst>
           </a:prstGeom>
           <a:solidFill>
-            <a:srgbClr val="E6F9EF"/>
+            <a:srgbClr val="EEF6E8"/>
           </a:solidFill>
           <a:ln w="9525">
             <a:solidFill>
-              <a:srgbClr val="E2E8F0"/>
+              <a:srgbClr val="E7E5E0"/>
             </a:solidFill>
           </a:ln>
         </p:spPr>
@@ -17335,7 +17335,7 @@
             <a:r>
               <a:rPr sz="1200" b="1">
                 <a:solidFill>
-                  <a:srgbClr val="0F172A"/>
+                  <a:srgbClr val="1C1917"/>
                 </a:solidFill>
                 <a:latin typeface="Microsoft JhengHei"/>
               </a:rPr>
@@ -17374,7 +17374,7 @@
             <a:r>
               <a:rPr sz="1200" b="0">
                 <a:solidFill>
-                  <a:srgbClr val="0F172A"/>
+                  <a:srgbClr val="1C1917"/>
                 </a:solidFill>
                 <a:latin typeface="Microsoft JhengHei"/>
               </a:rPr>
@@ -17390,7 +17390,7 @@
             <a:r>
               <a:rPr sz="1200" b="0">
                 <a:solidFill>
-                  <a:srgbClr val="0F172A"/>
+                  <a:srgbClr val="1C1917"/>
                 </a:solidFill>
                 <a:latin typeface="Microsoft JhengHei"/>
               </a:rPr>
@@ -17406,7 +17406,7 @@
             <a:r>
               <a:rPr sz="1200" b="0">
                 <a:solidFill>
-                  <a:srgbClr val="0F172A"/>
+                  <a:srgbClr val="1C1917"/>
                 </a:solidFill>
                 <a:latin typeface="Microsoft JhengHei"/>
               </a:rPr>
@@ -17422,7 +17422,7 @@
             <a:r>
               <a:rPr sz="1200" b="0">
                 <a:solidFill>
-                  <a:srgbClr val="0F172A"/>
+                  <a:srgbClr val="1C1917"/>
                 </a:solidFill>
                 <a:latin typeface="Microsoft JhengHei"/>
               </a:rPr>
@@ -17438,7 +17438,7 @@
             <a:r>
               <a:rPr sz="1200" b="0">
                 <a:solidFill>
-                  <a:srgbClr val="0F172A"/>
+                  <a:srgbClr val="1C1917"/>
                 </a:solidFill>
                 <a:latin typeface="Microsoft JhengHei"/>
               </a:rPr>
@@ -17454,7 +17454,7 @@
             <a:r>
               <a:rPr sz="1200" b="0">
                 <a:solidFill>
-                  <a:srgbClr val="0F172A"/>
+                  <a:srgbClr val="1C1917"/>
                 </a:solidFill>
                 <a:latin typeface="Microsoft JhengHei"/>
               </a:rPr>
@@ -17470,7 +17470,7 @@
             <a:r>
               <a:rPr sz="1200" b="0">
                 <a:solidFill>
-                  <a:srgbClr val="0F172A"/>
+                  <a:srgbClr val="1C1917"/>
                 </a:solidFill>
                 <a:latin typeface="Microsoft JhengHei"/>
               </a:rPr>
@@ -17486,7 +17486,7 @@
             <a:r>
               <a:rPr sz="1200" b="0">
                 <a:solidFill>
-                  <a:srgbClr val="0F172A"/>
+                  <a:srgbClr val="1C1917"/>
                 </a:solidFill>
                 <a:latin typeface="Microsoft JhengHei"/>
               </a:rPr>
@@ -17502,7 +17502,7 @@
             <a:r>
               <a:rPr sz="1200" b="0">
                 <a:solidFill>
-                  <a:srgbClr val="0F172A"/>
+                  <a:srgbClr val="1C1917"/>
                 </a:solidFill>
                 <a:latin typeface="Microsoft JhengHei"/>
               </a:rPr>
@@ -17518,7 +17518,7 @@
             <a:r>
               <a:rPr sz="1200" b="0">
                 <a:solidFill>
-                  <a:srgbClr val="0F172A"/>
+                  <a:srgbClr val="1C1917"/>
                 </a:solidFill>
                 <a:latin typeface="Microsoft JhengHei"/>
               </a:rPr>
@@ -17534,7 +17534,7 @@
             <a:r>
               <a:rPr sz="1200" b="0">
                 <a:solidFill>
-                  <a:srgbClr val="0F172A"/>
+                  <a:srgbClr val="1C1917"/>
                 </a:solidFill>
                 <a:latin typeface="Microsoft JhengHei"/>
               </a:rPr>
@@ -17573,7 +17573,7 @@
             <a:r>
               <a:rPr sz="1300" b="1">
                 <a:solidFill>
-                  <a:srgbClr val="0F172A"/>
+                  <a:srgbClr val="1C1917"/>
                 </a:solidFill>
                 <a:latin typeface="Microsoft JhengHei"/>
               </a:rPr>
@@ -17601,7 +17601,7 @@
           <a:noFill/>
           <a:ln w="9525">
             <a:solidFill>
-              <a:srgbClr val="E2E8F0"/>
+              <a:srgbClr val="E7E5E0"/>
             </a:solidFill>
           </a:ln>
         </p:spPr>
@@ -17642,7 +17642,7 @@
             <a:avLst/>
           </a:prstGeom>
           <a:solidFill>
-            <a:srgbClr val="0F172A"/>
+            <a:srgbClr val="1C1917"/>
           </a:solidFill>
           <a:ln>
             <a:noFill/>
@@ -17700,7 +17700,7 @@
             <a:r>
               <a:rPr sz="1100" b="1">
                 <a:solidFill>
-                  <a:srgbClr val="0F172A"/>
+                  <a:srgbClr val="1C1917"/>
                 </a:solidFill>
                 <a:latin typeface="Microsoft JhengHei"/>
               </a:rPr>
@@ -17739,7 +17739,7 @@
             <a:r>
               <a:rPr sz="1100" b="1">
                 <a:solidFill>
-                  <a:srgbClr val="0F172A"/>
+                  <a:srgbClr val="1C1917"/>
                 </a:solidFill>
                 <a:latin typeface="Microsoft JhengHei"/>
               </a:rPr>
@@ -17778,7 +17778,7 @@
             <a:r>
               <a:rPr sz="1000" b="0">
                 <a:solidFill>
-                  <a:srgbClr val="64748B"/>
+                  <a:srgbClr val="78716C"/>
                 </a:solidFill>
                 <a:latin typeface="Microsoft JhengHei"/>
               </a:rPr>
@@ -17794,7 +17794,7 @@
             <a:r>
               <a:rPr sz="1000" b="0">
                 <a:solidFill>
-                  <a:srgbClr val="64748B"/>
+                  <a:srgbClr val="78716C"/>
                 </a:solidFill>
                 <a:latin typeface="Microsoft JhengHei"/>
               </a:rPr>
@@ -17810,7 +17810,7 @@
             <a:r>
               <a:rPr sz="1000" b="0">
                 <a:solidFill>
-                  <a:srgbClr val="64748B"/>
+                  <a:srgbClr val="78716C"/>
                 </a:solidFill>
                 <a:latin typeface="Microsoft JhengHei"/>
               </a:rPr>
@@ -17838,7 +17838,7 @@
           <a:noFill/>
           <a:ln w="9525">
             <a:solidFill>
-              <a:srgbClr val="E2E8F0"/>
+              <a:srgbClr val="E7E5E0"/>
             </a:solidFill>
           </a:ln>
         </p:spPr>
@@ -17879,7 +17879,7 @@
             <a:avLst/>
           </a:prstGeom>
           <a:solidFill>
-            <a:srgbClr val="0F172A"/>
+            <a:srgbClr val="1C1917"/>
           </a:solidFill>
           <a:ln>
             <a:noFill/>
@@ -17937,7 +17937,7 @@
             <a:r>
               <a:rPr sz="1100" b="1">
                 <a:solidFill>
-                  <a:srgbClr val="0F172A"/>
+                  <a:srgbClr val="1C1917"/>
                 </a:solidFill>
                 <a:latin typeface="Microsoft JhengHei"/>
               </a:rPr>
@@ -17976,7 +17976,7 @@
             <a:r>
               <a:rPr sz="1100" b="1">
                 <a:solidFill>
-                  <a:srgbClr val="0F172A"/>
+                  <a:srgbClr val="1C1917"/>
                 </a:solidFill>
                 <a:latin typeface="Microsoft JhengHei"/>
               </a:rPr>
@@ -18015,7 +18015,7 @@
             <a:r>
               <a:rPr sz="1000" b="0">
                 <a:solidFill>
-                  <a:srgbClr val="64748B"/>
+                  <a:srgbClr val="78716C"/>
                 </a:solidFill>
                 <a:latin typeface="Microsoft JhengHei"/>
               </a:rPr>
@@ -18031,7 +18031,7 @@
             <a:r>
               <a:rPr sz="1000" b="0">
                 <a:solidFill>
-                  <a:srgbClr val="64748B"/>
+                  <a:srgbClr val="78716C"/>
                 </a:solidFill>
                 <a:latin typeface="Microsoft JhengHei"/>
               </a:rPr>
@@ -18047,7 +18047,7 @@
             <a:r>
               <a:rPr sz="1000" b="0">
                 <a:solidFill>
-                  <a:srgbClr val="64748B"/>
+                  <a:srgbClr val="78716C"/>
                 </a:solidFill>
                 <a:latin typeface="Microsoft JhengHei"/>
               </a:rPr>
@@ -18075,7 +18075,7 @@
           <a:noFill/>
           <a:ln w="9525">
             <a:solidFill>
-              <a:srgbClr val="E2E8F0"/>
+              <a:srgbClr val="E7E5E0"/>
             </a:solidFill>
           </a:ln>
         </p:spPr>
@@ -18116,7 +18116,7 @@
             <a:avLst/>
           </a:prstGeom>
           <a:solidFill>
-            <a:srgbClr val="0F172A"/>
+            <a:srgbClr val="1C1917"/>
           </a:solidFill>
           <a:ln>
             <a:noFill/>
@@ -18174,7 +18174,7 @@
             <a:r>
               <a:rPr sz="1100" b="1">
                 <a:solidFill>
-                  <a:srgbClr val="0F172A"/>
+                  <a:srgbClr val="1C1917"/>
                 </a:solidFill>
                 <a:latin typeface="Microsoft JhengHei"/>
               </a:rPr>
@@ -18213,7 +18213,7 @@
             <a:r>
               <a:rPr sz="1100" b="1">
                 <a:solidFill>
-                  <a:srgbClr val="0F172A"/>
+                  <a:srgbClr val="1C1917"/>
                 </a:solidFill>
                 <a:latin typeface="Microsoft JhengHei"/>
               </a:rPr>
@@ -18252,7 +18252,7 @@
             <a:r>
               <a:rPr sz="1000" b="0">
                 <a:solidFill>
-                  <a:srgbClr val="64748B"/>
+                  <a:srgbClr val="78716C"/>
                 </a:solidFill>
                 <a:latin typeface="Microsoft JhengHei"/>
               </a:rPr>
@@ -18268,7 +18268,7 @@
             <a:r>
               <a:rPr sz="1000" b="0">
                 <a:solidFill>
-                  <a:srgbClr val="64748B"/>
+                  <a:srgbClr val="78716C"/>
                 </a:solidFill>
                 <a:latin typeface="Microsoft JhengHei"/>
               </a:rPr>
@@ -18284,7 +18284,7 @@
             <a:r>
               <a:rPr sz="1000" b="0">
                 <a:solidFill>
-                  <a:srgbClr val="64748B"/>
+                  <a:srgbClr val="78716C"/>
                 </a:solidFill>
                 <a:latin typeface="Microsoft JhengHei"/>
               </a:rPr>
@@ -18323,7 +18323,7 @@
             <a:r>
               <a:rPr sz="900" b="0">
                 <a:solidFill>
-                  <a:srgbClr val="64748B"/>
+                  <a:srgbClr val="78716C"/>
                 </a:solidFill>
                 <a:latin typeface="Microsoft JhengHei"/>
               </a:rPr>
@@ -18362,7 +18362,7 @@
             <a:r>
               <a:rPr sz="900" b="0">
                 <a:solidFill>
-                  <a:srgbClr val="64748B"/>
+                  <a:srgbClr val="78716C"/>
                 </a:solidFill>
                 <a:latin typeface="Microsoft JhengHei"/>
               </a:rPr>
@@ -18404,7 +18404,7 @@
             <a:avLst/>
           </a:prstGeom>
           <a:solidFill>
-            <a:srgbClr val="FFFFFF"/>
+            <a:srgbClr val="FAFAF7"/>
           </a:solidFill>
           <a:ln>
             <a:noFill/>
@@ -18447,7 +18447,7 @@
             <a:avLst/>
           </a:prstGeom>
           <a:solidFill>
-            <a:srgbClr val="E2E8F0"/>
+            <a:srgbClr val="E7E5E0"/>
           </a:solidFill>
           <a:ln>
             <a:noFill/>
@@ -18505,7 +18505,7 @@
             <a:r>
               <a:rPr sz="1200" b="1">
                 <a:solidFill>
-                  <a:srgbClr val="64748B"/>
+                  <a:srgbClr val="78716C"/>
                 </a:solidFill>
                 <a:latin typeface="Microsoft JhengHei"/>
               </a:rPr>
@@ -18544,7 +18544,7 @@
             <a:r>
               <a:rPr sz="3200" b="1">
                 <a:solidFill>
-                  <a:srgbClr val="0F172A"/>
+                  <a:srgbClr val="1C1917"/>
                 </a:solidFill>
                 <a:latin typeface="Microsoft JhengHei"/>
               </a:rPr>
@@ -18583,7 +18583,7 @@
             <a:r>
               <a:rPr sz="1400" b="0">
                 <a:solidFill>
-                  <a:srgbClr val="64748B"/>
+                  <a:srgbClr val="78716C"/>
                 </a:solidFill>
                 <a:latin typeface="Microsoft JhengHei"/>
               </a:rPr>
@@ -18611,7 +18611,7 @@
           <a:noFill/>
           <a:ln w="9525">
             <a:solidFill>
-              <a:srgbClr val="E2E8F0"/>
+              <a:srgbClr val="E7E5E0"/>
             </a:solidFill>
           </a:ln>
         </p:spPr>
@@ -18667,7 +18667,7 @@
             <a:r>
               <a:rPr sz="1300" b="1">
                 <a:solidFill>
-                  <a:srgbClr val="0F172A"/>
+                  <a:srgbClr val="D97706"/>
                 </a:solidFill>
                 <a:latin typeface="Microsoft JhengHei"/>
               </a:rPr>
@@ -18706,7 +18706,7 @@
             <a:r>
               <a:rPr sz="1400" b="0">
                 <a:solidFill>
-                  <a:srgbClr val="0F172A"/>
+                  <a:srgbClr val="1C1917"/>
                 </a:solidFill>
                 <a:latin typeface="Microsoft JhengHei"/>
               </a:rPr>
@@ -18722,7 +18722,7 @@
             <a:r>
               <a:rPr sz="1400" b="0">
                 <a:solidFill>
-                  <a:srgbClr val="0F172A"/>
+                  <a:srgbClr val="1C1917"/>
                 </a:solidFill>
                 <a:latin typeface="Microsoft JhengHei"/>
               </a:rPr>
@@ -18738,7 +18738,7 @@
             <a:r>
               <a:rPr sz="1400" b="0">
                 <a:solidFill>
-                  <a:srgbClr val="0F172A"/>
+                  <a:srgbClr val="1C1917"/>
                 </a:solidFill>
                 <a:latin typeface="Microsoft JhengHei"/>
               </a:rPr>
@@ -18754,7 +18754,7 @@
             <a:r>
               <a:rPr sz="1400" b="0">
                 <a:solidFill>
-                  <a:srgbClr val="0F172A"/>
+                  <a:srgbClr val="1C1917"/>
                 </a:solidFill>
                 <a:latin typeface="Microsoft JhengHei"/>
               </a:rPr>
@@ -18780,11 +18780,11 @@
             </a:avLst>
           </a:prstGeom>
           <a:solidFill>
-            <a:srgbClr val="FFE8E8"/>
+            <a:srgbClr val="FBEEEE"/>
           </a:solidFill>
           <a:ln w="9525">
             <a:solidFill>
-              <a:srgbClr val="E2E8F0"/>
+              <a:srgbClr val="E7E5E0"/>
             </a:solidFill>
           </a:ln>
         </p:spPr>
@@ -18825,7 +18825,7 @@
             <a:avLst/>
           </a:prstGeom>
           <a:solidFill>
-            <a:srgbClr val="E11448"/>
+            <a:srgbClr val="DC2626"/>
           </a:solidFill>
           <a:ln>
             <a:noFill/>
@@ -18883,7 +18883,7 @@
             <a:r>
               <a:rPr sz="1200" b="1">
                 <a:solidFill>
-                  <a:srgbClr val="0F172A"/>
+                  <a:srgbClr val="1C1917"/>
                 </a:solidFill>
                 <a:latin typeface="Microsoft JhengHei"/>
               </a:rPr>
@@ -18922,7 +18922,7 @@
             <a:r>
               <a:rPr sz="1200" b="0">
                 <a:solidFill>
-                  <a:srgbClr val="0F172A"/>
+                  <a:srgbClr val="1C1917"/>
                 </a:solidFill>
                 <a:latin typeface="Microsoft JhengHei"/>
               </a:rPr>
@@ -18938,7 +18938,7 @@
             <a:r>
               <a:rPr sz="1200" b="0">
                 <a:solidFill>
-                  <a:srgbClr val="0F172A"/>
+                  <a:srgbClr val="1C1917"/>
                 </a:solidFill>
                 <a:latin typeface="Microsoft JhengHei"/>
               </a:rPr>
@@ -18954,7 +18954,7 @@
             <a:r>
               <a:rPr sz="1200" b="0">
                 <a:solidFill>
-                  <a:srgbClr val="0F172A"/>
+                  <a:srgbClr val="1C1917"/>
                 </a:solidFill>
                 <a:latin typeface="Microsoft JhengHei"/>
               </a:rPr>
@@ -18970,7 +18970,7 @@
             <a:r>
               <a:rPr sz="1200" b="0">
                 <a:solidFill>
-                  <a:srgbClr val="0F172A"/>
+                  <a:srgbClr val="1C1917"/>
                 </a:solidFill>
                 <a:latin typeface="Microsoft JhengHei"/>
               </a:rPr>
@@ -18986,7 +18986,7 @@
             <a:r>
               <a:rPr sz="1200" b="0">
                 <a:solidFill>
-                  <a:srgbClr val="0F172A"/>
+                  <a:srgbClr val="1C1917"/>
                 </a:solidFill>
                 <a:latin typeface="Microsoft JhengHei"/>
               </a:rPr>
@@ -19002,7 +19002,7 @@
             <a:r>
               <a:rPr sz="1200" b="0">
                 <a:solidFill>
-                  <a:srgbClr val="0F172A"/>
+                  <a:srgbClr val="1C1917"/>
                 </a:solidFill>
                 <a:latin typeface="Microsoft JhengHei"/>
               </a:rPr>
@@ -19018,7 +19018,7 @@
             <a:r>
               <a:rPr sz="1200" b="0">
                 <a:solidFill>
-                  <a:srgbClr val="0F172A"/>
+                  <a:srgbClr val="1C1917"/>
                 </a:solidFill>
                 <a:latin typeface="Microsoft JhengHei"/>
               </a:rPr>
@@ -19034,7 +19034,7 @@
             <a:r>
               <a:rPr sz="1200" b="0">
                 <a:solidFill>
-                  <a:srgbClr val="0F172A"/>
+                  <a:srgbClr val="1C1917"/>
                 </a:solidFill>
                 <a:latin typeface="Microsoft JhengHei"/>
               </a:rPr>
@@ -19050,7 +19050,7 @@
             <a:r>
               <a:rPr sz="1200" b="0">
                 <a:solidFill>
-                  <a:srgbClr val="0F172A"/>
+                  <a:srgbClr val="1C1917"/>
                 </a:solidFill>
                 <a:latin typeface="Microsoft JhengHei"/>
               </a:rPr>
@@ -19076,11 +19076,11 @@
             </a:avLst>
           </a:prstGeom>
           <a:solidFill>
-            <a:srgbClr val="E6F9EF"/>
+            <a:srgbClr val="EEF6E8"/>
           </a:solidFill>
           <a:ln w="9525">
             <a:solidFill>
-              <a:srgbClr val="E2E8F0"/>
+              <a:srgbClr val="E7E5E0"/>
             </a:solidFill>
           </a:ln>
         </p:spPr>
@@ -19179,7 +19179,7 @@
             <a:r>
               <a:rPr sz="1200" b="1">
                 <a:solidFill>
-                  <a:srgbClr val="0F172A"/>
+                  <a:srgbClr val="1C1917"/>
                 </a:solidFill>
                 <a:latin typeface="Microsoft JhengHei"/>
               </a:rPr>
@@ -19218,7 +19218,7 @@
             <a:r>
               <a:rPr sz="1200" b="0">
                 <a:solidFill>
-                  <a:srgbClr val="0F172A"/>
+                  <a:srgbClr val="1C1917"/>
                 </a:solidFill>
                 <a:latin typeface="Microsoft JhengHei"/>
               </a:rPr>
@@ -19234,7 +19234,7 @@
             <a:r>
               <a:rPr sz="1200" b="0">
                 <a:solidFill>
-                  <a:srgbClr val="0F172A"/>
+                  <a:srgbClr val="1C1917"/>
                 </a:solidFill>
                 <a:latin typeface="Microsoft JhengHei"/>
               </a:rPr>
@@ -19250,7 +19250,7 @@
             <a:r>
               <a:rPr sz="1200" b="0">
                 <a:solidFill>
-                  <a:srgbClr val="0F172A"/>
+                  <a:srgbClr val="1C1917"/>
                 </a:solidFill>
                 <a:latin typeface="Microsoft JhengHei"/>
               </a:rPr>
@@ -19266,7 +19266,7 @@
             <a:r>
               <a:rPr sz="1200" b="0">
                 <a:solidFill>
-                  <a:srgbClr val="0F172A"/>
+                  <a:srgbClr val="1C1917"/>
                 </a:solidFill>
                 <a:latin typeface="Microsoft JhengHei"/>
               </a:rPr>
@@ -19282,7 +19282,7 @@
             <a:r>
               <a:rPr sz="1200" b="0">
                 <a:solidFill>
-                  <a:srgbClr val="0F172A"/>
+                  <a:srgbClr val="1C1917"/>
                 </a:solidFill>
                 <a:latin typeface="Microsoft JhengHei"/>
               </a:rPr>
@@ -19298,7 +19298,7 @@
             <a:r>
               <a:rPr sz="1200" b="0">
                 <a:solidFill>
-                  <a:srgbClr val="0F172A"/>
+                  <a:srgbClr val="1C1917"/>
                 </a:solidFill>
                 <a:latin typeface="Microsoft JhengHei"/>
               </a:rPr>
@@ -19314,7 +19314,7 @@
             <a:r>
               <a:rPr sz="1200" b="0">
                 <a:solidFill>
-                  <a:srgbClr val="0F172A"/>
+                  <a:srgbClr val="1C1917"/>
                 </a:solidFill>
                 <a:latin typeface="Microsoft JhengHei"/>
               </a:rPr>
@@ -19330,7 +19330,7 @@
             <a:r>
               <a:rPr sz="1200" b="0">
                 <a:solidFill>
-                  <a:srgbClr val="0F172A"/>
+                  <a:srgbClr val="1C1917"/>
                 </a:solidFill>
                 <a:latin typeface="Microsoft JhengHei"/>
               </a:rPr>
@@ -19346,7 +19346,7 @@
             <a:r>
               <a:rPr sz="1200" b="0">
                 <a:solidFill>
-                  <a:srgbClr val="0F172A"/>
+                  <a:srgbClr val="1C1917"/>
                 </a:solidFill>
                 <a:latin typeface="Microsoft JhengHei"/>
               </a:rPr>
@@ -19385,7 +19385,7 @@
             <a:r>
               <a:rPr sz="1300" b="1">
                 <a:solidFill>
-                  <a:srgbClr val="0F172A"/>
+                  <a:srgbClr val="1C1917"/>
                 </a:solidFill>
                 <a:latin typeface="Microsoft JhengHei"/>
               </a:rPr>
@@ -19413,7 +19413,7 @@
           <a:noFill/>
           <a:ln w="9525">
             <a:solidFill>
-              <a:srgbClr val="E2E8F0"/>
+              <a:srgbClr val="E7E5E0"/>
             </a:solidFill>
           </a:ln>
         </p:spPr>
@@ -19454,7 +19454,7 @@
             <a:avLst/>
           </a:prstGeom>
           <a:solidFill>
-            <a:srgbClr val="0F172A"/>
+            <a:srgbClr val="1C1917"/>
           </a:solidFill>
           <a:ln>
             <a:noFill/>
@@ -19512,7 +19512,7 @@
             <a:r>
               <a:rPr sz="1100" b="1">
                 <a:solidFill>
-                  <a:srgbClr val="0F172A"/>
+                  <a:srgbClr val="1C1917"/>
                 </a:solidFill>
                 <a:latin typeface="Microsoft JhengHei"/>
               </a:rPr>
@@ -19551,7 +19551,7 @@
             <a:r>
               <a:rPr sz="1100" b="1">
                 <a:solidFill>
-                  <a:srgbClr val="0F172A"/>
+                  <a:srgbClr val="1C1917"/>
                 </a:solidFill>
                 <a:latin typeface="Microsoft JhengHei"/>
               </a:rPr>
@@ -19590,7 +19590,7 @@
             <a:r>
               <a:rPr sz="1000" b="0">
                 <a:solidFill>
-                  <a:srgbClr val="64748B"/>
+                  <a:srgbClr val="78716C"/>
                 </a:solidFill>
                 <a:latin typeface="Microsoft JhengHei"/>
               </a:rPr>
@@ -19606,7 +19606,7 @@
             <a:r>
               <a:rPr sz="1000" b="0">
                 <a:solidFill>
-                  <a:srgbClr val="64748B"/>
+                  <a:srgbClr val="78716C"/>
                 </a:solidFill>
                 <a:latin typeface="Microsoft JhengHei"/>
               </a:rPr>
@@ -19622,7 +19622,7 @@
             <a:r>
               <a:rPr sz="1000" b="0">
                 <a:solidFill>
-                  <a:srgbClr val="64748B"/>
+                  <a:srgbClr val="78716C"/>
                 </a:solidFill>
                 <a:latin typeface="Microsoft JhengHei"/>
               </a:rPr>
@@ -19650,7 +19650,7 @@
           <a:noFill/>
           <a:ln w="9525">
             <a:solidFill>
-              <a:srgbClr val="E2E8F0"/>
+              <a:srgbClr val="E7E5E0"/>
             </a:solidFill>
           </a:ln>
         </p:spPr>
@@ -19691,7 +19691,7 @@
             <a:avLst/>
           </a:prstGeom>
           <a:solidFill>
-            <a:srgbClr val="0F172A"/>
+            <a:srgbClr val="1C1917"/>
           </a:solidFill>
           <a:ln>
             <a:noFill/>
@@ -19749,7 +19749,7 @@
             <a:r>
               <a:rPr sz="1100" b="1">
                 <a:solidFill>
-                  <a:srgbClr val="0F172A"/>
+                  <a:srgbClr val="1C1917"/>
                 </a:solidFill>
                 <a:latin typeface="Microsoft JhengHei"/>
               </a:rPr>
@@ -19788,7 +19788,7 @@
             <a:r>
               <a:rPr sz="1100" b="1">
                 <a:solidFill>
-                  <a:srgbClr val="0F172A"/>
+                  <a:srgbClr val="1C1917"/>
                 </a:solidFill>
                 <a:latin typeface="Microsoft JhengHei"/>
               </a:rPr>
@@ -19827,7 +19827,7 @@
             <a:r>
               <a:rPr sz="1000" b="0">
                 <a:solidFill>
-                  <a:srgbClr val="64748B"/>
+                  <a:srgbClr val="78716C"/>
                 </a:solidFill>
                 <a:latin typeface="Microsoft JhengHei"/>
               </a:rPr>
@@ -19843,7 +19843,7 @@
             <a:r>
               <a:rPr sz="1000" b="0">
                 <a:solidFill>
-                  <a:srgbClr val="64748B"/>
+                  <a:srgbClr val="78716C"/>
                 </a:solidFill>
                 <a:latin typeface="Microsoft JhengHei"/>
               </a:rPr>
@@ -19859,7 +19859,7 @@
             <a:r>
               <a:rPr sz="1000" b="0">
                 <a:solidFill>
-                  <a:srgbClr val="64748B"/>
+                  <a:srgbClr val="78716C"/>
                 </a:solidFill>
                 <a:latin typeface="Microsoft JhengHei"/>
               </a:rPr>
@@ -19887,7 +19887,7 @@
           <a:noFill/>
           <a:ln w="9525">
             <a:solidFill>
-              <a:srgbClr val="E2E8F0"/>
+              <a:srgbClr val="E7E5E0"/>
             </a:solidFill>
           </a:ln>
         </p:spPr>
@@ -19928,7 +19928,7 @@
             <a:avLst/>
           </a:prstGeom>
           <a:solidFill>
-            <a:srgbClr val="0F172A"/>
+            <a:srgbClr val="1C1917"/>
           </a:solidFill>
           <a:ln>
             <a:noFill/>
@@ -19986,7 +19986,7 @@
             <a:r>
               <a:rPr sz="1100" b="1">
                 <a:solidFill>
-                  <a:srgbClr val="0F172A"/>
+                  <a:srgbClr val="1C1917"/>
                 </a:solidFill>
                 <a:latin typeface="Microsoft JhengHei"/>
               </a:rPr>
@@ -20025,7 +20025,7 @@
             <a:r>
               <a:rPr sz="1100" b="1">
                 <a:solidFill>
-                  <a:srgbClr val="0F172A"/>
+                  <a:srgbClr val="1C1917"/>
                 </a:solidFill>
                 <a:latin typeface="Microsoft JhengHei"/>
               </a:rPr>
@@ -20064,7 +20064,7 @@
             <a:r>
               <a:rPr sz="1000" b="0">
                 <a:solidFill>
-                  <a:srgbClr val="64748B"/>
+                  <a:srgbClr val="78716C"/>
                 </a:solidFill>
                 <a:latin typeface="Microsoft JhengHei"/>
               </a:rPr>
@@ -20080,7 +20080,7 @@
             <a:r>
               <a:rPr sz="1000" b="0">
                 <a:solidFill>
-                  <a:srgbClr val="64748B"/>
+                  <a:srgbClr val="78716C"/>
                 </a:solidFill>
                 <a:latin typeface="Microsoft JhengHei"/>
               </a:rPr>
@@ -20096,7 +20096,7 @@
             <a:r>
               <a:rPr sz="1000" b="0">
                 <a:solidFill>
-                  <a:srgbClr val="64748B"/>
+                  <a:srgbClr val="78716C"/>
                 </a:solidFill>
                 <a:latin typeface="Microsoft JhengHei"/>
               </a:rPr>
@@ -20135,7 +20135,7 @@
             <a:r>
               <a:rPr sz="900" b="0">
                 <a:solidFill>
-                  <a:srgbClr val="64748B"/>
+                  <a:srgbClr val="78716C"/>
                 </a:solidFill>
                 <a:latin typeface="Microsoft JhengHei"/>
               </a:rPr>
@@ -20174,7 +20174,7 @@
             <a:r>
               <a:rPr sz="900" b="0">
                 <a:solidFill>
-                  <a:srgbClr val="64748B"/>
+                  <a:srgbClr val="78716C"/>
                 </a:solidFill>
                 <a:latin typeface="Microsoft JhengHei"/>
               </a:rPr>
@@ -20216,7 +20216,7 @@
             <a:avLst/>
           </a:prstGeom>
           <a:solidFill>
-            <a:srgbClr val="FFFFFF"/>
+            <a:srgbClr val="FAFAF7"/>
           </a:solidFill>
           <a:ln>
             <a:noFill/>
@@ -20259,7 +20259,7 @@
             <a:avLst/>
           </a:prstGeom>
           <a:solidFill>
-            <a:srgbClr val="E2E8F0"/>
+            <a:srgbClr val="E7E5E0"/>
           </a:solidFill>
           <a:ln>
             <a:noFill/>
@@ -20317,7 +20317,7 @@
             <a:r>
               <a:rPr sz="1400" b="1">
                 <a:solidFill>
-                  <a:srgbClr val="64748B"/>
+                  <a:srgbClr val="78716C"/>
                 </a:solidFill>
                 <a:latin typeface="Microsoft JhengHei"/>
               </a:rPr>
@@ -20356,7 +20356,7 @@
             <a:r>
               <a:rPr sz="3400" b="1">
                 <a:solidFill>
-                  <a:srgbClr val="0F172A"/>
+                  <a:srgbClr val="1C1917"/>
                 </a:solidFill>
                 <a:latin typeface="Microsoft JhengHei"/>
               </a:rPr>
@@ -20395,7 +20395,7 @@
             <a:r>
               <a:rPr sz="1400" b="0">
                 <a:solidFill>
-                  <a:srgbClr val="64748B"/>
+                  <a:srgbClr val="78716C"/>
                 </a:solidFill>
                 <a:latin typeface="Microsoft JhengHei"/>
               </a:rPr>
@@ -20423,7 +20423,7 @@
           <a:noFill/>
           <a:ln w="9525">
             <a:solidFill>
-              <a:srgbClr val="E2E8F0"/>
+              <a:srgbClr val="E7E5E0"/>
             </a:solidFill>
           </a:ln>
         </p:spPr>
@@ -20479,7 +20479,7 @@
             <a:r>
               <a:rPr sz="3000" b="1">
                 <a:solidFill>
-                  <a:srgbClr val="0F172A"/>
+                  <a:srgbClr val="D97706"/>
                 </a:solidFill>
                 <a:latin typeface="Microsoft JhengHei"/>
               </a:rPr>
@@ -20518,7 +20518,7 @@
             <a:r>
               <a:rPr sz="1800" b="1">
                 <a:solidFill>
-                  <a:srgbClr val="0F172A"/>
+                  <a:srgbClr val="1C1917"/>
                 </a:solidFill>
                 <a:latin typeface="Microsoft JhengHei"/>
               </a:rPr>
@@ -20557,7 +20557,7 @@
             <a:r>
               <a:rPr sz="1000" b="0">
                 <a:solidFill>
-                  <a:srgbClr val="64748B"/>
+                  <a:srgbClr val="78716C"/>
                 </a:solidFill>
                 <a:latin typeface="Microsoft JhengHei"/>
               </a:rPr>
@@ -20582,7 +20582,7 @@
           </a:prstGeom>
           <a:ln w="9525">
             <a:solidFill>
-              <a:srgbClr val="E2E8F0"/>
+              <a:srgbClr val="E7E5E0"/>
             </a:solidFill>
           </a:ln>
         </p:spPr>
@@ -20631,7 +20631,7 @@
             <a:r>
               <a:rPr sz="1100" b="1">
                 <a:solidFill>
-                  <a:srgbClr val="0F172A"/>
+                  <a:srgbClr val="1C1917"/>
                 </a:solidFill>
                 <a:latin typeface="Microsoft JhengHei"/>
               </a:rPr>
@@ -20647,7 +20647,7 @@
             <a:r>
               <a:rPr sz="1100" b="1">
                 <a:solidFill>
-                  <a:srgbClr val="0F172A"/>
+                  <a:srgbClr val="1C1917"/>
                 </a:solidFill>
                 <a:latin typeface="Microsoft JhengHei"/>
               </a:rPr>
@@ -20686,7 +20686,7 @@
             <a:r>
               <a:rPr sz="1000" b="0">
                 <a:solidFill>
-                  <a:srgbClr val="0F172A"/>
+                  <a:srgbClr val="D97706"/>
                 </a:solidFill>
                 <a:latin typeface="Microsoft JhengHei"/>
               </a:rPr>
@@ -20702,7 +20702,7 @@
             <a:r>
               <a:rPr sz="1000" b="0">
                 <a:solidFill>
-                  <a:srgbClr val="0F172A"/>
+                  <a:srgbClr val="D97706"/>
                 </a:solidFill>
                 <a:latin typeface="Microsoft JhengHei"/>
               </a:rPr>
@@ -20726,7 +20726,7 @@
             <a:avLst/>
           </a:prstGeom>
           <a:solidFill>
-            <a:srgbClr val="E2E8F0"/>
+            <a:srgbClr val="E7E5E0"/>
           </a:solidFill>
           <a:ln>
             <a:noFill/>
@@ -20773,7 +20773,7 @@
           <a:noFill/>
           <a:ln w="9525">
             <a:solidFill>
-              <a:srgbClr val="E2E8F0"/>
+              <a:srgbClr val="E7E5E0"/>
             </a:solidFill>
           </a:ln>
         </p:spPr>
@@ -20829,7 +20829,7 @@
             <a:r>
               <a:rPr sz="3000" b="1">
                 <a:solidFill>
-                  <a:srgbClr val="0F172A"/>
+                  <a:srgbClr val="D97706"/>
                 </a:solidFill>
                 <a:latin typeface="Microsoft JhengHei"/>
               </a:rPr>
@@ -20868,7 +20868,7 @@
             <a:r>
               <a:rPr sz="1800" b="1">
                 <a:solidFill>
-                  <a:srgbClr val="0F172A"/>
+                  <a:srgbClr val="1C1917"/>
                 </a:solidFill>
                 <a:latin typeface="Microsoft JhengHei"/>
               </a:rPr>
@@ -20907,7 +20907,7 @@
             <a:r>
               <a:rPr sz="1000" b="0">
                 <a:solidFill>
-                  <a:srgbClr val="64748B"/>
+                  <a:srgbClr val="78716C"/>
                 </a:solidFill>
                 <a:latin typeface="Microsoft JhengHei"/>
               </a:rPr>
@@ -20932,7 +20932,7 @@
           </a:prstGeom>
           <a:ln w="9525">
             <a:solidFill>
-              <a:srgbClr val="E2E8F0"/>
+              <a:srgbClr val="E7E5E0"/>
             </a:solidFill>
           </a:ln>
         </p:spPr>
@@ -20981,7 +20981,7 @@
             <a:r>
               <a:rPr sz="1100" b="1">
                 <a:solidFill>
-                  <a:srgbClr val="0F172A"/>
+                  <a:srgbClr val="1C1917"/>
                 </a:solidFill>
                 <a:latin typeface="Microsoft JhengHei"/>
               </a:rPr>
@@ -20997,7 +20997,7 @@
             <a:r>
               <a:rPr sz="1100" b="1">
                 <a:solidFill>
-                  <a:srgbClr val="0F172A"/>
+                  <a:srgbClr val="1C1917"/>
                 </a:solidFill>
                 <a:latin typeface="Microsoft JhengHei"/>
               </a:rPr>
@@ -21036,7 +21036,7 @@
             <a:r>
               <a:rPr sz="1000" b="0">
                 <a:solidFill>
-                  <a:srgbClr val="0F172A"/>
+                  <a:srgbClr val="D97706"/>
                 </a:solidFill>
                 <a:latin typeface="Microsoft JhengHei"/>
               </a:rPr>
@@ -21052,7 +21052,7 @@
             <a:r>
               <a:rPr sz="1000" b="0">
                 <a:solidFill>
-                  <a:srgbClr val="0F172A"/>
+                  <a:srgbClr val="D97706"/>
                 </a:solidFill>
                 <a:latin typeface="Microsoft JhengHei"/>
               </a:rPr>
@@ -21076,7 +21076,7 @@
             <a:avLst/>
           </a:prstGeom>
           <a:solidFill>
-            <a:srgbClr val="E2E8F0"/>
+            <a:srgbClr val="E7E5E0"/>
           </a:solidFill>
           <a:ln>
             <a:noFill/>
@@ -21123,7 +21123,7 @@
           <a:noFill/>
           <a:ln w="9525">
             <a:solidFill>
-              <a:srgbClr val="E2E8F0"/>
+              <a:srgbClr val="E7E5E0"/>
             </a:solidFill>
           </a:ln>
         </p:spPr>
@@ -21179,7 +21179,7 @@
             <a:r>
               <a:rPr sz="3000" b="1">
                 <a:solidFill>
-                  <a:srgbClr val="0F172A"/>
+                  <a:srgbClr val="D97706"/>
                 </a:solidFill>
                 <a:latin typeface="Microsoft JhengHei"/>
               </a:rPr>
@@ -21218,7 +21218,7 @@
             <a:r>
               <a:rPr sz="1800" b="1">
                 <a:solidFill>
-                  <a:srgbClr val="0F172A"/>
+                  <a:srgbClr val="1C1917"/>
                 </a:solidFill>
                 <a:latin typeface="Microsoft JhengHei"/>
               </a:rPr>
@@ -21257,7 +21257,7 @@
             <a:r>
               <a:rPr sz="1000" b="0">
                 <a:solidFill>
-                  <a:srgbClr val="64748B"/>
+                  <a:srgbClr val="78716C"/>
                 </a:solidFill>
                 <a:latin typeface="Microsoft JhengHei"/>
               </a:rPr>
@@ -21282,7 +21282,7 @@
           </a:prstGeom>
           <a:ln w="9525">
             <a:solidFill>
-              <a:srgbClr val="E2E8F0"/>
+              <a:srgbClr val="E7E5E0"/>
             </a:solidFill>
           </a:ln>
         </p:spPr>
@@ -21331,7 +21331,7 @@
             <a:r>
               <a:rPr sz="1100" b="1">
                 <a:solidFill>
-                  <a:srgbClr val="0F172A"/>
+                  <a:srgbClr val="1C1917"/>
                 </a:solidFill>
                 <a:latin typeface="Microsoft JhengHei"/>
               </a:rPr>
@@ -21347,7 +21347,7 @@
             <a:r>
               <a:rPr sz="1100" b="1">
                 <a:solidFill>
-                  <a:srgbClr val="0F172A"/>
+                  <a:srgbClr val="1C1917"/>
                 </a:solidFill>
                 <a:latin typeface="Microsoft JhengHei"/>
               </a:rPr>
@@ -21386,7 +21386,7 @@
             <a:r>
               <a:rPr sz="1000" b="0">
                 <a:solidFill>
-                  <a:srgbClr val="0F172A"/>
+                  <a:srgbClr val="D97706"/>
                 </a:solidFill>
                 <a:latin typeface="Microsoft JhengHei"/>
               </a:rPr>
@@ -21402,7 +21402,7 @@
             <a:r>
               <a:rPr sz="1000" b="0">
                 <a:solidFill>
-                  <a:srgbClr val="0F172A"/>
+                  <a:srgbClr val="D97706"/>
                 </a:solidFill>
                 <a:latin typeface="Microsoft JhengHei"/>
               </a:rPr>
@@ -21426,7 +21426,7 @@
             <a:avLst/>
           </a:prstGeom>
           <a:solidFill>
-            <a:srgbClr val="E2E8F0"/>
+            <a:srgbClr val="E7E5E0"/>
           </a:solidFill>
           <a:ln>
             <a:noFill/>
@@ -21473,7 +21473,7 @@
           <a:noFill/>
           <a:ln w="9525">
             <a:solidFill>
-              <a:srgbClr val="E2E8F0"/>
+              <a:srgbClr val="E7E5E0"/>
             </a:solidFill>
           </a:ln>
         </p:spPr>
@@ -21529,7 +21529,7 @@
             <a:r>
               <a:rPr sz="3000" b="1">
                 <a:solidFill>
-                  <a:srgbClr val="0F172A"/>
+                  <a:srgbClr val="D97706"/>
                 </a:solidFill>
                 <a:latin typeface="Microsoft JhengHei"/>
               </a:rPr>
@@ -21568,7 +21568,7 @@
             <a:r>
               <a:rPr sz="1800" b="1">
                 <a:solidFill>
-                  <a:srgbClr val="0F172A"/>
+                  <a:srgbClr val="1C1917"/>
                 </a:solidFill>
                 <a:latin typeface="Microsoft JhengHei"/>
               </a:rPr>
@@ -21607,7 +21607,7 @@
             <a:r>
               <a:rPr sz="1000" b="0">
                 <a:solidFill>
-                  <a:srgbClr val="64748B"/>
+                  <a:srgbClr val="78716C"/>
                 </a:solidFill>
                 <a:latin typeface="Microsoft JhengHei"/>
               </a:rPr>
@@ -21632,7 +21632,7 @@
           </a:prstGeom>
           <a:ln w="9525">
             <a:solidFill>
-              <a:srgbClr val="E2E8F0"/>
+              <a:srgbClr val="E7E5E0"/>
             </a:solidFill>
           </a:ln>
         </p:spPr>
@@ -21681,7 +21681,7 @@
             <a:r>
               <a:rPr sz="1100" b="1">
                 <a:solidFill>
-                  <a:srgbClr val="0F172A"/>
+                  <a:srgbClr val="1C1917"/>
                 </a:solidFill>
                 <a:latin typeface="Microsoft JhengHei"/>
               </a:rPr>
@@ -21697,7 +21697,7 @@
             <a:r>
               <a:rPr sz="1100" b="1">
                 <a:solidFill>
-                  <a:srgbClr val="0F172A"/>
+                  <a:srgbClr val="1C1917"/>
                 </a:solidFill>
                 <a:latin typeface="Microsoft JhengHei"/>
               </a:rPr>
@@ -21736,7 +21736,7 @@
             <a:r>
               <a:rPr sz="1000" b="0">
                 <a:solidFill>
-                  <a:srgbClr val="0F172A"/>
+                  <a:srgbClr val="D97706"/>
                 </a:solidFill>
                 <a:latin typeface="Microsoft JhengHei"/>
               </a:rPr>
@@ -21752,7 +21752,7 @@
             <a:r>
               <a:rPr sz="1000" b="0">
                 <a:solidFill>
-                  <a:srgbClr val="0F172A"/>
+                  <a:srgbClr val="D97706"/>
                 </a:solidFill>
                 <a:latin typeface="Microsoft JhengHei"/>
               </a:rPr>
@@ -21776,7 +21776,7 @@
             <a:avLst/>
           </a:prstGeom>
           <a:solidFill>
-            <a:srgbClr val="E2E8F0"/>
+            <a:srgbClr val="E7E5E0"/>
           </a:solidFill>
           <a:ln>
             <a:noFill/>
@@ -21823,7 +21823,7 @@
           <a:noFill/>
           <a:ln w="9525">
             <a:solidFill>
-              <a:srgbClr val="E2E8F0"/>
+              <a:srgbClr val="E7E5E0"/>
             </a:solidFill>
           </a:ln>
         </p:spPr>
@@ -21879,7 +21879,7 @@
             <a:r>
               <a:rPr sz="3000" b="1">
                 <a:solidFill>
-                  <a:srgbClr val="0F172A"/>
+                  <a:srgbClr val="D97706"/>
                 </a:solidFill>
                 <a:latin typeface="Microsoft JhengHei"/>
               </a:rPr>
@@ -21918,7 +21918,7 @@
             <a:r>
               <a:rPr sz="1800" b="1">
                 <a:solidFill>
-                  <a:srgbClr val="0F172A"/>
+                  <a:srgbClr val="1C1917"/>
                 </a:solidFill>
                 <a:latin typeface="Microsoft JhengHei"/>
               </a:rPr>
@@ -21957,7 +21957,7 @@
             <a:r>
               <a:rPr sz="1000" b="0">
                 <a:solidFill>
-                  <a:srgbClr val="64748B"/>
+                  <a:srgbClr val="78716C"/>
                 </a:solidFill>
                 <a:latin typeface="Microsoft JhengHei"/>
               </a:rPr>
@@ -21982,7 +21982,7 @@
           </a:prstGeom>
           <a:ln w="9525">
             <a:solidFill>
-              <a:srgbClr val="E2E8F0"/>
+              <a:srgbClr val="E7E5E0"/>
             </a:solidFill>
           </a:ln>
         </p:spPr>
@@ -22031,7 +22031,7 @@
             <a:r>
               <a:rPr sz="1100" b="1">
                 <a:solidFill>
-                  <a:srgbClr val="0F172A"/>
+                  <a:srgbClr val="1C1917"/>
                 </a:solidFill>
                 <a:latin typeface="Microsoft JhengHei"/>
               </a:rPr>
@@ -22047,7 +22047,7 @@
             <a:r>
               <a:rPr sz="1100" b="1">
                 <a:solidFill>
-                  <a:srgbClr val="0F172A"/>
+                  <a:srgbClr val="1C1917"/>
                 </a:solidFill>
                 <a:latin typeface="Microsoft JhengHei"/>
               </a:rPr>
@@ -22086,7 +22086,7 @@
             <a:r>
               <a:rPr sz="1000" b="0">
                 <a:solidFill>
-                  <a:srgbClr val="0F172A"/>
+                  <a:srgbClr val="D97706"/>
                 </a:solidFill>
                 <a:latin typeface="Microsoft JhengHei"/>
               </a:rPr>
@@ -22102,7 +22102,7 @@
             <a:r>
               <a:rPr sz="1000" b="0">
                 <a:solidFill>
-                  <a:srgbClr val="0F172A"/>
+                  <a:srgbClr val="D97706"/>
                 </a:solidFill>
                 <a:latin typeface="Microsoft JhengHei"/>
               </a:rPr>
@@ -22141,7 +22141,7 @@
             <a:r>
               <a:rPr sz="1000" b="1">
                 <a:solidFill>
-                  <a:srgbClr val="0F172A"/>
+                  <a:srgbClr val="D97706"/>
                 </a:solidFill>
                 <a:latin typeface="Microsoft JhengHei"/>
               </a:rPr>
@@ -22180,7 +22180,7 @@
             <a:r>
               <a:rPr sz="1600" b="1">
                 <a:solidFill>
-                  <a:srgbClr val="0F172A"/>
+                  <a:srgbClr val="1C1917"/>
                 </a:solidFill>
                 <a:latin typeface="Microsoft JhengHei"/>
               </a:rPr>
@@ -22219,7 +22219,7 @@
             <a:r>
               <a:rPr sz="900" b="0">
                 <a:solidFill>
-                  <a:srgbClr val="64748B"/>
+                  <a:srgbClr val="78716C"/>
                 </a:solidFill>
                 <a:latin typeface="Microsoft JhengHei"/>
               </a:rPr>
@@ -22258,7 +22258,7 @@
             <a:r>
               <a:rPr sz="1600" b="1">
                 <a:solidFill>
-                  <a:srgbClr val="0F172A"/>
+                  <a:srgbClr val="1C1917"/>
                 </a:solidFill>
                 <a:latin typeface="Microsoft JhengHei"/>
               </a:rPr>
@@ -22297,7 +22297,7 @@
             <a:r>
               <a:rPr sz="900" b="0">
                 <a:solidFill>
-                  <a:srgbClr val="64748B"/>
+                  <a:srgbClr val="78716C"/>
                 </a:solidFill>
                 <a:latin typeface="Microsoft JhengHei"/>
               </a:rPr>
@@ -22336,7 +22336,7 @@
             <a:r>
               <a:rPr sz="1600" b="1">
                 <a:solidFill>
-                  <a:srgbClr val="0F172A"/>
+                  <a:srgbClr val="1C1917"/>
                 </a:solidFill>
                 <a:latin typeface="Microsoft JhengHei"/>
               </a:rPr>
@@ -22375,7 +22375,7 @@
             <a:r>
               <a:rPr sz="900" b="0">
                 <a:solidFill>
-                  <a:srgbClr val="64748B"/>
+                  <a:srgbClr val="78716C"/>
                 </a:solidFill>
                 <a:latin typeface="Microsoft JhengHei"/>
               </a:rPr>
@@ -22414,7 +22414,7 @@
             <a:r>
               <a:rPr sz="1600" b="1">
                 <a:solidFill>
-                  <a:srgbClr val="0F172A"/>
+                  <a:srgbClr val="1C1917"/>
                 </a:solidFill>
                 <a:latin typeface="Microsoft JhengHei"/>
               </a:rPr>
@@ -22453,7 +22453,7 @@
             <a:r>
               <a:rPr sz="900" b="0">
                 <a:solidFill>
-                  <a:srgbClr val="64748B"/>
+                  <a:srgbClr val="78716C"/>
                 </a:solidFill>
                 <a:latin typeface="Microsoft JhengHei"/>
               </a:rPr>
@@ -22492,7 +22492,7 @@
             <a:r>
               <a:rPr sz="1600" b="1">
                 <a:solidFill>
-                  <a:srgbClr val="0F172A"/>
+                  <a:srgbClr val="1C1917"/>
                 </a:solidFill>
                 <a:latin typeface="Microsoft JhengHei"/>
               </a:rPr>
@@ -22531,7 +22531,7 @@
             <a:r>
               <a:rPr sz="900" b="0">
                 <a:solidFill>
-                  <a:srgbClr val="64748B"/>
+                  <a:srgbClr val="78716C"/>
                 </a:solidFill>
                 <a:latin typeface="Microsoft JhengHei"/>
               </a:rPr>
@@ -22570,7 +22570,7 @@
             <a:r>
               <a:rPr sz="900" b="0">
                 <a:solidFill>
-                  <a:srgbClr val="64748B"/>
+                  <a:srgbClr val="78716C"/>
                 </a:solidFill>
                 <a:latin typeface="Microsoft JhengHei"/>
               </a:rPr>
@@ -22609,7 +22609,7 @@
             <a:r>
               <a:rPr sz="900" b="0">
                 <a:solidFill>
-                  <a:srgbClr val="64748B"/>
+                  <a:srgbClr val="78716C"/>
                 </a:solidFill>
                 <a:latin typeface="Microsoft JhengHei"/>
               </a:rPr>
@@ -22651,7 +22651,7 @@
             <a:avLst/>
           </a:prstGeom>
           <a:solidFill>
-            <a:srgbClr val="FFFFFF"/>
+            <a:srgbClr val="FAFAF7"/>
           </a:solidFill>
           <a:ln>
             <a:noFill/>
@@ -22694,7 +22694,7 @@
             <a:avLst/>
           </a:prstGeom>
           <a:solidFill>
-            <a:srgbClr val="E2E8F0"/>
+            <a:srgbClr val="E7E5E0"/>
           </a:solidFill>
           <a:ln>
             <a:noFill/>
@@ -22752,7 +22752,7 @@
             <a:r>
               <a:rPr sz="1400" b="1">
                 <a:solidFill>
-                  <a:srgbClr val="64748B"/>
+                  <a:srgbClr val="78716C"/>
                 </a:solidFill>
                 <a:latin typeface="Microsoft JhengHei"/>
               </a:rPr>
@@ -22791,7 +22791,7 @@
             <a:r>
               <a:rPr sz="4000" b="1">
                 <a:solidFill>
-                  <a:srgbClr val="0F172A"/>
+                  <a:srgbClr val="1C1917"/>
                 </a:solidFill>
                 <a:latin typeface="Microsoft JhengHei"/>
               </a:rPr>
@@ -22830,7 +22830,7 @@
             <a:r>
               <a:rPr sz="1600" b="0">
                 <a:solidFill>
-                  <a:srgbClr val="64748B"/>
+                  <a:srgbClr val="78716C"/>
                 </a:solidFill>
                 <a:latin typeface="Microsoft JhengHei"/>
               </a:rPr>
@@ -22858,7 +22858,7 @@
           <a:noFill/>
           <a:ln w="9525">
             <a:solidFill>
-              <a:srgbClr val="E2E8F0"/>
+              <a:srgbClr val="E7E5E0"/>
             </a:solidFill>
           </a:ln>
         </p:spPr>
@@ -22914,7 +22914,7 @@
             <a:r>
               <a:rPr sz="1400" b="1">
                 <a:solidFill>
-                  <a:srgbClr val="0F172A"/>
+                  <a:srgbClr val="D97706"/>
                 </a:solidFill>
                 <a:latin typeface="Microsoft JhengHei"/>
               </a:rPr>
@@ -22953,7 +22953,7 @@
             <a:r>
               <a:rPr sz="1200" b="1">
                 <a:solidFill>
-                  <a:srgbClr val="0F172A"/>
+                  <a:srgbClr val="1C1917"/>
                 </a:solidFill>
                 <a:latin typeface="Microsoft JhengHei"/>
               </a:rPr>
@@ -22979,7 +22979,7 @@
             </a:avLst>
           </a:prstGeom>
           <a:solidFill>
-            <a:srgbClr val="0F172A"/>
+            <a:srgbClr val="D97706"/>
           </a:solidFill>
           <a:ln>
             <a:noFill/>
@@ -23037,7 +23037,7 @@
             <a:r>
               <a:rPr sz="1200" b="1">
                 <a:solidFill>
-                  <a:srgbClr val="0F172A"/>
+                  <a:srgbClr val="1C1917"/>
                 </a:solidFill>
                 <a:latin typeface="Microsoft JhengHei"/>
               </a:rPr>
@@ -23076,7 +23076,7 @@
             <a:r>
               <a:rPr sz="1200" b="1">
                 <a:solidFill>
-                  <a:srgbClr val="0F172A"/>
+                  <a:srgbClr val="1C1917"/>
                 </a:solidFill>
                 <a:latin typeface="Microsoft JhengHei"/>
               </a:rPr>
@@ -23102,7 +23102,7 @@
             </a:avLst>
           </a:prstGeom>
           <a:solidFill>
-            <a:srgbClr val="0F172A"/>
+            <a:srgbClr val="D97706"/>
           </a:solidFill>
           <a:ln>
             <a:noFill/>
@@ -23160,7 +23160,7 @@
             <a:r>
               <a:rPr sz="1200" b="1">
                 <a:solidFill>
-                  <a:srgbClr val="0F172A"/>
+                  <a:srgbClr val="1C1917"/>
                 </a:solidFill>
                 <a:latin typeface="Microsoft JhengHei"/>
               </a:rPr>
@@ -23199,7 +23199,7 @@
             <a:r>
               <a:rPr sz="1200" b="1">
                 <a:solidFill>
-                  <a:srgbClr val="0F172A"/>
+                  <a:srgbClr val="1C1917"/>
                 </a:solidFill>
                 <a:latin typeface="Microsoft JhengHei"/>
               </a:rPr>
@@ -23225,7 +23225,7 @@
             </a:avLst>
           </a:prstGeom>
           <a:solidFill>
-            <a:srgbClr val="0F172A"/>
+            <a:srgbClr val="D97706"/>
           </a:solidFill>
           <a:ln>
             <a:noFill/>
@@ -23283,7 +23283,7 @@
             <a:r>
               <a:rPr sz="1200" b="1">
                 <a:solidFill>
-                  <a:srgbClr val="0F172A"/>
+                  <a:srgbClr val="1C1917"/>
                 </a:solidFill>
                 <a:latin typeface="Microsoft JhengHei"/>
               </a:rPr>
@@ -23322,7 +23322,7 @@
             <a:r>
               <a:rPr sz="1200" b="1">
                 <a:solidFill>
-                  <a:srgbClr val="0F172A"/>
+                  <a:srgbClr val="1C1917"/>
                 </a:solidFill>
                 <a:latin typeface="Microsoft JhengHei"/>
               </a:rPr>
@@ -23348,7 +23348,7 @@
             </a:avLst>
           </a:prstGeom>
           <a:solidFill>
-            <a:srgbClr val="0F172A"/>
+            <a:srgbClr val="D97706"/>
           </a:solidFill>
           <a:ln>
             <a:noFill/>
@@ -23406,7 +23406,7 @@
             <a:r>
               <a:rPr sz="1200" b="1">
                 <a:solidFill>
-                  <a:srgbClr val="0F172A"/>
+                  <a:srgbClr val="1C1917"/>
                 </a:solidFill>
                 <a:latin typeface="Microsoft JhengHei"/>
               </a:rPr>
@@ -23445,7 +23445,7 @@
             <a:r>
               <a:rPr sz="1200" b="1">
                 <a:solidFill>
-                  <a:srgbClr val="0F172A"/>
+                  <a:srgbClr val="1C1917"/>
                 </a:solidFill>
                 <a:latin typeface="Microsoft JhengHei"/>
               </a:rPr>
@@ -23471,7 +23471,7 @@
             </a:avLst>
           </a:prstGeom>
           <a:solidFill>
-            <a:srgbClr val="0F172A"/>
+            <a:srgbClr val="D97706"/>
           </a:solidFill>
           <a:ln>
             <a:noFill/>
@@ -23529,7 +23529,7 @@
             <a:r>
               <a:rPr sz="1200" b="1">
                 <a:solidFill>
-                  <a:srgbClr val="0F172A"/>
+                  <a:srgbClr val="1C1917"/>
                 </a:solidFill>
                 <a:latin typeface="Microsoft JhengHei"/>
               </a:rPr>
@@ -23568,7 +23568,7 @@
             <a:r>
               <a:rPr sz="1200" b="1">
                 <a:solidFill>
-                  <a:srgbClr val="0F172A"/>
+                  <a:srgbClr val="1C1917"/>
                 </a:solidFill>
                 <a:latin typeface="Microsoft JhengHei"/>
               </a:rPr>
@@ -23594,7 +23594,7 @@
             </a:avLst>
           </a:prstGeom>
           <a:solidFill>
-            <a:srgbClr val="0F172A"/>
+            <a:srgbClr val="D97706"/>
           </a:solidFill>
           <a:ln>
             <a:noFill/>
@@ -23652,7 +23652,7 @@
             <a:r>
               <a:rPr sz="1200" b="1">
                 <a:solidFill>
-                  <a:srgbClr val="0F172A"/>
+                  <a:srgbClr val="1C1917"/>
                 </a:solidFill>
                 <a:latin typeface="Microsoft JhengHei"/>
               </a:rPr>
@@ -23680,7 +23680,7 @@
           <a:noFill/>
           <a:ln w="9525">
             <a:solidFill>
-              <a:srgbClr val="E2E8F0"/>
+              <a:srgbClr val="E7E5E0"/>
             </a:solidFill>
           </a:ln>
         </p:spPr>
@@ -23736,7 +23736,7 @@
             <a:r>
               <a:rPr sz="1400" b="1">
                 <a:solidFill>
-                  <a:srgbClr val="0F172A"/>
+                  <a:srgbClr val="D97706"/>
                 </a:solidFill>
                 <a:latin typeface="Microsoft JhengHei"/>
               </a:rPr>
@@ -23775,7 +23775,7 @@
             <a:r>
               <a:rPr sz="1200" b="0">
                 <a:solidFill>
-                  <a:srgbClr val="0F172A"/>
+                  <a:srgbClr val="1C1917"/>
                 </a:solidFill>
                 <a:latin typeface="Microsoft JhengHei"/>
               </a:rPr>
@@ -23791,7 +23791,7 @@
             <a:r>
               <a:rPr sz="1200" b="0">
                 <a:solidFill>
-                  <a:srgbClr val="0F172A"/>
+                  <a:srgbClr val="1C1917"/>
                 </a:solidFill>
                 <a:latin typeface="Microsoft JhengHei"/>
               </a:rPr>
@@ -23807,7 +23807,7 @@
             <a:r>
               <a:rPr sz="1200" b="0">
                 <a:solidFill>
-                  <a:srgbClr val="0F172A"/>
+                  <a:srgbClr val="1C1917"/>
                 </a:solidFill>
                 <a:latin typeface="Microsoft JhengHei"/>
               </a:rPr>
@@ -23823,7 +23823,7 @@
             <a:r>
               <a:rPr sz="1200" b="0">
                 <a:solidFill>
-                  <a:srgbClr val="0F172A"/>
+                  <a:srgbClr val="1C1917"/>
                 </a:solidFill>
                 <a:latin typeface="Microsoft JhengHei"/>
               </a:rPr>
@@ -23839,7 +23839,7 @@
             <a:r>
               <a:rPr sz="1200" b="0">
                 <a:solidFill>
-                  <a:srgbClr val="0F172A"/>
+                  <a:srgbClr val="1C1917"/>
                 </a:solidFill>
                 <a:latin typeface="Microsoft JhengHei"/>
               </a:rPr>
@@ -23855,7 +23855,7 @@
             <a:r>
               <a:rPr sz="1200" b="0">
                 <a:solidFill>
-                  <a:srgbClr val="0F172A"/>
+                  <a:srgbClr val="1C1917"/>
                 </a:solidFill>
                 <a:latin typeface="Microsoft JhengHei"/>
               </a:rPr>
@@ -23871,7 +23871,7 @@
             <a:r>
               <a:rPr sz="1200" b="0">
                 <a:solidFill>
-                  <a:srgbClr val="0F172A"/>
+                  <a:srgbClr val="1C1917"/>
                 </a:solidFill>
                 <a:latin typeface="Microsoft JhengHei"/>
               </a:rPr>
@@ -23887,7 +23887,7 @@
             <a:r>
               <a:rPr sz="1200" b="0">
                 <a:solidFill>
-                  <a:srgbClr val="0F172A"/>
+                  <a:srgbClr val="1C1917"/>
                 </a:solidFill>
                 <a:latin typeface="Microsoft JhengHei"/>
               </a:rPr>
@@ -23903,7 +23903,7 @@
             <a:r>
               <a:rPr sz="1200" b="0">
                 <a:solidFill>
-                  <a:srgbClr val="0F172A"/>
+                  <a:srgbClr val="1C1917"/>
                 </a:solidFill>
                 <a:latin typeface="Microsoft JhengHei"/>
               </a:rPr>
@@ -23919,7 +23919,7 @@
             <a:r>
               <a:rPr sz="1200" b="0">
                 <a:solidFill>
-                  <a:srgbClr val="0F172A"/>
+                  <a:srgbClr val="1C1917"/>
                 </a:solidFill>
                 <a:latin typeface="Microsoft JhengHei"/>
               </a:rPr>
@@ -23935,7 +23935,7 @@
             <a:r>
               <a:rPr sz="1200" b="0">
                 <a:solidFill>
-                  <a:srgbClr val="0F172A"/>
+                  <a:srgbClr val="1C1917"/>
                 </a:solidFill>
                 <a:latin typeface="Microsoft JhengHei"/>
               </a:rPr>
@@ -23951,7 +23951,7 @@
             <a:r>
               <a:rPr sz="1200" b="0">
                 <a:solidFill>
-                  <a:srgbClr val="0F172A"/>
+                  <a:srgbClr val="1C1917"/>
                 </a:solidFill>
                 <a:latin typeface="Microsoft JhengHei"/>
               </a:rPr>
@@ -23967,7 +23967,7 @@
             <a:r>
               <a:rPr sz="1200" b="0">
                 <a:solidFill>
-                  <a:srgbClr val="0F172A"/>
+                  <a:srgbClr val="1C1917"/>
                 </a:solidFill>
                 <a:latin typeface="Microsoft JhengHei"/>
               </a:rPr>
@@ -23983,7 +23983,7 @@
             <a:r>
               <a:rPr sz="1200" b="0">
                 <a:solidFill>
-                  <a:srgbClr val="0F172A"/>
+                  <a:srgbClr val="1C1917"/>
                 </a:solidFill>
                 <a:latin typeface="Microsoft JhengHei"/>
               </a:rPr>
@@ -23999,7 +23999,7 @@
             <a:r>
               <a:rPr sz="1200" b="0">
                 <a:solidFill>
-                  <a:srgbClr val="0F172A"/>
+                  <a:srgbClr val="1C1917"/>
                 </a:solidFill>
                 <a:latin typeface="Microsoft JhengHei"/>
               </a:rPr>
@@ -24015,7 +24015,7 @@
             <a:r>
               <a:rPr sz="1200" b="0">
                 <a:solidFill>
-                  <a:srgbClr val="0F172A"/>
+                  <a:srgbClr val="1C1917"/>
                 </a:solidFill>
                 <a:latin typeface="Microsoft JhengHei"/>
               </a:rPr>
@@ -24054,7 +24054,7 @@
             <a:r>
               <a:rPr sz="900" b="0">
                 <a:solidFill>
-                  <a:srgbClr val="64748B"/>
+                  <a:srgbClr val="78716C"/>
                 </a:solidFill>
                 <a:latin typeface="Microsoft JhengHei"/>
               </a:rPr>
@@ -24093,7 +24093,7 @@
             <a:r>
               <a:rPr sz="900" b="0">
                 <a:solidFill>
-                  <a:srgbClr val="64748B"/>
+                  <a:srgbClr val="78716C"/>
                 </a:solidFill>
                 <a:latin typeface="Microsoft JhengHei"/>
               </a:rPr>

--- a/docs/串連系統_簡報.pptx
+++ b/docs/串連系統_簡報.pptx
@@ -13674,7 +13674,7 @@
                 </a:solidFill>
                 <a:latin typeface="Microsoft JhengHei"/>
               </a:rPr>
-              <a:t>把三個問題拆成三個模組，背後用 25+ 演算法支撐</a:t>
+              <a:t>三個問題 → 三個模組 → 三張一眼就懂的圖</a:t>
             </a:r>
           </a:p>
         </p:txBody>
@@ -13853,33 +13853,33 @@
         </p:nvSpPr>
         <p:spPr>
           <a:xfrm>
-            <a:off x="883767" y="4023360"/>
-            <a:ext cx="2834640" cy="457200"/>
-          </a:xfrm>
-          <a:prstGeom prst="rect">
-            <a:avLst/>
-          </a:prstGeom>
-          <a:noFill/>
-        </p:spPr>
-        <p:txBody>
-          <a:bodyPr wrap="square" lIns="0" rIns="0" tIns="0" bIns="0" anchor="t">
-            <a:spAutoFit/>
-          </a:bodyPr>
-          <a:lstStyle/>
-          <a:p>
-            <a:pPr algn="l">
-              <a:lnSpc>
-                <a:spcPct val="120000"/>
-              </a:lnSpc>
-            </a:pPr>
-            <a:r>
-              <a:rPr sz="1200" b="1">
+            <a:off x="883767" y="3977640"/>
+            <a:ext cx="2834640" cy="320040"/>
+          </a:xfrm>
+          <a:prstGeom prst="rect">
+            <a:avLst/>
+          </a:prstGeom>
+          <a:noFill/>
+        </p:spPr>
+        <p:txBody>
+          <a:bodyPr wrap="square" lIns="0" rIns="0" tIns="0" bIns="0" anchor="t">
+            <a:spAutoFit/>
+          </a:bodyPr>
+          <a:lstStyle/>
+          <a:p>
+            <a:pPr algn="l">
+              <a:lnSpc>
+                <a:spcPct val="120000"/>
+              </a:lnSpc>
+            </a:pPr>
+            <a:r>
+              <a:rPr sz="1100" b="1">
                 <a:solidFill>
                   <a:srgbClr val="78716C"/>
                 </a:solidFill>
                 <a:latin typeface="Microsoft JhengHei"/>
               </a:rPr>
-              <a:t>核心演算法</a:t>
+              <a:t>做什麼</a:t>
             </a:r>
           </a:p>
         </p:txBody>
@@ -13892,8 +13892,8 @@
         </p:nvSpPr>
         <p:spPr>
           <a:xfrm>
-            <a:off x="883767" y="4343400"/>
-            <a:ext cx="2834640" cy="1371600"/>
+            <a:off x="883767" y="4297680"/>
+            <a:ext cx="2834640" cy="822960"/>
           </a:xfrm>
           <a:prstGeom prst="rect">
             <a:avLst/>
@@ -13918,7 +13918,7 @@
                 </a:solidFill>
                 <a:latin typeface="Microsoft JhengHei"/>
               </a:rPr>
-              <a:t>Empirical Percentile · Time Decay</a:t>
+              <a:t>把分散訊號加總成一個分數，</a:t>
             </a:r>
           </a:p>
           <a:p>
@@ -13934,20 +13934,98 @@
                 </a:solidFill>
                 <a:latin typeface="Microsoft JhengHei"/>
               </a:rPr>
-              <a:t>Gini Coefficient</a:t>
-            </a:r>
-          </a:p>
-        </p:txBody>
-      </p:sp>
-      <p:sp>
-        <p:nvSpPr>
-          <p:cNvPr id="12" name="Rounded Rectangle 11"/>
+              <a:t>排出真正最忙的人</a:t>
+            </a:r>
+          </a:p>
+        </p:txBody>
+      </p:sp>
+      <p:sp>
+        <p:nvSpPr>
+          <p:cNvPr id="12" name="TextBox 11"/>
+          <p:cNvSpPr txBox="1"/>
+          <p:nvPr/>
+        </p:nvSpPr>
+        <p:spPr>
+          <a:xfrm>
+            <a:off x="883767" y="5074920"/>
+            <a:ext cx="2834640" cy="320040"/>
+          </a:xfrm>
+          <a:prstGeom prst="rect">
+            <a:avLst/>
+          </a:prstGeom>
+          <a:noFill/>
+        </p:spPr>
+        <p:txBody>
+          <a:bodyPr wrap="square" lIns="0" rIns="0" tIns="0" bIns="0" anchor="t">
+            <a:spAutoFit/>
+          </a:bodyPr>
+          <a:lstStyle/>
+          <a:p>
+            <a:pPr algn="l">
+              <a:lnSpc>
+                <a:spcPct val="120000"/>
+              </a:lnSpc>
+            </a:pPr>
+            <a:r>
+              <a:rPr sz="1100" b="1">
+                <a:solidFill>
+                  <a:srgbClr val="78716C"/>
+                </a:solidFill>
+                <a:latin typeface="Microsoft JhengHei"/>
+              </a:rPr>
+              <a:t>產出</a:t>
+            </a:r>
+          </a:p>
+        </p:txBody>
+      </p:sp>
+      <p:sp>
+        <p:nvSpPr>
+          <p:cNvPr id="13" name="TextBox 12"/>
+          <p:cNvSpPr txBox="1"/>
+          <p:nvPr/>
+        </p:nvSpPr>
+        <p:spPr>
+          <a:xfrm>
+            <a:off x="883767" y="5394960"/>
+            <a:ext cx="2834640" cy="365760"/>
+          </a:xfrm>
+          <a:prstGeom prst="rect">
+            <a:avLst/>
+          </a:prstGeom>
+          <a:noFill/>
+        </p:spPr>
+        <p:txBody>
+          <a:bodyPr wrap="square" lIns="0" rIns="0" tIns="0" bIns="0" anchor="t">
+            <a:spAutoFit/>
+          </a:bodyPr>
+          <a:lstStyle/>
+          <a:p>
+            <a:pPr algn="l">
+              <a:lnSpc>
+                <a:spcPct val="120000"/>
+              </a:lnSpc>
+            </a:pPr>
+            <a:r>
+              <a:rPr sz="1300" b="1">
+                <a:solidFill>
+                  <a:srgbClr val="1C1917"/>
+                </a:solidFill>
+                <a:latin typeface="Microsoft JhengHei"/>
+              </a:rPr>
+              <a:t>一條彩色長條圖</a:t>
+            </a:r>
+          </a:p>
+        </p:txBody>
+      </p:sp>
+      <p:sp>
+        <p:nvSpPr>
+          <p:cNvPr id="14" name="Rounded Rectangle 13"/>
           <p:cNvSpPr/>
           <p:nvPr/>
         </p:nvSpPr>
         <p:spPr>
           <a:xfrm>
-            <a:off x="883767" y="5532120"/>
+            <a:off x="883767" y="5669280"/>
             <a:ext cx="2834640" cy="411480"/>
           </a:xfrm>
           <a:prstGeom prst="roundRect">
@@ -13988,14 +14066,14 @@
                 </a:solidFill>
                 <a:latin typeface="Microsoft JhengHei"/>
               </a:rPr>
-              <a:t>P75/P90/P95</a:t>
-            </a:r>
-          </a:p>
-        </p:txBody>
-      </p:sp>
-      <p:sp>
-        <p:nvSpPr>
-          <p:cNvPr id="13" name="Rounded Rectangle 12"/>
+              <a:t>3 秒看完全部員工狀態</a:t>
+            </a:r>
+          </a:p>
+        </p:txBody>
+      </p:sp>
+      <p:sp>
+        <p:nvSpPr>
+          <p:cNvPr id="15" name="Rounded Rectangle 14"/>
           <p:cNvSpPr/>
           <p:nvPr/>
         </p:nvSpPr>
@@ -14040,7 +14118,7 @@
       </p:sp>
       <p:sp>
         <p:nvSpPr>
-          <p:cNvPr id="14" name="Rectangle 13"/>
+          <p:cNvPr id="16" name="Rectangle 15"/>
           <p:cNvSpPr/>
           <p:nvPr/>
         </p:nvSpPr>
@@ -14083,7 +14161,7 @@
       </p:sp>
       <p:sp>
         <p:nvSpPr>
-          <p:cNvPr id="15" name="TextBox 14"/>
+          <p:cNvPr id="17" name="TextBox 16"/>
           <p:cNvSpPr txBox="1"/>
           <p:nvPr/>
         </p:nvSpPr>
@@ -14122,7 +14200,7 @@
       </p:sp>
       <p:sp>
         <p:nvSpPr>
-          <p:cNvPr id="16" name="TextBox 15"/>
+          <p:cNvPr id="18" name="TextBox 17"/>
           <p:cNvSpPr txBox="1"/>
           <p:nvPr/>
         </p:nvSpPr>
@@ -14161,53 +14239,53 @@
       </p:sp>
       <p:sp>
         <p:nvSpPr>
-          <p:cNvPr id="17" name="TextBox 16"/>
-          <p:cNvSpPr txBox="1"/>
-          <p:nvPr/>
-        </p:nvSpPr>
-        <p:spPr>
-          <a:xfrm>
-            <a:off x="4678527" y="4023360"/>
-            <a:ext cx="2834640" cy="457200"/>
-          </a:xfrm>
-          <a:prstGeom prst="rect">
-            <a:avLst/>
-          </a:prstGeom>
-          <a:noFill/>
-        </p:spPr>
-        <p:txBody>
-          <a:bodyPr wrap="square" lIns="0" rIns="0" tIns="0" bIns="0" anchor="t">
-            <a:spAutoFit/>
-          </a:bodyPr>
-          <a:lstStyle/>
-          <a:p>
-            <a:pPr algn="l">
-              <a:lnSpc>
-                <a:spcPct val="120000"/>
-              </a:lnSpc>
-            </a:pPr>
-            <a:r>
-              <a:rPr sz="1200" b="1">
+          <p:cNvPr id="19" name="TextBox 18"/>
+          <p:cNvSpPr txBox="1"/>
+          <p:nvPr/>
+        </p:nvSpPr>
+        <p:spPr>
+          <a:xfrm>
+            <a:off x="4678527" y="3977640"/>
+            <a:ext cx="2834640" cy="320040"/>
+          </a:xfrm>
+          <a:prstGeom prst="rect">
+            <a:avLst/>
+          </a:prstGeom>
+          <a:noFill/>
+        </p:spPr>
+        <p:txBody>
+          <a:bodyPr wrap="square" lIns="0" rIns="0" tIns="0" bIns="0" anchor="t">
+            <a:spAutoFit/>
+          </a:bodyPr>
+          <a:lstStyle/>
+          <a:p>
+            <a:pPr algn="l">
+              <a:lnSpc>
+                <a:spcPct val="120000"/>
+              </a:lnSpc>
+            </a:pPr>
+            <a:r>
+              <a:rPr sz="1100" b="1">
                 <a:solidFill>
                   <a:srgbClr val="78716C"/>
                 </a:solidFill>
                 <a:latin typeface="Microsoft JhengHei"/>
               </a:rPr>
-              <a:t>核心演算法</a:t>
-            </a:r>
-          </a:p>
-        </p:txBody>
-      </p:sp>
-      <p:sp>
-        <p:nvSpPr>
-          <p:cNvPr id="18" name="TextBox 17"/>
-          <p:cNvSpPr txBox="1"/>
-          <p:nvPr/>
-        </p:nvSpPr>
-        <p:spPr>
-          <a:xfrm>
-            <a:off x="4678527" y="4343400"/>
-            <a:ext cx="2834640" cy="1371600"/>
+              <a:t>做什麼</a:t>
+            </a:r>
+          </a:p>
+        </p:txBody>
+      </p:sp>
+      <p:sp>
+        <p:nvSpPr>
+          <p:cNvPr id="20" name="TextBox 19"/>
+          <p:cNvSpPr txBox="1"/>
+          <p:nvPr/>
+        </p:nvSpPr>
+        <p:spPr>
+          <a:xfrm>
+            <a:off x="4678527" y="4297680"/>
+            <a:ext cx="2834640" cy="822960"/>
           </a:xfrm>
           <a:prstGeom prst="rect">
             <a:avLst/>
@@ -14232,7 +14310,7 @@
                 </a:solidFill>
                 <a:latin typeface="Microsoft JhengHei"/>
               </a:rPr>
-              <a:t>BM25F · Asymmetric Detection</a:t>
+              <a:t>六個面向同時體檢，</a:t>
             </a:r>
           </a:p>
           <a:p>
@@ -14248,20 +14326,98 @@
                 </a:solidFill>
                 <a:latin typeface="Microsoft JhengHei"/>
               </a:rPr>
-              <a:t>6D Weighted Scoring</a:t>
-            </a:r>
-          </a:p>
-        </p:txBody>
-      </p:sp>
-      <p:sp>
-        <p:nvSpPr>
-          <p:cNvPr id="19" name="Rounded Rectangle 18"/>
+              <a:t>看哪邊凹下去</a:t>
+            </a:r>
+          </a:p>
+        </p:txBody>
+      </p:sp>
+      <p:sp>
+        <p:nvSpPr>
+          <p:cNvPr id="21" name="TextBox 20"/>
+          <p:cNvSpPr txBox="1"/>
+          <p:nvPr/>
+        </p:nvSpPr>
+        <p:spPr>
+          <a:xfrm>
+            <a:off x="4678527" y="5074920"/>
+            <a:ext cx="2834640" cy="320040"/>
+          </a:xfrm>
+          <a:prstGeom prst="rect">
+            <a:avLst/>
+          </a:prstGeom>
+          <a:noFill/>
+        </p:spPr>
+        <p:txBody>
+          <a:bodyPr wrap="square" lIns="0" rIns="0" tIns="0" bIns="0" anchor="t">
+            <a:spAutoFit/>
+          </a:bodyPr>
+          <a:lstStyle/>
+          <a:p>
+            <a:pPr algn="l">
+              <a:lnSpc>
+                <a:spcPct val="120000"/>
+              </a:lnSpc>
+            </a:pPr>
+            <a:r>
+              <a:rPr sz="1100" b="1">
+                <a:solidFill>
+                  <a:srgbClr val="78716C"/>
+                </a:solidFill>
+                <a:latin typeface="Microsoft JhengHei"/>
+              </a:rPr>
+              <a:t>產出</a:t>
+            </a:r>
+          </a:p>
+        </p:txBody>
+      </p:sp>
+      <p:sp>
+        <p:nvSpPr>
+          <p:cNvPr id="22" name="TextBox 21"/>
+          <p:cNvSpPr txBox="1"/>
+          <p:nvPr/>
+        </p:nvSpPr>
+        <p:spPr>
+          <a:xfrm>
+            <a:off x="4678527" y="5394960"/>
+            <a:ext cx="2834640" cy="365760"/>
+          </a:xfrm>
+          <a:prstGeom prst="rect">
+            <a:avLst/>
+          </a:prstGeom>
+          <a:noFill/>
+        </p:spPr>
+        <p:txBody>
+          <a:bodyPr wrap="square" lIns="0" rIns="0" tIns="0" bIns="0" anchor="t">
+            <a:spAutoFit/>
+          </a:bodyPr>
+          <a:lstStyle/>
+          <a:p>
+            <a:pPr algn="l">
+              <a:lnSpc>
+                <a:spcPct val="120000"/>
+              </a:lnSpc>
+            </a:pPr>
+            <a:r>
+              <a:rPr sz="1300" b="1">
+                <a:solidFill>
+                  <a:srgbClr val="1C1917"/>
+                </a:solidFill>
+                <a:latin typeface="Microsoft JhengHei"/>
+              </a:rPr>
+              <a:t>雷達圖 + 待辦清單</a:t>
+            </a:r>
+          </a:p>
+        </p:txBody>
+      </p:sp>
+      <p:sp>
+        <p:nvSpPr>
+          <p:cNvPr id="23" name="Rounded Rectangle 22"/>
           <p:cNvSpPr/>
           <p:nvPr/>
         </p:nvSpPr>
         <p:spPr>
           <a:xfrm>
-            <a:off x="4678527" y="5532120"/>
+            <a:off x="4678527" y="5669280"/>
             <a:ext cx="2834640" cy="411480"/>
           </a:xfrm>
           <a:prstGeom prst="roundRect">
@@ -14302,14 +14458,14 @@
                 </a:solidFill>
                 <a:latin typeface="Microsoft JhengHei"/>
               </a:rPr>
-              <a:t>權重 22/18/15/18/12/15</a:t>
-            </a:r>
-          </a:p>
-        </p:txBody>
-      </p:sp>
-      <p:sp>
-        <p:nvSpPr>
-          <p:cNvPr id="20" name="Rounded Rectangle 19"/>
+              <a:t>業績爛之前先看到</a:t>
+            </a:r>
+          </a:p>
+        </p:txBody>
+      </p:sp>
+      <p:sp>
+        <p:nvSpPr>
+          <p:cNvPr id="24" name="Rounded Rectangle 23"/>
           <p:cNvSpPr/>
           <p:nvPr/>
         </p:nvSpPr>
@@ -14354,7 +14510,7 @@
       </p:sp>
       <p:sp>
         <p:nvSpPr>
-          <p:cNvPr id="21" name="Rectangle 20"/>
+          <p:cNvPr id="25" name="Rectangle 24"/>
           <p:cNvSpPr/>
           <p:nvPr/>
         </p:nvSpPr>
@@ -14397,7 +14553,7 @@
       </p:sp>
       <p:sp>
         <p:nvSpPr>
-          <p:cNvPr id="22" name="TextBox 21"/>
+          <p:cNvPr id="26" name="TextBox 25"/>
           <p:cNvSpPr txBox="1"/>
           <p:nvPr/>
         </p:nvSpPr>
@@ -14436,7 +14592,7 @@
       </p:sp>
       <p:sp>
         <p:nvSpPr>
-          <p:cNvPr id="23" name="TextBox 22"/>
+          <p:cNvPr id="27" name="TextBox 26"/>
           <p:cNvSpPr txBox="1"/>
           <p:nvPr/>
         </p:nvSpPr>
@@ -14475,53 +14631,53 @@
       </p:sp>
       <p:sp>
         <p:nvSpPr>
-          <p:cNvPr id="24" name="TextBox 23"/>
-          <p:cNvSpPr txBox="1"/>
-          <p:nvPr/>
-        </p:nvSpPr>
-        <p:spPr>
-          <a:xfrm>
-            <a:off x="8473287" y="4023360"/>
-            <a:ext cx="2834640" cy="457200"/>
-          </a:xfrm>
-          <a:prstGeom prst="rect">
-            <a:avLst/>
-          </a:prstGeom>
-          <a:noFill/>
-        </p:spPr>
-        <p:txBody>
-          <a:bodyPr wrap="square" lIns="0" rIns="0" tIns="0" bIns="0" anchor="t">
-            <a:spAutoFit/>
-          </a:bodyPr>
-          <a:lstStyle/>
-          <a:p>
-            <a:pPr algn="l">
-              <a:lnSpc>
-                <a:spcPct val="120000"/>
-              </a:lnSpc>
-            </a:pPr>
-            <a:r>
-              <a:rPr sz="1200" b="1">
+          <p:cNvPr id="28" name="TextBox 27"/>
+          <p:cNvSpPr txBox="1"/>
+          <p:nvPr/>
+        </p:nvSpPr>
+        <p:spPr>
+          <a:xfrm>
+            <a:off x="8473287" y="3977640"/>
+            <a:ext cx="2834640" cy="320040"/>
+          </a:xfrm>
+          <a:prstGeom prst="rect">
+            <a:avLst/>
+          </a:prstGeom>
+          <a:noFill/>
+        </p:spPr>
+        <p:txBody>
+          <a:bodyPr wrap="square" lIns="0" rIns="0" tIns="0" bIns="0" anchor="t">
+            <a:spAutoFit/>
+          </a:bodyPr>
+          <a:lstStyle/>
+          <a:p>
+            <a:pPr algn="l">
+              <a:lnSpc>
+                <a:spcPct val="120000"/>
+              </a:lnSpc>
+            </a:pPr>
+            <a:r>
+              <a:rPr sz="1100" b="1">
                 <a:solidFill>
                   <a:srgbClr val="78716C"/>
                 </a:solidFill>
                 <a:latin typeface="Microsoft JhengHei"/>
               </a:rPr>
-              <a:t>核心演算法</a:t>
-            </a:r>
-          </a:p>
-        </p:txBody>
-      </p:sp>
-      <p:sp>
-        <p:nvSpPr>
-          <p:cNvPr id="25" name="TextBox 24"/>
-          <p:cNvSpPr txBox="1"/>
-          <p:nvPr/>
-        </p:nvSpPr>
-        <p:spPr>
-          <a:xfrm>
-            <a:off x="8473287" y="4343400"/>
-            <a:ext cx="2834640" cy="1371600"/>
+              <a:t>做什麼</a:t>
+            </a:r>
+          </a:p>
+        </p:txBody>
+      </p:sp>
+      <p:sp>
+        <p:nvSpPr>
+          <p:cNvPr id="29" name="TextBox 28"/>
+          <p:cNvSpPr txBox="1"/>
+          <p:nvPr/>
+        </p:nvSpPr>
+        <p:spPr>
+          <a:xfrm>
+            <a:off x="8473287" y="4297680"/>
+            <a:ext cx="2834640" cy="822960"/>
           </a:xfrm>
           <a:prstGeom prst="rect">
             <a:avLst/>
@@ -14546,7 +14702,7 @@
                 </a:solidFill>
                 <a:latin typeface="Microsoft JhengHei"/>
               </a:rPr>
-              <a:t>Cohort Adjustment</a:t>
+              <a:t>跟同期其他主管比，</a:t>
             </a:r>
           </a:p>
           <a:p>
@@ -14562,20 +14718,98 @@
                 </a:solidFill>
                 <a:latin typeface="Microsoft JhengHei"/>
               </a:rPr>
-              <a:t>Linear Regression Baseline</a:t>
-            </a:r>
-          </a:p>
-        </p:txBody>
-      </p:sp>
-      <p:sp>
-        <p:nvSpPr>
-          <p:cNvPr id="26" name="Rounded Rectangle 25"/>
+              <a:t>扣掉大環境影響</a:t>
+            </a:r>
+          </a:p>
+        </p:txBody>
+      </p:sp>
+      <p:sp>
+        <p:nvSpPr>
+          <p:cNvPr id="30" name="TextBox 29"/>
+          <p:cNvSpPr txBox="1"/>
+          <p:nvPr/>
+        </p:nvSpPr>
+        <p:spPr>
+          <a:xfrm>
+            <a:off x="8473287" y="5074920"/>
+            <a:ext cx="2834640" cy="320040"/>
+          </a:xfrm>
+          <a:prstGeom prst="rect">
+            <a:avLst/>
+          </a:prstGeom>
+          <a:noFill/>
+        </p:spPr>
+        <p:txBody>
+          <a:bodyPr wrap="square" lIns="0" rIns="0" tIns="0" bIns="0" anchor="t">
+            <a:spAutoFit/>
+          </a:bodyPr>
+          <a:lstStyle/>
+          <a:p>
+            <a:pPr algn="l">
+              <a:lnSpc>
+                <a:spcPct val="120000"/>
+              </a:lnSpc>
+            </a:pPr>
+            <a:r>
+              <a:rPr sz="1100" b="1">
+                <a:solidFill>
+                  <a:srgbClr val="78716C"/>
+                </a:solidFill>
+                <a:latin typeface="Microsoft JhengHei"/>
+              </a:rPr>
+              <a:t>產出</a:t>
+            </a:r>
+          </a:p>
+        </p:txBody>
+      </p:sp>
+      <p:sp>
+        <p:nvSpPr>
+          <p:cNvPr id="31" name="TextBox 30"/>
+          <p:cNvSpPr txBox="1"/>
+          <p:nvPr/>
+        </p:nvSpPr>
+        <p:spPr>
+          <a:xfrm>
+            <a:off x="8473287" y="5394960"/>
+            <a:ext cx="2834640" cy="365760"/>
+          </a:xfrm>
+          <a:prstGeom prst="rect">
+            <a:avLst/>
+          </a:prstGeom>
+          <a:noFill/>
+        </p:spPr>
+        <p:txBody>
+          <a:bodyPr wrap="square" lIns="0" rIns="0" tIns="0" bIns="0" anchor="t">
+            <a:spAutoFit/>
+          </a:bodyPr>
+          <a:lstStyle/>
+          <a:p>
+            <a:pPr algn="l">
+              <a:lnSpc>
+                <a:spcPct val="120000"/>
+              </a:lnSpc>
+            </a:pPr>
+            <a:r>
+              <a:rPr sz="1300" b="1">
+                <a:solidFill>
+                  <a:srgbClr val="1C1917"/>
+                </a:solidFill>
+                <a:latin typeface="Microsoft JhengHei"/>
+              </a:rPr>
+              <a:t>主管排行 + 趨勢圖</a:t>
+            </a:r>
+          </a:p>
+        </p:txBody>
+      </p:sp>
+      <p:sp>
+        <p:nvSpPr>
+          <p:cNvPr id="32" name="Rounded Rectangle 31"/>
           <p:cNvSpPr/>
           <p:nvPr/>
         </p:nvSpPr>
         <p:spPr>
           <a:xfrm>
-            <a:off x="8473287" y="5532120"/>
+            <a:off x="8473287" y="5669280"/>
             <a:ext cx="2834640" cy="411480"/>
           </a:xfrm>
           <a:prstGeom prst="roundRect">
@@ -14616,14 +14850,14 @@
                 </a:solidFill>
                 <a:latin typeface="Microsoft JhengHei"/>
               </a:rPr>
-              <a:t>v2.2 學術創舉</a:t>
-            </a:r>
-          </a:p>
-        </p:txBody>
-      </p:sp>
-      <p:sp>
-        <p:nvSpPr>
-          <p:cNvPr id="27" name="TextBox 26"/>
+              <a:t>不再被大盤冤枉</a:t>
+            </a:r>
+          </a:p>
+        </p:txBody>
+      </p:sp>
+      <p:sp>
+        <p:nvSpPr>
+          <p:cNvPr id="33" name="TextBox 32"/>
           <p:cNvSpPr txBox="1"/>
           <p:nvPr/>
         </p:nvSpPr>
@@ -14662,7 +14896,7 @@
       </p:sp>
       <p:sp>
         <p:nvSpPr>
-          <p:cNvPr id="28" name="TextBox 27"/>
+          <p:cNvPr id="34" name="TextBox 33"/>
           <p:cNvSpPr txBox="1"/>
           <p:nvPr/>
         </p:nvSpPr>

--- a/docs/串連系統_簡報.pptx
+++ b/docs/串連系統_簡報.pptx
@@ -3191,25 +3191,140 @@
       </p:sp>
       <p:sp>
         <p:nvSpPr>
-          <p:cNvPr id="4" name="Rounded Rectangle 3"/>
+          <p:cNvPr id="4" name="TextBox 3"/>
+          <p:cNvSpPr txBox="1"/>
+          <p:nvPr/>
+        </p:nvSpPr>
+        <p:spPr>
+          <a:xfrm>
+            <a:off x="731520" y="640080"/>
+            <a:ext cx="7315200" cy="320040"/>
+          </a:xfrm>
+          <a:prstGeom prst="rect">
+            <a:avLst/>
+          </a:prstGeom>
+          <a:noFill/>
+        </p:spPr>
+        <p:txBody>
+          <a:bodyPr wrap="square" lIns="0" rIns="0" tIns="0" bIns="0" anchor="t">
+            <a:spAutoFit/>
+          </a:bodyPr>
+          <a:lstStyle/>
+          <a:p>
+            <a:pPr algn="l">
+              <a:lnSpc>
+                <a:spcPct val="120000"/>
+              </a:lnSpc>
+            </a:pPr>
+            <a:r>
+              <a:rPr sz="1100" b="1">
+                <a:solidFill>
+                  <a:srgbClr val="78716C"/>
+                </a:solidFill>
+                <a:latin typeface="Microsoft JhengHei"/>
+              </a:rPr>
+              <a:t>資訊管理導論 · 期末專案</a:t>
+            </a:r>
+          </a:p>
+        </p:txBody>
+      </p:sp>
+      <p:sp>
+        <p:nvSpPr>
+          <p:cNvPr id="5" name="TextBox 4"/>
+          <p:cNvSpPr txBox="1"/>
+          <p:nvPr/>
+        </p:nvSpPr>
+        <p:spPr>
+          <a:xfrm>
+            <a:off x="731520" y="2743200"/>
+            <a:ext cx="10972800" cy="1280160"/>
+          </a:xfrm>
+          <a:prstGeom prst="rect">
+            <a:avLst/>
+          </a:prstGeom>
+          <a:noFill/>
+        </p:spPr>
+        <p:txBody>
+          <a:bodyPr wrap="square" lIns="0" rIns="0" tIns="0" bIns="0" anchor="t">
+            <a:spAutoFit/>
+          </a:bodyPr>
+          <a:lstStyle/>
+          <a:p>
+            <a:pPr algn="l">
+              <a:lnSpc>
+                <a:spcPct val="100000"/>
+              </a:lnSpc>
+            </a:pPr>
+            <a:r>
+              <a:rPr sz="8800" b="1">
+                <a:solidFill>
+                  <a:srgbClr val="1C1917"/>
+                </a:solidFill>
+                <a:latin typeface="Microsoft JhengHei"/>
+              </a:rPr>
+              <a:t>串連系統</a:t>
+            </a:r>
+          </a:p>
+        </p:txBody>
+      </p:sp>
+      <p:sp>
+        <p:nvSpPr>
+          <p:cNvPr id="6" name="TextBox 5"/>
+          <p:cNvSpPr txBox="1"/>
+          <p:nvPr/>
+        </p:nvSpPr>
+        <p:spPr>
+          <a:xfrm>
+            <a:off x="731520" y="3977639"/>
+            <a:ext cx="10972800" cy="640080"/>
+          </a:xfrm>
+          <a:prstGeom prst="rect">
+            <a:avLst/>
+          </a:prstGeom>
+          <a:noFill/>
+        </p:spPr>
+        <p:txBody>
+          <a:bodyPr wrap="square" lIns="0" rIns="0" tIns="0" bIns="0" anchor="t">
+            <a:spAutoFit/>
+          </a:bodyPr>
+          <a:lstStyle/>
+          <a:p>
+            <a:pPr algn="l">
+              <a:lnSpc>
+                <a:spcPct val="120000"/>
+              </a:lnSpc>
+            </a:pPr>
+            <a:r>
+              <a:rPr sz="2600" b="0">
+                <a:solidFill>
+                  <a:srgbClr val="1C1917"/>
+                </a:solidFill>
+                <a:latin typeface="Microsoft JhengHei"/>
+              </a:rPr>
+              <a:t>管理決策支援平台</a:t>
+            </a:r>
+          </a:p>
+        </p:txBody>
+      </p:sp>
+      <p:sp>
+        <p:nvSpPr>
+          <p:cNvPr id="7" name="Rectangle 6"/>
           <p:cNvSpPr/>
           <p:nvPr/>
         </p:nvSpPr>
         <p:spPr>
           <a:xfrm>
-            <a:off x="10058400" y="457200"/>
-            <a:ext cx="1645920" cy="411480"/>
-          </a:xfrm>
-          <a:prstGeom prst="roundRect">
-            <a:avLst>
-              <a:gd name="adj" fmla="val 40000"/>
-            </a:avLst>
-          </a:prstGeom>
-          <a:noFill/>
-          <a:ln w="12700">
-            <a:solidFill>
-              <a:srgbClr val="1C1917"/>
-            </a:solidFill>
+            <a:off x="731520" y="4846320"/>
+            <a:ext cx="548640" cy="15875"/>
+          </a:xfrm>
+          <a:prstGeom prst="rect">
+            <a:avLst/>
+          </a:prstGeom>
+          <a:solidFill>
+            <a:srgbClr val="D97706"/>
+          </a:solidFill>
+          <a:ln>
+            <a:noFill/>
           </a:ln>
         </p:spPr>
         <p:style>
@@ -3227,174 +3342,48 @@
           </a:fontRef>
         </p:style>
         <p:txBody>
-          <a:bodyPr rtlCol="0" anchor="ctr" lIns="182880" rIns="182880" tIns="0" bIns="0" wrap="square"/>
+          <a:bodyPr rtlCol="0" anchor="ctr"/>
           <a:lstStyle/>
           <a:p>
             <a:pPr algn="ctr"/>
-            <a:r>
-              <a:rPr sz="1200" b="0">
-                <a:solidFill>
-                  <a:srgbClr val="1C1917"/>
-                </a:solidFill>
-                <a:latin typeface="Microsoft JhengHei"/>
-              </a:rPr>
-              <a:t>資訊管理導論</a:t>
-            </a:r>
-          </a:p>
-        </p:txBody>
-      </p:sp>
-      <p:sp>
-        <p:nvSpPr>
-          <p:cNvPr id="5" name="TextBox 4"/>
-          <p:cNvSpPr txBox="1"/>
-          <p:nvPr/>
-        </p:nvSpPr>
-        <p:spPr>
-          <a:xfrm>
-            <a:off x="731520" y="2194560"/>
-            <a:ext cx="10058400" cy="1828800"/>
-          </a:xfrm>
-          <a:prstGeom prst="rect">
-            <a:avLst/>
-          </a:prstGeom>
-          <a:noFill/>
-        </p:spPr>
-        <p:txBody>
-          <a:bodyPr wrap="square" lIns="0" rIns="0" tIns="0" bIns="0" anchor="t">
-            <a:spAutoFit/>
-          </a:bodyPr>
-          <a:lstStyle/>
-          <a:p>
-            <a:pPr algn="l">
-              <a:lnSpc>
-                <a:spcPct val="120000"/>
-              </a:lnSpc>
-            </a:pPr>
-            <a:r>
-              <a:rPr sz="6400" b="1">
-                <a:solidFill>
-                  <a:srgbClr val="1C1917"/>
-                </a:solidFill>
-                <a:latin typeface="Microsoft JhengHei"/>
-              </a:rPr>
-              <a:t>串連系統 v2.2</a:t>
-            </a:r>
-          </a:p>
-        </p:txBody>
-      </p:sp>
-      <p:sp>
-        <p:nvSpPr>
-          <p:cNvPr id="6" name="TextBox 5"/>
-          <p:cNvSpPr txBox="1"/>
-          <p:nvPr/>
-        </p:nvSpPr>
-        <p:spPr>
-          <a:xfrm>
-            <a:off x="731520" y="3108960"/>
-            <a:ext cx="10058400" cy="914400"/>
-          </a:xfrm>
-          <a:prstGeom prst="rect">
-            <a:avLst/>
-          </a:prstGeom>
-          <a:noFill/>
-        </p:spPr>
-        <p:txBody>
-          <a:bodyPr wrap="square" lIns="0" rIns="0" tIns="0" bIns="0" anchor="t">
-            <a:spAutoFit/>
-          </a:bodyPr>
-          <a:lstStyle/>
-          <a:p>
-            <a:pPr algn="l">
-              <a:lnSpc>
-                <a:spcPct val="120000"/>
-              </a:lnSpc>
-            </a:pPr>
-            <a:r>
-              <a:rPr sz="2400" b="0">
-                <a:solidFill>
-                  <a:srgbClr val="1C1917"/>
-                </a:solidFill>
-                <a:latin typeface="Microsoft JhengHei"/>
-              </a:rPr>
-              <a:t>管理決策支援平台 · 從訊號到行動</a:t>
-            </a:r>
-          </a:p>
-        </p:txBody>
-      </p:sp>
-      <p:sp>
-        <p:nvSpPr>
-          <p:cNvPr id="7" name="TextBox 6"/>
-          <p:cNvSpPr txBox="1"/>
-          <p:nvPr/>
-        </p:nvSpPr>
-        <p:spPr>
-          <a:xfrm>
-            <a:off x="731520" y="4206240"/>
-            <a:ext cx="10058400" cy="548640"/>
-          </a:xfrm>
-          <a:prstGeom prst="rect">
-            <a:avLst/>
-          </a:prstGeom>
-          <a:noFill/>
-        </p:spPr>
-        <p:txBody>
-          <a:bodyPr wrap="square" lIns="0" rIns="0" tIns="0" bIns="0" anchor="t">
-            <a:spAutoFit/>
-          </a:bodyPr>
-          <a:lstStyle/>
-          <a:p>
-            <a:pPr algn="l">
-              <a:lnSpc>
-                <a:spcPct val="120000"/>
-              </a:lnSpc>
-            </a:pPr>
-            <a:r>
-              <a:rPr sz="1800" b="0">
+          </a:p>
+        </p:txBody>
+      </p:sp>
+      <p:sp>
+        <p:nvSpPr>
+          <p:cNvPr id="8" name="TextBox 7"/>
+          <p:cNvSpPr txBox="1"/>
+          <p:nvPr/>
+        </p:nvSpPr>
+        <p:spPr>
+          <a:xfrm>
+            <a:off x="731520" y="5074920"/>
+            <a:ext cx="10058400" cy="365760"/>
+          </a:xfrm>
+          <a:prstGeom prst="rect">
+            <a:avLst/>
+          </a:prstGeom>
+          <a:noFill/>
+        </p:spPr>
+        <p:txBody>
+          <a:bodyPr wrap="square" lIns="0" rIns="0" tIns="0" bIns="0" anchor="t">
+            <a:spAutoFit/>
+          </a:bodyPr>
+          <a:lstStyle/>
+          <a:p>
+            <a:pPr algn="l">
+              <a:lnSpc>
+                <a:spcPct val="120000"/>
+              </a:lnSpc>
+            </a:pPr>
+            <a:r>
+              <a:rPr sz="1100" b="0">
                 <a:solidFill>
                   <a:srgbClr val="78716C"/>
                 </a:solidFill>
                 <a:latin typeface="Microsoft JhengHei"/>
               </a:rPr>
-              <a:t>Chuanlien · A Decision Support Platform</a:t>
-            </a:r>
-          </a:p>
-        </p:txBody>
-      </p:sp>
-      <p:sp>
-        <p:nvSpPr>
-          <p:cNvPr id="8" name="TextBox 7"/>
-          <p:cNvSpPr txBox="1"/>
-          <p:nvPr/>
-        </p:nvSpPr>
-        <p:spPr>
-          <a:xfrm>
-            <a:off x="731520" y="5852160"/>
-            <a:ext cx="1828800" cy="365760"/>
-          </a:xfrm>
-          <a:prstGeom prst="rect">
-            <a:avLst/>
-          </a:prstGeom>
-          <a:noFill/>
-        </p:spPr>
-        <p:txBody>
-          <a:bodyPr wrap="square" lIns="0" rIns="0" tIns="0" bIns="0" anchor="t">
-            <a:spAutoFit/>
-          </a:bodyPr>
-          <a:lstStyle/>
-          <a:p>
-            <a:pPr algn="l">
-              <a:lnSpc>
-                <a:spcPct val="120000"/>
-              </a:lnSpc>
-            </a:pPr>
-            <a:r>
-              <a:rPr sz="1200" b="1">
-                <a:solidFill>
-                  <a:srgbClr val="1C1917"/>
-                </a:solidFill>
-                <a:latin typeface="Microsoft JhengHei"/>
-              </a:rPr>
-              <a:t>第 13 組</a:t>
+              <a:t>第 13 組　|　林聿平　組員 A　組員 B　組員 C　組員 D</a:t>
             </a:r>
           </a:p>
         </p:txBody>
@@ -3407,33 +3396,33 @@
         </p:nvSpPr>
         <p:spPr>
           <a:xfrm>
-            <a:off x="731520" y="6126480"/>
-            <a:ext cx="10058400" cy="365760"/>
-          </a:xfrm>
-          <a:prstGeom prst="rect">
-            <a:avLst/>
-          </a:prstGeom>
-          <a:noFill/>
-        </p:spPr>
-        <p:txBody>
-          <a:bodyPr wrap="square" lIns="0" rIns="0" tIns="0" bIns="0" anchor="t">
-            <a:spAutoFit/>
-          </a:bodyPr>
-          <a:lstStyle/>
-          <a:p>
-            <a:pPr algn="l">
-              <a:lnSpc>
-                <a:spcPct val="120000"/>
-              </a:lnSpc>
-            </a:pPr>
-            <a:r>
-              <a:rPr sz="1400" b="1">
-                <a:solidFill>
-                  <a:srgbClr val="1C1917"/>
-                </a:solidFill>
-                <a:latin typeface="Microsoft JhengHei"/>
-              </a:rPr>
-              <a:t>林聿平　組員 A　組員 B　組員 C　組員 D</a:t>
+            <a:off x="731520" y="5440680"/>
+            <a:ext cx="10058400" cy="320040"/>
+          </a:xfrm>
+          <a:prstGeom prst="rect">
+            <a:avLst/>
+          </a:prstGeom>
+          <a:noFill/>
+        </p:spPr>
+        <p:txBody>
+          <a:bodyPr wrap="square" lIns="0" rIns="0" tIns="0" bIns="0" anchor="t">
+            <a:spAutoFit/>
+          </a:bodyPr>
+          <a:lstStyle/>
+          <a:p>
+            <a:pPr algn="l">
+              <a:lnSpc>
+                <a:spcPct val="120000"/>
+              </a:lnSpc>
+            </a:pPr>
+            <a:r>
+              <a:rPr sz="1000" b="0">
+                <a:solidFill>
+                  <a:srgbClr val="78716C"/>
+                </a:solidFill>
+                <a:latin typeface="Microsoft JhengHei"/>
+              </a:rPr>
+              <a:t>2026 年 5 月</a:t>
             </a:r>
           </a:p>
         </p:txBody>
@@ -9857,12 +9846,12 @@
         </p:nvSpPr>
         <p:spPr>
           <a:xfrm>
-            <a:off x="609447" y="2194560"/>
-            <a:ext cx="2606040" cy="3840480"/>
+            <a:off x="563727" y="2194560"/>
+            <a:ext cx="5394960" cy="1920240"/>
           </a:xfrm>
           <a:prstGeom prst="roundRect">
             <a:avLst>
-              <a:gd name="adj" fmla="val 8000"/>
+              <a:gd name="adj" fmla="val 5000"/>
             </a:avLst>
           </a:prstGeom>
           <a:noFill/>
@@ -9902,33 +9891,33 @@
         </p:nvSpPr>
         <p:spPr>
           <a:xfrm>
-            <a:off x="609447" y="2651760"/>
-            <a:ext cx="2606040" cy="1280160"/>
-          </a:xfrm>
-          <a:prstGeom prst="rect">
-            <a:avLst/>
-          </a:prstGeom>
-          <a:noFill/>
-        </p:spPr>
-        <p:txBody>
-          <a:bodyPr wrap="square" lIns="0" rIns="0" tIns="0" bIns="0" anchor="t">
-            <a:spAutoFit/>
-          </a:bodyPr>
-          <a:lstStyle/>
-          <a:p>
-            <a:pPr algn="ctr">
-              <a:lnSpc>
-                <a:spcPct val="120000"/>
-              </a:lnSpc>
-            </a:pPr>
-            <a:r>
-              <a:rPr sz="5600" b="1">
+            <a:off x="929487" y="2468880"/>
+            <a:ext cx="2286000" cy="1371600"/>
+          </a:xfrm>
+          <a:prstGeom prst="rect">
+            <a:avLst/>
+          </a:prstGeom>
+          <a:noFill/>
+        </p:spPr>
+        <p:txBody>
+          <a:bodyPr wrap="square" lIns="0" rIns="0" tIns="0" bIns="0" anchor="t">
+            <a:spAutoFit/>
+          </a:bodyPr>
+          <a:lstStyle/>
+          <a:p>
+            <a:pPr algn="l">
+              <a:lnSpc>
+                <a:spcPct val="100000"/>
+              </a:lnSpc>
+            </a:pPr>
+            <a:r>
+              <a:rPr sz="5400" b="1">
                 <a:solidFill>
                   <a:srgbClr val="D97706"/>
                 </a:solidFill>
                 <a:latin typeface="Microsoft JhengHei"/>
               </a:rPr>
-              <a:t>90s</a:t>
+              <a:t>90 秒</a:t>
             </a:r>
           </a:p>
         </p:txBody>
@@ -9941,21 +9930,21 @@
         </p:nvSpPr>
         <p:spPr>
           <a:xfrm>
-            <a:off x="883767" y="4206240"/>
-            <a:ext cx="2057400" cy="548640"/>
-          </a:xfrm>
-          <a:prstGeom prst="rect">
-            <a:avLst/>
-          </a:prstGeom>
-          <a:noFill/>
-        </p:spPr>
-        <p:txBody>
-          <a:bodyPr wrap="square" lIns="0" rIns="0" tIns="0" bIns="0" anchor="t">
-            <a:spAutoFit/>
-          </a:bodyPr>
-          <a:lstStyle/>
-          <a:p>
-            <a:pPr algn="ctr">
+            <a:off x="3215487" y="2606040"/>
+            <a:ext cx="2468880" cy="457200"/>
+          </a:xfrm>
+          <a:prstGeom prst="rect">
+            <a:avLst/>
+          </a:prstGeom>
+          <a:noFill/>
+        </p:spPr>
+        <p:txBody>
+          <a:bodyPr wrap="square" lIns="0" rIns="0" tIns="0" bIns="0" anchor="t">
+            <a:spAutoFit/>
+          </a:bodyPr>
+          <a:lstStyle/>
+          <a:p>
+            <a:pPr algn="l">
               <a:lnSpc>
                 <a:spcPct val="120000"/>
               </a:lnSpc>
@@ -9967,7 +9956,7 @@
                 </a:solidFill>
                 <a:latin typeface="Microsoft JhengHei"/>
               </a:rPr>
-              <a:t>員工負載狀態</a:t>
+              <a:t>看完員工負載狀態</a:t>
             </a:r>
           </a:p>
         </p:txBody>
@@ -9980,21 +9969,21 @@
         </p:nvSpPr>
         <p:spPr>
           <a:xfrm>
-            <a:off x="883767" y="4846320"/>
-            <a:ext cx="2057400" cy="1097280"/>
-          </a:xfrm>
-          <a:prstGeom prst="rect">
-            <a:avLst/>
-          </a:prstGeom>
-          <a:noFill/>
-        </p:spPr>
-        <p:txBody>
-          <a:bodyPr wrap="square" lIns="0" rIns="0" tIns="0" bIns="0" anchor="t">
-            <a:spAutoFit/>
-          </a:bodyPr>
-          <a:lstStyle/>
-          <a:p>
-            <a:pPr algn="ctr">
+            <a:off x="3215487" y="3108960"/>
+            <a:ext cx="2468880" cy="914400"/>
+          </a:xfrm>
+          <a:prstGeom prst="rect">
+            <a:avLst/>
+          </a:prstGeom>
+          <a:noFill/>
+        </p:spPr>
+        <p:txBody>
+          <a:bodyPr wrap="square" lIns="0" rIns="0" tIns="0" bIns="0" anchor="t">
+            <a:spAutoFit/>
+          </a:bodyPr>
+          <a:lstStyle/>
+          <a:p>
+            <a:pPr algn="l">
               <a:lnSpc>
                 <a:spcPct val="140000"/>
               </a:lnSpc>
@@ -10006,7 +9995,23 @@
                 </a:solidFill>
                 <a:latin typeface="Microsoft JhengHei"/>
               </a:rPr>
-              <a:t>從 30 分鐘訪談 → 90 秒掃一眼雷達圖</a:t>
+              <a:t>原本：跟 17 人輪流訪談 30 分鐘</a:t>
+            </a:r>
+          </a:p>
+          <a:p>
+            <a:pPr algn="l">
+              <a:lnSpc>
+                <a:spcPct val="140000"/>
+              </a:lnSpc>
+            </a:pPr>
+            <a:r>
+              <a:rPr sz="1200" b="0">
+                <a:solidFill>
+                  <a:srgbClr val="78716C"/>
+                </a:solidFill>
+                <a:latin typeface="Microsoft JhengHei"/>
+              </a:rPr>
+              <a:t>現在：打開儀表板 90 秒掃完</a:t>
             </a:r>
           </a:p>
         </p:txBody>
@@ -10019,12 +10024,12 @@
         </p:nvSpPr>
         <p:spPr>
           <a:xfrm>
-            <a:off x="3398367" y="2194560"/>
-            <a:ext cx="2606040" cy="3840480"/>
+            <a:off x="6233007" y="2194560"/>
+            <a:ext cx="5394960" cy="1920240"/>
           </a:xfrm>
           <a:prstGeom prst="roundRect">
             <a:avLst>
-              <a:gd name="adj" fmla="val 8000"/>
+              <a:gd name="adj" fmla="val 5000"/>
             </a:avLst>
           </a:prstGeom>
           <a:noFill/>
@@ -10064,27 +10069,27 @@
         </p:nvSpPr>
         <p:spPr>
           <a:xfrm>
-            <a:off x="3398367" y="2651760"/>
-            <a:ext cx="2606040" cy="1280160"/>
-          </a:xfrm>
-          <a:prstGeom prst="rect">
-            <a:avLst/>
-          </a:prstGeom>
-          <a:noFill/>
-        </p:spPr>
-        <p:txBody>
-          <a:bodyPr wrap="square" lIns="0" rIns="0" tIns="0" bIns="0" anchor="t">
-            <a:spAutoFit/>
-          </a:bodyPr>
-          <a:lstStyle/>
-          <a:p>
-            <a:pPr algn="ctr">
-              <a:lnSpc>
-                <a:spcPct val="120000"/>
-              </a:lnSpc>
-            </a:pPr>
-            <a:r>
-              <a:rPr sz="5600" b="1">
+            <a:off x="6598767" y="2468880"/>
+            <a:ext cx="2286000" cy="1371600"/>
+          </a:xfrm>
+          <a:prstGeom prst="rect">
+            <a:avLst/>
+          </a:prstGeom>
+          <a:noFill/>
+        </p:spPr>
+        <p:txBody>
+          <a:bodyPr wrap="square" lIns="0" rIns="0" tIns="0" bIns="0" anchor="t">
+            <a:spAutoFit/>
+          </a:bodyPr>
+          <a:lstStyle/>
+          <a:p>
+            <a:pPr algn="l">
+              <a:lnSpc>
+                <a:spcPct val="100000"/>
+              </a:lnSpc>
+            </a:pPr>
+            <a:r>
+              <a:rPr sz="5400" b="1">
                 <a:solidFill>
                   <a:srgbClr val="D97706"/>
                 </a:solidFill>
@@ -10103,21 +10108,21 @@
         </p:nvSpPr>
         <p:spPr>
           <a:xfrm>
-            <a:off x="3672687" y="4206240"/>
-            <a:ext cx="2057400" cy="548640"/>
-          </a:xfrm>
-          <a:prstGeom prst="rect">
-            <a:avLst/>
-          </a:prstGeom>
-          <a:noFill/>
-        </p:spPr>
-        <p:txBody>
-          <a:bodyPr wrap="square" lIns="0" rIns="0" tIns="0" bIns="0" anchor="t">
-            <a:spAutoFit/>
-          </a:bodyPr>
-          <a:lstStyle/>
-          <a:p>
-            <a:pPr algn="ctr">
+            <a:off x="8884767" y="2606040"/>
+            <a:ext cx="2468880" cy="457200"/>
+          </a:xfrm>
+          <a:prstGeom prst="rect">
+            <a:avLst/>
+          </a:prstGeom>
+          <a:noFill/>
+        </p:spPr>
+        <p:txBody>
+          <a:bodyPr wrap="square" lIns="0" rIns="0" tIns="0" bIns="0" anchor="t">
+            <a:spAutoFit/>
+          </a:bodyPr>
+          <a:lstStyle/>
+          <a:p>
+            <a:pPr algn="l">
               <a:lnSpc>
                 <a:spcPct val="120000"/>
               </a:lnSpc>
@@ -10129,7 +10134,7 @@
                 </a:solidFill>
                 <a:latin typeface="Microsoft JhengHei"/>
               </a:rPr>
-              <a:t>卡點 Recall</a:t>
+              <a:t>自動抓到卡點</a:t>
             </a:r>
           </a:p>
         </p:txBody>
@@ -10142,21 +10147,21 @@
         </p:nvSpPr>
         <p:spPr>
           <a:xfrm>
-            <a:off x="3672687" y="4846320"/>
-            <a:ext cx="2057400" cy="1097280"/>
-          </a:xfrm>
-          <a:prstGeom prst="rect">
-            <a:avLst/>
-          </a:prstGeom>
-          <a:noFill/>
-        </p:spPr>
-        <p:txBody>
-          <a:bodyPr wrap="square" lIns="0" rIns="0" tIns="0" bIns="0" anchor="t">
-            <a:spAutoFit/>
-          </a:bodyPr>
-          <a:lstStyle/>
-          <a:p>
-            <a:pPr algn="ctr">
+            <a:off x="8884767" y="3108960"/>
+            <a:ext cx="2468880" cy="914400"/>
+          </a:xfrm>
+          <a:prstGeom prst="rect">
+            <a:avLst/>
+          </a:prstGeom>
+          <a:noFill/>
+        </p:spPr>
+        <p:txBody>
+          <a:bodyPr wrap="square" lIns="0" rIns="0" tIns="0" bIns="0" anchor="t">
+            <a:spAutoFit/>
+          </a:bodyPr>
+          <a:lstStyle/>
+          <a:p>
+            <a:pPr algn="l">
               <a:lnSpc>
                 <a:spcPct val="140000"/>
               </a:lnSpc>
@@ -10168,7 +10173,23 @@
                 </a:solidFill>
                 <a:latin typeface="Microsoft JhengHei"/>
               </a:rPr>
-              <a:t>Asymmetric Detection 自動抓出主管直覺中的「卡」</a:t>
+              <a:t>原本：主管心中的卡點靠記憶</a:t>
+            </a:r>
+          </a:p>
+          <a:p>
+            <a:pPr algn="l">
+              <a:lnSpc>
+                <a:spcPct val="140000"/>
+              </a:lnSpc>
+            </a:pPr>
+            <a:r>
+              <a:rPr sz="1200" b="0">
+                <a:solidFill>
+                  <a:srgbClr val="78716C"/>
+                </a:solidFill>
+                <a:latin typeface="Microsoft JhengHei"/>
+              </a:rPr>
+              <a:t>現在：系統幫你抓出來 2/3</a:t>
             </a:r>
           </a:p>
         </p:txBody>
@@ -10181,12 +10202,12 @@
         </p:nvSpPr>
         <p:spPr>
           <a:xfrm>
-            <a:off x="6187287" y="2194560"/>
-            <a:ext cx="2606040" cy="3840480"/>
+            <a:off x="563727" y="4389120"/>
+            <a:ext cx="5394960" cy="1920240"/>
           </a:xfrm>
           <a:prstGeom prst="roundRect">
             <a:avLst>
-              <a:gd name="adj" fmla="val 8000"/>
+              <a:gd name="adj" fmla="val 5000"/>
             </a:avLst>
           </a:prstGeom>
           <a:noFill/>
@@ -10226,27 +10247,27 @@
         </p:nvSpPr>
         <p:spPr>
           <a:xfrm>
-            <a:off x="6187287" y="2651760"/>
-            <a:ext cx="2606040" cy="1280160"/>
-          </a:xfrm>
-          <a:prstGeom prst="rect">
-            <a:avLst/>
-          </a:prstGeom>
-          <a:noFill/>
-        </p:spPr>
-        <p:txBody>
-          <a:bodyPr wrap="square" lIns="0" rIns="0" tIns="0" bIns="0" anchor="t">
-            <a:spAutoFit/>
-          </a:bodyPr>
-          <a:lstStyle/>
-          <a:p>
-            <a:pPr algn="ctr">
-              <a:lnSpc>
-                <a:spcPct val="120000"/>
-              </a:lnSpc>
-            </a:pPr>
-            <a:r>
-              <a:rPr sz="5600" b="1">
+            <a:off x="929487" y="4663440"/>
+            <a:ext cx="2286000" cy="1371600"/>
+          </a:xfrm>
+          <a:prstGeom prst="rect">
+            <a:avLst/>
+          </a:prstGeom>
+          <a:noFill/>
+        </p:spPr>
+        <p:txBody>
+          <a:bodyPr wrap="square" lIns="0" rIns="0" tIns="0" bIns="0" anchor="t">
+            <a:spAutoFit/>
+          </a:bodyPr>
+          <a:lstStyle/>
+          <a:p>
+            <a:pPr algn="l">
+              <a:lnSpc>
+                <a:spcPct val="100000"/>
+              </a:lnSpc>
+            </a:pPr>
+            <a:r>
+              <a:rPr sz="5400" b="1">
                 <a:solidFill>
                   <a:srgbClr val="D97706"/>
                 </a:solidFill>
@@ -10265,21 +10286,21 @@
         </p:nvSpPr>
         <p:spPr>
           <a:xfrm>
-            <a:off x="6461607" y="4206240"/>
-            <a:ext cx="2057400" cy="548640"/>
-          </a:xfrm>
-          <a:prstGeom prst="rect">
-            <a:avLst/>
-          </a:prstGeom>
-          <a:noFill/>
-        </p:spPr>
-        <p:txBody>
-          <a:bodyPr wrap="square" lIns="0" rIns="0" tIns="0" bIns="0" anchor="t">
-            <a:spAutoFit/>
-          </a:bodyPr>
-          <a:lstStyle/>
-          <a:p>
-            <a:pPr algn="ctr">
+            <a:off x="3215487" y="4800600"/>
+            <a:ext cx="2468880" cy="457200"/>
+          </a:xfrm>
+          <a:prstGeom prst="rect">
+            <a:avLst/>
+          </a:prstGeom>
+          <a:noFill/>
+        </p:spPr>
+        <p:txBody>
+          <a:bodyPr wrap="square" lIns="0" rIns="0" tIns="0" bIns="0" anchor="t">
+            <a:spAutoFit/>
+          </a:bodyPr>
+          <a:lstStyle/>
+          <a:p>
+            <a:pPr algn="l">
               <a:lnSpc>
                 <a:spcPct val="120000"/>
               </a:lnSpc>
@@ -10291,7 +10312,7 @@
                 </a:solidFill>
                 <a:latin typeface="Microsoft JhengHei"/>
               </a:rPr>
-              <a:t>決策回看率</a:t>
+              <a:t>決策被回看</a:t>
             </a:r>
           </a:p>
         </p:txBody>
@@ -10304,21 +10325,21 @@
         </p:nvSpPr>
         <p:spPr>
           <a:xfrm>
-            <a:off x="6461607" y="4846320"/>
-            <a:ext cx="2057400" cy="1097280"/>
-          </a:xfrm>
-          <a:prstGeom prst="rect">
-            <a:avLst/>
-          </a:prstGeom>
-          <a:noFill/>
-        </p:spPr>
-        <p:txBody>
-          <a:bodyPr wrap="square" lIns="0" rIns="0" tIns="0" bIns="0" anchor="t">
-            <a:spAutoFit/>
-          </a:bodyPr>
-          <a:lstStyle/>
-          <a:p>
-            <a:pPr algn="ctr">
+            <a:off x="3215487" y="5303520"/>
+            <a:ext cx="2468880" cy="914400"/>
+          </a:xfrm>
+          <a:prstGeom prst="rect">
+            <a:avLst/>
+          </a:prstGeom>
+          <a:noFill/>
+        </p:spPr>
+        <p:txBody>
+          <a:bodyPr wrap="square" lIns="0" rIns="0" tIns="0" bIns="0" anchor="t">
+            <a:spAutoFit/>
+          </a:bodyPr>
+          <a:lstStyle/>
+          <a:p>
+            <a:pPr algn="l">
               <a:lnSpc>
                 <a:spcPct val="140000"/>
               </a:lnSpc>
@@ -10330,7 +10351,23 @@
                 </a:solidFill>
                 <a:latin typeface="Microsoft JhengHei"/>
               </a:rPr>
-              <a:t>v2.1 = 0%（沒人事後看）→ v2.2 = 強制回顧</a:t>
+              <a:t>原本：做完就忘、下次照樣憑感覺</a:t>
+            </a:r>
+          </a:p>
+          <a:p>
+            <a:pPr algn="l">
+              <a:lnSpc>
+                <a:spcPct val="140000"/>
+              </a:lnSpc>
+            </a:pPr>
+            <a:r>
+              <a:rPr sz="1200" b="0">
+                <a:solidFill>
+                  <a:srgbClr val="78716C"/>
+                </a:solidFill>
+                <a:latin typeface="Microsoft JhengHei"/>
+              </a:rPr>
+              <a:t>現在：每個決策強制事後評估</a:t>
             </a:r>
           </a:p>
         </p:txBody>
@@ -10343,12 +10380,12 @@
         </p:nvSpPr>
         <p:spPr>
           <a:xfrm>
-            <a:off x="8976207" y="2194560"/>
-            <a:ext cx="2606040" cy="3840480"/>
+            <a:off x="6233007" y="4389120"/>
+            <a:ext cx="5394960" cy="1920240"/>
           </a:xfrm>
           <a:prstGeom prst="roundRect">
             <a:avLst>
-              <a:gd name="adj" fmla="val 8000"/>
+              <a:gd name="adj" fmla="val 5000"/>
             </a:avLst>
           </a:prstGeom>
           <a:noFill/>
@@ -10388,33 +10425,33 @@
         </p:nvSpPr>
         <p:spPr>
           <a:xfrm>
-            <a:off x="8976207" y="2651760"/>
-            <a:ext cx="2606040" cy="1280160"/>
-          </a:xfrm>
-          <a:prstGeom prst="rect">
-            <a:avLst/>
-          </a:prstGeom>
-          <a:noFill/>
-        </p:spPr>
-        <p:txBody>
-          <a:bodyPr wrap="square" lIns="0" rIns="0" tIns="0" bIns="0" anchor="t">
-            <a:spAutoFit/>
-          </a:bodyPr>
-          <a:lstStyle/>
-          <a:p>
-            <a:pPr algn="ctr">
-              <a:lnSpc>
-                <a:spcPct val="120000"/>
-              </a:lnSpc>
-            </a:pPr>
-            <a:r>
-              <a:rPr sz="5600" b="1">
+            <a:off x="6598767" y="4663440"/>
+            <a:ext cx="2286000" cy="1371600"/>
+          </a:xfrm>
+          <a:prstGeom prst="rect">
+            <a:avLst/>
+          </a:prstGeom>
+          <a:noFill/>
+        </p:spPr>
+        <p:txBody>
+          <a:bodyPr wrap="square" lIns="0" rIns="0" tIns="0" bIns="0" anchor="t">
+            <a:spAutoFit/>
+          </a:bodyPr>
+          <a:lstStyle/>
+          <a:p>
+            <a:pPr algn="l">
+              <a:lnSpc>
+                <a:spcPct val="100000"/>
+              </a:lnSpc>
+            </a:pPr>
+            <a:r>
+              <a:rPr sz="5400" b="1">
                 <a:solidFill>
                   <a:srgbClr val="D97706"/>
                 </a:solidFill>
                 <a:latin typeface="Microsoft JhengHei"/>
               </a:rPr>
-              <a:t>0元</a:t>
+              <a:t>0 元</a:t>
             </a:r>
           </a:p>
         </p:txBody>
@@ -10427,21 +10464,21 @@
         </p:nvSpPr>
         <p:spPr>
           <a:xfrm>
-            <a:off x="9250527" y="4206240"/>
-            <a:ext cx="2057400" cy="548640"/>
-          </a:xfrm>
-          <a:prstGeom prst="rect">
-            <a:avLst/>
-          </a:prstGeom>
-          <a:noFill/>
-        </p:spPr>
-        <p:txBody>
-          <a:bodyPr wrap="square" lIns="0" rIns="0" tIns="0" bIns="0" anchor="t">
-            <a:spAutoFit/>
-          </a:bodyPr>
-          <a:lstStyle/>
-          <a:p>
-            <a:pPr algn="ctr">
+            <a:off x="8884767" y="4800600"/>
+            <a:ext cx="2468880" cy="457200"/>
+          </a:xfrm>
+          <a:prstGeom prst="rect">
+            <a:avLst/>
+          </a:prstGeom>
+          <a:noFill/>
+        </p:spPr>
+        <p:txBody>
+          <a:bodyPr wrap="square" lIns="0" rIns="0" tIns="0" bIns="0" anchor="t">
+            <a:spAutoFit/>
+          </a:bodyPr>
+          <a:lstStyle/>
+          <a:p>
+            <a:pPr algn="l">
               <a:lnSpc>
                 <a:spcPct val="120000"/>
               </a:lnSpc>
@@ -10466,21 +10503,21 @@
         </p:nvSpPr>
         <p:spPr>
           <a:xfrm>
-            <a:off x="9250527" y="4846320"/>
-            <a:ext cx="2057400" cy="1097280"/>
-          </a:xfrm>
-          <a:prstGeom prst="rect">
-            <a:avLst/>
-          </a:prstGeom>
-          <a:noFill/>
-        </p:spPr>
-        <p:txBody>
-          <a:bodyPr wrap="square" lIns="0" rIns="0" tIns="0" bIns="0" anchor="t">
-            <a:spAutoFit/>
-          </a:bodyPr>
-          <a:lstStyle/>
-          <a:p>
-            <a:pPr algn="ctr">
+            <a:off x="8884767" y="5303520"/>
+            <a:ext cx="2468880" cy="914400"/>
+          </a:xfrm>
+          <a:prstGeom prst="rect">
+            <a:avLst/>
+          </a:prstGeom>
+          <a:noFill/>
+        </p:spPr>
+        <p:txBody>
+          <a:bodyPr wrap="square" lIns="0" rIns="0" tIns="0" bIns="0" anchor="t">
+            <a:spAutoFit/>
+          </a:bodyPr>
+          <a:lstStyle/>
+          <a:p>
+            <a:pPr algn="l">
               <a:lnSpc>
                 <a:spcPct val="140000"/>
               </a:lnSpc>
@@ -10492,7 +10529,23 @@
                 </a:solidFill>
                 <a:latin typeface="Microsoft JhengHei"/>
               </a:rPr>
-              <a:t>全用開源 + Firebase 免費額度</a:t>
+              <a:t>全部用開源 + Firebase 免費額度</a:t>
+            </a:r>
+          </a:p>
+          <a:p>
+            <a:pPr algn="l">
+              <a:lnSpc>
+                <a:spcPct val="140000"/>
+              </a:lnSpc>
+            </a:pPr>
+            <a:r>
+              <a:rPr sz="1200" b="0">
+                <a:solidFill>
+                  <a:srgbClr val="78716C"/>
+                </a:solidFill>
+                <a:latin typeface="Microsoft JhengHei"/>
+              </a:rPr>
+              <a:t>中型公司可零成本試用</a:t>
             </a:r>
           </a:p>
         </p:txBody>
@@ -11611,27 +11664,27 @@
         </p:nvSpPr>
         <p:spPr>
           <a:xfrm>
-            <a:off x="914400" y="2011680"/>
-            <a:ext cx="10058400" cy="914400"/>
-          </a:xfrm>
-          <a:prstGeom prst="rect">
-            <a:avLst/>
-          </a:prstGeom>
-          <a:noFill/>
-        </p:spPr>
-        <p:txBody>
-          <a:bodyPr wrap="square" lIns="0" rIns="0" tIns="0" bIns="0" anchor="t">
-            <a:spAutoFit/>
-          </a:bodyPr>
-          <a:lstStyle/>
-          <a:p>
-            <a:pPr algn="l">
-              <a:lnSpc>
-                <a:spcPct val="120000"/>
-              </a:lnSpc>
-            </a:pPr>
-            <a:r>
-              <a:rPr sz="4800" b="1">
+            <a:off x="731520" y="2651760"/>
+            <a:ext cx="10698480" cy="1280160"/>
+          </a:xfrm>
+          <a:prstGeom prst="rect">
+            <a:avLst/>
+          </a:prstGeom>
+          <a:noFill/>
+        </p:spPr>
+        <p:txBody>
+          <a:bodyPr wrap="square" lIns="0" rIns="0" tIns="0" bIns="0" anchor="t">
+            <a:spAutoFit/>
+          </a:bodyPr>
+          <a:lstStyle/>
+          <a:p>
+            <a:pPr algn="ctr">
+              <a:lnSpc>
+                <a:spcPct val="100000"/>
+              </a:lnSpc>
+            </a:pPr>
+            <a:r>
+              <a:rPr sz="7200" b="1">
                 <a:solidFill>
                   <a:srgbClr val="1C1917"/>
                 </a:solidFill>
@@ -11644,109 +11697,20 @@
       </p:sp>
       <p:sp>
         <p:nvSpPr>
-          <p:cNvPr id="5" name="TextBox 4"/>
-          <p:cNvSpPr txBox="1"/>
-          <p:nvPr/>
-        </p:nvSpPr>
-        <p:spPr>
-          <a:xfrm>
-            <a:off x="914400" y="3017520"/>
-            <a:ext cx="10058400" cy="2286000"/>
-          </a:xfrm>
-          <a:prstGeom prst="rect">
-            <a:avLst/>
-          </a:prstGeom>
-          <a:noFill/>
-        </p:spPr>
-        <p:txBody>
-          <a:bodyPr wrap="square" lIns="0" rIns="0" tIns="0" bIns="0" anchor="t">
-            <a:spAutoFit/>
-          </a:bodyPr>
-          <a:lstStyle/>
-          <a:p>
-            <a:pPr algn="l">
-              <a:lnSpc>
-                <a:spcPct val="160000"/>
-              </a:lnSpc>
-            </a:pPr>
-            <a:r>
-              <a:rPr sz="2200" b="0">
-                <a:solidFill>
-                  <a:srgbClr val="78716C"/>
-                </a:solidFill>
-                <a:latin typeface="Microsoft JhengHei"/>
-              </a:rPr>
-              <a:t>我們不假裝每個係數都來自論文，</a:t>
-            </a:r>
-          </a:p>
-          <a:p>
-            <a:pPr algn="l">
-              <a:lnSpc>
-                <a:spcPct val="160000"/>
-              </a:lnSpc>
-            </a:pPr>
-            <a:r>
-              <a:rPr sz="2200" b="0">
-                <a:solidFill>
-                  <a:srgbClr val="78716C"/>
-                </a:solidFill>
-                <a:latin typeface="Microsoft JhengHei"/>
-              </a:rPr>
-              <a:t>但每個係數都經過反推校準。</a:t>
-            </a:r>
-          </a:p>
-          <a:p>
-            <a:pPr algn="l">
-              <a:lnSpc>
-                <a:spcPct val="160000"/>
-              </a:lnSpc>
-            </a:pPr>
-            <a:r>
-              <a:rPr sz="2200" b="0">
-                <a:solidFill>
-                  <a:srgbClr val="78716C"/>
-                </a:solidFill>
-                <a:latin typeface="Microsoft JhengHei"/>
-              </a:rPr>
-              <a:t/>
-            </a:r>
-          </a:p>
-          <a:p>
-            <a:pPr algn="l">
-              <a:lnSpc>
-                <a:spcPct val="160000"/>
-              </a:lnSpc>
-            </a:pPr>
-            <a:r>
-              <a:rPr sz="2200" b="0">
-                <a:solidFill>
-                  <a:srgbClr val="78716C"/>
-                </a:solidFill>
-                <a:latin typeface="Microsoft JhengHei"/>
-              </a:rPr>
-              <a:t>比起完美的公式，我們更相信可以解釋的數字。</a:t>
-            </a:r>
-          </a:p>
-        </p:txBody>
-      </p:sp>
-      <p:sp>
-        <p:nvSpPr>
-          <p:cNvPr id="6" name="Rounded Rectangle 5"/>
+          <p:cNvPr id="5" name="Rectangle 4"/>
           <p:cNvSpPr/>
           <p:nvPr/>
         </p:nvSpPr>
         <p:spPr>
           <a:xfrm>
-            <a:off x="4114800" y="5486400"/>
-            <a:ext cx="3931920" cy="640080"/>
-          </a:xfrm>
-          <a:prstGeom prst="roundRect">
-            <a:avLst>
-              <a:gd name="adj" fmla="val 40000"/>
-            </a:avLst>
+            <a:off x="5733288" y="4069080"/>
+            <a:ext cx="731520" cy="15875"/>
+          </a:xfrm>
+          <a:prstGeom prst="rect">
+            <a:avLst/>
           </a:prstGeom>
           <a:solidFill>
-            <a:srgbClr val="1C1917"/>
+            <a:srgbClr val="D97706"/>
           </a:solidFill>
           <a:ln>
             <a:noFill/>
@@ -11767,18 +11731,87 @@
           </a:fontRef>
         </p:style>
         <p:txBody>
-          <a:bodyPr rtlCol="0" anchor="ctr" lIns="182880" rIns="182880" tIns="0" bIns="0" wrap="square"/>
+          <a:bodyPr rtlCol="0" anchor="ctr"/>
           <a:lstStyle/>
           <a:p>
             <a:pPr algn="ctr"/>
-            <a:r>
-              <a:rPr sz="2200" b="1">
-                <a:solidFill>
-                  <a:srgbClr val="1C1917"/>
-                </a:solidFill>
-                <a:latin typeface="Microsoft JhengHei"/>
-              </a:rPr>
-              <a:t>Thank You · Q &amp; A</a:t>
+          </a:p>
+        </p:txBody>
+      </p:sp>
+      <p:sp>
+        <p:nvSpPr>
+          <p:cNvPr id="6" name="TextBox 5"/>
+          <p:cNvSpPr txBox="1"/>
+          <p:nvPr/>
+        </p:nvSpPr>
+        <p:spPr>
+          <a:xfrm>
+            <a:off x="731520" y="4343400"/>
+            <a:ext cx="10698480" cy="1097280"/>
+          </a:xfrm>
+          <a:prstGeom prst="rect">
+            <a:avLst/>
+          </a:prstGeom>
+          <a:noFill/>
+        </p:spPr>
+        <p:txBody>
+          <a:bodyPr wrap="square" lIns="0" rIns="0" tIns="0" bIns="0" anchor="t">
+            <a:spAutoFit/>
+          </a:bodyPr>
+          <a:lstStyle/>
+          <a:p>
+            <a:pPr algn="ctr">
+              <a:lnSpc>
+                <a:spcPct val="150000"/>
+              </a:lnSpc>
+            </a:pPr>
+            <a:r>
+              <a:rPr sz="2000" b="0">
+                <a:solidFill>
+                  <a:srgbClr val="44403C"/>
+                </a:solidFill>
+                <a:latin typeface="Microsoft JhengHei"/>
+              </a:rPr>
+              <a:t>比起完美的公式，我們更相信可以解釋的數字。</a:t>
+            </a:r>
+          </a:p>
+        </p:txBody>
+      </p:sp>
+      <p:sp>
+        <p:nvSpPr>
+          <p:cNvPr id="7" name="TextBox 6"/>
+          <p:cNvSpPr txBox="1"/>
+          <p:nvPr/>
+        </p:nvSpPr>
+        <p:spPr>
+          <a:xfrm>
+            <a:off x="731520" y="6035040"/>
+            <a:ext cx="10698480" cy="320040"/>
+          </a:xfrm>
+          <a:prstGeom prst="rect">
+            <a:avLst/>
+          </a:prstGeom>
+          <a:noFill/>
+        </p:spPr>
+        <p:txBody>
+          <a:bodyPr wrap="square" lIns="0" rIns="0" tIns="0" bIns="0" anchor="t">
+            <a:spAutoFit/>
+          </a:bodyPr>
+          <a:lstStyle/>
+          <a:p>
+            <a:pPr algn="ctr">
+              <a:lnSpc>
+                <a:spcPct val="120000"/>
+              </a:lnSpc>
+            </a:pPr>
+            <a:r>
+              <a:rPr sz="1000" b="0">
+                <a:solidFill>
+                  <a:srgbClr val="78716C"/>
+                </a:solidFill>
+                <a:latin typeface="Microsoft JhengHei"/>
+              </a:rPr>
+              <a:t>串連系統 v2.2  ·  資管導論 第 13 組</a:t>
             </a:r>
           </a:p>
         </p:txBody>

--- a/docs/串連系統_簡報.pptx
+++ b/docs/串連系統_簡報.pptx
@@ -13720,8 +13720,8 @@
         </p:nvSpPr>
         <p:spPr>
           <a:xfrm>
-            <a:off x="518007" y="2011680"/>
-            <a:ext cx="3566160" cy="4206240"/>
+            <a:off x="518007" y="1828800"/>
+            <a:ext cx="3566160" cy="4572000"/>
           </a:xfrm>
           <a:prstGeom prst="roundRect">
             <a:avLst>
@@ -13765,7 +13765,7 @@
         </p:nvSpPr>
         <p:spPr>
           <a:xfrm>
-            <a:off x="518007" y="2011680"/>
+            <a:off x="518007" y="1828800"/>
             <a:ext cx="3566160" cy="457200"/>
           </a:xfrm>
           <a:prstGeom prst="rect">
@@ -13808,7 +13808,7 @@
         </p:nvSpPr>
         <p:spPr>
           <a:xfrm>
-            <a:off x="883767" y="2697480"/>
+            <a:off x="883767" y="2514600"/>
             <a:ext cx="2834640" cy="640080"/>
           </a:xfrm>
           <a:prstGeom prst="rect">
@@ -13847,7 +13847,7 @@
         </p:nvSpPr>
         <p:spPr>
           <a:xfrm>
-            <a:off x="883767" y="3383280"/>
+            <a:off x="883767" y="3200400"/>
             <a:ext cx="2834640" cy="457200"/>
           </a:xfrm>
           <a:prstGeom prst="rect">
@@ -13886,7 +13886,7 @@
         </p:nvSpPr>
         <p:spPr>
           <a:xfrm>
-            <a:off x="883767" y="3977640"/>
+            <a:off x="883767" y="3794760"/>
             <a:ext cx="2834640" cy="320040"/>
           </a:xfrm>
           <a:prstGeom prst="rect">
@@ -13925,7 +13925,7 @@
         </p:nvSpPr>
         <p:spPr>
           <a:xfrm>
-            <a:off x="883767" y="4297680"/>
+            <a:off x="883767" y="4114800"/>
             <a:ext cx="2834640" cy="822960"/>
           </a:xfrm>
           <a:prstGeom prst="rect">
@@ -13980,7 +13980,7 @@
         </p:nvSpPr>
         <p:spPr>
           <a:xfrm>
-            <a:off x="883767" y="5074920"/>
+            <a:off x="883767" y="4892040"/>
             <a:ext cx="2834640" cy="320040"/>
           </a:xfrm>
           <a:prstGeom prst="rect">
@@ -14019,7 +14019,7 @@
         </p:nvSpPr>
         <p:spPr>
           <a:xfrm>
-            <a:off x="883767" y="5394960"/>
+            <a:off x="883767" y="5212080"/>
             <a:ext cx="2834640" cy="365760"/>
           </a:xfrm>
           <a:prstGeom prst="rect">
@@ -14058,7 +14058,7 @@
         </p:nvSpPr>
         <p:spPr>
           <a:xfrm>
-            <a:off x="883767" y="5669280"/>
+            <a:off x="883767" y="5532120"/>
             <a:ext cx="2834640" cy="411480"/>
           </a:xfrm>
           <a:prstGeom prst="roundRect">
@@ -14104,23 +14104,20 @@
           </a:p>
         </p:txBody>
       </p:sp>
-      <p:sp>
-        <p:nvSpPr>
-          <p:cNvPr id="15" name="Rounded Rectangle 14"/>
-          <p:cNvSpPr/>
-          <p:nvPr/>
-        </p:nvSpPr>
-        <p:spPr>
-          <a:xfrm>
-            <a:off x="4312767" y="2011680"/>
-            <a:ext cx="3566160" cy="4206240"/>
-          </a:xfrm>
-          <a:prstGeom prst="roundRect">
-            <a:avLst>
-              <a:gd name="adj" fmla="val 6000"/>
-            </a:avLst>
-          </a:prstGeom>
-          <a:noFill/>
+      <p:cxnSp>
+        <p:nvCxnSpPr>
+          <p:cNvPr id="15" name="Connector 14"/>
+          <p:cNvCxnSpPr/>
+          <p:nvPr/>
+        </p:nvCxnSpPr>
+        <p:spPr>
+          <a:xfrm>
+            <a:off x="883767" y="6080760"/>
+            <a:ext cx="2834640" cy="0"/>
+          </a:xfrm>
+          <a:prstGeom prst="line">
+            <a:avLst/>
+          </a:prstGeom>
           <a:ln w="9525">
             <a:solidFill>
               <a:srgbClr val="E7E5E0"/>
@@ -14128,6 +14125,83 @@
           </a:ln>
         </p:spPr>
         <p:style>
+          <a:lnRef idx="2">
+            <a:schemeClr val="accent1"/>
+          </a:lnRef>
+          <a:fillRef idx="0">
+            <a:schemeClr val="accent1"/>
+          </a:fillRef>
+          <a:effectRef idx="1">
+            <a:schemeClr val="accent1"/>
+          </a:effectRef>
+          <a:fontRef idx="minor">
+            <a:schemeClr val="tx1"/>
+          </a:fontRef>
+        </p:style>
+      </p:cxnSp>
+      <p:sp>
+        <p:nvSpPr>
+          <p:cNvPr id="16" name="TextBox 15"/>
+          <p:cNvSpPr txBox="1"/>
+          <p:nvPr/>
+        </p:nvSpPr>
+        <p:spPr>
+          <a:xfrm>
+            <a:off x="883767" y="6126480"/>
+            <a:ext cx="2834640" cy="274320"/>
+          </a:xfrm>
+          <a:prstGeom prst="rect">
+            <a:avLst/>
+          </a:prstGeom>
+          <a:noFill/>
+        </p:spPr>
+        <p:txBody>
+          <a:bodyPr wrap="square" lIns="0" rIns="0" tIns="0" bIns="0" anchor="t">
+            <a:spAutoFit/>
+          </a:bodyPr>
+          <a:lstStyle/>
+          <a:p>
+            <a:pPr algn="l">
+              <a:lnSpc>
+                <a:spcPct val="130000"/>
+              </a:lnSpc>
+            </a:pPr>
+            <a:r>
+              <a:rPr sz="1000" b="0">
+                <a:solidFill>
+                  <a:srgbClr val="78716C"/>
+                </a:solidFill>
+                <a:latin typeface="Microsoft JhengHei"/>
+              </a:rPr>
+              <a:t>經驗百分位 + 時間衰減 + Gini 不均度</a:t>
+            </a:r>
+          </a:p>
+        </p:txBody>
+      </p:sp>
+      <p:sp>
+        <p:nvSpPr>
+          <p:cNvPr id="17" name="Rounded Rectangle 16"/>
+          <p:cNvSpPr/>
+          <p:nvPr/>
+        </p:nvSpPr>
+        <p:spPr>
+          <a:xfrm>
+            <a:off x="4312767" y="1828800"/>
+            <a:ext cx="3566160" cy="4572000"/>
+          </a:xfrm>
+          <a:prstGeom prst="roundRect">
+            <a:avLst>
+              <a:gd name="adj" fmla="val 6000"/>
+            </a:avLst>
+          </a:prstGeom>
+          <a:noFill/>
+          <a:ln w="9525">
+            <a:solidFill>
+              <a:srgbClr val="E7E5E0"/>
+            </a:solidFill>
+          </a:ln>
+        </p:spPr>
+        <p:style>
           <a:lnRef idx="1">
             <a:schemeClr val="accent1"/>
           </a:lnRef>
@@ -14151,13 +14225,13 @@
       </p:sp>
       <p:sp>
         <p:nvSpPr>
-          <p:cNvPr id="16" name="Rectangle 15"/>
+          <p:cNvPr id="18" name="Rectangle 17"/>
           <p:cNvSpPr/>
           <p:nvPr/>
         </p:nvSpPr>
         <p:spPr>
           <a:xfrm>
-            <a:off x="4312767" y="2011680"/>
+            <a:off x="4312767" y="1828800"/>
             <a:ext cx="3566160" cy="457200"/>
           </a:xfrm>
           <a:prstGeom prst="rect">
@@ -14194,13 +14268,13 @@
       </p:sp>
       <p:sp>
         <p:nvSpPr>
-          <p:cNvPr id="17" name="TextBox 16"/>
-          <p:cNvSpPr txBox="1"/>
-          <p:nvPr/>
-        </p:nvSpPr>
-        <p:spPr>
-          <a:xfrm>
-            <a:off x="4678527" y="2697480"/>
+          <p:cNvPr id="19" name="TextBox 18"/>
+          <p:cNvSpPr txBox="1"/>
+          <p:nvPr/>
+        </p:nvSpPr>
+        <p:spPr>
+          <a:xfrm>
+            <a:off x="4678527" y="2514600"/>
             <a:ext cx="2834640" cy="640080"/>
           </a:xfrm>
           <a:prstGeom prst="rect">
@@ -14233,13 +14307,13 @@
       </p:sp>
       <p:sp>
         <p:nvSpPr>
-          <p:cNvPr id="18" name="TextBox 17"/>
-          <p:cNvSpPr txBox="1"/>
-          <p:nvPr/>
-        </p:nvSpPr>
-        <p:spPr>
-          <a:xfrm>
-            <a:off x="4678527" y="3383280"/>
+          <p:cNvPr id="20" name="TextBox 19"/>
+          <p:cNvSpPr txBox="1"/>
+          <p:nvPr/>
+        </p:nvSpPr>
+        <p:spPr>
+          <a:xfrm>
+            <a:off x="4678527" y="3200400"/>
             <a:ext cx="2834640" cy="457200"/>
           </a:xfrm>
           <a:prstGeom prst="rect">
@@ -14272,13 +14346,13 @@
       </p:sp>
       <p:sp>
         <p:nvSpPr>
-          <p:cNvPr id="19" name="TextBox 18"/>
-          <p:cNvSpPr txBox="1"/>
-          <p:nvPr/>
-        </p:nvSpPr>
-        <p:spPr>
-          <a:xfrm>
-            <a:off x="4678527" y="3977640"/>
+          <p:cNvPr id="21" name="TextBox 20"/>
+          <p:cNvSpPr txBox="1"/>
+          <p:nvPr/>
+        </p:nvSpPr>
+        <p:spPr>
+          <a:xfrm>
+            <a:off x="4678527" y="3794760"/>
             <a:ext cx="2834640" cy="320040"/>
           </a:xfrm>
           <a:prstGeom prst="rect">
@@ -14311,13 +14385,13 @@
       </p:sp>
       <p:sp>
         <p:nvSpPr>
-          <p:cNvPr id="20" name="TextBox 19"/>
-          <p:cNvSpPr txBox="1"/>
-          <p:nvPr/>
-        </p:nvSpPr>
-        <p:spPr>
-          <a:xfrm>
-            <a:off x="4678527" y="4297680"/>
+          <p:cNvPr id="22" name="TextBox 21"/>
+          <p:cNvSpPr txBox="1"/>
+          <p:nvPr/>
+        </p:nvSpPr>
+        <p:spPr>
+          <a:xfrm>
+            <a:off x="4678527" y="4114800"/>
             <a:ext cx="2834640" cy="822960"/>
           </a:xfrm>
           <a:prstGeom prst="rect">
@@ -14366,13 +14440,13 @@
       </p:sp>
       <p:sp>
         <p:nvSpPr>
-          <p:cNvPr id="21" name="TextBox 20"/>
-          <p:cNvSpPr txBox="1"/>
-          <p:nvPr/>
-        </p:nvSpPr>
-        <p:spPr>
-          <a:xfrm>
-            <a:off x="4678527" y="5074920"/>
+          <p:cNvPr id="23" name="TextBox 22"/>
+          <p:cNvSpPr txBox="1"/>
+          <p:nvPr/>
+        </p:nvSpPr>
+        <p:spPr>
+          <a:xfrm>
+            <a:off x="4678527" y="4892040"/>
             <a:ext cx="2834640" cy="320040"/>
           </a:xfrm>
           <a:prstGeom prst="rect">
@@ -14405,13 +14479,13 @@
       </p:sp>
       <p:sp>
         <p:nvSpPr>
-          <p:cNvPr id="22" name="TextBox 21"/>
-          <p:cNvSpPr txBox="1"/>
-          <p:nvPr/>
-        </p:nvSpPr>
-        <p:spPr>
-          <a:xfrm>
-            <a:off x="4678527" y="5394960"/>
+          <p:cNvPr id="24" name="TextBox 23"/>
+          <p:cNvSpPr txBox="1"/>
+          <p:nvPr/>
+        </p:nvSpPr>
+        <p:spPr>
+          <a:xfrm>
+            <a:off x="4678527" y="5212080"/>
             <a:ext cx="2834640" cy="365760"/>
           </a:xfrm>
           <a:prstGeom prst="rect">
@@ -14444,13 +14518,13 @@
       </p:sp>
       <p:sp>
         <p:nvSpPr>
-          <p:cNvPr id="23" name="Rounded Rectangle 22"/>
+          <p:cNvPr id="25" name="Rounded Rectangle 24"/>
           <p:cNvSpPr/>
           <p:nvPr/>
         </p:nvSpPr>
         <p:spPr>
           <a:xfrm>
-            <a:off x="4678527" y="5669280"/>
+            <a:off x="4678527" y="5532120"/>
             <a:ext cx="2834640" cy="411480"/>
           </a:xfrm>
           <a:prstGeom prst="roundRect">
@@ -14496,23 +14570,20 @@
           </a:p>
         </p:txBody>
       </p:sp>
-      <p:sp>
-        <p:nvSpPr>
-          <p:cNvPr id="24" name="Rounded Rectangle 23"/>
-          <p:cNvSpPr/>
-          <p:nvPr/>
-        </p:nvSpPr>
-        <p:spPr>
-          <a:xfrm>
-            <a:off x="8107527" y="2011680"/>
-            <a:ext cx="3566160" cy="4206240"/>
-          </a:xfrm>
-          <a:prstGeom prst="roundRect">
-            <a:avLst>
-              <a:gd name="adj" fmla="val 6000"/>
-            </a:avLst>
-          </a:prstGeom>
-          <a:noFill/>
+      <p:cxnSp>
+        <p:nvCxnSpPr>
+          <p:cNvPr id="26" name="Connector 25"/>
+          <p:cNvCxnSpPr/>
+          <p:nvPr/>
+        </p:nvCxnSpPr>
+        <p:spPr>
+          <a:xfrm>
+            <a:off x="4678527" y="6080760"/>
+            <a:ext cx="2834640" cy="0"/>
+          </a:xfrm>
+          <a:prstGeom prst="line">
+            <a:avLst/>
+          </a:prstGeom>
           <a:ln w="9525">
             <a:solidFill>
               <a:srgbClr val="E7E5E0"/>
@@ -14520,6 +14591,83 @@
           </a:ln>
         </p:spPr>
         <p:style>
+          <a:lnRef idx="2">
+            <a:schemeClr val="accent1"/>
+          </a:lnRef>
+          <a:fillRef idx="0">
+            <a:schemeClr val="accent1"/>
+          </a:fillRef>
+          <a:effectRef idx="1">
+            <a:schemeClr val="accent1"/>
+          </a:effectRef>
+          <a:fontRef idx="minor">
+            <a:schemeClr val="tx1"/>
+          </a:fontRef>
+        </p:style>
+      </p:cxnSp>
+      <p:sp>
+        <p:nvSpPr>
+          <p:cNvPr id="27" name="TextBox 26"/>
+          <p:cNvSpPr txBox="1"/>
+          <p:nvPr/>
+        </p:nvSpPr>
+        <p:spPr>
+          <a:xfrm>
+            <a:off x="4678527" y="6126480"/>
+            <a:ext cx="2834640" cy="274320"/>
+          </a:xfrm>
+          <a:prstGeom prst="rect">
+            <a:avLst/>
+          </a:prstGeom>
+          <a:noFill/>
+        </p:spPr>
+        <p:txBody>
+          <a:bodyPr wrap="square" lIns="0" rIns="0" tIns="0" bIns="0" anchor="t">
+            <a:spAutoFit/>
+          </a:bodyPr>
+          <a:lstStyle/>
+          <a:p>
+            <a:pPr algn="l">
+              <a:lnSpc>
+                <a:spcPct val="130000"/>
+              </a:lnSpc>
+            </a:pPr>
+            <a:r>
+              <a:rPr sz="1000" b="0">
+                <a:solidFill>
+                  <a:srgbClr val="78716C"/>
+                </a:solidFill>
+                <a:latin typeface="Microsoft JhengHei"/>
+              </a:rPr>
+              <a:t>六維加權評分 + 不對稱偵測</a:t>
+            </a:r>
+          </a:p>
+        </p:txBody>
+      </p:sp>
+      <p:sp>
+        <p:nvSpPr>
+          <p:cNvPr id="28" name="Rounded Rectangle 27"/>
+          <p:cNvSpPr/>
+          <p:nvPr/>
+        </p:nvSpPr>
+        <p:spPr>
+          <a:xfrm>
+            <a:off x="8107527" y="1828800"/>
+            <a:ext cx="3566160" cy="4572000"/>
+          </a:xfrm>
+          <a:prstGeom prst="roundRect">
+            <a:avLst>
+              <a:gd name="adj" fmla="val 6000"/>
+            </a:avLst>
+          </a:prstGeom>
+          <a:noFill/>
+          <a:ln w="9525">
+            <a:solidFill>
+              <a:srgbClr val="E7E5E0"/>
+            </a:solidFill>
+          </a:ln>
+        </p:spPr>
+        <p:style>
           <a:lnRef idx="1">
             <a:schemeClr val="accent1"/>
           </a:lnRef>
@@ -14543,13 +14691,13 @@
       </p:sp>
       <p:sp>
         <p:nvSpPr>
-          <p:cNvPr id="25" name="Rectangle 24"/>
+          <p:cNvPr id="29" name="Rectangle 28"/>
           <p:cNvSpPr/>
           <p:nvPr/>
         </p:nvSpPr>
         <p:spPr>
           <a:xfrm>
-            <a:off x="8107527" y="2011680"/>
+            <a:off x="8107527" y="1828800"/>
             <a:ext cx="3566160" cy="457200"/>
           </a:xfrm>
           <a:prstGeom prst="rect">
@@ -14586,13 +14734,13 @@
       </p:sp>
       <p:sp>
         <p:nvSpPr>
-          <p:cNvPr id="26" name="TextBox 25"/>
-          <p:cNvSpPr txBox="1"/>
-          <p:nvPr/>
-        </p:nvSpPr>
-        <p:spPr>
-          <a:xfrm>
-            <a:off x="8473287" y="2697480"/>
+          <p:cNvPr id="30" name="TextBox 29"/>
+          <p:cNvSpPr txBox="1"/>
+          <p:nvPr/>
+        </p:nvSpPr>
+        <p:spPr>
+          <a:xfrm>
+            <a:off x="8473287" y="2514600"/>
             <a:ext cx="2834640" cy="640080"/>
           </a:xfrm>
           <a:prstGeom prst="rect">
@@ -14625,13 +14773,13 @@
       </p:sp>
       <p:sp>
         <p:nvSpPr>
-          <p:cNvPr id="27" name="TextBox 26"/>
-          <p:cNvSpPr txBox="1"/>
-          <p:nvPr/>
-        </p:nvSpPr>
-        <p:spPr>
-          <a:xfrm>
-            <a:off x="8473287" y="3383280"/>
+          <p:cNvPr id="31" name="TextBox 30"/>
+          <p:cNvSpPr txBox="1"/>
+          <p:nvPr/>
+        </p:nvSpPr>
+        <p:spPr>
+          <a:xfrm>
+            <a:off x="8473287" y="3200400"/>
             <a:ext cx="2834640" cy="457200"/>
           </a:xfrm>
           <a:prstGeom prst="rect">
@@ -14664,13 +14812,13 @@
       </p:sp>
       <p:sp>
         <p:nvSpPr>
-          <p:cNvPr id="28" name="TextBox 27"/>
-          <p:cNvSpPr txBox="1"/>
-          <p:nvPr/>
-        </p:nvSpPr>
-        <p:spPr>
-          <a:xfrm>
-            <a:off x="8473287" y="3977640"/>
+          <p:cNvPr id="32" name="TextBox 31"/>
+          <p:cNvSpPr txBox="1"/>
+          <p:nvPr/>
+        </p:nvSpPr>
+        <p:spPr>
+          <a:xfrm>
+            <a:off x="8473287" y="3794760"/>
             <a:ext cx="2834640" cy="320040"/>
           </a:xfrm>
           <a:prstGeom prst="rect">
@@ -14703,13 +14851,13 @@
       </p:sp>
       <p:sp>
         <p:nvSpPr>
-          <p:cNvPr id="29" name="TextBox 28"/>
-          <p:cNvSpPr txBox="1"/>
-          <p:nvPr/>
-        </p:nvSpPr>
-        <p:spPr>
-          <a:xfrm>
-            <a:off x="8473287" y="4297680"/>
+          <p:cNvPr id="33" name="TextBox 32"/>
+          <p:cNvSpPr txBox="1"/>
+          <p:nvPr/>
+        </p:nvSpPr>
+        <p:spPr>
+          <a:xfrm>
+            <a:off x="8473287" y="4114800"/>
             <a:ext cx="2834640" cy="822960"/>
           </a:xfrm>
           <a:prstGeom prst="rect">
@@ -14758,13 +14906,13 @@
       </p:sp>
       <p:sp>
         <p:nvSpPr>
-          <p:cNvPr id="30" name="TextBox 29"/>
-          <p:cNvSpPr txBox="1"/>
-          <p:nvPr/>
-        </p:nvSpPr>
-        <p:spPr>
-          <a:xfrm>
-            <a:off x="8473287" y="5074920"/>
+          <p:cNvPr id="34" name="TextBox 33"/>
+          <p:cNvSpPr txBox="1"/>
+          <p:nvPr/>
+        </p:nvSpPr>
+        <p:spPr>
+          <a:xfrm>
+            <a:off x="8473287" y="4892040"/>
             <a:ext cx="2834640" cy="320040"/>
           </a:xfrm>
           <a:prstGeom prst="rect">
@@ -14797,13 +14945,13 @@
       </p:sp>
       <p:sp>
         <p:nvSpPr>
-          <p:cNvPr id="31" name="TextBox 30"/>
-          <p:cNvSpPr txBox="1"/>
-          <p:nvPr/>
-        </p:nvSpPr>
-        <p:spPr>
-          <a:xfrm>
-            <a:off x="8473287" y="5394960"/>
+          <p:cNvPr id="35" name="TextBox 34"/>
+          <p:cNvSpPr txBox="1"/>
+          <p:nvPr/>
+        </p:nvSpPr>
+        <p:spPr>
+          <a:xfrm>
+            <a:off x="8473287" y="5212080"/>
             <a:ext cx="2834640" cy="365760"/>
           </a:xfrm>
           <a:prstGeom prst="rect">
@@ -14836,13 +14984,13 @@
       </p:sp>
       <p:sp>
         <p:nvSpPr>
-          <p:cNvPr id="32" name="Rounded Rectangle 31"/>
+          <p:cNvPr id="36" name="Rounded Rectangle 35"/>
           <p:cNvSpPr/>
           <p:nvPr/>
         </p:nvSpPr>
         <p:spPr>
           <a:xfrm>
-            <a:off x="8473287" y="5669280"/>
+            <a:off x="8473287" y="5532120"/>
             <a:ext cx="2834640" cy="411480"/>
           </a:xfrm>
           <a:prstGeom prst="roundRect">
@@ -14888,9 +15036,83 @@
           </a:p>
         </p:txBody>
       </p:sp>
-      <p:sp>
-        <p:nvSpPr>
-          <p:cNvPr id="33" name="TextBox 32"/>
+      <p:cxnSp>
+        <p:nvCxnSpPr>
+          <p:cNvPr id="37" name="Connector 36"/>
+          <p:cNvCxnSpPr/>
+          <p:nvPr/>
+        </p:nvCxnSpPr>
+        <p:spPr>
+          <a:xfrm>
+            <a:off x="8473287" y="6080760"/>
+            <a:ext cx="2834640" cy="0"/>
+          </a:xfrm>
+          <a:prstGeom prst="line">
+            <a:avLst/>
+          </a:prstGeom>
+          <a:ln w="9525">
+            <a:solidFill>
+              <a:srgbClr val="E7E5E0"/>
+            </a:solidFill>
+          </a:ln>
+        </p:spPr>
+        <p:style>
+          <a:lnRef idx="2">
+            <a:schemeClr val="accent1"/>
+          </a:lnRef>
+          <a:fillRef idx="0">
+            <a:schemeClr val="accent1"/>
+          </a:fillRef>
+          <a:effectRef idx="1">
+            <a:schemeClr val="accent1"/>
+          </a:effectRef>
+          <a:fontRef idx="minor">
+            <a:schemeClr val="tx1"/>
+          </a:fontRef>
+        </p:style>
+      </p:cxnSp>
+      <p:sp>
+        <p:nvSpPr>
+          <p:cNvPr id="38" name="TextBox 37"/>
+          <p:cNvSpPr txBox="1"/>
+          <p:nvPr/>
+        </p:nvSpPr>
+        <p:spPr>
+          <a:xfrm>
+            <a:off x="8473287" y="6126480"/>
+            <a:ext cx="2834640" cy="274320"/>
+          </a:xfrm>
+          <a:prstGeom prst="rect">
+            <a:avLst/>
+          </a:prstGeom>
+          <a:noFill/>
+        </p:spPr>
+        <p:txBody>
+          <a:bodyPr wrap="square" lIns="0" rIns="0" tIns="0" bIns="0" anchor="t">
+            <a:spAutoFit/>
+          </a:bodyPr>
+          <a:lstStyle/>
+          <a:p>
+            <a:pPr algn="l">
+              <a:lnSpc>
+                <a:spcPct val="130000"/>
+              </a:lnSpc>
+            </a:pPr>
+            <a:r>
+              <a:rPr sz="1000" b="0">
+                <a:solidFill>
+                  <a:srgbClr val="78716C"/>
+                </a:solidFill>
+                <a:latin typeface="Microsoft JhengHei"/>
+              </a:rPr>
+              <a:t>同期校準 (DiD) + 線性回歸</a:t>
+            </a:r>
+          </a:p>
+        </p:txBody>
+      </p:sp>
+      <p:sp>
+        <p:nvSpPr>
+          <p:cNvPr id="39" name="TextBox 38"/>
           <p:cNvSpPr txBox="1"/>
           <p:nvPr/>
         </p:nvSpPr>
@@ -14929,7 +15151,7 @@
       </p:sp>
       <p:sp>
         <p:nvSpPr>
-          <p:cNvPr id="34" name="TextBox 33"/>
+          <p:cNvPr id="40" name="TextBox 39"/>
           <p:cNvSpPr txBox="1"/>
           <p:nvPr/>
         </p:nvSpPr>

--- a/docs/串連系統_簡報.pptx
+++ b/docs/串連系統_簡報.pptx
@@ -15417,15 +15417,17 @@
         </p:nvSpPr>
         <p:spPr>
           <a:xfrm>
-            <a:off x="548640" y="1691640"/>
-            <a:ext cx="5120640" cy="2743200"/>
+            <a:off x="6858000" y="868680"/>
+            <a:ext cx="4846320" cy="411480"/>
           </a:xfrm>
           <a:prstGeom prst="roundRect">
             <a:avLst>
-              <a:gd name="adj" fmla="val 5000"/>
+              <a:gd name="adj" fmla="val 40000"/>
             </a:avLst>
           </a:prstGeom>
-          <a:noFill/>
+          <a:solidFill>
+            <a:srgbClr val="F5F4EE"/>
+          </a:solidFill>
           <a:ln w="9525">
             <a:solidFill>
               <a:srgbClr val="E7E5E0"/>
@@ -15447,6 +15449,60 @@
           </a:fontRef>
         </p:style>
         <p:txBody>
+          <a:bodyPr rtlCol="0" anchor="ctr" lIns="137160" rIns="137160" tIns="0" bIns="0"/>
+          <a:lstStyle/>
+          <a:p>
+            <a:pPr algn="ctr"/>
+            <a:r>
+              <a:rPr sz="1000" b="1">
+                <a:solidFill>
+                  <a:srgbClr val="44403C"/>
+                </a:solidFill>
+                <a:latin typeface="Microsoft JhengHei"/>
+              </a:rPr>
+              <a:t>演算法　經驗百分位 + 時間衰減 + Gini 不均度</a:t>
+            </a:r>
+          </a:p>
+        </p:txBody>
+      </p:sp>
+      <p:sp>
+        <p:nvSpPr>
+          <p:cNvPr id="8" name="Rounded Rectangle 7"/>
+          <p:cNvSpPr/>
+          <p:nvPr/>
+        </p:nvSpPr>
+        <p:spPr>
+          <a:xfrm>
+            <a:off x="548640" y="1691640"/>
+            <a:ext cx="5120640" cy="2743200"/>
+          </a:xfrm>
+          <a:prstGeom prst="roundRect">
+            <a:avLst>
+              <a:gd name="adj" fmla="val 5000"/>
+            </a:avLst>
+          </a:prstGeom>
+          <a:noFill/>
+          <a:ln w="9525">
+            <a:solidFill>
+              <a:srgbClr val="E7E5E0"/>
+            </a:solidFill>
+          </a:ln>
+        </p:spPr>
+        <p:style>
+          <a:lnRef idx="1">
+            <a:schemeClr val="accent1"/>
+          </a:lnRef>
+          <a:fillRef idx="3">
+            <a:schemeClr val="accent1"/>
+          </a:fillRef>
+          <a:effectRef idx="2">
+            <a:schemeClr val="accent1"/>
+          </a:effectRef>
+          <a:fontRef idx="minor">
+            <a:schemeClr val="lt1"/>
+          </a:fontRef>
+        </p:style>
+        <p:txBody>
           <a:bodyPr rtlCol="0" anchor="ctr"/>
           <a:lstStyle/>
           <a:p>
@@ -15456,7 +15512,7 @@
       </p:sp>
       <p:sp>
         <p:nvSpPr>
-          <p:cNvPr id="8" name="TextBox 7"/>
+          <p:cNvPr id="9" name="TextBox 8"/>
           <p:cNvSpPr txBox="1"/>
           <p:nvPr/>
         </p:nvSpPr>
@@ -15495,7 +15551,7 @@
       </p:sp>
       <p:sp>
         <p:nvSpPr>
-          <p:cNvPr id="9" name="TextBox 8"/>
+          <p:cNvPr id="10" name="TextBox 9"/>
           <p:cNvSpPr txBox="1"/>
           <p:nvPr/>
         </p:nvSpPr>
@@ -15582,7 +15638,7 @@
       </p:sp>
       <p:sp>
         <p:nvSpPr>
-          <p:cNvPr id="10" name="Rounded Rectangle 9"/>
+          <p:cNvPr id="11" name="Rounded Rectangle 10"/>
           <p:cNvSpPr/>
           <p:nvPr/>
         </p:nvSpPr>
@@ -15629,7 +15685,7 @@
       </p:sp>
       <p:sp>
         <p:nvSpPr>
-          <p:cNvPr id="11" name="Rectangle 10"/>
+          <p:cNvPr id="12" name="Rectangle 11"/>
           <p:cNvSpPr/>
           <p:nvPr/>
         </p:nvSpPr>
@@ -15672,7 +15728,7 @@
       </p:sp>
       <p:sp>
         <p:nvSpPr>
-          <p:cNvPr id="12" name="TextBox 11"/>
+          <p:cNvPr id="13" name="TextBox 12"/>
           <p:cNvSpPr txBox="1"/>
           <p:nvPr/>
         </p:nvSpPr>
@@ -15711,7 +15767,7 @@
       </p:sp>
       <p:sp>
         <p:nvSpPr>
-          <p:cNvPr id="13" name="TextBox 12"/>
+          <p:cNvPr id="14" name="TextBox 13"/>
           <p:cNvSpPr txBox="1"/>
           <p:nvPr/>
         </p:nvSpPr>
@@ -15878,7 +15934,7 @@
       </p:sp>
       <p:sp>
         <p:nvSpPr>
-          <p:cNvPr id="14" name="Rounded Rectangle 13"/>
+          <p:cNvPr id="15" name="Rounded Rectangle 14"/>
           <p:cNvSpPr/>
           <p:nvPr/>
         </p:nvSpPr>
@@ -15925,7 +15981,7 @@
       </p:sp>
       <p:sp>
         <p:nvSpPr>
-          <p:cNvPr id="15" name="Rectangle 14"/>
+          <p:cNvPr id="16" name="Rectangle 15"/>
           <p:cNvSpPr/>
           <p:nvPr/>
         </p:nvSpPr>
@@ -15968,7 +16024,7 @@
       </p:sp>
       <p:sp>
         <p:nvSpPr>
-          <p:cNvPr id="16" name="TextBox 15"/>
+          <p:cNvPr id="17" name="TextBox 16"/>
           <p:cNvSpPr txBox="1"/>
           <p:nvPr/>
         </p:nvSpPr>
@@ -16007,7 +16063,7 @@
       </p:sp>
       <p:sp>
         <p:nvSpPr>
-          <p:cNvPr id="17" name="TextBox 16"/>
+          <p:cNvPr id="18" name="TextBox 17"/>
           <p:cNvSpPr txBox="1"/>
           <p:nvPr/>
         </p:nvSpPr>
@@ -16190,7 +16246,7 @@
       </p:sp>
       <p:sp>
         <p:nvSpPr>
-          <p:cNvPr id="18" name="TextBox 17"/>
+          <p:cNvPr id="19" name="TextBox 18"/>
           <p:cNvSpPr txBox="1"/>
           <p:nvPr/>
         </p:nvSpPr>
@@ -16229,7 +16285,7 @@
       </p:sp>
       <p:sp>
         <p:nvSpPr>
-          <p:cNvPr id="19" name="Rounded Rectangle 18"/>
+          <p:cNvPr id="20" name="Rounded Rectangle 19"/>
           <p:cNvSpPr/>
           <p:nvPr/>
         </p:nvSpPr>
@@ -16274,7 +16330,7 @@
       </p:sp>
       <p:sp>
         <p:nvSpPr>
-          <p:cNvPr id="20" name="Rectangle 19"/>
+          <p:cNvPr id="21" name="Rectangle 20"/>
           <p:cNvSpPr/>
           <p:nvPr/>
         </p:nvSpPr>
@@ -16317,7 +16373,7 @@
       </p:sp>
       <p:sp>
         <p:nvSpPr>
-          <p:cNvPr id="21" name="TextBox 20"/>
+          <p:cNvPr id="22" name="TextBox 21"/>
           <p:cNvSpPr txBox="1"/>
           <p:nvPr/>
         </p:nvSpPr>
@@ -16356,7 +16412,7 @@
       </p:sp>
       <p:sp>
         <p:nvSpPr>
-          <p:cNvPr id="22" name="TextBox 21"/>
+          <p:cNvPr id="23" name="TextBox 22"/>
           <p:cNvSpPr txBox="1"/>
           <p:nvPr/>
         </p:nvSpPr>
@@ -16395,7 +16451,7 @@
       </p:sp>
       <p:sp>
         <p:nvSpPr>
-          <p:cNvPr id="23" name="TextBox 22"/>
+          <p:cNvPr id="24" name="TextBox 23"/>
           <p:cNvSpPr txBox="1"/>
           <p:nvPr/>
         </p:nvSpPr>
@@ -16466,7 +16522,7 @@
       </p:sp>
       <p:sp>
         <p:nvSpPr>
-          <p:cNvPr id="24" name="Rounded Rectangle 23"/>
+          <p:cNvPr id="25" name="Rounded Rectangle 24"/>
           <p:cNvSpPr/>
           <p:nvPr/>
         </p:nvSpPr>
@@ -16511,7 +16567,7 @@
       </p:sp>
       <p:sp>
         <p:nvSpPr>
-          <p:cNvPr id="25" name="Rectangle 24"/>
+          <p:cNvPr id="26" name="Rectangle 25"/>
           <p:cNvSpPr/>
           <p:nvPr/>
         </p:nvSpPr>
@@ -16554,7 +16610,7 @@
       </p:sp>
       <p:sp>
         <p:nvSpPr>
-          <p:cNvPr id="26" name="TextBox 25"/>
+          <p:cNvPr id="27" name="TextBox 26"/>
           <p:cNvSpPr txBox="1"/>
           <p:nvPr/>
         </p:nvSpPr>
@@ -16593,7 +16649,7 @@
       </p:sp>
       <p:sp>
         <p:nvSpPr>
-          <p:cNvPr id="27" name="TextBox 26"/>
+          <p:cNvPr id="28" name="TextBox 27"/>
           <p:cNvSpPr txBox="1"/>
           <p:nvPr/>
         </p:nvSpPr>
@@ -16632,7 +16688,7 @@
       </p:sp>
       <p:sp>
         <p:nvSpPr>
-          <p:cNvPr id="28" name="TextBox 27"/>
+          <p:cNvPr id="29" name="TextBox 28"/>
           <p:cNvSpPr txBox="1"/>
           <p:nvPr/>
         </p:nvSpPr>
@@ -16703,7 +16759,7 @@
       </p:sp>
       <p:sp>
         <p:nvSpPr>
-          <p:cNvPr id="29" name="Rounded Rectangle 28"/>
+          <p:cNvPr id="30" name="Rounded Rectangle 29"/>
           <p:cNvSpPr/>
           <p:nvPr/>
         </p:nvSpPr>
@@ -16748,7 +16804,7 @@
       </p:sp>
       <p:sp>
         <p:nvSpPr>
-          <p:cNvPr id="30" name="Rectangle 29"/>
+          <p:cNvPr id="31" name="Rectangle 30"/>
           <p:cNvSpPr/>
           <p:nvPr/>
         </p:nvSpPr>
@@ -16791,7 +16847,7 @@
       </p:sp>
       <p:sp>
         <p:nvSpPr>
-          <p:cNvPr id="31" name="TextBox 30"/>
+          <p:cNvPr id="32" name="TextBox 31"/>
           <p:cNvSpPr txBox="1"/>
           <p:nvPr/>
         </p:nvSpPr>
@@ -16830,7 +16886,7 @@
       </p:sp>
       <p:sp>
         <p:nvSpPr>
-          <p:cNvPr id="32" name="TextBox 31"/>
+          <p:cNvPr id="33" name="TextBox 32"/>
           <p:cNvSpPr txBox="1"/>
           <p:nvPr/>
         </p:nvSpPr>
@@ -16869,7 +16925,7 @@
       </p:sp>
       <p:sp>
         <p:nvSpPr>
-          <p:cNvPr id="33" name="TextBox 32"/>
+          <p:cNvPr id="34" name="TextBox 33"/>
           <p:cNvSpPr txBox="1"/>
           <p:nvPr/>
         </p:nvSpPr>
@@ -16940,7 +16996,7 @@
       </p:sp>
       <p:sp>
         <p:nvSpPr>
-          <p:cNvPr id="34" name="TextBox 33"/>
+          <p:cNvPr id="35" name="TextBox 34"/>
           <p:cNvSpPr txBox="1"/>
           <p:nvPr/>
         </p:nvSpPr>
@@ -16979,7 +17035,7 @@
       </p:sp>
       <p:sp>
         <p:nvSpPr>
-          <p:cNvPr id="35" name="TextBox 34"/>
+          <p:cNvPr id="36" name="TextBox 35"/>
           <p:cNvSpPr txBox="1"/>
           <p:nvPr/>
         </p:nvSpPr>
@@ -17245,15 +17301,17 @@
         </p:nvSpPr>
         <p:spPr>
           <a:xfrm>
-            <a:off x="548640" y="1691640"/>
-            <a:ext cx="5120640" cy="2743200"/>
+            <a:off x="6858000" y="868680"/>
+            <a:ext cx="4846320" cy="411480"/>
           </a:xfrm>
           <a:prstGeom prst="roundRect">
             <a:avLst>
-              <a:gd name="adj" fmla="val 5000"/>
+              <a:gd name="adj" fmla="val 40000"/>
             </a:avLst>
           </a:prstGeom>
-          <a:noFill/>
+          <a:solidFill>
+            <a:srgbClr val="F5F4EE"/>
+          </a:solidFill>
           <a:ln w="9525">
             <a:solidFill>
               <a:srgbClr val="E7E5E0"/>
@@ -17275,6 +17333,60 @@
           </a:fontRef>
         </p:style>
         <p:txBody>
+          <a:bodyPr rtlCol="0" anchor="ctr" lIns="137160" rIns="137160" tIns="0" bIns="0"/>
+          <a:lstStyle/>
+          <a:p>
+            <a:pPr algn="ctr"/>
+            <a:r>
+              <a:rPr sz="1000" b="1">
+                <a:solidFill>
+                  <a:srgbClr val="44403C"/>
+                </a:solidFill>
+                <a:latin typeface="Microsoft JhengHei"/>
+              </a:rPr>
+              <a:t>演算法　六維加權評分 + 不對稱偵測</a:t>
+            </a:r>
+          </a:p>
+        </p:txBody>
+      </p:sp>
+      <p:sp>
+        <p:nvSpPr>
+          <p:cNvPr id="8" name="Rounded Rectangle 7"/>
+          <p:cNvSpPr/>
+          <p:nvPr/>
+        </p:nvSpPr>
+        <p:spPr>
+          <a:xfrm>
+            <a:off x="548640" y="1691640"/>
+            <a:ext cx="5120640" cy="2743200"/>
+          </a:xfrm>
+          <a:prstGeom prst="roundRect">
+            <a:avLst>
+              <a:gd name="adj" fmla="val 5000"/>
+            </a:avLst>
+          </a:prstGeom>
+          <a:noFill/>
+          <a:ln w="9525">
+            <a:solidFill>
+              <a:srgbClr val="E7E5E0"/>
+            </a:solidFill>
+          </a:ln>
+        </p:spPr>
+        <p:style>
+          <a:lnRef idx="1">
+            <a:schemeClr val="accent1"/>
+          </a:lnRef>
+          <a:fillRef idx="3">
+            <a:schemeClr val="accent1"/>
+          </a:fillRef>
+          <a:effectRef idx="2">
+            <a:schemeClr val="accent1"/>
+          </a:effectRef>
+          <a:fontRef idx="minor">
+            <a:schemeClr val="lt1"/>
+          </a:fontRef>
+        </p:style>
+        <p:txBody>
           <a:bodyPr rtlCol="0" anchor="ctr"/>
           <a:lstStyle/>
           <a:p>
@@ -17284,7 +17396,7 @@
       </p:sp>
       <p:sp>
         <p:nvSpPr>
-          <p:cNvPr id="8" name="TextBox 7"/>
+          <p:cNvPr id="9" name="TextBox 8"/>
           <p:cNvSpPr txBox="1"/>
           <p:nvPr/>
         </p:nvSpPr>
@@ -17323,7 +17435,7 @@
       </p:sp>
       <p:sp>
         <p:nvSpPr>
-          <p:cNvPr id="9" name="TextBox 8"/>
+          <p:cNvPr id="10" name="TextBox 9"/>
           <p:cNvSpPr txBox="1"/>
           <p:nvPr/>
         </p:nvSpPr>
@@ -17410,7 +17522,7 @@
       </p:sp>
       <p:sp>
         <p:nvSpPr>
-          <p:cNvPr id="10" name="Rounded Rectangle 9"/>
+          <p:cNvPr id="11" name="Rounded Rectangle 10"/>
           <p:cNvSpPr/>
           <p:nvPr/>
         </p:nvSpPr>
@@ -17457,7 +17569,7 @@
       </p:sp>
       <p:sp>
         <p:nvSpPr>
-          <p:cNvPr id="11" name="Rectangle 10"/>
+          <p:cNvPr id="12" name="Rectangle 11"/>
           <p:cNvSpPr/>
           <p:nvPr/>
         </p:nvSpPr>
@@ -17500,7 +17612,7 @@
       </p:sp>
       <p:sp>
         <p:nvSpPr>
-          <p:cNvPr id="12" name="TextBox 11"/>
+          <p:cNvPr id="13" name="TextBox 12"/>
           <p:cNvSpPr txBox="1"/>
           <p:nvPr/>
         </p:nvSpPr>
@@ -17539,7 +17651,7 @@
       </p:sp>
       <p:sp>
         <p:nvSpPr>
-          <p:cNvPr id="13" name="TextBox 12"/>
+          <p:cNvPr id="14" name="TextBox 13"/>
           <p:cNvSpPr txBox="1"/>
           <p:nvPr/>
         </p:nvSpPr>
@@ -17706,7 +17818,7 @@
       </p:sp>
       <p:sp>
         <p:nvSpPr>
-          <p:cNvPr id="14" name="Rounded Rectangle 13"/>
+          <p:cNvPr id="15" name="Rounded Rectangle 14"/>
           <p:cNvSpPr/>
           <p:nvPr/>
         </p:nvSpPr>
@@ -17753,7 +17865,7 @@
       </p:sp>
       <p:sp>
         <p:nvSpPr>
-          <p:cNvPr id="15" name="Rectangle 14"/>
+          <p:cNvPr id="16" name="Rectangle 15"/>
           <p:cNvSpPr/>
           <p:nvPr/>
         </p:nvSpPr>
@@ -17796,7 +17908,7 @@
       </p:sp>
       <p:sp>
         <p:nvSpPr>
-          <p:cNvPr id="16" name="TextBox 15"/>
+          <p:cNvPr id="17" name="TextBox 16"/>
           <p:cNvSpPr txBox="1"/>
           <p:nvPr/>
         </p:nvSpPr>
@@ -17835,7 +17947,7 @@
       </p:sp>
       <p:sp>
         <p:nvSpPr>
-          <p:cNvPr id="17" name="TextBox 16"/>
+          <p:cNvPr id="18" name="TextBox 17"/>
           <p:cNvSpPr txBox="1"/>
           <p:nvPr/>
         </p:nvSpPr>
@@ -18034,7 +18146,7 @@
       </p:sp>
       <p:sp>
         <p:nvSpPr>
-          <p:cNvPr id="18" name="TextBox 17"/>
+          <p:cNvPr id="19" name="TextBox 18"/>
           <p:cNvSpPr txBox="1"/>
           <p:nvPr/>
         </p:nvSpPr>
@@ -18073,7 +18185,7 @@
       </p:sp>
       <p:sp>
         <p:nvSpPr>
-          <p:cNvPr id="19" name="Rounded Rectangle 18"/>
+          <p:cNvPr id="20" name="Rounded Rectangle 19"/>
           <p:cNvSpPr/>
           <p:nvPr/>
         </p:nvSpPr>
@@ -18118,7 +18230,7 @@
       </p:sp>
       <p:sp>
         <p:nvSpPr>
-          <p:cNvPr id="20" name="Rectangle 19"/>
+          <p:cNvPr id="21" name="Rectangle 20"/>
           <p:cNvSpPr/>
           <p:nvPr/>
         </p:nvSpPr>
@@ -18161,7 +18273,7 @@
       </p:sp>
       <p:sp>
         <p:nvSpPr>
-          <p:cNvPr id="21" name="TextBox 20"/>
+          <p:cNvPr id="22" name="TextBox 21"/>
           <p:cNvSpPr txBox="1"/>
           <p:nvPr/>
         </p:nvSpPr>
@@ -18200,7 +18312,7 @@
       </p:sp>
       <p:sp>
         <p:nvSpPr>
-          <p:cNvPr id="22" name="TextBox 21"/>
+          <p:cNvPr id="23" name="TextBox 22"/>
           <p:cNvSpPr txBox="1"/>
           <p:nvPr/>
         </p:nvSpPr>
@@ -18239,7 +18351,7 @@
       </p:sp>
       <p:sp>
         <p:nvSpPr>
-          <p:cNvPr id="23" name="TextBox 22"/>
+          <p:cNvPr id="24" name="TextBox 23"/>
           <p:cNvSpPr txBox="1"/>
           <p:nvPr/>
         </p:nvSpPr>
@@ -18310,7 +18422,7 @@
       </p:sp>
       <p:sp>
         <p:nvSpPr>
-          <p:cNvPr id="24" name="Rounded Rectangle 23"/>
+          <p:cNvPr id="25" name="Rounded Rectangle 24"/>
           <p:cNvSpPr/>
           <p:nvPr/>
         </p:nvSpPr>
@@ -18355,7 +18467,7 @@
       </p:sp>
       <p:sp>
         <p:nvSpPr>
-          <p:cNvPr id="25" name="Rectangle 24"/>
+          <p:cNvPr id="26" name="Rectangle 25"/>
           <p:cNvSpPr/>
           <p:nvPr/>
         </p:nvSpPr>
@@ -18398,7 +18510,7 @@
       </p:sp>
       <p:sp>
         <p:nvSpPr>
-          <p:cNvPr id="26" name="TextBox 25"/>
+          <p:cNvPr id="27" name="TextBox 26"/>
           <p:cNvSpPr txBox="1"/>
           <p:nvPr/>
         </p:nvSpPr>
@@ -18437,7 +18549,7 @@
       </p:sp>
       <p:sp>
         <p:nvSpPr>
-          <p:cNvPr id="27" name="TextBox 26"/>
+          <p:cNvPr id="28" name="TextBox 27"/>
           <p:cNvSpPr txBox="1"/>
           <p:nvPr/>
         </p:nvSpPr>
@@ -18476,7 +18588,7 @@
       </p:sp>
       <p:sp>
         <p:nvSpPr>
-          <p:cNvPr id="28" name="TextBox 27"/>
+          <p:cNvPr id="29" name="TextBox 28"/>
           <p:cNvSpPr txBox="1"/>
           <p:nvPr/>
         </p:nvSpPr>
@@ -18547,7 +18659,7 @@
       </p:sp>
       <p:sp>
         <p:nvSpPr>
-          <p:cNvPr id="29" name="Rounded Rectangle 28"/>
+          <p:cNvPr id="30" name="Rounded Rectangle 29"/>
           <p:cNvSpPr/>
           <p:nvPr/>
         </p:nvSpPr>
@@ -18592,7 +18704,7 @@
       </p:sp>
       <p:sp>
         <p:nvSpPr>
-          <p:cNvPr id="30" name="Rectangle 29"/>
+          <p:cNvPr id="31" name="Rectangle 30"/>
           <p:cNvSpPr/>
           <p:nvPr/>
         </p:nvSpPr>
@@ -18635,7 +18747,7 @@
       </p:sp>
       <p:sp>
         <p:nvSpPr>
-          <p:cNvPr id="31" name="TextBox 30"/>
+          <p:cNvPr id="32" name="TextBox 31"/>
           <p:cNvSpPr txBox="1"/>
           <p:nvPr/>
         </p:nvSpPr>
@@ -18674,7 +18786,7 @@
       </p:sp>
       <p:sp>
         <p:nvSpPr>
-          <p:cNvPr id="32" name="TextBox 31"/>
+          <p:cNvPr id="33" name="TextBox 32"/>
           <p:cNvSpPr txBox="1"/>
           <p:nvPr/>
         </p:nvSpPr>
@@ -18713,7 +18825,7 @@
       </p:sp>
       <p:sp>
         <p:nvSpPr>
-          <p:cNvPr id="33" name="TextBox 32"/>
+          <p:cNvPr id="34" name="TextBox 33"/>
           <p:cNvSpPr txBox="1"/>
           <p:nvPr/>
         </p:nvSpPr>
@@ -18784,7 +18896,7 @@
       </p:sp>
       <p:sp>
         <p:nvSpPr>
-          <p:cNvPr id="34" name="TextBox 33"/>
+          <p:cNvPr id="35" name="TextBox 34"/>
           <p:cNvSpPr txBox="1"/>
           <p:nvPr/>
         </p:nvSpPr>
@@ -18823,7 +18935,7 @@
       </p:sp>
       <p:sp>
         <p:nvSpPr>
-          <p:cNvPr id="35" name="TextBox 34"/>
+          <p:cNvPr id="36" name="TextBox 35"/>
           <p:cNvSpPr txBox="1"/>
           <p:nvPr/>
         </p:nvSpPr>
@@ -19089,15 +19201,17 @@
         </p:nvSpPr>
         <p:spPr>
           <a:xfrm>
-            <a:off x="548640" y="1691640"/>
-            <a:ext cx="5120640" cy="2743200"/>
+            <a:off x="6858000" y="868680"/>
+            <a:ext cx="4846320" cy="411480"/>
           </a:xfrm>
           <a:prstGeom prst="roundRect">
             <a:avLst>
-              <a:gd name="adj" fmla="val 5000"/>
+              <a:gd name="adj" fmla="val 40000"/>
             </a:avLst>
           </a:prstGeom>
-          <a:noFill/>
+          <a:solidFill>
+            <a:srgbClr val="F5F4EE"/>
+          </a:solidFill>
           <a:ln w="9525">
             <a:solidFill>
               <a:srgbClr val="E7E5E0"/>
@@ -19119,6 +19233,60 @@
           </a:fontRef>
         </p:style>
         <p:txBody>
+          <a:bodyPr rtlCol="0" anchor="ctr" lIns="137160" rIns="137160" tIns="0" bIns="0"/>
+          <a:lstStyle/>
+          <a:p>
+            <a:pPr algn="ctr"/>
+            <a:r>
+              <a:rPr sz="1000" b="1">
+                <a:solidFill>
+                  <a:srgbClr val="44403C"/>
+                </a:solidFill>
+                <a:latin typeface="Microsoft JhengHei"/>
+              </a:rPr>
+              <a:t>演算法　同期校準 (DiD) + 線性回歸</a:t>
+            </a:r>
+          </a:p>
+        </p:txBody>
+      </p:sp>
+      <p:sp>
+        <p:nvSpPr>
+          <p:cNvPr id="8" name="Rounded Rectangle 7"/>
+          <p:cNvSpPr/>
+          <p:nvPr/>
+        </p:nvSpPr>
+        <p:spPr>
+          <a:xfrm>
+            <a:off x="548640" y="1691640"/>
+            <a:ext cx="5120640" cy="2743200"/>
+          </a:xfrm>
+          <a:prstGeom prst="roundRect">
+            <a:avLst>
+              <a:gd name="adj" fmla="val 5000"/>
+            </a:avLst>
+          </a:prstGeom>
+          <a:noFill/>
+          <a:ln w="9525">
+            <a:solidFill>
+              <a:srgbClr val="E7E5E0"/>
+            </a:solidFill>
+          </a:ln>
+        </p:spPr>
+        <p:style>
+          <a:lnRef idx="1">
+            <a:schemeClr val="accent1"/>
+          </a:lnRef>
+          <a:fillRef idx="3">
+            <a:schemeClr val="accent1"/>
+          </a:fillRef>
+          <a:effectRef idx="2">
+            <a:schemeClr val="accent1"/>
+          </a:effectRef>
+          <a:fontRef idx="minor">
+            <a:schemeClr val="lt1"/>
+          </a:fontRef>
+        </p:style>
+        <p:txBody>
           <a:bodyPr rtlCol="0" anchor="ctr"/>
           <a:lstStyle/>
           <a:p>
@@ -19128,7 +19296,7 @@
       </p:sp>
       <p:sp>
         <p:nvSpPr>
-          <p:cNvPr id="8" name="TextBox 7"/>
+          <p:cNvPr id="9" name="TextBox 8"/>
           <p:cNvSpPr txBox="1"/>
           <p:nvPr/>
         </p:nvSpPr>
@@ -19167,7 +19335,7 @@
       </p:sp>
       <p:sp>
         <p:nvSpPr>
-          <p:cNvPr id="9" name="TextBox 8"/>
+          <p:cNvPr id="10" name="TextBox 9"/>
           <p:cNvSpPr txBox="1"/>
           <p:nvPr/>
         </p:nvSpPr>
@@ -19254,7 +19422,7 @@
       </p:sp>
       <p:sp>
         <p:nvSpPr>
-          <p:cNvPr id="10" name="Rounded Rectangle 9"/>
+          <p:cNvPr id="11" name="Rounded Rectangle 10"/>
           <p:cNvSpPr/>
           <p:nvPr/>
         </p:nvSpPr>
@@ -19301,7 +19469,7 @@
       </p:sp>
       <p:sp>
         <p:nvSpPr>
-          <p:cNvPr id="11" name="Rectangle 10"/>
+          <p:cNvPr id="12" name="Rectangle 11"/>
           <p:cNvSpPr/>
           <p:nvPr/>
         </p:nvSpPr>
@@ -19344,7 +19512,7 @@
       </p:sp>
       <p:sp>
         <p:nvSpPr>
-          <p:cNvPr id="12" name="TextBox 11"/>
+          <p:cNvPr id="13" name="TextBox 12"/>
           <p:cNvSpPr txBox="1"/>
           <p:nvPr/>
         </p:nvSpPr>
@@ -19383,7 +19551,7 @@
       </p:sp>
       <p:sp>
         <p:nvSpPr>
-          <p:cNvPr id="13" name="TextBox 12"/>
+          <p:cNvPr id="14" name="TextBox 13"/>
           <p:cNvSpPr txBox="1"/>
           <p:nvPr/>
         </p:nvSpPr>
@@ -19550,7 +19718,7 @@
       </p:sp>
       <p:sp>
         <p:nvSpPr>
-          <p:cNvPr id="14" name="Rounded Rectangle 13"/>
+          <p:cNvPr id="15" name="Rounded Rectangle 14"/>
           <p:cNvSpPr/>
           <p:nvPr/>
         </p:nvSpPr>
@@ -19597,7 +19765,7 @@
       </p:sp>
       <p:sp>
         <p:nvSpPr>
-          <p:cNvPr id="15" name="Rectangle 14"/>
+          <p:cNvPr id="16" name="Rectangle 15"/>
           <p:cNvSpPr/>
           <p:nvPr/>
         </p:nvSpPr>
@@ -19640,7 +19808,7 @@
       </p:sp>
       <p:sp>
         <p:nvSpPr>
-          <p:cNvPr id="16" name="TextBox 15"/>
+          <p:cNvPr id="17" name="TextBox 16"/>
           <p:cNvSpPr txBox="1"/>
           <p:nvPr/>
         </p:nvSpPr>
@@ -19679,7 +19847,7 @@
       </p:sp>
       <p:sp>
         <p:nvSpPr>
-          <p:cNvPr id="17" name="TextBox 16"/>
+          <p:cNvPr id="18" name="TextBox 17"/>
           <p:cNvSpPr txBox="1"/>
           <p:nvPr/>
         </p:nvSpPr>
@@ -19846,7 +20014,7 @@
       </p:sp>
       <p:sp>
         <p:nvSpPr>
-          <p:cNvPr id="18" name="TextBox 17"/>
+          <p:cNvPr id="19" name="TextBox 18"/>
           <p:cNvSpPr txBox="1"/>
           <p:nvPr/>
         </p:nvSpPr>
@@ -19885,7 +20053,7 @@
       </p:sp>
       <p:sp>
         <p:nvSpPr>
-          <p:cNvPr id="19" name="Rounded Rectangle 18"/>
+          <p:cNvPr id="20" name="Rounded Rectangle 19"/>
           <p:cNvSpPr/>
           <p:nvPr/>
         </p:nvSpPr>
@@ -19930,7 +20098,7 @@
       </p:sp>
       <p:sp>
         <p:nvSpPr>
-          <p:cNvPr id="20" name="Rectangle 19"/>
+          <p:cNvPr id="21" name="Rectangle 20"/>
           <p:cNvSpPr/>
           <p:nvPr/>
         </p:nvSpPr>
@@ -19973,7 +20141,7 @@
       </p:sp>
       <p:sp>
         <p:nvSpPr>
-          <p:cNvPr id="21" name="TextBox 20"/>
+          <p:cNvPr id="22" name="TextBox 21"/>
           <p:cNvSpPr txBox="1"/>
           <p:nvPr/>
         </p:nvSpPr>
@@ -20012,7 +20180,7 @@
       </p:sp>
       <p:sp>
         <p:nvSpPr>
-          <p:cNvPr id="22" name="TextBox 21"/>
+          <p:cNvPr id="23" name="TextBox 22"/>
           <p:cNvSpPr txBox="1"/>
           <p:nvPr/>
         </p:nvSpPr>
@@ -20051,7 +20219,7 @@
       </p:sp>
       <p:sp>
         <p:nvSpPr>
-          <p:cNvPr id="23" name="TextBox 22"/>
+          <p:cNvPr id="24" name="TextBox 23"/>
           <p:cNvSpPr txBox="1"/>
           <p:nvPr/>
         </p:nvSpPr>
@@ -20122,7 +20290,7 @@
       </p:sp>
       <p:sp>
         <p:nvSpPr>
-          <p:cNvPr id="24" name="Rounded Rectangle 23"/>
+          <p:cNvPr id="25" name="Rounded Rectangle 24"/>
           <p:cNvSpPr/>
           <p:nvPr/>
         </p:nvSpPr>
@@ -20167,7 +20335,7 @@
       </p:sp>
       <p:sp>
         <p:nvSpPr>
-          <p:cNvPr id="25" name="Rectangle 24"/>
+          <p:cNvPr id="26" name="Rectangle 25"/>
           <p:cNvSpPr/>
           <p:nvPr/>
         </p:nvSpPr>
@@ -20210,7 +20378,7 @@
       </p:sp>
       <p:sp>
         <p:nvSpPr>
-          <p:cNvPr id="26" name="TextBox 25"/>
+          <p:cNvPr id="27" name="TextBox 26"/>
           <p:cNvSpPr txBox="1"/>
           <p:nvPr/>
         </p:nvSpPr>
@@ -20249,7 +20417,7 @@
       </p:sp>
       <p:sp>
         <p:nvSpPr>
-          <p:cNvPr id="27" name="TextBox 26"/>
+          <p:cNvPr id="28" name="TextBox 27"/>
           <p:cNvSpPr txBox="1"/>
           <p:nvPr/>
         </p:nvSpPr>
@@ -20288,7 +20456,7 @@
       </p:sp>
       <p:sp>
         <p:nvSpPr>
-          <p:cNvPr id="28" name="TextBox 27"/>
+          <p:cNvPr id="29" name="TextBox 28"/>
           <p:cNvSpPr txBox="1"/>
           <p:nvPr/>
         </p:nvSpPr>
@@ -20359,7 +20527,7 @@
       </p:sp>
       <p:sp>
         <p:nvSpPr>
-          <p:cNvPr id="29" name="Rounded Rectangle 28"/>
+          <p:cNvPr id="30" name="Rounded Rectangle 29"/>
           <p:cNvSpPr/>
           <p:nvPr/>
         </p:nvSpPr>
@@ -20404,7 +20572,7 @@
       </p:sp>
       <p:sp>
         <p:nvSpPr>
-          <p:cNvPr id="30" name="Rectangle 29"/>
+          <p:cNvPr id="31" name="Rectangle 30"/>
           <p:cNvSpPr/>
           <p:nvPr/>
         </p:nvSpPr>
@@ -20447,7 +20615,7 @@
       </p:sp>
       <p:sp>
         <p:nvSpPr>
-          <p:cNvPr id="31" name="TextBox 30"/>
+          <p:cNvPr id="32" name="TextBox 31"/>
           <p:cNvSpPr txBox="1"/>
           <p:nvPr/>
         </p:nvSpPr>
@@ -20486,7 +20654,7 @@
       </p:sp>
       <p:sp>
         <p:nvSpPr>
-          <p:cNvPr id="32" name="TextBox 31"/>
+          <p:cNvPr id="33" name="TextBox 32"/>
           <p:cNvSpPr txBox="1"/>
           <p:nvPr/>
         </p:nvSpPr>
@@ -20525,7 +20693,7 @@
       </p:sp>
       <p:sp>
         <p:nvSpPr>
-          <p:cNvPr id="33" name="TextBox 32"/>
+          <p:cNvPr id="34" name="TextBox 33"/>
           <p:cNvSpPr txBox="1"/>
           <p:nvPr/>
         </p:nvSpPr>
@@ -20596,7 +20764,7 @@
       </p:sp>
       <p:sp>
         <p:nvSpPr>
-          <p:cNvPr id="34" name="TextBox 33"/>
+          <p:cNvPr id="35" name="TextBox 34"/>
           <p:cNvSpPr txBox="1"/>
           <p:nvPr/>
         </p:nvSpPr>
@@ -20635,7 +20803,7 @@
       </p:sp>
       <p:sp>
         <p:nvSpPr>
-          <p:cNvPr id="35" name="TextBox 34"/>
+          <p:cNvPr id="36" name="TextBox 35"/>
           <p:cNvSpPr txBox="1"/>
           <p:nvPr/>
         </p:nvSpPr>

--- a/docs/串連系統_簡報.pptx
+++ b/docs/串連系統_簡報.pptx
@@ -3118,7 +3118,7 @@
             <a:avLst/>
           </a:prstGeom>
           <a:solidFill>
-            <a:srgbClr val="FAFAF7"/>
+            <a:srgbClr val="F4F1ED"/>
           </a:solidFill>
           <a:ln>
             <a:noFill/>
@@ -3161,7 +3161,7 @@
             <a:avLst/>
           </a:prstGeom>
           <a:solidFill>
-            <a:srgbClr val="E7E5E0"/>
+            <a:srgbClr val="C8C2B7"/>
           </a:solidFill>
           <a:ln>
             <a:noFill/>
@@ -3219,7 +3219,7 @@
             <a:r>
               <a:rPr sz="1100" b="1">
                 <a:solidFill>
-                  <a:srgbClr val="78716C"/>
+                  <a:srgbClr val="6B6B6B"/>
                 </a:solidFill>
                 <a:latin typeface="Microsoft JhengHei"/>
               </a:rPr>
@@ -3258,7 +3258,7 @@
             <a:r>
               <a:rPr sz="8800" b="1">
                 <a:solidFill>
-                  <a:srgbClr val="1C1917"/>
+                  <a:srgbClr val="1A1A1A"/>
                 </a:solidFill>
                 <a:latin typeface="Microsoft JhengHei"/>
               </a:rPr>
@@ -3297,7 +3297,7 @@
             <a:r>
               <a:rPr sz="2600" b="0">
                 <a:solidFill>
-                  <a:srgbClr val="1C1917"/>
+                  <a:srgbClr val="1A1A1A"/>
                 </a:solidFill>
                 <a:latin typeface="Microsoft JhengHei"/>
               </a:rPr>
@@ -3321,7 +3321,7 @@
             <a:avLst/>
           </a:prstGeom>
           <a:solidFill>
-            <a:srgbClr val="D97706"/>
+            <a:srgbClr val="E67E22"/>
           </a:solidFill>
           <a:ln>
             <a:noFill/>
@@ -3379,7 +3379,7 @@
             <a:r>
               <a:rPr sz="1100" b="0">
                 <a:solidFill>
-                  <a:srgbClr val="78716C"/>
+                  <a:srgbClr val="6B6B6B"/>
                 </a:solidFill>
                 <a:latin typeface="Microsoft JhengHei"/>
               </a:rPr>
@@ -3418,7 +3418,7 @@
             <a:r>
               <a:rPr sz="1000" b="0">
                 <a:solidFill>
-                  <a:srgbClr val="78716C"/>
+                  <a:srgbClr val="6B6B6B"/>
                 </a:solidFill>
                 <a:latin typeface="Microsoft JhengHei"/>
               </a:rPr>
@@ -3460,7 +3460,7 @@
             <a:avLst/>
           </a:prstGeom>
           <a:solidFill>
-            <a:srgbClr val="FAFAF7"/>
+            <a:srgbClr val="F4F1ED"/>
           </a:solidFill>
           <a:ln>
             <a:noFill/>
@@ -3503,7 +3503,7 @@
             <a:avLst/>
           </a:prstGeom>
           <a:solidFill>
-            <a:srgbClr val="E7E5E0"/>
+            <a:srgbClr val="C8C2B7"/>
           </a:solidFill>
           <a:ln>
             <a:noFill/>
@@ -3561,7 +3561,7 @@
             <a:r>
               <a:rPr sz="1400" b="1">
                 <a:solidFill>
-                  <a:srgbClr val="78716C"/>
+                  <a:srgbClr val="6B6B6B"/>
                 </a:solidFill>
                 <a:latin typeface="Microsoft JhengHei"/>
               </a:rPr>
@@ -3600,7 +3600,7 @@
             <a:r>
               <a:rPr sz="4000" b="1">
                 <a:solidFill>
-                  <a:srgbClr val="1C1917"/>
+                  <a:srgbClr val="1A1A1A"/>
                 </a:solidFill>
                 <a:latin typeface="Microsoft JhengHei"/>
               </a:rPr>
@@ -3639,7 +3639,7 @@
             <a:r>
               <a:rPr sz="1600" b="0">
                 <a:solidFill>
-                  <a:srgbClr val="78716C"/>
+                  <a:srgbClr val="6B6B6B"/>
                 </a:solidFill>
                 <a:latin typeface="Microsoft JhengHei"/>
               </a:rPr>
@@ -3650,7 +3650,7 @@
       </p:sp>
       <p:sp>
         <p:nvSpPr>
-          <p:cNvPr id="7" name="Rounded Rectangle 6"/>
+          <p:cNvPr id="7" name="Rectangle 6"/>
           <p:cNvSpPr/>
           <p:nvPr/>
         </p:nvSpPr>
@@ -3659,15 +3659,13 @@
             <a:off x="518007" y="2194560"/>
             <a:ext cx="2651760" cy="2194560"/>
           </a:xfrm>
-          <a:prstGeom prst="roundRect">
-            <a:avLst>
-              <a:gd name="adj" fmla="val 6000"/>
-            </a:avLst>
+          <a:prstGeom prst="rect">
+            <a:avLst/>
           </a:prstGeom>
           <a:noFill/>
           <a:ln w="9525">
             <a:solidFill>
-              <a:srgbClr val="E7E5E0"/>
+              <a:srgbClr val="C8C2B7"/>
             </a:solidFill>
           </a:ln>
         </p:spPr>
@@ -3723,7 +3721,7 @@
             <a:r>
               <a:rPr sz="1400" b="1">
                 <a:solidFill>
-                  <a:srgbClr val="D97706"/>
+                  <a:srgbClr val="E67E22"/>
                 </a:solidFill>
                 <a:latin typeface="Microsoft JhengHei"/>
               </a:rPr>
@@ -3762,7 +3760,7 @@
             <a:r>
               <a:rPr sz="2200" b="1">
                 <a:solidFill>
-                  <a:srgbClr val="1C1917"/>
+                  <a:srgbClr val="1A1A1A"/>
                 </a:solidFill>
                 <a:latin typeface="Microsoft JhengHei"/>
               </a:rPr>
@@ -3801,7 +3799,7 @@
             <a:r>
               <a:rPr sz="1150" b="0">
                 <a:solidFill>
-                  <a:srgbClr val="78716C"/>
+                  <a:srgbClr val="6B6B6B"/>
                 </a:solidFill>
                 <a:latin typeface="Microsoft JhengHei"/>
               </a:rPr>
@@ -3817,7 +3815,7 @@
             <a:r>
               <a:rPr sz="1150" b="0">
                 <a:solidFill>
-                  <a:srgbClr val="78716C"/>
+                  <a:srgbClr val="6B6B6B"/>
                 </a:solidFill>
                 <a:latin typeface="Microsoft JhengHei"/>
               </a:rPr>
@@ -3828,7 +3826,7 @@
       </p:sp>
       <p:sp>
         <p:nvSpPr>
-          <p:cNvPr id="11" name="Rounded Rectangle 10"/>
+          <p:cNvPr id="11" name="Rectangle 10"/>
           <p:cNvSpPr/>
           <p:nvPr/>
         </p:nvSpPr>
@@ -3837,15 +3835,13 @@
             <a:off x="3352647" y="2194560"/>
             <a:ext cx="2651760" cy="2194560"/>
           </a:xfrm>
-          <a:prstGeom prst="roundRect">
-            <a:avLst>
-              <a:gd name="adj" fmla="val 6000"/>
-            </a:avLst>
+          <a:prstGeom prst="rect">
+            <a:avLst/>
           </a:prstGeom>
           <a:noFill/>
           <a:ln w="9525">
             <a:solidFill>
-              <a:srgbClr val="E7E5E0"/>
+              <a:srgbClr val="C8C2B7"/>
             </a:solidFill>
           </a:ln>
         </p:spPr>
@@ -3901,7 +3897,7 @@
             <a:r>
               <a:rPr sz="1400" b="1">
                 <a:solidFill>
-                  <a:srgbClr val="D97706"/>
+                  <a:srgbClr val="E67E22"/>
                 </a:solidFill>
                 <a:latin typeface="Microsoft JhengHei"/>
               </a:rPr>
@@ -3940,7 +3936,7 @@
             <a:r>
               <a:rPr sz="2200" b="1">
                 <a:solidFill>
-                  <a:srgbClr val="1C1917"/>
+                  <a:srgbClr val="1A1A1A"/>
                 </a:solidFill>
                 <a:latin typeface="Microsoft JhengHei"/>
               </a:rPr>
@@ -3979,7 +3975,7 @@
             <a:r>
               <a:rPr sz="1150" b="0">
                 <a:solidFill>
-                  <a:srgbClr val="78716C"/>
+                  <a:srgbClr val="6B6B6B"/>
                 </a:solidFill>
                 <a:latin typeface="Microsoft JhengHei"/>
               </a:rPr>
@@ -3995,7 +3991,7 @@
             <a:r>
               <a:rPr sz="1150" b="0">
                 <a:solidFill>
-                  <a:srgbClr val="78716C"/>
+                  <a:srgbClr val="6B6B6B"/>
                 </a:solidFill>
                 <a:latin typeface="Microsoft JhengHei"/>
               </a:rPr>
@@ -4006,7 +4002,7 @@
       </p:sp>
       <p:sp>
         <p:nvSpPr>
-          <p:cNvPr id="15" name="Rounded Rectangle 14"/>
+          <p:cNvPr id="15" name="Rectangle 14"/>
           <p:cNvSpPr/>
           <p:nvPr/>
         </p:nvSpPr>
@@ -4015,15 +4011,13 @@
             <a:off x="6187287" y="2194560"/>
             <a:ext cx="2651760" cy="2194560"/>
           </a:xfrm>
-          <a:prstGeom prst="roundRect">
-            <a:avLst>
-              <a:gd name="adj" fmla="val 6000"/>
-            </a:avLst>
+          <a:prstGeom prst="rect">
+            <a:avLst/>
           </a:prstGeom>
           <a:noFill/>
           <a:ln w="9525">
             <a:solidFill>
-              <a:srgbClr val="E7E5E0"/>
+              <a:srgbClr val="C8C2B7"/>
             </a:solidFill>
           </a:ln>
         </p:spPr>
@@ -4079,7 +4073,7 @@
             <a:r>
               <a:rPr sz="1400" b="1">
                 <a:solidFill>
-                  <a:srgbClr val="D97706"/>
+                  <a:srgbClr val="E67E22"/>
                 </a:solidFill>
                 <a:latin typeface="Microsoft JhengHei"/>
               </a:rPr>
@@ -4118,7 +4112,7 @@
             <a:r>
               <a:rPr sz="2200" b="1">
                 <a:solidFill>
-                  <a:srgbClr val="1C1917"/>
+                  <a:srgbClr val="1A1A1A"/>
                 </a:solidFill>
                 <a:latin typeface="Microsoft JhengHei"/>
               </a:rPr>
@@ -4157,7 +4151,7 @@
             <a:r>
               <a:rPr sz="1150" b="0">
                 <a:solidFill>
-                  <a:srgbClr val="78716C"/>
+                  <a:srgbClr val="6B6B6B"/>
                 </a:solidFill>
                 <a:latin typeface="Microsoft JhengHei"/>
               </a:rPr>
@@ -4173,7 +4167,7 @@
             <a:r>
               <a:rPr sz="1150" b="0">
                 <a:solidFill>
-                  <a:srgbClr val="78716C"/>
+                  <a:srgbClr val="6B6B6B"/>
                 </a:solidFill>
                 <a:latin typeface="Microsoft JhengHei"/>
               </a:rPr>
@@ -4184,7 +4178,7 @@
       </p:sp>
       <p:sp>
         <p:nvSpPr>
-          <p:cNvPr id="19" name="Rounded Rectangle 18"/>
+          <p:cNvPr id="19" name="Rectangle 18"/>
           <p:cNvSpPr/>
           <p:nvPr/>
         </p:nvSpPr>
@@ -4193,15 +4187,13 @@
             <a:off x="9021927" y="2194560"/>
             <a:ext cx="2651760" cy="2194560"/>
           </a:xfrm>
-          <a:prstGeom prst="roundRect">
-            <a:avLst>
-              <a:gd name="adj" fmla="val 6000"/>
-            </a:avLst>
+          <a:prstGeom prst="rect">
+            <a:avLst/>
           </a:prstGeom>
           <a:noFill/>
           <a:ln w="9525">
             <a:solidFill>
-              <a:srgbClr val="E7E5E0"/>
+              <a:srgbClr val="C8C2B7"/>
             </a:solidFill>
           </a:ln>
         </p:spPr>
@@ -4257,7 +4249,7 @@
             <a:r>
               <a:rPr sz="1400" b="1">
                 <a:solidFill>
-                  <a:srgbClr val="D97706"/>
+                  <a:srgbClr val="E67E22"/>
                 </a:solidFill>
                 <a:latin typeface="Microsoft JhengHei"/>
               </a:rPr>
@@ -4296,7 +4288,7 @@
             <a:r>
               <a:rPr sz="2200" b="1">
                 <a:solidFill>
-                  <a:srgbClr val="1C1917"/>
+                  <a:srgbClr val="1A1A1A"/>
                 </a:solidFill>
                 <a:latin typeface="Microsoft JhengHei"/>
               </a:rPr>
@@ -4335,7 +4327,7 @@
             <a:r>
               <a:rPr sz="1150" b="0">
                 <a:solidFill>
-                  <a:srgbClr val="78716C"/>
+                  <a:srgbClr val="6B6B6B"/>
                 </a:solidFill>
                 <a:latin typeface="Microsoft JhengHei"/>
               </a:rPr>
@@ -4351,7 +4343,7 @@
             <a:r>
               <a:rPr sz="1150" b="0">
                 <a:solidFill>
-                  <a:srgbClr val="78716C"/>
+                  <a:srgbClr val="6B6B6B"/>
                 </a:solidFill>
                 <a:latin typeface="Microsoft JhengHei"/>
               </a:rPr>
@@ -4362,7 +4354,7 @@
       </p:sp>
       <p:sp>
         <p:nvSpPr>
-          <p:cNvPr id="23" name="Rounded Rectangle 22"/>
+          <p:cNvPr id="23" name="Rectangle 22"/>
           <p:cNvSpPr/>
           <p:nvPr/>
         </p:nvSpPr>
@@ -4371,15 +4363,13 @@
             <a:off x="731520" y="4754880"/>
             <a:ext cx="10698480" cy="1463040"/>
           </a:xfrm>
-          <a:prstGeom prst="roundRect">
-            <a:avLst>
-              <a:gd name="adj" fmla="val 10000"/>
-            </a:avLst>
+          <a:prstGeom prst="rect">
+            <a:avLst/>
           </a:prstGeom>
           <a:noFill/>
           <a:ln w="9525">
             <a:solidFill>
-              <a:srgbClr val="E7E5E0"/>
+              <a:srgbClr val="C8C2B7"/>
             </a:solidFill>
           </a:ln>
         </p:spPr>
@@ -4435,7 +4425,7 @@
             <a:r>
               <a:rPr sz="1400" b="1">
                 <a:solidFill>
-                  <a:srgbClr val="D97706"/>
+                  <a:srgbClr val="E67E22"/>
                 </a:solidFill>
                 <a:latin typeface="Microsoft JhengHei"/>
               </a:rPr>
@@ -4474,7 +4464,7 @@
             <a:r>
               <a:rPr sz="1250" b="0">
                 <a:solidFill>
-                  <a:srgbClr val="1C1917"/>
+                  <a:srgbClr val="1A1A1A"/>
                 </a:solidFill>
                 <a:latin typeface="Microsoft JhengHei"/>
               </a:rPr>
@@ -4490,7 +4480,7 @@
             <a:r>
               <a:rPr sz="1250" b="0">
                 <a:solidFill>
-                  <a:srgbClr val="1C1917"/>
+                  <a:srgbClr val="1A1A1A"/>
                 </a:solidFill>
                 <a:latin typeface="Microsoft JhengHei"/>
               </a:rPr>
@@ -4506,7 +4496,7 @@
             <a:r>
               <a:rPr sz="1250" b="0">
                 <a:solidFill>
-                  <a:srgbClr val="1C1917"/>
+                  <a:srgbClr val="1A1A1A"/>
                 </a:solidFill>
                 <a:latin typeface="Microsoft JhengHei"/>
               </a:rPr>
@@ -4545,7 +4535,7 @@
             <a:r>
               <a:rPr sz="900" b="0">
                 <a:solidFill>
-                  <a:srgbClr val="78716C"/>
+                  <a:srgbClr val="6B6B6B"/>
                 </a:solidFill>
                 <a:latin typeface="Microsoft JhengHei"/>
               </a:rPr>
@@ -4584,7 +4574,7 @@
             <a:r>
               <a:rPr sz="900" b="0">
                 <a:solidFill>
-                  <a:srgbClr val="78716C"/>
+                  <a:srgbClr val="6B6B6B"/>
                 </a:solidFill>
                 <a:latin typeface="Microsoft JhengHei"/>
               </a:rPr>
@@ -4626,7 +4616,7 @@
             <a:avLst/>
           </a:prstGeom>
           <a:solidFill>
-            <a:srgbClr val="FAFAF7"/>
+            <a:srgbClr val="F4F1ED"/>
           </a:solidFill>
           <a:ln>
             <a:noFill/>
@@ -4669,7 +4659,7 @@
             <a:avLst/>
           </a:prstGeom>
           <a:solidFill>
-            <a:srgbClr val="E7E5E0"/>
+            <a:srgbClr val="C8C2B7"/>
           </a:solidFill>
           <a:ln>
             <a:noFill/>
@@ -4727,7 +4717,7 @@
             <a:r>
               <a:rPr sz="1400" b="1">
                 <a:solidFill>
-                  <a:srgbClr val="78716C"/>
+                  <a:srgbClr val="6B6B6B"/>
                 </a:solidFill>
                 <a:latin typeface="Microsoft JhengHei"/>
               </a:rPr>
@@ -4766,7 +4756,7 @@
             <a:r>
               <a:rPr sz="4000" b="1">
                 <a:solidFill>
-                  <a:srgbClr val="1C1917"/>
+                  <a:srgbClr val="1A1A1A"/>
                 </a:solidFill>
                 <a:latin typeface="Microsoft JhengHei"/>
               </a:rPr>
@@ -4805,7 +4795,7 @@
             <a:r>
               <a:rPr sz="1600" b="0">
                 <a:solidFill>
-                  <a:srgbClr val="78716C"/>
+                  <a:srgbClr val="6B6B6B"/>
                 </a:solidFill>
                 <a:latin typeface="Microsoft JhengHei"/>
               </a:rPr>
@@ -4816,7 +4806,7 @@
       </p:sp>
       <p:sp>
         <p:nvSpPr>
-          <p:cNvPr id="7" name="Rounded Rectangle 6"/>
+          <p:cNvPr id="7" name="Rectangle 6"/>
           <p:cNvSpPr/>
           <p:nvPr/>
         </p:nvSpPr>
@@ -4825,15 +4815,13 @@
             <a:off x="640080" y="2194560"/>
             <a:ext cx="5486400" cy="4023360"/>
           </a:xfrm>
-          <a:prstGeom prst="roundRect">
-            <a:avLst>
-              <a:gd name="adj" fmla="val 5000"/>
-            </a:avLst>
+          <a:prstGeom prst="rect">
+            <a:avLst/>
           </a:prstGeom>
           <a:noFill/>
           <a:ln w="9525">
             <a:solidFill>
-              <a:srgbClr val="E7E5E0"/>
+              <a:srgbClr val="C8C2B7"/>
             </a:solidFill>
           </a:ln>
         </p:spPr>
@@ -4889,7 +4877,7 @@
             <a:r>
               <a:rPr sz="1400" b="1">
                 <a:solidFill>
-                  <a:srgbClr val="D97706"/>
+                  <a:srgbClr val="E67E22"/>
                 </a:solidFill>
                 <a:latin typeface="Microsoft JhengHei"/>
               </a:rPr>
@@ -4913,7 +4901,7 @@
             <a:avLst/>
           </a:prstGeom>
           <a:solidFill>
-            <a:srgbClr val="D97706"/>
+            <a:srgbClr val="E67E22"/>
           </a:solidFill>
           <a:ln>
             <a:noFill/>
@@ -4971,7 +4959,7 @@
             <a:r>
               <a:rPr sz="1400" b="1">
                 <a:solidFill>
-                  <a:srgbClr val="1C1917"/>
+                  <a:srgbClr val="1A1A1A"/>
                 </a:solidFill>
                 <a:latin typeface="Microsoft JhengHei"/>
               </a:rPr>
@@ -4995,7 +4983,7 @@
             <a:avLst/>
           </a:prstGeom>
           <a:solidFill>
-            <a:srgbClr val="D97706"/>
+            <a:srgbClr val="E67E22"/>
           </a:solidFill>
           <a:ln>
             <a:noFill/>
@@ -5053,7 +5041,7 @@
             <a:r>
               <a:rPr sz="1400" b="1">
                 <a:solidFill>
-                  <a:srgbClr val="1C1917"/>
+                  <a:srgbClr val="1A1A1A"/>
                 </a:solidFill>
                 <a:latin typeface="Microsoft JhengHei"/>
               </a:rPr>
@@ -5077,7 +5065,7 @@
             <a:avLst/>
           </a:prstGeom>
           <a:solidFill>
-            <a:srgbClr val="D97706"/>
+            <a:srgbClr val="E67E22"/>
           </a:solidFill>
           <a:ln>
             <a:noFill/>
@@ -5135,7 +5123,7 @@
             <a:r>
               <a:rPr sz="1400" b="1">
                 <a:solidFill>
-                  <a:srgbClr val="1C1917"/>
+                  <a:srgbClr val="1A1A1A"/>
                 </a:solidFill>
                 <a:latin typeface="Microsoft JhengHei"/>
               </a:rPr>
@@ -5160,7 +5148,7 @@
           </a:prstGeom>
           <a:ln w="76200">
             <a:solidFill>
-              <a:srgbClr val="DC2626"/>
+              <a:srgbClr val="C0392B"/>
             </a:solidFill>
           </a:ln>
         </p:spPr>
@@ -5195,7 +5183,7 @@
           </a:prstGeom>
           <a:ln w="12700">
             <a:solidFill>
-              <a:srgbClr val="78716C"/>
+              <a:srgbClr val="6B6B6B"/>
             </a:solidFill>
           </a:ln>
         </p:spPr>
@@ -5244,7 +5232,7 @@
             <a:r>
               <a:rPr sz="1200" b="1">
                 <a:solidFill>
-                  <a:srgbClr val="1C1917"/>
+                  <a:srgbClr val="1A1A1A"/>
                 </a:solidFill>
                 <a:latin typeface="Microsoft JhengHei"/>
               </a:rPr>
@@ -5255,7 +5243,7 @@
       </p:sp>
       <p:sp>
         <p:nvSpPr>
-          <p:cNvPr id="18" name="Rounded Rectangle 17"/>
+          <p:cNvPr id="18" name="Rectangle 17"/>
           <p:cNvSpPr/>
           <p:nvPr/>
         </p:nvSpPr>
@@ -5264,15 +5252,13 @@
             <a:off x="6309360" y="2194560"/>
             <a:ext cx="5212080" cy="4023360"/>
           </a:xfrm>
-          <a:prstGeom prst="roundRect">
-            <a:avLst>
-              <a:gd name="adj" fmla="val 5000"/>
-            </a:avLst>
+          <a:prstGeom prst="rect">
+            <a:avLst/>
           </a:prstGeom>
           <a:noFill/>
           <a:ln w="9525">
             <a:solidFill>
-              <a:srgbClr val="E7E5E0"/>
+              <a:srgbClr val="C8C2B7"/>
             </a:solidFill>
           </a:ln>
         </p:spPr>
@@ -5328,7 +5314,7 @@
             <a:r>
               <a:rPr sz="1400" b="1">
                 <a:solidFill>
-                  <a:srgbClr val="D97706"/>
+                  <a:srgbClr val="E67E22"/>
                 </a:solidFill>
                 <a:latin typeface="Microsoft JhengHei"/>
               </a:rPr>
@@ -5367,7 +5353,7 @@
             <a:r>
               <a:rPr sz="1200" b="0">
                 <a:solidFill>
-                  <a:srgbClr val="1C1917"/>
+                  <a:srgbClr val="1A1A1A"/>
                 </a:solidFill>
                 <a:latin typeface="Microsoft JhengHei"/>
               </a:rPr>
@@ -5383,7 +5369,7 @@
             <a:r>
               <a:rPr sz="1200" b="0">
                 <a:solidFill>
-                  <a:srgbClr val="1C1917"/>
+                  <a:srgbClr val="1A1A1A"/>
                 </a:solidFill>
                 <a:latin typeface="Microsoft JhengHei"/>
               </a:rPr>
@@ -5399,7 +5385,7 @@
             <a:r>
               <a:rPr sz="1200" b="0">
                 <a:solidFill>
-                  <a:srgbClr val="1C1917"/>
+                  <a:srgbClr val="1A1A1A"/>
                 </a:solidFill>
                 <a:latin typeface="Microsoft JhengHei"/>
               </a:rPr>
@@ -5415,7 +5401,7 @@
             <a:r>
               <a:rPr sz="1200" b="0">
                 <a:solidFill>
-                  <a:srgbClr val="1C1917"/>
+                  <a:srgbClr val="1A1A1A"/>
                 </a:solidFill>
                 <a:latin typeface="Microsoft JhengHei"/>
               </a:rPr>
@@ -5431,7 +5417,7 @@
             <a:r>
               <a:rPr sz="1200" b="0">
                 <a:solidFill>
-                  <a:srgbClr val="1C1917"/>
+                  <a:srgbClr val="1A1A1A"/>
                 </a:solidFill>
                 <a:latin typeface="Microsoft JhengHei"/>
               </a:rPr>
@@ -5447,7 +5433,7 @@
             <a:r>
               <a:rPr sz="1200" b="0">
                 <a:solidFill>
-                  <a:srgbClr val="1C1917"/>
+                  <a:srgbClr val="1A1A1A"/>
                 </a:solidFill>
                 <a:latin typeface="Microsoft JhengHei"/>
               </a:rPr>
@@ -5463,7 +5449,7 @@
             <a:r>
               <a:rPr sz="1200" b="0">
                 <a:solidFill>
-                  <a:srgbClr val="1C1917"/>
+                  <a:srgbClr val="1A1A1A"/>
                 </a:solidFill>
                 <a:latin typeface="Microsoft JhengHei"/>
               </a:rPr>
@@ -5479,7 +5465,7 @@
             <a:r>
               <a:rPr sz="1200" b="0">
                 <a:solidFill>
-                  <a:srgbClr val="1C1917"/>
+                  <a:srgbClr val="1A1A1A"/>
                 </a:solidFill>
                 <a:latin typeface="Microsoft JhengHei"/>
               </a:rPr>
@@ -5495,7 +5481,7 @@
             <a:r>
               <a:rPr sz="1200" b="0">
                 <a:solidFill>
-                  <a:srgbClr val="1C1917"/>
+                  <a:srgbClr val="1A1A1A"/>
                 </a:solidFill>
                 <a:latin typeface="Microsoft JhengHei"/>
               </a:rPr>
@@ -5511,7 +5497,7 @@
             <a:r>
               <a:rPr sz="1200" b="0">
                 <a:solidFill>
-                  <a:srgbClr val="1C1917"/>
+                  <a:srgbClr val="1A1A1A"/>
                 </a:solidFill>
                 <a:latin typeface="Microsoft JhengHei"/>
               </a:rPr>
@@ -5527,7 +5513,7 @@
             <a:r>
               <a:rPr sz="1200" b="0">
                 <a:solidFill>
-                  <a:srgbClr val="1C1917"/>
+                  <a:srgbClr val="1A1A1A"/>
                 </a:solidFill>
                 <a:latin typeface="Microsoft JhengHei"/>
               </a:rPr>
@@ -5543,7 +5529,7 @@
             <a:r>
               <a:rPr sz="1200" b="0">
                 <a:solidFill>
-                  <a:srgbClr val="1C1917"/>
+                  <a:srgbClr val="1A1A1A"/>
                 </a:solidFill>
                 <a:latin typeface="Microsoft JhengHei"/>
               </a:rPr>
@@ -5559,7 +5545,7 @@
             <a:r>
               <a:rPr sz="1200" b="0">
                 <a:solidFill>
-                  <a:srgbClr val="1C1917"/>
+                  <a:srgbClr val="1A1A1A"/>
                 </a:solidFill>
                 <a:latin typeface="Microsoft JhengHei"/>
               </a:rPr>
@@ -5575,7 +5561,7 @@
             <a:r>
               <a:rPr sz="1200" b="0">
                 <a:solidFill>
-                  <a:srgbClr val="1C1917"/>
+                  <a:srgbClr val="1A1A1A"/>
                 </a:solidFill>
                 <a:latin typeface="Microsoft JhengHei"/>
               </a:rPr>
@@ -5614,7 +5600,7 @@
             <a:r>
               <a:rPr sz="900" b="0">
                 <a:solidFill>
-                  <a:srgbClr val="78716C"/>
+                  <a:srgbClr val="6B6B6B"/>
                 </a:solidFill>
                 <a:latin typeface="Microsoft JhengHei"/>
               </a:rPr>
@@ -5653,7 +5639,7 @@
             <a:r>
               <a:rPr sz="900" b="0">
                 <a:solidFill>
-                  <a:srgbClr val="78716C"/>
+                  <a:srgbClr val="6B6B6B"/>
                 </a:solidFill>
                 <a:latin typeface="Microsoft JhengHei"/>
               </a:rPr>
@@ -5695,7 +5681,7 @@
             <a:avLst/>
           </a:prstGeom>
           <a:solidFill>
-            <a:srgbClr val="1C1917"/>
+            <a:srgbClr val="1A1A1A"/>
           </a:solidFill>
           <a:ln>
             <a:noFill/>
@@ -5738,7 +5724,7 @@
             <a:avLst/>
           </a:prstGeom>
           <a:solidFill>
-            <a:srgbClr val="FAFAF7"/>
+            <a:srgbClr val="F4F1ED"/>
           </a:solidFill>
           <a:ln>
             <a:noFill/>
@@ -5781,7 +5767,7 @@
             <a:avLst/>
           </a:prstGeom>
           <a:solidFill>
-            <a:srgbClr val="E7E5E0"/>
+            <a:srgbClr val="C8C2B7"/>
           </a:solidFill>
           <a:ln>
             <a:noFill/>
@@ -5839,7 +5825,7 @@
             <a:r>
               <a:rPr sz="3600" b="1">
                 <a:solidFill>
-                  <a:srgbClr val="1C1917"/>
+                  <a:srgbClr val="1A1A1A"/>
                 </a:solidFill>
                 <a:latin typeface="Microsoft JhengHei"/>
               </a:rPr>
@@ -5878,7 +5864,7 @@
             <a:r>
               <a:rPr sz="1500" b="0">
                 <a:solidFill>
-                  <a:srgbClr val="78716C"/>
+                  <a:srgbClr val="6B6B6B"/>
                 </a:solidFill>
                 <a:latin typeface="Microsoft JhengHei"/>
               </a:rPr>
@@ -5917,7 +5903,7 @@
             <a:r>
               <a:rPr sz="1200" b="1">
                 <a:solidFill>
-                  <a:srgbClr val="1C1917"/>
+                  <a:srgbClr val="1A1A1A"/>
                 </a:solidFill>
                 <a:latin typeface="Microsoft JhengHei"/>
               </a:rPr>
@@ -5956,7 +5942,7 @@
             <a:r>
               <a:rPr sz="1200" b="1">
                 <a:solidFill>
-                  <a:srgbClr val="FAFAF7"/>
+                  <a:srgbClr val="F4F1ED"/>
                 </a:solidFill>
                 <a:latin typeface="Microsoft JhengHei"/>
               </a:rPr>
@@ -5995,7 +5981,7 @@
             <a:r>
               <a:rPr sz="1200" b="1">
                 <a:solidFill>
-                  <a:srgbClr val="1C1917"/>
+                  <a:srgbClr val="1A1A1A"/>
                 </a:solidFill>
                 <a:latin typeface="Microsoft JhengHei"/>
               </a:rPr>
@@ -6034,7 +6020,7 @@
             <a:r>
               <a:rPr sz="1200" b="1">
                 <a:solidFill>
-                  <a:srgbClr val="1C1917"/>
+                  <a:srgbClr val="1A1A1A"/>
                 </a:solidFill>
                 <a:latin typeface="Microsoft JhengHei"/>
               </a:rPr>
@@ -6073,7 +6059,7 @@
             <a:r>
               <a:rPr sz="1200" b="1">
                 <a:solidFill>
-                  <a:srgbClr val="1C1917"/>
+                  <a:srgbClr val="1A1A1A"/>
                 </a:solidFill>
                 <a:latin typeface="Microsoft JhengHei"/>
               </a:rPr>
@@ -6112,7 +6098,7 @@
             <a:r>
               <a:rPr sz="1200" b="1">
                 <a:solidFill>
-                  <a:srgbClr val="1C1917"/>
+                  <a:srgbClr val="1A1A1A"/>
                 </a:solidFill>
                 <a:latin typeface="Microsoft JhengHei"/>
               </a:rPr>
@@ -6151,7 +6137,7 @@
             <a:r>
               <a:rPr sz="1200" b="1">
                 <a:solidFill>
-                  <a:srgbClr val="1C1917"/>
+                  <a:srgbClr val="1A1A1A"/>
                 </a:solidFill>
                 <a:latin typeface="Microsoft JhengHei"/>
               </a:rPr>
@@ -6167,7 +6153,7 @@
             <a:r>
               <a:rPr sz="1200" b="1">
                 <a:solidFill>
-                  <a:srgbClr val="1C1917"/>
+                  <a:srgbClr val="1A1A1A"/>
                 </a:solidFill>
                 <a:latin typeface="Microsoft JhengHei"/>
               </a:rPr>
@@ -6191,7 +6177,7 @@
             <a:avLst/>
           </a:prstGeom>
           <a:solidFill>
-            <a:srgbClr val="1C1917"/>
+            <a:srgbClr val="1A1A1A"/>
           </a:solidFill>
           <a:ln>
             <a:noFill/>
@@ -6249,7 +6235,7 @@
             <a:r>
               <a:rPr sz="1200" b="1">
                 <a:solidFill>
-                  <a:srgbClr val="1C1917"/>
+                  <a:srgbClr val="1A1A1A"/>
                 </a:solidFill>
                 <a:latin typeface="Microsoft JhengHei"/>
               </a:rPr>
@@ -6288,7 +6274,7 @@
             <a:r>
               <a:rPr sz="1800" b="1">
                 <a:solidFill>
-                  <a:srgbClr val="FAFAF7"/>
+                  <a:srgbClr val="F4F1ED"/>
                 </a:solidFill>
                 <a:latin typeface="Microsoft JhengHei"/>
               </a:rPr>
@@ -6327,7 +6313,7 @@
             <a:r>
               <a:rPr sz="1600" b="0">
                 <a:solidFill>
-                  <a:srgbClr val="78716C"/>
+                  <a:srgbClr val="6B6B6B"/>
                 </a:solidFill>
                 <a:latin typeface="Microsoft JhengHei"/>
               </a:rPr>
@@ -6366,7 +6352,7 @@
             <a:r>
               <a:rPr sz="1600" b="0">
                 <a:solidFill>
-                  <a:srgbClr val="78716C"/>
+                  <a:srgbClr val="6B6B6B"/>
                 </a:solidFill>
                 <a:latin typeface="Microsoft JhengHei"/>
               </a:rPr>
@@ -6405,7 +6391,7 @@
             <a:r>
               <a:rPr sz="1600" b="0">
                 <a:solidFill>
-                  <a:srgbClr val="78716C"/>
+                  <a:srgbClr val="6B6B6B"/>
                 </a:solidFill>
                 <a:latin typeface="Microsoft JhengHei"/>
               </a:rPr>
@@ -6444,7 +6430,7 @@
             <a:r>
               <a:rPr sz="1800" b="1">
                 <a:solidFill>
-                  <a:srgbClr val="16A34A"/>
+                  <a:srgbClr val="4A6741"/>
                 </a:solidFill>
                 <a:latin typeface="Microsoft JhengHei"/>
               </a:rPr>
@@ -6483,7 +6469,7 @@
             <a:r>
               <a:rPr sz="1600" b="0">
                 <a:solidFill>
-                  <a:srgbClr val="78716C"/>
+                  <a:srgbClr val="6B6B6B"/>
                 </a:solidFill>
                 <a:latin typeface="Microsoft JhengHei"/>
               </a:rPr>
@@ -6507,7 +6493,7 @@
             <a:avLst/>
           </a:prstGeom>
           <a:solidFill>
-            <a:srgbClr val="E7E5E0"/>
+            <a:srgbClr val="C8C2B7"/>
           </a:solidFill>
           <a:ln>
             <a:noFill/>
@@ -6565,7 +6551,7 @@
             <a:r>
               <a:rPr sz="1200" b="1">
                 <a:solidFill>
-                  <a:srgbClr val="1C1917"/>
+                  <a:srgbClr val="1A1A1A"/>
                 </a:solidFill>
                 <a:latin typeface="Microsoft JhengHei"/>
               </a:rPr>
@@ -6604,7 +6590,7 @@
             <a:r>
               <a:rPr sz="1800" b="1">
                 <a:solidFill>
-                  <a:srgbClr val="FAFAF7"/>
+                  <a:srgbClr val="F4F1ED"/>
                 </a:solidFill>
                 <a:latin typeface="Microsoft JhengHei"/>
               </a:rPr>
@@ -6643,7 +6629,7 @@
             <a:r>
               <a:rPr sz="1600" b="0">
                 <a:solidFill>
-                  <a:srgbClr val="78716C"/>
+                  <a:srgbClr val="6B6B6B"/>
                 </a:solidFill>
                 <a:latin typeface="Microsoft JhengHei"/>
               </a:rPr>
@@ -6682,7 +6668,7 @@
             <a:r>
               <a:rPr sz="1600" b="0">
                 <a:solidFill>
-                  <a:srgbClr val="78716C"/>
+                  <a:srgbClr val="6B6B6B"/>
                 </a:solidFill>
                 <a:latin typeface="Microsoft JhengHei"/>
               </a:rPr>
@@ -6721,7 +6707,7 @@
             <a:r>
               <a:rPr sz="1600" b="0">
                 <a:solidFill>
-                  <a:srgbClr val="78716C"/>
+                  <a:srgbClr val="6B6B6B"/>
                 </a:solidFill>
                 <a:latin typeface="Microsoft JhengHei"/>
               </a:rPr>
@@ -6760,7 +6746,7 @@
             <a:r>
               <a:rPr sz="1600" b="0">
                 <a:solidFill>
-                  <a:srgbClr val="78716C"/>
+                  <a:srgbClr val="6B6B6B"/>
                 </a:solidFill>
                 <a:latin typeface="Microsoft JhengHei"/>
               </a:rPr>
@@ -6799,7 +6785,7 @@
             <a:r>
               <a:rPr sz="1600" b="0">
                 <a:solidFill>
-                  <a:srgbClr val="78716C"/>
+                  <a:srgbClr val="6B6B6B"/>
                 </a:solidFill>
                 <a:latin typeface="Microsoft JhengHei"/>
               </a:rPr>
@@ -6823,7 +6809,7 @@
             <a:avLst/>
           </a:prstGeom>
           <a:solidFill>
-            <a:srgbClr val="E7E5E0"/>
+            <a:srgbClr val="C8C2B7"/>
           </a:solidFill>
           <a:ln>
             <a:noFill/>
@@ -6881,7 +6867,7 @@
             <a:r>
               <a:rPr sz="1200" b="1">
                 <a:solidFill>
-                  <a:srgbClr val="1C1917"/>
+                  <a:srgbClr val="1A1A1A"/>
                 </a:solidFill>
                 <a:latin typeface="Microsoft JhengHei"/>
               </a:rPr>
@@ -6920,7 +6906,7 @@
             <a:r>
               <a:rPr sz="1800" b="1">
                 <a:solidFill>
-                  <a:srgbClr val="FAFAF7"/>
+                  <a:srgbClr val="F4F1ED"/>
                 </a:solidFill>
                 <a:latin typeface="Microsoft JhengHei"/>
               </a:rPr>
@@ -6959,7 +6945,7 @@
             <a:r>
               <a:rPr sz="1600" b="0">
                 <a:solidFill>
-                  <a:srgbClr val="78716C"/>
+                  <a:srgbClr val="6B6B6B"/>
                 </a:solidFill>
                 <a:latin typeface="Microsoft JhengHei"/>
               </a:rPr>
@@ -6998,7 +6984,7 @@
             <a:r>
               <a:rPr sz="1600" b="0">
                 <a:solidFill>
-                  <a:srgbClr val="78716C"/>
+                  <a:srgbClr val="6B6B6B"/>
                 </a:solidFill>
                 <a:latin typeface="Microsoft JhengHei"/>
               </a:rPr>
@@ -7037,7 +7023,7 @@
             <a:r>
               <a:rPr sz="1600" b="0">
                 <a:solidFill>
-                  <a:srgbClr val="78716C"/>
+                  <a:srgbClr val="6B6B6B"/>
                 </a:solidFill>
                 <a:latin typeface="Microsoft JhengHei"/>
               </a:rPr>
@@ -7076,7 +7062,7 @@
             <a:r>
               <a:rPr sz="1600" b="0">
                 <a:solidFill>
-                  <a:srgbClr val="78716C"/>
+                  <a:srgbClr val="6B6B6B"/>
                 </a:solidFill>
                 <a:latin typeface="Microsoft JhengHei"/>
               </a:rPr>
@@ -7115,7 +7101,7 @@
             <a:r>
               <a:rPr sz="1600" b="0">
                 <a:solidFill>
-                  <a:srgbClr val="78716C"/>
+                  <a:srgbClr val="6B6B6B"/>
                 </a:solidFill>
                 <a:latin typeface="Microsoft JhengHei"/>
               </a:rPr>
@@ -7139,7 +7125,7 @@
             <a:avLst/>
           </a:prstGeom>
           <a:solidFill>
-            <a:srgbClr val="E7E5E0"/>
+            <a:srgbClr val="C8C2B7"/>
           </a:solidFill>
           <a:ln>
             <a:noFill/>
@@ -7197,7 +7183,7 @@
             <a:r>
               <a:rPr sz="1200" b="1">
                 <a:solidFill>
-                  <a:srgbClr val="1C1917"/>
+                  <a:srgbClr val="1A1A1A"/>
                 </a:solidFill>
                 <a:latin typeface="Microsoft JhengHei"/>
               </a:rPr>
@@ -7236,7 +7222,7 @@
             <a:r>
               <a:rPr sz="1800" b="1">
                 <a:solidFill>
-                  <a:srgbClr val="FAFAF7"/>
+                  <a:srgbClr val="F4F1ED"/>
                 </a:solidFill>
                 <a:latin typeface="Microsoft JhengHei"/>
               </a:rPr>
@@ -7275,7 +7261,7 @@
             <a:r>
               <a:rPr sz="1600" b="0">
                 <a:solidFill>
-                  <a:srgbClr val="78716C"/>
+                  <a:srgbClr val="6B6B6B"/>
                 </a:solidFill>
                 <a:latin typeface="Microsoft JhengHei"/>
               </a:rPr>
@@ -7314,7 +7300,7 @@
             <a:r>
               <a:rPr sz="1600" b="0">
                 <a:solidFill>
-                  <a:srgbClr val="78716C"/>
+                  <a:srgbClr val="6B6B6B"/>
                 </a:solidFill>
                 <a:latin typeface="Microsoft JhengHei"/>
               </a:rPr>
@@ -7353,7 +7339,7 @@
             <a:r>
               <a:rPr sz="1600" b="0">
                 <a:solidFill>
-                  <a:srgbClr val="78716C"/>
+                  <a:srgbClr val="6B6B6B"/>
                 </a:solidFill>
                 <a:latin typeface="Microsoft JhengHei"/>
               </a:rPr>
@@ -7392,7 +7378,7 @@
             <a:r>
               <a:rPr sz="1800" b="1">
                 <a:solidFill>
-                  <a:srgbClr val="16A34A"/>
+                  <a:srgbClr val="4A6741"/>
                 </a:solidFill>
                 <a:latin typeface="Microsoft JhengHei"/>
               </a:rPr>
@@ -7431,7 +7417,7 @@
             <a:r>
               <a:rPr sz="1600" b="0">
                 <a:solidFill>
-                  <a:srgbClr val="78716C"/>
+                  <a:srgbClr val="6B6B6B"/>
                 </a:solidFill>
                 <a:latin typeface="Microsoft JhengHei"/>
               </a:rPr>
@@ -7455,7 +7441,7 @@
             <a:avLst/>
           </a:prstGeom>
           <a:solidFill>
-            <a:srgbClr val="E7E5E0"/>
+            <a:srgbClr val="C8C2B7"/>
           </a:solidFill>
           <a:ln>
             <a:noFill/>
@@ -7513,7 +7499,7 @@
             <a:r>
               <a:rPr sz="1200" b="1">
                 <a:solidFill>
-                  <a:srgbClr val="1C1917"/>
+                  <a:srgbClr val="1A1A1A"/>
                 </a:solidFill>
                 <a:latin typeface="Microsoft JhengHei"/>
               </a:rPr>
@@ -7552,7 +7538,7 @@
             <a:r>
               <a:rPr sz="1800" b="1">
                 <a:solidFill>
-                  <a:srgbClr val="FAFAF7"/>
+                  <a:srgbClr val="F4F1ED"/>
                 </a:solidFill>
                 <a:latin typeface="Microsoft JhengHei"/>
               </a:rPr>
@@ -7591,7 +7577,7 @@
             <a:r>
               <a:rPr sz="1600" b="0">
                 <a:solidFill>
-                  <a:srgbClr val="78716C"/>
+                  <a:srgbClr val="6B6B6B"/>
                 </a:solidFill>
                 <a:latin typeface="Microsoft JhengHei"/>
               </a:rPr>
@@ -7630,7 +7616,7 @@
             <a:r>
               <a:rPr sz="1600" b="0">
                 <a:solidFill>
-                  <a:srgbClr val="78716C"/>
+                  <a:srgbClr val="6B6B6B"/>
                 </a:solidFill>
                 <a:latin typeface="Microsoft JhengHei"/>
               </a:rPr>
@@ -7669,7 +7655,7 @@
             <a:r>
               <a:rPr sz="1600" b="0">
                 <a:solidFill>
-                  <a:srgbClr val="78716C"/>
+                  <a:srgbClr val="6B6B6B"/>
                 </a:solidFill>
                 <a:latin typeface="Microsoft JhengHei"/>
               </a:rPr>
@@ -7708,7 +7694,7 @@
             <a:r>
               <a:rPr sz="1600" b="0">
                 <a:solidFill>
-                  <a:srgbClr val="78716C"/>
+                  <a:srgbClr val="6B6B6B"/>
                 </a:solidFill>
                 <a:latin typeface="Microsoft JhengHei"/>
               </a:rPr>
@@ -7747,7 +7733,7 @@
             <a:r>
               <a:rPr sz="1600" b="0">
                 <a:solidFill>
-                  <a:srgbClr val="78716C"/>
+                  <a:srgbClr val="6B6B6B"/>
                 </a:solidFill>
                 <a:latin typeface="Microsoft JhengHei"/>
               </a:rPr>
@@ -7771,7 +7757,7 @@
             <a:avLst/>
           </a:prstGeom>
           <a:solidFill>
-            <a:srgbClr val="E7E5E0"/>
+            <a:srgbClr val="C8C2B7"/>
           </a:solidFill>
           <a:ln>
             <a:noFill/>
@@ -7829,7 +7815,7 @@
             <a:r>
               <a:rPr sz="1200" b="1">
                 <a:solidFill>
-                  <a:srgbClr val="1C1917"/>
+                  <a:srgbClr val="1A1A1A"/>
                 </a:solidFill>
                 <a:latin typeface="Microsoft JhengHei"/>
               </a:rPr>
@@ -7868,7 +7854,7 @@
             <a:r>
               <a:rPr sz="1100" b="1">
                 <a:solidFill>
-                  <a:srgbClr val="FAFAF7"/>
+                  <a:srgbClr val="F4F1ED"/>
                 </a:solidFill>
                 <a:latin typeface="Microsoft JhengHei"/>
               </a:rPr>
@@ -7907,7 +7893,7 @@
             <a:r>
               <a:rPr sz="1100" b="0">
                 <a:solidFill>
-                  <a:srgbClr val="1C1917"/>
+                  <a:srgbClr val="1A1A1A"/>
                 </a:solidFill>
                 <a:latin typeface="Microsoft JhengHei"/>
               </a:rPr>
@@ -7946,7 +7932,7 @@
             <a:r>
               <a:rPr sz="1100" b="0">
                 <a:solidFill>
-                  <a:srgbClr val="1C1917"/>
+                  <a:srgbClr val="1A1A1A"/>
                 </a:solidFill>
                 <a:latin typeface="Microsoft JhengHei"/>
               </a:rPr>
@@ -7985,7 +7971,7 @@
             <a:r>
               <a:rPr sz="1100" b="0">
                 <a:solidFill>
-                  <a:srgbClr val="1C1917"/>
+                  <a:srgbClr val="1A1A1A"/>
                 </a:solidFill>
                 <a:latin typeface="Microsoft JhengHei"/>
               </a:rPr>
@@ -8024,7 +8010,7 @@
             <a:r>
               <a:rPr sz="1100" b="0">
                 <a:solidFill>
-                  <a:srgbClr val="1C1917"/>
+                  <a:srgbClr val="1A1A1A"/>
                 </a:solidFill>
                 <a:latin typeface="Microsoft JhengHei"/>
               </a:rPr>
@@ -8063,7 +8049,7 @@
             <a:r>
               <a:rPr sz="1100" b="1">
                 <a:solidFill>
-                  <a:srgbClr val="1C1917"/>
+                  <a:srgbClr val="1A1A1A"/>
                 </a:solidFill>
                 <a:latin typeface="Microsoft JhengHei"/>
               </a:rPr>
@@ -8087,7 +8073,7 @@
             <a:avLst/>
           </a:prstGeom>
           <a:solidFill>
-            <a:srgbClr val="E7E5E0"/>
+            <a:srgbClr val="C8C2B7"/>
           </a:solidFill>
           <a:ln>
             <a:noFill/>
@@ -8145,7 +8131,7 @@
             <a:r>
               <a:rPr sz="1200" b="1">
                 <a:solidFill>
-                  <a:srgbClr val="1C1917"/>
+                  <a:srgbClr val="1A1A1A"/>
                 </a:solidFill>
                 <a:latin typeface="Microsoft JhengHei"/>
               </a:rPr>
@@ -8184,7 +8170,7 @@
             <a:r>
               <a:rPr sz="1100" b="1">
                 <a:solidFill>
-                  <a:srgbClr val="FAFAF7"/>
+                  <a:srgbClr val="F4F1ED"/>
                 </a:solidFill>
                 <a:latin typeface="Microsoft JhengHei"/>
               </a:rPr>
@@ -8223,7 +8209,7 @@
             <a:r>
               <a:rPr sz="1100" b="0">
                 <a:solidFill>
-                  <a:srgbClr val="1C1917"/>
+                  <a:srgbClr val="1A1A1A"/>
                 </a:solidFill>
                 <a:latin typeface="Microsoft JhengHei"/>
               </a:rPr>
@@ -8262,7 +8248,7 @@
             <a:r>
               <a:rPr sz="1100" b="0">
                 <a:solidFill>
-                  <a:srgbClr val="1C1917"/>
+                  <a:srgbClr val="1A1A1A"/>
                 </a:solidFill>
                 <a:latin typeface="Microsoft JhengHei"/>
               </a:rPr>
@@ -8301,7 +8287,7 @@
             <a:r>
               <a:rPr sz="1100" b="1">
                 <a:solidFill>
-                  <a:srgbClr val="1C1917"/>
+                  <a:srgbClr val="1A1A1A"/>
                 </a:solidFill>
                 <a:latin typeface="Microsoft JhengHei"/>
               </a:rPr>
@@ -8340,7 +8326,7 @@
             <a:r>
               <a:rPr sz="1100" b="0">
                 <a:solidFill>
-                  <a:srgbClr val="1C1917"/>
+                  <a:srgbClr val="1A1A1A"/>
                 </a:solidFill>
                 <a:latin typeface="Microsoft JhengHei"/>
               </a:rPr>
@@ -8379,7 +8365,7 @@
             <a:r>
               <a:rPr sz="1100" b="1">
                 <a:solidFill>
-                  <a:srgbClr val="1C1917"/>
+                  <a:srgbClr val="1A1A1A"/>
                 </a:solidFill>
                 <a:latin typeface="Microsoft JhengHei"/>
               </a:rPr>
@@ -8418,7 +8404,7 @@
             <a:r>
               <a:rPr sz="1000" b="0">
                 <a:solidFill>
-                  <a:srgbClr val="78716C"/>
+                  <a:srgbClr val="6B6B6B"/>
                 </a:solidFill>
                 <a:latin typeface="Microsoft JhengHei"/>
               </a:rPr>
@@ -8457,7 +8443,7 @@
             <a:r>
               <a:rPr sz="1100" b="1">
                 <a:solidFill>
-                  <a:srgbClr val="1C1917"/>
+                  <a:srgbClr val="1A1A1A"/>
                 </a:solidFill>
                 <a:latin typeface="Microsoft JhengHei"/>
               </a:rPr>
@@ -8496,7 +8482,7 @@
             <a:r>
               <a:rPr sz="900" b="0">
                 <a:solidFill>
-                  <a:srgbClr val="78716C"/>
+                  <a:srgbClr val="6B6B6B"/>
                 </a:solidFill>
                 <a:latin typeface="Microsoft JhengHei"/>
               </a:rPr>
@@ -8535,7 +8521,7 @@
             <a:r>
               <a:rPr sz="900" b="0">
                 <a:solidFill>
-                  <a:srgbClr val="78716C"/>
+                  <a:srgbClr val="6B6B6B"/>
                 </a:solidFill>
                 <a:latin typeface="Microsoft JhengHei"/>
               </a:rPr>
@@ -8577,7 +8563,7 @@
             <a:avLst/>
           </a:prstGeom>
           <a:solidFill>
-            <a:srgbClr val="FAFAF7"/>
+            <a:srgbClr val="F4F1ED"/>
           </a:solidFill>
           <a:ln>
             <a:noFill/>
@@ -8620,7 +8606,7 @@
             <a:avLst/>
           </a:prstGeom>
           <a:solidFill>
-            <a:srgbClr val="E7E5E0"/>
+            <a:srgbClr val="C8C2B7"/>
           </a:solidFill>
           <a:ln>
             <a:noFill/>
@@ -8678,7 +8664,7 @@
             <a:r>
               <a:rPr sz="4400" b="1">
                 <a:solidFill>
-                  <a:srgbClr val="1C1917"/>
+                  <a:srgbClr val="1A1A1A"/>
                 </a:solidFill>
                 <a:latin typeface="Microsoft JhengHei"/>
               </a:rPr>
@@ -8717,7 +8703,7 @@
             <a:r>
               <a:rPr sz="1800" b="0">
                 <a:solidFill>
-                  <a:srgbClr val="78716C"/>
+                  <a:srgbClr val="6B6B6B"/>
                 </a:solidFill>
                 <a:latin typeface="Microsoft JhengHei"/>
               </a:rPr>
@@ -8728,7 +8714,7 @@
       </p:sp>
       <p:sp>
         <p:nvSpPr>
-          <p:cNvPr id="6" name="Rounded Rectangle 5"/>
+          <p:cNvPr id="6" name="Rectangle 5"/>
           <p:cNvSpPr/>
           <p:nvPr/>
         </p:nvSpPr>
@@ -8737,15 +8723,13 @@
             <a:off x="518007" y="2194560"/>
             <a:ext cx="2651760" cy="3840480"/>
           </a:xfrm>
-          <a:prstGeom prst="roundRect">
-            <a:avLst>
-              <a:gd name="adj" fmla="val 6000"/>
-            </a:avLst>
+          <a:prstGeom prst="rect">
+            <a:avLst/>
           </a:prstGeom>
           <a:noFill/>
           <a:ln w="9525">
             <a:solidFill>
-              <a:srgbClr val="E7E5E0"/>
+              <a:srgbClr val="C8C2B7"/>
             </a:solidFill>
           </a:ln>
         </p:spPr>
@@ -8801,7 +8785,7 @@
             <a:r>
               <a:rPr sz="2200" b="1">
                 <a:solidFill>
-                  <a:srgbClr val="D97706"/>
+                  <a:srgbClr val="E67E22"/>
                 </a:solidFill>
                 <a:latin typeface="Microsoft JhengHei"/>
               </a:rPr>
@@ -8840,7 +8824,7 @@
             <a:r>
               <a:rPr sz="2200" b="1">
                 <a:solidFill>
-                  <a:srgbClr val="1C1917"/>
+                  <a:srgbClr val="1A1A1A"/>
                 </a:solidFill>
                 <a:latin typeface="Microsoft JhengHei"/>
               </a:rPr>
@@ -8865,7 +8849,7 @@
           </a:prstGeom>
           <a:ln w="25400">
             <a:solidFill>
-              <a:srgbClr val="D97706"/>
+              <a:srgbClr val="E67E22"/>
             </a:solidFill>
           </a:ln>
         </p:spPr>
@@ -8914,7 +8898,7 @@
             <a:r>
               <a:rPr sz="1200" b="0">
                 <a:solidFill>
-                  <a:srgbClr val="1C1917"/>
+                  <a:srgbClr val="1A1A1A"/>
                 </a:solidFill>
                 <a:latin typeface="Microsoft JhengHei"/>
               </a:rPr>
@@ -8930,7 +8914,7 @@
             <a:r>
               <a:rPr sz="1200" b="0">
                 <a:solidFill>
-                  <a:srgbClr val="1C1917"/>
+                  <a:srgbClr val="1A1A1A"/>
                 </a:solidFill>
                 <a:latin typeface="Microsoft JhengHei"/>
               </a:rPr>
@@ -8941,7 +8925,7 @@
       </p:sp>
       <p:sp>
         <p:nvSpPr>
-          <p:cNvPr id="11" name="Rounded Rectangle 10"/>
+          <p:cNvPr id="11" name="Rectangle 10"/>
           <p:cNvSpPr/>
           <p:nvPr/>
         </p:nvSpPr>
@@ -8950,15 +8934,13 @@
             <a:off x="3352647" y="2194560"/>
             <a:ext cx="2651760" cy="3840480"/>
           </a:xfrm>
-          <a:prstGeom prst="roundRect">
-            <a:avLst>
-              <a:gd name="adj" fmla="val 6000"/>
-            </a:avLst>
+          <a:prstGeom prst="rect">
+            <a:avLst/>
           </a:prstGeom>
           <a:noFill/>
           <a:ln w="9525">
             <a:solidFill>
-              <a:srgbClr val="E7E5E0"/>
+              <a:srgbClr val="C8C2B7"/>
             </a:solidFill>
           </a:ln>
         </p:spPr>
@@ -9014,7 +8996,7 @@
             <a:r>
               <a:rPr sz="2200" b="1">
                 <a:solidFill>
-                  <a:srgbClr val="D97706"/>
+                  <a:srgbClr val="E67E22"/>
                 </a:solidFill>
                 <a:latin typeface="Microsoft JhengHei"/>
               </a:rPr>
@@ -9053,7 +9035,7 @@
             <a:r>
               <a:rPr sz="2200" b="1">
                 <a:solidFill>
-                  <a:srgbClr val="1C1917"/>
+                  <a:srgbClr val="1A1A1A"/>
                 </a:solidFill>
                 <a:latin typeface="Microsoft JhengHei"/>
               </a:rPr>
@@ -9078,7 +9060,7 @@
           </a:prstGeom>
           <a:ln w="25400">
             <a:solidFill>
-              <a:srgbClr val="D97706"/>
+              <a:srgbClr val="E67E22"/>
             </a:solidFill>
           </a:ln>
         </p:spPr>
@@ -9127,7 +9109,7 @@
             <a:r>
               <a:rPr sz="1200" b="0">
                 <a:solidFill>
-                  <a:srgbClr val="1C1917"/>
+                  <a:srgbClr val="1A1A1A"/>
                 </a:solidFill>
                 <a:latin typeface="Microsoft JhengHei"/>
               </a:rPr>
@@ -9143,7 +9125,7 @@
             <a:r>
               <a:rPr sz="1200" b="0">
                 <a:solidFill>
-                  <a:srgbClr val="1C1917"/>
+                  <a:srgbClr val="1A1A1A"/>
                 </a:solidFill>
                 <a:latin typeface="Microsoft JhengHei"/>
               </a:rPr>
@@ -9154,7 +9136,7 @@
       </p:sp>
       <p:sp>
         <p:nvSpPr>
-          <p:cNvPr id="16" name="Rounded Rectangle 15"/>
+          <p:cNvPr id="16" name="Rectangle 15"/>
           <p:cNvSpPr/>
           <p:nvPr/>
         </p:nvSpPr>
@@ -9163,15 +9145,13 @@
             <a:off x="6187287" y="2194560"/>
             <a:ext cx="2651760" cy="3840480"/>
           </a:xfrm>
-          <a:prstGeom prst="roundRect">
-            <a:avLst>
-              <a:gd name="adj" fmla="val 6000"/>
-            </a:avLst>
+          <a:prstGeom prst="rect">
+            <a:avLst/>
           </a:prstGeom>
           <a:noFill/>
           <a:ln w="9525">
             <a:solidFill>
-              <a:srgbClr val="E7E5E0"/>
+              <a:srgbClr val="C8C2B7"/>
             </a:solidFill>
           </a:ln>
         </p:spPr>
@@ -9227,7 +9207,7 @@
             <a:r>
               <a:rPr sz="2200" b="1">
                 <a:solidFill>
-                  <a:srgbClr val="D97706"/>
+                  <a:srgbClr val="E67E22"/>
                 </a:solidFill>
                 <a:latin typeface="Microsoft JhengHei"/>
               </a:rPr>
@@ -9266,7 +9246,7 @@
             <a:r>
               <a:rPr sz="2200" b="1">
                 <a:solidFill>
-                  <a:srgbClr val="1C1917"/>
+                  <a:srgbClr val="1A1A1A"/>
                 </a:solidFill>
                 <a:latin typeface="Microsoft JhengHei"/>
               </a:rPr>
@@ -9291,7 +9271,7 @@
           </a:prstGeom>
           <a:ln w="25400">
             <a:solidFill>
-              <a:srgbClr val="D97706"/>
+              <a:srgbClr val="E67E22"/>
             </a:solidFill>
           </a:ln>
         </p:spPr>
@@ -9340,7 +9320,7 @@
             <a:r>
               <a:rPr sz="1200" b="0">
                 <a:solidFill>
-                  <a:srgbClr val="1C1917"/>
+                  <a:srgbClr val="1A1A1A"/>
                 </a:solidFill>
                 <a:latin typeface="Microsoft JhengHei"/>
               </a:rPr>
@@ -9356,7 +9336,7 @@
             <a:r>
               <a:rPr sz="1200" b="0">
                 <a:solidFill>
-                  <a:srgbClr val="1C1917"/>
+                  <a:srgbClr val="1A1A1A"/>
                 </a:solidFill>
                 <a:latin typeface="Microsoft JhengHei"/>
               </a:rPr>
@@ -9367,7 +9347,7 @@
       </p:sp>
       <p:sp>
         <p:nvSpPr>
-          <p:cNvPr id="21" name="Rounded Rectangle 20"/>
+          <p:cNvPr id="21" name="Rectangle 20"/>
           <p:cNvSpPr/>
           <p:nvPr/>
         </p:nvSpPr>
@@ -9376,15 +9356,13 @@
             <a:off x="9021927" y="2194560"/>
             <a:ext cx="2651760" cy="3840480"/>
           </a:xfrm>
-          <a:prstGeom prst="roundRect">
-            <a:avLst>
-              <a:gd name="adj" fmla="val 6000"/>
-            </a:avLst>
+          <a:prstGeom prst="rect">
+            <a:avLst/>
           </a:prstGeom>
           <a:noFill/>
           <a:ln w="9525">
             <a:solidFill>
-              <a:srgbClr val="E7E5E0"/>
+              <a:srgbClr val="C8C2B7"/>
             </a:solidFill>
           </a:ln>
         </p:spPr>
@@ -9440,7 +9418,7 @@
             <a:r>
               <a:rPr sz="2200" b="1">
                 <a:solidFill>
-                  <a:srgbClr val="D97706"/>
+                  <a:srgbClr val="E67E22"/>
                 </a:solidFill>
                 <a:latin typeface="Microsoft JhengHei"/>
               </a:rPr>
@@ -9479,7 +9457,7 @@
             <a:r>
               <a:rPr sz="2200" b="1">
                 <a:solidFill>
-                  <a:srgbClr val="1C1917"/>
+                  <a:srgbClr val="1A1A1A"/>
                 </a:solidFill>
                 <a:latin typeface="Microsoft JhengHei"/>
               </a:rPr>
@@ -9504,7 +9482,7 @@
           </a:prstGeom>
           <a:ln w="25400">
             <a:solidFill>
-              <a:srgbClr val="D97706"/>
+              <a:srgbClr val="E67E22"/>
             </a:solidFill>
           </a:ln>
         </p:spPr>
@@ -9553,7 +9531,7 @@
             <a:r>
               <a:rPr sz="1200" b="0">
                 <a:solidFill>
-                  <a:srgbClr val="1C1917"/>
+                  <a:srgbClr val="1A1A1A"/>
                 </a:solidFill>
                 <a:latin typeface="Microsoft JhengHei"/>
               </a:rPr>
@@ -9569,7 +9547,7 @@
             <a:r>
               <a:rPr sz="1200" b="0">
                 <a:solidFill>
-                  <a:srgbClr val="1C1917"/>
+                  <a:srgbClr val="1A1A1A"/>
                 </a:solidFill>
                 <a:latin typeface="Microsoft JhengHei"/>
               </a:rPr>
@@ -9608,7 +9586,7 @@
             <a:r>
               <a:rPr sz="900" b="0">
                 <a:solidFill>
-                  <a:srgbClr val="78716C"/>
+                  <a:srgbClr val="6B6B6B"/>
                 </a:solidFill>
                 <a:latin typeface="Microsoft JhengHei"/>
               </a:rPr>
@@ -9647,7 +9625,7 @@
             <a:r>
               <a:rPr sz="900" b="0">
                 <a:solidFill>
-                  <a:srgbClr val="78716C"/>
+                  <a:srgbClr val="6B6B6B"/>
                 </a:solidFill>
                 <a:latin typeface="Microsoft JhengHei"/>
               </a:rPr>
@@ -9689,7 +9667,7 @@
             <a:avLst/>
           </a:prstGeom>
           <a:solidFill>
-            <a:srgbClr val="FAFAF7"/>
+            <a:srgbClr val="F4F1ED"/>
           </a:solidFill>
           <a:ln>
             <a:noFill/>
@@ -9732,7 +9710,7 @@
             <a:avLst/>
           </a:prstGeom>
           <a:solidFill>
-            <a:srgbClr val="E7E5E0"/>
+            <a:srgbClr val="C8C2B7"/>
           </a:solidFill>
           <a:ln>
             <a:noFill/>
@@ -9790,7 +9768,7 @@
             <a:r>
               <a:rPr sz="4400" b="1">
                 <a:solidFill>
-                  <a:srgbClr val="1C1917"/>
+                  <a:srgbClr val="1A1A1A"/>
                 </a:solidFill>
                 <a:latin typeface="Microsoft JhengHei"/>
               </a:rPr>
@@ -9829,7 +9807,7 @@
             <a:r>
               <a:rPr sz="1800" b="0">
                 <a:solidFill>
-                  <a:srgbClr val="78716C"/>
+                  <a:srgbClr val="6B6B6B"/>
                 </a:solidFill>
                 <a:latin typeface="Microsoft JhengHei"/>
               </a:rPr>
@@ -9840,7 +9818,7 @@
       </p:sp>
       <p:sp>
         <p:nvSpPr>
-          <p:cNvPr id="6" name="Rounded Rectangle 5"/>
+          <p:cNvPr id="6" name="Rectangle 5"/>
           <p:cNvSpPr/>
           <p:nvPr/>
         </p:nvSpPr>
@@ -9849,15 +9827,13 @@
             <a:off x="563727" y="2194560"/>
             <a:ext cx="5394960" cy="1920240"/>
           </a:xfrm>
-          <a:prstGeom prst="roundRect">
-            <a:avLst>
-              <a:gd name="adj" fmla="val 5000"/>
-            </a:avLst>
+          <a:prstGeom prst="rect">
+            <a:avLst/>
           </a:prstGeom>
           <a:noFill/>
           <a:ln w="9525">
             <a:solidFill>
-              <a:srgbClr val="E7E5E0"/>
+              <a:srgbClr val="C8C2B7"/>
             </a:solidFill>
           </a:ln>
         </p:spPr>
@@ -9913,7 +9889,7 @@
             <a:r>
               <a:rPr sz="5400" b="1">
                 <a:solidFill>
-                  <a:srgbClr val="D97706"/>
+                  <a:srgbClr val="E67E22"/>
                 </a:solidFill>
                 <a:latin typeface="Microsoft JhengHei"/>
               </a:rPr>
@@ -9952,7 +9928,7 @@
             <a:r>
               <a:rPr sz="1800" b="1">
                 <a:solidFill>
-                  <a:srgbClr val="1C1917"/>
+                  <a:srgbClr val="1A1A1A"/>
                 </a:solidFill>
                 <a:latin typeface="Microsoft JhengHei"/>
               </a:rPr>
@@ -9991,7 +9967,7 @@
             <a:r>
               <a:rPr sz="1200" b="0">
                 <a:solidFill>
-                  <a:srgbClr val="78716C"/>
+                  <a:srgbClr val="6B6B6B"/>
                 </a:solidFill>
                 <a:latin typeface="Microsoft JhengHei"/>
               </a:rPr>
@@ -10007,7 +9983,7 @@
             <a:r>
               <a:rPr sz="1200" b="0">
                 <a:solidFill>
-                  <a:srgbClr val="78716C"/>
+                  <a:srgbClr val="6B6B6B"/>
                 </a:solidFill>
                 <a:latin typeface="Microsoft JhengHei"/>
               </a:rPr>
@@ -10018,7 +9994,7 @@
       </p:sp>
       <p:sp>
         <p:nvSpPr>
-          <p:cNvPr id="10" name="Rounded Rectangle 9"/>
+          <p:cNvPr id="10" name="Rectangle 9"/>
           <p:cNvSpPr/>
           <p:nvPr/>
         </p:nvSpPr>
@@ -10027,15 +10003,13 @@
             <a:off x="6233007" y="2194560"/>
             <a:ext cx="5394960" cy="1920240"/>
           </a:xfrm>
-          <a:prstGeom prst="roundRect">
-            <a:avLst>
-              <a:gd name="adj" fmla="val 5000"/>
-            </a:avLst>
+          <a:prstGeom prst="rect">
+            <a:avLst/>
           </a:prstGeom>
           <a:noFill/>
           <a:ln w="9525">
             <a:solidFill>
-              <a:srgbClr val="E7E5E0"/>
+              <a:srgbClr val="C8C2B7"/>
             </a:solidFill>
           </a:ln>
         </p:spPr>
@@ -10091,7 +10065,7 @@
             <a:r>
               <a:rPr sz="5400" b="1">
                 <a:solidFill>
-                  <a:srgbClr val="D97706"/>
+                  <a:srgbClr val="E67E22"/>
                 </a:solidFill>
                 <a:latin typeface="Microsoft JhengHei"/>
               </a:rPr>
@@ -10130,7 +10104,7 @@
             <a:r>
               <a:rPr sz="1800" b="1">
                 <a:solidFill>
-                  <a:srgbClr val="1C1917"/>
+                  <a:srgbClr val="1A1A1A"/>
                 </a:solidFill>
                 <a:latin typeface="Microsoft JhengHei"/>
               </a:rPr>
@@ -10169,7 +10143,7 @@
             <a:r>
               <a:rPr sz="1200" b="0">
                 <a:solidFill>
-                  <a:srgbClr val="78716C"/>
+                  <a:srgbClr val="6B6B6B"/>
                 </a:solidFill>
                 <a:latin typeface="Microsoft JhengHei"/>
               </a:rPr>
@@ -10185,7 +10159,7 @@
             <a:r>
               <a:rPr sz="1200" b="0">
                 <a:solidFill>
-                  <a:srgbClr val="78716C"/>
+                  <a:srgbClr val="6B6B6B"/>
                 </a:solidFill>
                 <a:latin typeface="Microsoft JhengHei"/>
               </a:rPr>
@@ -10196,7 +10170,7 @@
       </p:sp>
       <p:sp>
         <p:nvSpPr>
-          <p:cNvPr id="14" name="Rounded Rectangle 13"/>
+          <p:cNvPr id="14" name="Rectangle 13"/>
           <p:cNvSpPr/>
           <p:nvPr/>
         </p:nvSpPr>
@@ -10205,15 +10179,13 @@
             <a:off x="563727" y="4389120"/>
             <a:ext cx="5394960" cy="1920240"/>
           </a:xfrm>
-          <a:prstGeom prst="roundRect">
-            <a:avLst>
-              <a:gd name="adj" fmla="val 5000"/>
-            </a:avLst>
+          <a:prstGeom prst="rect">
+            <a:avLst/>
           </a:prstGeom>
           <a:noFill/>
           <a:ln w="9525">
             <a:solidFill>
-              <a:srgbClr val="E7E5E0"/>
+              <a:srgbClr val="C8C2B7"/>
             </a:solidFill>
           </a:ln>
         </p:spPr>
@@ -10269,7 +10241,7 @@
             <a:r>
               <a:rPr sz="5400" b="1">
                 <a:solidFill>
-                  <a:srgbClr val="D97706"/>
+                  <a:srgbClr val="E67E22"/>
                 </a:solidFill>
                 <a:latin typeface="Microsoft JhengHei"/>
               </a:rPr>
@@ -10308,7 +10280,7 @@
             <a:r>
               <a:rPr sz="1800" b="1">
                 <a:solidFill>
-                  <a:srgbClr val="1C1917"/>
+                  <a:srgbClr val="1A1A1A"/>
                 </a:solidFill>
                 <a:latin typeface="Microsoft JhengHei"/>
               </a:rPr>
@@ -10347,7 +10319,7 @@
             <a:r>
               <a:rPr sz="1200" b="0">
                 <a:solidFill>
-                  <a:srgbClr val="78716C"/>
+                  <a:srgbClr val="6B6B6B"/>
                 </a:solidFill>
                 <a:latin typeface="Microsoft JhengHei"/>
               </a:rPr>
@@ -10363,7 +10335,7 @@
             <a:r>
               <a:rPr sz="1200" b="0">
                 <a:solidFill>
-                  <a:srgbClr val="78716C"/>
+                  <a:srgbClr val="6B6B6B"/>
                 </a:solidFill>
                 <a:latin typeface="Microsoft JhengHei"/>
               </a:rPr>
@@ -10374,7 +10346,7 @@
       </p:sp>
       <p:sp>
         <p:nvSpPr>
-          <p:cNvPr id="18" name="Rounded Rectangle 17"/>
+          <p:cNvPr id="18" name="Rectangle 17"/>
           <p:cNvSpPr/>
           <p:nvPr/>
         </p:nvSpPr>
@@ -10383,15 +10355,13 @@
             <a:off x="6233007" y="4389120"/>
             <a:ext cx="5394960" cy="1920240"/>
           </a:xfrm>
-          <a:prstGeom prst="roundRect">
-            <a:avLst>
-              <a:gd name="adj" fmla="val 5000"/>
-            </a:avLst>
+          <a:prstGeom prst="rect">
+            <a:avLst/>
           </a:prstGeom>
           <a:noFill/>
           <a:ln w="9525">
             <a:solidFill>
-              <a:srgbClr val="E7E5E0"/>
+              <a:srgbClr val="C8C2B7"/>
             </a:solidFill>
           </a:ln>
         </p:spPr>
@@ -10447,7 +10417,7 @@
             <a:r>
               <a:rPr sz="5400" b="1">
                 <a:solidFill>
-                  <a:srgbClr val="D97706"/>
+                  <a:srgbClr val="E67E22"/>
                 </a:solidFill>
                 <a:latin typeface="Microsoft JhengHei"/>
               </a:rPr>
@@ -10486,7 +10456,7 @@
             <a:r>
               <a:rPr sz="1800" b="1">
                 <a:solidFill>
-                  <a:srgbClr val="1C1917"/>
+                  <a:srgbClr val="1A1A1A"/>
                 </a:solidFill>
                 <a:latin typeface="Microsoft JhengHei"/>
               </a:rPr>
@@ -10525,7 +10495,7 @@
             <a:r>
               <a:rPr sz="1200" b="0">
                 <a:solidFill>
-                  <a:srgbClr val="78716C"/>
+                  <a:srgbClr val="6B6B6B"/>
                 </a:solidFill>
                 <a:latin typeface="Microsoft JhengHei"/>
               </a:rPr>
@@ -10541,7 +10511,7 @@
             <a:r>
               <a:rPr sz="1200" b="0">
                 <a:solidFill>
-                  <a:srgbClr val="78716C"/>
+                  <a:srgbClr val="6B6B6B"/>
                 </a:solidFill>
                 <a:latin typeface="Microsoft JhengHei"/>
               </a:rPr>
@@ -10580,7 +10550,7 @@
             <a:r>
               <a:rPr sz="900" b="0">
                 <a:solidFill>
-                  <a:srgbClr val="78716C"/>
+                  <a:srgbClr val="6B6B6B"/>
                 </a:solidFill>
                 <a:latin typeface="Microsoft JhengHei"/>
               </a:rPr>
@@ -10619,7 +10589,7 @@
             <a:r>
               <a:rPr sz="900" b="0">
                 <a:solidFill>
-                  <a:srgbClr val="78716C"/>
+                  <a:srgbClr val="6B6B6B"/>
                 </a:solidFill>
                 <a:latin typeface="Microsoft JhengHei"/>
               </a:rPr>
@@ -10661,7 +10631,7 @@
             <a:avLst/>
           </a:prstGeom>
           <a:solidFill>
-            <a:srgbClr val="FAFAF7"/>
+            <a:srgbClr val="F4F1ED"/>
           </a:solidFill>
           <a:ln>
             <a:noFill/>
@@ -10704,7 +10674,7 @@
             <a:avLst/>
           </a:prstGeom>
           <a:solidFill>
-            <a:srgbClr val="E7E5E0"/>
+            <a:srgbClr val="C8C2B7"/>
           </a:solidFill>
           <a:ln>
             <a:noFill/>
@@ -10762,7 +10732,7 @@
             <a:r>
               <a:rPr sz="4400" b="1">
                 <a:solidFill>
-                  <a:srgbClr val="1C1917"/>
+                  <a:srgbClr val="1A1A1A"/>
                 </a:solidFill>
                 <a:latin typeface="Microsoft JhengHei"/>
               </a:rPr>
@@ -10801,7 +10771,7 @@
             <a:r>
               <a:rPr sz="1800" b="0">
                 <a:solidFill>
-                  <a:srgbClr val="78716C"/>
+                  <a:srgbClr val="6B6B6B"/>
                 </a:solidFill>
                 <a:latin typeface="Microsoft JhengHei"/>
               </a:rPr>
@@ -10812,7 +10782,7 @@
       </p:sp>
       <p:sp>
         <p:nvSpPr>
-          <p:cNvPr id="6" name="Rounded Rectangle 5"/>
+          <p:cNvPr id="6" name="Rectangle 5"/>
           <p:cNvSpPr/>
           <p:nvPr/>
         </p:nvSpPr>
@@ -10821,15 +10791,13 @@
             <a:off x="731520" y="2103120"/>
             <a:ext cx="10698480" cy="822960"/>
           </a:xfrm>
-          <a:prstGeom prst="roundRect">
-            <a:avLst>
-              <a:gd name="adj" fmla="val 25000"/>
-            </a:avLst>
+          <a:prstGeom prst="rect">
+            <a:avLst/>
           </a:prstGeom>
           <a:noFill/>
           <a:ln w="9525">
             <a:solidFill>
-              <a:srgbClr val="E7E5E0"/>
+              <a:srgbClr val="C8C2B7"/>
             </a:solidFill>
           </a:ln>
         </p:spPr>
@@ -10885,7 +10853,7 @@
             <a:r>
               <a:rPr sz="3200" b="1">
                 <a:solidFill>
-                  <a:srgbClr val="DC2626"/>
+                  <a:srgbClr val="C0392B"/>
                 </a:solidFill>
                 <a:latin typeface="Microsoft JhengHei"/>
               </a:rPr>
@@ -10924,7 +10892,7 @@
             <a:r>
               <a:rPr sz="1600" b="1">
                 <a:solidFill>
-                  <a:srgbClr val="1C1917"/>
+                  <a:srgbClr val="1A1A1A"/>
                 </a:solidFill>
                 <a:latin typeface="Microsoft JhengHei"/>
               </a:rPr>
@@ -10963,7 +10931,7 @@
             <a:r>
               <a:rPr sz="1200" b="0">
                 <a:solidFill>
-                  <a:srgbClr val="78716C"/>
+                  <a:srgbClr val="6B6B6B"/>
                 </a:solidFill>
                 <a:latin typeface="Microsoft JhengHei"/>
               </a:rPr>
@@ -10974,7 +10942,7 @@
       </p:sp>
       <p:sp>
         <p:nvSpPr>
-          <p:cNvPr id="10" name="Rounded Rectangle 9"/>
+          <p:cNvPr id="10" name="Rectangle 9"/>
           <p:cNvSpPr/>
           <p:nvPr/>
         </p:nvSpPr>
@@ -10983,15 +10951,13 @@
             <a:off x="731520" y="3063240"/>
             <a:ext cx="10698480" cy="822960"/>
           </a:xfrm>
-          <a:prstGeom prst="roundRect">
-            <a:avLst>
-              <a:gd name="adj" fmla="val 25000"/>
-            </a:avLst>
+          <a:prstGeom prst="rect">
+            <a:avLst/>
           </a:prstGeom>
           <a:noFill/>
           <a:ln w="9525">
             <a:solidFill>
-              <a:srgbClr val="E7E5E0"/>
+              <a:srgbClr val="C8C2B7"/>
             </a:solidFill>
           </a:ln>
         </p:spPr>
@@ -11047,7 +11013,7 @@
             <a:r>
               <a:rPr sz="3200" b="1">
                 <a:solidFill>
-                  <a:srgbClr val="DC2626"/>
+                  <a:srgbClr val="C0392B"/>
                 </a:solidFill>
                 <a:latin typeface="Microsoft JhengHei"/>
               </a:rPr>
@@ -11086,7 +11052,7 @@
             <a:r>
               <a:rPr sz="1600" b="1">
                 <a:solidFill>
-                  <a:srgbClr val="1C1917"/>
+                  <a:srgbClr val="1A1A1A"/>
                 </a:solidFill>
                 <a:latin typeface="Microsoft JhengHei"/>
               </a:rPr>
@@ -11125,7 +11091,7 @@
             <a:r>
               <a:rPr sz="1200" b="0">
                 <a:solidFill>
-                  <a:srgbClr val="78716C"/>
+                  <a:srgbClr val="6B6B6B"/>
                 </a:solidFill>
                 <a:latin typeface="Microsoft JhengHei"/>
               </a:rPr>
@@ -11141,7 +11107,7 @@
             <a:r>
               <a:rPr sz="1200" b="0">
                 <a:solidFill>
-                  <a:srgbClr val="78716C"/>
+                  <a:srgbClr val="6B6B6B"/>
                 </a:solidFill>
                 <a:latin typeface="Microsoft JhengHei"/>
               </a:rPr>
@@ -11152,7 +11118,7 @@
       </p:sp>
       <p:sp>
         <p:nvSpPr>
-          <p:cNvPr id="14" name="Rounded Rectangle 13"/>
+          <p:cNvPr id="14" name="Rectangle 13"/>
           <p:cNvSpPr/>
           <p:nvPr/>
         </p:nvSpPr>
@@ -11161,15 +11127,13 @@
             <a:off x="731520" y="4023360"/>
             <a:ext cx="10698480" cy="822960"/>
           </a:xfrm>
-          <a:prstGeom prst="roundRect">
-            <a:avLst>
-              <a:gd name="adj" fmla="val 25000"/>
-            </a:avLst>
+          <a:prstGeom prst="rect">
+            <a:avLst/>
           </a:prstGeom>
           <a:noFill/>
           <a:ln w="9525">
             <a:solidFill>
-              <a:srgbClr val="E7E5E0"/>
+              <a:srgbClr val="C8C2B7"/>
             </a:solidFill>
           </a:ln>
         </p:spPr>
@@ -11225,7 +11189,7 @@
             <a:r>
               <a:rPr sz="3200" b="1">
                 <a:solidFill>
-                  <a:srgbClr val="DC2626"/>
+                  <a:srgbClr val="C0392B"/>
                 </a:solidFill>
                 <a:latin typeface="Microsoft JhengHei"/>
               </a:rPr>
@@ -11264,7 +11228,7 @@
             <a:r>
               <a:rPr sz="1600" b="1">
                 <a:solidFill>
-                  <a:srgbClr val="1C1917"/>
+                  <a:srgbClr val="1A1A1A"/>
                 </a:solidFill>
                 <a:latin typeface="Microsoft JhengHei"/>
               </a:rPr>
@@ -11303,7 +11267,7 @@
             <a:r>
               <a:rPr sz="1200" b="0">
                 <a:solidFill>
-                  <a:srgbClr val="78716C"/>
+                  <a:srgbClr val="6B6B6B"/>
                 </a:solidFill>
                 <a:latin typeface="Microsoft JhengHei"/>
               </a:rPr>
@@ -11314,7 +11278,7 @@
       </p:sp>
       <p:sp>
         <p:nvSpPr>
-          <p:cNvPr id="18" name="Rounded Rectangle 17"/>
+          <p:cNvPr id="18" name="Rectangle 17"/>
           <p:cNvSpPr/>
           <p:nvPr/>
         </p:nvSpPr>
@@ -11323,15 +11287,13 @@
             <a:off x="731520" y="4983480"/>
             <a:ext cx="10698480" cy="822960"/>
           </a:xfrm>
-          <a:prstGeom prst="roundRect">
-            <a:avLst>
-              <a:gd name="adj" fmla="val 25000"/>
-            </a:avLst>
+          <a:prstGeom prst="rect">
+            <a:avLst/>
           </a:prstGeom>
           <a:noFill/>
           <a:ln w="9525">
             <a:solidFill>
-              <a:srgbClr val="E7E5E0"/>
+              <a:srgbClr val="C8C2B7"/>
             </a:solidFill>
           </a:ln>
         </p:spPr>
@@ -11387,7 +11349,7 @@
             <a:r>
               <a:rPr sz="3200" b="1">
                 <a:solidFill>
-                  <a:srgbClr val="DC2626"/>
+                  <a:srgbClr val="C0392B"/>
                 </a:solidFill>
                 <a:latin typeface="Microsoft JhengHei"/>
               </a:rPr>
@@ -11426,7 +11388,7 @@
             <a:r>
               <a:rPr sz="1600" b="1">
                 <a:solidFill>
-                  <a:srgbClr val="1C1917"/>
+                  <a:srgbClr val="1A1A1A"/>
                 </a:solidFill>
                 <a:latin typeface="Microsoft JhengHei"/>
               </a:rPr>
@@ -11465,7 +11427,7 @@
             <a:r>
               <a:rPr sz="1200" b="0">
                 <a:solidFill>
-                  <a:srgbClr val="78716C"/>
+                  <a:srgbClr val="6B6B6B"/>
                 </a:solidFill>
                 <a:latin typeface="Microsoft JhengHei"/>
               </a:rPr>
@@ -11504,7 +11466,7 @@
             <a:r>
               <a:rPr sz="900" b="0">
                 <a:solidFill>
-                  <a:srgbClr val="78716C"/>
+                  <a:srgbClr val="6B6B6B"/>
                 </a:solidFill>
                 <a:latin typeface="Microsoft JhengHei"/>
               </a:rPr>
@@ -11543,7 +11505,7 @@
             <a:r>
               <a:rPr sz="900" b="0">
                 <a:solidFill>
-                  <a:srgbClr val="78716C"/>
+                  <a:srgbClr val="6B6B6B"/>
                 </a:solidFill>
                 <a:latin typeface="Microsoft JhengHei"/>
               </a:rPr>
@@ -11585,7 +11547,7 @@
             <a:avLst/>
           </a:prstGeom>
           <a:solidFill>
-            <a:srgbClr val="FAFAF7"/>
+            <a:srgbClr val="F4F1ED"/>
           </a:solidFill>
           <a:ln>
             <a:noFill/>
@@ -11628,7 +11590,7 @@
             <a:avLst/>
           </a:prstGeom>
           <a:solidFill>
-            <a:srgbClr val="E7E5E0"/>
+            <a:srgbClr val="C8C2B7"/>
           </a:solidFill>
           <a:ln>
             <a:noFill/>
@@ -11686,7 +11648,7 @@
             <a:r>
               <a:rPr sz="7200" b="1">
                 <a:solidFill>
-                  <a:srgbClr val="1C1917"/>
+                  <a:srgbClr val="1A1A1A"/>
                 </a:solidFill>
                 <a:latin typeface="Microsoft JhengHei"/>
               </a:rPr>
@@ -11710,7 +11672,7 @@
             <a:avLst/>
           </a:prstGeom>
           <a:solidFill>
-            <a:srgbClr val="D97706"/>
+            <a:srgbClr val="E67E22"/>
           </a:solidFill>
           <a:ln>
             <a:noFill/>
@@ -11768,7 +11730,7 @@
             <a:r>
               <a:rPr sz="2000" b="0">
                 <a:solidFill>
-                  <a:srgbClr val="44403C"/>
+                  <a:srgbClr val="3D3D3D"/>
                 </a:solidFill>
                 <a:latin typeface="Microsoft JhengHei"/>
               </a:rPr>
@@ -11807,7 +11769,7 @@
             <a:r>
               <a:rPr sz="1000" b="0">
                 <a:solidFill>
-                  <a:srgbClr val="78716C"/>
+                  <a:srgbClr val="6B6B6B"/>
                 </a:solidFill>
                 <a:latin typeface="Microsoft JhengHei"/>
               </a:rPr>
@@ -11849,7 +11811,7 @@
             <a:avLst/>
           </a:prstGeom>
           <a:solidFill>
-            <a:srgbClr val="FAFAF7"/>
+            <a:srgbClr val="F4F1ED"/>
           </a:solidFill>
           <a:ln>
             <a:noFill/>
@@ -11892,7 +11854,7 @@
             <a:avLst/>
           </a:prstGeom>
           <a:solidFill>
-            <a:srgbClr val="E7E5E0"/>
+            <a:srgbClr val="C8C2B7"/>
           </a:solidFill>
           <a:ln>
             <a:noFill/>
@@ -11950,7 +11912,7 @@
             <a:r>
               <a:rPr sz="4400" b="1">
                 <a:solidFill>
-                  <a:srgbClr val="1C1917"/>
+                  <a:srgbClr val="1A1A1A"/>
                 </a:solidFill>
                 <a:latin typeface="Microsoft JhengHei"/>
               </a:rPr>
@@ -11961,7 +11923,7 @@
       </p:sp>
       <p:sp>
         <p:nvSpPr>
-          <p:cNvPr id="5" name="Rounded Rectangle 4"/>
+          <p:cNvPr id="5" name="Rectangle 4"/>
           <p:cNvSpPr/>
           <p:nvPr/>
         </p:nvSpPr>
@@ -11970,15 +11932,13 @@
             <a:off x="792327" y="1737360"/>
             <a:ext cx="3291840" cy="4023360"/>
           </a:xfrm>
-          <a:prstGeom prst="roundRect">
-            <a:avLst>
-              <a:gd name="adj" fmla="val 8000"/>
-            </a:avLst>
+          <a:prstGeom prst="rect">
+            <a:avLst/>
           </a:prstGeom>
           <a:noFill/>
           <a:ln w="9525">
             <a:solidFill>
-              <a:srgbClr val="E7E5E0"/>
+              <a:srgbClr val="C8C2B7"/>
             </a:solidFill>
           </a:ln>
         </p:spPr>
@@ -12034,7 +11994,7 @@
             <a:r>
               <a:rPr sz="3600" b="1">
                 <a:solidFill>
-                  <a:srgbClr val="D97706"/>
+                  <a:srgbClr val="E67E22"/>
                 </a:solidFill>
                 <a:latin typeface="Microsoft JhengHei"/>
               </a:rPr>
@@ -12073,7 +12033,7 @@
             <a:r>
               <a:rPr sz="2800" b="1">
                 <a:solidFill>
-                  <a:srgbClr val="1C1917"/>
+                  <a:srgbClr val="1A1A1A"/>
                 </a:solidFill>
                 <a:latin typeface="Microsoft JhengHei"/>
               </a:rPr>
@@ -12098,7 +12058,7 @@
           </a:prstGeom>
           <a:ln w="25400">
             <a:solidFill>
-              <a:srgbClr val="D97706"/>
+              <a:srgbClr val="E67E22"/>
             </a:solidFill>
           </a:ln>
         </p:spPr>
@@ -12147,7 +12107,7 @@
             <a:r>
               <a:rPr sz="1500" b="0">
                 <a:solidFill>
-                  <a:srgbClr val="78716C"/>
+                  <a:srgbClr val="6B6B6B"/>
                 </a:solidFill>
                 <a:latin typeface="Microsoft JhengHei"/>
               </a:rPr>
@@ -12186,7 +12146,7 @@
             <a:r>
               <a:rPr sz="1500" b="0">
                 <a:solidFill>
-                  <a:srgbClr val="78716C"/>
+                  <a:srgbClr val="6B6B6B"/>
                 </a:solidFill>
                 <a:latin typeface="Microsoft JhengHei"/>
               </a:rPr>
@@ -12197,7 +12157,7 @@
       </p:sp>
       <p:sp>
         <p:nvSpPr>
-          <p:cNvPr id="11" name="Rounded Rectangle 10"/>
+          <p:cNvPr id="11" name="Rectangle 10"/>
           <p:cNvSpPr/>
           <p:nvPr/>
         </p:nvSpPr>
@@ -12206,15 +12166,13 @@
             <a:off x="4449927" y="1737360"/>
             <a:ext cx="3291840" cy="4023360"/>
           </a:xfrm>
-          <a:prstGeom prst="roundRect">
-            <a:avLst>
-              <a:gd name="adj" fmla="val 8000"/>
-            </a:avLst>
+          <a:prstGeom prst="rect">
+            <a:avLst/>
           </a:prstGeom>
           <a:noFill/>
           <a:ln w="9525">
             <a:solidFill>
-              <a:srgbClr val="E7E5E0"/>
+              <a:srgbClr val="C8C2B7"/>
             </a:solidFill>
           </a:ln>
         </p:spPr>
@@ -12270,7 +12228,7 @@
             <a:r>
               <a:rPr sz="3600" b="1">
                 <a:solidFill>
-                  <a:srgbClr val="D97706"/>
+                  <a:srgbClr val="E67E22"/>
                 </a:solidFill>
                 <a:latin typeface="Microsoft JhengHei"/>
               </a:rPr>
@@ -12309,7 +12267,7 @@
             <a:r>
               <a:rPr sz="2800" b="1">
                 <a:solidFill>
-                  <a:srgbClr val="1C1917"/>
+                  <a:srgbClr val="1A1A1A"/>
                 </a:solidFill>
                 <a:latin typeface="Microsoft JhengHei"/>
               </a:rPr>
@@ -12334,7 +12292,7 @@
           </a:prstGeom>
           <a:ln w="25400">
             <a:solidFill>
-              <a:srgbClr val="D97706"/>
+              <a:srgbClr val="E67E22"/>
             </a:solidFill>
           </a:ln>
         </p:spPr>
@@ -12383,7 +12341,7 @@
             <a:r>
               <a:rPr sz="1500" b="0">
                 <a:solidFill>
-                  <a:srgbClr val="78716C"/>
+                  <a:srgbClr val="6B6B6B"/>
                 </a:solidFill>
                 <a:latin typeface="Microsoft JhengHei"/>
               </a:rPr>
@@ -12422,7 +12380,7 @@
             <a:r>
               <a:rPr sz="1500" b="0">
                 <a:solidFill>
-                  <a:srgbClr val="78716C"/>
+                  <a:srgbClr val="6B6B6B"/>
                 </a:solidFill>
                 <a:latin typeface="Microsoft JhengHei"/>
               </a:rPr>
@@ -12433,7 +12391,7 @@
       </p:sp>
       <p:sp>
         <p:nvSpPr>
-          <p:cNvPr id="17" name="Rounded Rectangle 16"/>
+          <p:cNvPr id="17" name="Rectangle 16"/>
           <p:cNvSpPr/>
           <p:nvPr/>
         </p:nvSpPr>
@@ -12442,15 +12400,13 @@
             <a:off x="8107527" y="1737360"/>
             <a:ext cx="3291840" cy="4023360"/>
           </a:xfrm>
-          <a:prstGeom prst="roundRect">
-            <a:avLst>
-              <a:gd name="adj" fmla="val 8000"/>
-            </a:avLst>
+          <a:prstGeom prst="rect">
+            <a:avLst/>
           </a:prstGeom>
           <a:noFill/>
           <a:ln w="9525">
             <a:solidFill>
-              <a:srgbClr val="E7E5E0"/>
+              <a:srgbClr val="C8C2B7"/>
             </a:solidFill>
           </a:ln>
         </p:spPr>
@@ -12506,7 +12462,7 @@
             <a:r>
               <a:rPr sz="3600" b="1">
                 <a:solidFill>
-                  <a:srgbClr val="D97706"/>
+                  <a:srgbClr val="E67E22"/>
                 </a:solidFill>
                 <a:latin typeface="Microsoft JhengHei"/>
               </a:rPr>
@@ -12545,7 +12501,7 @@
             <a:r>
               <a:rPr sz="2800" b="1">
                 <a:solidFill>
-                  <a:srgbClr val="1C1917"/>
+                  <a:srgbClr val="1A1A1A"/>
                 </a:solidFill>
                 <a:latin typeface="Microsoft JhengHei"/>
               </a:rPr>
@@ -12570,7 +12526,7 @@
           </a:prstGeom>
           <a:ln w="25400">
             <a:solidFill>
-              <a:srgbClr val="D97706"/>
+              <a:srgbClr val="E67E22"/>
             </a:solidFill>
           </a:ln>
         </p:spPr>
@@ -12619,7 +12575,7 @@
             <a:r>
               <a:rPr sz="1500" b="0">
                 <a:solidFill>
-                  <a:srgbClr val="78716C"/>
+                  <a:srgbClr val="6B6B6B"/>
                 </a:solidFill>
                 <a:latin typeface="Microsoft JhengHei"/>
               </a:rPr>
@@ -12658,7 +12614,7 @@
             <a:r>
               <a:rPr sz="1500" b="0">
                 <a:solidFill>
-                  <a:srgbClr val="78716C"/>
+                  <a:srgbClr val="6B6B6B"/>
                 </a:solidFill>
                 <a:latin typeface="Microsoft JhengHei"/>
               </a:rPr>
@@ -12697,7 +12653,7 @@
             <a:r>
               <a:rPr sz="1500" b="0">
                 <a:solidFill>
-                  <a:srgbClr val="78716C"/>
+                  <a:srgbClr val="6B6B6B"/>
                 </a:solidFill>
                 <a:latin typeface="Microsoft JhengHei"/>
               </a:rPr>
@@ -12736,7 +12692,7 @@
             <a:r>
               <a:rPr sz="900" b="0">
                 <a:solidFill>
-                  <a:srgbClr val="78716C"/>
+                  <a:srgbClr val="6B6B6B"/>
                 </a:solidFill>
                 <a:latin typeface="Microsoft JhengHei"/>
               </a:rPr>
@@ -12775,7 +12731,7 @@
             <a:r>
               <a:rPr sz="900" b="0">
                 <a:solidFill>
-                  <a:srgbClr val="78716C"/>
+                  <a:srgbClr val="6B6B6B"/>
                 </a:solidFill>
                 <a:latin typeface="Microsoft JhengHei"/>
               </a:rPr>
@@ -12817,7 +12773,7 @@
             <a:avLst/>
           </a:prstGeom>
           <a:solidFill>
-            <a:srgbClr val="FAFAF7"/>
+            <a:srgbClr val="F4F1ED"/>
           </a:solidFill>
           <a:ln>
             <a:noFill/>
@@ -12860,7 +12816,7 @@
             <a:avLst/>
           </a:prstGeom>
           <a:solidFill>
-            <a:srgbClr val="E7E5E0"/>
+            <a:srgbClr val="C8C2B7"/>
           </a:solidFill>
           <a:ln>
             <a:noFill/>
@@ -12918,7 +12874,7 @@
             <a:r>
               <a:rPr sz="4400" b="1">
                 <a:solidFill>
-                  <a:srgbClr val="1C1917"/>
+                  <a:srgbClr val="1A1A1A"/>
                 </a:solidFill>
                 <a:latin typeface="Microsoft JhengHei"/>
               </a:rPr>
@@ -12957,7 +12913,7 @@
             <a:r>
               <a:rPr sz="1800" b="0">
                 <a:solidFill>
-                  <a:srgbClr val="78716C"/>
+                  <a:srgbClr val="6B6B6B"/>
                 </a:solidFill>
                 <a:latin typeface="Microsoft JhengHei"/>
               </a:rPr>
@@ -12968,7 +12924,7 @@
       </p:sp>
       <p:sp>
         <p:nvSpPr>
-          <p:cNvPr id="6" name="Rounded Rectangle 5"/>
+          <p:cNvPr id="6" name="Rectangle 5"/>
           <p:cNvSpPr/>
           <p:nvPr/>
         </p:nvSpPr>
@@ -12977,15 +12933,13 @@
             <a:off x="731520" y="2194560"/>
             <a:ext cx="10698480" cy="1143000"/>
           </a:xfrm>
-          <a:prstGeom prst="roundRect">
-            <a:avLst>
-              <a:gd name="adj" fmla="val 25000"/>
-            </a:avLst>
+          <a:prstGeom prst="rect">
+            <a:avLst/>
           </a:prstGeom>
           <a:noFill/>
           <a:ln w="9525">
             <a:solidFill>
-              <a:srgbClr val="E7E5E0"/>
+              <a:srgbClr val="C8C2B7"/>
             </a:solidFill>
           </a:ln>
         </p:spPr>
@@ -13041,7 +12995,7 @@
             <a:r>
               <a:rPr sz="3600" b="1">
                 <a:solidFill>
-                  <a:srgbClr val="D97706"/>
+                  <a:srgbClr val="E67E22"/>
                 </a:solidFill>
                 <a:latin typeface="Microsoft JhengHei"/>
               </a:rPr>
@@ -13080,7 +13034,7 @@
             <a:r>
               <a:rPr sz="2400" b="1">
                 <a:solidFill>
-                  <a:srgbClr val="1C1917"/>
+                  <a:srgbClr val="1A1A1A"/>
                 </a:solidFill>
                 <a:latin typeface="Microsoft JhengHei"/>
               </a:rPr>
@@ -13119,7 +13073,7 @@
             <a:r>
               <a:rPr sz="1400" b="0">
                 <a:solidFill>
-                  <a:srgbClr val="78716C"/>
+                  <a:srgbClr val="6B6B6B"/>
                 </a:solidFill>
                 <a:latin typeface="Microsoft JhengHei"/>
               </a:rPr>
@@ -13130,7 +13084,7 @@
       </p:sp>
       <p:sp>
         <p:nvSpPr>
-          <p:cNvPr id="10" name="Rounded Rectangle 9"/>
+          <p:cNvPr id="10" name="Rectangle 9"/>
           <p:cNvSpPr/>
           <p:nvPr/>
         </p:nvSpPr>
@@ -13139,15 +13093,13 @@
             <a:off x="731520" y="3566160"/>
             <a:ext cx="10698480" cy="1143000"/>
           </a:xfrm>
-          <a:prstGeom prst="roundRect">
-            <a:avLst>
-              <a:gd name="adj" fmla="val 25000"/>
-            </a:avLst>
+          <a:prstGeom prst="rect">
+            <a:avLst/>
           </a:prstGeom>
           <a:noFill/>
           <a:ln w="9525">
             <a:solidFill>
-              <a:srgbClr val="E7E5E0"/>
+              <a:srgbClr val="C8C2B7"/>
             </a:solidFill>
           </a:ln>
         </p:spPr>
@@ -13203,7 +13155,7 @@
             <a:r>
               <a:rPr sz="3600" b="1">
                 <a:solidFill>
-                  <a:srgbClr val="D97706"/>
+                  <a:srgbClr val="E67E22"/>
                 </a:solidFill>
                 <a:latin typeface="Microsoft JhengHei"/>
               </a:rPr>
@@ -13242,7 +13194,7 @@
             <a:r>
               <a:rPr sz="2400" b="1">
                 <a:solidFill>
-                  <a:srgbClr val="1C1917"/>
+                  <a:srgbClr val="1A1A1A"/>
                 </a:solidFill>
                 <a:latin typeface="Microsoft JhengHei"/>
               </a:rPr>
@@ -13281,7 +13233,7 @@
             <a:r>
               <a:rPr sz="1400" b="0">
                 <a:solidFill>
-                  <a:srgbClr val="78716C"/>
+                  <a:srgbClr val="6B6B6B"/>
                 </a:solidFill>
                 <a:latin typeface="Microsoft JhengHei"/>
               </a:rPr>
@@ -13292,7 +13244,7 @@
       </p:sp>
       <p:sp>
         <p:nvSpPr>
-          <p:cNvPr id="14" name="Rounded Rectangle 13"/>
+          <p:cNvPr id="14" name="Rectangle 13"/>
           <p:cNvSpPr/>
           <p:nvPr/>
         </p:nvSpPr>
@@ -13301,15 +13253,13 @@
             <a:off x="731520" y="4937760"/>
             <a:ext cx="10698480" cy="1143000"/>
           </a:xfrm>
-          <a:prstGeom prst="roundRect">
-            <a:avLst>
-              <a:gd name="adj" fmla="val 25000"/>
-            </a:avLst>
+          <a:prstGeom prst="rect">
+            <a:avLst/>
           </a:prstGeom>
           <a:noFill/>
           <a:ln w="9525">
             <a:solidFill>
-              <a:srgbClr val="E7E5E0"/>
+              <a:srgbClr val="C8C2B7"/>
             </a:solidFill>
           </a:ln>
         </p:spPr>
@@ -13365,7 +13315,7 @@
             <a:r>
               <a:rPr sz="3600" b="1">
                 <a:solidFill>
-                  <a:srgbClr val="D97706"/>
+                  <a:srgbClr val="E67E22"/>
                 </a:solidFill>
                 <a:latin typeface="Microsoft JhengHei"/>
               </a:rPr>
@@ -13404,7 +13354,7 @@
             <a:r>
               <a:rPr sz="2400" b="1">
                 <a:solidFill>
-                  <a:srgbClr val="1C1917"/>
+                  <a:srgbClr val="1A1A1A"/>
                 </a:solidFill>
                 <a:latin typeface="Microsoft JhengHei"/>
               </a:rPr>
@@ -13443,7 +13393,7 @@
             <a:r>
               <a:rPr sz="1400" b="0">
                 <a:solidFill>
-                  <a:srgbClr val="78716C"/>
+                  <a:srgbClr val="6B6B6B"/>
                 </a:solidFill>
                 <a:latin typeface="Microsoft JhengHei"/>
               </a:rPr>
@@ -13482,7 +13432,7 @@
             <a:r>
               <a:rPr sz="900" b="0">
                 <a:solidFill>
-                  <a:srgbClr val="78716C"/>
+                  <a:srgbClr val="6B6B6B"/>
                 </a:solidFill>
                 <a:latin typeface="Microsoft JhengHei"/>
               </a:rPr>
@@ -13521,7 +13471,7 @@
             <a:r>
               <a:rPr sz="900" b="0">
                 <a:solidFill>
-                  <a:srgbClr val="78716C"/>
+                  <a:srgbClr val="6B6B6B"/>
                 </a:solidFill>
                 <a:latin typeface="Microsoft JhengHei"/>
               </a:rPr>
@@ -13563,7 +13513,7 @@
             <a:avLst/>
           </a:prstGeom>
           <a:solidFill>
-            <a:srgbClr val="FAFAF7"/>
+            <a:srgbClr val="F4F1ED"/>
           </a:solidFill>
           <a:ln>
             <a:noFill/>
@@ -13606,7 +13556,7 @@
             <a:avLst/>
           </a:prstGeom>
           <a:solidFill>
-            <a:srgbClr val="E7E5E0"/>
+            <a:srgbClr val="C8C2B7"/>
           </a:solidFill>
           <a:ln>
             <a:noFill/>
@@ -13664,7 +13614,7 @@
             <a:r>
               <a:rPr sz="4400" b="1">
                 <a:solidFill>
-                  <a:srgbClr val="1C1917"/>
+                  <a:srgbClr val="1A1A1A"/>
                 </a:solidFill>
                 <a:latin typeface="Microsoft JhengHei"/>
               </a:rPr>
@@ -13703,7 +13653,7 @@
             <a:r>
               <a:rPr sz="1800" b="0">
                 <a:solidFill>
-                  <a:srgbClr val="78716C"/>
+                  <a:srgbClr val="6B6B6B"/>
                 </a:solidFill>
                 <a:latin typeface="Microsoft JhengHei"/>
               </a:rPr>
@@ -13714,7 +13664,7 @@
       </p:sp>
       <p:sp>
         <p:nvSpPr>
-          <p:cNvPr id="6" name="Rounded Rectangle 5"/>
+          <p:cNvPr id="6" name="Rectangle 5"/>
           <p:cNvSpPr/>
           <p:nvPr/>
         </p:nvSpPr>
@@ -13723,15 +13673,13 @@
             <a:off x="518007" y="1828800"/>
             <a:ext cx="3566160" cy="4572000"/>
           </a:xfrm>
-          <a:prstGeom prst="roundRect">
-            <a:avLst>
-              <a:gd name="adj" fmla="val 6000"/>
-            </a:avLst>
+          <a:prstGeom prst="rect">
+            <a:avLst/>
           </a:prstGeom>
           <a:noFill/>
           <a:ln w="9525">
             <a:solidFill>
-              <a:srgbClr val="E7E5E0"/>
+              <a:srgbClr val="C8C2B7"/>
             </a:solidFill>
           </a:ln>
         </p:spPr>
@@ -13772,7 +13720,7 @@
             <a:avLst/>
           </a:prstGeom>
           <a:solidFill>
-            <a:srgbClr val="D97706"/>
+            <a:srgbClr val="E67E22"/>
           </a:solidFill>
           <a:ln>
             <a:noFill/>
@@ -13830,7 +13778,7 @@
             <a:r>
               <a:rPr sz="2600" b="1">
                 <a:solidFill>
-                  <a:srgbClr val="1C1917"/>
+                  <a:srgbClr val="1A1A1A"/>
                 </a:solidFill>
                 <a:latin typeface="Microsoft JhengHei"/>
               </a:rPr>
@@ -13869,7 +13817,7 @@
             <a:r>
               <a:rPr sz="1400" b="0">
                 <a:solidFill>
-                  <a:srgbClr val="DC2626"/>
+                  <a:srgbClr val="C0392B"/>
                 </a:solidFill>
                 <a:latin typeface="Microsoft JhengHei"/>
               </a:rPr>
@@ -13908,7 +13856,7 @@
             <a:r>
               <a:rPr sz="1100" b="1">
                 <a:solidFill>
-                  <a:srgbClr val="78716C"/>
+                  <a:srgbClr val="6B6B6B"/>
                 </a:solidFill>
                 <a:latin typeface="Microsoft JhengHei"/>
               </a:rPr>
@@ -13947,7 +13895,7 @@
             <a:r>
               <a:rPr sz="1300" b="0">
                 <a:solidFill>
-                  <a:srgbClr val="1C1917"/>
+                  <a:srgbClr val="1A1A1A"/>
                 </a:solidFill>
                 <a:latin typeface="Microsoft JhengHei"/>
               </a:rPr>
@@ -13963,7 +13911,7 @@
             <a:r>
               <a:rPr sz="1300" b="0">
                 <a:solidFill>
-                  <a:srgbClr val="1C1917"/>
+                  <a:srgbClr val="1A1A1A"/>
                 </a:solidFill>
                 <a:latin typeface="Microsoft JhengHei"/>
               </a:rPr>
@@ -14002,7 +13950,7 @@
             <a:r>
               <a:rPr sz="1100" b="1">
                 <a:solidFill>
-                  <a:srgbClr val="78716C"/>
+                  <a:srgbClr val="6B6B6B"/>
                 </a:solidFill>
                 <a:latin typeface="Microsoft JhengHei"/>
               </a:rPr>
@@ -14041,7 +13989,7 @@
             <a:r>
               <a:rPr sz="1300" b="1">
                 <a:solidFill>
-                  <a:srgbClr val="1C1917"/>
+                  <a:srgbClr val="1A1A1A"/>
                 </a:solidFill>
                 <a:latin typeface="Microsoft JhengHei"/>
               </a:rPr>
@@ -14052,7 +14000,7 @@
       </p:sp>
       <p:sp>
         <p:nvSpPr>
-          <p:cNvPr id="14" name="Rounded Rectangle 13"/>
+          <p:cNvPr id="14" name="Rectangle 13"/>
           <p:cNvSpPr/>
           <p:nvPr/>
         </p:nvSpPr>
@@ -14061,13 +14009,11 @@
             <a:off x="883767" y="5532120"/>
             <a:ext cx="2834640" cy="411480"/>
           </a:xfrm>
-          <a:prstGeom prst="roundRect">
-            <a:avLst>
-              <a:gd name="adj" fmla="val 40000"/>
-            </a:avLst>
+          <a:prstGeom prst="rect">
+            <a:avLst/>
           </a:prstGeom>
           <a:solidFill>
-            <a:srgbClr val="F5F4EE"/>
+            <a:srgbClr val="E8E3DA"/>
           </a:solidFill>
           <a:ln>
             <a:noFill/>
@@ -14095,7 +14041,7 @@
             <a:r>
               <a:rPr sz="1200" b="1">
                 <a:solidFill>
-                  <a:srgbClr val="1C1917"/>
+                  <a:srgbClr val="1A1A1A"/>
                 </a:solidFill>
                 <a:latin typeface="Microsoft JhengHei"/>
               </a:rPr>
@@ -14120,7 +14066,7 @@
           </a:prstGeom>
           <a:ln w="9525">
             <a:solidFill>
-              <a:srgbClr val="E7E5E0"/>
+              <a:srgbClr val="C8C2B7"/>
             </a:solidFill>
           </a:ln>
         </p:spPr>
@@ -14169,7 +14115,7 @@
             <a:r>
               <a:rPr sz="1000" b="0">
                 <a:solidFill>
-                  <a:srgbClr val="78716C"/>
+                  <a:srgbClr val="6B6B6B"/>
                 </a:solidFill>
                 <a:latin typeface="Microsoft JhengHei"/>
               </a:rPr>
@@ -14180,7 +14126,7 @@
       </p:sp>
       <p:sp>
         <p:nvSpPr>
-          <p:cNvPr id="17" name="Rounded Rectangle 16"/>
+          <p:cNvPr id="17" name="Rectangle 16"/>
           <p:cNvSpPr/>
           <p:nvPr/>
         </p:nvSpPr>
@@ -14189,15 +14135,13 @@
             <a:off x="4312767" y="1828800"/>
             <a:ext cx="3566160" cy="4572000"/>
           </a:xfrm>
-          <a:prstGeom prst="roundRect">
-            <a:avLst>
-              <a:gd name="adj" fmla="val 6000"/>
-            </a:avLst>
+          <a:prstGeom prst="rect">
+            <a:avLst/>
           </a:prstGeom>
           <a:noFill/>
           <a:ln w="9525">
             <a:solidFill>
-              <a:srgbClr val="E7E5E0"/>
+              <a:srgbClr val="C8C2B7"/>
             </a:solidFill>
           </a:ln>
         </p:spPr>
@@ -14238,7 +14182,7 @@
             <a:avLst/>
           </a:prstGeom>
           <a:solidFill>
-            <a:srgbClr val="D97706"/>
+            <a:srgbClr val="E67E22"/>
           </a:solidFill>
           <a:ln>
             <a:noFill/>
@@ -14296,7 +14240,7 @@
             <a:r>
               <a:rPr sz="2600" b="1">
                 <a:solidFill>
-                  <a:srgbClr val="1C1917"/>
+                  <a:srgbClr val="1A1A1A"/>
                 </a:solidFill>
                 <a:latin typeface="Microsoft JhengHei"/>
               </a:rPr>
@@ -14335,7 +14279,7 @@
             <a:r>
               <a:rPr sz="1400" b="0">
                 <a:solidFill>
-                  <a:srgbClr val="DC2626"/>
+                  <a:srgbClr val="C0392B"/>
                 </a:solidFill>
                 <a:latin typeface="Microsoft JhengHei"/>
               </a:rPr>
@@ -14374,7 +14318,7 @@
             <a:r>
               <a:rPr sz="1100" b="1">
                 <a:solidFill>
-                  <a:srgbClr val="78716C"/>
+                  <a:srgbClr val="6B6B6B"/>
                 </a:solidFill>
                 <a:latin typeface="Microsoft JhengHei"/>
               </a:rPr>
@@ -14413,7 +14357,7 @@
             <a:r>
               <a:rPr sz="1300" b="0">
                 <a:solidFill>
-                  <a:srgbClr val="1C1917"/>
+                  <a:srgbClr val="1A1A1A"/>
                 </a:solidFill>
                 <a:latin typeface="Microsoft JhengHei"/>
               </a:rPr>
@@ -14429,7 +14373,7 @@
             <a:r>
               <a:rPr sz="1300" b="0">
                 <a:solidFill>
-                  <a:srgbClr val="1C1917"/>
+                  <a:srgbClr val="1A1A1A"/>
                 </a:solidFill>
                 <a:latin typeface="Microsoft JhengHei"/>
               </a:rPr>
@@ -14468,7 +14412,7 @@
             <a:r>
               <a:rPr sz="1100" b="1">
                 <a:solidFill>
-                  <a:srgbClr val="78716C"/>
+                  <a:srgbClr val="6B6B6B"/>
                 </a:solidFill>
                 <a:latin typeface="Microsoft JhengHei"/>
               </a:rPr>
@@ -14507,7 +14451,7 @@
             <a:r>
               <a:rPr sz="1300" b="1">
                 <a:solidFill>
-                  <a:srgbClr val="1C1917"/>
+                  <a:srgbClr val="1A1A1A"/>
                 </a:solidFill>
                 <a:latin typeface="Microsoft JhengHei"/>
               </a:rPr>
@@ -14518,7 +14462,7 @@
       </p:sp>
       <p:sp>
         <p:nvSpPr>
-          <p:cNvPr id="25" name="Rounded Rectangle 24"/>
+          <p:cNvPr id="25" name="Rectangle 24"/>
           <p:cNvSpPr/>
           <p:nvPr/>
         </p:nvSpPr>
@@ -14527,13 +14471,11 @@
             <a:off x="4678527" y="5532120"/>
             <a:ext cx="2834640" cy="411480"/>
           </a:xfrm>
-          <a:prstGeom prst="roundRect">
-            <a:avLst>
-              <a:gd name="adj" fmla="val 40000"/>
-            </a:avLst>
+          <a:prstGeom prst="rect">
+            <a:avLst/>
           </a:prstGeom>
           <a:solidFill>
-            <a:srgbClr val="F5F4EE"/>
+            <a:srgbClr val="E8E3DA"/>
           </a:solidFill>
           <a:ln>
             <a:noFill/>
@@ -14561,7 +14503,7 @@
             <a:r>
               <a:rPr sz="1200" b="1">
                 <a:solidFill>
-                  <a:srgbClr val="1C1917"/>
+                  <a:srgbClr val="1A1A1A"/>
                 </a:solidFill>
                 <a:latin typeface="Microsoft JhengHei"/>
               </a:rPr>
@@ -14586,7 +14528,7 @@
           </a:prstGeom>
           <a:ln w="9525">
             <a:solidFill>
-              <a:srgbClr val="E7E5E0"/>
+              <a:srgbClr val="C8C2B7"/>
             </a:solidFill>
           </a:ln>
         </p:spPr>
@@ -14635,7 +14577,7 @@
             <a:r>
               <a:rPr sz="1000" b="0">
                 <a:solidFill>
-                  <a:srgbClr val="78716C"/>
+                  <a:srgbClr val="6B6B6B"/>
                 </a:solidFill>
                 <a:latin typeface="Microsoft JhengHei"/>
               </a:rPr>
@@ -14646,7 +14588,7 @@
       </p:sp>
       <p:sp>
         <p:nvSpPr>
-          <p:cNvPr id="28" name="Rounded Rectangle 27"/>
+          <p:cNvPr id="28" name="Rectangle 27"/>
           <p:cNvSpPr/>
           <p:nvPr/>
         </p:nvSpPr>
@@ -14655,15 +14597,13 @@
             <a:off x="8107527" y="1828800"/>
             <a:ext cx="3566160" cy="4572000"/>
           </a:xfrm>
-          <a:prstGeom prst="roundRect">
-            <a:avLst>
-              <a:gd name="adj" fmla="val 6000"/>
-            </a:avLst>
+          <a:prstGeom prst="rect">
+            <a:avLst/>
           </a:prstGeom>
           <a:noFill/>
           <a:ln w="9525">
             <a:solidFill>
-              <a:srgbClr val="E7E5E0"/>
+              <a:srgbClr val="C8C2B7"/>
             </a:solidFill>
           </a:ln>
         </p:spPr>
@@ -14704,7 +14644,7 @@
             <a:avLst/>
           </a:prstGeom>
           <a:solidFill>
-            <a:srgbClr val="D97706"/>
+            <a:srgbClr val="E67E22"/>
           </a:solidFill>
           <a:ln>
             <a:noFill/>
@@ -14762,7 +14702,7 @@
             <a:r>
               <a:rPr sz="2600" b="1">
                 <a:solidFill>
-                  <a:srgbClr val="1C1917"/>
+                  <a:srgbClr val="1A1A1A"/>
                 </a:solidFill>
                 <a:latin typeface="Microsoft JhengHei"/>
               </a:rPr>
@@ -14801,7 +14741,7 @@
             <a:r>
               <a:rPr sz="1400" b="0">
                 <a:solidFill>
-                  <a:srgbClr val="DC2626"/>
+                  <a:srgbClr val="C0392B"/>
                 </a:solidFill>
                 <a:latin typeface="Microsoft JhengHei"/>
               </a:rPr>
@@ -14840,7 +14780,7 @@
             <a:r>
               <a:rPr sz="1100" b="1">
                 <a:solidFill>
-                  <a:srgbClr val="78716C"/>
+                  <a:srgbClr val="6B6B6B"/>
                 </a:solidFill>
                 <a:latin typeface="Microsoft JhengHei"/>
               </a:rPr>
@@ -14879,7 +14819,7 @@
             <a:r>
               <a:rPr sz="1300" b="0">
                 <a:solidFill>
-                  <a:srgbClr val="1C1917"/>
+                  <a:srgbClr val="1A1A1A"/>
                 </a:solidFill>
                 <a:latin typeface="Microsoft JhengHei"/>
               </a:rPr>
@@ -14895,7 +14835,7 @@
             <a:r>
               <a:rPr sz="1300" b="0">
                 <a:solidFill>
-                  <a:srgbClr val="1C1917"/>
+                  <a:srgbClr val="1A1A1A"/>
                 </a:solidFill>
                 <a:latin typeface="Microsoft JhengHei"/>
               </a:rPr>
@@ -14934,7 +14874,7 @@
             <a:r>
               <a:rPr sz="1100" b="1">
                 <a:solidFill>
-                  <a:srgbClr val="78716C"/>
+                  <a:srgbClr val="6B6B6B"/>
                 </a:solidFill>
                 <a:latin typeface="Microsoft JhengHei"/>
               </a:rPr>
@@ -14973,7 +14913,7 @@
             <a:r>
               <a:rPr sz="1300" b="1">
                 <a:solidFill>
-                  <a:srgbClr val="1C1917"/>
+                  <a:srgbClr val="1A1A1A"/>
                 </a:solidFill>
                 <a:latin typeface="Microsoft JhengHei"/>
               </a:rPr>
@@ -14984,7 +14924,7 @@
       </p:sp>
       <p:sp>
         <p:nvSpPr>
-          <p:cNvPr id="36" name="Rounded Rectangle 35"/>
+          <p:cNvPr id="36" name="Rectangle 35"/>
           <p:cNvSpPr/>
           <p:nvPr/>
         </p:nvSpPr>
@@ -14993,13 +14933,11 @@
             <a:off x="8473287" y="5532120"/>
             <a:ext cx="2834640" cy="411480"/>
           </a:xfrm>
-          <a:prstGeom prst="roundRect">
-            <a:avLst>
-              <a:gd name="adj" fmla="val 40000"/>
-            </a:avLst>
+          <a:prstGeom prst="rect">
+            <a:avLst/>
           </a:prstGeom>
           <a:solidFill>
-            <a:srgbClr val="F5F4EE"/>
+            <a:srgbClr val="E8E3DA"/>
           </a:solidFill>
           <a:ln>
             <a:noFill/>
@@ -15027,7 +14965,7 @@
             <a:r>
               <a:rPr sz="1200" b="1">
                 <a:solidFill>
-                  <a:srgbClr val="1C1917"/>
+                  <a:srgbClr val="1A1A1A"/>
                 </a:solidFill>
                 <a:latin typeface="Microsoft JhengHei"/>
               </a:rPr>
@@ -15052,7 +14990,7 @@
           </a:prstGeom>
           <a:ln w="9525">
             <a:solidFill>
-              <a:srgbClr val="E7E5E0"/>
+              <a:srgbClr val="C8C2B7"/>
             </a:solidFill>
           </a:ln>
         </p:spPr>
@@ -15101,7 +15039,7 @@
             <a:r>
               <a:rPr sz="1000" b="0">
                 <a:solidFill>
-                  <a:srgbClr val="78716C"/>
+                  <a:srgbClr val="6B6B6B"/>
                 </a:solidFill>
                 <a:latin typeface="Microsoft JhengHei"/>
               </a:rPr>
@@ -15140,7 +15078,7 @@
             <a:r>
               <a:rPr sz="900" b="0">
                 <a:solidFill>
-                  <a:srgbClr val="78716C"/>
+                  <a:srgbClr val="6B6B6B"/>
                 </a:solidFill>
                 <a:latin typeface="Microsoft JhengHei"/>
               </a:rPr>
@@ -15179,7 +15117,7 @@
             <a:r>
               <a:rPr sz="900" b="0">
                 <a:solidFill>
-                  <a:srgbClr val="78716C"/>
+                  <a:srgbClr val="6B6B6B"/>
                 </a:solidFill>
                 <a:latin typeface="Microsoft JhengHei"/>
               </a:rPr>
@@ -15221,7 +15159,7 @@
             <a:avLst/>
           </a:prstGeom>
           <a:solidFill>
-            <a:srgbClr val="FAFAF7"/>
+            <a:srgbClr val="F4F1ED"/>
           </a:solidFill>
           <a:ln>
             <a:noFill/>
@@ -15264,7 +15202,7 @@
             <a:avLst/>
           </a:prstGeom>
           <a:solidFill>
-            <a:srgbClr val="E7E5E0"/>
+            <a:srgbClr val="C8C2B7"/>
           </a:solidFill>
           <a:ln>
             <a:noFill/>
@@ -15322,7 +15260,7 @@
             <a:r>
               <a:rPr sz="1200" b="1">
                 <a:solidFill>
-                  <a:srgbClr val="78716C"/>
+                  <a:srgbClr val="6B6B6B"/>
                 </a:solidFill>
                 <a:latin typeface="Microsoft JhengHei"/>
               </a:rPr>
@@ -15361,7 +15299,7 @@
             <a:r>
               <a:rPr sz="3200" b="1">
                 <a:solidFill>
-                  <a:srgbClr val="1C1917"/>
+                  <a:srgbClr val="1A1A1A"/>
                 </a:solidFill>
                 <a:latin typeface="Microsoft JhengHei"/>
               </a:rPr>
@@ -15400,7 +15338,7 @@
             <a:r>
               <a:rPr sz="1400" b="0">
                 <a:solidFill>
-                  <a:srgbClr val="78716C"/>
+                  <a:srgbClr val="6B6B6B"/>
                 </a:solidFill>
                 <a:latin typeface="Microsoft JhengHei"/>
               </a:rPr>
@@ -15411,7 +15349,7 @@
       </p:sp>
       <p:sp>
         <p:nvSpPr>
-          <p:cNvPr id="7" name="Rounded Rectangle 6"/>
+          <p:cNvPr id="7" name="Rectangle 6"/>
           <p:cNvSpPr/>
           <p:nvPr/>
         </p:nvSpPr>
@@ -15420,17 +15358,15 @@
             <a:off x="6858000" y="868680"/>
             <a:ext cx="4846320" cy="411480"/>
           </a:xfrm>
-          <a:prstGeom prst="roundRect">
-            <a:avLst>
-              <a:gd name="adj" fmla="val 40000"/>
-            </a:avLst>
+          <a:prstGeom prst="rect">
+            <a:avLst/>
           </a:prstGeom>
           <a:solidFill>
-            <a:srgbClr val="F5F4EE"/>
+            <a:srgbClr val="E8E3DA"/>
           </a:solidFill>
           <a:ln w="9525">
             <a:solidFill>
-              <a:srgbClr val="E7E5E0"/>
+              <a:srgbClr val="C8C2B7"/>
             </a:solidFill>
           </a:ln>
         </p:spPr>
@@ -15456,7 +15392,7 @@
             <a:r>
               <a:rPr sz="1000" b="1">
                 <a:solidFill>
-                  <a:srgbClr val="44403C"/>
+                  <a:srgbClr val="3D3D3D"/>
                 </a:solidFill>
                 <a:latin typeface="Microsoft JhengHei"/>
               </a:rPr>
@@ -15467,7 +15403,7 @@
       </p:sp>
       <p:sp>
         <p:nvSpPr>
-          <p:cNvPr id="8" name="Rounded Rectangle 7"/>
+          <p:cNvPr id="8" name="Rectangle 7"/>
           <p:cNvSpPr/>
           <p:nvPr/>
         </p:nvSpPr>
@@ -15476,15 +15412,13 @@
             <a:off x="548640" y="1691640"/>
             <a:ext cx="5120640" cy="2743200"/>
           </a:xfrm>
-          <a:prstGeom prst="roundRect">
-            <a:avLst>
-              <a:gd name="adj" fmla="val 5000"/>
-            </a:avLst>
+          <a:prstGeom prst="rect">
+            <a:avLst/>
           </a:prstGeom>
           <a:noFill/>
           <a:ln w="9525">
             <a:solidFill>
-              <a:srgbClr val="E7E5E0"/>
+              <a:srgbClr val="C8C2B7"/>
             </a:solidFill>
           </a:ln>
         </p:spPr>
@@ -15540,7 +15474,7 @@
             <a:r>
               <a:rPr sz="1300" b="1">
                 <a:solidFill>
-                  <a:srgbClr val="D97706"/>
+                  <a:srgbClr val="E67E22"/>
                 </a:solidFill>
                 <a:latin typeface="Microsoft JhengHei"/>
               </a:rPr>
@@ -15579,7 +15513,7 @@
             <a:r>
               <a:rPr sz="1400" b="0">
                 <a:solidFill>
-                  <a:srgbClr val="1C1917"/>
+                  <a:srgbClr val="1A1A1A"/>
                 </a:solidFill>
                 <a:latin typeface="Microsoft JhengHei"/>
               </a:rPr>
@@ -15595,7 +15529,7 @@
             <a:r>
               <a:rPr sz="1400" b="0">
                 <a:solidFill>
-                  <a:srgbClr val="1C1917"/>
+                  <a:srgbClr val="1A1A1A"/>
                 </a:solidFill>
                 <a:latin typeface="Microsoft JhengHei"/>
               </a:rPr>
@@ -15611,7 +15545,7 @@
             <a:r>
               <a:rPr sz="1400" b="0">
                 <a:solidFill>
-                  <a:srgbClr val="1C1917"/>
+                  <a:srgbClr val="1A1A1A"/>
                 </a:solidFill>
                 <a:latin typeface="Microsoft JhengHei"/>
               </a:rPr>
@@ -15627,7 +15561,7 @@
             <a:r>
               <a:rPr sz="1400" b="0">
                 <a:solidFill>
-                  <a:srgbClr val="1C1917"/>
+                  <a:srgbClr val="1A1A1A"/>
                 </a:solidFill>
                 <a:latin typeface="Microsoft JhengHei"/>
               </a:rPr>
@@ -15638,7 +15572,7 @@
       </p:sp>
       <p:sp>
         <p:nvSpPr>
-          <p:cNvPr id="11" name="Rounded Rectangle 10"/>
+          <p:cNvPr id="11" name="Rectangle 10"/>
           <p:cNvSpPr/>
           <p:nvPr/>
         </p:nvSpPr>
@@ -15647,17 +15581,15 @@
             <a:off x="5852160" y="1691640"/>
             <a:ext cx="3017520" cy="2743200"/>
           </a:xfrm>
-          <a:prstGeom prst="roundRect">
-            <a:avLst>
-              <a:gd name="adj" fmla="val 5000"/>
-            </a:avLst>
+          <a:prstGeom prst="rect">
+            <a:avLst/>
           </a:prstGeom>
           <a:solidFill>
             <a:srgbClr val="FBEEEE"/>
           </a:solidFill>
           <a:ln w="9525">
             <a:solidFill>
-              <a:srgbClr val="E7E5E0"/>
+              <a:srgbClr val="C8C2B7"/>
             </a:solidFill>
           </a:ln>
         </p:spPr>
@@ -15698,7 +15630,7 @@
             <a:avLst/>
           </a:prstGeom>
           <a:solidFill>
-            <a:srgbClr val="DC2626"/>
+            <a:srgbClr val="C0392B"/>
           </a:solidFill>
           <a:ln>
             <a:noFill/>
@@ -15756,7 +15688,7 @@
             <a:r>
               <a:rPr sz="1200" b="1">
                 <a:solidFill>
-                  <a:srgbClr val="1C1917"/>
+                  <a:srgbClr val="1A1A1A"/>
                 </a:solidFill>
                 <a:latin typeface="Microsoft JhengHei"/>
               </a:rPr>
@@ -15795,7 +15727,7 @@
             <a:r>
               <a:rPr sz="1200" b="0">
                 <a:solidFill>
-                  <a:srgbClr val="1C1917"/>
+                  <a:srgbClr val="1A1A1A"/>
                 </a:solidFill>
                 <a:latin typeface="Microsoft JhengHei"/>
               </a:rPr>
@@ -15811,7 +15743,7 @@
             <a:r>
               <a:rPr sz="1200" b="0">
                 <a:solidFill>
-                  <a:srgbClr val="1C1917"/>
+                  <a:srgbClr val="1A1A1A"/>
                 </a:solidFill>
                 <a:latin typeface="Microsoft JhengHei"/>
               </a:rPr>
@@ -15827,7 +15759,7 @@
             <a:r>
               <a:rPr sz="1200" b="0">
                 <a:solidFill>
-                  <a:srgbClr val="1C1917"/>
+                  <a:srgbClr val="1A1A1A"/>
                 </a:solidFill>
                 <a:latin typeface="Microsoft JhengHei"/>
               </a:rPr>
@@ -15843,7 +15775,7 @@
             <a:r>
               <a:rPr sz="1200" b="0">
                 <a:solidFill>
-                  <a:srgbClr val="1C1917"/>
+                  <a:srgbClr val="1A1A1A"/>
                 </a:solidFill>
                 <a:latin typeface="Microsoft JhengHei"/>
               </a:rPr>
@@ -15859,7 +15791,7 @@
             <a:r>
               <a:rPr sz="1200" b="0">
                 <a:solidFill>
-                  <a:srgbClr val="1C1917"/>
+                  <a:srgbClr val="1A1A1A"/>
                 </a:solidFill>
                 <a:latin typeface="Microsoft JhengHei"/>
               </a:rPr>
@@ -15875,7 +15807,7 @@
             <a:r>
               <a:rPr sz="1200" b="0">
                 <a:solidFill>
-                  <a:srgbClr val="1C1917"/>
+                  <a:srgbClr val="1A1A1A"/>
                 </a:solidFill>
                 <a:latin typeface="Microsoft JhengHei"/>
               </a:rPr>
@@ -15891,7 +15823,7 @@
             <a:r>
               <a:rPr sz="1200" b="0">
                 <a:solidFill>
-                  <a:srgbClr val="1C1917"/>
+                  <a:srgbClr val="1A1A1A"/>
                 </a:solidFill>
                 <a:latin typeface="Microsoft JhengHei"/>
               </a:rPr>
@@ -15907,7 +15839,7 @@
             <a:r>
               <a:rPr sz="1200" b="0">
                 <a:solidFill>
-                  <a:srgbClr val="1C1917"/>
+                  <a:srgbClr val="1A1A1A"/>
                 </a:solidFill>
                 <a:latin typeface="Microsoft JhengHei"/>
               </a:rPr>
@@ -15923,7 +15855,7 @@
             <a:r>
               <a:rPr sz="1200" b="0">
                 <a:solidFill>
-                  <a:srgbClr val="1C1917"/>
+                  <a:srgbClr val="1A1A1A"/>
                 </a:solidFill>
                 <a:latin typeface="Microsoft JhengHei"/>
               </a:rPr>
@@ -15934,7 +15866,7 @@
       </p:sp>
       <p:sp>
         <p:nvSpPr>
-          <p:cNvPr id="15" name="Rounded Rectangle 14"/>
+          <p:cNvPr id="15" name="Rectangle 14"/>
           <p:cNvSpPr/>
           <p:nvPr/>
         </p:nvSpPr>
@@ -15943,17 +15875,15 @@
             <a:off x="9006840" y="1691640"/>
             <a:ext cx="3017520" cy="2743200"/>
           </a:xfrm>
-          <a:prstGeom prst="roundRect">
-            <a:avLst>
-              <a:gd name="adj" fmla="val 5000"/>
-            </a:avLst>
+          <a:prstGeom prst="rect">
+            <a:avLst/>
           </a:prstGeom>
           <a:solidFill>
             <a:srgbClr val="EEF6E8"/>
           </a:solidFill>
           <a:ln w="9525">
             <a:solidFill>
-              <a:srgbClr val="E7E5E0"/>
+              <a:srgbClr val="C8C2B7"/>
             </a:solidFill>
           </a:ln>
         </p:spPr>
@@ -16052,7 +15982,7 @@
             <a:r>
               <a:rPr sz="1200" b="1">
                 <a:solidFill>
-                  <a:srgbClr val="1C1917"/>
+                  <a:srgbClr val="1A1A1A"/>
                 </a:solidFill>
                 <a:latin typeface="Microsoft JhengHei"/>
               </a:rPr>
@@ -16091,7 +16021,7 @@
             <a:r>
               <a:rPr sz="1200" b="0">
                 <a:solidFill>
-                  <a:srgbClr val="1C1917"/>
+                  <a:srgbClr val="1A1A1A"/>
                 </a:solidFill>
                 <a:latin typeface="Microsoft JhengHei"/>
               </a:rPr>
@@ -16107,7 +16037,7 @@
             <a:r>
               <a:rPr sz="1200" b="0">
                 <a:solidFill>
-                  <a:srgbClr val="1C1917"/>
+                  <a:srgbClr val="1A1A1A"/>
                 </a:solidFill>
                 <a:latin typeface="Microsoft JhengHei"/>
               </a:rPr>
@@ -16123,7 +16053,7 @@
             <a:r>
               <a:rPr sz="1200" b="0">
                 <a:solidFill>
-                  <a:srgbClr val="1C1917"/>
+                  <a:srgbClr val="1A1A1A"/>
                 </a:solidFill>
                 <a:latin typeface="Microsoft JhengHei"/>
               </a:rPr>
@@ -16139,7 +16069,7 @@
             <a:r>
               <a:rPr sz="1200" b="0">
                 <a:solidFill>
-                  <a:srgbClr val="1C1917"/>
+                  <a:srgbClr val="1A1A1A"/>
                 </a:solidFill>
                 <a:latin typeface="Microsoft JhengHei"/>
               </a:rPr>
@@ -16155,7 +16085,7 @@
             <a:r>
               <a:rPr sz="1200" b="0">
                 <a:solidFill>
-                  <a:srgbClr val="1C1917"/>
+                  <a:srgbClr val="1A1A1A"/>
                 </a:solidFill>
                 <a:latin typeface="Microsoft JhengHei"/>
               </a:rPr>
@@ -16171,7 +16101,7 @@
             <a:r>
               <a:rPr sz="1200" b="0">
                 <a:solidFill>
-                  <a:srgbClr val="1C1917"/>
+                  <a:srgbClr val="1A1A1A"/>
                 </a:solidFill>
                 <a:latin typeface="Microsoft JhengHei"/>
               </a:rPr>
@@ -16187,7 +16117,7 @@
             <a:r>
               <a:rPr sz="1200" b="0">
                 <a:solidFill>
-                  <a:srgbClr val="1C1917"/>
+                  <a:srgbClr val="1A1A1A"/>
                 </a:solidFill>
                 <a:latin typeface="Microsoft JhengHei"/>
               </a:rPr>
@@ -16203,7 +16133,7 @@
             <a:r>
               <a:rPr sz="1200" b="0">
                 <a:solidFill>
-                  <a:srgbClr val="1C1917"/>
+                  <a:srgbClr val="1A1A1A"/>
                 </a:solidFill>
                 <a:latin typeface="Microsoft JhengHei"/>
               </a:rPr>
@@ -16219,7 +16149,7 @@
             <a:r>
               <a:rPr sz="1200" b="0">
                 <a:solidFill>
-                  <a:srgbClr val="1C1917"/>
+                  <a:srgbClr val="1A1A1A"/>
                 </a:solidFill>
                 <a:latin typeface="Microsoft JhengHei"/>
               </a:rPr>
@@ -16235,7 +16165,7 @@
             <a:r>
               <a:rPr sz="1200" b="0">
                 <a:solidFill>
-                  <a:srgbClr val="1C1917"/>
+                  <a:srgbClr val="1A1A1A"/>
                 </a:solidFill>
                 <a:latin typeface="Microsoft JhengHei"/>
               </a:rPr>
@@ -16274,7 +16204,7 @@
             <a:r>
               <a:rPr sz="1300" b="1">
                 <a:solidFill>
-                  <a:srgbClr val="1C1917"/>
+                  <a:srgbClr val="1A1A1A"/>
                 </a:solidFill>
                 <a:latin typeface="Microsoft JhengHei"/>
               </a:rPr>
@@ -16285,7 +16215,7 @@
       </p:sp>
       <p:sp>
         <p:nvSpPr>
-          <p:cNvPr id="20" name="Rounded Rectangle 19"/>
+          <p:cNvPr id="20" name="Rectangle 19"/>
           <p:cNvSpPr/>
           <p:nvPr/>
         </p:nvSpPr>
@@ -16294,15 +16224,13 @@
             <a:off x="548640" y="4983480"/>
             <a:ext cx="3822191" cy="1554480"/>
           </a:xfrm>
-          <a:prstGeom prst="roundRect">
-            <a:avLst>
-              <a:gd name="adj" fmla="val 8000"/>
-            </a:avLst>
+          <a:prstGeom prst="rect">
+            <a:avLst/>
           </a:prstGeom>
           <a:noFill/>
           <a:ln w="9525">
             <a:solidFill>
-              <a:srgbClr val="E7E5E0"/>
+              <a:srgbClr val="C8C2B7"/>
             </a:solidFill>
           </a:ln>
         </p:spPr>
@@ -16343,7 +16271,7 @@
             <a:avLst/>
           </a:prstGeom>
           <a:solidFill>
-            <a:srgbClr val="1C1917"/>
+            <a:srgbClr val="1A1A1A"/>
           </a:solidFill>
           <a:ln>
             <a:noFill/>
@@ -16401,7 +16329,7 @@
             <a:r>
               <a:rPr sz="1100" b="1">
                 <a:solidFill>
-                  <a:srgbClr val="1C1917"/>
+                  <a:srgbClr val="1A1A1A"/>
                 </a:solidFill>
                 <a:latin typeface="Microsoft JhengHei"/>
               </a:rPr>
@@ -16440,7 +16368,7 @@
             <a:r>
               <a:rPr sz="1100" b="1">
                 <a:solidFill>
-                  <a:srgbClr val="1C1917"/>
+                  <a:srgbClr val="1A1A1A"/>
                 </a:solidFill>
                 <a:latin typeface="Microsoft JhengHei"/>
               </a:rPr>
@@ -16479,7 +16407,7 @@
             <a:r>
               <a:rPr sz="1000" b="0">
                 <a:solidFill>
-                  <a:srgbClr val="78716C"/>
+                  <a:srgbClr val="6B6B6B"/>
                 </a:solidFill>
                 <a:latin typeface="Microsoft JhengHei"/>
               </a:rPr>
@@ -16495,7 +16423,7 @@
             <a:r>
               <a:rPr sz="1000" b="0">
                 <a:solidFill>
-                  <a:srgbClr val="78716C"/>
+                  <a:srgbClr val="6B6B6B"/>
                 </a:solidFill>
                 <a:latin typeface="Microsoft JhengHei"/>
               </a:rPr>
@@ -16511,7 +16439,7 @@
             <a:r>
               <a:rPr sz="1000" b="0">
                 <a:solidFill>
-                  <a:srgbClr val="78716C"/>
+                  <a:srgbClr val="6B6B6B"/>
                 </a:solidFill>
                 <a:latin typeface="Microsoft JhengHei"/>
               </a:rPr>
@@ -16522,7 +16450,7 @@
       </p:sp>
       <p:sp>
         <p:nvSpPr>
-          <p:cNvPr id="25" name="Rounded Rectangle 24"/>
+          <p:cNvPr id="25" name="Rectangle 24"/>
           <p:cNvSpPr/>
           <p:nvPr/>
         </p:nvSpPr>
@@ -16531,15 +16459,13 @@
             <a:off x="4507991" y="4983480"/>
             <a:ext cx="3822191" cy="1554480"/>
           </a:xfrm>
-          <a:prstGeom prst="roundRect">
-            <a:avLst>
-              <a:gd name="adj" fmla="val 8000"/>
-            </a:avLst>
+          <a:prstGeom prst="rect">
+            <a:avLst/>
           </a:prstGeom>
           <a:noFill/>
           <a:ln w="9525">
             <a:solidFill>
-              <a:srgbClr val="E7E5E0"/>
+              <a:srgbClr val="C8C2B7"/>
             </a:solidFill>
           </a:ln>
         </p:spPr>
@@ -16580,7 +16506,7 @@
             <a:avLst/>
           </a:prstGeom>
           <a:solidFill>
-            <a:srgbClr val="1C1917"/>
+            <a:srgbClr val="1A1A1A"/>
           </a:solidFill>
           <a:ln>
             <a:noFill/>
@@ -16638,7 +16564,7 @@
             <a:r>
               <a:rPr sz="1100" b="1">
                 <a:solidFill>
-                  <a:srgbClr val="1C1917"/>
+                  <a:srgbClr val="1A1A1A"/>
                 </a:solidFill>
                 <a:latin typeface="Microsoft JhengHei"/>
               </a:rPr>
@@ -16677,7 +16603,7 @@
             <a:r>
               <a:rPr sz="1100" b="1">
                 <a:solidFill>
-                  <a:srgbClr val="1C1917"/>
+                  <a:srgbClr val="1A1A1A"/>
                 </a:solidFill>
                 <a:latin typeface="Microsoft JhengHei"/>
               </a:rPr>
@@ -16716,7 +16642,7 @@
             <a:r>
               <a:rPr sz="1000" b="0">
                 <a:solidFill>
-                  <a:srgbClr val="78716C"/>
+                  <a:srgbClr val="6B6B6B"/>
                 </a:solidFill>
                 <a:latin typeface="Microsoft JhengHei"/>
               </a:rPr>
@@ -16732,7 +16658,7 @@
             <a:r>
               <a:rPr sz="1000" b="0">
                 <a:solidFill>
-                  <a:srgbClr val="78716C"/>
+                  <a:srgbClr val="6B6B6B"/>
                 </a:solidFill>
                 <a:latin typeface="Microsoft JhengHei"/>
               </a:rPr>
@@ -16748,7 +16674,7 @@
             <a:r>
               <a:rPr sz="1000" b="0">
                 <a:solidFill>
-                  <a:srgbClr val="78716C"/>
+                  <a:srgbClr val="6B6B6B"/>
                 </a:solidFill>
                 <a:latin typeface="Microsoft JhengHei"/>
               </a:rPr>
@@ -16759,7 +16685,7 @@
       </p:sp>
       <p:sp>
         <p:nvSpPr>
-          <p:cNvPr id="30" name="Rounded Rectangle 29"/>
+          <p:cNvPr id="30" name="Rectangle 29"/>
           <p:cNvSpPr/>
           <p:nvPr/>
         </p:nvSpPr>
@@ -16768,15 +16694,13 @@
             <a:off x="8467342" y="4983480"/>
             <a:ext cx="3822191" cy="1554480"/>
           </a:xfrm>
-          <a:prstGeom prst="roundRect">
-            <a:avLst>
-              <a:gd name="adj" fmla="val 8000"/>
-            </a:avLst>
+          <a:prstGeom prst="rect">
+            <a:avLst/>
           </a:prstGeom>
           <a:noFill/>
           <a:ln w="9525">
             <a:solidFill>
-              <a:srgbClr val="E7E5E0"/>
+              <a:srgbClr val="C8C2B7"/>
             </a:solidFill>
           </a:ln>
         </p:spPr>
@@ -16817,7 +16741,7 @@
             <a:avLst/>
           </a:prstGeom>
           <a:solidFill>
-            <a:srgbClr val="1C1917"/>
+            <a:srgbClr val="1A1A1A"/>
           </a:solidFill>
           <a:ln>
             <a:noFill/>
@@ -16875,7 +16799,7 @@
             <a:r>
               <a:rPr sz="1100" b="1">
                 <a:solidFill>
-                  <a:srgbClr val="1C1917"/>
+                  <a:srgbClr val="1A1A1A"/>
                 </a:solidFill>
                 <a:latin typeface="Microsoft JhengHei"/>
               </a:rPr>
@@ -16914,7 +16838,7 @@
             <a:r>
               <a:rPr sz="1100" b="1">
                 <a:solidFill>
-                  <a:srgbClr val="1C1917"/>
+                  <a:srgbClr val="1A1A1A"/>
                 </a:solidFill>
                 <a:latin typeface="Microsoft JhengHei"/>
               </a:rPr>
@@ -16953,7 +16877,7 @@
             <a:r>
               <a:rPr sz="1000" b="0">
                 <a:solidFill>
-                  <a:srgbClr val="78716C"/>
+                  <a:srgbClr val="6B6B6B"/>
                 </a:solidFill>
                 <a:latin typeface="Microsoft JhengHei"/>
               </a:rPr>
@@ -16969,7 +16893,7 @@
             <a:r>
               <a:rPr sz="1000" b="0">
                 <a:solidFill>
-                  <a:srgbClr val="78716C"/>
+                  <a:srgbClr val="6B6B6B"/>
                 </a:solidFill>
                 <a:latin typeface="Microsoft JhengHei"/>
               </a:rPr>
@@ -16985,7 +16909,7 @@
             <a:r>
               <a:rPr sz="1000" b="0">
                 <a:solidFill>
-                  <a:srgbClr val="78716C"/>
+                  <a:srgbClr val="6B6B6B"/>
                 </a:solidFill>
                 <a:latin typeface="Microsoft JhengHei"/>
               </a:rPr>
@@ -17024,7 +16948,7 @@
             <a:r>
               <a:rPr sz="900" b="0">
                 <a:solidFill>
-                  <a:srgbClr val="78716C"/>
+                  <a:srgbClr val="6B6B6B"/>
                 </a:solidFill>
                 <a:latin typeface="Microsoft JhengHei"/>
               </a:rPr>
@@ -17063,7 +16987,7 @@
             <a:r>
               <a:rPr sz="900" b="0">
                 <a:solidFill>
-                  <a:srgbClr val="78716C"/>
+                  <a:srgbClr val="6B6B6B"/>
                 </a:solidFill>
                 <a:latin typeface="Microsoft JhengHei"/>
               </a:rPr>
@@ -17105,7 +17029,7 @@
             <a:avLst/>
           </a:prstGeom>
           <a:solidFill>
-            <a:srgbClr val="FAFAF7"/>
+            <a:srgbClr val="F4F1ED"/>
           </a:solidFill>
           <a:ln>
             <a:noFill/>
@@ -17148,7 +17072,7 @@
             <a:avLst/>
           </a:prstGeom>
           <a:solidFill>
-            <a:srgbClr val="E7E5E0"/>
+            <a:srgbClr val="C8C2B7"/>
           </a:solidFill>
           <a:ln>
             <a:noFill/>
@@ -17206,7 +17130,7 @@
             <a:r>
               <a:rPr sz="1200" b="1">
                 <a:solidFill>
-                  <a:srgbClr val="78716C"/>
+                  <a:srgbClr val="6B6B6B"/>
                 </a:solidFill>
                 <a:latin typeface="Microsoft JhengHei"/>
               </a:rPr>
@@ -17245,7 +17169,7 @@
             <a:r>
               <a:rPr sz="3200" b="1">
                 <a:solidFill>
-                  <a:srgbClr val="1C1917"/>
+                  <a:srgbClr val="1A1A1A"/>
                 </a:solidFill>
                 <a:latin typeface="Microsoft JhengHei"/>
               </a:rPr>
@@ -17284,7 +17208,7 @@
             <a:r>
               <a:rPr sz="1400" b="0">
                 <a:solidFill>
-                  <a:srgbClr val="78716C"/>
+                  <a:srgbClr val="6B6B6B"/>
                 </a:solidFill>
                 <a:latin typeface="Microsoft JhengHei"/>
               </a:rPr>
@@ -17295,7 +17219,7 @@
       </p:sp>
       <p:sp>
         <p:nvSpPr>
-          <p:cNvPr id="7" name="Rounded Rectangle 6"/>
+          <p:cNvPr id="7" name="Rectangle 6"/>
           <p:cNvSpPr/>
           <p:nvPr/>
         </p:nvSpPr>
@@ -17304,17 +17228,15 @@
             <a:off x="6858000" y="868680"/>
             <a:ext cx="4846320" cy="411480"/>
           </a:xfrm>
-          <a:prstGeom prst="roundRect">
-            <a:avLst>
-              <a:gd name="adj" fmla="val 40000"/>
-            </a:avLst>
+          <a:prstGeom prst="rect">
+            <a:avLst/>
           </a:prstGeom>
           <a:solidFill>
-            <a:srgbClr val="F5F4EE"/>
+            <a:srgbClr val="E8E3DA"/>
           </a:solidFill>
           <a:ln w="9525">
             <a:solidFill>
-              <a:srgbClr val="E7E5E0"/>
+              <a:srgbClr val="C8C2B7"/>
             </a:solidFill>
           </a:ln>
         </p:spPr>
@@ -17340,7 +17262,7 @@
             <a:r>
               <a:rPr sz="1000" b="1">
                 <a:solidFill>
-                  <a:srgbClr val="44403C"/>
+                  <a:srgbClr val="3D3D3D"/>
                 </a:solidFill>
                 <a:latin typeface="Microsoft JhengHei"/>
               </a:rPr>
@@ -17351,7 +17273,7 @@
       </p:sp>
       <p:sp>
         <p:nvSpPr>
-          <p:cNvPr id="8" name="Rounded Rectangle 7"/>
+          <p:cNvPr id="8" name="Rectangle 7"/>
           <p:cNvSpPr/>
           <p:nvPr/>
         </p:nvSpPr>
@@ -17360,15 +17282,13 @@
             <a:off x="548640" y="1691640"/>
             <a:ext cx="5120640" cy="2743200"/>
           </a:xfrm>
-          <a:prstGeom prst="roundRect">
-            <a:avLst>
-              <a:gd name="adj" fmla="val 5000"/>
-            </a:avLst>
+          <a:prstGeom prst="rect">
+            <a:avLst/>
           </a:prstGeom>
           <a:noFill/>
           <a:ln w="9525">
             <a:solidFill>
-              <a:srgbClr val="E7E5E0"/>
+              <a:srgbClr val="C8C2B7"/>
             </a:solidFill>
           </a:ln>
         </p:spPr>
@@ -17424,7 +17344,7 @@
             <a:r>
               <a:rPr sz="1300" b="1">
                 <a:solidFill>
-                  <a:srgbClr val="D97706"/>
+                  <a:srgbClr val="E67E22"/>
                 </a:solidFill>
                 <a:latin typeface="Microsoft JhengHei"/>
               </a:rPr>
@@ -17463,7 +17383,7 @@
             <a:r>
               <a:rPr sz="1400" b="0">
                 <a:solidFill>
-                  <a:srgbClr val="1C1917"/>
+                  <a:srgbClr val="1A1A1A"/>
                 </a:solidFill>
                 <a:latin typeface="Microsoft JhengHei"/>
               </a:rPr>
@@ -17479,7 +17399,7 @@
             <a:r>
               <a:rPr sz="1400" b="0">
                 <a:solidFill>
-                  <a:srgbClr val="1C1917"/>
+                  <a:srgbClr val="1A1A1A"/>
                 </a:solidFill>
                 <a:latin typeface="Microsoft JhengHei"/>
               </a:rPr>
@@ -17495,7 +17415,7 @@
             <a:r>
               <a:rPr sz="1400" b="0">
                 <a:solidFill>
-                  <a:srgbClr val="1C1917"/>
+                  <a:srgbClr val="1A1A1A"/>
                 </a:solidFill>
                 <a:latin typeface="Microsoft JhengHei"/>
               </a:rPr>
@@ -17511,7 +17431,7 @@
             <a:r>
               <a:rPr sz="1400" b="0">
                 <a:solidFill>
-                  <a:srgbClr val="1C1917"/>
+                  <a:srgbClr val="1A1A1A"/>
                 </a:solidFill>
                 <a:latin typeface="Microsoft JhengHei"/>
               </a:rPr>
@@ -17522,7 +17442,7 @@
       </p:sp>
       <p:sp>
         <p:nvSpPr>
-          <p:cNvPr id="11" name="Rounded Rectangle 10"/>
+          <p:cNvPr id="11" name="Rectangle 10"/>
           <p:cNvSpPr/>
           <p:nvPr/>
         </p:nvSpPr>
@@ -17531,17 +17451,15 @@
             <a:off x="5852160" y="1691640"/>
             <a:ext cx="3017520" cy="2743200"/>
           </a:xfrm>
-          <a:prstGeom prst="roundRect">
-            <a:avLst>
-              <a:gd name="adj" fmla="val 5000"/>
-            </a:avLst>
+          <a:prstGeom prst="rect">
+            <a:avLst/>
           </a:prstGeom>
           <a:solidFill>
             <a:srgbClr val="FBEEEE"/>
           </a:solidFill>
           <a:ln w="9525">
             <a:solidFill>
-              <a:srgbClr val="E7E5E0"/>
+              <a:srgbClr val="C8C2B7"/>
             </a:solidFill>
           </a:ln>
         </p:spPr>
@@ -17582,7 +17500,7 @@
             <a:avLst/>
           </a:prstGeom>
           <a:solidFill>
-            <a:srgbClr val="DC2626"/>
+            <a:srgbClr val="C0392B"/>
           </a:solidFill>
           <a:ln>
             <a:noFill/>
@@ -17640,7 +17558,7 @@
             <a:r>
               <a:rPr sz="1200" b="1">
                 <a:solidFill>
-                  <a:srgbClr val="1C1917"/>
+                  <a:srgbClr val="1A1A1A"/>
                 </a:solidFill>
                 <a:latin typeface="Microsoft JhengHei"/>
               </a:rPr>
@@ -17679,7 +17597,7 @@
             <a:r>
               <a:rPr sz="1200" b="0">
                 <a:solidFill>
-                  <a:srgbClr val="1C1917"/>
+                  <a:srgbClr val="1A1A1A"/>
                 </a:solidFill>
                 <a:latin typeface="Microsoft JhengHei"/>
               </a:rPr>
@@ -17695,7 +17613,7 @@
             <a:r>
               <a:rPr sz="1200" b="0">
                 <a:solidFill>
-                  <a:srgbClr val="1C1917"/>
+                  <a:srgbClr val="1A1A1A"/>
                 </a:solidFill>
                 <a:latin typeface="Microsoft JhengHei"/>
               </a:rPr>
@@ -17711,7 +17629,7 @@
             <a:r>
               <a:rPr sz="1200" b="0">
                 <a:solidFill>
-                  <a:srgbClr val="1C1917"/>
+                  <a:srgbClr val="1A1A1A"/>
                 </a:solidFill>
                 <a:latin typeface="Microsoft JhengHei"/>
               </a:rPr>
@@ -17727,7 +17645,7 @@
             <a:r>
               <a:rPr sz="1200" b="0">
                 <a:solidFill>
-                  <a:srgbClr val="1C1917"/>
+                  <a:srgbClr val="1A1A1A"/>
                 </a:solidFill>
                 <a:latin typeface="Microsoft JhengHei"/>
               </a:rPr>
@@ -17743,7 +17661,7 @@
             <a:r>
               <a:rPr sz="1200" b="0">
                 <a:solidFill>
-                  <a:srgbClr val="1C1917"/>
+                  <a:srgbClr val="1A1A1A"/>
                 </a:solidFill>
                 <a:latin typeface="Microsoft JhengHei"/>
               </a:rPr>
@@ -17759,7 +17677,7 @@
             <a:r>
               <a:rPr sz="1200" b="0">
                 <a:solidFill>
-                  <a:srgbClr val="1C1917"/>
+                  <a:srgbClr val="1A1A1A"/>
                 </a:solidFill>
                 <a:latin typeface="Microsoft JhengHei"/>
               </a:rPr>
@@ -17775,7 +17693,7 @@
             <a:r>
               <a:rPr sz="1200" b="0">
                 <a:solidFill>
-                  <a:srgbClr val="1C1917"/>
+                  <a:srgbClr val="1A1A1A"/>
                 </a:solidFill>
                 <a:latin typeface="Microsoft JhengHei"/>
               </a:rPr>
@@ -17791,7 +17709,7 @@
             <a:r>
               <a:rPr sz="1200" b="0">
                 <a:solidFill>
-                  <a:srgbClr val="1C1917"/>
+                  <a:srgbClr val="1A1A1A"/>
                 </a:solidFill>
                 <a:latin typeface="Microsoft JhengHei"/>
               </a:rPr>
@@ -17807,7 +17725,7 @@
             <a:r>
               <a:rPr sz="1200" b="0">
                 <a:solidFill>
-                  <a:srgbClr val="1C1917"/>
+                  <a:srgbClr val="1A1A1A"/>
                 </a:solidFill>
                 <a:latin typeface="Microsoft JhengHei"/>
               </a:rPr>
@@ -17818,7 +17736,7 @@
       </p:sp>
       <p:sp>
         <p:nvSpPr>
-          <p:cNvPr id="15" name="Rounded Rectangle 14"/>
+          <p:cNvPr id="15" name="Rectangle 14"/>
           <p:cNvSpPr/>
           <p:nvPr/>
         </p:nvSpPr>
@@ -17827,17 +17745,15 @@
             <a:off x="9006840" y="1691640"/>
             <a:ext cx="3017520" cy="2743200"/>
           </a:xfrm>
-          <a:prstGeom prst="roundRect">
-            <a:avLst>
-              <a:gd name="adj" fmla="val 5000"/>
-            </a:avLst>
+          <a:prstGeom prst="rect">
+            <a:avLst/>
           </a:prstGeom>
           <a:solidFill>
             <a:srgbClr val="EEF6E8"/>
           </a:solidFill>
           <a:ln w="9525">
             <a:solidFill>
-              <a:srgbClr val="E7E5E0"/>
+              <a:srgbClr val="C8C2B7"/>
             </a:solidFill>
           </a:ln>
         </p:spPr>
@@ -17936,7 +17852,7 @@
             <a:r>
               <a:rPr sz="1200" b="1">
                 <a:solidFill>
-                  <a:srgbClr val="1C1917"/>
+                  <a:srgbClr val="1A1A1A"/>
                 </a:solidFill>
                 <a:latin typeface="Microsoft JhengHei"/>
               </a:rPr>
@@ -17975,7 +17891,7 @@
             <a:r>
               <a:rPr sz="1200" b="0">
                 <a:solidFill>
-                  <a:srgbClr val="1C1917"/>
+                  <a:srgbClr val="1A1A1A"/>
                 </a:solidFill>
                 <a:latin typeface="Microsoft JhengHei"/>
               </a:rPr>
@@ -17991,7 +17907,7 @@
             <a:r>
               <a:rPr sz="1200" b="0">
                 <a:solidFill>
-                  <a:srgbClr val="1C1917"/>
+                  <a:srgbClr val="1A1A1A"/>
                 </a:solidFill>
                 <a:latin typeface="Microsoft JhengHei"/>
               </a:rPr>
@@ -18007,7 +17923,7 @@
             <a:r>
               <a:rPr sz="1200" b="0">
                 <a:solidFill>
-                  <a:srgbClr val="1C1917"/>
+                  <a:srgbClr val="1A1A1A"/>
                 </a:solidFill>
                 <a:latin typeface="Microsoft JhengHei"/>
               </a:rPr>
@@ -18023,7 +17939,7 @@
             <a:r>
               <a:rPr sz="1200" b="0">
                 <a:solidFill>
-                  <a:srgbClr val="1C1917"/>
+                  <a:srgbClr val="1A1A1A"/>
                 </a:solidFill>
                 <a:latin typeface="Microsoft JhengHei"/>
               </a:rPr>
@@ -18039,7 +17955,7 @@
             <a:r>
               <a:rPr sz="1200" b="0">
                 <a:solidFill>
-                  <a:srgbClr val="1C1917"/>
+                  <a:srgbClr val="1A1A1A"/>
                 </a:solidFill>
                 <a:latin typeface="Microsoft JhengHei"/>
               </a:rPr>
@@ -18055,7 +17971,7 @@
             <a:r>
               <a:rPr sz="1200" b="0">
                 <a:solidFill>
-                  <a:srgbClr val="1C1917"/>
+                  <a:srgbClr val="1A1A1A"/>
                 </a:solidFill>
                 <a:latin typeface="Microsoft JhengHei"/>
               </a:rPr>
@@ -18071,7 +17987,7 @@
             <a:r>
               <a:rPr sz="1200" b="0">
                 <a:solidFill>
-                  <a:srgbClr val="1C1917"/>
+                  <a:srgbClr val="1A1A1A"/>
                 </a:solidFill>
                 <a:latin typeface="Microsoft JhengHei"/>
               </a:rPr>
@@ -18087,7 +18003,7 @@
             <a:r>
               <a:rPr sz="1200" b="0">
                 <a:solidFill>
-                  <a:srgbClr val="1C1917"/>
+                  <a:srgbClr val="1A1A1A"/>
                 </a:solidFill>
                 <a:latin typeface="Microsoft JhengHei"/>
               </a:rPr>
@@ -18103,7 +18019,7 @@
             <a:r>
               <a:rPr sz="1200" b="0">
                 <a:solidFill>
-                  <a:srgbClr val="1C1917"/>
+                  <a:srgbClr val="1A1A1A"/>
                 </a:solidFill>
                 <a:latin typeface="Microsoft JhengHei"/>
               </a:rPr>
@@ -18119,7 +18035,7 @@
             <a:r>
               <a:rPr sz="1200" b="0">
                 <a:solidFill>
-                  <a:srgbClr val="1C1917"/>
+                  <a:srgbClr val="1A1A1A"/>
                 </a:solidFill>
                 <a:latin typeface="Microsoft JhengHei"/>
               </a:rPr>
@@ -18135,7 +18051,7 @@
             <a:r>
               <a:rPr sz="1200" b="0">
                 <a:solidFill>
-                  <a:srgbClr val="1C1917"/>
+                  <a:srgbClr val="1A1A1A"/>
                 </a:solidFill>
                 <a:latin typeface="Microsoft JhengHei"/>
               </a:rPr>
@@ -18174,7 +18090,7 @@
             <a:r>
               <a:rPr sz="1300" b="1">
                 <a:solidFill>
-                  <a:srgbClr val="1C1917"/>
+                  <a:srgbClr val="1A1A1A"/>
                 </a:solidFill>
                 <a:latin typeface="Microsoft JhengHei"/>
               </a:rPr>
@@ -18185,7 +18101,7 @@
       </p:sp>
       <p:sp>
         <p:nvSpPr>
-          <p:cNvPr id="20" name="Rounded Rectangle 19"/>
+          <p:cNvPr id="20" name="Rectangle 19"/>
           <p:cNvSpPr/>
           <p:nvPr/>
         </p:nvSpPr>
@@ -18194,15 +18110,13 @@
             <a:off x="548640" y="4983480"/>
             <a:ext cx="3822191" cy="1554480"/>
           </a:xfrm>
-          <a:prstGeom prst="roundRect">
-            <a:avLst>
-              <a:gd name="adj" fmla="val 8000"/>
-            </a:avLst>
+          <a:prstGeom prst="rect">
+            <a:avLst/>
           </a:prstGeom>
           <a:noFill/>
           <a:ln w="9525">
             <a:solidFill>
-              <a:srgbClr val="E7E5E0"/>
+              <a:srgbClr val="C8C2B7"/>
             </a:solidFill>
           </a:ln>
         </p:spPr>
@@ -18243,7 +18157,7 @@
             <a:avLst/>
           </a:prstGeom>
           <a:solidFill>
-            <a:srgbClr val="1C1917"/>
+            <a:srgbClr val="1A1A1A"/>
           </a:solidFill>
           <a:ln>
             <a:noFill/>
@@ -18301,7 +18215,7 @@
             <a:r>
               <a:rPr sz="1100" b="1">
                 <a:solidFill>
-                  <a:srgbClr val="1C1917"/>
+                  <a:srgbClr val="1A1A1A"/>
                 </a:solidFill>
                 <a:latin typeface="Microsoft JhengHei"/>
               </a:rPr>
@@ -18340,7 +18254,7 @@
             <a:r>
               <a:rPr sz="1100" b="1">
                 <a:solidFill>
-                  <a:srgbClr val="1C1917"/>
+                  <a:srgbClr val="1A1A1A"/>
                 </a:solidFill>
                 <a:latin typeface="Microsoft JhengHei"/>
               </a:rPr>
@@ -18379,7 +18293,7 @@
             <a:r>
               <a:rPr sz="1000" b="0">
                 <a:solidFill>
-                  <a:srgbClr val="78716C"/>
+                  <a:srgbClr val="6B6B6B"/>
                 </a:solidFill>
                 <a:latin typeface="Microsoft JhengHei"/>
               </a:rPr>
@@ -18395,7 +18309,7 @@
             <a:r>
               <a:rPr sz="1000" b="0">
                 <a:solidFill>
-                  <a:srgbClr val="78716C"/>
+                  <a:srgbClr val="6B6B6B"/>
                 </a:solidFill>
                 <a:latin typeface="Microsoft JhengHei"/>
               </a:rPr>
@@ -18411,7 +18325,7 @@
             <a:r>
               <a:rPr sz="1000" b="0">
                 <a:solidFill>
-                  <a:srgbClr val="78716C"/>
+                  <a:srgbClr val="6B6B6B"/>
                 </a:solidFill>
                 <a:latin typeface="Microsoft JhengHei"/>
               </a:rPr>
@@ -18422,7 +18336,7 @@
       </p:sp>
       <p:sp>
         <p:nvSpPr>
-          <p:cNvPr id="25" name="Rounded Rectangle 24"/>
+          <p:cNvPr id="25" name="Rectangle 24"/>
           <p:cNvSpPr/>
           <p:nvPr/>
         </p:nvSpPr>
@@ -18431,15 +18345,13 @@
             <a:off x="4507991" y="4983480"/>
             <a:ext cx="3822191" cy="1554480"/>
           </a:xfrm>
-          <a:prstGeom prst="roundRect">
-            <a:avLst>
-              <a:gd name="adj" fmla="val 8000"/>
-            </a:avLst>
+          <a:prstGeom prst="rect">
+            <a:avLst/>
           </a:prstGeom>
           <a:noFill/>
           <a:ln w="9525">
             <a:solidFill>
-              <a:srgbClr val="E7E5E0"/>
+              <a:srgbClr val="C8C2B7"/>
             </a:solidFill>
           </a:ln>
         </p:spPr>
@@ -18480,7 +18392,7 @@
             <a:avLst/>
           </a:prstGeom>
           <a:solidFill>
-            <a:srgbClr val="1C1917"/>
+            <a:srgbClr val="1A1A1A"/>
           </a:solidFill>
           <a:ln>
             <a:noFill/>
@@ -18538,7 +18450,7 @@
             <a:r>
               <a:rPr sz="1100" b="1">
                 <a:solidFill>
-                  <a:srgbClr val="1C1917"/>
+                  <a:srgbClr val="1A1A1A"/>
                 </a:solidFill>
                 <a:latin typeface="Microsoft JhengHei"/>
               </a:rPr>
@@ -18577,7 +18489,7 @@
             <a:r>
               <a:rPr sz="1100" b="1">
                 <a:solidFill>
-                  <a:srgbClr val="1C1917"/>
+                  <a:srgbClr val="1A1A1A"/>
                 </a:solidFill>
                 <a:latin typeface="Microsoft JhengHei"/>
               </a:rPr>
@@ -18616,7 +18528,7 @@
             <a:r>
               <a:rPr sz="1000" b="0">
                 <a:solidFill>
-                  <a:srgbClr val="78716C"/>
+                  <a:srgbClr val="6B6B6B"/>
                 </a:solidFill>
                 <a:latin typeface="Microsoft JhengHei"/>
               </a:rPr>
@@ -18632,7 +18544,7 @@
             <a:r>
               <a:rPr sz="1000" b="0">
                 <a:solidFill>
-                  <a:srgbClr val="78716C"/>
+                  <a:srgbClr val="6B6B6B"/>
                 </a:solidFill>
                 <a:latin typeface="Microsoft JhengHei"/>
               </a:rPr>
@@ -18648,7 +18560,7 @@
             <a:r>
               <a:rPr sz="1000" b="0">
                 <a:solidFill>
-                  <a:srgbClr val="78716C"/>
+                  <a:srgbClr val="6B6B6B"/>
                 </a:solidFill>
                 <a:latin typeface="Microsoft JhengHei"/>
               </a:rPr>
@@ -18659,7 +18571,7 @@
       </p:sp>
       <p:sp>
         <p:nvSpPr>
-          <p:cNvPr id="30" name="Rounded Rectangle 29"/>
+          <p:cNvPr id="30" name="Rectangle 29"/>
           <p:cNvSpPr/>
           <p:nvPr/>
         </p:nvSpPr>
@@ -18668,15 +18580,13 @@
             <a:off x="8467342" y="4983480"/>
             <a:ext cx="3822191" cy="1554480"/>
           </a:xfrm>
-          <a:prstGeom prst="roundRect">
-            <a:avLst>
-              <a:gd name="adj" fmla="val 8000"/>
-            </a:avLst>
+          <a:prstGeom prst="rect">
+            <a:avLst/>
           </a:prstGeom>
           <a:noFill/>
           <a:ln w="9525">
             <a:solidFill>
-              <a:srgbClr val="E7E5E0"/>
+              <a:srgbClr val="C8C2B7"/>
             </a:solidFill>
           </a:ln>
         </p:spPr>
@@ -18717,7 +18627,7 @@
             <a:avLst/>
           </a:prstGeom>
           <a:solidFill>
-            <a:srgbClr val="1C1917"/>
+            <a:srgbClr val="1A1A1A"/>
           </a:solidFill>
           <a:ln>
             <a:noFill/>
@@ -18775,7 +18685,7 @@
             <a:r>
               <a:rPr sz="1100" b="1">
                 <a:solidFill>
-                  <a:srgbClr val="1C1917"/>
+                  <a:srgbClr val="1A1A1A"/>
                 </a:solidFill>
                 <a:latin typeface="Microsoft JhengHei"/>
               </a:rPr>
@@ -18814,7 +18724,7 @@
             <a:r>
               <a:rPr sz="1100" b="1">
                 <a:solidFill>
-                  <a:srgbClr val="1C1917"/>
+                  <a:srgbClr val="1A1A1A"/>
                 </a:solidFill>
                 <a:latin typeface="Microsoft JhengHei"/>
               </a:rPr>
@@ -18853,7 +18763,7 @@
             <a:r>
               <a:rPr sz="1000" b="0">
                 <a:solidFill>
-                  <a:srgbClr val="78716C"/>
+                  <a:srgbClr val="6B6B6B"/>
                 </a:solidFill>
                 <a:latin typeface="Microsoft JhengHei"/>
               </a:rPr>
@@ -18869,7 +18779,7 @@
             <a:r>
               <a:rPr sz="1000" b="0">
                 <a:solidFill>
-                  <a:srgbClr val="78716C"/>
+                  <a:srgbClr val="6B6B6B"/>
                 </a:solidFill>
                 <a:latin typeface="Microsoft JhengHei"/>
               </a:rPr>
@@ -18885,7 +18795,7 @@
             <a:r>
               <a:rPr sz="1000" b="0">
                 <a:solidFill>
-                  <a:srgbClr val="78716C"/>
+                  <a:srgbClr val="6B6B6B"/>
                 </a:solidFill>
                 <a:latin typeface="Microsoft JhengHei"/>
               </a:rPr>
@@ -18924,7 +18834,7 @@
             <a:r>
               <a:rPr sz="900" b="0">
                 <a:solidFill>
-                  <a:srgbClr val="78716C"/>
+                  <a:srgbClr val="6B6B6B"/>
                 </a:solidFill>
                 <a:latin typeface="Microsoft JhengHei"/>
               </a:rPr>
@@ -18963,7 +18873,7 @@
             <a:r>
               <a:rPr sz="900" b="0">
                 <a:solidFill>
-                  <a:srgbClr val="78716C"/>
+                  <a:srgbClr val="6B6B6B"/>
                 </a:solidFill>
                 <a:latin typeface="Microsoft JhengHei"/>
               </a:rPr>
@@ -19005,7 +18915,7 @@
             <a:avLst/>
           </a:prstGeom>
           <a:solidFill>
-            <a:srgbClr val="FAFAF7"/>
+            <a:srgbClr val="F4F1ED"/>
           </a:solidFill>
           <a:ln>
             <a:noFill/>
@@ -19048,7 +18958,7 @@
             <a:avLst/>
           </a:prstGeom>
           <a:solidFill>
-            <a:srgbClr val="E7E5E0"/>
+            <a:srgbClr val="C8C2B7"/>
           </a:solidFill>
           <a:ln>
             <a:noFill/>
@@ -19106,7 +19016,7 @@
             <a:r>
               <a:rPr sz="1200" b="1">
                 <a:solidFill>
-                  <a:srgbClr val="78716C"/>
+                  <a:srgbClr val="6B6B6B"/>
                 </a:solidFill>
                 <a:latin typeface="Microsoft JhengHei"/>
               </a:rPr>
@@ -19145,7 +19055,7 @@
             <a:r>
               <a:rPr sz="3200" b="1">
                 <a:solidFill>
-                  <a:srgbClr val="1C1917"/>
+                  <a:srgbClr val="1A1A1A"/>
                 </a:solidFill>
                 <a:latin typeface="Microsoft JhengHei"/>
               </a:rPr>
@@ -19184,7 +19094,7 @@
             <a:r>
               <a:rPr sz="1400" b="0">
                 <a:solidFill>
-                  <a:srgbClr val="78716C"/>
+                  <a:srgbClr val="6B6B6B"/>
                 </a:solidFill>
                 <a:latin typeface="Microsoft JhengHei"/>
               </a:rPr>
@@ -19195,7 +19105,7 @@
       </p:sp>
       <p:sp>
         <p:nvSpPr>
-          <p:cNvPr id="7" name="Rounded Rectangle 6"/>
+          <p:cNvPr id="7" name="Rectangle 6"/>
           <p:cNvSpPr/>
           <p:nvPr/>
         </p:nvSpPr>
@@ -19204,17 +19114,15 @@
             <a:off x="6858000" y="868680"/>
             <a:ext cx="4846320" cy="411480"/>
           </a:xfrm>
-          <a:prstGeom prst="roundRect">
-            <a:avLst>
-              <a:gd name="adj" fmla="val 40000"/>
-            </a:avLst>
+          <a:prstGeom prst="rect">
+            <a:avLst/>
           </a:prstGeom>
           <a:solidFill>
-            <a:srgbClr val="F5F4EE"/>
+            <a:srgbClr val="E8E3DA"/>
           </a:solidFill>
           <a:ln w="9525">
             <a:solidFill>
-              <a:srgbClr val="E7E5E0"/>
+              <a:srgbClr val="C8C2B7"/>
             </a:solidFill>
           </a:ln>
         </p:spPr>
@@ -19240,7 +19148,7 @@
             <a:r>
               <a:rPr sz="1000" b="1">
                 <a:solidFill>
-                  <a:srgbClr val="44403C"/>
+                  <a:srgbClr val="3D3D3D"/>
                 </a:solidFill>
                 <a:latin typeface="Microsoft JhengHei"/>
               </a:rPr>
@@ -19251,7 +19159,7 @@
       </p:sp>
       <p:sp>
         <p:nvSpPr>
-          <p:cNvPr id="8" name="Rounded Rectangle 7"/>
+          <p:cNvPr id="8" name="Rectangle 7"/>
           <p:cNvSpPr/>
           <p:nvPr/>
         </p:nvSpPr>
@@ -19260,15 +19168,13 @@
             <a:off x="548640" y="1691640"/>
             <a:ext cx="5120640" cy="2743200"/>
           </a:xfrm>
-          <a:prstGeom prst="roundRect">
-            <a:avLst>
-              <a:gd name="adj" fmla="val 5000"/>
-            </a:avLst>
+          <a:prstGeom prst="rect">
+            <a:avLst/>
           </a:prstGeom>
           <a:noFill/>
           <a:ln w="9525">
             <a:solidFill>
-              <a:srgbClr val="E7E5E0"/>
+              <a:srgbClr val="C8C2B7"/>
             </a:solidFill>
           </a:ln>
         </p:spPr>
@@ -19324,7 +19230,7 @@
             <a:r>
               <a:rPr sz="1300" b="1">
                 <a:solidFill>
-                  <a:srgbClr val="D97706"/>
+                  <a:srgbClr val="E67E22"/>
                 </a:solidFill>
                 <a:latin typeface="Microsoft JhengHei"/>
               </a:rPr>
@@ -19363,7 +19269,7 @@
             <a:r>
               <a:rPr sz="1400" b="0">
                 <a:solidFill>
-                  <a:srgbClr val="1C1917"/>
+                  <a:srgbClr val="1A1A1A"/>
                 </a:solidFill>
                 <a:latin typeface="Microsoft JhengHei"/>
               </a:rPr>
@@ -19379,7 +19285,7 @@
             <a:r>
               <a:rPr sz="1400" b="0">
                 <a:solidFill>
-                  <a:srgbClr val="1C1917"/>
+                  <a:srgbClr val="1A1A1A"/>
                 </a:solidFill>
                 <a:latin typeface="Microsoft JhengHei"/>
               </a:rPr>
@@ -19395,7 +19301,7 @@
             <a:r>
               <a:rPr sz="1400" b="0">
                 <a:solidFill>
-                  <a:srgbClr val="1C1917"/>
+                  <a:srgbClr val="1A1A1A"/>
                 </a:solidFill>
                 <a:latin typeface="Microsoft JhengHei"/>
               </a:rPr>
@@ -19411,7 +19317,7 @@
             <a:r>
               <a:rPr sz="1400" b="0">
                 <a:solidFill>
-                  <a:srgbClr val="1C1917"/>
+                  <a:srgbClr val="1A1A1A"/>
                 </a:solidFill>
                 <a:latin typeface="Microsoft JhengHei"/>
               </a:rPr>
@@ -19422,7 +19328,7 @@
       </p:sp>
       <p:sp>
         <p:nvSpPr>
-          <p:cNvPr id="11" name="Rounded Rectangle 10"/>
+          <p:cNvPr id="11" name="Rectangle 10"/>
           <p:cNvSpPr/>
           <p:nvPr/>
         </p:nvSpPr>
@@ -19431,17 +19337,15 @@
             <a:off x="5852160" y="1691640"/>
             <a:ext cx="3017520" cy="2743200"/>
           </a:xfrm>
-          <a:prstGeom prst="roundRect">
-            <a:avLst>
-              <a:gd name="adj" fmla="val 5000"/>
-            </a:avLst>
+          <a:prstGeom prst="rect">
+            <a:avLst/>
           </a:prstGeom>
           <a:solidFill>
             <a:srgbClr val="FBEEEE"/>
           </a:solidFill>
           <a:ln w="9525">
             <a:solidFill>
-              <a:srgbClr val="E7E5E0"/>
+              <a:srgbClr val="C8C2B7"/>
             </a:solidFill>
           </a:ln>
         </p:spPr>
@@ -19482,7 +19386,7 @@
             <a:avLst/>
           </a:prstGeom>
           <a:solidFill>
-            <a:srgbClr val="DC2626"/>
+            <a:srgbClr val="C0392B"/>
           </a:solidFill>
           <a:ln>
             <a:noFill/>
@@ -19540,7 +19444,7 @@
             <a:r>
               <a:rPr sz="1200" b="1">
                 <a:solidFill>
-                  <a:srgbClr val="1C1917"/>
+                  <a:srgbClr val="1A1A1A"/>
                 </a:solidFill>
                 <a:latin typeface="Microsoft JhengHei"/>
               </a:rPr>
@@ -19579,7 +19483,7 @@
             <a:r>
               <a:rPr sz="1200" b="0">
                 <a:solidFill>
-                  <a:srgbClr val="1C1917"/>
+                  <a:srgbClr val="1A1A1A"/>
                 </a:solidFill>
                 <a:latin typeface="Microsoft JhengHei"/>
               </a:rPr>
@@ -19595,7 +19499,7 @@
             <a:r>
               <a:rPr sz="1200" b="0">
                 <a:solidFill>
-                  <a:srgbClr val="1C1917"/>
+                  <a:srgbClr val="1A1A1A"/>
                 </a:solidFill>
                 <a:latin typeface="Microsoft JhengHei"/>
               </a:rPr>
@@ -19611,7 +19515,7 @@
             <a:r>
               <a:rPr sz="1200" b="0">
                 <a:solidFill>
-                  <a:srgbClr val="1C1917"/>
+                  <a:srgbClr val="1A1A1A"/>
                 </a:solidFill>
                 <a:latin typeface="Microsoft JhengHei"/>
               </a:rPr>
@@ -19627,7 +19531,7 @@
             <a:r>
               <a:rPr sz="1200" b="0">
                 <a:solidFill>
-                  <a:srgbClr val="1C1917"/>
+                  <a:srgbClr val="1A1A1A"/>
                 </a:solidFill>
                 <a:latin typeface="Microsoft JhengHei"/>
               </a:rPr>
@@ -19643,7 +19547,7 @@
             <a:r>
               <a:rPr sz="1200" b="0">
                 <a:solidFill>
-                  <a:srgbClr val="1C1917"/>
+                  <a:srgbClr val="1A1A1A"/>
                 </a:solidFill>
                 <a:latin typeface="Microsoft JhengHei"/>
               </a:rPr>
@@ -19659,7 +19563,7 @@
             <a:r>
               <a:rPr sz="1200" b="0">
                 <a:solidFill>
-                  <a:srgbClr val="1C1917"/>
+                  <a:srgbClr val="1A1A1A"/>
                 </a:solidFill>
                 <a:latin typeface="Microsoft JhengHei"/>
               </a:rPr>
@@ -19675,7 +19579,7 @@
             <a:r>
               <a:rPr sz="1200" b="0">
                 <a:solidFill>
-                  <a:srgbClr val="1C1917"/>
+                  <a:srgbClr val="1A1A1A"/>
                 </a:solidFill>
                 <a:latin typeface="Microsoft JhengHei"/>
               </a:rPr>
@@ -19691,7 +19595,7 @@
             <a:r>
               <a:rPr sz="1200" b="0">
                 <a:solidFill>
-                  <a:srgbClr val="1C1917"/>
+                  <a:srgbClr val="1A1A1A"/>
                 </a:solidFill>
                 <a:latin typeface="Microsoft JhengHei"/>
               </a:rPr>
@@ -19707,7 +19611,7 @@
             <a:r>
               <a:rPr sz="1200" b="0">
                 <a:solidFill>
-                  <a:srgbClr val="1C1917"/>
+                  <a:srgbClr val="1A1A1A"/>
                 </a:solidFill>
                 <a:latin typeface="Microsoft JhengHei"/>
               </a:rPr>
@@ -19718,7 +19622,7 @@
       </p:sp>
       <p:sp>
         <p:nvSpPr>
-          <p:cNvPr id="15" name="Rounded Rectangle 14"/>
+          <p:cNvPr id="15" name="Rectangle 14"/>
           <p:cNvSpPr/>
           <p:nvPr/>
         </p:nvSpPr>
@@ -19727,17 +19631,15 @@
             <a:off x="9006840" y="1691640"/>
             <a:ext cx="3017520" cy="2743200"/>
           </a:xfrm>
-          <a:prstGeom prst="roundRect">
-            <a:avLst>
-              <a:gd name="adj" fmla="val 5000"/>
-            </a:avLst>
+          <a:prstGeom prst="rect">
+            <a:avLst/>
           </a:prstGeom>
           <a:solidFill>
             <a:srgbClr val="EEF6E8"/>
           </a:solidFill>
           <a:ln w="9525">
             <a:solidFill>
-              <a:srgbClr val="E7E5E0"/>
+              <a:srgbClr val="C8C2B7"/>
             </a:solidFill>
           </a:ln>
         </p:spPr>
@@ -19836,7 +19738,7 @@
             <a:r>
               <a:rPr sz="1200" b="1">
                 <a:solidFill>
-                  <a:srgbClr val="1C1917"/>
+                  <a:srgbClr val="1A1A1A"/>
                 </a:solidFill>
                 <a:latin typeface="Microsoft JhengHei"/>
               </a:rPr>
@@ -19875,7 +19777,7 @@
             <a:r>
               <a:rPr sz="1200" b="0">
                 <a:solidFill>
-                  <a:srgbClr val="1C1917"/>
+                  <a:srgbClr val="1A1A1A"/>
                 </a:solidFill>
                 <a:latin typeface="Microsoft JhengHei"/>
               </a:rPr>
@@ -19891,7 +19793,7 @@
             <a:r>
               <a:rPr sz="1200" b="0">
                 <a:solidFill>
-                  <a:srgbClr val="1C1917"/>
+                  <a:srgbClr val="1A1A1A"/>
                 </a:solidFill>
                 <a:latin typeface="Microsoft JhengHei"/>
               </a:rPr>
@@ -19907,7 +19809,7 @@
             <a:r>
               <a:rPr sz="1200" b="0">
                 <a:solidFill>
-                  <a:srgbClr val="1C1917"/>
+                  <a:srgbClr val="1A1A1A"/>
                 </a:solidFill>
                 <a:latin typeface="Microsoft JhengHei"/>
               </a:rPr>
@@ -19923,7 +19825,7 @@
             <a:r>
               <a:rPr sz="1200" b="0">
                 <a:solidFill>
-                  <a:srgbClr val="1C1917"/>
+                  <a:srgbClr val="1A1A1A"/>
                 </a:solidFill>
                 <a:latin typeface="Microsoft JhengHei"/>
               </a:rPr>
@@ -19939,7 +19841,7 @@
             <a:r>
               <a:rPr sz="1200" b="0">
                 <a:solidFill>
-                  <a:srgbClr val="1C1917"/>
+                  <a:srgbClr val="1A1A1A"/>
                 </a:solidFill>
                 <a:latin typeface="Microsoft JhengHei"/>
               </a:rPr>
@@ -19955,7 +19857,7 @@
             <a:r>
               <a:rPr sz="1200" b="0">
                 <a:solidFill>
-                  <a:srgbClr val="1C1917"/>
+                  <a:srgbClr val="1A1A1A"/>
                 </a:solidFill>
                 <a:latin typeface="Microsoft JhengHei"/>
               </a:rPr>
@@ -19971,7 +19873,7 @@
             <a:r>
               <a:rPr sz="1200" b="0">
                 <a:solidFill>
-                  <a:srgbClr val="1C1917"/>
+                  <a:srgbClr val="1A1A1A"/>
                 </a:solidFill>
                 <a:latin typeface="Microsoft JhengHei"/>
               </a:rPr>
@@ -19987,7 +19889,7 @@
             <a:r>
               <a:rPr sz="1200" b="0">
                 <a:solidFill>
-                  <a:srgbClr val="1C1917"/>
+                  <a:srgbClr val="1A1A1A"/>
                 </a:solidFill>
                 <a:latin typeface="Microsoft JhengHei"/>
               </a:rPr>
@@ -20003,7 +19905,7 @@
             <a:r>
               <a:rPr sz="1200" b="0">
                 <a:solidFill>
-                  <a:srgbClr val="1C1917"/>
+                  <a:srgbClr val="1A1A1A"/>
                 </a:solidFill>
                 <a:latin typeface="Microsoft JhengHei"/>
               </a:rPr>
@@ -20042,7 +19944,7 @@
             <a:r>
               <a:rPr sz="1300" b="1">
                 <a:solidFill>
-                  <a:srgbClr val="1C1917"/>
+                  <a:srgbClr val="1A1A1A"/>
                 </a:solidFill>
                 <a:latin typeface="Microsoft JhengHei"/>
               </a:rPr>
@@ -20053,7 +19955,7 @@
       </p:sp>
       <p:sp>
         <p:nvSpPr>
-          <p:cNvPr id="20" name="Rounded Rectangle 19"/>
+          <p:cNvPr id="20" name="Rectangle 19"/>
           <p:cNvSpPr/>
           <p:nvPr/>
         </p:nvSpPr>
@@ -20062,15 +19964,13 @@
             <a:off x="548640" y="4983480"/>
             <a:ext cx="3822191" cy="1554480"/>
           </a:xfrm>
-          <a:prstGeom prst="roundRect">
-            <a:avLst>
-              <a:gd name="adj" fmla="val 8000"/>
-            </a:avLst>
+          <a:prstGeom prst="rect">
+            <a:avLst/>
           </a:prstGeom>
           <a:noFill/>
           <a:ln w="9525">
             <a:solidFill>
-              <a:srgbClr val="E7E5E0"/>
+              <a:srgbClr val="C8C2B7"/>
             </a:solidFill>
           </a:ln>
         </p:spPr>
@@ -20111,7 +20011,7 @@
             <a:avLst/>
           </a:prstGeom>
           <a:solidFill>
-            <a:srgbClr val="1C1917"/>
+            <a:srgbClr val="1A1A1A"/>
           </a:solidFill>
           <a:ln>
             <a:noFill/>
@@ -20169,7 +20069,7 @@
             <a:r>
               <a:rPr sz="1100" b="1">
                 <a:solidFill>
-                  <a:srgbClr val="1C1917"/>
+                  <a:srgbClr val="1A1A1A"/>
                 </a:solidFill>
                 <a:latin typeface="Microsoft JhengHei"/>
               </a:rPr>
@@ -20208,7 +20108,7 @@
             <a:r>
               <a:rPr sz="1100" b="1">
                 <a:solidFill>
-                  <a:srgbClr val="1C1917"/>
+                  <a:srgbClr val="1A1A1A"/>
                 </a:solidFill>
                 <a:latin typeface="Microsoft JhengHei"/>
               </a:rPr>
@@ -20247,7 +20147,7 @@
             <a:r>
               <a:rPr sz="1000" b="0">
                 <a:solidFill>
-                  <a:srgbClr val="78716C"/>
+                  <a:srgbClr val="6B6B6B"/>
                 </a:solidFill>
                 <a:latin typeface="Microsoft JhengHei"/>
               </a:rPr>
@@ -20263,7 +20163,7 @@
             <a:r>
               <a:rPr sz="1000" b="0">
                 <a:solidFill>
-                  <a:srgbClr val="78716C"/>
+                  <a:srgbClr val="6B6B6B"/>
                 </a:solidFill>
                 <a:latin typeface="Microsoft JhengHei"/>
               </a:rPr>
@@ -20279,7 +20179,7 @@
             <a:r>
               <a:rPr sz="1000" b="0">
                 <a:solidFill>
-                  <a:srgbClr val="78716C"/>
+                  <a:srgbClr val="6B6B6B"/>
                 </a:solidFill>
                 <a:latin typeface="Microsoft JhengHei"/>
               </a:rPr>
@@ -20290,7 +20190,7 @@
       </p:sp>
       <p:sp>
         <p:nvSpPr>
-          <p:cNvPr id="25" name="Rounded Rectangle 24"/>
+          <p:cNvPr id="25" name="Rectangle 24"/>
           <p:cNvSpPr/>
           <p:nvPr/>
         </p:nvSpPr>
@@ -20299,15 +20199,13 @@
             <a:off x="4507991" y="4983480"/>
             <a:ext cx="3822191" cy="1554480"/>
           </a:xfrm>
-          <a:prstGeom prst="roundRect">
-            <a:avLst>
-              <a:gd name="adj" fmla="val 8000"/>
-            </a:avLst>
+          <a:prstGeom prst="rect">
+            <a:avLst/>
           </a:prstGeom>
           <a:noFill/>
           <a:ln w="9525">
             <a:solidFill>
-              <a:srgbClr val="E7E5E0"/>
+              <a:srgbClr val="C8C2B7"/>
             </a:solidFill>
           </a:ln>
         </p:spPr>
@@ -20348,7 +20246,7 @@
             <a:avLst/>
           </a:prstGeom>
           <a:solidFill>
-            <a:srgbClr val="1C1917"/>
+            <a:srgbClr val="1A1A1A"/>
           </a:solidFill>
           <a:ln>
             <a:noFill/>
@@ -20406,7 +20304,7 @@
             <a:r>
               <a:rPr sz="1100" b="1">
                 <a:solidFill>
-                  <a:srgbClr val="1C1917"/>
+                  <a:srgbClr val="1A1A1A"/>
                 </a:solidFill>
                 <a:latin typeface="Microsoft JhengHei"/>
               </a:rPr>
@@ -20445,7 +20343,7 @@
             <a:r>
               <a:rPr sz="1100" b="1">
                 <a:solidFill>
-                  <a:srgbClr val="1C1917"/>
+                  <a:srgbClr val="1A1A1A"/>
                 </a:solidFill>
                 <a:latin typeface="Microsoft JhengHei"/>
               </a:rPr>
@@ -20484,7 +20382,7 @@
             <a:r>
               <a:rPr sz="1000" b="0">
                 <a:solidFill>
-                  <a:srgbClr val="78716C"/>
+                  <a:srgbClr val="6B6B6B"/>
                 </a:solidFill>
                 <a:latin typeface="Microsoft JhengHei"/>
               </a:rPr>
@@ -20500,7 +20398,7 @@
             <a:r>
               <a:rPr sz="1000" b="0">
                 <a:solidFill>
-                  <a:srgbClr val="78716C"/>
+                  <a:srgbClr val="6B6B6B"/>
                 </a:solidFill>
                 <a:latin typeface="Microsoft JhengHei"/>
               </a:rPr>
@@ -20516,7 +20414,7 @@
             <a:r>
               <a:rPr sz="1000" b="0">
                 <a:solidFill>
-                  <a:srgbClr val="78716C"/>
+                  <a:srgbClr val="6B6B6B"/>
                 </a:solidFill>
                 <a:latin typeface="Microsoft JhengHei"/>
               </a:rPr>
@@ -20527,7 +20425,7 @@
       </p:sp>
       <p:sp>
         <p:nvSpPr>
-          <p:cNvPr id="30" name="Rounded Rectangle 29"/>
+          <p:cNvPr id="30" name="Rectangle 29"/>
           <p:cNvSpPr/>
           <p:nvPr/>
         </p:nvSpPr>
@@ -20536,15 +20434,13 @@
             <a:off x="8467342" y="4983480"/>
             <a:ext cx="3822191" cy="1554480"/>
           </a:xfrm>
-          <a:prstGeom prst="roundRect">
-            <a:avLst>
-              <a:gd name="adj" fmla="val 8000"/>
-            </a:avLst>
+          <a:prstGeom prst="rect">
+            <a:avLst/>
           </a:prstGeom>
           <a:noFill/>
           <a:ln w="9525">
             <a:solidFill>
-              <a:srgbClr val="E7E5E0"/>
+              <a:srgbClr val="C8C2B7"/>
             </a:solidFill>
           </a:ln>
         </p:spPr>
@@ -20585,7 +20481,7 @@
             <a:avLst/>
           </a:prstGeom>
           <a:solidFill>
-            <a:srgbClr val="1C1917"/>
+            <a:srgbClr val="1A1A1A"/>
           </a:solidFill>
           <a:ln>
             <a:noFill/>
@@ -20643,7 +20539,7 @@
             <a:r>
               <a:rPr sz="1100" b="1">
                 <a:solidFill>
-                  <a:srgbClr val="1C1917"/>
+                  <a:srgbClr val="1A1A1A"/>
                 </a:solidFill>
                 <a:latin typeface="Microsoft JhengHei"/>
               </a:rPr>
@@ -20682,7 +20578,7 @@
             <a:r>
               <a:rPr sz="1100" b="1">
                 <a:solidFill>
-                  <a:srgbClr val="1C1917"/>
+                  <a:srgbClr val="1A1A1A"/>
                 </a:solidFill>
                 <a:latin typeface="Microsoft JhengHei"/>
               </a:rPr>
@@ -20721,7 +20617,7 @@
             <a:r>
               <a:rPr sz="1000" b="0">
                 <a:solidFill>
-                  <a:srgbClr val="78716C"/>
+                  <a:srgbClr val="6B6B6B"/>
                 </a:solidFill>
                 <a:latin typeface="Microsoft JhengHei"/>
               </a:rPr>
@@ -20737,7 +20633,7 @@
             <a:r>
               <a:rPr sz="1000" b="0">
                 <a:solidFill>
-                  <a:srgbClr val="78716C"/>
+                  <a:srgbClr val="6B6B6B"/>
                 </a:solidFill>
                 <a:latin typeface="Microsoft JhengHei"/>
               </a:rPr>
@@ -20753,7 +20649,7 @@
             <a:r>
               <a:rPr sz="1000" b="0">
                 <a:solidFill>
-                  <a:srgbClr val="78716C"/>
+                  <a:srgbClr val="6B6B6B"/>
                 </a:solidFill>
                 <a:latin typeface="Microsoft JhengHei"/>
               </a:rPr>
@@ -20792,7 +20688,7 @@
             <a:r>
               <a:rPr sz="900" b="0">
                 <a:solidFill>
-                  <a:srgbClr val="78716C"/>
+                  <a:srgbClr val="6B6B6B"/>
                 </a:solidFill>
                 <a:latin typeface="Microsoft JhengHei"/>
               </a:rPr>
@@ -20831,7 +20727,7 @@
             <a:r>
               <a:rPr sz="900" b="0">
                 <a:solidFill>
-                  <a:srgbClr val="78716C"/>
+                  <a:srgbClr val="6B6B6B"/>
                 </a:solidFill>
                 <a:latin typeface="Microsoft JhengHei"/>
               </a:rPr>
@@ -20873,7 +20769,7 @@
             <a:avLst/>
           </a:prstGeom>
           <a:solidFill>
-            <a:srgbClr val="FAFAF7"/>
+            <a:srgbClr val="F4F1ED"/>
           </a:solidFill>
           <a:ln>
             <a:noFill/>
@@ -20916,7 +20812,7 @@
             <a:avLst/>
           </a:prstGeom>
           <a:solidFill>
-            <a:srgbClr val="E7E5E0"/>
+            <a:srgbClr val="C8C2B7"/>
           </a:solidFill>
           <a:ln>
             <a:noFill/>
@@ -20974,7 +20870,7 @@
             <a:r>
               <a:rPr sz="1400" b="1">
                 <a:solidFill>
-                  <a:srgbClr val="78716C"/>
+                  <a:srgbClr val="6B6B6B"/>
                 </a:solidFill>
                 <a:latin typeface="Microsoft JhengHei"/>
               </a:rPr>
@@ -21013,7 +20909,7 @@
             <a:r>
               <a:rPr sz="3400" b="1">
                 <a:solidFill>
-                  <a:srgbClr val="1C1917"/>
+                  <a:srgbClr val="1A1A1A"/>
                 </a:solidFill>
                 <a:latin typeface="Microsoft JhengHei"/>
               </a:rPr>
@@ -21052,7 +20948,7 @@
             <a:r>
               <a:rPr sz="1400" b="0">
                 <a:solidFill>
-                  <a:srgbClr val="78716C"/>
+                  <a:srgbClr val="6B6B6B"/>
                 </a:solidFill>
                 <a:latin typeface="Microsoft JhengHei"/>
               </a:rPr>
@@ -21063,7 +20959,7 @@
       </p:sp>
       <p:sp>
         <p:nvSpPr>
-          <p:cNvPr id="7" name="Rounded Rectangle 6"/>
+          <p:cNvPr id="7" name="Rectangle 6"/>
           <p:cNvSpPr/>
           <p:nvPr/>
         </p:nvSpPr>
@@ -21072,15 +20968,13 @@
             <a:off x="504291" y="2194560"/>
             <a:ext cx="2148840" cy="3703320"/>
           </a:xfrm>
-          <a:prstGeom prst="roundRect">
-            <a:avLst>
-              <a:gd name="adj" fmla="val 6000"/>
-            </a:avLst>
+          <a:prstGeom prst="rect">
+            <a:avLst/>
           </a:prstGeom>
           <a:noFill/>
           <a:ln w="9525">
             <a:solidFill>
-              <a:srgbClr val="E7E5E0"/>
+              <a:srgbClr val="C8C2B7"/>
             </a:solidFill>
           </a:ln>
         </p:spPr>
@@ -21136,7 +21030,7 @@
             <a:r>
               <a:rPr sz="3000" b="1">
                 <a:solidFill>
-                  <a:srgbClr val="D97706"/>
+                  <a:srgbClr val="E67E22"/>
                 </a:solidFill>
                 <a:latin typeface="Microsoft JhengHei"/>
               </a:rPr>
@@ -21175,7 +21069,7 @@
             <a:r>
               <a:rPr sz="1800" b="1">
                 <a:solidFill>
-                  <a:srgbClr val="1C1917"/>
+                  <a:srgbClr val="1A1A1A"/>
                 </a:solidFill>
                 <a:latin typeface="Microsoft JhengHei"/>
               </a:rPr>
@@ -21214,7 +21108,7 @@
             <a:r>
               <a:rPr sz="1000" b="0">
                 <a:solidFill>
-                  <a:srgbClr val="78716C"/>
+                  <a:srgbClr val="6B6B6B"/>
                 </a:solidFill>
                 <a:latin typeface="Microsoft JhengHei"/>
               </a:rPr>
@@ -21239,7 +21133,7 @@
           </a:prstGeom>
           <a:ln w="9525">
             <a:solidFill>
-              <a:srgbClr val="E7E5E0"/>
+              <a:srgbClr val="C8C2B7"/>
             </a:solidFill>
           </a:ln>
         </p:spPr>
@@ -21288,7 +21182,7 @@
             <a:r>
               <a:rPr sz="1100" b="1">
                 <a:solidFill>
-                  <a:srgbClr val="1C1917"/>
+                  <a:srgbClr val="1A1A1A"/>
                 </a:solidFill>
                 <a:latin typeface="Microsoft JhengHei"/>
               </a:rPr>
@@ -21304,7 +21198,7 @@
             <a:r>
               <a:rPr sz="1100" b="1">
                 <a:solidFill>
-                  <a:srgbClr val="1C1917"/>
+                  <a:srgbClr val="1A1A1A"/>
                 </a:solidFill>
                 <a:latin typeface="Microsoft JhengHei"/>
               </a:rPr>
@@ -21343,7 +21237,7 @@
             <a:r>
               <a:rPr sz="1000" b="0">
                 <a:solidFill>
-                  <a:srgbClr val="D97706"/>
+                  <a:srgbClr val="E67E22"/>
                 </a:solidFill>
                 <a:latin typeface="Microsoft JhengHei"/>
               </a:rPr>
@@ -21359,7 +21253,7 @@
             <a:r>
               <a:rPr sz="1000" b="0">
                 <a:solidFill>
-                  <a:srgbClr val="D97706"/>
+                  <a:srgbClr val="E67E22"/>
                 </a:solidFill>
                 <a:latin typeface="Microsoft JhengHei"/>
               </a:rPr>
@@ -21383,7 +21277,7 @@
             <a:avLst/>
           </a:prstGeom>
           <a:solidFill>
-            <a:srgbClr val="E7E5E0"/>
+            <a:srgbClr val="C8C2B7"/>
           </a:solidFill>
           <a:ln>
             <a:noFill/>
@@ -21413,7 +21307,7 @@
       </p:sp>
       <p:sp>
         <p:nvSpPr>
-          <p:cNvPr id="15" name="Rounded Rectangle 14"/>
+          <p:cNvPr id="15" name="Rectangle 14"/>
           <p:cNvSpPr/>
           <p:nvPr/>
         </p:nvSpPr>
@@ -21422,15 +21316,13 @@
             <a:off x="2762859" y="2194560"/>
             <a:ext cx="2148840" cy="3703320"/>
           </a:xfrm>
-          <a:prstGeom prst="roundRect">
-            <a:avLst>
-              <a:gd name="adj" fmla="val 6000"/>
-            </a:avLst>
+          <a:prstGeom prst="rect">
+            <a:avLst/>
           </a:prstGeom>
           <a:noFill/>
           <a:ln w="9525">
             <a:solidFill>
-              <a:srgbClr val="E7E5E0"/>
+              <a:srgbClr val="C8C2B7"/>
             </a:solidFill>
           </a:ln>
         </p:spPr>
@@ -21486,7 +21378,7 @@
             <a:r>
               <a:rPr sz="3000" b="1">
                 <a:solidFill>
-                  <a:srgbClr val="D97706"/>
+                  <a:srgbClr val="E67E22"/>
                 </a:solidFill>
                 <a:latin typeface="Microsoft JhengHei"/>
               </a:rPr>
@@ -21525,7 +21417,7 @@
             <a:r>
               <a:rPr sz="1800" b="1">
                 <a:solidFill>
-                  <a:srgbClr val="1C1917"/>
+                  <a:srgbClr val="1A1A1A"/>
                 </a:solidFill>
                 <a:latin typeface="Microsoft JhengHei"/>
               </a:rPr>
@@ -21564,7 +21456,7 @@
             <a:r>
               <a:rPr sz="1000" b="0">
                 <a:solidFill>
-                  <a:srgbClr val="78716C"/>
+                  <a:srgbClr val="6B6B6B"/>
                 </a:solidFill>
                 <a:latin typeface="Microsoft JhengHei"/>
               </a:rPr>
@@ -21589,7 +21481,7 @@
           </a:prstGeom>
           <a:ln w="9525">
             <a:solidFill>
-              <a:srgbClr val="E7E5E0"/>
+              <a:srgbClr val="C8C2B7"/>
             </a:solidFill>
           </a:ln>
         </p:spPr>
@@ -21638,7 +21530,7 @@
             <a:r>
               <a:rPr sz="1100" b="1">
                 <a:solidFill>
-                  <a:srgbClr val="1C1917"/>
+                  <a:srgbClr val="1A1A1A"/>
                 </a:solidFill>
                 <a:latin typeface="Microsoft JhengHei"/>
               </a:rPr>
@@ -21654,7 +21546,7 @@
             <a:r>
               <a:rPr sz="1100" b="1">
                 <a:solidFill>
-                  <a:srgbClr val="1C1917"/>
+                  <a:srgbClr val="1A1A1A"/>
                 </a:solidFill>
                 <a:latin typeface="Microsoft JhengHei"/>
               </a:rPr>
@@ -21693,7 +21585,7 @@
             <a:r>
               <a:rPr sz="1000" b="0">
                 <a:solidFill>
-                  <a:srgbClr val="D97706"/>
+                  <a:srgbClr val="E67E22"/>
                 </a:solidFill>
                 <a:latin typeface="Microsoft JhengHei"/>
               </a:rPr>
@@ -21709,7 +21601,7 @@
             <a:r>
               <a:rPr sz="1000" b="0">
                 <a:solidFill>
-                  <a:srgbClr val="D97706"/>
+                  <a:srgbClr val="E67E22"/>
                 </a:solidFill>
                 <a:latin typeface="Microsoft JhengHei"/>
               </a:rPr>
@@ -21733,7 +21625,7 @@
             <a:avLst/>
           </a:prstGeom>
           <a:solidFill>
-            <a:srgbClr val="E7E5E0"/>
+            <a:srgbClr val="C8C2B7"/>
           </a:solidFill>
           <a:ln>
             <a:noFill/>
@@ -21763,7 +21655,7 @@
       </p:sp>
       <p:sp>
         <p:nvSpPr>
-          <p:cNvPr id="23" name="Rounded Rectangle 22"/>
+          <p:cNvPr id="23" name="Rectangle 22"/>
           <p:cNvSpPr/>
           <p:nvPr/>
         </p:nvSpPr>
@@ -21772,15 +21664,13 @@
             <a:off x="5021427" y="2194560"/>
             <a:ext cx="2148840" cy="3703320"/>
           </a:xfrm>
-          <a:prstGeom prst="roundRect">
-            <a:avLst>
-              <a:gd name="adj" fmla="val 6000"/>
-            </a:avLst>
+          <a:prstGeom prst="rect">
+            <a:avLst/>
           </a:prstGeom>
           <a:noFill/>
           <a:ln w="9525">
             <a:solidFill>
-              <a:srgbClr val="E7E5E0"/>
+              <a:srgbClr val="C8C2B7"/>
             </a:solidFill>
           </a:ln>
         </p:spPr>
@@ -21836,7 +21726,7 @@
             <a:r>
               <a:rPr sz="3000" b="1">
                 <a:solidFill>
-                  <a:srgbClr val="D97706"/>
+                  <a:srgbClr val="E67E22"/>
                 </a:solidFill>
                 <a:latin typeface="Microsoft JhengHei"/>
               </a:rPr>
@@ -21875,7 +21765,7 @@
             <a:r>
               <a:rPr sz="1800" b="1">
                 <a:solidFill>
-                  <a:srgbClr val="1C1917"/>
+                  <a:srgbClr val="1A1A1A"/>
                 </a:solidFill>
                 <a:latin typeface="Microsoft JhengHei"/>
               </a:rPr>
@@ -21914,7 +21804,7 @@
             <a:r>
               <a:rPr sz="1000" b="0">
                 <a:solidFill>
-                  <a:srgbClr val="78716C"/>
+                  <a:srgbClr val="6B6B6B"/>
                 </a:solidFill>
                 <a:latin typeface="Microsoft JhengHei"/>
               </a:rPr>
@@ -21939,7 +21829,7 @@
           </a:prstGeom>
           <a:ln w="9525">
             <a:solidFill>
-              <a:srgbClr val="E7E5E0"/>
+              <a:srgbClr val="C8C2B7"/>
             </a:solidFill>
           </a:ln>
         </p:spPr>
@@ -21988,7 +21878,7 @@
             <a:r>
               <a:rPr sz="1100" b="1">
                 <a:solidFill>
-                  <a:srgbClr val="1C1917"/>
+                  <a:srgbClr val="1A1A1A"/>
                 </a:solidFill>
                 <a:latin typeface="Microsoft JhengHei"/>
               </a:rPr>
@@ -22004,7 +21894,7 @@
             <a:r>
               <a:rPr sz="1100" b="1">
                 <a:solidFill>
-                  <a:srgbClr val="1C1917"/>
+                  <a:srgbClr val="1A1A1A"/>
                 </a:solidFill>
                 <a:latin typeface="Microsoft JhengHei"/>
               </a:rPr>
@@ -22043,7 +21933,7 @@
             <a:r>
               <a:rPr sz="1000" b="0">
                 <a:solidFill>
-                  <a:srgbClr val="D97706"/>
+                  <a:srgbClr val="E67E22"/>
                 </a:solidFill>
                 <a:latin typeface="Microsoft JhengHei"/>
               </a:rPr>
@@ -22059,7 +21949,7 @@
             <a:r>
               <a:rPr sz="1000" b="0">
                 <a:solidFill>
-                  <a:srgbClr val="D97706"/>
+                  <a:srgbClr val="E67E22"/>
                 </a:solidFill>
                 <a:latin typeface="Microsoft JhengHei"/>
               </a:rPr>
@@ -22083,7 +21973,7 @@
             <a:avLst/>
           </a:prstGeom>
           <a:solidFill>
-            <a:srgbClr val="E7E5E0"/>
+            <a:srgbClr val="C8C2B7"/>
           </a:solidFill>
           <a:ln>
             <a:noFill/>
@@ -22113,7 +22003,7 @@
       </p:sp>
       <p:sp>
         <p:nvSpPr>
-          <p:cNvPr id="31" name="Rounded Rectangle 30"/>
+          <p:cNvPr id="31" name="Rectangle 30"/>
           <p:cNvSpPr/>
           <p:nvPr/>
         </p:nvSpPr>
@@ -22122,15 +22012,13 @@
             <a:off x="7279995" y="2194560"/>
             <a:ext cx="2148840" cy="3703320"/>
           </a:xfrm>
-          <a:prstGeom prst="roundRect">
-            <a:avLst>
-              <a:gd name="adj" fmla="val 6000"/>
-            </a:avLst>
+          <a:prstGeom prst="rect">
+            <a:avLst/>
           </a:prstGeom>
           <a:noFill/>
           <a:ln w="9525">
             <a:solidFill>
-              <a:srgbClr val="E7E5E0"/>
+              <a:srgbClr val="C8C2B7"/>
             </a:solidFill>
           </a:ln>
         </p:spPr>
@@ -22186,7 +22074,7 @@
             <a:r>
               <a:rPr sz="3000" b="1">
                 <a:solidFill>
-                  <a:srgbClr val="D97706"/>
+                  <a:srgbClr val="E67E22"/>
                 </a:solidFill>
                 <a:latin typeface="Microsoft JhengHei"/>
               </a:rPr>
@@ -22225,7 +22113,7 @@
             <a:r>
               <a:rPr sz="1800" b="1">
                 <a:solidFill>
-                  <a:srgbClr val="1C1917"/>
+                  <a:srgbClr val="1A1A1A"/>
                 </a:solidFill>
                 <a:latin typeface="Microsoft JhengHei"/>
               </a:rPr>
@@ -22264,7 +22152,7 @@
             <a:r>
               <a:rPr sz="1000" b="0">
                 <a:solidFill>
-                  <a:srgbClr val="78716C"/>
+                  <a:srgbClr val="6B6B6B"/>
                 </a:solidFill>
                 <a:latin typeface="Microsoft JhengHei"/>
               </a:rPr>
@@ -22289,7 +22177,7 @@
           </a:prstGeom>
           <a:ln w="9525">
             <a:solidFill>
-              <a:srgbClr val="E7E5E0"/>
+              <a:srgbClr val="C8C2B7"/>
             </a:solidFill>
           </a:ln>
         </p:spPr>
@@ -22338,7 +22226,7 @@
             <a:r>
               <a:rPr sz="1100" b="1">
                 <a:solidFill>
-                  <a:srgbClr val="1C1917"/>
+                  <a:srgbClr val="1A1A1A"/>
                 </a:solidFill>
                 <a:latin typeface="Microsoft JhengHei"/>
               </a:rPr>
@@ -22354,7 +22242,7 @@
             <a:r>
               <a:rPr sz="1100" b="1">
                 <a:solidFill>
-                  <a:srgbClr val="1C1917"/>
+                  <a:srgbClr val="1A1A1A"/>
                 </a:solidFill>
                 <a:latin typeface="Microsoft JhengHei"/>
               </a:rPr>
@@ -22393,7 +22281,7 @@
             <a:r>
               <a:rPr sz="1000" b="0">
                 <a:solidFill>
-                  <a:srgbClr val="D97706"/>
+                  <a:srgbClr val="E67E22"/>
                 </a:solidFill>
                 <a:latin typeface="Microsoft JhengHei"/>
               </a:rPr>
@@ -22409,7 +22297,7 @@
             <a:r>
               <a:rPr sz="1000" b="0">
                 <a:solidFill>
-                  <a:srgbClr val="D97706"/>
+                  <a:srgbClr val="E67E22"/>
                 </a:solidFill>
                 <a:latin typeface="Microsoft JhengHei"/>
               </a:rPr>
@@ -22433,7 +22321,7 @@
             <a:avLst/>
           </a:prstGeom>
           <a:solidFill>
-            <a:srgbClr val="E7E5E0"/>
+            <a:srgbClr val="C8C2B7"/>
           </a:solidFill>
           <a:ln>
             <a:noFill/>
@@ -22463,7 +22351,7 @@
       </p:sp>
       <p:sp>
         <p:nvSpPr>
-          <p:cNvPr id="39" name="Rounded Rectangle 38"/>
+          <p:cNvPr id="39" name="Rectangle 38"/>
           <p:cNvSpPr/>
           <p:nvPr/>
         </p:nvSpPr>
@@ -22472,15 +22360,13 @@
             <a:off x="9538563" y="2194560"/>
             <a:ext cx="2148840" cy="3703320"/>
           </a:xfrm>
-          <a:prstGeom prst="roundRect">
-            <a:avLst>
-              <a:gd name="adj" fmla="val 6000"/>
-            </a:avLst>
+          <a:prstGeom prst="rect">
+            <a:avLst/>
           </a:prstGeom>
           <a:noFill/>
           <a:ln w="9525">
             <a:solidFill>
-              <a:srgbClr val="E7E5E0"/>
+              <a:srgbClr val="C8C2B7"/>
             </a:solidFill>
           </a:ln>
         </p:spPr>
@@ -22536,7 +22422,7 @@
             <a:r>
               <a:rPr sz="3000" b="1">
                 <a:solidFill>
-                  <a:srgbClr val="D97706"/>
+                  <a:srgbClr val="E67E22"/>
                 </a:solidFill>
                 <a:latin typeface="Microsoft JhengHei"/>
               </a:rPr>
@@ -22575,7 +22461,7 @@
             <a:r>
               <a:rPr sz="1800" b="1">
                 <a:solidFill>
-                  <a:srgbClr val="1C1917"/>
+                  <a:srgbClr val="1A1A1A"/>
                 </a:solidFill>
                 <a:latin typeface="Microsoft JhengHei"/>
               </a:rPr>
@@ -22614,7 +22500,7 @@
             <a:r>
               <a:rPr sz="1000" b="0">
                 <a:solidFill>
-                  <a:srgbClr val="78716C"/>
+                  <a:srgbClr val="6B6B6B"/>
                 </a:solidFill>
                 <a:latin typeface="Microsoft JhengHei"/>
               </a:rPr>
@@ -22639,7 +22525,7 @@
           </a:prstGeom>
           <a:ln w="9525">
             <a:solidFill>
-              <a:srgbClr val="E7E5E0"/>
+              <a:srgbClr val="C8C2B7"/>
             </a:solidFill>
           </a:ln>
         </p:spPr>
@@ -22688,7 +22574,7 @@
             <a:r>
               <a:rPr sz="1100" b="1">
                 <a:solidFill>
-                  <a:srgbClr val="1C1917"/>
+                  <a:srgbClr val="1A1A1A"/>
                 </a:solidFill>
                 <a:latin typeface="Microsoft JhengHei"/>
               </a:rPr>
@@ -22704,7 +22590,7 @@
             <a:r>
               <a:rPr sz="1100" b="1">
                 <a:solidFill>
-                  <a:srgbClr val="1C1917"/>
+                  <a:srgbClr val="1A1A1A"/>
                 </a:solidFill>
                 <a:latin typeface="Microsoft JhengHei"/>
               </a:rPr>
@@ -22743,7 +22629,7 @@
             <a:r>
               <a:rPr sz="1000" b="0">
                 <a:solidFill>
-                  <a:srgbClr val="D97706"/>
+                  <a:srgbClr val="E67E22"/>
                 </a:solidFill>
                 <a:latin typeface="Microsoft JhengHei"/>
               </a:rPr>
@@ -22759,7 +22645,7 @@
             <a:r>
               <a:rPr sz="1000" b="0">
                 <a:solidFill>
-                  <a:srgbClr val="D97706"/>
+                  <a:srgbClr val="E67E22"/>
                 </a:solidFill>
                 <a:latin typeface="Microsoft JhengHei"/>
               </a:rPr>
@@ -22798,7 +22684,7 @@
             <a:r>
               <a:rPr sz="1000" b="1">
                 <a:solidFill>
-                  <a:srgbClr val="D97706"/>
+                  <a:srgbClr val="E67E22"/>
                 </a:solidFill>
                 <a:latin typeface="Microsoft JhengHei"/>
               </a:rPr>
@@ -22837,7 +22723,7 @@
             <a:r>
               <a:rPr sz="1600" b="1">
                 <a:solidFill>
-                  <a:srgbClr val="1C1917"/>
+                  <a:srgbClr val="1A1A1A"/>
                 </a:solidFill>
                 <a:latin typeface="Microsoft JhengHei"/>
               </a:rPr>
@@ -22876,7 +22762,7 @@
             <a:r>
               <a:rPr sz="900" b="0">
                 <a:solidFill>
-                  <a:srgbClr val="78716C"/>
+                  <a:srgbClr val="6B6B6B"/>
                 </a:solidFill>
                 <a:latin typeface="Microsoft JhengHei"/>
               </a:rPr>
@@ -22915,7 +22801,7 @@
             <a:r>
               <a:rPr sz="1600" b="1">
                 <a:solidFill>
-                  <a:srgbClr val="1C1917"/>
+                  <a:srgbClr val="1A1A1A"/>
                 </a:solidFill>
                 <a:latin typeface="Microsoft JhengHei"/>
               </a:rPr>
@@ -22954,7 +22840,7 @@
             <a:r>
               <a:rPr sz="900" b="0">
                 <a:solidFill>
-                  <a:srgbClr val="78716C"/>
+                  <a:srgbClr val="6B6B6B"/>
                 </a:solidFill>
                 <a:latin typeface="Microsoft JhengHei"/>
               </a:rPr>
@@ -22993,7 +22879,7 @@
             <a:r>
               <a:rPr sz="1600" b="1">
                 <a:solidFill>
-                  <a:srgbClr val="1C1917"/>
+                  <a:srgbClr val="1A1A1A"/>
                 </a:solidFill>
                 <a:latin typeface="Microsoft JhengHei"/>
               </a:rPr>
@@ -23032,7 +22918,7 @@
             <a:r>
               <a:rPr sz="900" b="0">
                 <a:solidFill>
-                  <a:srgbClr val="78716C"/>
+                  <a:srgbClr val="6B6B6B"/>
                 </a:solidFill>
                 <a:latin typeface="Microsoft JhengHei"/>
               </a:rPr>
@@ -23071,7 +22957,7 @@
             <a:r>
               <a:rPr sz="1600" b="1">
                 <a:solidFill>
-                  <a:srgbClr val="1C1917"/>
+                  <a:srgbClr val="1A1A1A"/>
                 </a:solidFill>
                 <a:latin typeface="Microsoft JhengHei"/>
               </a:rPr>
@@ -23110,7 +22996,7 @@
             <a:r>
               <a:rPr sz="900" b="0">
                 <a:solidFill>
-                  <a:srgbClr val="78716C"/>
+                  <a:srgbClr val="6B6B6B"/>
                 </a:solidFill>
                 <a:latin typeface="Microsoft JhengHei"/>
               </a:rPr>
@@ -23149,7 +23035,7 @@
             <a:r>
               <a:rPr sz="1600" b="1">
                 <a:solidFill>
-                  <a:srgbClr val="1C1917"/>
+                  <a:srgbClr val="1A1A1A"/>
                 </a:solidFill>
                 <a:latin typeface="Microsoft JhengHei"/>
               </a:rPr>
@@ -23188,7 +23074,7 @@
             <a:r>
               <a:rPr sz="900" b="0">
                 <a:solidFill>
-                  <a:srgbClr val="78716C"/>
+                  <a:srgbClr val="6B6B6B"/>
                 </a:solidFill>
                 <a:latin typeface="Microsoft JhengHei"/>
               </a:rPr>
@@ -23227,7 +23113,7 @@
             <a:r>
               <a:rPr sz="900" b="0">
                 <a:solidFill>
-                  <a:srgbClr val="78716C"/>
+                  <a:srgbClr val="6B6B6B"/>
                 </a:solidFill>
                 <a:latin typeface="Microsoft JhengHei"/>
               </a:rPr>
@@ -23266,7 +23152,7 @@
             <a:r>
               <a:rPr sz="900" b="0">
                 <a:solidFill>
-                  <a:srgbClr val="78716C"/>
+                  <a:srgbClr val="6B6B6B"/>
                 </a:solidFill>
                 <a:latin typeface="Microsoft JhengHei"/>
               </a:rPr>
@@ -23308,7 +23194,7 @@
             <a:avLst/>
           </a:prstGeom>
           <a:solidFill>
-            <a:srgbClr val="FAFAF7"/>
+            <a:srgbClr val="F4F1ED"/>
           </a:solidFill>
           <a:ln>
             <a:noFill/>
@@ -23351,7 +23237,7 @@
             <a:avLst/>
           </a:prstGeom>
           <a:solidFill>
-            <a:srgbClr val="E7E5E0"/>
+            <a:srgbClr val="C8C2B7"/>
           </a:solidFill>
           <a:ln>
             <a:noFill/>
@@ -23409,7 +23295,7 @@
             <a:r>
               <a:rPr sz="1400" b="1">
                 <a:solidFill>
-                  <a:srgbClr val="78716C"/>
+                  <a:srgbClr val="6B6B6B"/>
                 </a:solidFill>
                 <a:latin typeface="Microsoft JhengHei"/>
               </a:rPr>
@@ -23448,7 +23334,7 @@
             <a:r>
               <a:rPr sz="4000" b="1">
                 <a:solidFill>
-                  <a:srgbClr val="1C1917"/>
+                  <a:srgbClr val="1A1A1A"/>
                 </a:solidFill>
                 <a:latin typeface="Microsoft JhengHei"/>
               </a:rPr>
@@ -23487,7 +23373,7 @@
             <a:r>
               <a:rPr sz="1600" b="0">
                 <a:solidFill>
-                  <a:srgbClr val="78716C"/>
+                  <a:srgbClr val="6B6B6B"/>
                 </a:solidFill>
                 <a:latin typeface="Microsoft JhengHei"/>
               </a:rPr>
@@ -23498,7 +23384,7 @@
       </p:sp>
       <p:sp>
         <p:nvSpPr>
-          <p:cNvPr id="7" name="Rounded Rectangle 6"/>
+          <p:cNvPr id="7" name="Rectangle 6"/>
           <p:cNvSpPr/>
           <p:nvPr/>
         </p:nvSpPr>
@@ -23507,15 +23393,13 @@
             <a:off x="640080" y="2194560"/>
             <a:ext cx="5486400" cy="4023360"/>
           </a:xfrm>
-          <a:prstGeom prst="roundRect">
-            <a:avLst>
-              <a:gd name="adj" fmla="val 5000"/>
-            </a:avLst>
+          <a:prstGeom prst="rect">
+            <a:avLst/>
           </a:prstGeom>
           <a:noFill/>
           <a:ln w="9525">
             <a:solidFill>
-              <a:srgbClr val="E7E5E0"/>
+              <a:srgbClr val="C8C2B7"/>
             </a:solidFill>
           </a:ln>
         </p:spPr>
@@ -23571,7 +23455,7 @@
             <a:r>
               <a:rPr sz="1400" b="1">
                 <a:solidFill>
-                  <a:srgbClr val="D97706"/>
+                  <a:srgbClr val="E67E22"/>
                 </a:solidFill>
                 <a:latin typeface="Microsoft JhengHei"/>
               </a:rPr>
@@ -23610,7 +23494,7 @@
             <a:r>
               <a:rPr sz="1200" b="1">
                 <a:solidFill>
-                  <a:srgbClr val="1C1917"/>
+                  <a:srgbClr val="1A1A1A"/>
                 </a:solidFill>
                 <a:latin typeface="Microsoft JhengHei"/>
               </a:rPr>
@@ -23621,7 +23505,7 @@
       </p:sp>
       <p:sp>
         <p:nvSpPr>
-          <p:cNvPr id="10" name="Rounded Rectangle 9"/>
+          <p:cNvPr id="10" name="Rectangle 9"/>
           <p:cNvSpPr/>
           <p:nvPr/>
         </p:nvSpPr>
@@ -23630,13 +23514,11 @@
             <a:off x="1828800" y="2971800"/>
             <a:ext cx="2743200" cy="274320"/>
           </a:xfrm>
-          <a:prstGeom prst="roundRect">
-            <a:avLst>
-              <a:gd name="adj" fmla="val 30000"/>
-            </a:avLst>
+          <a:prstGeom prst="rect">
+            <a:avLst/>
           </a:prstGeom>
           <a:solidFill>
-            <a:srgbClr val="D97706"/>
+            <a:srgbClr val="E67E22"/>
           </a:solidFill>
           <a:ln>
             <a:noFill/>
@@ -23694,7 +23576,7 @@
             <a:r>
               <a:rPr sz="1200" b="1">
                 <a:solidFill>
-                  <a:srgbClr val="1C1917"/>
+                  <a:srgbClr val="1A1A1A"/>
                 </a:solidFill>
                 <a:latin typeface="Microsoft JhengHei"/>
               </a:rPr>
@@ -23733,7 +23615,7 @@
             <a:r>
               <a:rPr sz="1200" b="1">
                 <a:solidFill>
-                  <a:srgbClr val="1C1917"/>
+                  <a:srgbClr val="1A1A1A"/>
                 </a:solidFill>
                 <a:latin typeface="Microsoft JhengHei"/>
               </a:rPr>
@@ -23744,7 +23626,7 @@
       </p:sp>
       <p:sp>
         <p:nvSpPr>
-          <p:cNvPr id="13" name="Rounded Rectangle 12"/>
+          <p:cNvPr id="13" name="Rectangle 12"/>
           <p:cNvSpPr/>
           <p:nvPr/>
         </p:nvSpPr>
@@ -23753,13 +23635,11 @@
             <a:off x="1828800" y="3429000"/>
             <a:ext cx="2194560" cy="274320"/>
           </a:xfrm>
-          <a:prstGeom prst="roundRect">
-            <a:avLst>
-              <a:gd name="adj" fmla="val 30000"/>
-            </a:avLst>
+          <a:prstGeom prst="rect">
+            <a:avLst/>
           </a:prstGeom>
           <a:solidFill>
-            <a:srgbClr val="D97706"/>
+            <a:srgbClr val="E67E22"/>
           </a:solidFill>
           <a:ln>
             <a:noFill/>
@@ -23817,7 +23697,7 @@
             <a:r>
               <a:rPr sz="1200" b="1">
                 <a:solidFill>
-                  <a:srgbClr val="1C1917"/>
+                  <a:srgbClr val="1A1A1A"/>
                 </a:solidFill>
                 <a:latin typeface="Microsoft JhengHei"/>
               </a:rPr>
@@ -23856,7 +23736,7 @@
             <a:r>
               <a:rPr sz="1200" b="1">
                 <a:solidFill>
-                  <a:srgbClr val="1C1917"/>
+                  <a:srgbClr val="1A1A1A"/>
                 </a:solidFill>
                 <a:latin typeface="Microsoft JhengHei"/>
               </a:rPr>
@@ -23867,7 +23747,7 @@
       </p:sp>
       <p:sp>
         <p:nvSpPr>
-          <p:cNvPr id="16" name="Rounded Rectangle 15"/>
+          <p:cNvPr id="16" name="Rectangle 15"/>
           <p:cNvSpPr/>
           <p:nvPr/>
         </p:nvSpPr>
@@ -23876,13 +23756,11 @@
             <a:off x="1828800" y="3886200"/>
             <a:ext cx="1097280" cy="274320"/>
           </a:xfrm>
-          <a:prstGeom prst="roundRect">
-            <a:avLst>
-              <a:gd name="adj" fmla="val 30000"/>
-            </a:avLst>
+          <a:prstGeom prst="rect">
+            <a:avLst/>
           </a:prstGeom>
           <a:solidFill>
-            <a:srgbClr val="D97706"/>
+            <a:srgbClr val="E67E22"/>
           </a:solidFill>
           <a:ln>
             <a:noFill/>
@@ -23940,7 +23818,7 @@
             <a:r>
               <a:rPr sz="1200" b="1">
                 <a:solidFill>
-                  <a:srgbClr val="1C1917"/>
+                  <a:srgbClr val="1A1A1A"/>
                 </a:solidFill>
                 <a:latin typeface="Microsoft JhengHei"/>
               </a:rPr>
@@ -23979,7 +23857,7 @@
             <a:r>
               <a:rPr sz="1200" b="1">
                 <a:solidFill>
-                  <a:srgbClr val="1C1917"/>
+                  <a:srgbClr val="1A1A1A"/>
                 </a:solidFill>
                 <a:latin typeface="Microsoft JhengHei"/>
               </a:rPr>
@@ -23990,7 +23868,7 @@
       </p:sp>
       <p:sp>
         <p:nvSpPr>
-          <p:cNvPr id="19" name="Rounded Rectangle 18"/>
+          <p:cNvPr id="19" name="Rectangle 18"/>
           <p:cNvSpPr/>
           <p:nvPr/>
         </p:nvSpPr>
@@ -23999,13 +23877,11 @@
             <a:off x="1828800" y="4343400"/>
             <a:ext cx="822959" cy="274320"/>
           </a:xfrm>
-          <a:prstGeom prst="roundRect">
-            <a:avLst>
-              <a:gd name="adj" fmla="val 30000"/>
-            </a:avLst>
+          <a:prstGeom prst="rect">
+            <a:avLst/>
           </a:prstGeom>
           <a:solidFill>
-            <a:srgbClr val="D97706"/>
+            <a:srgbClr val="E67E22"/>
           </a:solidFill>
           <a:ln>
             <a:noFill/>
@@ -24063,7 +23939,7 @@
             <a:r>
               <a:rPr sz="1200" b="1">
                 <a:solidFill>
-                  <a:srgbClr val="1C1917"/>
+                  <a:srgbClr val="1A1A1A"/>
                 </a:solidFill>
                 <a:latin typeface="Microsoft JhengHei"/>
               </a:rPr>
@@ -24102,7 +23978,7 @@
             <a:r>
               <a:rPr sz="1200" b="1">
                 <a:solidFill>
-                  <a:srgbClr val="1C1917"/>
+                  <a:srgbClr val="1A1A1A"/>
                 </a:solidFill>
                 <a:latin typeface="Microsoft JhengHei"/>
               </a:rPr>
@@ -24113,7 +23989,7 @@
       </p:sp>
       <p:sp>
         <p:nvSpPr>
-          <p:cNvPr id="22" name="Rounded Rectangle 21"/>
+          <p:cNvPr id="22" name="Rectangle 21"/>
           <p:cNvSpPr/>
           <p:nvPr/>
         </p:nvSpPr>
@@ -24122,13 +23998,11 @@
             <a:off x="1828800" y="4800600"/>
             <a:ext cx="548640" cy="274320"/>
           </a:xfrm>
-          <a:prstGeom prst="roundRect">
-            <a:avLst>
-              <a:gd name="adj" fmla="val 30000"/>
-            </a:avLst>
+          <a:prstGeom prst="rect">
+            <a:avLst/>
           </a:prstGeom>
           <a:solidFill>
-            <a:srgbClr val="D97706"/>
+            <a:srgbClr val="E67E22"/>
           </a:solidFill>
           <a:ln>
             <a:noFill/>
@@ -24186,7 +24060,7 @@
             <a:r>
               <a:rPr sz="1200" b="1">
                 <a:solidFill>
-                  <a:srgbClr val="1C1917"/>
+                  <a:srgbClr val="1A1A1A"/>
                 </a:solidFill>
                 <a:latin typeface="Microsoft JhengHei"/>
               </a:rPr>
@@ -24225,7 +24099,7 @@
             <a:r>
               <a:rPr sz="1200" b="1">
                 <a:solidFill>
-                  <a:srgbClr val="1C1917"/>
+                  <a:srgbClr val="1A1A1A"/>
                 </a:solidFill>
                 <a:latin typeface="Microsoft JhengHei"/>
               </a:rPr>
@@ -24236,7 +24110,7 @@
       </p:sp>
       <p:sp>
         <p:nvSpPr>
-          <p:cNvPr id="25" name="Rounded Rectangle 24"/>
+          <p:cNvPr id="25" name="Rectangle 24"/>
           <p:cNvSpPr/>
           <p:nvPr/>
         </p:nvSpPr>
@@ -24245,13 +24119,11 @@
             <a:off x="1828800" y="5257800"/>
             <a:ext cx="548640" cy="274320"/>
           </a:xfrm>
-          <a:prstGeom prst="roundRect">
-            <a:avLst>
-              <a:gd name="adj" fmla="val 30000"/>
-            </a:avLst>
+          <a:prstGeom prst="rect">
+            <a:avLst/>
           </a:prstGeom>
           <a:solidFill>
-            <a:srgbClr val="D97706"/>
+            <a:srgbClr val="E67E22"/>
           </a:solidFill>
           <a:ln>
             <a:noFill/>
@@ -24309,7 +24181,7 @@
             <a:r>
               <a:rPr sz="1200" b="1">
                 <a:solidFill>
-                  <a:srgbClr val="1C1917"/>
+                  <a:srgbClr val="1A1A1A"/>
                 </a:solidFill>
                 <a:latin typeface="Microsoft JhengHei"/>
               </a:rPr>
@@ -24320,7 +24192,7 @@
       </p:sp>
       <p:sp>
         <p:nvSpPr>
-          <p:cNvPr id="27" name="Rounded Rectangle 26"/>
+          <p:cNvPr id="27" name="Rectangle 26"/>
           <p:cNvSpPr/>
           <p:nvPr/>
         </p:nvSpPr>
@@ -24329,15 +24201,13 @@
             <a:off x="6309360" y="2194560"/>
             <a:ext cx="5212080" cy="4023360"/>
           </a:xfrm>
-          <a:prstGeom prst="roundRect">
-            <a:avLst>
-              <a:gd name="adj" fmla="val 5000"/>
-            </a:avLst>
+          <a:prstGeom prst="rect">
+            <a:avLst/>
           </a:prstGeom>
           <a:noFill/>
           <a:ln w="9525">
             <a:solidFill>
-              <a:srgbClr val="E7E5E0"/>
+              <a:srgbClr val="C8C2B7"/>
             </a:solidFill>
           </a:ln>
         </p:spPr>
@@ -24393,7 +24263,7 @@
             <a:r>
               <a:rPr sz="1400" b="1">
                 <a:solidFill>
-                  <a:srgbClr val="D97706"/>
+                  <a:srgbClr val="E67E22"/>
                 </a:solidFill>
                 <a:latin typeface="Microsoft JhengHei"/>
               </a:rPr>
@@ -24432,7 +24302,7 @@
             <a:r>
               <a:rPr sz="1200" b="0">
                 <a:solidFill>
-                  <a:srgbClr val="1C1917"/>
+                  <a:srgbClr val="1A1A1A"/>
                 </a:solidFill>
                 <a:latin typeface="Microsoft JhengHei"/>
               </a:rPr>
@@ -24448,7 +24318,7 @@
             <a:r>
               <a:rPr sz="1200" b="0">
                 <a:solidFill>
-                  <a:srgbClr val="1C1917"/>
+                  <a:srgbClr val="1A1A1A"/>
                 </a:solidFill>
                 <a:latin typeface="Microsoft JhengHei"/>
               </a:rPr>
@@ -24464,7 +24334,7 @@
             <a:r>
               <a:rPr sz="1200" b="0">
                 <a:solidFill>
-                  <a:srgbClr val="1C1917"/>
+                  <a:srgbClr val="1A1A1A"/>
                 </a:solidFill>
                 <a:latin typeface="Microsoft JhengHei"/>
               </a:rPr>
@@ -24480,7 +24350,7 @@
             <a:r>
               <a:rPr sz="1200" b="0">
                 <a:solidFill>
-                  <a:srgbClr val="1C1917"/>
+                  <a:srgbClr val="1A1A1A"/>
                 </a:solidFill>
                 <a:latin typeface="Microsoft JhengHei"/>
               </a:rPr>
@@ -24496,7 +24366,7 @@
             <a:r>
               <a:rPr sz="1200" b="0">
                 <a:solidFill>
-                  <a:srgbClr val="1C1917"/>
+                  <a:srgbClr val="1A1A1A"/>
                 </a:solidFill>
                 <a:latin typeface="Microsoft JhengHei"/>
               </a:rPr>
@@ -24512,7 +24382,7 @@
             <a:r>
               <a:rPr sz="1200" b="0">
                 <a:solidFill>
-                  <a:srgbClr val="1C1917"/>
+                  <a:srgbClr val="1A1A1A"/>
                 </a:solidFill>
                 <a:latin typeface="Microsoft JhengHei"/>
               </a:rPr>
@@ -24528,7 +24398,7 @@
             <a:r>
               <a:rPr sz="1200" b="0">
                 <a:solidFill>
-                  <a:srgbClr val="1C1917"/>
+                  <a:srgbClr val="1A1A1A"/>
                 </a:solidFill>
                 <a:latin typeface="Microsoft JhengHei"/>
               </a:rPr>
@@ -24544,7 +24414,7 @@
             <a:r>
               <a:rPr sz="1200" b="0">
                 <a:solidFill>
-                  <a:srgbClr val="1C1917"/>
+                  <a:srgbClr val="1A1A1A"/>
                 </a:solidFill>
                 <a:latin typeface="Microsoft JhengHei"/>
               </a:rPr>
@@ -24560,7 +24430,7 @@
             <a:r>
               <a:rPr sz="1200" b="0">
                 <a:solidFill>
-                  <a:srgbClr val="1C1917"/>
+                  <a:srgbClr val="1A1A1A"/>
                 </a:solidFill>
                 <a:latin typeface="Microsoft JhengHei"/>
               </a:rPr>
@@ -24576,7 +24446,7 @@
             <a:r>
               <a:rPr sz="1200" b="0">
                 <a:solidFill>
-                  <a:srgbClr val="1C1917"/>
+                  <a:srgbClr val="1A1A1A"/>
                 </a:solidFill>
                 <a:latin typeface="Microsoft JhengHei"/>
               </a:rPr>
@@ -24592,7 +24462,7 @@
             <a:r>
               <a:rPr sz="1200" b="0">
                 <a:solidFill>
-                  <a:srgbClr val="1C1917"/>
+                  <a:srgbClr val="1A1A1A"/>
                 </a:solidFill>
                 <a:latin typeface="Microsoft JhengHei"/>
               </a:rPr>
@@ -24608,7 +24478,7 @@
             <a:r>
               <a:rPr sz="1200" b="0">
                 <a:solidFill>
-                  <a:srgbClr val="1C1917"/>
+                  <a:srgbClr val="1A1A1A"/>
                 </a:solidFill>
                 <a:latin typeface="Microsoft JhengHei"/>
               </a:rPr>
@@ -24624,7 +24494,7 @@
             <a:r>
               <a:rPr sz="1200" b="0">
                 <a:solidFill>
-                  <a:srgbClr val="1C1917"/>
+                  <a:srgbClr val="1A1A1A"/>
                 </a:solidFill>
                 <a:latin typeface="Microsoft JhengHei"/>
               </a:rPr>
@@ -24640,7 +24510,7 @@
             <a:r>
               <a:rPr sz="1200" b="0">
                 <a:solidFill>
-                  <a:srgbClr val="1C1917"/>
+                  <a:srgbClr val="1A1A1A"/>
                 </a:solidFill>
                 <a:latin typeface="Microsoft JhengHei"/>
               </a:rPr>
@@ -24656,7 +24526,7 @@
             <a:r>
               <a:rPr sz="1200" b="0">
                 <a:solidFill>
-                  <a:srgbClr val="1C1917"/>
+                  <a:srgbClr val="1A1A1A"/>
                 </a:solidFill>
                 <a:latin typeface="Microsoft JhengHei"/>
               </a:rPr>
@@ -24672,7 +24542,7 @@
             <a:r>
               <a:rPr sz="1200" b="0">
                 <a:solidFill>
-                  <a:srgbClr val="1C1917"/>
+                  <a:srgbClr val="1A1A1A"/>
                 </a:solidFill>
                 <a:latin typeface="Microsoft JhengHei"/>
               </a:rPr>
@@ -24711,7 +24581,7 @@
             <a:r>
               <a:rPr sz="900" b="0">
                 <a:solidFill>
-                  <a:srgbClr val="78716C"/>
+                  <a:srgbClr val="6B6B6B"/>
                 </a:solidFill>
                 <a:latin typeface="Microsoft JhengHei"/>
               </a:rPr>
@@ -24750,7 +24620,7 @@
             <a:r>
               <a:rPr sz="900" b="0">
                 <a:solidFill>
-                  <a:srgbClr val="78716C"/>
+                  <a:srgbClr val="6B6B6B"/>
                 </a:solidFill>
                 <a:latin typeface="Microsoft JhengHei"/>
               </a:rPr>

--- a/docs/串連系統_簡報.pptx
+++ b/docs/串連系統_簡報.pptx
@@ -5332,7 +5332,7 @@
         <p:spPr>
           <a:xfrm>
             <a:off x="6583680" y="2880360"/>
-            <a:ext cx="4663440" cy="3200400"/>
+            <a:ext cx="4663440" cy="2468880"/>
           </a:xfrm>
           <a:prstGeom prst="rect">
             <a:avLst/>
@@ -5405,7 +5405,7 @@
                 </a:solidFill>
                 <a:latin typeface="Microsoft JhengHei"/>
               </a:rPr>
-              <a:t>不健康的長這樣：</a:t>
+              <a:t>不健康：A 問 9 次、B 只回 1 次</a:t>
             </a:r>
           </a:p>
           <a:p>
@@ -5421,7 +5421,7 @@
                 </a:solidFill>
                 <a:latin typeface="Microsoft JhengHei"/>
               </a:rPr>
-              <a:t>A 問 B 9 次，B 只回 A 1 次</a:t>
+              <a:t>→ A 在追、B 在躲 = 「卡點」</a:t>
             </a:r>
           </a:p>
           <a:p>
@@ -5437,7 +5437,7 @@
                 </a:solidFill>
                 <a:latin typeface="Microsoft JhengHei"/>
               </a:rPr>
-              <a:t>→ A 在追，B 在躲，這就是「卡點」</a:t>
+              <a:t/>
             </a:r>
           </a:p>
           <a:p>
@@ -5453,7 +5453,7 @@
                 </a:solidFill>
                 <a:latin typeface="Microsoft JhengHei"/>
               </a:rPr>
-              <a:t/>
+              <a:t>判斷標準：差距 ≥ 5 次 → 紅燈</a:t>
             </a:r>
           </a:p>
           <a:p>
@@ -5469,110 +5469,166 @@
                 </a:solidFill>
                 <a:latin typeface="Microsoft JhengHei"/>
               </a:rPr>
-              <a:t>我們的判斷標準</a:t>
-            </a:r>
-          </a:p>
-          <a:p>
-            <a:pPr algn="l">
-              <a:lnSpc>
-                <a:spcPct val="145000"/>
-              </a:lnSpc>
-            </a:pPr>
-            <a:r>
-              <a:rPr sz="1200" b="0">
+              <a:t>(相當於統計上前 16% 的不平衡)</a:t>
+            </a:r>
+          </a:p>
+        </p:txBody>
+      </p:sp>
+      <p:cxnSp>
+        <p:nvCxnSpPr>
+          <p:cNvPr id="21" name="Connector 20"/>
+          <p:cNvCxnSpPr/>
+          <p:nvPr/>
+        </p:nvCxnSpPr>
+        <p:spPr>
+          <a:xfrm>
+            <a:off x="6583680" y="5440680"/>
+            <a:ext cx="4389120" cy="0"/>
+          </a:xfrm>
+          <a:prstGeom prst="line">
+            <a:avLst/>
+          </a:prstGeom>
+          <a:ln w="9525">
+            <a:solidFill>
+              <a:srgbClr val="C8C2B7"/>
+            </a:solidFill>
+          </a:ln>
+        </p:spPr>
+        <p:style>
+          <a:lnRef idx="2">
+            <a:schemeClr val="accent1"/>
+          </a:lnRef>
+          <a:fillRef idx="0">
+            <a:schemeClr val="accent1"/>
+          </a:fillRef>
+          <a:effectRef idx="1">
+            <a:schemeClr val="accent1"/>
+          </a:effectRef>
+          <a:fontRef idx="minor">
+            <a:schemeClr val="tx1"/>
+          </a:fontRef>
+        </p:style>
+      </p:cxnSp>
+      <p:sp>
+        <p:nvSpPr>
+          <p:cNvPr id="22" name="TextBox 21"/>
+          <p:cNvSpPr txBox="1"/>
+          <p:nvPr/>
+        </p:nvSpPr>
+        <p:spPr>
+          <a:xfrm>
+            <a:off x="6583680" y="5532120"/>
+            <a:ext cx="4663440" cy="320040"/>
+          </a:xfrm>
+          <a:prstGeom prst="rect">
+            <a:avLst/>
+          </a:prstGeom>
+          <a:noFill/>
+        </p:spPr>
+        <p:txBody>
+          <a:bodyPr wrap="square" lIns="0" rIns="0" tIns="0" bIns="0" anchor="t">
+            <a:spAutoFit/>
+          </a:bodyPr>
+          <a:lstStyle/>
+          <a:p>
+            <a:pPr algn="l">
+              <a:lnSpc>
+                <a:spcPct val="120000"/>
+              </a:lnSpc>
+            </a:pPr>
+            <a:r>
+              <a:rPr sz="1000" b="1">
+                <a:solidFill>
+                  <a:srgbClr val="E67E22"/>
+                </a:solidFill>
+                <a:latin typeface="Microsoft JhengHei"/>
+              </a:rPr>
+              <a:t>公式</a:t>
+            </a:r>
+          </a:p>
+        </p:txBody>
+      </p:sp>
+      <p:sp>
+        <p:nvSpPr>
+          <p:cNvPr id="23" name="TextBox 22"/>
+          <p:cNvSpPr txBox="1"/>
+          <p:nvPr/>
+        </p:nvSpPr>
+        <p:spPr>
+          <a:xfrm>
+            <a:off x="6583680" y="5806440"/>
+            <a:ext cx="4663440" cy="320040"/>
+          </a:xfrm>
+          <a:prstGeom prst="rect">
+            <a:avLst/>
+          </a:prstGeom>
+          <a:noFill/>
+        </p:spPr>
+        <p:txBody>
+          <a:bodyPr wrap="square" lIns="0" rIns="0" tIns="0" bIns="0" anchor="t">
+            <a:spAutoFit/>
+          </a:bodyPr>
+          <a:lstStyle/>
+          <a:p>
+            <a:pPr algn="l">
+              <a:lnSpc>
+                <a:spcPct val="120000"/>
+              </a:lnSpc>
+            </a:pPr>
+            <a:r>
+              <a:rPr sz="1000" b="1">
                 <a:solidFill>
                   <a:srgbClr val="1A1A1A"/>
                 </a:solidFill>
-                <a:latin typeface="Microsoft JhengHei"/>
-              </a:rPr>
-              <a:t>  差距 ≥ 5 次 → 紅燈警告</a:t>
-            </a:r>
-          </a:p>
-          <a:p>
-            <a:pPr algn="l">
-              <a:lnSpc>
-                <a:spcPct val="145000"/>
-              </a:lnSpc>
-            </a:pPr>
-            <a:r>
-              <a:rPr sz="1200" b="0">
-                <a:solidFill>
-                  <a:srgbClr val="1A1A1A"/>
-                </a:solidFill>
-                <a:latin typeface="Microsoft JhengHei"/>
-              </a:rPr>
-              <a:t>  (相當於統計上前 16% 的不平衡)</a:t>
-            </a:r>
-          </a:p>
-          <a:p>
-            <a:pPr algn="l">
-              <a:lnSpc>
-                <a:spcPct val="145000"/>
-              </a:lnSpc>
-            </a:pPr>
-            <a:r>
-              <a:rPr sz="1200" b="0">
-                <a:solidFill>
-                  <a:srgbClr val="1A1A1A"/>
-                </a:solidFill>
-                <a:latin typeface="Microsoft JhengHei"/>
-              </a:rPr>
-              <a:t/>
-            </a:r>
-          </a:p>
-          <a:p>
-            <a:pPr algn="l">
-              <a:lnSpc>
-                <a:spcPct val="145000"/>
-              </a:lnSpc>
-            </a:pPr>
-            <a:r>
-              <a:rPr sz="1200" b="0">
-                <a:solidFill>
-                  <a:srgbClr val="1A1A1A"/>
-                </a:solidFill>
-                <a:latin typeface="Microsoft JhengHei"/>
-              </a:rPr>
-              <a:t>實測：主管心中有 3 對「卡」的部門，</a:t>
-            </a:r>
-          </a:p>
-          <a:p>
-            <a:pPr algn="l">
-              <a:lnSpc>
-                <a:spcPct val="145000"/>
-              </a:lnSpc>
-            </a:pPr>
-            <a:r>
-              <a:rPr sz="1200" b="0">
-                <a:solidFill>
-                  <a:srgbClr val="1A1A1A"/>
-                </a:solidFill>
-                <a:latin typeface="Microsoft JhengHei"/>
-              </a:rPr>
-              <a:t>      系統自動抓出 2 對（67% 命中）</a:t>
-            </a:r>
-          </a:p>
-          <a:p>
-            <a:pPr algn="l">
-              <a:lnSpc>
-                <a:spcPct val="145000"/>
-              </a:lnSpc>
-            </a:pPr>
-            <a:r>
-              <a:rPr sz="1200" b="0">
-                <a:solidFill>
-                  <a:srgbClr val="1A1A1A"/>
-                </a:solidFill>
-                <a:latin typeface="Microsoft JhengHei"/>
-              </a:rPr>
-              <a:t>      抓到的都對（0 個誤報）</a:t>
-            </a:r>
-          </a:p>
-        </p:txBody>
-      </p:sp>
-      <p:sp>
-        <p:nvSpPr>
-          <p:cNvPr id="21" name="TextBox 20"/>
+                <a:latin typeface="Consolas"/>
+              </a:rPr>
+              <a:t>Δ = (A → B) − (B → A)　|　閾值 = 1σ ≈ 5 次</a:t>
+            </a:r>
+          </a:p>
+        </p:txBody>
+      </p:sp>
+      <p:sp>
+        <p:nvSpPr>
+          <p:cNvPr id="24" name="TextBox 23"/>
+          <p:cNvSpPr txBox="1"/>
+          <p:nvPr/>
+        </p:nvSpPr>
+        <p:spPr>
+          <a:xfrm>
+            <a:off x="6583680" y="6080760"/>
+            <a:ext cx="4663440" cy="320040"/>
+          </a:xfrm>
+          <a:prstGeom prst="rect">
+            <a:avLst/>
+          </a:prstGeom>
+          <a:noFill/>
+        </p:spPr>
+        <p:txBody>
+          <a:bodyPr wrap="square" lIns="0" rIns="0" tIns="0" bIns="0" anchor="t">
+            <a:spAutoFit/>
+          </a:bodyPr>
+          <a:lstStyle/>
+          <a:p>
+            <a:pPr algn="l">
+              <a:lnSpc>
+                <a:spcPct val="120000"/>
+              </a:lnSpc>
+            </a:pPr>
+            <a:r>
+              <a:rPr sz="900" b="0">
+                <a:solidFill>
+                  <a:srgbClr val="6B6B6B"/>
+                </a:solidFill>
+                <a:latin typeface="Microsoft JhengHei"/>
+              </a:rPr>
+              <a:t>經驗分佈標準差 σ ≈ 4.8 → 取 5 抓 top 16%</a:t>
+            </a:r>
+          </a:p>
+        </p:txBody>
+      </p:sp>
+      <p:sp>
+        <p:nvSpPr>
+          <p:cNvPr id="25" name="TextBox 24"/>
           <p:cNvSpPr txBox="1"/>
           <p:nvPr/>
         </p:nvSpPr>
@@ -5611,7 +5667,7 @@
       </p:sp>
       <p:sp>
         <p:nvSpPr>
-          <p:cNvPr id="22" name="TextBox 21"/>
+          <p:cNvPr id="26" name="TextBox 25"/>
           <p:cNvSpPr txBox="1"/>
           <p:nvPr/>
         </p:nvSpPr>
@@ -15317,7 +15373,7 @@
         <p:spPr>
           <a:xfrm>
             <a:off x="731520" y="1207008"/>
-            <a:ext cx="10058400" cy="365760"/>
+            <a:ext cx="5943600" cy="365760"/>
           </a:xfrm>
           <a:prstGeom prst="rect">
             <a:avLst/>
@@ -15355,8 +15411,8 @@
         </p:nvSpPr>
         <p:spPr>
           <a:xfrm>
-            <a:off x="6858000" y="868680"/>
-            <a:ext cx="4846320" cy="411480"/>
+            <a:off x="6858000" y="548640"/>
+            <a:ext cx="4846320" cy="1280160"/>
           </a:xfrm>
           <a:prstGeom prst="rect">
             <a:avLst/>
@@ -15385,18 +15441,81 @@
           </a:fontRef>
         </p:style>
         <p:txBody>
-          <a:bodyPr rtlCol="0" anchor="ctr" lIns="137160" rIns="137160" tIns="0" bIns="0"/>
-          <a:lstStyle/>
-          <a:p>
-            <a:pPr algn="ctr"/>
-            <a:r>
-              <a:rPr sz="1000" b="1">
-                <a:solidFill>
-                  <a:srgbClr val="3D3D3D"/>
-                </a:solidFill>
-                <a:latin typeface="Microsoft JhengHei"/>
-              </a:rPr>
-              <a:t>演算法　經驗百分位 + 時間衰減 + Gini 不均度</a:t>
+          <a:bodyPr rtlCol="0" anchor="t" lIns="164592" rIns="164592" tIns="91440" bIns="91440" wrap="square"/>
+          <a:lstStyle/>
+          <a:p>
+            <a:pPr algn="l">
+              <a:lnSpc>
+                <a:spcPct val="130000"/>
+              </a:lnSpc>
+            </a:pPr>
+            <a:r>
+              <a:rPr sz="900" b="1">
+                <a:solidFill>
+                  <a:srgbClr val="E67E22"/>
+                </a:solidFill>
+                <a:latin typeface="Microsoft JhengHei"/>
+              </a:rPr>
+              <a:t>演算法　</a:t>
+            </a:r>
+            <a:r>
+              <a:rPr sz="1000" b="0">
+                <a:solidFill>
+                  <a:srgbClr val="1A1A1A"/>
+                </a:solidFill>
+                <a:latin typeface="Microsoft JhengHei"/>
+              </a:rPr>
+              <a:t>經驗百分位 + 時間衰減 + Gini 不均度</a:t>
+            </a:r>
+          </a:p>
+          <a:p>
+            <a:pPr algn="l">
+              <a:lnSpc>
+                <a:spcPct val="130000"/>
+              </a:lnSpc>
+            </a:pPr>
+            <a:r>
+              <a:rPr sz="900" b="1">
+                <a:solidFill>
+                  <a:srgbClr val="E67E22"/>
+                </a:solidFill>
+                <a:latin typeface="Microsoft JhengHei"/>
+              </a:rPr>
+              <a:t>公式　</a:t>
+            </a:r>
+            <a:r>
+              <a:rPr sz="1000" b="0">
+                <a:solidFill>
+                  <a:srgbClr val="1A1A1A"/>
+                </a:solidFill>
+                <a:latin typeface="Consolas"/>
+              </a:rPr>
+              <a:t>Load = Σᵢ wᵢ · Countᵢ · e^(−tᵢ/14)</a:t>
+            </a:r>
+          </a:p>
+          <a:p>
+            <a:pPr algn="l">
+              <a:lnSpc>
+                <a:spcPct val="130000"/>
+              </a:lnSpc>
+            </a:pPr>
+            <a:r>
+              <a:rPr sz="900" b="1">
+                <a:solidFill>
+                  <a:srgbClr val="E67E22"/>
+                </a:solidFill>
+                <a:latin typeface="Microsoft JhengHei"/>
+              </a:rPr>
+              <a:t>解讀　</a:t>
+            </a:r>
+            <a:r>
+              <a:rPr sz="1000" b="0">
+                <a:solidFill>
+                  <a:srgbClr val="1A1A1A"/>
+                </a:solidFill>
+                <a:latin typeface="Microsoft JhengHei"/>
+              </a:rPr>
+              <a:t>每件事 × 重要性權重 × 時間打折，累加後排名</a:t>
             </a:r>
           </a:p>
         </p:txBody>
@@ -17187,7 +17306,7 @@
         <p:spPr>
           <a:xfrm>
             <a:off x="731520" y="1207008"/>
-            <a:ext cx="10058400" cy="365760"/>
+            <a:ext cx="5943600" cy="365760"/>
           </a:xfrm>
           <a:prstGeom prst="rect">
             <a:avLst/>
@@ -17225,7 +17344,7 @@
         </p:nvSpPr>
         <p:spPr>
           <a:xfrm>
-            <a:off x="6858000" y="868680"/>
+            <a:off x="6858000" y="548640"/>
             <a:ext cx="4846320" cy="411480"/>
           </a:xfrm>
           <a:prstGeom prst="rect">
@@ -17255,18 +17374,31 @@
           </a:fontRef>
         </p:style>
         <p:txBody>
-          <a:bodyPr rtlCol="0" anchor="ctr" lIns="137160" rIns="137160" tIns="0" bIns="0"/>
-          <a:lstStyle/>
-          <a:p>
-            <a:pPr algn="ctr"/>
-            <a:r>
-              <a:rPr sz="1000" b="1">
-                <a:solidFill>
-                  <a:srgbClr val="3D3D3D"/>
-                </a:solidFill>
-                <a:latin typeface="Microsoft JhengHei"/>
-              </a:rPr>
-              <a:t>演算法　六維加權評分 + 不對稱偵測</a:t>
+          <a:bodyPr rtlCol="0" anchor="t" lIns="164592" rIns="164592" tIns="91440" bIns="91440" wrap="square"/>
+          <a:lstStyle/>
+          <a:p>
+            <a:pPr algn="l">
+              <a:lnSpc>
+                <a:spcPct val="130000"/>
+              </a:lnSpc>
+            </a:pPr>
+            <a:r>
+              <a:rPr sz="900" b="1">
+                <a:solidFill>
+                  <a:srgbClr val="E67E22"/>
+                </a:solidFill>
+                <a:latin typeface="Microsoft JhengHei"/>
+              </a:rPr>
+              <a:t>演算法　</a:t>
+            </a:r>
+            <a:r>
+              <a:rPr sz="1000" b="0">
+                <a:solidFill>
+                  <a:srgbClr val="1A1A1A"/>
+                </a:solidFill>
+                <a:latin typeface="Microsoft JhengHei"/>
+              </a:rPr>
+              <a:t>六維加權評分 + 不對稱偵測</a:t>
             </a:r>
           </a:p>
         </p:txBody>
@@ -19073,7 +19205,7 @@
         <p:spPr>
           <a:xfrm>
             <a:off x="731520" y="1207008"/>
-            <a:ext cx="10058400" cy="365760"/>
+            <a:ext cx="5943600" cy="365760"/>
           </a:xfrm>
           <a:prstGeom prst="rect">
             <a:avLst/>
@@ -19111,8 +19243,8 @@
         </p:nvSpPr>
         <p:spPr>
           <a:xfrm>
-            <a:off x="6858000" y="868680"/>
-            <a:ext cx="4846320" cy="411480"/>
+            <a:off x="6858000" y="548640"/>
+            <a:ext cx="4846320" cy="1280160"/>
           </a:xfrm>
           <a:prstGeom prst="rect">
             <a:avLst/>
@@ -19141,18 +19273,81 @@
           </a:fontRef>
         </p:style>
         <p:txBody>
-          <a:bodyPr rtlCol="0" anchor="ctr" lIns="137160" rIns="137160" tIns="0" bIns="0"/>
-          <a:lstStyle/>
-          <a:p>
-            <a:pPr algn="ctr"/>
-            <a:r>
-              <a:rPr sz="1000" b="1">
-                <a:solidFill>
-                  <a:srgbClr val="3D3D3D"/>
-                </a:solidFill>
-                <a:latin typeface="Microsoft JhengHei"/>
-              </a:rPr>
-              <a:t>演算法　同期校準 (DiD) + 線性回歸</a:t>
+          <a:bodyPr rtlCol="0" anchor="t" lIns="164592" rIns="164592" tIns="91440" bIns="91440" wrap="square"/>
+          <a:lstStyle/>
+          <a:p>
+            <a:pPr algn="l">
+              <a:lnSpc>
+                <a:spcPct val="130000"/>
+              </a:lnSpc>
+            </a:pPr>
+            <a:r>
+              <a:rPr sz="900" b="1">
+                <a:solidFill>
+                  <a:srgbClr val="E67E22"/>
+                </a:solidFill>
+                <a:latin typeface="Microsoft JhengHei"/>
+              </a:rPr>
+              <a:t>演算法　</a:t>
+            </a:r>
+            <a:r>
+              <a:rPr sz="1000" b="0">
+                <a:solidFill>
+                  <a:srgbClr val="1A1A1A"/>
+                </a:solidFill>
+                <a:latin typeface="Microsoft JhengHei"/>
+              </a:rPr>
+              <a:t>同期校準 (DiD) + 線性回歸</a:t>
+            </a:r>
+          </a:p>
+          <a:p>
+            <a:pPr algn="l">
+              <a:lnSpc>
+                <a:spcPct val="130000"/>
+              </a:lnSpc>
+            </a:pPr>
+            <a:r>
+              <a:rPr sz="900" b="1">
+                <a:solidFill>
+                  <a:srgbClr val="E67E22"/>
+                </a:solidFill>
+                <a:latin typeface="Microsoft JhengHei"/>
+              </a:rPr>
+              <a:t>公式　</a:t>
+            </a:r>
+            <a:r>
+              <a:rPr sz="1000" b="0">
+                <a:solidFill>
+                  <a:srgbClr val="1A1A1A"/>
+                </a:solidFill>
+                <a:latin typeface="Consolas"/>
+              </a:rPr>
+              <a:t>adjustedΔ = (after − before) − β·t</a:t>
+            </a:r>
+          </a:p>
+          <a:p>
+            <a:pPr algn="l">
+              <a:lnSpc>
+                <a:spcPct val="130000"/>
+              </a:lnSpc>
+            </a:pPr>
+            <a:r>
+              <a:rPr sz="900" b="1">
+                <a:solidFill>
+                  <a:srgbClr val="E67E22"/>
+                </a:solidFill>
+                <a:latin typeface="Microsoft JhengHei"/>
+              </a:rPr>
+              <a:t>解讀　</a:t>
+            </a:r>
+            <a:r>
+              <a:rPr sz="1000" b="0">
+                <a:solidFill>
+                  <a:srgbClr val="1A1A1A"/>
+                </a:solidFill>
+                <a:latin typeface="Microsoft JhengHei"/>
+              </a:rPr>
+              <a:t>原始差扣掉「大盤本來會走到的位置」</a:t>
             </a:r>
           </a:p>
         </p:txBody>
@@ -24281,7 +24476,7 @@
         <p:spPr>
           <a:xfrm>
             <a:off x="6583680" y="2880360"/>
-            <a:ext cx="4663440" cy="3200400"/>
+            <a:ext cx="4663440" cy="2468880"/>
           </a:xfrm>
           <a:prstGeom prst="rect">
             <a:avLst/>
@@ -24322,7 +24517,7 @@
                 </a:solidFill>
                 <a:latin typeface="Microsoft JhengHei"/>
               </a:rPr>
-              <a:t>  關鍵字在「標題」=5 分，</a:t>
+              <a:t>  關鍵字在「標題」=5 分、「留言」=1 分</a:t>
             </a:r>
           </a:p>
           <a:p>
@@ -24338,7 +24533,7 @@
                 </a:solidFill>
                 <a:latin typeface="Microsoft JhengHei"/>
               </a:rPr>
-              <a:t>  在「留言」只有 1 分。</a:t>
+              <a:t>  → 案件名稱才是真正在問什麼</a:t>
             </a:r>
           </a:p>
           <a:p>
@@ -24354,7 +24549,7 @@
                 </a:solidFill>
                 <a:latin typeface="Microsoft JhengHei"/>
               </a:rPr>
-              <a:t>  → 案件名稱才是真正在問什麼</a:t>
+              <a:t/>
             </a:r>
           </a:p>
           <a:p>
@@ -24370,6 +24565,54 @@
                 </a:solidFill>
                 <a:latin typeface="Microsoft JhengHei"/>
               </a:rPr>
+              <a:t>② 知道你打不完整</a:t>
+            </a:r>
+          </a:p>
+          <a:p>
+            <a:pPr algn="l">
+              <a:lnSpc>
+                <a:spcPct val="140000"/>
+              </a:lnSpc>
+            </a:pPr>
+            <a:r>
+              <a:rPr sz="1200" b="0">
+                <a:solidFill>
+                  <a:srgbClr val="1A1A1A"/>
+                </a:solidFill>
+                <a:latin typeface="Microsoft JhengHei"/>
+              </a:rPr>
+              <a:t>  搜「太洋」也找得到「太洋證券」</a:t>
+            </a:r>
+          </a:p>
+          <a:p>
+            <a:pPr algn="l">
+              <a:lnSpc>
+                <a:spcPct val="140000"/>
+              </a:lnSpc>
+            </a:pPr>
+            <a:r>
+              <a:rPr sz="1200" b="0">
+                <a:solidFill>
+                  <a:srgbClr val="1A1A1A"/>
+                </a:solidFill>
+                <a:latin typeface="Microsoft JhengHei"/>
+              </a:rPr>
+              <a:t>  → 中文沒空格的特殊處理</a:t>
+            </a:r>
+          </a:p>
+          <a:p>
+            <a:pPr algn="l">
+              <a:lnSpc>
+                <a:spcPct val="140000"/>
+              </a:lnSpc>
+            </a:pPr>
+            <a:r>
+              <a:rPr sz="1200" b="0">
+                <a:solidFill>
+                  <a:srgbClr val="1A1A1A"/>
+                </a:solidFill>
+                <a:latin typeface="Microsoft JhengHei"/>
+              </a:rPr>
               <a:t/>
             </a:r>
           </a:p>
@@ -24386,7 +24629,7 @@
                 </a:solidFill>
                 <a:latin typeface="Microsoft JhengHei"/>
               </a:rPr>
-              <a:t>② 知道你打不完整</a:t>
+              <a:t>③ 同義詞自動轉</a:t>
             </a:r>
           </a:p>
           <a:p>
@@ -24402,158 +24645,166 @@
                 </a:solidFill>
                 <a:latin typeface="Microsoft JhengHei"/>
               </a:rPr>
-              <a:t>  搜「太洋」也找得到「太洋證券」</a:t>
-            </a:r>
-          </a:p>
-          <a:p>
-            <a:pPr algn="l">
-              <a:lnSpc>
-                <a:spcPct val="140000"/>
-              </a:lnSpc>
-            </a:pPr>
-            <a:r>
-              <a:rPr sz="1200" b="0">
+              <a:t>  「客戶」「客人」「使用者」視為同一個詞</a:t>
+            </a:r>
+          </a:p>
+        </p:txBody>
+      </p:sp>
+      <p:cxnSp>
+        <p:nvCxnSpPr>
+          <p:cNvPr id="30" name="Connector 29"/>
+          <p:cNvCxnSpPr/>
+          <p:nvPr/>
+        </p:nvCxnSpPr>
+        <p:spPr>
+          <a:xfrm>
+            <a:off x="6583680" y="5440680"/>
+            <a:ext cx="4389120" cy="0"/>
+          </a:xfrm>
+          <a:prstGeom prst="line">
+            <a:avLst/>
+          </a:prstGeom>
+          <a:ln w="9525">
+            <a:solidFill>
+              <a:srgbClr val="C8C2B7"/>
+            </a:solidFill>
+          </a:ln>
+        </p:spPr>
+        <p:style>
+          <a:lnRef idx="2">
+            <a:schemeClr val="accent1"/>
+          </a:lnRef>
+          <a:fillRef idx="0">
+            <a:schemeClr val="accent1"/>
+          </a:fillRef>
+          <a:effectRef idx="1">
+            <a:schemeClr val="accent1"/>
+          </a:effectRef>
+          <a:fontRef idx="minor">
+            <a:schemeClr val="tx1"/>
+          </a:fontRef>
+        </p:style>
+      </p:cxnSp>
+      <p:sp>
+        <p:nvSpPr>
+          <p:cNvPr id="31" name="TextBox 30"/>
+          <p:cNvSpPr txBox="1"/>
+          <p:nvPr/>
+        </p:nvSpPr>
+        <p:spPr>
+          <a:xfrm>
+            <a:off x="6583680" y="5532120"/>
+            <a:ext cx="4663440" cy="320040"/>
+          </a:xfrm>
+          <a:prstGeom prst="rect">
+            <a:avLst/>
+          </a:prstGeom>
+          <a:noFill/>
+        </p:spPr>
+        <p:txBody>
+          <a:bodyPr wrap="square" lIns="0" rIns="0" tIns="0" bIns="0" anchor="t">
+            <a:spAutoFit/>
+          </a:bodyPr>
+          <a:lstStyle/>
+          <a:p>
+            <a:pPr algn="l">
+              <a:lnSpc>
+                <a:spcPct val="120000"/>
+              </a:lnSpc>
+            </a:pPr>
+            <a:r>
+              <a:rPr sz="1000" b="1">
+                <a:solidFill>
+                  <a:srgbClr val="E67E22"/>
+                </a:solidFill>
+                <a:latin typeface="Microsoft JhengHei"/>
+              </a:rPr>
+              <a:t>公式 (簡化版)</a:t>
+            </a:r>
+          </a:p>
+        </p:txBody>
+      </p:sp>
+      <p:sp>
+        <p:nvSpPr>
+          <p:cNvPr id="32" name="TextBox 31"/>
+          <p:cNvSpPr txBox="1"/>
+          <p:nvPr/>
+        </p:nvSpPr>
+        <p:spPr>
+          <a:xfrm>
+            <a:off x="6583680" y="5806440"/>
+            <a:ext cx="4663440" cy="320040"/>
+          </a:xfrm>
+          <a:prstGeom prst="rect">
+            <a:avLst/>
+          </a:prstGeom>
+          <a:noFill/>
+        </p:spPr>
+        <p:txBody>
+          <a:bodyPr wrap="square" lIns="0" rIns="0" tIns="0" bIns="0" anchor="t">
+            <a:spAutoFit/>
+          </a:bodyPr>
+          <a:lstStyle/>
+          <a:p>
+            <a:pPr algn="l">
+              <a:lnSpc>
+                <a:spcPct val="120000"/>
+              </a:lnSpc>
+            </a:pPr>
+            <a:r>
+              <a:rPr sz="1000" b="1">
                 <a:solidFill>
                   <a:srgbClr val="1A1A1A"/>
                 </a:solidFill>
-                <a:latin typeface="Microsoft JhengHei"/>
-              </a:rPr>
-              <a:t>  搜「林聿」也找得到「林聿平」</a:t>
-            </a:r>
-          </a:p>
-          <a:p>
-            <a:pPr algn="l">
-              <a:lnSpc>
-                <a:spcPct val="140000"/>
-              </a:lnSpc>
-            </a:pPr>
-            <a:r>
-              <a:rPr sz="1200" b="0">
-                <a:solidFill>
-                  <a:srgbClr val="1A1A1A"/>
-                </a:solidFill>
-                <a:latin typeface="Microsoft JhengHei"/>
-              </a:rPr>
-              <a:t>  → 中文沒空格的特殊處理</a:t>
-            </a:r>
-          </a:p>
-          <a:p>
-            <a:pPr algn="l">
-              <a:lnSpc>
-                <a:spcPct val="140000"/>
-              </a:lnSpc>
-            </a:pPr>
-            <a:r>
-              <a:rPr sz="1200" b="0">
-                <a:solidFill>
-                  <a:srgbClr val="1A1A1A"/>
-                </a:solidFill>
-                <a:latin typeface="Microsoft JhengHei"/>
-              </a:rPr>
-              <a:t/>
-            </a:r>
-          </a:p>
-          <a:p>
-            <a:pPr algn="l">
-              <a:lnSpc>
-                <a:spcPct val="140000"/>
-              </a:lnSpc>
-            </a:pPr>
-            <a:r>
-              <a:rPr sz="1200" b="0">
-                <a:solidFill>
-                  <a:srgbClr val="1A1A1A"/>
-                </a:solidFill>
-                <a:latin typeface="Microsoft JhengHei"/>
-              </a:rPr>
-              <a:t>③ 同義詞自動轉</a:t>
-            </a:r>
-          </a:p>
-          <a:p>
-            <a:pPr algn="l">
-              <a:lnSpc>
-                <a:spcPct val="140000"/>
-              </a:lnSpc>
-            </a:pPr>
-            <a:r>
-              <a:rPr sz="1200" b="0">
-                <a:solidFill>
-                  <a:srgbClr val="1A1A1A"/>
-                </a:solidFill>
-                <a:latin typeface="Microsoft JhengHei"/>
-              </a:rPr>
-              <a:t>  「客戶」「客人」「使用者」</a:t>
-            </a:r>
-          </a:p>
-          <a:p>
-            <a:pPr algn="l">
-              <a:lnSpc>
-                <a:spcPct val="140000"/>
-              </a:lnSpc>
-            </a:pPr>
-            <a:r>
-              <a:rPr sz="1200" b="0">
-                <a:solidFill>
-                  <a:srgbClr val="1A1A1A"/>
-                </a:solidFill>
-                <a:latin typeface="Microsoft JhengHei"/>
-              </a:rPr>
-              <a:t>  視為同一個詞</a:t>
-            </a:r>
-          </a:p>
-          <a:p>
-            <a:pPr algn="l">
-              <a:lnSpc>
-                <a:spcPct val="140000"/>
-              </a:lnSpc>
-            </a:pPr>
-            <a:r>
-              <a:rPr sz="1200" b="0">
-                <a:solidFill>
-                  <a:srgbClr val="1A1A1A"/>
-                </a:solidFill>
-                <a:latin typeface="Microsoft JhengHei"/>
-              </a:rPr>
-              <a:t/>
-            </a:r>
-          </a:p>
-          <a:p>
-            <a:pPr algn="l">
-              <a:lnSpc>
-                <a:spcPct val="140000"/>
-              </a:lnSpc>
-            </a:pPr>
-            <a:r>
-              <a:rPr sz="1200" b="0">
-                <a:solidFill>
-                  <a:srgbClr val="1A1A1A"/>
-                </a:solidFill>
-                <a:latin typeface="Microsoft JhengHei"/>
-              </a:rPr>
-              <a:t>命中率比一般搜尋提升 93%</a:t>
-            </a:r>
-          </a:p>
-          <a:p>
-            <a:pPr algn="l">
-              <a:lnSpc>
-                <a:spcPct val="140000"/>
-              </a:lnSpc>
-            </a:pPr>
-            <a:r>
-              <a:rPr sz="1200" b="0">
-                <a:solidFill>
-                  <a:srgbClr val="1A1A1A"/>
-                </a:solidFill>
-                <a:latin typeface="Microsoft JhengHei"/>
-              </a:rPr>
-              <a:t>(0.42 → 0.81)</a:t>
-            </a:r>
-          </a:p>
-        </p:txBody>
-      </p:sp>
-      <p:sp>
-        <p:nvSpPr>
-          <p:cNvPr id="30" name="TextBox 29"/>
+                <a:latin typeface="Consolas"/>
+              </a:rPr>
+              <a:t>score = Σ wᶠ · IDF · TF / (TF + k₁(1−b+b·dl/avgdl))</a:t>
+            </a:r>
+          </a:p>
+        </p:txBody>
+      </p:sp>
+      <p:sp>
+        <p:nvSpPr>
+          <p:cNvPr id="33" name="TextBox 32"/>
+          <p:cNvSpPr txBox="1"/>
+          <p:nvPr/>
+        </p:nvSpPr>
+        <p:spPr>
+          <a:xfrm>
+            <a:off x="6583680" y="6080760"/>
+            <a:ext cx="4663440" cy="320040"/>
+          </a:xfrm>
+          <a:prstGeom prst="rect">
+            <a:avLst/>
+          </a:prstGeom>
+          <a:noFill/>
+        </p:spPr>
+        <p:txBody>
+          <a:bodyPr wrap="square" lIns="0" rIns="0" tIns="0" bIns="0" anchor="t">
+            <a:spAutoFit/>
+          </a:bodyPr>
+          <a:lstStyle/>
+          <a:p>
+            <a:pPr algn="l">
+              <a:lnSpc>
+                <a:spcPct val="120000"/>
+              </a:lnSpc>
+            </a:pPr>
+            <a:r>
+              <a:rPr sz="900" b="0">
+                <a:solidFill>
+                  <a:srgbClr val="6B6B6B"/>
+                </a:solidFill>
+                <a:latin typeface="Microsoft JhengHei"/>
+              </a:rPr>
+              <a:t>欄位加權 × 詞稀有度 × 詞頻飽和 × 長度修正</a:t>
+            </a:r>
+          </a:p>
+        </p:txBody>
+      </p:sp>
+      <p:sp>
+        <p:nvSpPr>
+          <p:cNvPr id="34" name="TextBox 33"/>
           <p:cNvSpPr txBox="1"/>
           <p:nvPr/>
         </p:nvSpPr>
@@ -24592,7 +24843,7 @@
       </p:sp>
       <p:sp>
         <p:nvSpPr>
-          <p:cNvPr id="31" name="TextBox 30"/>
+          <p:cNvPr id="35" name="TextBox 34"/>
           <p:cNvSpPr txBox="1"/>
           <p:nvPr/>
         </p:nvSpPr>

--- a/docs/串連系統_簡報.pptx
+++ b/docs/串連系統_簡報.pptx
@@ -15967,7 +15967,7 @@
                 </a:solidFill>
                 <a:latin typeface="Microsoft JhengHei"/>
               </a:rPr>
-              <a:t>情境與動機</a:t>
+              <a:t>合作對象與動機</a:t>
             </a:r>
           </a:p>
         </p:txBody>
@@ -16006,7 +16006,7 @@
                 </a:solidFill>
                 <a:latin typeface="Microsoft JhengHei"/>
               </a:rPr>
-              <a:t>為什麼把專案設定在「中型投資公司管理層」</a:t>
+              <a:t>與「串聯」中型投資公司實際合作 — 痛點來自 5 位管理層問卷</a:t>
             </a:r>
           </a:p>
         </p:txBody>
@@ -16088,7 +16088,7 @@
                 </a:solidFill>
                 <a:latin typeface="Microsoft JhengHei"/>
               </a:rPr>
-              <a:t>合作對象（情境設定）</a:t>
+              <a:t>合作公司 ──「串聯」</a:t>
             </a:r>
           </a:p>
         </p:txBody>
@@ -16127,7 +16127,7 @@
                 </a:solidFill>
                 <a:latin typeface="Microsoft JhengHei"/>
               </a:rPr>
-              <a:t>• 中型投資公司　|　17 員工　|　3 業務部門</a:t>
+              <a:t>• 中型投資公司　|　約 17 員工　|　3 業務部門</a:t>
             </a:r>
           </a:p>
           <a:p>
@@ -16385,7 +16385,7 @@
                 </a:solidFill>
                 <a:latin typeface="Microsoft JhengHei"/>
               </a:rPr>
-              <a:t>為什麼選這個情境</a:t>
+              <a:t>合作方式與動機</a:t>
             </a:r>
           </a:p>
         </p:txBody>
@@ -16424,7 +16424,7 @@
                 </a:solidFill>
                 <a:latin typeface="Microsoft JhengHei"/>
               </a:rPr>
-              <a:t>• 痛點明確</a:t>
+              <a:t>• 合作方式</a:t>
             </a:r>
           </a:p>
           <a:p>
@@ -16440,7 +16440,7 @@
                 </a:solidFill>
                 <a:latin typeface="Microsoft JhengHei"/>
               </a:rPr>
-              <a:t>    投資產業的決策密度高、結果可量化，</a:t>
+              <a:t>    ◦ 訪談對象：5 位管理層</a:t>
             </a:r>
           </a:p>
           <a:p>
@@ -16456,7 +16456,7 @@
                 </a:solidFill>
                 <a:latin typeface="Microsoft JhengHei"/>
               </a:rPr>
-              <a:t>    「資訊不對稱」造成的損失最容易展示。</a:t>
+              <a:t>    ◦ 形式：簡易結構化問卷</a:t>
             </a:r>
           </a:p>
           <a:p>
@@ -16472,6 +16472,22 @@
                 </a:solidFill>
                 <a:latin typeface="Microsoft JhengHei"/>
               </a:rPr>
+              <a:t>    ◦ 範圍：聚焦痛點蒐集</a:t>
+            </a:r>
+          </a:p>
+          <a:p>
+            <a:pPr algn="l">
+              <a:lnSpc>
+                <a:spcPct val="150000"/>
+              </a:lnSpc>
+            </a:pPr>
+            <a:r>
+              <a:rPr sz="1200" b="0">
+                <a:solidFill>
+                  <a:srgbClr val="1A1A1A"/>
+                </a:solidFill>
+                <a:latin typeface="Microsoft JhengHei"/>
+              </a:rPr>
               <a:t/>
             </a:r>
           </a:p>
@@ -16488,7 +16504,7 @@
                 </a:solidFill>
                 <a:latin typeface="Microsoft JhengHei"/>
               </a:rPr>
-              <a:t>• 場景熟悉</a:t>
+              <a:t>• 為什麼是「串聯」</a:t>
             </a:r>
           </a:p>
           <a:p>
@@ -16504,7 +16520,7 @@
                 </a:solidFill>
                 <a:latin typeface="Microsoft JhengHei"/>
               </a:rPr>
-              <a:t>    組員曾於投信／投顧暑期實習，</a:t>
+              <a:t>    投資產業決策密度高、跨部門協作</a:t>
             </a:r>
           </a:p>
           <a:p>
@@ -16520,7 +16536,7 @@
                 </a:solidFill>
                 <a:latin typeface="Microsoft JhengHei"/>
               </a:rPr>
-              <a:t>    對「主管憑直覺管理」有第一手觀察。</a:t>
+              <a:t>    頻繁，「主管憑直覺管理」的損失</a:t>
             </a:r>
           </a:p>
           <a:p>
@@ -16536,6 +16552,22 @@
                 </a:solidFill>
                 <a:latin typeface="Microsoft JhengHei"/>
               </a:rPr>
+              <a:t>    最容易被量化展示。</a:t>
+            </a:r>
+          </a:p>
+          <a:p>
+            <a:pPr algn="l">
+              <a:lnSpc>
+                <a:spcPct val="150000"/>
+              </a:lnSpc>
+            </a:pPr>
+            <a:r>
+              <a:rPr sz="1200" b="0">
+                <a:solidFill>
+                  <a:srgbClr val="1A1A1A"/>
+                </a:solidFill>
+                <a:latin typeface="Microsoft JhengHei"/>
+              </a:rPr>
               <a:t/>
             </a:r>
           </a:p>
@@ -16552,7 +16584,7 @@
                 </a:solidFill>
                 <a:latin typeface="Microsoft JhengHei"/>
               </a:rPr>
-              <a:t>• 系統可擴展</a:t>
+              <a:t>• 取得的資訊</a:t>
             </a:r>
           </a:p>
           <a:p>
@@ -16568,7 +16600,7 @@
                 </a:solidFill>
                 <a:latin typeface="Microsoft JhengHei"/>
               </a:rPr>
-              <a:t>    本系統不綁定產業，調整部門結構與</a:t>
+              <a:t>    ◦ 三大痛點（負載 / 卡點 / 決策）</a:t>
             </a:r>
           </a:p>
           <a:p>
@@ -16584,7 +16616,7 @@
                 </a:solidFill>
                 <a:latin typeface="Microsoft JhengHei"/>
               </a:rPr>
-              <a:t>    案件類型即可套用到顧問業、設計、</a:t>
+              <a:t>    ◦ 組織結構與角色定義</a:t>
             </a:r>
           </a:p>
           <a:p>
@@ -16600,7 +16632,7 @@
                 </a:solidFill>
                 <a:latin typeface="Microsoft JhengHei"/>
               </a:rPr>
-              <a:t>    R&amp;D 等中型組織。</a:t>
+              <a:t>    ◦ 未取得真實營運資料（保密）</a:t>
             </a:r>
           </a:p>
         </p:txBody>

--- a/docs/串連系統_簡報.pptx
+++ b/docs/串連系統_簡報.pptx
@@ -19330,15 +19330,13 @@
         </p:nvSpPr>
         <p:spPr>
           <a:xfrm>
-            <a:off x="6858000" y="548640"/>
-            <a:ext cx="4846320" cy="1280160"/>
-          </a:xfrm>
-          <a:prstGeom prst="rect">
-            <a:avLst/>
-          </a:prstGeom>
-          <a:solidFill>
-            <a:srgbClr val="E8E3DA"/>
-          </a:solidFill>
+            <a:off x="548640" y="1691640"/>
+            <a:ext cx="5120640" cy="2743200"/>
+          </a:xfrm>
+          <a:prstGeom prst="rect">
+            <a:avLst/>
+          </a:prstGeom>
+          <a:noFill/>
           <a:ln w="9525">
             <a:solidFill>
               <a:srgbClr val="C8C2B7"/>
@@ -19360,121 +19358,6 @@
           </a:fontRef>
         </p:style>
         <p:txBody>
-          <a:bodyPr rtlCol="0" anchor="t" lIns="164592" rIns="164592" tIns="91440" bIns="91440" wrap="square"/>
-          <a:lstStyle/>
-          <a:p>
-            <a:pPr algn="l">
-              <a:lnSpc>
-                <a:spcPct val="130000"/>
-              </a:lnSpc>
-            </a:pPr>
-            <a:r>
-              <a:rPr sz="900" b="1">
-                <a:solidFill>
-                  <a:srgbClr val="E67E22"/>
-                </a:solidFill>
-                <a:latin typeface="Microsoft JhengHei"/>
-              </a:rPr>
-              <a:t>演算法　</a:t>
-            </a:r>
-            <a:r>
-              <a:rPr sz="1000" b="0">
-                <a:solidFill>
-                  <a:srgbClr val="1A1A1A"/>
-                </a:solidFill>
-                <a:latin typeface="Microsoft JhengHei"/>
-              </a:rPr>
-              <a:t>經驗百分位 + 時間衰減 + Gini 不均度</a:t>
-            </a:r>
-          </a:p>
-          <a:p>
-            <a:pPr algn="l">
-              <a:lnSpc>
-                <a:spcPct val="130000"/>
-              </a:lnSpc>
-            </a:pPr>
-            <a:r>
-              <a:rPr sz="900" b="1">
-                <a:solidFill>
-                  <a:srgbClr val="E67E22"/>
-                </a:solidFill>
-                <a:latin typeface="Microsoft JhengHei"/>
-              </a:rPr>
-              <a:t>公式　</a:t>
-            </a:r>
-            <a:r>
-              <a:rPr sz="1000" b="0">
-                <a:solidFill>
-                  <a:srgbClr val="1A1A1A"/>
-                </a:solidFill>
-                <a:latin typeface="Consolas"/>
-              </a:rPr>
-              <a:t>Load = Σᵢ wᵢ · Countᵢ · e^(−tᵢ/14)</a:t>
-            </a:r>
-          </a:p>
-          <a:p>
-            <a:pPr algn="l">
-              <a:lnSpc>
-                <a:spcPct val="130000"/>
-              </a:lnSpc>
-            </a:pPr>
-            <a:r>
-              <a:rPr sz="900" b="1">
-                <a:solidFill>
-                  <a:srgbClr val="E67E22"/>
-                </a:solidFill>
-                <a:latin typeface="Microsoft JhengHei"/>
-              </a:rPr>
-              <a:t>解讀　</a:t>
-            </a:r>
-            <a:r>
-              <a:rPr sz="1000" b="0">
-                <a:solidFill>
-                  <a:srgbClr val="1A1A1A"/>
-                </a:solidFill>
-                <a:latin typeface="Microsoft JhengHei"/>
-              </a:rPr>
-              <a:t>每件事 × 重要性權重 × 時間打折，累加後排名</a:t>
-            </a:r>
-          </a:p>
-        </p:txBody>
-      </p:sp>
-      <p:sp>
-        <p:nvSpPr>
-          <p:cNvPr id="8" name="Rectangle 7"/>
-          <p:cNvSpPr/>
-          <p:nvPr/>
-        </p:nvSpPr>
-        <p:spPr>
-          <a:xfrm>
-            <a:off x="548640" y="1691640"/>
-            <a:ext cx="5120640" cy="2743200"/>
-          </a:xfrm>
-          <a:prstGeom prst="rect">
-            <a:avLst/>
-          </a:prstGeom>
-          <a:noFill/>
-          <a:ln w="9525">
-            <a:solidFill>
-              <a:srgbClr val="C8C2B7"/>
-            </a:solidFill>
-          </a:ln>
-        </p:spPr>
-        <p:style>
-          <a:lnRef idx="1">
-            <a:schemeClr val="accent1"/>
-          </a:lnRef>
-          <a:fillRef idx="3">
-            <a:schemeClr val="accent1"/>
-          </a:fillRef>
-          <a:effectRef idx="2">
-            <a:schemeClr val="accent1"/>
-          </a:effectRef>
-          <a:fontRef idx="minor">
-            <a:schemeClr val="lt1"/>
-          </a:fontRef>
-        </p:style>
-        <p:txBody>
           <a:bodyPr rtlCol="0" anchor="ctr"/>
           <a:lstStyle/>
           <a:p>
@@ -19484,7 +19367,7 @@
       </p:sp>
       <p:sp>
         <p:nvSpPr>
-          <p:cNvPr id="9" name="TextBox 8"/>
+          <p:cNvPr id="8" name="TextBox 7"/>
           <p:cNvSpPr txBox="1"/>
           <p:nvPr/>
         </p:nvSpPr>
@@ -19523,7 +19406,7 @@
       </p:sp>
       <p:sp>
         <p:nvSpPr>
-          <p:cNvPr id="10" name="TextBox 9"/>
+          <p:cNvPr id="9" name="TextBox 8"/>
           <p:cNvSpPr txBox="1"/>
           <p:nvPr/>
         </p:nvSpPr>
@@ -19610,7 +19493,7 @@
       </p:sp>
       <p:sp>
         <p:nvSpPr>
-          <p:cNvPr id="11" name="Rectangle 10"/>
+          <p:cNvPr id="10" name="Rectangle 9"/>
           <p:cNvSpPr/>
           <p:nvPr/>
         </p:nvSpPr>
@@ -19655,7 +19538,7 @@
       </p:sp>
       <p:sp>
         <p:nvSpPr>
-          <p:cNvPr id="12" name="Rectangle 11"/>
+          <p:cNvPr id="11" name="Rectangle 10"/>
           <p:cNvSpPr/>
           <p:nvPr/>
         </p:nvSpPr>
@@ -19698,7 +19581,7 @@
       </p:sp>
       <p:sp>
         <p:nvSpPr>
-          <p:cNvPr id="13" name="TextBox 12"/>
+          <p:cNvPr id="12" name="TextBox 11"/>
           <p:cNvSpPr txBox="1"/>
           <p:nvPr/>
         </p:nvSpPr>
@@ -19737,7 +19620,7 @@
       </p:sp>
       <p:sp>
         <p:nvSpPr>
-          <p:cNvPr id="14" name="TextBox 13"/>
+          <p:cNvPr id="13" name="TextBox 12"/>
           <p:cNvSpPr txBox="1"/>
           <p:nvPr/>
         </p:nvSpPr>
@@ -19904,7 +19787,7 @@
       </p:sp>
       <p:sp>
         <p:nvSpPr>
-          <p:cNvPr id="15" name="Rectangle 14"/>
+          <p:cNvPr id="14" name="Rectangle 13"/>
           <p:cNvSpPr/>
           <p:nvPr/>
         </p:nvSpPr>
@@ -19949,7 +19832,7 @@
       </p:sp>
       <p:sp>
         <p:nvSpPr>
-          <p:cNvPr id="16" name="Rectangle 15"/>
+          <p:cNvPr id="15" name="Rectangle 14"/>
           <p:cNvSpPr/>
           <p:nvPr/>
         </p:nvSpPr>
@@ -19992,7 +19875,7 @@
       </p:sp>
       <p:sp>
         <p:nvSpPr>
-          <p:cNvPr id="17" name="TextBox 16"/>
+          <p:cNvPr id="16" name="TextBox 15"/>
           <p:cNvSpPr txBox="1"/>
           <p:nvPr/>
         </p:nvSpPr>
@@ -20031,7 +19914,7 @@
       </p:sp>
       <p:sp>
         <p:nvSpPr>
-          <p:cNvPr id="18" name="TextBox 17"/>
+          <p:cNvPr id="17" name="TextBox 16"/>
           <p:cNvSpPr txBox="1"/>
           <p:nvPr/>
         </p:nvSpPr>
@@ -20214,7 +20097,7 @@
       </p:sp>
       <p:sp>
         <p:nvSpPr>
-          <p:cNvPr id="19" name="TextBox 18"/>
+          <p:cNvPr id="18" name="TextBox 17"/>
           <p:cNvSpPr txBox="1"/>
           <p:nvPr/>
         </p:nvSpPr>
@@ -20253,7 +20136,7 @@
       </p:sp>
       <p:sp>
         <p:nvSpPr>
-          <p:cNvPr id="20" name="Rectangle 19"/>
+          <p:cNvPr id="19" name="Rectangle 18"/>
           <p:cNvSpPr/>
           <p:nvPr/>
         </p:nvSpPr>
@@ -20296,7 +20179,7 @@
       </p:sp>
       <p:sp>
         <p:nvSpPr>
-          <p:cNvPr id="21" name="Rectangle 20"/>
+          <p:cNvPr id="20" name="Rectangle 19"/>
           <p:cNvSpPr/>
           <p:nvPr/>
         </p:nvSpPr>
@@ -20339,7 +20222,7 @@
       </p:sp>
       <p:sp>
         <p:nvSpPr>
-          <p:cNvPr id="22" name="TextBox 21"/>
+          <p:cNvPr id="21" name="TextBox 20"/>
           <p:cNvSpPr txBox="1"/>
           <p:nvPr/>
         </p:nvSpPr>
@@ -20378,7 +20261,7 @@
       </p:sp>
       <p:sp>
         <p:nvSpPr>
-          <p:cNvPr id="23" name="TextBox 22"/>
+          <p:cNvPr id="22" name="TextBox 21"/>
           <p:cNvSpPr txBox="1"/>
           <p:nvPr/>
         </p:nvSpPr>
@@ -20417,7 +20300,7 @@
       </p:sp>
       <p:sp>
         <p:nvSpPr>
-          <p:cNvPr id="24" name="TextBox 23"/>
+          <p:cNvPr id="23" name="TextBox 22"/>
           <p:cNvSpPr txBox="1"/>
           <p:nvPr/>
         </p:nvSpPr>
@@ -20488,7 +20371,7 @@
       </p:sp>
       <p:sp>
         <p:nvSpPr>
-          <p:cNvPr id="25" name="Rectangle 24"/>
+          <p:cNvPr id="24" name="Rectangle 23"/>
           <p:cNvSpPr/>
           <p:nvPr/>
         </p:nvSpPr>
@@ -20531,7 +20414,7 @@
       </p:sp>
       <p:sp>
         <p:nvSpPr>
-          <p:cNvPr id="26" name="Rectangle 25"/>
+          <p:cNvPr id="25" name="Rectangle 24"/>
           <p:cNvSpPr/>
           <p:nvPr/>
         </p:nvSpPr>
@@ -20574,7 +20457,7 @@
       </p:sp>
       <p:sp>
         <p:nvSpPr>
-          <p:cNvPr id="27" name="TextBox 26"/>
+          <p:cNvPr id="26" name="TextBox 25"/>
           <p:cNvSpPr txBox="1"/>
           <p:nvPr/>
         </p:nvSpPr>
@@ -20613,7 +20496,7 @@
       </p:sp>
       <p:sp>
         <p:nvSpPr>
-          <p:cNvPr id="28" name="TextBox 27"/>
+          <p:cNvPr id="27" name="TextBox 26"/>
           <p:cNvSpPr txBox="1"/>
           <p:nvPr/>
         </p:nvSpPr>
@@ -20652,7 +20535,7 @@
       </p:sp>
       <p:sp>
         <p:nvSpPr>
-          <p:cNvPr id="29" name="TextBox 28"/>
+          <p:cNvPr id="28" name="TextBox 27"/>
           <p:cNvSpPr txBox="1"/>
           <p:nvPr/>
         </p:nvSpPr>
@@ -20723,7 +20606,7 @@
       </p:sp>
       <p:sp>
         <p:nvSpPr>
-          <p:cNvPr id="30" name="Rectangle 29"/>
+          <p:cNvPr id="29" name="Rectangle 28"/>
           <p:cNvSpPr/>
           <p:nvPr/>
         </p:nvSpPr>
@@ -20766,7 +20649,7 @@
       </p:sp>
       <p:sp>
         <p:nvSpPr>
-          <p:cNvPr id="31" name="Rectangle 30"/>
+          <p:cNvPr id="30" name="Rectangle 29"/>
           <p:cNvSpPr/>
           <p:nvPr/>
         </p:nvSpPr>
@@ -20809,7 +20692,7 @@
       </p:sp>
       <p:sp>
         <p:nvSpPr>
-          <p:cNvPr id="32" name="TextBox 31"/>
+          <p:cNvPr id="31" name="TextBox 30"/>
           <p:cNvSpPr txBox="1"/>
           <p:nvPr/>
         </p:nvSpPr>
@@ -20848,7 +20731,7 @@
       </p:sp>
       <p:sp>
         <p:nvSpPr>
-          <p:cNvPr id="33" name="TextBox 32"/>
+          <p:cNvPr id="32" name="TextBox 31"/>
           <p:cNvSpPr txBox="1"/>
           <p:nvPr/>
         </p:nvSpPr>
@@ -20887,7 +20770,7 @@
       </p:sp>
       <p:sp>
         <p:nvSpPr>
-          <p:cNvPr id="34" name="TextBox 33"/>
+          <p:cNvPr id="33" name="TextBox 32"/>
           <p:cNvSpPr txBox="1"/>
           <p:nvPr/>
         </p:nvSpPr>
@@ -20958,7 +20841,7 @@
       </p:sp>
       <p:sp>
         <p:nvSpPr>
-          <p:cNvPr id="35" name="TextBox 34"/>
+          <p:cNvPr id="34" name="TextBox 33"/>
           <p:cNvSpPr txBox="1"/>
           <p:nvPr/>
         </p:nvSpPr>
@@ -20997,7 +20880,7 @@
       </p:sp>
       <p:sp>
         <p:nvSpPr>
-          <p:cNvPr id="36" name="TextBox 35"/>
+          <p:cNvPr id="35" name="TextBox 34"/>
           <p:cNvSpPr txBox="1"/>
           <p:nvPr/>
         </p:nvSpPr>
@@ -21263,15 +21146,13 @@
         </p:nvSpPr>
         <p:spPr>
           <a:xfrm>
-            <a:off x="6858000" y="548640"/>
-            <a:ext cx="4846320" cy="411480"/>
-          </a:xfrm>
-          <a:prstGeom prst="rect">
-            <a:avLst/>
-          </a:prstGeom>
-          <a:solidFill>
-            <a:srgbClr val="E8E3DA"/>
-          </a:solidFill>
+            <a:off x="548640" y="1691640"/>
+            <a:ext cx="5120640" cy="2743200"/>
+          </a:xfrm>
+          <a:prstGeom prst="rect">
+            <a:avLst/>
+          </a:prstGeom>
+          <a:noFill/>
           <a:ln w="9525">
             <a:solidFill>
               <a:srgbClr val="C8C2B7"/>
@@ -21293,71 +21174,6 @@
           </a:fontRef>
         </p:style>
         <p:txBody>
-          <a:bodyPr rtlCol="0" anchor="t" lIns="164592" rIns="164592" tIns="91440" bIns="91440" wrap="square"/>
-          <a:lstStyle/>
-          <a:p>
-            <a:pPr algn="l">
-              <a:lnSpc>
-                <a:spcPct val="130000"/>
-              </a:lnSpc>
-            </a:pPr>
-            <a:r>
-              <a:rPr sz="900" b="1">
-                <a:solidFill>
-                  <a:srgbClr val="E67E22"/>
-                </a:solidFill>
-                <a:latin typeface="Microsoft JhengHei"/>
-              </a:rPr>
-              <a:t>演算法　</a:t>
-            </a:r>
-            <a:r>
-              <a:rPr sz="1000" b="0">
-                <a:solidFill>
-                  <a:srgbClr val="1A1A1A"/>
-                </a:solidFill>
-                <a:latin typeface="Microsoft JhengHei"/>
-              </a:rPr>
-              <a:t>六維加權評分 + 不對稱偵測</a:t>
-            </a:r>
-          </a:p>
-        </p:txBody>
-      </p:sp>
-      <p:sp>
-        <p:nvSpPr>
-          <p:cNvPr id="8" name="Rectangle 7"/>
-          <p:cNvSpPr/>
-          <p:nvPr/>
-        </p:nvSpPr>
-        <p:spPr>
-          <a:xfrm>
-            <a:off x="548640" y="1691640"/>
-            <a:ext cx="5120640" cy="2743200"/>
-          </a:xfrm>
-          <a:prstGeom prst="rect">
-            <a:avLst/>
-          </a:prstGeom>
-          <a:noFill/>
-          <a:ln w="9525">
-            <a:solidFill>
-              <a:srgbClr val="C8C2B7"/>
-            </a:solidFill>
-          </a:ln>
-        </p:spPr>
-        <p:style>
-          <a:lnRef idx="1">
-            <a:schemeClr val="accent1"/>
-          </a:lnRef>
-          <a:fillRef idx="3">
-            <a:schemeClr val="accent1"/>
-          </a:fillRef>
-          <a:effectRef idx="2">
-            <a:schemeClr val="accent1"/>
-          </a:effectRef>
-          <a:fontRef idx="minor">
-            <a:schemeClr val="lt1"/>
-          </a:fontRef>
-        </p:style>
-        <p:txBody>
           <a:bodyPr rtlCol="0" anchor="ctr"/>
           <a:lstStyle/>
           <a:p>
@@ -21367,7 +21183,7 @@
       </p:sp>
       <p:sp>
         <p:nvSpPr>
-          <p:cNvPr id="9" name="TextBox 8"/>
+          <p:cNvPr id="8" name="TextBox 7"/>
           <p:cNvSpPr txBox="1"/>
           <p:nvPr/>
         </p:nvSpPr>
@@ -21406,7 +21222,7 @@
       </p:sp>
       <p:sp>
         <p:nvSpPr>
-          <p:cNvPr id="10" name="TextBox 9"/>
+          <p:cNvPr id="9" name="TextBox 8"/>
           <p:cNvSpPr txBox="1"/>
           <p:nvPr/>
         </p:nvSpPr>
@@ -21493,7 +21309,7 @@
       </p:sp>
       <p:sp>
         <p:nvSpPr>
-          <p:cNvPr id="11" name="Rectangle 10"/>
+          <p:cNvPr id="10" name="Rectangle 9"/>
           <p:cNvSpPr/>
           <p:nvPr/>
         </p:nvSpPr>
@@ -21538,7 +21354,7 @@
       </p:sp>
       <p:sp>
         <p:nvSpPr>
-          <p:cNvPr id="12" name="Rectangle 11"/>
+          <p:cNvPr id="11" name="Rectangle 10"/>
           <p:cNvSpPr/>
           <p:nvPr/>
         </p:nvSpPr>
@@ -21581,7 +21397,7 @@
       </p:sp>
       <p:sp>
         <p:nvSpPr>
-          <p:cNvPr id="13" name="TextBox 12"/>
+          <p:cNvPr id="12" name="TextBox 11"/>
           <p:cNvSpPr txBox="1"/>
           <p:nvPr/>
         </p:nvSpPr>
@@ -21620,7 +21436,7 @@
       </p:sp>
       <p:sp>
         <p:nvSpPr>
-          <p:cNvPr id="14" name="TextBox 13"/>
+          <p:cNvPr id="13" name="TextBox 12"/>
           <p:cNvSpPr txBox="1"/>
           <p:nvPr/>
         </p:nvSpPr>
@@ -21787,7 +21603,7 @@
       </p:sp>
       <p:sp>
         <p:nvSpPr>
-          <p:cNvPr id="15" name="Rectangle 14"/>
+          <p:cNvPr id="14" name="Rectangle 13"/>
           <p:cNvSpPr/>
           <p:nvPr/>
         </p:nvSpPr>
@@ -21832,7 +21648,7 @@
       </p:sp>
       <p:sp>
         <p:nvSpPr>
-          <p:cNvPr id="16" name="Rectangle 15"/>
+          <p:cNvPr id="15" name="Rectangle 14"/>
           <p:cNvSpPr/>
           <p:nvPr/>
         </p:nvSpPr>
@@ -21875,7 +21691,7 @@
       </p:sp>
       <p:sp>
         <p:nvSpPr>
-          <p:cNvPr id="17" name="TextBox 16"/>
+          <p:cNvPr id="16" name="TextBox 15"/>
           <p:cNvSpPr txBox="1"/>
           <p:nvPr/>
         </p:nvSpPr>
@@ -21914,7 +21730,7 @@
       </p:sp>
       <p:sp>
         <p:nvSpPr>
-          <p:cNvPr id="18" name="TextBox 17"/>
+          <p:cNvPr id="17" name="TextBox 16"/>
           <p:cNvSpPr txBox="1"/>
           <p:nvPr/>
         </p:nvSpPr>
@@ -22113,7 +21929,7 @@
       </p:sp>
       <p:sp>
         <p:nvSpPr>
-          <p:cNvPr id="19" name="TextBox 18"/>
+          <p:cNvPr id="18" name="TextBox 17"/>
           <p:cNvSpPr txBox="1"/>
           <p:nvPr/>
         </p:nvSpPr>
@@ -22152,7 +21968,7 @@
       </p:sp>
       <p:sp>
         <p:nvSpPr>
-          <p:cNvPr id="20" name="Rectangle 19"/>
+          <p:cNvPr id="19" name="Rectangle 18"/>
           <p:cNvSpPr/>
           <p:nvPr/>
         </p:nvSpPr>
@@ -22195,7 +22011,7 @@
       </p:sp>
       <p:sp>
         <p:nvSpPr>
-          <p:cNvPr id="21" name="Rectangle 20"/>
+          <p:cNvPr id="20" name="Rectangle 19"/>
           <p:cNvSpPr/>
           <p:nvPr/>
         </p:nvSpPr>
@@ -22238,7 +22054,7 @@
       </p:sp>
       <p:sp>
         <p:nvSpPr>
-          <p:cNvPr id="22" name="TextBox 21"/>
+          <p:cNvPr id="21" name="TextBox 20"/>
           <p:cNvSpPr txBox="1"/>
           <p:nvPr/>
         </p:nvSpPr>
@@ -22277,7 +22093,7 @@
       </p:sp>
       <p:sp>
         <p:nvSpPr>
-          <p:cNvPr id="23" name="TextBox 22"/>
+          <p:cNvPr id="22" name="TextBox 21"/>
           <p:cNvSpPr txBox="1"/>
           <p:nvPr/>
         </p:nvSpPr>
@@ -22316,7 +22132,7 @@
       </p:sp>
       <p:sp>
         <p:nvSpPr>
-          <p:cNvPr id="24" name="TextBox 23"/>
+          <p:cNvPr id="23" name="TextBox 22"/>
           <p:cNvSpPr txBox="1"/>
           <p:nvPr/>
         </p:nvSpPr>
@@ -22387,7 +22203,7 @@
       </p:sp>
       <p:sp>
         <p:nvSpPr>
-          <p:cNvPr id="25" name="Rectangle 24"/>
+          <p:cNvPr id="24" name="Rectangle 23"/>
           <p:cNvSpPr/>
           <p:nvPr/>
         </p:nvSpPr>
@@ -22430,7 +22246,7 @@
       </p:sp>
       <p:sp>
         <p:nvSpPr>
-          <p:cNvPr id="26" name="Rectangle 25"/>
+          <p:cNvPr id="25" name="Rectangle 24"/>
           <p:cNvSpPr/>
           <p:nvPr/>
         </p:nvSpPr>
@@ -22473,7 +22289,7 @@
       </p:sp>
       <p:sp>
         <p:nvSpPr>
-          <p:cNvPr id="27" name="TextBox 26"/>
+          <p:cNvPr id="26" name="TextBox 25"/>
           <p:cNvSpPr txBox="1"/>
           <p:nvPr/>
         </p:nvSpPr>
@@ -22512,7 +22328,7 @@
       </p:sp>
       <p:sp>
         <p:nvSpPr>
-          <p:cNvPr id="28" name="TextBox 27"/>
+          <p:cNvPr id="27" name="TextBox 26"/>
           <p:cNvSpPr txBox="1"/>
           <p:nvPr/>
         </p:nvSpPr>
@@ -22551,7 +22367,7 @@
       </p:sp>
       <p:sp>
         <p:nvSpPr>
-          <p:cNvPr id="29" name="TextBox 28"/>
+          <p:cNvPr id="28" name="TextBox 27"/>
           <p:cNvSpPr txBox="1"/>
           <p:nvPr/>
         </p:nvSpPr>
@@ -22622,7 +22438,7 @@
       </p:sp>
       <p:sp>
         <p:nvSpPr>
-          <p:cNvPr id="30" name="Rectangle 29"/>
+          <p:cNvPr id="29" name="Rectangle 28"/>
           <p:cNvSpPr/>
           <p:nvPr/>
         </p:nvSpPr>
@@ -22665,7 +22481,7 @@
       </p:sp>
       <p:sp>
         <p:nvSpPr>
-          <p:cNvPr id="31" name="Rectangle 30"/>
+          <p:cNvPr id="30" name="Rectangle 29"/>
           <p:cNvSpPr/>
           <p:nvPr/>
         </p:nvSpPr>
@@ -22708,7 +22524,7 @@
       </p:sp>
       <p:sp>
         <p:nvSpPr>
-          <p:cNvPr id="32" name="TextBox 31"/>
+          <p:cNvPr id="31" name="TextBox 30"/>
           <p:cNvSpPr txBox="1"/>
           <p:nvPr/>
         </p:nvSpPr>
@@ -22747,7 +22563,7 @@
       </p:sp>
       <p:sp>
         <p:nvSpPr>
-          <p:cNvPr id="33" name="TextBox 32"/>
+          <p:cNvPr id="32" name="TextBox 31"/>
           <p:cNvSpPr txBox="1"/>
           <p:nvPr/>
         </p:nvSpPr>
@@ -22786,7 +22602,7 @@
       </p:sp>
       <p:sp>
         <p:nvSpPr>
-          <p:cNvPr id="34" name="TextBox 33"/>
+          <p:cNvPr id="33" name="TextBox 32"/>
           <p:cNvSpPr txBox="1"/>
           <p:nvPr/>
         </p:nvSpPr>
@@ -22857,7 +22673,7 @@
       </p:sp>
       <p:sp>
         <p:nvSpPr>
-          <p:cNvPr id="35" name="TextBox 34"/>
+          <p:cNvPr id="34" name="TextBox 33"/>
           <p:cNvSpPr txBox="1"/>
           <p:nvPr/>
         </p:nvSpPr>
@@ -22896,7 +22712,7 @@
       </p:sp>
       <p:sp>
         <p:nvSpPr>
-          <p:cNvPr id="36" name="TextBox 35"/>
+          <p:cNvPr id="35" name="TextBox 34"/>
           <p:cNvSpPr txBox="1"/>
           <p:nvPr/>
         </p:nvSpPr>
@@ -23162,15 +22978,13 @@
         </p:nvSpPr>
         <p:spPr>
           <a:xfrm>
-            <a:off x="6858000" y="548640"/>
-            <a:ext cx="4846320" cy="1280160"/>
-          </a:xfrm>
-          <a:prstGeom prst="rect">
-            <a:avLst/>
-          </a:prstGeom>
-          <a:solidFill>
-            <a:srgbClr val="E8E3DA"/>
-          </a:solidFill>
+            <a:off x="548640" y="1691640"/>
+            <a:ext cx="5120640" cy="2743200"/>
+          </a:xfrm>
+          <a:prstGeom prst="rect">
+            <a:avLst/>
+          </a:prstGeom>
+          <a:noFill/>
           <a:ln w="9525">
             <a:solidFill>
               <a:srgbClr val="C8C2B7"/>
@@ -23192,121 +23006,6 @@
           </a:fontRef>
         </p:style>
         <p:txBody>
-          <a:bodyPr rtlCol="0" anchor="t" lIns="164592" rIns="164592" tIns="91440" bIns="91440" wrap="square"/>
-          <a:lstStyle/>
-          <a:p>
-            <a:pPr algn="l">
-              <a:lnSpc>
-                <a:spcPct val="130000"/>
-              </a:lnSpc>
-            </a:pPr>
-            <a:r>
-              <a:rPr sz="900" b="1">
-                <a:solidFill>
-                  <a:srgbClr val="E67E22"/>
-                </a:solidFill>
-                <a:latin typeface="Microsoft JhengHei"/>
-              </a:rPr>
-              <a:t>演算法　</a:t>
-            </a:r>
-            <a:r>
-              <a:rPr sz="1000" b="0">
-                <a:solidFill>
-                  <a:srgbClr val="1A1A1A"/>
-                </a:solidFill>
-                <a:latin typeface="Microsoft JhengHei"/>
-              </a:rPr>
-              <a:t>同期校準 (DiD) + 線性回歸</a:t>
-            </a:r>
-          </a:p>
-          <a:p>
-            <a:pPr algn="l">
-              <a:lnSpc>
-                <a:spcPct val="130000"/>
-              </a:lnSpc>
-            </a:pPr>
-            <a:r>
-              <a:rPr sz="900" b="1">
-                <a:solidFill>
-                  <a:srgbClr val="E67E22"/>
-                </a:solidFill>
-                <a:latin typeface="Microsoft JhengHei"/>
-              </a:rPr>
-              <a:t>公式　</a:t>
-            </a:r>
-            <a:r>
-              <a:rPr sz="1000" b="0">
-                <a:solidFill>
-                  <a:srgbClr val="1A1A1A"/>
-                </a:solidFill>
-                <a:latin typeface="Consolas"/>
-              </a:rPr>
-              <a:t>adjustedΔ = (after − before) − β·t</a:t>
-            </a:r>
-          </a:p>
-          <a:p>
-            <a:pPr algn="l">
-              <a:lnSpc>
-                <a:spcPct val="130000"/>
-              </a:lnSpc>
-            </a:pPr>
-            <a:r>
-              <a:rPr sz="900" b="1">
-                <a:solidFill>
-                  <a:srgbClr val="E67E22"/>
-                </a:solidFill>
-                <a:latin typeface="Microsoft JhengHei"/>
-              </a:rPr>
-              <a:t>解讀　</a:t>
-            </a:r>
-            <a:r>
-              <a:rPr sz="1000" b="0">
-                <a:solidFill>
-                  <a:srgbClr val="1A1A1A"/>
-                </a:solidFill>
-                <a:latin typeface="Microsoft JhengHei"/>
-              </a:rPr>
-              <a:t>原始差扣掉「大盤本來會走到的位置」</a:t>
-            </a:r>
-          </a:p>
-        </p:txBody>
-      </p:sp>
-      <p:sp>
-        <p:nvSpPr>
-          <p:cNvPr id="8" name="Rectangle 7"/>
-          <p:cNvSpPr/>
-          <p:nvPr/>
-        </p:nvSpPr>
-        <p:spPr>
-          <a:xfrm>
-            <a:off x="548640" y="1691640"/>
-            <a:ext cx="5120640" cy="2743200"/>
-          </a:xfrm>
-          <a:prstGeom prst="rect">
-            <a:avLst/>
-          </a:prstGeom>
-          <a:noFill/>
-          <a:ln w="9525">
-            <a:solidFill>
-              <a:srgbClr val="C8C2B7"/>
-            </a:solidFill>
-          </a:ln>
-        </p:spPr>
-        <p:style>
-          <a:lnRef idx="1">
-            <a:schemeClr val="accent1"/>
-          </a:lnRef>
-          <a:fillRef idx="3">
-            <a:schemeClr val="accent1"/>
-          </a:fillRef>
-          <a:effectRef idx="2">
-            <a:schemeClr val="accent1"/>
-          </a:effectRef>
-          <a:fontRef idx="minor">
-            <a:schemeClr val="lt1"/>
-          </a:fontRef>
-        </p:style>
-        <p:txBody>
           <a:bodyPr rtlCol="0" anchor="ctr"/>
           <a:lstStyle/>
           <a:p>
@@ -23316,7 +23015,7 @@
       </p:sp>
       <p:sp>
         <p:nvSpPr>
-          <p:cNvPr id="9" name="TextBox 8"/>
+          <p:cNvPr id="8" name="TextBox 7"/>
           <p:cNvSpPr txBox="1"/>
           <p:nvPr/>
         </p:nvSpPr>
@@ -23355,7 +23054,7 @@
       </p:sp>
       <p:sp>
         <p:nvSpPr>
-          <p:cNvPr id="10" name="TextBox 9"/>
+          <p:cNvPr id="9" name="TextBox 8"/>
           <p:cNvSpPr txBox="1"/>
           <p:nvPr/>
         </p:nvSpPr>
@@ -23442,7 +23141,7 @@
       </p:sp>
       <p:sp>
         <p:nvSpPr>
-          <p:cNvPr id="11" name="Rectangle 10"/>
+          <p:cNvPr id="10" name="Rectangle 9"/>
           <p:cNvSpPr/>
           <p:nvPr/>
         </p:nvSpPr>
@@ -23487,7 +23186,7 @@
       </p:sp>
       <p:sp>
         <p:nvSpPr>
-          <p:cNvPr id="12" name="Rectangle 11"/>
+          <p:cNvPr id="11" name="Rectangle 10"/>
           <p:cNvSpPr/>
           <p:nvPr/>
         </p:nvSpPr>
@@ -23530,7 +23229,7 @@
       </p:sp>
       <p:sp>
         <p:nvSpPr>
-          <p:cNvPr id="13" name="TextBox 12"/>
+          <p:cNvPr id="12" name="TextBox 11"/>
           <p:cNvSpPr txBox="1"/>
           <p:nvPr/>
         </p:nvSpPr>
@@ -23569,7 +23268,7 @@
       </p:sp>
       <p:sp>
         <p:nvSpPr>
-          <p:cNvPr id="14" name="TextBox 13"/>
+          <p:cNvPr id="13" name="TextBox 12"/>
           <p:cNvSpPr txBox="1"/>
           <p:nvPr/>
         </p:nvSpPr>
@@ -23736,7 +23435,7 @@
       </p:sp>
       <p:sp>
         <p:nvSpPr>
-          <p:cNvPr id="15" name="Rectangle 14"/>
+          <p:cNvPr id="14" name="Rectangle 13"/>
           <p:cNvSpPr/>
           <p:nvPr/>
         </p:nvSpPr>
@@ -23781,7 +23480,7 @@
       </p:sp>
       <p:sp>
         <p:nvSpPr>
-          <p:cNvPr id="16" name="Rectangle 15"/>
+          <p:cNvPr id="15" name="Rectangle 14"/>
           <p:cNvSpPr/>
           <p:nvPr/>
         </p:nvSpPr>
@@ -23824,7 +23523,7 @@
       </p:sp>
       <p:sp>
         <p:nvSpPr>
-          <p:cNvPr id="17" name="TextBox 16"/>
+          <p:cNvPr id="16" name="TextBox 15"/>
           <p:cNvSpPr txBox="1"/>
           <p:nvPr/>
         </p:nvSpPr>
@@ -23863,7 +23562,7 @@
       </p:sp>
       <p:sp>
         <p:nvSpPr>
-          <p:cNvPr id="18" name="TextBox 17"/>
+          <p:cNvPr id="17" name="TextBox 16"/>
           <p:cNvSpPr txBox="1"/>
           <p:nvPr/>
         </p:nvSpPr>
@@ -24030,7 +23729,7 @@
       </p:sp>
       <p:sp>
         <p:nvSpPr>
-          <p:cNvPr id="19" name="TextBox 18"/>
+          <p:cNvPr id="18" name="TextBox 17"/>
           <p:cNvSpPr txBox="1"/>
           <p:nvPr/>
         </p:nvSpPr>
@@ -24069,7 +23768,7 @@
       </p:sp>
       <p:sp>
         <p:nvSpPr>
-          <p:cNvPr id="20" name="Rectangle 19"/>
+          <p:cNvPr id="19" name="Rectangle 18"/>
           <p:cNvSpPr/>
           <p:nvPr/>
         </p:nvSpPr>
@@ -24112,7 +23811,7 @@
       </p:sp>
       <p:sp>
         <p:nvSpPr>
-          <p:cNvPr id="21" name="Rectangle 20"/>
+          <p:cNvPr id="20" name="Rectangle 19"/>
           <p:cNvSpPr/>
           <p:nvPr/>
         </p:nvSpPr>
@@ -24155,7 +23854,7 @@
       </p:sp>
       <p:sp>
         <p:nvSpPr>
-          <p:cNvPr id="22" name="TextBox 21"/>
+          <p:cNvPr id="21" name="TextBox 20"/>
           <p:cNvSpPr txBox="1"/>
           <p:nvPr/>
         </p:nvSpPr>
@@ -24194,7 +23893,7 @@
       </p:sp>
       <p:sp>
         <p:nvSpPr>
-          <p:cNvPr id="23" name="TextBox 22"/>
+          <p:cNvPr id="22" name="TextBox 21"/>
           <p:cNvSpPr txBox="1"/>
           <p:nvPr/>
         </p:nvSpPr>
@@ -24233,7 +23932,7 @@
       </p:sp>
       <p:sp>
         <p:nvSpPr>
-          <p:cNvPr id="24" name="TextBox 23"/>
+          <p:cNvPr id="23" name="TextBox 22"/>
           <p:cNvSpPr txBox="1"/>
           <p:nvPr/>
         </p:nvSpPr>
@@ -24304,7 +24003,7 @@
       </p:sp>
       <p:sp>
         <p:nvSpPr>
-          <p:cNvPr id="25" name="Rectangle 24"/>
+          <p:cNvPr id="24" name="Rectangle 23"/>
           <p:cNvSpPr/>
           <p:nvPr/>
         </p:nvSpPr>
@@ -24347,7 +24046,7 @@
       </p:sp>
       <p:sp>
         <p:nvSpPr>
-          <p:cNvPr id="26" name="Rectangle 25"/>
+          <p:cNvPr id="25" name="Rectangle 24"/>
           <p:cNvSpPr/>
           <p:nvPr/>
         </p:nvSpPr>
@@ -24390,7 +24089,7 @@
       </p:sp>
       <p:sp>
         <p:nvSpPr>
-          <p:cNvPr id="27" name="TextBox 26"/>
+          <p:cNvPr id="26" name="TextBox 25"/>
           <p:cNvSpPr txBox="1"/>
           <p:nvPr/>
         </p:nvSpPr>
@@ -24429,7 +24128,7 @@
       </p:sp>
       <p:sp>
         <p:nvSpPr>
-          <p:cNvPr id="28" name="TextBox 27"/>
+          <p:cNvPr id="27" name="TextBox 26"/>
           <p:cNvSpPr txBox="1"/>
           <p:nvPr/>
         </p:nvSpPr>
@@ -24468,7 +24167,7 @@
       </p:sp>
       <p:sp>
         <p:nvSpPr>
-          <p:cNvPr id="29" name="TextBox 28"/>
+          <p:cNvPr id="28" name="TextBox 27"/>
           <p:cNvSpPr txBox="1"/>
           <p:nvPr/>
         </p:nvSpPr>
@@ -24539,7 +24238,7 @@
       </p:sp>
       <p:sp>
         <p:nvSpPr>
-          <p:cNvPr id="30" name="Rectangle 29"/>
+          <p:cNvPr id="29" name="Rectangle 28"/>
           <p:cNvSpPr/>
           <p:nvPr/>
         </p:nvSpPr>
@@ -24582,7 +24281,7 @@
       </p:sp>
       <p:sp>
         <p:nvSpPr>
-          <p:cNvPr id="31" name="Rectangle 30"/>
+          <p:cNvPr id="30" name="Rectangle 29"/>
           <p:cNvSpPr/>
           <p:nvPr/>
         </p:nvSpPr>
@@ -24625,7 +24324,7 @@
       </p:sp>
       <p:sp>
         <p:nvSpPr>
-          <p:cNvPr id="32" name="TextBox 31"/>
+          <p:cNvPr id="31" name="TextBox 30"/>
           <p:cNvSpPr txBox="1"/>
           <p:nvPr/>
         </p:nvSpPr>
@@ -24664,7 +24363,7 @@
       </p:sp>
       <p:sp>
         <p:nvSpPr>
-          <p:cNvPr id="33" name="TextBox 32"/>
+          <p:cNvPr id="32" name="TextBox 31"/>
           <p:cNvSpPr txBox="1"/>
           <p:nvPr/>
         </p:nvSpPr>
@@ -24703,7 +24402,7 @@
       </p:sp>
       <p:sp>
         <p:nvSpPr>
-          <p:cNvPr id="34" name="TextBox 33"/>
+          <p:cNvPr id="33" name="TextBox 32"/>
           <p:cNvSpPr txBox="1"/>
           <p:nvPr/>
         </p:nvSpPr>
@@ -24774,7 +24473,7 @@
       </p:sp>
       <p:sp>
         <p:nvSpPr>
-          <p:cNvPr id="35" name="TextBox 34"/>
+          <p:cNvPr id="34" name="TextBox 33"/>
           <p:cNvSpPr txBox="1"/>
           <p:nvPr/>
         </p:nvSpPr>
@@ -24813,7 +24512,7 @@
       </p:sp>
       <p:sp>
         <p:nvSpPr>
-          <p:cNvPr id="36" name="TextBox 35"/>
+          <p:cNvPr id="35" name="TextBox 34"/>
           <p:cNvSpPr txBox="1"/>
           <p:nvPr/>
         </p:nvSpPr>
